--- a/slides/Day1_Claude_for_Business.pptx
+++ b/slides/Day1_Claude_for_Business.pptx
@@ -685,107 +685,49 @@
           <a:lstStyle/>
           <a:p>
             <a:r>
-              <a:t>TIME: 3 min</a:t>
-            </a:r>
-          </a:p>
-          <a:p>
-            <a:endParaRPr/>
-          </a:p>
-          <a:p>
-            <a:r>
-              <a:t>OPEN WITH:</a:t>
-            </a:r>
-          </a:p>
-          <a:p>
-            <a:r>
-              <a:t>   Let me clarify what Claude can actually do - some older limitations no longer apply.</a:t>
-            </a:r>
-          </a:p>
-          <a:p>
-            <a:endParaRPr/>
-          </a:p>
-          <a:p>
-            <a:r>
-              <a:t>KEY POINTS:</a:t>
-            </a:r>
-          </a:p>
-          <a:p>
-            <a:r>
-              <a:t>   * Claude NOW has web search - can get current news, market data, weather, sports scores</a:t>
-            </a:r>
-          </a:p>
-          <a:p>
-            <a:r>
-              <a:t>   * Claude has memory across conversations - remembers context from previous chats</a:t>
-            </a:r>
-          </a:p>
-          <a:p>
-            <a:r>
-              <a:t>   * Knowledge cutoff is May 2025, but web search fills gaps for current information</a:t>
-            </a:r>
-          </a:p>
-          <a:p>
-            <a:r>
-              <a:t>   * 200K context window = ~500 pages of text in one conversation</a:t>
-            </a:r>
-          </a:p>
-          <a:p>
-            <a:r>
-              <a:t>   * Can analyze multiple files: PDFs, images, CSV, code - upload and ask</a:t>
-            </a:r>
-          </a:p>
-          <a:p>
-            <a:r>
-              <a:t>   * Best practices: Upload docs for highest accuracy (web search is backup), always verify critical facts (hallucination still possible), use Projects for ongoing work</a:t>
-            </a:r>
-          </a:p>
-          <a:p>
-            <a:r>
-              <a:t>   * The key shift: Claude is more capable than most people realize, but verification still matters</a:t>
-            </a:r>
-          </a:p>
-          <a:p>
-            <a:endParaRPr/>
-          </a:p>
-          <a:p>
-            <a:r>
-              <a:t>ASK THE CLASS:</a:t>
-            </a:r>
-          </a:p>
-          <a:p>
-            <a:r>
-              <a:t>   "What tasks have you avoided with AI because you thought it couldn't access current information?"</a:t>
-            </a:r>
-          </a:p>
-          <a:p>
-            <a:r>
-              <a:t>   [PAUSE for 30-60 seconds]</a:t>
-            </a:r>
-          </a:p>
-          <a:p>
-            <a:endParaRPr/>
-          </a:p>
-          <a:p>
-            <a:r>
-              <a:t>REAL-WORLD EXAMPLE:</a:t>
-            </a:r>
-          </a:p>
-          <a:p>
-            <a:r>
-              <a:t>   You can ask 'What's the current stock price for MSFT?' and Claude will search and tell you. BUT for financial decisions, upload your own data - higher accuracy than web sources.</a:t>
-            </a:r>
-          </a:p>
-          <a:p>
-            <a:endParaRPr/>
-          </a:p>
-          <a:p>
-            <a:r>
-              <a:t>TRANSITION:</a:t>
-            </a:r>
-          </a:p>
-          <a:p>
-            <a:r>
-              <a:t>   Now that you know what's possible, let's talk about Extended Thinking mode</a:t>
+              <a:t>DURATION: 3 min</a:t>
+            </a:r>
+          </a:p>
+          <a:p/>
+          <a:p>
+            <a:r>
+              <a:t>Let me ground these capabilities in real numbers.</a:t>
+            </a:r>
+          </a:p>
+          <a:p/>
+          <a:p>
+            <a:r>
+              <a:t>82 percent of enterprises now use generative AI weekly — that's up from 72 percent just last year. Global AI investment hit $225.8 billion in 2025, literally double the year before. This isn't a trend. This is a phase change.</a:t>
+            </a:r>
+          </a:p>
+          <a:p/>
+          <a:p>
+            <a:r>
+              <a:t>But here's the number that matters: only 5 percent of organizations have integrated AI at scale into their actual workflows. 82 percent are experimenting. 5 percent are operating. That gap — between experimenting and operating — is exactly what today's training closes.</a:t>
+            </a:r>
+          </a:p>
+          <a:p/>
+          <a:p>
+            <a:r>
+              <a:t>Newfront Insurance uses Claude for HR support, contract review, and knowledge management. They achieved 60 percent cost savings and reclaimed one month per year per employee. Not in theory — in production.</a:t>
+            </a:r>
+          </a:p>
+          <a:p/>
+          <a:p>
+            <a:r>
+              <a:t>Cognizant — 350,000 employees — adopted Claude in late 2025 for enterprise AI transformation. When a company that size makes that bet, pay attention.</a:t>
+            </a:r>
+          </a:p>
+          <a:p/>
+          <a:p>
+            <a:r>
+              <a:t>The coding and automation numbers are equally striking: 77 percent automation rate on coding and debugging tasks, the highest of any task category. Development teams report 30 percent faster PR cycles. And employees are 3 times more likely to use AI than their leaders expect — which means if you haven't rolled out a governed AI strategy, your people are already using ungoverned tools.</a:t>
+            </a:r>
+          </a:p>
+          <a:p/>
+          <a:p>
+            <a:r>
+              <a:t>SOURCES: Wharton 2025 AI Report, Vention 2026 Report, McKinsey, Anthropic case studies.</a:t>
             </a:r>
           </a:p>
         </p:txBody>
@@ -4569,107 +4511,49 @@
           <a:lstStyle/>
           <a:p>
             <a:r>
-              <a:t>TIME: 4 min</a:t>
-            </a:r>
-          </a:p>
-          <a:p>
-            <a:endParaRPr/>
-          </a:p>
-          <a:p>
-            <a:r>
-              <a:t>OPEN WITH:</a:t>
-            </a:r>
-          </a:p>
-          <a:p>
-            <a:r>
-              <a:t>   This is Frontier Recognition - knowing when AI can't help. The BCG study showed teams LOST 19% accuracy when they used AI on tasks it's bad at. Boundaries matter.</a:t>
-            </a:r>
-          </a:p>
-          <a:p>
-            <a:endParaRPr/>
-          </a:p>
-          <a:p>
-            <a:r>
-              <a:t>KEY POINTS:</a:t>
-            </a:r>
-          </a:p>
-          <a:p>
-            <a:r>
-              <a:t>   * Frontier Recognition = Skill #6 from our success framework</a:t>
-            </a:r>
-          </a:p>
-          <a:p>
-            <a:r>
-              <a:t>   * AI is a tool, not a decision-maker - you own the output</a:t>
-            </a:r>
-          </a:p>
-          <a:p>
-            <a:r>
-              <a:t>   * Red flag tasks: Legal advice, sensitive data, mission-critical decisions without verification</a:t>
-            </a:r>
-          </a:p>
-          <a:p>
-            <a:r>
-              <a:t>   * Claude CAN now do real-time lookups (news, prices, weather) - but always verify for high-stakes decisions</a:t>
-            </a:r>
-          </a:p>
-          <a:p>
-            <a:r>
-              <a:t>   * Green light tasks: Drafts, brainstorming, summarization, formatting, quick research</a:t>
-            </a:r>
-          </a:p>
-          <a:p>
-            <a:r>
-              <a:t>   * The rule: If you can't verify it or if stakes are high, human owns it (AI assists)</a:t>
-            </a:r>
-          </a:p>
-          <a:p>
-            <a:r>
-              <a:t>   * This prevents the 19% accuracy drop from misuse</a:t>
-            </a:r>
-          </a:p>
-          <a:p>
-            <a:endParaRPr/>
-          </a:p>
-          <a:p>
-            <a:r>
-              <a:t>ASK THE CLASS:</a:t>
-            </a:r>
-          </a:p>
-          <a:p>
-            <a:r>
-              <a:t>   "What's a task in your role where AI should assist but not decide?"</a:t>
-            </a:r>
-          </a:p>
-          <a:p>
-            <a:r>
-              <a:t>   [PAUSE for 30-60 seconds]</a:t>
-            </a:r>
-          </a:p>
-          <a:p>
-            <a:endParaRPr/>
-          </a:p>
-          <a:p>
-            <a:r>
-              <a:t>REAL-WORLD EXAMPLE:</a:t>
-            </a:r>
-          </a:p>
-          <a:p>
-            <a:r>
-              <a:t>   Contract review: Don't ask AI 'Is this contract good to sign?' (legal advice, high stakes). DO ask 'Summarize the key terms and flag any unusual clauses' (draft for lawyer review).</a:t>
-            </a:r>
-          </a:p>
-          <a:p>
-            <a:endParaRPr/>
-          </a:p>
-          <a:p>
-            <a:r>
-              <a:t>TRANSITION:</a:t>
-            </a:r>
-          </a:p>
-          <a:p>
-            <a:r>
-              <a:t>   With boundaries clear, let's practice these prompting skills in a lab</a:t>
+              <a:t>DURATION: 3 min</a:t>
+            </a:r>
+          </a:p>
+          <a:p/>
+          <a:p>
+            <a:r>
+              <a:t>This might be the most important slide in the deck.</a:t>
+            </a:r>
+          </a:p>
+          <a:p/>
+          <a:p>
+            <a:r>
+              <a:t>95 percent of enterprise AI projects fail to reach production. MIT's 2025 study — 150 leaders, 300 deployments. The number one root cause? No clear business problem. Companies buy AI and then figure out what to do with it. That's backwards.</a:t>
+            </a:r>
+          </a:p>
+          <a:p/>
+          <a:p>
+            <a:r>
+              <a:t>The second most common failure: unrealistic timelines. Executives demand 6-month ROI on something that realistically takes 18 to 36 months for full transformation. Quick wins? Absolutely — you can get those in 30 days. But enterprise-wide transformation requires sustained investment.</a:t>
+            </a:r>
+          </a:p>
+          <a:p/>
+          <a:p>
+            <a:r>
+              <a:t>Zillow's AI-powered home-buying algorithm is the cautionary tale. They trusted the model's real estate valuations without sufficient human oversight. Result: $500 million in losses and 25 percent of their workforce laid off.</a:t>
+            </a:r>
+          </a:p>
+          <a:p/>
+          <a:p>
+            <a:r>
+              <a:t>So when should you NOT use AI? When you can't define the success criteria. When the cost of being wrong exceeds the value of being fast. When you don't have a human review step. When the data isn't clean enough to trust.</a:t>
+            </a:r>
+          </a:p>
+          <a:p/>
+          <a:p>
+            <a:r>
+              <a:t>42 percent of firms now drop most AI projects before they reach production — that's up from 17 percent the prior year. Companies are learning that killing bad projects early is smarter than pushing failed experiments into production.</a:t>
+            </a:r>
+          </a:p>
+          <a:p/>
+          <a:p>
+            <a:r>
+              <a:t>The discipline to say "not this, not now" is what separates the 5 percent who succeed from the 95 percent who don't.</a:t>
             </a:r>
           </a:p>
         </p:txBody>
@@ -4739,107 +4623,55 @@
           <a:lstStyle/>
           <a:p>
             <a:r>
-              <a:t>TIME: 3 min</a:t>
-            </a:r>
-          </a:p>
-          <a:p>
-            <a:endParaRPr/>
-          </a:p>
-          <a:p>
-            <a:r>
-              <a:t>OPEN WITH:</a:t>
-            </a:r>
-          </a:p>
-          <a:p>
-            <a:r>
-              <a:t>   Before we dive into labs, let's address the elephant in the room: 'Is it safe to use Claude with company data?'</a:t>
-            </a:r>
-          </a:p>
-          <a:p>
-            <a:endParaRPr/>
-          </a:p>
-          <a:p>
-            <a:r>
-              <a:t>KEY POINTS:</a:t>
-            </a:r>
-          </a:p>
-          <a:p>
-            <a:r>
-              <a:t>   * Your conversations NOT used for training - this is contractual for Enterprise/Team</a:t>
-            </a:r>
-          </a:p>
-          <a:p>
-            <a:r>
-              <a:t>   * SOC 2 Type 2 certified, HIPAA-eligible, GDPR compliant - meets enterprise standards</a:t>
-            </a:r>
-          </a:p>
-          <a:p>
-            <a:r>
-              <a:t>   * Projects data (your custom instructions, uploaded files) stays within your org</a:t>
-            </a:r>
-          </a:p>
-          <a:p>
-            <a:r>
-              <a:t>   * 30-day retention for safety monitoring (abuse, illegal content), then deleted</a:t>
-            </a:r>
-          </a:p>
-          <a:p>
-            <a:r>
-              <a:t>   * Treat it like any cloud tool - don't paste passwords, API keys, SSN, credit cards</a:t>
-            </a:r>
-          </a:p>
-          <a:p>
-            <a:r>
-              <a:t>   * Enterprise plan adds: extended retention controls, SSO, detailed audit logs</a:t>
-            </a:r>
-          </a:p>
-          <a:p>
-            <a:r>
-              <a:t>   * Your IT team: anthropic.com/trust has full security documentation</a:t>
-            </a:r>
-          </a:p>
-          <a:p>
-            <a:endParaRPr/>
-          </a:p>
-          <a:p>
-            <a:r>
-              <a:t>ASK THE CLASS:</a:t>
-            </a:r>
-          </a:p>
-          <a:p>
-            <a:r>
-              <a:t>   "Anyone have security questions before we start working with real data in labs?"</a:t>
-            </a:r>
-          </a:p>
-          <a:p>
-            <a:r>
-              <a:t>   [PAUSE for 30-60 seconds]</a:t>
-            </a:r>
-          </a:p>
-          <a:p>
-            <a:endParaRPr/>
-          </a:p>
-          <a:p>
-            <a:r>
-              <a:t>REAL-WORLD EXAMPLE:</a:t>
-            </a:r>
-          </a:p>
-          <a:p>
-            <a:r>
-              <a:t>   Safe: Upload quarterly report for analysis. Not safe: Paste customer SSNs or employee salaries without anonymizing.</a:t>
-            </a:r>
-          </a:p>
-          <a:p>
-            <a:endParaRPr/>
-          </a:p>
-          <a:p>
-            <a:r>
-              <a:t>TRANSITION:</a:t>
-            </a:r>
-          </a:p>
-          <a:p>
-            <a:r>
-              <a:t>   With security addressed, let's practice with Lab 1</a:t>
+              <a:t>DURATION: 5 min</a:t>
+            </a:r>
+          </a:p>
+          <a:p/>
+          <a:p>
+            <a:r>
+              <a:t>This is the slide that matters to every IT leader and CISO in the room. Let me address the objections head-on.</a:t>
+            </a:r>
+          </a:p>
+          <a:p/>
+          <a:p>
+            <a:r>
+              <a:t>Objection one: "Our data goes to a third party." 76 percent of CISOs cite visibility gaps in GenAI environments. That's a real concern. Here's Anthropic's answer: Claude Enterprise offers data isolation, no-training guarantees on your data, and SOC 2 compliance. Your prompts and outputs are not used to train the model. Period.</a:t>
+            </a:r>
+          </a:p>
+          <a:p/>
+          <a:p>
+            <a:r>
+              <a:t>Objection two: "Shadow AI is already happening." This is the uncomfortable truth. 40 to 60 percent of code output in enterprises is already AI-generated, and much of it is untracked. 70 percent of organizations have more than 40 percent AI-generated code with no governance. The question isn't whether your people are using AI — they are. The question is whether you're governing it or ignoring it.</a:t>
+            </a:r>
+          </a:p>
+          <a:p/>
+          <a:p>
+            <a:r>
+              <a:t>Objection three: "Vibe coding — developers shipping code they don't understand." This is a legitimate risk. The fix isn't banning AI — it's training. Mandatory code reviews, static analysis in the IDE, and CLAUDE.md conventions that enforce your coding standards automatically.</a:t>
+            </a:r>
+          </a:p>
+          <a:p/>
+          <a:p>
+            <a:r>
+              <a:t>Objection four: compliance. SOC 2, HIPAA, FedRAMP. Anthropic's enterprise tier addresses data isolation, vendor audits, and no-retention policies. If Bridgewater Associates — under the strictest financial security standards in the world — trusts Claude, your compliance team can work with this.</a:t>
+            </a:r>
+          </a:p>
+          <a:p/>
+          <a:p>
+            <a:r>
+              <a:t>Objection five: over-privileged agents. Claude Code's permission model is read-only by default. Every file write, every terminal command requires explicit approval. Hooks give you PreToolUse and PostToolUse guardrails — automated gates that can block operations before they execute.</a:t>
+            </a:r>
+          </a:p>
+          <a:p/>
+          <a:p>
+            <a:r>
+              <a:t>The bottom line for your CISO: the risk isn't using AI. The risk is using AI without governance. 58 percent of CISOs feel unprepared to report AI risks to their board. This training — and the frameworks we're teaching — gives you something board-reportable.</a:t>
+            </a:r>
+          </a:p>
+          <a:p/>
+          <a:p>
+            <a:r>
+              <a:t>SOURCES: Checkmarx CISO survey, BeyondIdentity, Sentra, Cerbos enterprise research 2025-2026.</a:t>
             </a:r>
           </a:p>
         </p:txBody>
@@ -5370,74 +5202,43 @@
           <a:lstStyle/>
           <a:p>
             <a:r>
-              <a:t>TIME: 4 min</a:t>
-            </a:r>
-          </a:p>
-          <a:p>
-            <a:endParaRPr/>
-          </a:p>
-          <a:p>
-            <a:r>
-              <a:t>OPEN WITH:</a:t>
-            </a:r>
-          </a:p>
-          <a:p>
-            <a:r>
-              <a:t>   Think of these like cars: economy, mid-size, luxury. Different tools for different jobs.</a:t>
-            </a:r>
-          </a:p>
-          <a:p>
-            <a:endParaRPr/>
-          </a:p>
-          <a:p>
-            <a:r>
-              <a:t>KEY POINTS:</a:t>
-            </a:r>
-          </a:p>
-          <a:p>
-            <a:r>
-              <a:t>   * Haiku: Speed matters - quick summaries, lookups, simple tasks. Cheapest.</a:t>
-            </a:r>
-          </a:p>
-          <a:p>
-            <a:r>
-              <a:t>   * Sonnet: Your daily driver. Handles 90% of work. Good balance of quality and cost.</a:t>
-            </a:r>
-          </a:p>
-          <a:p>
-            <a:r>
-              <a:t>   * Opus: High stakes - board presentations, complex analysis, critical decisions. Most expensive.</a:t>
-            </a:r>
-          </a:p>
-          <a:p>
-            <a:r>
-              <a:t>   * You choose the model for each conversation - can switch mid-project</a:t>
-            </a:r>
-          </a:p>
-          <a:p>
-            <a:endParaRPr/>
-          </a:p>
-          <a:p>
-            <a:r>
-              <a:t>REAL-WORLD EXAMPLE:</a:t>
-            </a:r>
-          </a:p>
-          <a:p>
-            <a:r>
-              <a:t>   This morning I used Haiku to summarize my emails (30 seconds), Sonnet to draft a proposal (5 min), then Opus to review a contract (accuracy critical).</a:t>
-            </a:r>
-          </a:p>
-          <a:p>
-            <a:endParaRPr/>
-          </a:p>
-          <a:p>
-            <a:r>
-              <a:t>TRANSITION:</a:t>
-            </a:r>
-          </a:p>
-          <a:p>
-            <a:r>
-              <a:t>   When should you use each? Let's break it down</a:t>
+              <a:t>DURATION: 4 min</a:t>
+            </a:r>
+          </a:p>
+          <a:p/>
+          <a:p>
+            <a:r>
+              <a:t>Let me start with where Claude sits in the market. Anthropic now has over 300,000 business customers. 24 percent of major banks use Claude. 38 percent of retail and e-commerce chatbots are powered by Claude. 93 percent of companies are using AI in some form, and $225.8 billion was invested globally in AI in 2025 — literally double the year before.</a:t>
+            </a:r>
+          </a:p>
+          <a:p/>
+          <a:p>
+            <a:r>
+              <a:t>So this isn't emerging technology. This is the new infrastructure. And Claude is at the center of enterprise adoption.</a:t>
+            </a:r>
+          </a:p>
+          <a:p/>
+          <a:p>
+            <a:r>
+              <a:t>The model family gives you three tiers. Haiku is the fast, cheap option — use it for simple tasks where speed matters more than depth. Think quick summaries, classification, customer service responses. It responds in under a second and costs a fraction of the larger models.</a:t>
+            </a:r>
+          </a:p>
+          <a:p/>
+          <a:p>
+            <a:r>
+              <a:t>Sonnet is your daily driver. It balances intelligence with speed and cost. For 90 percent of business tasks — writing emails, analyzing documents, creating reports, building spreadsheets — Sonnet is the right choice. Most of what we'll do today uses Sonnet.</a:t>
+            </a:r>
+          </a:p>
+          <a:p/>
+          <a:p>
+            <a:r>
+              <a:t>Opus is the powerhouse. It handles complex reasoning, nuanced analysis, long documents, and multi-step problems. When you need to analyze a 50-page contract, build a financial model, or synthesize research from multiple sources, Opus is worth the extra cost and time. Bridgewater Associates — one of the world's largest hedge funds — uses Opus for investment research, cutting reporting time by 50 to 70 percent.</a:t>
+            </a:r>
+          </a:p>
+          <a:p/>
+          <a:p>
+            <a:r>
+              <a:t>The rule of thumb: start with Sonnet. Upgrade to Opus when the task requires deep reasoning. Use Haiku for high-volume simple tasks.</a:t>
             </a:r>
           </a:p>
         </p:txBody>
@@ -8738,48 +8539,31 @@
           <a:lstStyle/>
           <a:p>
             <a:r>
-              <a:t>TIME: 2 min</a:t>
-            </a:r>
-          </a:p>
-          <a:p>
-            <a:endParaRPr/>
-          </a:p>
-          <a:p>
-            <a:r>
-              <a:t>KEY POINTS:</a:t>
-            </a:r>
-          </a:p>
-          <a:p>
-            <a:r>
-              <a:t>   * You now have the foundation for using Claude effectively</a:t>
-            </a:r>
-          </a:p>
-          <a:p>
-            <a:r>
-              <a:t>   * Morning gave you the theory and framework</a:t>
-            </a:r>
-          </a:p>
-          <a:p>
-            <a:r>
-              <a:t>   * Afternoon gave you practical tools</a:t>
-            </a:r>
-          </a:p>
-          <a:p>
-            <a:r>
-              <a:t>   * Labs gave you hands-on practice</a:t>
-            </a:r>
-          </a:p>
-          <a:p>
-            <a:endParaRPr/>
-          </a:p>
-          <a:p>
-            <a:r>
-              <a:t>TRANSITION:</a:t>
-            </a:r>
-          </a:p>
-          <a:p>
-            <a:r>
-              <a:t>   Five key takeaways to remember</a:t>
+              <a:t>DURATION: 2 min</a:t>
+            </a:r>
+          </a:p>
+          <a:p/>
+          <a:p>
+            <a:r>
+              <a:t>Let's take stock. Today we covered the Claude model family and when to use each tier. We navigated the Claude.ai interface, set up Projects with custom instructions, and configured your Personal Preferences. We practiced prompt engineering with the GOLDEN framework and saw how iteration produces consistently better results.</a:t>
+            </a:r>
+          </a:p>
+          <a:p/>
+          <a:p>
+            <a:r>
+              <a:t>We explored Claude in Excel for formula assistance and data analysis. We built artifacts — documents, code, and diagrams that Claude creates as standalone deliverables. And we addressed the security and privacy model head-on, including the five objections your CISO will raise and the answers to each one.</a:t>
+            </a:r>
+          </a:p>
+          <a:p/>
+          <a:p>
+            <a:r>
+              <a:t>You now have practical skills that 40 percent of the US workforce is learning right now. The difference? You learned them systematically, with frameworks, not through trial and error.</a:t>
+            </a:r>
+          </a:p>
+          <a:p/>
+          <a:p>
+            <a:r>
+              <a:t>Remember the stat: 89 percent of leaders who implement AI properly agree it enhances rather than replaces employee skills. You're enhancing your skills today. Not being replaced by them.</a:t>
             </a:r>
           </a:p>
         </p:txBody>
@@ -8849,53 +8633,49 @@
           <a:lstStyle/>
           <a:p>
             <a:r>
-              <a:t>TIME: 3 min</a:t>
-            </a:r>
-          </a:p>
-          <a:p>
-            <a:endParaRPr/>
-          </a:p>
-          <a:p>
-            <a:r>
-              <a:t>KEY POINTS:</a:t>
-            </a:r>
-          </a:p>
-          <a:p>
-            <a:r>
-              <a:t>   * 1. Specificity: Vague prompts = vague outputs. Use GOLDEN when stuck.</a:t>
-            </a:r>
-          </a:p>
-          <a:p>
-            <a:r>
-              <a:t>   * 2. Projects: Set them up for monthly reports, client work, any recurring task.</a:t>
-            </a:r>
-          </a:p>
-          <a:p>
-            <a:r>
-              <a:t>   * 3. Iteration: First draft is rarely perfect - refine it.</a:t>
-            </a:r>
-          </a:p>
-          <a:p>
-            <a:r>
-              <a:t>   * 4. Excel add-in: Different from uploading files - it sees your spreadsheet context.</a:t>
-            </a:r>
-          </a:p>
-          <a:p>
-            <a:r>
-              <a:t>   * 5. Verification: You're still the expert - Claude is the assistant.</a:t>
-            </a:r>
-          </a:p>
-          <a:p>
-            <a:endParaRPr/>
-          </a:p>
-          <a:p>
-            <a:r>
-              <a:t>TRANSITION:</a:t>
-            </a:r>
-          </a:p>
-          <a:p>
-            <a:r>
-              <a:t>   Tomorrow preview for technical users</a:t>
+              <a:t>DURATION: 3 min</a:t>
+            </a:r>
+          </a:p>
+          <a:p/>
+          <a:p>
+            <a:r>
+              <a:t>Let me leave you with the framing that matters.</a:t>
+            </a:r>
+          </a:p>
+          <a:p/>
+          <a:p>
+            <a:r>
+              <a:t>95 percent of enterprise AI projects fail to reach production or deliver measurable ROI. That's MIT's 2025 finding from 150 leader interviews and 300 deployments. Global losses from failed AI projects hit $644 billion last year alone. Zillow's AI-powered home-buying algorithm cost them $500 million in losses and 25 percent of their workforce.</a:t>
+            </a:r>
+          </a:p>
+          <a:p/>
+          <a:p>
+            <a:r>
+              <a:t>These projects don't fail because the technology doesn't work. They fail because of implementation. No clear business problem. Unrealistic timelines. Poor integration with existing workflows. Lack of governance.</a:t>
+            </a:r>
+          </a:p>
+          <a:p/>
+          <a:p>
+            <a:r>
+              <a:t>Everything we covered today — the GOLDEN framework, Projects for organized context, Extended Thinking for complex analysis, the security model, the permission architecture — these are the implementation disciplines that separate the 5 percent who succeed from the 95 percent who don't.</a:t>
+            </a:r>
+          </a:p>
+          <a:p/>
+          <a:p>
+            <a:r>
+              <a:t>75 percent of leaders who DO implement AI properly see positive ROI. 89 percent agree it enhances rather than replaces employee skills. The technology works. The question is whether you have the discipline to implement it right.</a:t>
+            </a:r>
+          </a:p>
+          <a:p/>
+          <a:p>
+            <a:r>
+              <a:t>GitHub Copilot has a certification. It teaches you autocomplete. What we taught today — and what we'll go deeper on in Days 2 and 3 — covers autonomous agent development, memory architecture, multi-agent orchestration, and enterprise governance. Nobody else teaches this. You're in the 1 percent who will know how to actually use these tools.</a:t>
+            </a:r>
+          </a:p>
+          <a:p/>
+          <a:p>
+            <a:r>
+              <a:t>SOURCES: MIT 2025 State of AI, Fortune, Pythian Enterprise Research, Wharton 2025 AI Report.</a:t>
             </a:r>
           </a:p>
         </p:txBody>
@@ -9590,6 +9370,31 @@
 </p:notes>
 </file>
 
+<file path=ppt/notesSlides/notesSlide74.xml><?xml version="1.0" encoding="utf-8"?>
+<p:notes xmlns:a="http://schemas.openxmlformats.org/drawingml/2006/main" xmlns:p="http://schemas.openxmlformats.org/presentationml/2006/main" xmlns:r="http://schemas.openxmlformats.org/officeDocument/2006/relationships">
+  <p:cSld>
+    <p:spTree>
+      <p:nvGrpSpPr>
+        <p:cNvPr id="1" name=""/>
+        <p:cNvGrpSpPr/>
+        <p:nvPr/>
+      </p:nvGrpSpPr>
+      <p:grpSpPr>
+        <a:xfrm>
+          <a:off x="0" y="0"/>
+          <a:ext cx="0" cy="0"/>
+          <a:chOff x="0" y="0"/>
+          <a:chExt cx="0" cy="0"/>
+        </a:xfrm>
+      </p:grpSpPr>
+    </p:spTree>
+  </p:cSld>
+  <p:clrMapOvr>
+    <a:masterClrMapping/>
+  </p:clrMapOvr>
+</p:notes>
+</file>
+
 <file path=ppt/notesSlides/notesSlide8.xml><?xml version="1.0" encoding="utf-8"?>
 <p:notes xmlns:a="http://schemas.openxmlformats.org/drawingml/2006/main" xmlns:r="http://schemas.openxmlformats.org/officeDocument/2006/relationships" xmlns:p="http://schemas.openxmlformats.org/presentationml/2006/main">
   <p:cSld>
@@ -9635,66 +9440,55 @@
           <a:lstStyle/>
           <a:p>
             <a:r>
-              <a:t>TIME: 4 min</a:t>
-            </a:r>
-          </a:p>
-          <a:p>
-            <a:endParaRPr/>
-          </a:p>
-          <a:p>
-            <a:r>
-              <a:t>KEY POINTS:</a:t>
-            </a:r>
-          </a:p>
-          <a:p>
-            <a:r>
-              <a:t>   * Long context: Can read entire books (200K+ tokens). Upload your 300-page manual, ask questions.</a:t>
-            </a:r>
-          </a:p>
-          <a:p>
-            <a:r>
-              <a:t>   * Accurate: Lower hallucination rate. Won't make up facts as much as competitors.</a:t>
-            </a:r>
-          </a:p>
-          <a:p>
-            <a:r>
-              <a:t>   * Safe: Built for enterprise - safety controls, audit logs, data privacy.</a:t>
-            </a:r>
-          </a:p>
-          <a:p>
-            <a:r>
-              <a:t>   * Versatile: Code, writing, analysis, reasoning - does it all well.</a:t>
-            </a:r>
-          </a:p>
-          <a:p>
-            <a:r>
-              <a:t>   * Citations: When analyzing docs, shows you WHERE it found the info.</a:t>
-            </a:r>
-          </a:p>
-          <a:p>
-            <a:endParaRPr/>
-          </a:p>
-          <a:p>
-            <a:r>
-              <a:t>REAL-WORLD EXAMPLE:</a:t>
-            </a:r>
-          </a:p>
-          <a:p>
-            <a:r>
-              <a:t>   Last week a client uploaded their entire employee handbook (150 pages) and asked 'What's our policy on remote work?' Claude cited page 47 with the exact paragraph.</a:t>
-            </a:r>
-          </a:p>
-          <a:p>
-            <a:endParaRPr/>
-          </a:p>
-          <a:p>
-            <a:r>
-              <a:t>TRANSITION:</a:t>
-            </a:r>
-          </a:p>
-          <a:p>
-            <a:r>
-              <a:t>   Claude comes in multiple flavors - let's see the ecosystem</a:t>
+              <a:t>DURATION: 4 min</a:t>
+            </a:r>
+          </a:p>
+          <a:p/>
+          <a:p>
+            <a:r>
+              <a:t>Here's what makes Claude different from every other AI assistant on the market — and I'm going to give you the numbers to prove it.</a:t>
+            </a:r>
+          </a:p>
+          <a:p/>
+          <a:p>
+            <a:r>
+              <a:t>First, the enterprise story. TELUS — 57,000 employees — deployed Claude across their entire organization. Result? Half a million staff hours saved and over $90 million in business benefit. That's not a pilot. That's production at scale.</a:t>
+            </a:r>
+          </a:p>
+          <a:p/>
+          <a:p>
+            <a:r>
+              <a:t>Zapier built over 800 internal AI agents powered by Claude. Their adoption rate? 89 percent. That wasn't mandated from the top — it was organic. People chose to use it because it made them faster.</a:t>
+            </a:r>
+          </a:p>
+          <a:p/>
+          <a:p>
+            <a:r>
+              <a:t>Bridgewater Associates — one of the most secretive, security-conscious hedge funds in the world — uses Claude Opus for investment research. They cut reporting time by 50 to 70 percent with analyst-level precision. If Bridgewater trusts it with their financial models, that tells you something about the security posture.</a:t>
+            </a:r>
+          </a:p>
+          <a:p/>
+          <a:p>
+            <a:r>
+              <a:t>Now, competitive positioning. GitHub Copilot is the industry standard for code autocomplete — 110 millisecond response time, inline suggestions. It's great at what it does. But Claude is a different category entirely. Copilot autocompletes your lines. Claude reads your entire codebase, understands the architecture, runs terminal commands, edits multiple files, and explains what it did and why.</a:t>
+            </a:r>
+          </a:p>
+          <a:p/>
+          <a:p>
+            <a:r>
+              <a:t>Claude has a 200,000 token context window versus Copilot's file-based approach. It has native terminal access, custom commands, skills, hooks, MCP integration — none of which Copilot offers. For business users, Claude is the only AI assistant that handles document creation, data analysis, Excel formulas, and complex multi-step workflows in a single conversation.</a:t>
+            </a:r>
+          </a:p>
+          <a:p/>
+          <a:p>
+            <a:r>
+              <a:t>The key stat: 300,000 business customers. 24 percent of major banks. 38 percent of retail chatbots. This isn't early-adopter territory anymore — this is mainstream enterprise adoption.</a:t>
+            </a:r>
+          </a:p>
+          <a:p/>
+          <a:p>
+            <a:r>
+              <a:t>SOURCE: Anthropic enterprise case studies (datastudios.org), UncoverAlpha market analysis 2026.</a:t>
             </a:r>
           </a:p>
         </p:txBody>

--- a/slides/Day1_Claude_for_Business.pptx
+++ b/slides/Day1_Claude_for_Business.pptx
@@ -16,6 +16,7 @@
     <p:sldId id="261" r:id="rId7"/>
     <p:sldId id="262" r:id="rId8"/>
     <p:sldId id="263" r:id="rId9"/>
+    <p:sldId id="342" r:id="rId94"/>
     <p:sldId id="264" r:id="rId10"/>
     <p:sldId id="338" r:id="rId90"/>
     <p:sldId id="265" r:id="rId11"/>
@@ -9395,6 +9396,31 @@
 </p:notes>
 </file>
 
+<file path=ppt/notesSlides/notesSlide75.xml><?xml version="1.0" encoding="utf-8"?>
+<p:notes xmlns:a="http://schemas.openxmlformats.org/drawingml/2006/main" xmlns:p="http://schemas.openxmlformats.org/presentationml/2006/main" xmlns:r="http://schemas.openxmlformats.org/officeDocument/2006/relationships">
+  <p:cSld>
+    <p:spTree>
+      <p:nvGrpSpPr>
+        <p:cNvPr id="1" name=""/>
+        <p:cNvGrpSpPr/>
+        <p:nvPr/>
+      </p:nvGrpSpPr>
+      <p:grpSpPr>
+        <a:xfrm>
+          <a:off x="0" y="0"/>
+          <a:ext cx="0" cy="0"/>
+          <a:chOff x="0" y="0"/>
+          <a:chExt cx="0" cy="0"/>
+        </a:xfrm>
+      </p:grpSpPr>
+    </p:spTree>
+  </p:cSld>
+  <p:clrMapOvr>
+    <a:masterClrMapping/>
+  </p:clrMapOvr>
+</p:notes>
+</file>
+
 <file path=ppt/notesSlides/notesSlide8.xml><?xml version="1.0" encoding="utf-8"?>
 <p:notes xmlns:a="http://schemas.openxmlformats.org/drawingml/2006/main" xmlns:r="http://schemas.openxmlformats.org/officeDocument/2006/relationships" xmlns:p="http://schemas.openxmlformats.org/presentationml/2006/main">
   <p:cSld>
@@ -44544,6 +44570,446 @@
             </a:pPr>
             <a:r>
               <a:t>- © 2026 AIA Copilot</a:t>
+            </a:r>
+          </a:p>
+        </p:txBody>
+      </p:sp>
+    </p:spTree>
+  </p:cSld>
+  <p:clrMapOvr>
+    <a:masterClrMapping/>
+  </p:clrMapOvr>
+</p:sld>
+</file>
+
+<file path=ppt/slides/slide87.xml><?xml version="1.0" encoding="utf-8"?>
+<p:sld xmlns:a="http://schemas.openxmlformats.org/drawingml/2006/main" xmlns:p="http://schemas.openxmlformats.org/presentationml/2006/main" xmlns:r="http://schemas.openxmlformats.org/officeDocument/2006/relationships">
+  <p:cSld>
+    <p:bg>
+      <p:bgPr>
+        <a:solidFill>
+          <a:srgbClr val="1F2D3D"/>
+        </a:solidFill>
+        <a:effectLst/>
+      </p:bgPr>
+    </p:bg>
+    <p:spTree>
+      <p:nvGrpSpPr>
+        <p:cNvPr id="1" name=""/>
+        <p:cNvGrpSpPr/>
+        <p:nvPr/>
+      </p:nvGrpSpPr>
+      <p:grpSpPr/>
+      <p:sp>
+        <p:nvSpPr>
+          <p:cNvPr id="2" name="TextBox 1"/>
+          <p:cNvSpPr txBox="1"/>
+          <p:nvPr/>
+        </p:nvSpPr>
+        <p:spPr>
+          <a:xfrm>
+            <a:off x="457200" y="274320"/>
+            <a:ext cx="11247120" cy="822960"/>
+          </a:xfrm>
+          <a:prstGeom prst="rect">
+            <a:avLst/>
+          </a:prstGeom>
+          <a:noFill/>
+        </p:spPr>
+        <p:txBody>
+          <a:bodyPr wrap="none">
+            <a:spAutoFit/>
+          </a:bodyPr>
+          <a:lstStyle/>
+          <a:p>
+            <a:pPr>
+              <a:defRPr sz="4000" b="1">
+                <a:solidFill>
+                  <a:srgbClr val="FFFFFF"/>
+                </a:solidFill>
+              </a:defRPr>
+            </a:pPr>
+            <a:r>
+              <a:t>Microsoft Runs Both. Shouldn't You?</a:t>
+            </a:r>
+          </a:p>
+        </p:txBody>
+      </p:sp>
+      <p:sp>
+        <p:nvSpPr>
+          <p:cNvPr id="3" name="TextBox 2"/>
+          <p:cNvSpPr txBox="1"/>
+          <p:nvPr/>
+        </p:nvSpPr>
+        <p:spPr>
+          <a:xfrm>
+            <a:off x="457200" y="1097280"/>
+            <a:ext cx="11247120" cy="457200"/>
+          </a:xfrm>
+          <a:prstGeom prst="rect">
+            <a:avLst/>
+          </a:prstGeom>
+          <a:noFill/>
+        </p:spPr>
+        <p:txBody>
+          <a:bodyPr wrap="none">
+            <a:spAutoFit/>
+          </a:bodyPr>
+          <a:lstStyle/>
+          <a:p>
+            <a:pPr>
+              <a:defRPr sz="2000" i="1">
+                <a:solidFill>
+                  <a:srgbClr val="9CA3AF"/>
+                </a:solidFill>
+              </a:defRPr>
+            </a:pPr>
+            <a:r>
+              <a:t>Microsoft mandated its engineers test Claude Code alongside Copilot — and submit comparative feedback.</a:t>
+            </a:r>
+          </a:p>
+        </p:txBody>
+      </p:sp>
+      <p:sp>
+        <p:nvSpPr>
+          <p:cNvPr id="4" name="TextBox 3"/>
+          <p:cNvSpPr txBox="1"/>
+          <p:nvPr/>
+        </p:nvSpPr>
+        <p:spPr>
+          <a:xfrm>
+            <a:off x="457200" y="1828800"/>
+            <a:ext cx="5029200" cy="457200"/>
+          </a:xfrm>
+          <a:prstGeom prst="rect">
+            <a:avLst/>
+          </a:prstGeom>
+          <a:noFill/>
+        </p:spPr>
+        <p:txBody>
+          <a:bodyPr wrap="none">
+            <a:spAutoFit/>
+          </a:bodyPr>
+          <a:lstStyle/>
+          <a:p>
+            <a:pPr algn="ctr">
+              <a:defRPr sz="2800" b="1">
+                <a:solidFill>
+                  <a:srgbClr val="FFFFFF"/>
+                </a:solidFill>
+              </a:defRPr>
+            </a:pPr>
+            <a:r>
+              <a:t>GitHub Copilot</a:t>
+            </a:r>
+          </a:p>
+        </p:txBody>
+      </p:sp>
+      <p:sp>
+        <p:nvSpPr>
+          <p:cNvPr id="5" name="TextBox 4"/>
+          <p:cNvSpPr txBox="1"/>
+          <p:nvPr/>
+        </p:nvSpPr>
+        <p:spPr>
+          <a:xfrm>
+            <a:off x="6217920" y="1828800"/>
+            <a:ext cx="5029200" cy="457200"/>
+          </a:xfrm>
+          <a:prstGeom prst="rect">
+            <a:avLst/>
+          </a:prstGeom>
+          <a:noFill/>
+        </p:spPr>
+        <p:txBody>
+          <a:bodyPr wrap="none">
+            <a:spAutoFit/>
+          </a:bodyPr>
+          <a:lstStyle/>
+          <a:p>
+            <a:pPr algn="ctr">
+              <a:defRPr sz="2800" b="1">
+                <a:solidFill>
+                  <a:srgbClr val="FFFFFF"/>
+                </a:solidFill>
+              </a:defRPr>
+            </a:pPr>
+            <a:r>
+              <a:t>Claude Code</a:t>
+            </a:r>
+          </a:p>
+        </p:txBody>
+      </p:sp>
+      <p:sp>
+        <p:nvSpPr>
+          <p:cNvPr id="6" name="TextBox 5"/>
+          <p:cNvSpPr txBox="1"/>
+          <p:nvPr/>
+        </p:nvSpPr>
+        <p:spPr>
+          <a:xfrm>
+            <a:off x="457200" y="2377440"/>
+            <a:ext cx="5029200" cy="3200400"/>
+          </a:xfrm>
+          <a:prstGeom prst="rect">
+            <a:avLst/>
+          </a:prstGeom>
+          <a:noFill/>
+        </p:spPr>
+        <p:txBody>
+          <a:bodyPr wrap="square">
+            <a:spAutoFit/>
+          </a:bodyPr>
+          <a:lstStyle/>
+          <a:p>
+            <a:pPr>
+              <a:spcAft>
+                <a:spcPts val="800"/>
+              </a:spcAft>
+              <a:defRPr sz="1800">
+                <a:solidFill>
+                  <a:srgbClr val="D1D5DB"/>
+                </a:solidFill>
+              </a:defRPr>
+            </a:pPr>
+            <a:r>
+              <a:t>•  40-55% productivity gain</a:t>
+            </a:r>
+          </a:p>
+          <a:p>
+            <a:pPr>
+              <a:spcAft>
+                <a:spcPts val="800"/>
+              </a:spcAft>
+              <a:defRPr sz="1800">
+                <a:solidFill>
+                  <a:srgbClr val="D1D5DB"/>
+                </a:solidFill>
+              </a:defRPr>
+            </a:pPr>
+            <a:r>
+              <a:t>•  Best: IDE autocomplete, inline suggestions</a:t>
+            </a:r>
+          </a:p>
+          <a:p>
+            <a:pPr>
+              <a:spcAft>
+                <a:spcPts val="800"/>
+              </a:spcAft>
+              <a:defRPr sz="1800">
+                <a:solidFill>
+                  <a:srgbClr val="D1D5DB"/>
+                </a:solidFill>
+              </a:defRPr>
+            </a:pPr>
+            <a:r>
+              <a:t>•  Best: Boilerplate, data science, MS ecosystem</a:t>
+            </a:r>
+          </a:p>
+          <a:p>
+            <a:pPr>
+              <a:spcAft>
+                <a:spcPts val="800"/>
+              </a:spcAft>
+              <a:defRPr sz="1800">
+                <a:solidFill>
+                  <a:srgbClr val="D1D5DB"/>
+                </a:solidFill>
+              </a:defRPr>
+            </a:pPr>
+            <a:r>
+              <a:t>•  15M developers, 42% market share</a:t>
+            </a:r>
+          </a:p>
+          <a:p>
+            <a:pPr>
+              <a:spcAft>
+                <a:spcPts val="800"/>
+              </a:spcAft>
+              <a:defRPr sz="1800">
+                <a:solidFill>
+                  <a:srgbClr val="D1D5DB"/>
+                </a:solidFill>
+              </a:defRPr>
+            </a:pPr>
+            <a:r>
+              <a:t>•  110ms response time</a:t>
+            </a:r>
+          </a:p>
+        </p:txBody>
+      </p:sp>
+      <p:sp>
+        <p:nvSpPr>
+          <p:cNvPr id="7" name="TextBox 6"/>
+          <p:cNvSpPr txBox="1"/>
+          <p:nvPr/>
+        </p:nvSpPr>
+        <p:spPr>
+          <a:xfrm>
+            <a:off x="6217920" y="2377440"/>
+            <a:ext cx="5029200" cy="3200400"/>
+          </a:xfrm>
+          <a:prstGeom prst="rect">
+            <a:avLst/>
+          </a:prstGeom>
+          <a:noFill/>
+        </p:spPr>
+        <p:txBody>
+          <a:bodyPr wrap="square">
+            <a:spAutoFit/>
+          </a:bodyPr>
+          <a:lstStyle/>
+          <a:p>
+            <a:pPr>
+              <a:spcAft>
+                <a:spcPts val="800"/>
+              </a:spcAft>
+              <a:defRPr sz="1800">
+                <a:solidFill>
+                  <a:srgbClr val="D1D5DB"/>
+                </a:solidFill>
+              </a:defRPr>
+            </a:pPr>
+            <a:r>
+              <a:t>•  48% productivity, 77.2% SWE-bench</a:t>
+            </a:r>
+          </a:p>
+          <a:p>
+            <a:pPr>
+              <a:spcAft>
+                <a:spcPts val="800"/>
+              </a:spcAft>
+              <a:defRPr sz="1800">
+                <a:solidFill>
+                  <a:srgbClr val="D1D5DB"/>
+                </a:solidFill>
+              </a:defRPr>
+            </a:pPr>
+            <a:r>
+              <a:t>•  Best: Complex reasoning, multi-file edits</a:t>
+            </a:r>
+          </a:p>
+          <a:p>
+            <a:pPr>
+              <a:spcAft>
+                <a:spcPts val="800"/>
+              </a:spcAft>
+              <a:defRPr sz="1800">
+                <a:solidFill>
+                  <a:srgbClr val="D1D5DB"/>
+                </a:solidFill>
+              </a:defRPr>
+            </a:pPr>
+            <a:r>
+              <a:t>•  Best: Backend, CLI, infra, large codebases</a:t>
+            </a:r>
+          </a:p>
+          <a:p>
+            <a:pPr>
+              <a:spcAft>
+                <a:spcPts val="800"/>
+              </a:spcAft>
+              <a:defRPr sz="1800">
+                <a:solidFill>
+                  <a:srgbClr val="D1D5DB"/>
+                </a:solidFill>
+              </a:defRPr>
+            </a:pPr>
+            <a:r>
+              <a:t>•  Terminal-native, growing fast</a:t>
+            </a:r>
+          </a:p>
+          <a:p>
+            <a:pPr>
+              <a:spcAft>
+                <a:spcPts val="800"/>
+              </a:spcAft>
+              <a:defRPr sz="1800">
+                <a:solidFill>
+                  <a:srgbClr val="D1D5DB"/>
+                </a:solidFill>
+              </a:defRPr>
+            </a:pPr>
+            <a:r>
+              <a:t>•  200K token context window</a:t>
+            </a:r>
+          </a:p>
+        </p:txBody>
+      </p:sp>
+      <p:sp>
+        <p:nvSpPr>
+          <p:cNvPr id="8" name="Rectangle 7"/>
+          <p:cNvSpPr/>
+          <p:nvPr/>
+        </p:nvSpPr>
+        <p:spPr>
+          <a:xfrm>
+            <a:off x="5852160" y="1828800"/>
+            <a:ext cx="27432" cy="3657600"/>
+          </a:xfrm>
+          <a:prstGeom prst="rect">
+            <a:avLst/>
+          </a:prstGeom>
+          <a:solidFill>
+            <a:srgbClr val="4B5563"/>
+          </a:solidFill>
+          <a:ln>
+            <a:noFill/>
+          </a:ln>
+        </p:spPr>
+        <p:style>
+          <a:lnRef idx="1">
+            <a:schemeClr val="accent1"/>
+          </a:lnRef>
+          <a:fillRef idx="3">
+            <a:schemeClr val="accent1"/>
+          </a:fillRef>
+          <a:effectRef idx="2">
+            <a:schemeClr val="accent1"/>
+          </a:effectRef>
+          <a:fontRef idx="minor">
+            <a:schemeClr val="lt1"/>
+          </a:fontRef>
+        </p:style>
+        <p:txBody>
+          <a:bodyPr rtlCol="0" anchor="ctr"/>
+          <a:lstStyle/>
+          <a:p>
+            <a:pPr algn="ctr"/>
+          </a:p>
+        </p:txBody>
+      </p:sp>
+      <p:sp>
+        <p:nvSpPr>
+          <p:cNvPr id="9" name="TextBox 8"/>
+          <p:cNvSpPr txBox="1"/>
+          <p:nvPr/>
+        </p:nvSpPr>
+        <p:spPr>
+          <a:xfrm>
+            <a:off x="457200" y="5943600"/>
+            <a:ext cx="11247120" cy="731520"/>
+          </a:xfrm>
+          <a:prstGeom prst="rect">
+            <a:avLst/>
+          </a:prstGeom>
+          <a:noFill/>
+        </p:spPr>
+        <p:txBody>
+          <a:bodyPr wrap="square">
+            <a:spAutoFit/>
+          </a:bodyPr>
+          <a:lstStyle/>
+          <a:p>
+            <a:pPr algn="ctr">
+              <a:defRPr sz="1800" b="1">
+                <a:solidFill>
+                  <a:srgbClr val="0078D4"/>
+                </a:solidFill>
+              </a:defRPr>
+            </a:pPr>
+            <a:r>
+              <a:t>Your instructor is a Microsoft Certified Trainer who teaches both Copilot and Claude Code — the same multi-tool approach Microsoft uses internally.</a:t>
             </a:r>
           </a:p>
         </p:txBody>

--- a/slides/Day1_Claude_for_Business.pptx
+++ b/slides/Day1_Claude_for_Business.pptx
@@ -42152,153 +42152,6 @@
 </p:sld>
 </file>
 
-<file path=ppt/slides/slide71.xml><?xml version="1.0" encoding="utf-8"?>
-<p:sld xmlns:a="http://schemas.openxmlformats.org/drawingml/2006/main" xmlns:r="http://schemas.openxmlformats.org/officeDocument/2006/relationships" xmlns:p="http://schemas.openxmlformats.org/presentationml/2006/main">
-  <p:cSld>
-    <p:bg>
-      <p:bgPr>
-        <a:solidFill>
-          <a:srgbClr val="0B0F1A"/>
-        </a:solidFill>
-        <a:effectLst/>
-      </p:bgPr>
-    </p:bg>
-    <p:spTree>
-      <p:nvGrpSpPr>
-        <p:cNvPr id="1" name=""/>
-        <p:cNvGrpSpPr/>
-        <p:nvPr/>
-      </p:nvGrpSpPr>
-      <p:grpSpPr>
-        <a:xfrm>
-          <a:off x="0" y="0"/>
-          <a:ext cx="0" cy="0"/>
-          <a:chOff x="0" y="0"/>
-          <a:chExt cx="0" cy="0"/>
-        </a:xfrm>
-      </p:grpSpPr>
-      <p:sp>
-        <p:nvSpPr>
-          <p:cNvPr id="2" name="Rectangle 1"/>
-          <p:cNvSpPr/>
-          <p:nvPr/>
-        </p:nvSpPr>
-        <p:spPr>
-          <a:xfrm>
-            <a:off x="0" y="1828800"/>
-            <a:ext cx="137160" cy="3200400"/>
-          </a:xfrm>
-          <a:prstGeom prst="rect">
-            <a:avLst/>
-          </a:prstGeom>
-          <a:solidFill>
-            <a:srgbClr val="00D4AA"/>
-          </a:solidFill>
-          <a:ln>
-            <a:noFill/>
-          </a:ln>
-        </p:spPr>
-        <p:style>
-          <a:lnRef idx="1">
-            <a:schemeClr val="accent1"/>
-          </a:lnRef>
-          <a:fillRef idx="3">
-            <a:schemeClr val="accent1"/>
-          </a:fillRef>
-          <a:effectRef idx="2">
-            <a:schemeClr val="accent1"/>
-          </a:effectRef>
-          <a:fontRef idx="minor">
-            <a:schemeClr val="lt1"/>
-          </a:fontRef>
-        </p:style>
-        <p:txBody>
-          <a:bodyPr rtlCol="0" anchor="ctr"/>
-          <a:lstStyle/>
-          <a:p>
-            <a:pPr algn="ctr"/>
-            <a:endParaRPr/>
-          </a:p>
-        </p:txBody>
-      </p:sp>
-      <p:sp>
-        <p:nvSpPr>
-          <p:cNvPr id="3" name="TextBox 2"/>
-          <p:cNvSpPr txBox="1"/>
-          <p:nvPr/>
-        </p:nvSpPr>
-        <p:spPr>
-          <a:xfrm>
-            <a:off x="457200" y="2286000"/>
-            <a:ext cx="11277295" cy="1371600"/>
-          </a:xfrm>
-          <a:prstGeom prst="rect">
-            <a:avLst/>
-          </a:prstGeom>
-          <a:noFill/>
-        </p:spPr>
-        <p:txBody>
-          <a:bodyPr wrap="square">
-            <a:spAutoFit/>
-          </a:bodyPr>
-          <a:lstStyle/>
-          <a:p>
-            <a:pPr>
-              <a:defRPr sz="5600" b="1">
-                <a:solidFill>
-                  <a:srgbClr val="FFFFFF"/>
-                </a:solidFill>
-              </a:defRPr>
-            </a:pPr>
-            <a:r>
-              <a:t>Role-Specific Workflows</a:t>
-            </a:r>
-          </a:p>
-        </p:txBody>
-      </p:sp>
-      <p:sp>
-        <p:nvSpPr>
-          <p:cNvPr id="4" name="TextBox 3"/>
-          <p:cNvSpPr txBox="1"/>
-          <p:nvPr/>
-        </p:nvSpPr>
-        <p:spPr>
-          <a:xfrm>
-            <a:off x="457200" y="3840480"/>
-            <a:ext cx="11277295" cy="914400"/>
-          </a:xfrm>
-          <a:prstGeom prst="rect">
-            <a:avLst/>
-          </a:prstGeom>
-          <a:noFill/>
-        </p:spPr>
-        <p:txBody>
-          <a:bodyPr wrap="square">
-            <a:spAutoFit/>
-          </a:bodyPr>
-          <a:lstStyle/>
-          <a:p>
-            <a:pPr>
-              <a:defRPr sz="2400">
-                <a:solidFill>
-                  <a:srgbClr val="8B95A5"/>
-                </a:solidFill>
-              </a:defRPr>
-            </a:pPr>
-            <a:r>
-              <a:t>Claude in action for different jobs</a:t>
-            </a:r>
-          </a:p>
-        </p:txBody>
-      </p:sp>
-    </p:spTree>
-  </p:cSld>
-  <p:clrMapOvr>
-    <a:masterClrMapping/>
-  </p:clrMapOvr>
-</p:sld>
-</file>
-
 <file path=ppt/slides/slide72.xml><?xml version="1.0" encoding="utf-8"?>
 <p:sld xmlns:a="http://schemas.openxmlformats.org/drawingml/2006/main" xmlns:r="http://schemas.openxmlformats.org/officeDocument/2006/relationships" xmlns:p="http://schemas.openxmlformats.org/presentationml/2006/main">
   <p:cSld>

--- a/slides/Day1_Claude_for_Business.pptx
+++ b/slides/Day1_Claude_for_Business.pptx
@@ -24130,7 +24130,7 @@
     <p:bg>
       <p:bgPr>
         <a:solidFill>
-          <a:srgbClr val="0B0F1A"/>
+          <a:srgbClr val="1F2D3D"/>
         </a:solidFill>
         <a:effectLst/>
       </p:bgPr>
@@ -24151,58 +24151,14 @@
       </p:grpSpPr>
       <p:sp>
         <p:nvSpPr>
-          <p:cNvPr id="2" name="Rectangle 1"/>
-          <p:cNvSpPr/>
-          <p:nvPr/>
-        </p:nvSpPr>
-        <p:spPr>
-          <a:xfrm>
-            <a:off x="0" y="1188720"/>
-            <a:ext cx="91440" cy="5029200"/>
-          </a:xfrm>
-          <a:prstGeom prst="rect">
-            <a:avLst/>
-          </a:prstGeom>
-          <a:solidFill>
-            <a:srgbClr val="00D4AA"/>
-          </a:solidFill>
-          <a:ln>
-            <a:noFill/>
-          </a:ln>
-        </p:spPr>
-        <p:style>
-          <a:lnRef idx="1">
-            <a:schemeClr val="accent1"/>
-          </a:lnRef>
-          <a:fillRef idx="3">
-            <a:schemeClr val="accent1"/>
-          </a:fillRef>
-          <a:effectRef idx="2">
-            <a:schemeClr val="accent1"/>
-          </a:effectRef>
-          <a:fontRef idx="minor">
-            <a:schemeClr val="lt1"/>
-          </a:fontRef>
-        </p:style>
-        <p:txBody>
-          <a:bodyPr rtlCol="0" anchor="ctr"/>
-          <a:lstStyle/>
-          <a:p>
-            <a:pPr algn="ctr"/>
-            <a:endParaRPr/>
-          </a:p>
-        </p:txBody>
-      </p:sp>
-      <p:sp>
-        <p:nvSpPr>
-          <p:cNvPr id="3" name="TextBox 2"/>
+          <p:cNvPr id="2" name="TextBox 1"/>
           <p:cNvSpPr txBox="1"/>
           <p:nvPr/>
         </p:nvSpPr>
         <p:spPr>
           <a:xfrm>
-            <a:off x="457200" y="365760"/>
-            <a:ext cx="11277295" cy="822960"/>
+            <a:off x="457200" y="274320"/>
+            <a:ext cx="11247120" cy="731520"/>
           </a:xfrm>
           <a:prstGeom prst="rect">
             <a:avLst/>
@@ -24230,13 +24186,13 @@
       </p:sp>
       <p:sp>
         <p:nvSpPr>
-          <p:cNvPr id="4" name="Oval 3"/>
+          <p:cNvPr id="3" name="Oval 2"/>
           <p:cNvSpPr/>
           <p:nvPr/>
         </p:nvSpPr>
         <p:spPr>
           <a:xfrm>
-            <a:off x="457200" y="1280160"/>
+            <a:off x="548640" y="1280160"/>
             <a:ext cx="365760" cy="365760"/>
           </a:xfrm>
           <a:prstGeom prst="ellipse">
@@ -24275,21 +24231,21 @@
               </a:defRPr>
             </a:pPr>
             <a:r>
-              <a:t>v</a:t>
-            </a:r>
-          </a:p>
-        </p:txBody>
-      </p:sp>
-      <p:sp>
-        <p:nvSpPr>
-          <p:cNvPr id="5" name="TextBox 4"/>
+              <a:t>✓</a:t>
+            </a:r>
+          </a:p>
+        </p:txBody>
+      </p:sp>
+      <p:sp>
+        <p:nvSpPr>
+          <p:cNvPr id="4" name="TextBox 3"/>
           <p:cNvSpPr txBox="1"/>
           <p:nvPr/>
         </p:nvSpPr>
         <p:spPr>
           <a:xfrm>
-            <a:off x="1005840" y="1298448"/>
-            <a:ext cx="10725912" cy="502920"/>
+            <a:off x="1097280" y="1280160"/>
+            <a:ext cx="10515600" cy="411480"/>
           </a:xfrm>
           <a:prstGeom prst="rect">
             <a:avLst/>
@@ -24297,34 +24253,33 @@
           <a:noFill/>
         </p:spPr>
         <p:txBody>
-          <a:bodyPr wrap="square">
+          <a:bodyPr wrap="none">
             <a:spAutoFit/>
           </a:bodyPr>
           <a:lstStyle/>
           <a:p>
             <a:pPr>
-              <a:defRPr sz="2200">
-                <a:solidFill>
-                  <a:srgbClr val="FFFFFF"/>
-                </a:solidFill>
-              </a:defRPr>
-            </a:pPr>
-            <a:r>
-              <a:rPr dirty="0"/>
-              <a:t>Choose the right Claude model for different tasks</a:t>
-            </a:r>
-          </a:p>
-        </p:txBody>
-      </p:sp>
-      <p:sp>
-        <p:nvSpPr>
-          <p:cNvPr id="6" name="Oval 5"/>
+              <a:defRPr sz="2000">
+                <a:solidFill>
+                  <a:srgbClr val="D1D5DB"/>
+                </a:solidFill>
+              </a:defRPr>
+            </a:pPr>
+            <a:r>
+              <a:t>Navigate the Claude.ai interface and use Voice Mode</a:t>
+            </a:r>
+          </a:p>
+        </p:txBody>
+      </p:sp>
+      <p:sp>
+        <p:nvSpPr>
+          <p:cNvPr id="5" name="Oval 4"/>
           <p:cNvSpPr/>
           <p:nvPr/>
         </p:nvSpPr>
         <p:spPr>
           <a:xfrm>
-            <a:off x="457200" y="1938528"/>
+            <a:off x="548640" y="1874519"/>
             <a:ext cx="365760" cy="365760"/>
           </a:xfrm>
           <a:prstGeom prst="ellipse">
@@ -24363,21 +24318,21 @@
               </a:defRPr>
             </a:pPr>
             <a:r>
-              <a:t>v</a:t>
-            </a:r>
-          </a:p>
-        </p:txBody>
-      </p:sp>
-      <p:sp>
-        <p:nvSpPr>
-          <p:cNvPr id="7" name="TextBox 6"/>
+              <a:t>✓</a:t>
+            </a:r>
+          </a:p>
+        </p:txBody>
+      </p:sp>
+      <p:sp>
+        <p:nvSpPr>
+          <p:cNvPr id="6" name="TextBox 5"/>
           <p:cNvSpPr txBox="1"/>
           <p:nvPr/>
         </p:nvSpPr>
         <p:spPr>
           <a:xfrm>
-            <a:off x="1005840" y="1956816"/>
-            <a:ext cx="10725912" cy="502920"/>
+            <a:off x="1097280" y="1874519"/>
+            <a:ext cx="10515600" cy="411480"/>
           </a:xfrm>
           <a:prstGeom prst="rect">
             <a:avLst/>
@@ -24385,33 +24340,33 @@
           <a:noFill/>
         </p:spPr>
         <p:txBody>
-          <a:bodyPr wrap="square">
+          <a:bodyPr wrap="none">
             <a:spAutoFit/>
           </a:bodyPr>
           <a:lstStyle/>
           <a:p>
             <a:pPr>
-              <a:defRPr sz="2200">
-                <a:solidFill>
-                  <a:srgbClr val="FFFFFF"/>
-                </a:solidFill>
-              </a:defRPr>
-            </a:pPr>
-            <a:r>
-              <a:t>Navigate Claude.ai interface and manage Projects</a:t>
-            </a:r>
-          </a:p>
-        </p:txBody>
-      </p:sp>
-      <p:sp>
-        <p:nvSpPr>
-          <p:cNvPr id="8" name="Oval 7"/>
+              <a:defRPr sz="2000">
+                <a:solidFill>
+                  <a:srgbClr val="D1D5DB"/>
+                </a:solidFill>
+              </a:defRPr>
+            </a:pPr>
+            <a:r>
+              <a:t>Write effective prompts using the GOLDEN framework</a:t>
+            </a:r>
+          </a:p>
+        </p:txBody>
+      </p:sp>
+      <p:sp>
+        <p:nvSpPr>
+          <p:cNvPr id="7" name="Oval 6"/>
           <p:cNvSpPr/>
           <p:nvPr/>
         </p:nvSpPr>
         <p:spPr>
           <a:xfrm>
-            <a:off x="457200" y="2596896"/>
+            <a:off x="548640" y="2468880"/>
             <a:ext cx="365760" cy="365760"/>
           </a:xfrm>
           <a:prstGeom prst="ellipse">
@@ -24450,21 +24405,21 @@
               </a:defRPr>
             </a:pPr>
             <a:r>
-              <a:t>v</a:t>
-            </a:r>
-          </a:p>
-        </p:txBody>
-      </p:sp>
-      <p:sp>
-        <p:nvSpPr>
-          <p:cNvPr id="9" name="TextBox 8"/>
+              <a:t>✓</a:t>
+            </a:r>
+          </a:p>
+        </p:txBody>
+      </p:sp>
+      <p:sp>
+        <p:nvSpPr>
+          <p:cNvPr id="8" name="TextBox 7"/>
           <p:cNvSpPr txBox="1"/>
           <p:nvPr/>
         </p:nvSpPr>
         <p:spPr>
           <a:xfrm>
-            <a:off x="1005840" y="2615184"/>
-            <a:ext cx="10725912" cy="502920"/>
+            <a:off x="1097280" y="2468880"/>
+            <a:ext cx="10515600" cy="411480"/>
           </a:xfrm>
           <a:prstGeom prst="rect">
             <a:avLst/>
@@ -24472,33 +24427,33 @@
           <a:noFill/>
         </p:spPr>
         <p:txBody>
-          <a:bodyPr wrap="square">
+          <a:bodyPr wrap="none">
             <a:spAutoFit/>
           </a:bodyPr>
           <a:lstStyle/>
           <a:p>
             <a:pPr>
-              <a:defRPr sz="2200">
-                <a:solidFill>
-                  <a:srgbClr val="FFFFFF"/>
-                </a:solidFill>
-              </a:defRPr>
-            </a:pPr>
-            <a:r>
-              <a:t>Write effective prompts and use Extended Thinking for complex tasks</a:t>
-            </a:r>
-          </a:p>
-        </p:txBody>
-      </p:sp>
-      <p:sp>
-        <p:nvSpPr>
-          <p:cNvPr id="10" name="Oval 9"/>
+              <a:defRPr sz="2000">
+                <a:solidFill>
+                  <a:srgbClr val="D1D5DB"/>
+                </a:solidFill>
+              </a:defRPr>
+            </a:pPr>
+            <a:r>
+              <a:t>Choose the right Claude model and use Extended Thinking</a:t>
+            </a:r>
+          </a:p>
+        </p:txBody>
+      </p:sp>
+      <p:sp>
+        <p:nvSpPr>
+          <p:cNvPr id="9" name="Oval 8"/>
           <p:cNvSpPr/>
           <p:nvPr/>
         </p:nvSpPr>
         <p:spPr>
           <a:xfrm>
-            <a:off x="457200" y="3255264"/>
+            <a:off x="548640" y="3063240"/>
             <a:ext cx="365760" cy="365760"/>
           </a:xfrm>
           <a:prstGeom prst="ellipse">
@@ -24537,21 +24492,21 @@
               </a:defRPr>
             </a:pPr>
             <a:r>
-              <a:t>v</a:t>
-            </a:r>
-          </a:p>
-        </p:txBody>
-      </p:sp>
-      <p:sp>
-        <p:nvSpPr>
-          <p:cNvPr id="11" name="TextBox 10"/>
+              <a:t>✓</a:t>
+            </a:r>
+          </a:p>
+        </p:txBody>
+      </p:sp>
+      <p:sp>
+        <p:nvSpPr>
+          <p:cNvPr id="10" name="TextBox 9"/>
           <p:cNvSpPr txBox="1"/>
           <p:nvPr/>
         </p:nvSpPr>
         <p:spPr>
           <a:xfrm>
-            <a:off x="1005840" y="3273552"/>
-            <a:ext cx="10725912" cy="502920"/>
+            <a:off x="1097280" y="3063240"/>
+            <a:ext cx="10515600" cy="411480"/>
           </a:xfrm>
           <a:prstGeom prst="rect">
             <a:avLst/>
@@ -24559,33 +24514,33 @@
           <a:noFill/>
         </p:spPr>
         <p:txBody>
-          <a:bodyPr wrap="square">
+          <a:bodyPr wrap="none">
             <a:spAutoFit/>
           </a:bodyPr>
           <a:lstStyle/>
           <a:p>
             <a:pPr>
-              <a:defRPr sz="2200">
-                <a:solidFill>
-                  <a:srgbClr val="FFFFFF"/>
-                </a:solidFill>
-              </a:defRPr>
-            </a:pPr>
-            <a:r>
-              <a:t>Use Claude in Excel for formula assistance and data analysis</a:t>
-            </a:r>
-          </a:p>
-        </p:txBody>
-      </p:sp>
-      <p:sp>
-        <p:nvSpPr>
-          <p:cNvPr id="12" name="Oval 11"/>
+              <a:defRPr sz="2000">
+                <a:solidFill>
+                  <a:srgbClr val="D1D5DB"/>
+                </a:solidFill>
+              </a:defRPr>
+            </a:pPr>
+            <a:r>
+              <a:t>Configure settings, Personal Preferences, and privacy controls</a:t>
+            </a:r>
+          </a:p>
+        </p:txBody>
+      </p:sp>
+      <p:sp>
+        <p:nvSpPr>
+          <p:cNvPr id="11" name="Oval 10"/>
           <p:cNvSpPr/>
           <p:nvPr/>
         </p:nvSpPr>
         <p:spPr>
           <a:xfrm>
-            <a:off x="457200" y="3913631"/>
+            <a:off x="548640" y="3657600"/>
             <a:ext cx="365760" cy="365760"/>
           </a:xfrm>
           <a:prstGeom prst="ellipse">
@@ -24624,21 +24579,21 @@
               </a:defRPr>
             </a:pPr>
             <a:r>
-              <a:t>v</a:t>
-            </a:r>
-          </a:p>
-        </p:txBody>
-      </p:sp>
-      <p:sp>
-        <p:nvSpPr>
-          <p:cNvPr id="13" name="TextBox 12"/>
+              <a:t>✓</a:t>
+            </a:r>
+          </a:p>
+        </p:txBody>
+      </p:sp>
+      <p:sp>
+        <p:nvSpPr>
+          <p:cNvPr id="12" name="TextBox 11"/>
           <p:cNvSpPr txBox="1"/>
           <p:nvPr/>
         </p:nvSpPr>
         <p:spPr>
           <a:xfrm>
-            <a:off x="1005840" y="3931919"/>
-            <a:ext cx="10725912" cy="502920"/>
+            <a:off x="1097280" y="3657600"/>
+            <a:ext cx="10515600" cy="411480"/>
           </a:xfrm>
           <a:prstGeom prst="rect">
             <a:avLst/>
@@ -24646,33 +24601,33 @@
           <a:noFill/>
         </p:spPr>
         <p:txBody>
-          <a:bodyPr wrap="square">
+          <a:bodyPr wrap="none">
             <a:spAutoFit/>
           </a:bodyPr>
           <a:lstStyle/>
           <a:p>
             <a:pPr>
-              <a:defRPr sz="2200">
-                <a:solidFill>
-                  <a:srgbClr val="FFFFFF"/>
-                </a:solidFill>
-              </a:defRPr>
-            </a:pPr>
-            <a:r>
-              <a:t>Use artifacts for code, documents, and diagrams</a:t>
-            </a:r>
-          </a:p>
-        </p:txBody>
-      </p:sp>
-      <p:sp>
-        <p:nvSpPr>
-          <p:cNvPr id="14" name="Oval 13"/>
+              <a:defRPr sz="2000">
+                <a:solidFill>
+                  <a:srgbClr val="D1D5DB"/>
+                </a:solidFill>
+              </a:defRPr>
+            </a:pPr>
+            <a:r>
+              <a:t>Set up and use Claude Apps (Desktop, Mobile) and Claude for Work</a:t>
+            </a:r>
+          </a:p>
+        </p:txBody>
+      </p:sp>
+      <p:sp>
+        <p:nvSpPr>
+          <p:cNvPr id="13" name="Oval 12"/>
           <p:cNvSpPr/>
           <p:nvPr/>
         </p:nvSpPr>
         <p:spPr>
           <a:xfrm>
-            <a:off x="457200" y="4572000"/>
+            <a:off x="548640" y="4251960"/>
             <a:ext cx="365760" cy="365760"/>
           </a:xfrm>
           <a:prstGeom prst="ellipse">
@@ -24711,21 +24666,21 @@
               </a:defRPr>
             </a:pPr>
             <a:r>
-              <a:t>v</a:t>
-            </a:r>
-          </a:p>
-        </p:txBody>
-      </p:sp>
-      <p:sp>
-        <p:nvSpPr>
-          <p:cNvPr id="15" name="TextBox 14"/>
+              <a:t>✓</a:t>
+            </a:r>
+          </a:p>
+        </p:txBody>
+      </p:sp>
+      <p:sp>
+        <p:nvSpPr>
+          <p:cNvPr id="14" name="TextBox 13"/>
           <p:cNvSpPr txBox="1"/>
           <p:nvPr/>
         </p:nvSpPr>
         <p:spPr>
           <a:xfrm>
-            <a:off x="1005840" y="4590288"/>
-            <a:ext cx="10725912" cy="502920"/>
+            <a:off x="1097280" y="4251960"/>
+            <a:ext cx="10515600" cy="411480"/>
           </a:xfrm>
           <a:prstGeom prst="rect">
             <a:avLst/>
@@ -24733,33 +24688,33 @@
           <a:noFill/>
         </p:spPr>
         <p:txBody>
-          <a:bodyPr wrap="square">
+          <a:bodyPr wrap="none">
             <a:spAutoFit/>
           </a:bodyPr>
           <a:lstStyle/>
           <a:p>
             <a:pPr>
-              <a:defRPr sz="2200">
-                <a:solidFill>
-                  <a:srgbClr val="FFFFFF"/>
-                </a:solidFill>
-              </a:defRPr>
-            </a:pPr>
-            <a:r>
-              <a:t>Apply Claude to common business workflows</a:t>
-            </a:r>
-          </a:p>
-        </p:txBody>
-      </p:sp>
-      <p:sp>
-        <p:nvSpPr>
-          <p:cNvPr id="16" name="Oval 15"/>
+              <a:defRPr sz="2000">
+                <a:solidFill>
+                  <a:srgbClr val="D1D5DB"/>
+                </a:solidFill>
+              </a:defRPr>
+            </a:pPr>
+            <a:r>
+              <a:t>Create and manage Projects with Custom Instructions</a:t>
+            </a:r>
+          </a:p>
+        </p:txBody>
+      </p:sp>
+      <p:sp>
+        <p:nvSpPr>
+          <p:cNvPr id="15" name="Oval 14"/>
           <p:cNvSpPr/>
           <p:nvPr/>
         </p:nvSpPr>
         <p:spPr>
           <a:xfrm>
-            <a:off x="457200" y="5230368"/>
+            <a:off x="548640" y="4846320"/>
             <a:ext cx="365760" cy="365760"/>
           </a:xfrm>
           <a:prstGeom prst="ellipse">
@@ -24798,21 +24753,21 @@
               </a:defRPr>
             </a:pPr>
             <a:r>
-              <a:t>v</a:t>
-            </a:r>
-          </a:p>
-        </p:txBody>
-      </p:sp>
-      <p:sp>
-        <p:nvSpPr>
-          <p:cNvPr id="17" name="TextBox 16"/>
+              <a:t>✓</a:t>
+            </a:r>
+          </a:p>
+        </p:txBody>
+      </p:sp>
+      <p:sp>
+        <p:nvSpPr>
+          <p:cNvPr id="16" name="TextBox 15"/>
           <p:cNvSpPr txBox="1"/>
           <p:nvPr/>
         </p:nvSpPr>
         <p:spPr>
           <a:xfrm>
-            <a:off x="1005840" y="5248656"/>
-            <a:ext cx="10725912" cy="502920"/>
+            <a:off x="1097280" y="4846320"/>
+            <a:ext cx="10515600" cy="411480"/>
           </a:xfrm>
           <a:prstGeom prst="rect">
             <a:avLst/>
@@ -24820,33 +24775,33 @@
           <a:noFill/>
         </p:spPr>
         <p:txBody>
-          <a:bodyPr wrap="square">
+          <a:bodyPr wrap="none">
             <a:spAutoFit/>
           </a:bodyPr>
           <a:lstStyle/>
           <a:p>
             <a:pPr>
-              <a:defRPr sz="2200">
-                <a:solidFill>
-                  <a:srgbClr val="FFFFFF"/>
-                </a:solidFill>
-              </a:defRPr>
-            </a:pPr>
-            <a:r>
-              <a:t>Configure Claude Desktop, Voice Mode, and Personal Preferences</a:t>
-            </a:r>
-          </a:p>
-        </p:txBody>
-      </p:sp>
-      <p:sp>
-        <p:nvSpPr>
-          <p:cNvPr id="18" name="Oval 17"/>
+              <a:defRPr sz="2000">
+                <a:solidFill>
+                  <a:srgbClr val="D1D5DB"/>
+                </a:solidFill>
+              </a:defRPr>
+            </a:pPr>
+            <a:r>
+              <a:t>Analyze data in Claude.ai and Claude in Excel</a:t>
+            </a:r>
+          </a:p>
+        </p:txBody>
+      </p:sp>
+      <p:sp>
+        <p:nvSpPr>
+          <p:cNvPr id="17" name="Oval 16"/>
           <p:cNvSpPr/>
           <p:nvPr/>
         </p:nvSpPr>
         <p:spPr>
           <a:xfrm>
-            <a:off x="457200" y="5888736"/>
+            <a:off x="548640" y="5440679"/>
             <a:ext cx="365760" cy="365760"/>
           </a:xfrm>
           <a:prstGeom prst="ellipse">
@@ -24885,21 +24840,21 @@
               </a:defRPr>
             </a:pPr>
             <a:r>
-              <a:t>v</a:t>
-            </a:r>
-          </a:p>
-        </p:txBody>
-      </p:sp>
-      <p:sp>
-        <p:nvSpPr>
-          <p:cNvPr id="19" name="TextBox 18"/>
+              <a:t>✓</a:t>
+            </a:r>
+          </a:p>
+        </p:txBody>
+      </p:sp>
+      <p:sp>
+        <p:nvSpPr>
+          <p:cNvPr id="18" name="TextBox 17"/>
           <p:cNvSpPr txBox="1"/>
           <p:nvPr/>
         </p:nvSpPr>
         <p:spPr>
           <a:xfrm>
-            <a:off x="1005840" y="5907023"/>
-            <a:ext cx="10725912" cy="502920"/>
+            <a:off x="1097280" y="5440679"/>
+            <a:ext cx="10515600" cy="411480"/>
           </a:xfrm>
           <a:prstGeom prst="rect">
             <a:avLst/>
@@ -24907,20 +24862,20 @@
           <a:noFill/>
         </p:spPr>
         <p:txBody>
-          <a:bodyPr wrap="square">
+          <a:bodyPr wrap="none">
             <a:spAutoFit/>
           </a:bodyPr>
           <a:lstStyle/>
           <a:p>
             <a:pPr>
-              <a:defRPr sz="2200">
-                <a:solidFill>
-                  <a:srgbClr val="FFFFFF"/>
-                </a:solidFill>
-              </a:defRPr>
-            </a:pPr>
-            <a:r>
-              <a:t>Understand Claude's security model and data privacy controls</a:t>
+              <a:defRPr sz="2000">
+                <a:solidFill>
+                  <a:srgbClr val="D1D5DB"/>
+                </a:solidFill>
+              </a:defRPr>
+            </a:pPr>
+            <a:r>
+              <a:t>Use artifacts, file uploads, and integrations for business workflows</a:t>
             </a:r>
           </a:p>
         </p:txBody>

--- a/slides/Day1_Claude_for_Business.pptx
+++ b/slides/Day1_Claude_for_Business.pptx
@@ -2637,19 +2637,22 @@
           <a:lstStyle/>
           <a:p>
             <a:r>
+              <a:rPr dirty="0"/>
               <a:t>TIME: 2 min</a:t>
             </a:r>
           </a:p>
           <a:p>
-            <a:endParaRPr/>
-          </a:p>
-          <a:p>
-            <a:r>
+            <a:endParaRPr dirty="0"/>
+          </a:p>
+          <a:p>
+            <a:r>
+              <a:rPr dirty="0"/>
               <a:t>KEY POINTS:</a:t>
             </a:r>
           </a:p>
           <a:p>
             <a:r>
+              <a:rPr dirty="0"/>
               <a:t>   * Morning: Understanding Claude and how to talk to it effectively</a:t>
             </a:r>
           </a:p>
@@ -2660,24 +2663,28 @@
           </a:p>
           <a:p>
             <a:r>
+              <a:rPr dirty="0"/>
               <a:t>   * Two 15-minute breaks plus 1-hour lunch</a:t>
             </a:r>
           </a:p>
           <a:p>
             <a:r>
+              <a:rPr dirty="0"/>
               <a:t>   * Hands-on practice twice today</a:t>
             </a:r>
           </a:p>
           <a:p>
-            <a:endParaRPr/>
-          </a:p>
-          <a:p>
-            <a:r>
+            <a:endParaRPr dirty="0"/>
+          </a:p>
+          <a:p>
+            <a:r>
+              <a:rPr dirty="0"/>
               <a:t>TRANSITION:</a:t>
             </a:r>
           </a:p>
           <a:p>
             <a:r>
+              <a:rPr dirty="0"/>
               <a:t>   Let's see what you'll be able to do by end of day</a:t>
             </a:r>
           </a:p>
@@ -17591,7 +17598,7 @@
               </a:defRPr>
             </a:pPr>
             <a:r>
-              <a:t>Claude Landscape</a:t>
+              <a:t>Claude Interface</a:t>
             </a:r>
           </a:p>
         </p:txBody>
@@ -17707,7 +17714,8 @@
               </a:defRPr>
             </a:pPr>
             <a:r>
-              <a:t>Interface &amp; Projects</a:t>
+              <a:rPr dirty="0"/>
+              <a:t>Prompt Engineering &amp; Lab 1</a:t>
             </a:r>
           </a:p>
         </p:txBody>
@@ -17788,7 +17796,7 @@
               </a:defRPr>
             </a:pPr>
             <a:r>
-              <a:t>45 min</a:t>
+              <a:t>60 min</a:t>
             </a:r>
           </a:p>
         </p:txBody>
@@ -17983,7 +17991,7 @@
               </a:defRPr>
             </a:pPr>
             <a:r>
-              <a:t>Prompt Engineering</a:t>
+              <a:t>Claude Settings</a:t>
             </a:r>
           </a:p>
         </p:txBody>
@@ -18143,7 +18151,7 @@
               </a:defRPr>
             </a:pPr>
             <a:r>
-              <a:t>Lab 1</a:t>
+              <a:t>Projects &amp; Lab 2</a:t>
             </a:r>
           </a:p>
         </p:txBody>
@@ -18382,7 +18390,7 @@
               </a:defRPr>
             </a:pPr>
             <a:r>
-              <a:t>Claude in Excel</a:t>
+              <a:t>Analysis Prompts &amp; Claude in Excel</a:t>
             </a:r>
           </a:p>
         </p:txBody>
@@ -18498,7 +18506,7 @@
               </a:defRPr>
             </a:pPr>
             <a:r>
-              <a:t>Artifacts &amp; Files</a:t>
+              <a:t>Lab 3</a:t>
             </a:r>
           </a:p>
         </p:txBody>
@@ -18774,7 +18782,7 @@
               </a:defRPr>
             </a:pPr>
             <a:r>
-              <a:t>Lab 2</a:t>
+              <a:t>Artifacts &amp; Files</a:t>
             </a:r>
           </a:p>
         </p:txBody>
@@ -18934,7 +18942,7 @@
               </a:defRPr>
             </a:pPr>
             <a:r>
-              <a:t>Wrap-up &amp; Q&amp;A</a:t>
+              <a:t>Lab 4, Wrap-up &amp; Q&amp;A</a:t>
             </a:r>
           </a:p>
         </p:txBody>
@@ -20180,6 +20188,88 @@
       <p:sp>
         <p:nvSpPr>
           <p:cNvPr id="24" name="TextBox 23"/>
+          <p:cNvSpPr txBox="1"/>
+          <p:nvPr/>
+        </p:nvSpPr>
+        <p:spPr>
+          <a:xfrm>
+            <a:off x="9144000" y="5303520"/>
+            <a:ext cx="2194560" cy="365760"/>
+          </a:xfrm>
+          <a:prstGeom prst="rect">
+            <a:avLst/>
+          </a:prstGeom>
+          <a:noFill/>
+        </p:spPr>
+        <p:txBody>
+          <a:bodyPr wrap="none">
+            <a:spAutoFit/>
+          </a:bodyPr>
+          <a:lstStyle/>
+          <a:p>
+            <a:pPr algn="ctr">
+              <a:defRPr sz="1200" i="1">
+                <a:solidFill>
+                  <a:srgbClr val="14B8A6"/>
+                </a:solidFill>
+              </a:defRPr>
+            </a:pPr>
+            <a:r>
+              <a:t>5 min</a:t>
+            </a:r>
+          </a:p>
+        </p:txBody>
+      </p:sp>
+      <p:sp>
+        <p:nvSpPr>
+          <p:cNvPr id="25" name="TextBox 24"/>
+          <p:cNvSpPr txBox="1"/>
+          <p:nvPr/>
+        </p:nvSpPr>
+        <p:spPr>
+          <a:xfrm>
+            <a:off x="9144000" y="3749039"/>
+            <a:ext cx="2194560" cy="1645920"/>
+          </a:xfrm>
+          <a:prstGeom prst="rect">
+            <a:avLst/>
+          </a:prstGeom>
+          <a:noFill/>
+        </p:spPr>
+        <p:txBody>
+          <a:bodyPr wrap="square">
+            <a:spAutoFit/>
+          </a:bodyPr>
+          <a:lstStyle/>
+          <a:p>
+            <a:pPr algn="ctr">
+              <a:defRPr sz="1300">
+                <a:solidFill>
+                  <a:srgbClr val="D1D5DB"/>
+                </a:solidFill>
+              </a:defRPr>
+            </a:pPr>
+            <a:r>
+              <a:t>5 rapid-fire prompts</a:t>
+            </a:r>
+            <a:br/>
+            <a:r>
+              <a:t>for your actual job.</a:t>
+            </a:r>
+            <a:br/>
+            <a:r>
+              <a:t>Use what you learned.</a:t>
+            </a:r>
+            <a:br/>
+            <a:r>
+              <a:t>Keep the best outputs.</a:t>
+            </a:r>
+          </a:p>
+        </p:txBody>
+      </p:sp>
+      <p:sp>
+        <p:nvSpPr>
+          <p:cNvPr id="26" name="TextBox 25"/>
           <p:cNvSpPr txBox="1"/>
           <p:nvPr/>
         </p:nvSpPr>
@@ -25995,14 +26085,20 @@
       </p:grpSpPr>
       <p:sp>
         <p:nvSpPr>
-          <p:cNvPr id="2" name="TextBox 1"/>
+          <p:cNvPr id="2" name="TextBox 1">
+            <a:extLst>
+              <a:ext uri="{FF2B5EF4-FFF2-40B4-BE49-F238E27FC236}">
+                <a16:creationId xmlns:a16="http://schemas.microsoft.com/office/drawing/2014/main" id="{2512AD6E-847D-17B1-15AD-6F52430D57A3}"/>
+              </a:ext>
+            </a:extLst>
+          </p:cNvPr>
           <p:cNvSpPr txBox="1"/>
           <p:nvPr/>
         </p:nvSpPr>
         <p:spPr>
           <a:xfrm>
-            <a:off x="457200" y="274320"/>
-            <a:ext cx="11247120" cy="822960"/>
+            <a:off x="457200" y="457200"/>
+            <a:ext cx="11277295" cy="731520"/>
           </a:xfrm>
           <a:prstGeom prst="rect">
             <a:avLst/>
@@ -26015,29 +26111,142 @@
           </a:bodyPr>
           <a:lstStyle/>
           <a:p>
-            <a:pPr>
-              <a:defRPr sz="4000" b="1">
+            <a:pPr marL="0" marR="0" lvl="0" indent="0" algn="ctr" defTabSz="457200" rtl="0" eaLnBrk="1" fontAlgn="auto" latinLnBrk="0" hangingPunct="1">
+              <a:lnSpc>
+                <a:spcPct val="100000"/>
+              </a:lnSpc>
+              <a:spcBef>
+                <a:spcPts val="0"/>
+              </a:spcBef>
+              <a:spcAft>
+                <a:spcPts val="0"/>
+              </a:spcAft>
+              <a:buClrTx/>
+              <a:buSzTx/>
+              <a:buFontTx/>
+              <a:buNone/>
+              <a:tabLst/>
+              <a:defRPr sz="3600" b="1">
                 <a:solidFill>
                   <a:srgbClr val="FFFFFF"/>
                 </a:solidFill>
               </a:defRPr>
             </a:pPr>
             <a:r>
-              <a:t>Claude Apps: Desktop &amp; Mobile</a:t>
-            </a:r>
-          </a:p>
-        </p:txBody>
-      </p:sp>
-      <p:sp>
-        <p:nvSpPr>
-          <p:cNvPr id="3" name="TextBox 2"/>
+              <a:rPr kumimoji="0" sz="3600" b="1" i="0" u="none" strike="noStrike" kern="1200" cap="none" spc="0" normalizeH="0" baseline="0" noProof="0">
+                <a:ln>
+                  <a:noFill/>
+                </a:ln>
+                <a:solidFill>
+                  <a:srgbClr val="FFFFFF"/>
+                </a:solidFill>
+                <a:effectLst/>
+                <a:uLnTx/>
+                <a:uFillTx/>
+                <a:latin typeface="Calibri"/>
+                <a:ea typeface="+mn-ea"/>
+                <a:cs typeface="+mn-cs"/>
+              </a:rPr>
+              <a:t>Claude Desktop App: Autonomous Features</a:t>
+            </a:r>
+          </a:p>
+        </p:txBody>
+      </p:sp>
+      <p:sp>
+        <p:nvSpPr>
+          <p:cNvPr id="3" name="Rectangle 2">
+            <a:extLst>
+              <a:ext uri="{FF2B5EF4-FFF2-40B4-BE49-F238E27FC236}">
+                <a16:creationId xmlns:a16="http://schemas.microsoft.com/office/drawing/2014/main" id="{F2342D46-CB66-679A-1AF0-A4EC62C02D83}"/>
+              </a:ext>
+            </a:extLst>
+          </p:cNvPr>
+          <p:cNvSpPr/>
+          <p:nvPr/>
+        </p:nvSpPr>
+        <p:spPr>
+          <a:xfrm>
+            <a:off x="6077559" y="1371600"/>
+            <a:ext cx="36576" cy="4572000"/>
+          </a:xfrm>
+          <a:prstGeom prst="rect">
+            <a:avLst/>
+          </a:prstGeom>
+          <a:solidFill>
+            <a:srgbClr val="00D4AA"/>
+          </a:solidFill>
+          <a:ln>
+            <a:noFill/>
+          </a:ln>
+        </p:spPr>
+        <p:style>
+          <a:lnRef idx="1">
+            <a:schemeClr val="accent1"/>
+          </a:lnRef>
+          <a:fillRef idx="3">
+            <a:schemeClr val="accent1"/>
+          </a:fillRef>
+          <a:effectRef idx="2">
+            <a:schemeClr val="accent1"/>
+          </a:effectRef>
+          <a:fontRef idx="minor">
+            <a:schemeClr val="lt1"/>
+          </a:fontRef>
+        </p:style>
+        <p:txBody>
+          <a:bodyPr rtlCol="0" anchor="ctr"/>
+          <a:lstStyle/>
+          <a:p>
+            <a:pPr marL="0" marR="0" lvl="0" indent="0" algn="ctr" defTabSz="457200" rtl="0" eaLnBrk="1" fontAlgn="auto" latinLnBrk="0" hangingPunct="1">
+              <a:lnSpc>
+                <a:spcPct val="100000"/>
+              </a:lnSpc>
+              <a:spcBef>
+                <a:spcPts val="0"/>
+              </a:spcBef>
+              <a:spcAft>
+                <a:spcPts val="0"/>
+              </a:spcAft>
+              <a:buClrTx/>
+              <a:buSzTx/>
+              <a:buFontTx/>
+              <a:buNone/>
+              <a:tabLst/>
+              <a:defRPr/>
+            </a:pPr>
+            <a:endParaRPr kumimoji="0" sz="1800" b="0" i="0" u="none" strike="noStrike" kern="1200" cap="none" spc="0" normalizeH="0" baseline="0" noProof="0">
+              <a:ln>
+                <a:noFill/>
+              </a:ln>
+              <a:solidFill>
+                <a:prstClr val="white"/>
+              </a:solidFill>
+              <a:effectLst/>
+              <a:uLnTx/>
+              <a:uFillTx/>
+              <a:latin typeface="Calibri"/>
+              <a:ea typeface="+mn-ea"/>
+              <a:cs typeface="+mn-cs"/>
+            </a:endParaRPr>
+          </a:p>
+        </p:txBody>
+      </p:sp>
+      <p:sp>
+        <p:nvSpPr>
+          <p:cNvPr id="4" name="TextBox 3">
+            <a:extLst>
+              <a:ext uri="{FF2B5EF4-FFF2-40B4-BE49-F238E27FC236}">
+                <a16:creationId xmlns:a16="http://schemas.microsoft.com/office/drawing/2014/main" id="{73C77848-149A-A14D-E3EE-836747772290}"/>
+              </a:ext>
+            </a:extLst>
+          </p:cNvPr>
           <p:cNvSpPr txBox="1"/>
           <p:nvPr/>
         </p:nvSpPr>
         <p:spPr>
           <a:xfrm>
-            <a:off x="457200" y="1097280"/>
-            <a:ext cx="11247120" cy="457200"/>
+            <a:off x="457200" y="1463040"/>
+            <a:ext cx="5364327" cy="731520"/>
           </a:xfrm>
           <a:prstGeom prst="rect">
             <a:avLst/>
@@ -26050,6 +26259,751 @@
           </a:bodyPr>
           <a:lstStyle/>
           <a:p>
+            <a:pPr marL="0" marR="0" lvl="0" indent="0" algn="ctr" defTabSz="457200" rtl="0" eaLnBrk="1" fontAlgn="auto" latinLnBrk="0" hangingPunct="1">
+              <a:lnSpc>
+                <a:spcPct val="100000"/>
+              </a:lnSpc>
+              <a:spcBef>
+                <a:spcPts val="0"/>
+              </a:spcBef>
+              <a:spcAft>
+                <a:spcPts val="0"/>
+              </a:spcAft>
+              <a:buClrTx/>
+              <a:buSzTx/>
+              <a:buFontTx/>
+              <a:buNone/>
+              <a:tabLst/>
+              <a:defRPr sz="2800" b="1">
+                <a:solidFill>
+                  <a:srgbClr val="0078D4"/>
+                </a:solidFill>
+              </a:defRPr>
+            </a:pPr>
+            <a:r>
+              <a:rPr kumimoji="0" sz="2800" b="1" i="0" u="none" strike="noStrike" kern="1200" cap="none" spc="0" normalizeH="0" baseline="0" noProof="0">
+                <a:ln>
+                  <a:noFill/>
+                </a:ln>
+                <a:solidFill>
+                  <a:srgbClr val="0078D4"/>
+                </a:solidFill>
+                <a:effectLst/>
+                <a:uLnTx/>
+                <a:uFillTx/>
+                <a:latin typeface="Calibri"/>
+                <a:ea typeface="+mn-ea"/>
+                <a:cs typeface="+mn-cs"/>
+              </a:rPr>
+              <a:t>Claude.ai (What You Know)</a:t>
+            </a:r>
+          </a:p>
+        </p:txBody>
+      </p:sp>
+      <p:sp>
+        <p:nvSpPr>
+          <p:cNvPr id="5" name="TextBox 4">
+            <a:extLst>
+              <a:ext uri="{FF2B5EF4-FFF2-40B4-BE49-F238E27FC236}">
+                <a16:creationId xmlns:a16="http://schemas.microsoft.com/office/drawing/2014/main" id="{1C183914-50C0-E52E-1C75-A7BCAB4D4A0A}"/>
+              </a:ext>
+            </a:extLst>
+          </p:cNvPr>
+          <p:cNvSpPr txBox="1"/>
+          <p:nvPr/>
+        </p:nvSpPr>
+        <p:spPr>
+          <a:xfrm>
+            <a:off x="457200" y="2286000"/>
+            <a:ext cx="5364327" cy="3657600"/>
+          </a:xfrm>
+          <a:prstGeom prst="rect">
+            <a:avLst/>
+          </a:prstGeom>
+          <a:noFill/>
+        </p:spPr>
+        <p:txBody>
+          <a:bodyPr wrap="square">
+            <a:spAutoFit/>
+          </a:bodyPr>
+          <a:lstStyle/>
+          <a:p>
+            <a:pPr marL="0" marR="0" lvl="0" indent="0" algn="l" defTabSz="457200" rtl="0" eaLnBrk="1" fontAlgn="auto" latinLnBrk="0" hangingPunct="1">
+              <a:lnSpc>
+                <a:spcPct val="100000"/>
+              </a:lnSpc>
+              <a:spcBef>
+                <a:spcPts val="0"/>
+              </a:spcBef>
+              <a:spcAft>
+                <a:spcPts val="1200"/>
+              </a:spcAft>
+              <a:buClrTx/>
+              <a:buSzTx/>
+              <a:buFontTx/>
+              <a:buNone/>
+              <a:tabLst/>
+              <a:defRPr sz="1800">
+                <a:solidFill>
+                  <a:srgbClr val="FFFFFF"/>
+                </a:solidFill>
+              </a:defRPr>
+            </a:pPr>
+            <a:r>
+              <a:rPr kumimoji="0" sz="1800" b="0" i="0" u="none" strike="noStrike" kern="1200" cap="none" spc="0" normalizeH="0" baseline="0" noProof="0">
+                <a:ln>
+                  <a:noFill/>
+                </a:ln>
+                <a:solidFill>
+                  <a:srgbClr val="FFFFFF"/>
+                </a:solidFill>
+                <a:effectLst/>
+                <a:uLnTx/>
+                <a:uFillTx/>
+                <a:latin typeface="Calibri"/>
+                <a:ea typeface="+mn-ea"/>
+                <a:cs typeface="+mn-cs"/>
+              </a:rPr>
+              <a:t>  Back-and-forth conversation</a:t>
+            </a:r>
+          </a:p>
+          <a:p>
+            <a:pPr marL="0" marR="0" lvl="0" indent="0" algn="l" defTabSz="457200" rtl="0" eaLnBrk="1" fontAlgn="auto" latinLnBrk="0" hangingPunct="1">
+              <a:lnSpc>
+                <a:spcPct val="100000"/>
+              </a:lnSpc>
+              <a:spcBef>
+                <a:spcPts val="0"/>
+              </a:spcBef>
+              <a:spcAft>
+                <a:spcPts val="1200"/>
+              </a:spcAft>
+              <a:buClrTx/>
+              <a:buSzTx/>
+              <a:buFontTx/>
+              <a:buNone/>
+              <a:tabLst/>
+              <a:defRPr sz="1800">
+                <a:solidFill>
+                  <a:srgbClr val="FFFFFF"/>
+                </a:solidFill>
+              </a:defRPr>
+            </a:pPr>
+            <a:r>
+              <a:rPr kumimoji="0" sz="1800" b="0" i="0" u="none" strike="noStrike" kern="1200" cap="none" spc="0" normalizeH="0" baseline="0" noProof="0">
+                <a:ln>
+                  <a:noFill/>
+                </a:ln>
+                <a:solidFill>
+                  <a:srgbClr val="FFFFFF"/>
+                </a:solidFill>
+                <a:effectLst/>
+                <a:uLnTx/>
+                <a:uFillTx/>
+                <a:latin typeface="Calibri"/>
+                <a:ea typeface="+mn-ea"/>
+                <a:cs typeface="+mn-cs"/>
+              </a:rPr>
+              <a:t>  You ask → Claude answers → repeat</a:t>
+            </a:r>
+          </a:p>
+          <a:p>
+            <a:pPr marL="0" marR="0" lvl="0" indent="0" algn="l" defTabSz="457200" rtl="0" eaLnBrk="1" fontAlgn="auto" latinLnBrk="0" hangingPunct="1">
+              <a:lnSpc>
+                <a:spcPct val="100000"/>
+              </a:lnSpc>
+              <a:spcBef>
+                <a:spcPts val="0"/>
+              </a:spcBef>
+              <a:spcAft>
+                <a:spcPts val="1200"/>
+              </a:spcAft>
+              <a:buClrTx/>
+              <a:buSzTx/>
+              <a:buFontTx/>
+              <a:buNone/>
+              <a:tabLst/>
+              <a:defRPr sz="1800">
+                <a:solidFill>
+                  <a:srgbClr val="FFFFFF"/>
+                </a:solidFill>
+              </a:defRPr>
+            </a:pPr>
+            <a:r>
+              <a:rPr kumimoji="0" sz="1800" b="0" i="0" u="none" strike="noStrike" kern="1200" cap="none" spc="0" normalizeH="0" baseline="0" noProof="0">
+                <a:ln>
+                  <a:noFill/>
+                </a:ln>
+                <a:solidFill>
+                  <a:srgbClr val="FFFFFF"/>
+                </a:solidFill>
+                <a:effectLst/>
+                <a:uLnTx/>
+                <a:uFillTx/>
+                <a:latin typeface="Calibri"/>
+                <a:ea typeface="+mn-ea"/>
+                <a:cs typeface="+mn-cs"/>
+              </a:rPr>
+              <a:t>  You stay in the chat the whole time</a:t>
+            </a:r>
+          </a:p>
+          <a:p>
+            <a:pPr marL="0" marR="0" lvl="0" indent="0" algn="l" defTabSz="457200" rtl="0" eaLnBrk="1" fontAlgn="auto" latinLnBrk="0" hangingPunct="1">
+              <a:lnSpc>
+                <a:spcPct val="100000"/>
+              </a:lnSpc>
+              <a:spcBef>
+                <a:spcPts val="0"/>
+              </a:spcBef>
+              <a:spcAft>
+                <a:spcPts val="1200"/>
+              </a:spcAft>
+              <a:buClrTx/>
+              <a:buSzTx/>
+              <a:buFontTx/>
+              <a:buNone/>
+              <a:tabLst/>
+              <a:defRPr sz="1800">
+                <a:solidFill>
+                  <a:srgbClr val="FFFFFF"/>
+                </a:solidFill>
+              </a:defRPr>
+            </a:pPr>
+            <a:r>
+              <a:rPr kumimoji="0" sz="1800" b="0" i="0" u="none" strike="noStrike" kern="1200" cap="none" spc="0" normalizeH="0" baseline="0" noProof="0">
+                <a:ln>
+                  <a:noFill/>
+                </a:ln>
+                <a:solidFill>
+                  <a:srgbClr val="FFFFFF"/>
+                </a:solidFill>
+                <a:effectLst/>
+                <a:uLnTx/>
+                <a:uFillTx/>
+                <a:latin typeface="Calibri"/>
+                <a:ea typeface="+mn-ea"/>
+                <a:cs typeface="+mn-cs"/>
+              </a:rPr>
+              <a:t>  Great for real-time collaboration</a:t>
+            </a:r>
+          </a:p>
+          <a:p>
+            <a:pPr marL="0" marR="0" lvl="0" indent="0" algn="l" defTabSz="457200" rtl="0" eaLnBrk="1" fontAlgn="auto" latinLnBrk="0" hangingPunct="1">
+              <a:lnSpc>
+                <a:spcPct val="100000"/>
+              </a:lnSpc>
+              <a:spcBef>
+                <a:spcPts val="0"/>
+              </a:spcBef>
+              <a:spcAft>
+                <a:spcPts val="1200"/>
+              </a:spcAft>
+              <a:buClrTx/>
+              <a:buSzTx/>
+              <a:buFontTx/>
+              <a:buNone/>
+              <a:tabLst/>
+              <a:defRPr sz="1800">
+                <a:solidFill>
+                  <a:srgbClr val="FFFFFF"/>
+                </a:solidFill>
+              </a:defRPr>
+            </a:pPr>
+            <a:r>
+              <a:rPr kumimoji="0" sz="1800" b="0" i="0" u="none" strike="noStrike" kern="1200" cap="none" spc="0" normalizeH="0" baseline="0" noProof="0">
+                <a:ln>
+                  <a:noFill/>
+                </a:ln>
+                <a:solidFill>
+                  <a:srgbClr val="FFFFFF"/>
+                </a:solidFill>
+                <a:effectLst/>
+                <a:uLnTx/>
+                <a:uFillTx/>
+                <a:latin typeface="Calibri"/>
+                <a:ea typeface="+mn-ea"/>
+                <a:cs typeface="+mn-cs"/>
+              </a:rPr>
+              <a:t>  Immediate feedback and iteration</a:t>
+            </a:r>
+          </a:p>
+        </p:txBody>
+      </p:sp>
+      <p:sp>
+        <p:nvSpPr>
+          <p:cNvPr id="6" name="TextBox 5">
+            <a:extLst>
+              <a:ext uri="{FF2B5EF4-FFF2-40B4-BE49-F238E27FC236}">
+                <a16:creationId xmlns:a16="http://schemas.microsoft.com/office/drawing/2014/main" id="{1B1B1D5D-E934-7C33-E35D-0D76F7A0930D}"/>
+              </a:ext>
+            </a:extLst>
+          </p:cNvPr>
+          <p:cNvSpPr txBox="1"/>
+          <p:nvPr/>
+        </p:nvSpPr>
+        <p:spPr>
+          <a:xfrm>
+            <a:off x="6370167" y="1463040"/>
+            <a:ext cx="5364327" cy="731520"/>
+          </a:xfrm>
+          <a:prstGeom prst="rect">
+            <a:avLst/>
+          </a:prstGeom>
+          <a:noFill/>
+        </p:spPr>
+        <p:txBody>
+          <a:bodyPr wrap="none">
+            <a:spAutoFit/>
+          </a:bodyPr>
+          <a:lstStyle/>
+          <a:p>
+            <a:pPr marL="0" marR="0" lvl="0" indent="0" algn="ctr" defTabSz="457200" rtl="0" eaLnBrk="1" fontAlgn="auto" latinLnBrk="0" hangingPunct="1">
+              <a:lnSpc>
+                <a:spcPct val="100000"/>
+              </a:lnSpc>
+              <a:spcBef>
+                <a:spcPts val="0"/>
+              </a:spcBef>
+              <a:spcAft>
+                <a:spcPts val="0"/>
+              </a:spcAft>
+              <a:buClrTx/>
+              <a:buSzTx/>
+              <a:buFontTx/>
+              <a:buNone/>
+              <a:tabLst/>
+              <a:defRPr sz="2800" b="1">
+                <a:solidFill>
+                  <a:srgbClr val="00D4AA"/>
+                </a:solidFill>
+              </a:defRPr>
+            </a:pPr>
+            <a:r>
+              <a:rPr kumimoji="0" sz="2800" b="1" i="0" u="none" strike="noStrike" kern="1200" cap="none" spc="0" normalizeH="0" baseline="0" noProof="0">
+                <a:ln>
+                  <a:noFill/>
+                </a:ln>
+                <a:solidFill>
+                  <a:srgbClr val="00D4AA"/>
+                </a:solidFill>
+                <a:effectLst/>
+                <a:uLnTx/>
+                <a:uFillTx/>
+                <a:latin typeface="Calibri"/>
+                <a:ea typeface="+mn-ea"/>
+                <a:cs typeface="+mn-cs"/>
+              </a:rPr>
+              <a:t>Claude for Work (NEW Preview)</a:t>
+            </a:r>
+          </a:p>
+        </p:txBody>
+      </p:sp>
+      <p:sp>
+        <p:nvSpPr>
+          <p:cNvPr id="7" name="TextBox 6">
+            <a:extLst>
+              <a:ext uri="{FF2B5EF4-FFF2-40B4-BE49-F238E27FC236}">
+                <a16:creationId xmlns:a16="http://schemas.microsoft.com/office/drawing/2014/main" id="{9AEEBC51-4FB4-1A8D-646C-94CAA517A4B3}"/>
+              </a:ext>
+            </a:extLst>
+          </p:cNvPr>
+          <p:cNvSpPr txBox="1"/>
+          <p:nvPr/>
+        </p:nvSpPr>
+        <p:spPr>
+          <a:xfrm>
+            <a:off x="6370167" y="2286000"/>
+            <a:ext cx="5364327" cy="3657600"/>
+          </a:xfrm>
+          <a:prstGeom prst="rect">
+            <a:avLst/>
+          </a:prstGeom>
+          <a:noFill/>
+        </p:spPr>
+        <p:txBody>
+          <a:bodyPr wrap="square">
+            <a:spAutoFit/>
+          </a:bodyPr>
+          <a:lstStyle/>
+          <a:p>
+            <a:pPr marL="0" marR="0" lvl="0" indent="0" algn="l" defTabSz="457200" rtl="0" eaLnBrk="1" fontAlgn="auto" latinLnBrk="0" hangingPunct="1">
+              <a:lnSpc>
+                <a:spcPct val="100000"/>
+              </a:lnSpc>
+              <a:spcBef>
+                <a:spcPts val="0"/>
+              </a:spcBef>
+              <a:spcAft>
+                <a:spcPts val="1200"/>
+              </a:spcAft>
+              <a:buClrTx/>
+              <a:buSzTx/>
+              <a:buFontTx/>
+              <a:buNone/>
+              <a:tabLst/>
+              <a:defRPr sz="1800">
+                <a:solidFill>
+                  <a:srgbClr val="FFFFFF"/>
+                </a:solidFill>
+              </a:defRPr>
+            </a:pPr>
+            <a:r>
+              <a:rPr kumimoji="0" sz="1800" b="0" i="0" u="none" strike="noStrike" kern="1200" cap="none" spc="0" normalizeH="0" baseline="0" noProof="0">
+                <a:ln>
+                  <a:noFill/>
+                </a:ln>
+                <a:solidFill>
+                  <a:srgbClr val="FFFFFF"/>
+                </a:solidFill>
+                <a:effectLst/>
+                <a:uLnTx/>
+                <a:uFillTx/>
+                <a:latin typeface="Calibri"/>
+                <a:ea typeface="+mn-ea"/>
+                <a:cs typeface="+mn-cs"/>
+              </a:rPr>
+              <a:t>  Three modes: Chat, Cowork, Code tabs</a:t>
+            </a:r>
+          </a:p>
+          <a:p>
+            <a:pPr marL="0" marR="0" lvl="0" indent="0" algn="l" defTabSz="457200" rtl="0" eaLnBrk="1" fontAlgn="auto" latinLnBrk="0" hangingPunct="1">
+              <a:lnSpc>
+                <a:spcPct val="100000"/>
+              </a:lnSpc>
+              <a:spcBef>
+                <a:spcPts val="0"/>
+              </a:spcBef>
+              <a:spcAft>
+                <a:spcPts val="1200"/>
+              </a:spcAft>
+              <a:buClrTx/>
+              <a:buSzTx/>
+              <a:buFontTx/>
+              <a:buNone/>
+              <a:tabLst/>
+              <a:defRPr sz="1800">
+                <a:solidFill>
+                  <a:srgbClr val="FFFFFF"/>
+                </a:solidFill>
+              </a:defRPr>
+            </a:pPr>
+            <a:r>
+              <a:rPr kumimoji="0" sz="1800" b="0" i="0" u="none" strike="noStrike" kern="1200" cap="none" spc="0" normalizeH="0" baseline="0" noProof="0">
+                <a:ln>
+                  <a:noFill/>
+                </a:ln>
+                <a:solidFill>
+                  <a:srgbClr val="FFFFFF"/>
+                </a:solidFill>
+                <a:effectLst/>
+                <a:uLnTx/>
+                <a:uFillTx/>
+                <a:latin typeface="Calibri"/>
+                <a:ea typeface="+mn-ea"/>
+                <a:cs typeface="+mn-cs"/>
+              </a:rPr>
+              <a:t>  Set goal → Walk away → Come back later</a:t>
+            </a:r>
+          </a:p>
+          <a:p>
+            <a:pPr marL="0" marR="0" lvl="0" indent="0" algn="l" defTabSz="457200" rtl="0" eaLnBrk="1" fontAlgn="auto" latinLnBrk="0" hangingPunct="1">
+              <a:lnSpc>
+                <a:spcPct val="100000"/>
+              </a:lnSpc>
+              <a:spcBef>
+                <a:spcPts val="0"/>
+              </a:spcBef>
+              <a:spcAft>
+                <a:spcPts val="1200"/>
+              </a:spcAft>
+              <a:buClrTx/>
+              <a:buSzTx/>
+              <a:buFontTx/>
+              <a:buNone/>
+              <a:tabLst/>
+              <a:defRPr sz="1800">
+                <a:solidFill>
+                  <a:srgbClr val="FFFFFF"/>
+                </a:solidFill>
+              </a:defRPr>
+            </a:pPr>
+            <a:r>
+              <a:rPr kumimoji="0" sz="1800" b="0" i="0" u="none" strike="noStrike" kern="1200" cap="none" spc="0" normalizeH="0" baseline="0" noProof="0">
+                <a:ln>
+                  <a:noFill/>
+                </a:ln>
+                <a:solidFill>
+                  <a:srgbClr val="FFFFFF"/>
+                </a:solidFill>
+                <a:effectLst/>
+                <a:uLnTx/>
+                <a:uFillTx/>
+                <a:latin typeface="Calibri"/>
+                <a:ea typeface="+mn-ea"/>
+                <a:cs typeface="+mn-cs"/>
+              </a:rPr>
+              <a:t>  Works autonomously in background</a:t>
+            </a:r>
+          </a:p>
+          <a:p>
+            <a:pPr marL="0" marR="0" lvl="0" indent="0" algn="l" defTabSz="457200" rtl="0" eaLnBrk="1" fontAlgn="auto" latinLnBrk="0" hangingPunct="1">
+              <a:lnSpc>
+                <a:spcPct val="100000"/>
+              </a:lnSpc>
+              <a:spcBef>
+                <a:spcPts val="0"/>
+              </a:spcBef>
+              <a:spcAft>
+                <a:spcPts val="1200"/>
+              </a:spcAft>
+              <a:buClrTx/>
+              <a:buSzTx/>
+              <a:buFontTx/>
+              <a:buNone/>
+              <a:tabLst/>
+              <a:defRPr sz="1800">
+                <a:solidFill>
+                  <a:srgbClr val="FFFFFF"/>
+                </a:solidFill>
+              </a:defRPr>
+            </a:pPr>
+            <a:r>
+              <a:rPr kumimoji="0" sz="1800" b="0" i="0" u="none" strike="noStrike" kern="1200" cap="none" spc="0" normalizeH="0" baseline="0" noProof="0">
+                <a:ln>
+                  <a:noFill/>
+                </a:ln>
+                <a:solidFill>
+                  <a:srgbClr val="FFFFFF"/>
+                </a:solidFill>
+                <a:effectLst/>
+                <a:uLnTx/>
+                <a:uFillTx/>
+                <a:latin typeface="Calibri"/>
+                <a:ea typeface="+mn-ea"/>
+                <a:cs typeface="+mn-cs"/>
+              </a:rPr>
+              <a:t>  Handles complex multi-step tasks</a:t>
+            </a:r>
+          </a:p>
+          <a:p>
+            <a:pPr marL="0" marR="0" lvl="0" indent="0" algn="l" defTabSz="457200" rtl="0" eaLnBrk="1" fontAlgn="auto" latinLnBrk="0" hangingPunct="1">
+              <a:lnSpc>
+                <a:spcPct val="100000"/>
+              </a:lnSpc>
+              <a:spcBef>
+                <a:spcPts val="0"/>
+              </a:spcBef>
+              <a:spcAft>
+                <a:spcPts val="1200"/>
+              </a:spcAft>
+              <a:buClrTx/>
+              <a:buSzTx/>
+              <a:buFontTx/>
+              <a:buNone/>
+              <a:tabLst/>
+              <a:defRPr sz="1800">
+                <a:solidFill>
+                  <a:srgbClr val="FFFFFF"/>
+                </a:solidFill>
+              </a:defRPr>
+            </a:pPr>
+            <a:r>
+              <a:rPr kumimoji="0" sz="1800" b="0" i="0" u="none" strike="noStrike" kern="1200" cap="none" spc="0" normalizeH="0" baseline="0" noProof="0">
+                <a:ln>
+                  <a:noFill/>
+                </a:ln>
+                <a:solidFill>
+                  <a:srgbClr val="FFFFFF"/>
+                </a:solidFill>
+                <a:effectLst/>
+                <a:uLnTx/>
+                <a:uFillTx/>
+                <a:latin typeface="Calibri"/>
+                <a:ea typeface="+mn-ea"/>
+                <a:cs typeface="+mn-cs"/>
+              </a:rPr>
+              <a:t>  Task presets: 'Optimize my week', 'Organize screenshots', etc.</a:t>
+            </a:r>
+          </a:p>
+          <a:p>
+            <a:pPr marL="0" marR="0" lvl="0" indent="0" algn="l" defTabSz="457200" rtl="0" eaLnBrk="1" fontAlgn="auto" latinLnBrk="0" hangingPunct="1">
+              <a:lnSpc>
+                <a:spcPct val="100000"/>
+              </a:lnSpc>
+              <a:spcBef>
+                <a:spcPts val="0"/>
+              </a:spcBef>
+              <a:spcAft>
+                <a:spcPts val="1200"/>
+              </a:spcAft>
+              <a:buClrTx/>
+              <a:buSzTx/>
+              <a:buFontTx/>
+              <a:buNone/>
+              <a:tabLst/>
+              <a:defRPr sz="1800">
+                <a:solidFill>
+                  <a:srgbClr val="FFFFFF"/>
+                </a:solidFill>
+              </a:defRPr>
+            </a:pPr>
+            <a:r>
+              <a:rPr kumimoji="0" sz="1800" b="0" i="0" u="none" strike="noStrike" kern="1200" cap="none" spc="0" normalizeH="0" baseline="0" noProof="0">
+                <a:ln>
+                  <a:noFill/>
+                </a:ln>
+                <a:solidFill>
+                  <a:srgbClr val="FFFFFF"/>
+                </a:solidFill>
+                <a:effectLst/>
+                <a:uLnTx/>
+                <a:uFillTx/>
+                <a:latin typeface="Calibri"/>
+                <a:ea typeface="+mn-ea"/>
+                <a:cs typeface="+mn-cs"/>
+              </a:rPr>
+              <a:t>  You check in when YOU want</a:t>
+            </a:r>
+          </a:p>
+          <a:p>
+            <a:pPr marL="0" marR="0" lvl="0" indent="0" algn="l" defTabSz="457200" rtl="0" eaLnBrk="1" fontAlgn="auto" latinLnBrk="0" hangingPunct="1">
+              <a:lnSpc>
+                <a:spcPct val="100000"/>
+              </a:lnSpc>
+              <a:spcBef>
+                <a:spcPts val="0"/>
+              </a:spcBef>
+              <a:spcAft>
+                <a:spcPts val="1200"/>
+              </a:spcAft>
+              <a:buClrTx/>
+              <a:buSzTx/>
+              <a:buFontTx/>
+              <a:buNone/>
+              <a:tabLst/>
+              <a:defRPr sz="1800">
+                <a:solidFill>
+                  <a:srgbClr val="FFFFFF"/>
+                </a:solidFill>
+              </a:defRPr>
+            </a:pPr>
+            <a:r>
+              <a:rPr kumimoji="0" sz="1800" b="0" i="0" u="none" strike="noStrike" kern="1200" cap="none" spc="0" normalizeH="0" baseline="0" noProof="0">
+                <a:ln>
+                  <a:noFill/>
+                </a:ln>
+                <a:solidFill>
+                  <a:srgbClr val="FFFFFF"/>
+                </a:solidFill>
+                <a:effectLst/>
+                <a:uLnTx/>
+                <a:uFillTx/>
+                <a:latin typeface="Calibri"/>
+                <a:ea typeface="+mn-ea"/>
+                <a:cs typeface="+mn-cs"/>
+              </a:rPr>
+              <a:t>  Available: Windows + Mac Preview</a:t>
+            </a:r>
+          </a:p>
+          <a:p>
+            <a:pPr marL="0" marR="0" lvl="0" indent="0" algn="l" defTabSz="457200" rtl="0" eaLnBrk="1" fontAlgn="auto" latinLnBrk="0" hangingPunct="1">
+              <a:lnSpc>
+                <a:spcPct val="100000"/>
+              </a:lnSpc>
+              <a:spcBef>
+                <a:spcPts val="0"/>
+              </a:spcBef>
+              <a:spcAft>
+                <a:spcPts val="1200"/>
+              </a:spcAft>
+              <a:buClrTx/>
+              <a:buSzTx/>
+              <a:buFontTx/>
+              <a:buNone/>
+              <a:tabLst/>
+              <a:defRPr sz="1800">
+                <a:solidFill>
+                  <a:srgbClr val="FFFFFF"/>
+                </a:solidFill>
+              </a:defRPr>
+            </a:pPr>
+            <a:r>
+              <a:rPr kumimoji="0" sz="1800" b="0" i="0" u="none" strike="noStrike" kern="1200" cap="none" spc="0" normalizeH="0" baseline="0" noProof="0">
+                <a:ln>
+                  <a:noFill/>
+                </a:ln>
+                <a:solidFill>
+                  <a:srgbClr val="FFFFFF"/>
+                </a:solidFill>
+                <a:effectLst/>
+                <a:uLnTx/>
+                <a:uFillTx/>
+                <a:latin typeface="Calibri"/>
+                <a:ea typeface="+mn-ea"/>
+                <a:cs typeface="+mn-cs"/>
+              </a:rPr>
+              <a:t>  Plugin integration (customize workflows)</a:t>
+            </a:r>
+          </a:p>
+        </p:txBody>
+      </p:sp>
+      <p:sp>
+        <p:nvSpPr>
+          <p:cNvPr id="14" name="TextBox 13"/>
+          <p:cNvSpPr txBox="1"/>
+          <p:nvPr/>
+        </p:nvSpPr>
+        <p:spPr>
+          <a:xfrm>
+            <a:off x="457200" y="274320"/>
+            <a:ext cx="11247120" cy="822960"/>
+          </a:xfrm>
+          <a:prstGeom prst="rect">
+            <a:avLst/>
+          </a:prstGeom>
+          <a:noFill/>
+        </p:spPr>
+        <p:txBody>
+          <a:bodyPr wrap="none">
+            <a:spAutoFit/>
+          </a:bodyPr>
+          <a:lstStyle/>
+          <a:p>
+            <a:pPr>
+              <a:defRPr sz="4000" b="1">
+                <a:solidFill>
+                  <a:srgbClr val="FFFFFF"/>
+                </a:solidFill>
+              </a:defRPr>
+            </a:pPr>
+            <a:r>
+              <a:t>Claude Apps: Desktop &amp; Mobile</a:t>
+            </a:r>
+          </a:p>
+        </p:txBody>
+      </p:sp>
+      <p:sp>
+        <p:nvSpPr>
+          <p:cNvPr id="15" name="TextBox 14"/>
+          <p:cNvSpPr txBox="1"/>
+          <p:nvPr/>
+        </p:nvSpPr>
+        <p:spPr>
+          <a:xfrm>
+            <a:off x="457200" y="1097280"/>
+            <a:ext cx="11247120" cy="457200"/>
+          </a:xfrm>
+          <a:prstGeom prst="rect">
+            <a:avLst/>
+          </a:prstGeom>
+          <a:noFill/>
+        </p:spPr>
+        <p:txBody>
+          <a:bodyPr wrap="none">
+            <a:spAutoFit/>
+          </a:bodyPr>
+          <a:lstStyle/>
+          <a:p>
             <a:pPr>
               <a:defRPr sz="2000" i="1">
                 <a:solidFill>
@@ -26065,7 +27019,7 @@
       </p:sp>
       <p:sp>
         <p:nvSpPr>
-          <p:cNvPr id="4" name="Rounded Rectangle 3"/>
+          <p:cNvPr id="16" name="Rounded Rectangle 3"/>
           <p:cNvSpPr/>
           <p:nvPr/>
         </p:nvSpPr>
@@ -26105,12 +27059,13 @@
           <a:lstStyle/>
           <a:p>
             <a:pPr algn="ctr"/>
-          </a:p>
-        </p:txBody>
-      </p:sp>
-      <p:sp>
-        <p:nvSpPr>
-          <p:cNvPr id="5" name="TextBox 4"/>
+            <a:endParaRPr/>
+          </a:p>
+        </p:txBody>
+      </p:sp>
+      <p:sp>
+        <p:nvSpPr>
+          <p:cNvPr id="17" name="TextBox 16"/>
           <p:cNvSpPr txBox="1"/>
           <p:nvPr/>
         </p:nvSpPr>
@@ -26141,7 +27096,7 @@
       </p:sp>
       <p:sp>
         <p:nvSpPr>
-          <p:cNvPr id="6" name="TextBox 5"/>
+          <p:cNvPr id="18" name="TextBox 17"/>
           <p:cNvSpPr txBox="1"/>
           <p:nvPr/>
         </p:nvSpPr>
@@ -26176,7 +27131,7 @@
       </p:sp>
       <p:sp>
         <p:nvSpPr>
-          <p:cNvPr id="7" name="TextBox 6"/>
+          <p:cNvPr id="19" name="TextBox 18"/>
           <p:cNvSpPr txBox="1"/>
           <p:nvPr/>
         </p:nvSpPr>
@@ -26309,6 +27264,7 @@
           <a:lstStyle/>
           <a:p>
             <a:pPr algn="ctr"/>
+            <a:endParaRPr/>
           </a:p>
         </p:txBody>
       </p:sp>
@@ -26517,14 +27473,20 @@
       </p:grpSpPr>
       <p:sp>
         <p:nvSpPr>
-          <p:cNvPr id="2" name="TextBox 1"/>
+          <p:cNvPr id="2" name="TextBox 1">
+            <a:extLst>
+              <a:ext uri="{FF2B5EF4-FFF2-40B4-BE49-F238E27FC236}">
+                <a16:creationId xmlns:a16="http://schemas.microsoft.com/office/drawing/2014/main" id="{BB6F2101-4F98-C246-7F6A-CA3CC9B094DC}"/>
+              </a:ext>
+            </a:extLst>
+          </p:cNvPr>
           <p:cNvSpPr txBox="1"/>
           <p:nvPr/>
         </p:nvSpPr>
         <p:spPr>
           <a:xfrm>
-            <a:off x="457200" y="274320"/>
-            <a:ext cx="11247120" cy="822960"/>
+            <a:off x="457200" y="365760"/>
+            <a:ext cx="11277295" cy="822960"/>
           </a:xfrm>
           <a:prstGeom prst="rect">
             <a:avLst/>
@@ -26537,7 +27499,21 @@
           </a:bodyPr>
           <a:lstStyle/>
           <a:p>
-            <a:pPr>
+            <a:pPr marL="0" marR="0" lvl="0" indent="0" algn="l" defTabSz="457200" rtl="0" eaLnBrk="1" fontAlgn="auto" latinLnBrk="0" hangingPunct="1">
+              <a:lnSpc>
+                <a:spcPct val="100000"/>
+              </a:lnSpc>
+              <a:spcBef>
+                <a:spcPts val="0"/>
+              </a:spcBef>
+              <a:spcAft>
+                <a:spcPts val="0"/>
+              </a:spcAft>
+              <a:buClrTx/>
+              <a:buSzTx/>
+              <a:buFontTx/>
+              <a:buNone/>
+              <a:tabLst/>
               <a:defRPr sz="4000" b="1">
                 <a:solidFill>
                   <a:srgbClr val="FFFFFF"/>
@@ -26545,21 +27521,503 @@
               </a:defRPr>
             </a:pPr>
             <a:r>
-              <a:t>Claude for Work: Autonomous AI</a:t>
-            </a:r>
-          </a:p>
-        </p:txBody>
-      </p:sp>
-      <p:sp>
-        <p:nvSpPr>
-          <p:cNvPr id="3" name="TextBox 2"/>
+              <a:rPr kumimoji="0" sz="4000" b="1" i="0" u="none" strike="noStrike" kern="1200" cap="none" spc="0" normalizeH="0" baseline="0" noProof="0">
+                <a:ln>
+                  <a:noFill/>
+                </a:ln>
+                <a:solidFill>
+                  <a:srgbClr val="FFFFFF"/>
+                </a:solidFill>
+                <a:effectLst/>
+                <a:uLnTx/>
+                <a:uFillTx/>
+                <a:latin typeface="Calibri"/>
+                <a:ea typeface="+mn-ea"/>
+                <a:cs typeface="+mn-cs"/>
+              </a:rPr>
+              <a:t>When to Use Claude for Work</a:t>
+            </a:r>
+          </a:p>
+        </p:txBody>
+      </p:sp>
+      <p:sp>
+        <p:nvSpPr>
+          <p:cNvPr id="3" name="Rectangle 2">
+            <a:extLst>
+              <a:ext uri="{FF2B5EF4-FFF2-40B4-BE49-F238E27FC236}">
+                <a16:creationId xmlns:a16="http://schemas.microsoft.com/office/drawing/2014/main" id="{D1BA573A-E4B7-822F-B58F-C8B4687FAE8F}"/>
+              </a:ext>
+            </a:extLst>
+          </p:cNvPr>
+          <p:cNvSpPr/>
+          <p:nvPr/>
+        </p:nvSpPr>
+        <p:spPr>
+          <a:xfrm>
+            <a:off x="457200" y="1234440"/>
+            <a:ext cx="1828800" cy="36576"/>
+          </a:xfrm>
+          <a:prstGeom prst="rect">
+            <a:avLst/>
+          </a:prstGeom>
+          <a:solidFill>
+            <a:srgbClr val="00D4AA"/>
+          </a:solidFill>
+          <a:ln>
+            <a:noFill/>
+          </a:ln>
+        </p:spPr>
+        <p:style>
+          <a:lnRef idx="1">
+            <a:schemeClr val="accent1"/>
+          </a:lnRef>
+          <a:fillRef idx="3">
+            <a:schemeClr val="accent1"/>
+          </a:fillRef>
+          <a:effectRef idx="2">
+            <a:schemeClr val="accent1"/>
+          </a:effectRef>
+          <a:fontRef idx="minor">
+            <a:schemeClr val="lt1"/>
+          </a:fontRef>
+        </p:style>
+        <p:txBody>
+          <a:bodyPr rtlCol="0" anchor="ctr"/>
+          <a:lstStyle/>
+          <a:p>
+            <a:pPr marL="0" marR="0" lvl="0" indent="0" algn="ctr" defTabSz="457200" rtl="0" eaLnBrk="1" fontAlgn="auto" latinLnBrk="0" hangingPunct="1">
+              <a:lnSpc>
+                <a:spcPct val="100000"/>
+              </a:lnSpc>
+              <a:spcBef>
+                <a:spcPts val="0"/>
+              </a:spcBef>
+              <a:spcAft>
+                <a:spcPts val="0"/>
+              </a:spcAft>
+              <a:buClrTx/>
+              <a:buSzTx/>
+              <a:buFontTx/>
+              <a:buNone/>
+              <a:tabLst/>
+              <a:defRPr/>
+            </a:pPr>
+            <a:endParaRPr kumimoji="0" sz="1800" b="0" i="0" u="none" strike="noStrike" kern="1200" cap="none" spc="0" normalizeH="0" baseline="0" noProof="0">
+              <a:ln>
+                <a:noFill/>
+              </a:ln>
+              <a:solidFill>
+                <a:prstClr val="white"/>
+              </a:solidFill>
+              <a:effectLst/>
+              <a:uLnTx/>
+              <a:uFillTx/>
+              <a:latin typeface="Calibri"/>
+              <a:ea typeface="+mn-ea"/>
+              <a:cs typeface="+mn-cs"/>
+            </a:endParaRPr>
+          </a:p>
+        </p:txBody>
+      </p:sp>
+      <p:sp>
+        <p:nvSpPr>
+          <p:cNvPr id="4" name="TextBox 3">
+            <a:extLst>
+              <a:ext uri="{FF2B5EF4-FFF2-40B4-BE49-F238E27FC236}">
+                <a16:creationId xmlns:a16="http://schemas.microsoft.com/office/drawing/2014/main" id="{DF607436-CA4A-12EA-4CC2-583FD5C95E76}"/>
+              </a:ext>
+            </a:extLst>
+          </p:cNvPr>
           <p:cNvSpPr txBox="1"/>
           <p:nvPr/>
         </p:nvSpPr>
         <p:spPr>
           <a:xfrm>
-            <a:off x="457200" y="1097280"/>
-            <a:ext cx="11247120" cy="457200"/>
+            <a:off x="457200" y="1463040"/>
+            <a:ext cx="11277295" cy="4572000"/>
+          </a:xfrm>
+          <a:prstGeom prst="rect">
+            <a:avLst/>
+          </a:prstGeom>
+          <a:noFill/>
+        </p:spPr>
+        <p:txBody>
+          <a:bodyPr wrap="square">
+            <a:spAutoFit/>
+          </a:bodyPr>
+          <a:lstStyle/>
+          <a:p>
+            <a:pPr marL="0" marR="0" lvl="0" indent="0" algn="l" defTabSz="457200" rtl="0" eaLnBrk="1" fontAlgn="auto" latinLnBrk="0" hangingPunct="1">
+              <a:lnSpc>
+                <a:spcPct val="100000"/>
+              </a:lnSpc>
+              <a:spcBef>
+                <a:spcPts val="800"/>
+              </a:spcBef>
+              <a:spcAft>
+                <a:spcPts val="800"/>
+              </a:spcAft>
+              <a:buClrTx/>
+              <a:buSzTx/>
+              <a:buFontTx/>
+              <a:buNone/>
+              <a:tabLst/>
+              <a:defRPr sz="2200">
+                <a:solidFill>
+                  <a:srgbClr val="FFFFFF"/>
+                </a:solidFill>
+              </a:defRPr>
+            </a:pPr>
+            <a:r>
+              <a:rPr kumimoji="0" sz="2200" b="0" i="0" u="none" strike="noStrike" kern="1200" cap="none" spc="0" normalizeH="0" baseline="0" noProof="0">
+                <a:ln>
+                  <a:noFill/>
+                </a:ln>
+                <a:solidFill>
+                  <a:srgbClr val="FFFFFF"/>
+                </a:solidFill>
+                <a:effectLst/>
+                <a:uLnTx/>
+                <a:uFillTx/>
+                <a:latin typeface="Calibri"/>
+                <a:ea typeface="+mn-ea"/>
+                <a:cs typeface="+mn-cs"/>
+              </a:rPr>
+              <a:t>  ✅ PERFECT FOR: Complex multi-step tasks (2+ hours of work)</a:t>
+            </a:r>
+          </a:p>
+          <a:p>
+            <a:pPr marL="0" marR="0" lvl="0" indent="0" algn="l" defTabSz="457200" rtl="0" eaLnBrk="1" fontAlgn="auto" latinLnBrk="0" hangingPunct="1">
+              <a:lnSpc>
+                <a:spcPct val="100000"/>
+              </a:lnSpc>
+              <a:spcBef>
+                <a:spcPts val="800"/>
+              </a:spcBef>
+              <a:spcAft>
+                <a:spcPts val="800"/>
+              </a:spcAft>
+              <a:buClrTx/>
+              <a:buSzTx/>
+              <a:buFontTx/>
+              <a:buNone/>
+              <a:tabLst/>
+              <a:defRPr sz="2200">
+                <a:solidFill>
+                  <a:srgbClr val="FFFFFF"/>
+                </a:solidFill>
+              </a:defRPr>
+            </a:pPr>
+            <a:r>
+              <a:rPr kumimoji="0" sz="2200" b="0" i="0" u="none" strike="noStrike" kern="1200" cap="none" spc="0" normalizeH="0" baseline="0" noProof="0">
+                <a:ln>
+                  <a:noFill/>
+                </a:ln>
+                <a:solidFill>
+                  <a:srgbClr val="FFFFFF"/>
+                </a:solidFill>
+                <a:effectLst/>
+                <a:uLnTx/>
+                <a:uFillTx/>
+                <a:latin typeface="Calibri"/>
+                <a:ea typeface="+mn-ea"/>
+                <a:cs typeface="+mn-cs"/>
+              </a:rPr>
+              <a:t>     • Competitive research &amp; analysis</a:t>
+            </a:r>
+          </a:p>
+          <a:p>
+            <a:pPr marL="0" marR="0" lvl="0" indent="0" algn="l" defTabSz="457200" rtl="0" eaLnBrk="1" fontAlgn="auto" latinLnBrk="0" hangingPunct="1">
+              <a:lnSpc>
+                <a:spcPct val="100000"/>
+              </a:lnSpc>
+              <a:spcBef>
+                <a:spcPts val="800"/>
+              </a:spcBef>
+              <a:spcAft>
+                <a:spcPts val="800"/>
+              </a:spcAft>
+              <a:buClrTx/>
+              <a:buSzTx/>
+              <a:buFontTx/>
+              <a:buNone/>
+              <a:tabLst/>
+              <a:defRPr sz="2200">
+                <a:solidFill>
+                  <a:srgbClr val="FFFFFF"/>
+                </a:solidFill>
+              </a:defRPr>
+            </a:pPr>
+            <a:r>
+              <a:rPr kumimoji="0" sz="2200" b="0" i="0" u="none" strike="noStrike" kern="1200" cap="none" spc="0" normalizeH="0" baseline="0" noProof="0">
+                <a:ln>
+                  <a:noFill/>
+                </a:ln>
+                <a:solidFill>
+                  <a:srgbClr val="FFFFFF"/>
+                </a:solidFill>
+                <a:effectLst/>
+                <a:uLnTx/>
+                <a:uFillTx/>
+                <a:latin typeface="Calibri"/>
+                <a:ea typeface="+mn-ea"/>
+                <a:cs typeface="+mn-cs"/>
+              </a:rPr>
+              <a:t>     • Writing long documents (PRDs, reports, proposals)</a:t>
+            </a:r>
+          </a:p>
+          <a:p>
+            <a:pPr marL="0" marR="0" lvl="0" indent="0" algn="l" defTabSz="457200" rtl="0" eaLnBrk="1" fontAlgn="auto" latinLnBrk="0" hangingPunct="1">
+              <a:lnSpc>
+                <a:spcPct val="100000"/>
+              </a:lnSpc>
+              <a:spcBef>
+                <a:spcPts val="800"/>
+              </a:spcBef>
+              <a:spcAft>
+                <a:spcPts val="800"/>
+              </a:spcAft>
+              <a:buClrTx/>
+              <a:buSzTx/>
+              <a:buFontTx/>
+              <a:buNone/>
+              <a:tabLst/>
+              <a:defRPr sz="2200">
+                <a:solidFill>
+                  <a:srgbClr val="FFFFFF"/>
+                </a:solidFill>
+              </a:defRPr>
+            </a:pPr>
+            <a:r>
+              <a:rPr kumimoji="0" sz="2200" b="0" i="0" u="none" strike="noStrike" kern="1200" cap="none" spc="0" normalizeH="0" baseline="0" noProof="0">
+                <a:ln>
+                  <a:noFill/>
+                </a:ln>
+                <a:solidFill>
+                  <a:srgbClr val="FFFFFF"/>
+                </a:solidFill>
+                <a:effectLst/>
+                <a:uLnTx/>
+                <a:uFillTx/>
+                <a:latin typeface="Calibri"/>
+                <a:ea typeface="+mn-ea"/>
+                <a:cs typeface="+mn-cs"/>
+              </a:rPr>
+              <a:t>     • Data analysis across multiple files</a:t>
+            </a:r>
+          </a:p>
+          <a:p>
+            <a:pPr marL="0" marR="0" lvl="0" indent="0" algn="l" defTabSz="457200" rtl="0" eaLnBrk="1" fontAlgn="auto" latinLnBrk="0" hangingPunct="1">
+              <a:lnSpc>
+                <a:spcPct val="100000"/>
+              </a:lnSpc>
+              <a:spcBef>
+                <a:spcPts val="800"/>
+              </a:spcBef>
+              <a:spcAft>
+                <a:spcPts val="800"/>
+              </a:spcAft>
+              <a:buClrTx/>
+              <a:buSzTx/>
+              <a:buFontTx/>
+              <a:buNone/>
+              <a:tabLst/>
+              <a:defRPr sz="2200">
+                <a:solidFill>
+                  <a:srgbClr val="FFFFFF"/>
+                </a:solidFill>
+              </a:defRPr>
+            </a:pPr>
+            <a:r>
+              <a:rPr kumimoji="0" sz="2200" b="0" i="0" u="none" strike="noStrike" kern="1200" cap="none" spc="0" normalizeH="0" baseline="0" noProof="0">
+                <a:ln>
+                  <a:noFill/>
+                </a:ln>
+                <a:solidFill>
+                  <a:srgbClr val="FFFFFF"/>
+                </a:solidFill>
+                <a:effectLst/>
+                <a:uLnTx/>
+                <a:uFillTx/>
+                <a:latin typeface="Calibri"/>
+                <a:ea typeface="+mn-ea"/>
+                <a:cs typeface="+mn-cs"/>
+              </a:rPr>
+              <a:t>     • Content creation with multiple iterations</a:t>
+            </a:r>
+          </a:p>
+          <a:p>
+            <a:pPr marL="0" marR="0" lvl="0" indent="0" algn="l" defTabSz="457200" rtl="0" eaLnBrk="1" fontAlgn="auto" latinLnBrk="0" hangingPunct="1">
+              <a:lnSpc>
+                <a:spcPct val="100000"/>
+              </a:lnSpc>
+              <a:spcBef>
+                <a:spcPts val="800"/>
+              </a:spcBef>
+              <a:spcAft>
+                <a:spcPts val="800"/>
+              </a:spcAft>
+              <a:buClrTx/>
+              <a:buSzTx/>
+              <a:buFontTx/>
+              <a:buNone/>
+              <a:tabLst/>
+              <a:defRPr sz="2200">
+                <a:solidFill>
+                  <a:srgbClr val="FFFFFF"/>
+                </a:solidFill>
+              </a:defRPr>
+            </a:pPr>
+            <a:r>
+              <a:rPr kumimoji="0" sz="2200" b="0" i="0" u="none" strike="noStrike" kern="1200" cap="none" spc="0" normalizeH="0" baseline="0" noProof="0">
+                <a:ln>
+                  <a:noFill/>
+                </a:ln>
+                <a:solidFill>
+                  <a:srgbClr val="FFFFFF"/>
+                </a:solidFill>
+                <a:effectLst/>
+                <a:uLnTx/>
+                <a:uFillTx/>
+                <a:latin typeface="Calibri"/>
+                <a:ea typeface="+mn-ea"/>
+                <a:cs typeface="+mn-cs"/>
+              </a:rPr>
+              <a:t>  ❌ NOT IDEAL FOR: Quick questions, real-time collaboration, learning/exploration</a:t>
+            </a:r>
+          </a:p>
+          <a:p>
+            <a:pPr marL="0" marR="0" lvl="0" indent="0" algn="l" defTabSz="457200" rtl="0" eaLnBrk="1" fontAlgn="auto" latinLnBrk="0" hangingPunct="1">
+              <a:lnSpc>
+                <a:spcPct val="100000"/>
+              </a:lnSpc>
+              <a:spcBef>
+                <a:spcPts val="800"/>
+              </a:spcBef>
+              <a:spcAft>
+                <a:spcPts val="800"/>
+              </a:spcAft>
+              <a:buClrTx/>
+              <a:buSzTx/>
+              <a:buFontTx/>
+              <a:buNone/>
+              <a:tabLst/>
+              <a:defRPr sz="2200">
+                <a:solidFill>
+                  <a:srgbClr val="FFFFFF"/>
+                </a:solidFill>
+              </a:defRPr>
+            </a:pPr>
+            <a:r>
+              <a:rPr kumimoji="0" sz="2200" b="0" i="0" u="none" strike="noStrike" kern="1200" cap="none" spc="0" normalizeH="0" baseline="0" noProof="0">
+                <a:ln>
+                  <a:noFill/>
+                </a:ln>
+                <a:solidFill>
+                  <a:srgbClr val="FFFFFF"/>
+                </a:solidFill>
+                <a:effectLst/>
+                <a:uLnTx/>
+                <a:uFillTx/>
+                <a:latin typeface="Calibri"/>
+                <a:ea typeface="+mn-ea"/>
+                <a:cs typeface="+mn-cs"/>
+              </a:rPr>
+              <a:t>  🎯 THE RULE: If you'd normally block 2+ hours on calendar → Use Cowork. Quick task → Use Claude.ai</a:t>
+            </a:r>
+          </a:p>
+          <a:p>
+            <a:pPr marL="0" marR="0" lvl="0" indent="0" algn="l" defTabSz="457200" rtl="0" eaLnBrk="1" fontAlgn="auto" latinLnBrk="0" hangingPunct="1">
+              <a:lnSpc>
+                <a:spcPct val="100000"/>
+              </a:lnSpc>
+              <a:spcBef>
+                <a:spcPts val="800"/>
+              </a:spcBef>
+              <a:spcAft>
+                <a:spcPts val="800"/>
+              </a:spcAft>
+              <a:buClrTx/>
+              <a:buSzTx/>
+              <a:buFontTx/>
+              <a:buNone/>
+              <a:tabLst/>
+              <a:defRPr sz="2200">
+                <a:solidFill>
+                  <a:srgbClr val="FFFFFF"/>
+                </a:solidFill>
+              </a:defRPr>
+            </a:pPr>
+            <a:r>
+              <a:rPr kumimoji="0" sz="2200" b="0" i="0" u="none" strike="noStrike" kern="1200" cap="none" spc="0" normalizeH="0" baseline="0" noProof="0">
+                <a:ln>
+                  <a:noFill/>
+                </a:ln>
+                <a:solidFill>
+                  <a:srgbClr val="FFFFFF"/>
+                </a:solidFill>
+                <a:effectLst/>
+                <a:uLnTx/>
+                <a:uFillTx/>
+                <a:latin typeface="Calibri"/>
+                <a:ea typeface="+mn-ea"/>
+                <a:cs typeface="+mn-cs"/>
+              </a:rPr>
+              <a:t>  💻 HOW TO GET IT: Download Claude Desktop App (Windows/Mac) - Pro/Team subscribers get autonomous features in Preview</a:t>
+            </a:r>
+          </a:p>
+          <a:p>
+            <a:pPr marL="0" marR="0" lvl="0" indent="0" algn="l" defTabSz="457200" rtl="0" eaLnBrk="1" fontAlgn="auto" latinLnBrk="0" hangingPunct="1">
+              <a:lnSpc>
+                <a:spcPct val="100000"/>
+              </a:lnSpc>
+              <a:spcBef>
+                <a:spcPts val="800"/>
+              </a:spcBef>
+              <a:spcAft>
+                <a:spcPts val="800"/>
+              </a:spcAft>
+              <a:buClrTx/>
+              <a:buSzTx/>
+              <a:buFontTx/>
+              <a:buNone/>
+              <a:tabLst/>
+              <a:defRPr sz="2200">
+                <a:solidFill>
+                  <a:srgbClr val="FFFFFF"/>
+                </a:solidFill>
+              </a:defRPr>
+            </a:pPr>
+            <a:r>
+              <a:rPr kumimoji="0" sz="2200" b="0" i="0" u="none" strike="noStrike" kern="1200" cap="none" spc="0" normalizeH="0" baseline="0" noProof="0">
+                <a:ln>
+                  <a:noFill/>
+                </a:ln>
+                <a:solidFill>
+                  <a:srgbClr val="FFFFFF"/>
+                </a:solidFill>
+                <a:effectLst/>
+                <a:uLnTx/>
+                <a:uFillTx/>
+                <a:latin typeface="Calibri"/>
+                <a:ea typeface="+mn-ea"/>
+                <a:cs typeface="+mn-cs"/>
+              </a:rPr>
+              <a:t>  ⚠️ PREVIEW NOTE: Early access = expect bugs, limited rollout, features evolving</a:t>
+            </a:r>
+          </a:p>
+        </p:txBody>
+      </p:sp>
+      <p:sp>
+        <p:nvSpPr>
+          <p:cNvPr id="18" name="TextBox 17"/>
+          <p:cNvSpPr txBox="1"/>
+          <p:nvPr/>
+        </p:nvSpPr>
+        <p:spPr>
+          <a:xfrm>
+            <a:off x="457200" y="274320"/>
+            <a:ext cx="11247120" cy="822960"/>
           </a:xfrm>
           <a:prstGeom prst="rect">
             <a:avLst/>
@@ -26573,6 +28031,41 @@
           <a:lstStyle/>
           <a:p>
             <a:pPr>
+              <a:defRPr sz="4000" b="1">
+                <a:solidFill>
+                  <a:srgbClr val="FFFFFF"/>
+                </a:solidFill>
+              </a:defRPr>
+            </a:pPr>
+            <a:r>
+              <a:t>Claude for Work: Autonomous AI</a:t>
+            </a:r>
+          </a:p>
+        </p:txBody>
+      </p:sp>
+      <p:sp>
+        <p:nvSpPr>
+          <p:cNvPr id="19" name="TextBox 18"/>
+          <p:cNvSpPr txBox="1"/>
+          <p:nvPr/>
+        </p:nvSpPr>
+        <p:spPr>
+          <a:xfrm>
+            <a:off x="457200" y="1097280"/>
+            <a:ext cx="11247120" cy="457200"/>
+          </a:xfrm>
+          <a:prstGeom prst="rect">
+            <a:avLst/>
+          </a:prstGeom>
+          <a:noFill/>
+        </p:spPr>
+        <p:txBody>
+          <a:bodyPr wrap="none">
+            <a:spAutoFit/>
+          </a:bodyPr>
+          <a:lstStyle/>
+          <a:p>
+            <a:pPr>
               <a:defRPr sz="2000" i="1">
                 <a:solidFill>
                   <a:srgbClr val="9CA3AF"/>
@@ -26587,7 +28080,7 @@
       </p:sp>
       <p:sp>
         <p:nvSpPr>
-          <p:cNvPr id="4" name="Rounded Rectangle 3"/>
+          <p:cNvPr id="20" name="Rounded Rectangle 3"/>
           <p:cNvSpPr/>
           <p:nvPr/>
         </p:nvSpPr>
@@ -26627,6 +28120,7 @@
           <a:lstStyle/>
           <a:p>
             <a:pPr algn="ctr"/>
+            <a:endParaRPr/>
           </a:p>
         </p:txBody>
       </p:sp>
@@ -26785,6 +28279,7 @@
           <a:lstStyle/>
           <a:p>
             <a:pPr algn="ctr"/>
+            <a:endParaRPr/>
           </a:p>
         </p:txBody>
       </p:sp>
@@ -26943,6 +28438,7 @@
           <a:lstStyle/>
           <a:p>
             <a:pPr algn="ctr"/>
+            <a:endParaRPr/>
           </a:p>
         </p:txBody>
       </p:sp>
@@ -27101,6 +28597,7 @@
           <a:lstStyle/>
           <a:p>
             <a:pPr algn="ctr"/>
+            <a:endParaRPr/>
           </a:p>
         </p:txBody>
       </p:sp>

--- a/slides/Day1_Claude_for_Business.pptx
+++ b/slides/Day1_Claude_for_Business.pptx
@@ -26085,870 +26085,6 @@
       </p:grpSpPr>
       <p:sp>
         <p:nvSpPr>
-          <p:cNvPr id="2" name="TextBox 1">
-            <a:extLst>
-              <a:ext uri="{FF2B5EF4-FFF2-40B4-BE49-F238E27FC236}">
-                <a16:creationId xmlns:a16="http://schemas.microsoft.com/office/drawing/2014/main" id="{2512AD6E-847D-17B1-15AD-6F52430D57A3}"/>
-              </a:ext>
-            </a:extLst>
-          </p:cNvPr>
-          <p:cNvSpPr txBox="1"/>
-          <p:nvPr/>
-        </p:nvSpPr>
-        <p:spPr>
-          <a:xfrm>
-            <a:off x="457200" y="457200"/>
-            <a:ext cx="11277295" cy="731520"/>
-          </a:xfrm>
-          <a:prstGeom prst="rect">
-            <a:avLst/>
-          </a:prstGeom>
-          <a:noFill/>
-        </p:spPr>
-        <p:txBody>
-          <a:bodyPr wrap="none">
-            <a:spAutoFit/>
-          </a:bodyPr>
-          <a:lstStyle/>
-          <a:p>
-            <a:pPr marL="0" marR="0" lvl="0" indent="0" algn="ctr" defTabSz="457200" rtl="0" eaLnBrk="1" fontAlgn="auto" latinLnBrk="0" hangingPunct="1">
-              <a:lnSpc>
-                <a:spcPct val="100000"/>
-              </a:lnSpc>
-              <a:spcBef>
-                <a:spcPts val="0"/>
-              </a:spcBef>
-              <a:spcAft>
-                <a:spcPts val="0"/>
-              </a:spcAft>
-              <a:buClrTx/>
-              <a:buSzTx/>
-              <a:buFontTx/>
-              <a:buNone/>
-              <a:tabLst/>
-              <a:defRPr sz="3600" b="1">
-                <a:solidFill>
-                  <a:srgbClr val="FFFFFF"/>
-                </a:solidFill>
-              </a:defRPr>
-            </a:pPr>
-            <a:r>
-              <a:rPr kumimoji="0" sz="3600" b="1" i="0" u="none" strike="noStrike" kern="1200" cap="none" spc="0" normalizeH="0" baseline="0" noProof="0">
-                <a:ln>
-                  <a:noFill/>
-                </a:ln>
-                <a:solidFill>
-                  <a:srgbClr val="FFFFFF"/>
-                </a:solidFill>
-                <a:effectLst/>
-                <a:uLnTx/>
-                <a:uFillTx/>
-                <a:latin typeface="Calibri"/>
-                <a:ea typeface="+mn-ea"/>
-                <a:cs typeface="+mn-cs"/>
-              </a:rPr>
-              <a:t>Claude Desktop App: Autonomous Features</a:t>
-            </a:r>
-          </a:p>
-        </p:txBody>
-      </p:sp>
-      <p:sp>
-        <p:nvSpPr>
-          <p:cNvPr id="3" name="Rectangle 2">
-            <a:extLst>
-              <a:ext uri="{FF2B5EF4-FFF2-40B4-BE49-F238E27FC236}">
-                <a16:creationId xmlns:a16="http://schemas.microsoft.com/office/drawing/2014/main" id="{F2342D46-CB66-679A-1AF0-A4EC62C02D83}"/>
-              </a:ext>
-            </a:extLst>
-          </p:cNvPr>
-          <p:cNvSpPr/>
-          <p:nvPr/>
-        </p:nvSpPr>
-        <p:spPr>
-          <a:xfrm>
-            <a:off x="6077559" y="1371600"/>
-            <a:ext cx="36576" cy="4572000"/>
-          </a:xfrm>
-          <a:prstGeom prst="rect">
-            <a:avLst/>
-          </a:prstGeom>
-          <a:solidFill>
-            <a:srgbClr val="00D4AA"/>
-          </a:solidFill>
-          <a:ln>
-            <a:noFill/>
-          </a:ln>
-        </p:spPr>
-        <p:style>
-          <a:lnRef idx="1">
-            <a:schemeClr val="accent1"/>
-          </a:lnRef>
-          <a:fillRef idx="3">
-            <a:schemeClr val="accent1"/>
-          </a:fillRef>
-          <a:effectRef idx="2">
-            <a:schemeClr val="accent1"/>
-          </a:effectRef>
-          <a:fontRef idx="minor">
-            <a:schemeClr val="lt1"/>
-          </a:fontRef>
-        </p:style>
-        <p:txBody>
-          <a:bodyPr rtlCol="0" anchor="ctr"/>
-          <a:lstStyle/>
-          <a:p>
-            <a:pPr marL="0" marR="0" lvl="0" indent="0" algn="ctr" defTabSz="457200" rtl="0" eaLnBrk="1" fontAlgn="auto" latinLnBrk="0" hangingPunct="1">
-              <a:lnSpc>
-                <a:spcPct val="100000"/>
-              </a:lnSpc>
-              <a:spcBef>
-                <a:spcPts val="0"/>
-              </a:spcBef>
-              <a:spcAft>
-                <a:spcPts val="0"/>
-              </a:spcAft>
-              <a:buClrTx/>
-              <a:buSzTx/>
-              <a:buFontTx/>
-              <a:buNone/>
-              <a:tabLst/>
-              <a:defRPr/>
-            </a:pPr>
-            <a:endParaRPr kumimoji="0" sz="1800" b="0" i="0" u="none" strike="noStrike" kern="1200" cap="none" spc="0" normalizeH="0" baseline="0" noProof="0">
-              <a:ln>
-                <a:noFill/>
-              </a:ln>
-              <a:solidFill>
-                <a:prstClr val="white"/>
-              </a:solidFill>
-              <a:effectLst/>
-              <a:uLnTx/>
-              <a:uFillTx/>
-              <a:latin typeface="Calibri"/>
-              <a:ea typeface="+mn-ea"/>
-              <a:cs typeface="+mn-cs"/>
-            </a:endParaRPr>
-          </a:p>
-        </p:txBody>
-      </p:sp>
-      <p:sp>
-        <p:nvSpPr>
-          <p:cNvPr id="4" name="TextBox 3">
-            <a:extLst>
-              <a:ext uri="{FF2B5EF4-FFF2-40B4-BE49-F238E27FC236}">
-                <a16:creationId xmlns:a16="http://schemas.microsoft.com/office/drawing/2014/main" id="{73C77848-149A-A14D-E3EE-836747772290}"/>
-              </a:ext>
-            </a:extLst>
-          </p:cNvPr>
-          <p:cNvSpPr txBox="1"/>
-          <p:nvPr/>
-        </p:nvSpPr>
-        <p:spPr>
-          <a:xfrm>
-            <a:off x="457200" y="1463040"/>
-            <a:ext cx="5364327" cy="731520"/>
-          </a:xfrm>
-          <a:prstGeom prst="rect">
-            <a:avLst/>
-          </a:prstGeom>
-          <a:noFill/>
-        </p:spPr>
-        <p:txBody>
-          <a:bodyPr wrap="none">
-            <a:spAutoFit/>
-          </a:bodyPr>
-          <a:lstStyle/>
-          <a:p>
-            <a:pPr marL="0" marR="0" lvl="0" indent="0" algn="ctr" defTabSz="457200" rtl="0" eaLnBrk="1" fontAlgn="auto" latinLnBrk="0" hangingPunct="1">
-              <a:lnSpc>
-                <a:spcPct val="100000"/>
-              </a:lnSpc>
-              <a:spcBef>
-                <a:spcPts val="0"/>
-              </a:spcBef>
-              <a:spcAft>
-                <a:spcPts val="0"/>
-              </a:spcAft>
-              <a:buClrTx/>
-              <a:buSzTx/>
-              <a:buFontTx/>
-              <a:buNone/>
-              <a:tabLst/>
-              <a:defRPr sz="2800" b="1">
-                <a:solidFill>
-                  <a:srgbClr val="0078D4"/>
-                </a:solidFill>
-              </a:defRPr>
-            </a:pPr>
-            <a:r>
-              <a:rPr kumimoji="0" sz="2800" b="1" i="0" u="none" strike="noStrike" kern="1200" cap="none" spc="0" normalizeH="0" baseline="0" noProof="0">
-                <a:ln>
-                  <a:noFill/>
-                </a:ln>
-                <a:solidFill>
-                  <a:srgbClr val="0078D4"/>
-                </a:solidFill>
-                <a:effectLst/>
-                <a:uLnTx/>
-                <a:uFillTx/>
-                <a:latin typeface="Calibri"/>
-                <a:ea typeface="+mn-ea"/>
-                <a:cs typeface="+mn-cs"/>
-              </a:rPr>
-              <a:t>Claude.ai (What You Know)</a:t>
-            </a:r>
-          </a:p>
-        </p:txBody>
-      </p:sp>
-      <p:sp>
-        <p:nvSpPr>
-          <p:cNvPr id="5" name="TextBox 4">
-            <a:extLst>
-              <a:ext uri="{FF2B5EF4-FFF2-40B4-BE49-F238E27FC236}">
-                <a16:creationId xmlns:a16="http://schemas.microsoft.com/office/drawing/2014/main" id="{1C183914-50C0-E52E-1C75-A7BCAB4D4A0A}"/>
-              </a:ext>
-            </a:extLst>
-          </p:cNvPr>
-          <p:cNvSpPr txBox="1"/>
-          <p:nvPr/>
-        </p:nvSpPr>
-        <p:spPr>
-          <a:xfrm>
-            <a:off x="457200" y="2286000"/>
-            <a:ext cx="5364327" cy="3657600"/>
-          </a:xfrm>
-          <a:prstGeom prst="rect">
-            <a:avLst/>
-          </a:prstGeom>
-          <a:noFill/>
-        </p:spPr>
-        <p:txBody>
-          <a:bodyPr wrap="square">
-            <a:spAutoFit/>
-          </a:bodyPr>
-          <a:lstStyle/>
-          <a:p>
-            <a:pPr marL="0" marR="0" lvl="0" indent="0" algn="l" defTabSz="457200" rtl="0" eaLnBrk="1" fontAlgn="auto" latinLnBrk="0" hangingPunct="1">
-              <a:lnSpc>
-                <a:spcPct val="100000"/>
-              </a:lnSpc>
-              <a:spcBef>
-                <a:spcPts val="0"/>
-              </a:spcBef>
-              <a:spcAft>
-                <a:spcPts val="1200"/>
-              </a:spcAft>
-              <a:buClrTx/>
-              <a:buSzTx/>
-              <a:buFontTx/>
-              <a:buNone/>
-              <a:tabLst/>
-              <a:defRPr sz="1800">
-                <a:solidFill>
-                  <a:srgbClr val="FFFFFF"/>
-                </a:solidFill>
-              </a:defRPr>
-            </a:pPr>
-            <a:r>
-              <a:rPr kumimoji="0" sz="1800" b="0" i="0" u="none" strike="noStrike" kern="1200" cap="none" spc="0" normalizeH="0" baseline="0" noProof="0">
-                <a:ln>
-                  <a:noFill/>
-                </a:ln>
-                <a:solidFill>
-                  <a:srgbClr val="FFFFFF"/>
-                </a:solidFill>
-                <a:effectLst/>
-                <a:uLnTx/>
-                <a:uFillTx/>
-                <a:latin typeface="Calibri"/>
-                <a:ea typeface="+mn-ea"/>
-                <a:cs typeface="+mn-cs"/>
-              </a:rPr>
-              <a:t>  Back-and-forth conversation</a:t>
-            </a:r>
-          </a:p>
-          <a:p>
-            <a:pPr marL="0" marR="0" lvl="0" indent="0" algn="l" defTabSz="457200" rtl="0" eaLnBrk="1" fontAlgn="auto" latinLnBrk="0" hangingPunct="1">
-              <a:lnSpc>
-                <a:spcPct val="100000"/>
-              </a:lnSpc>
-              <a:spcBef>
-                <a:spcPts val="0"/>
-              </a:spcBef>
-              <a:spcAft>
-                <a:spcPts val="1200"/>
-              </a:spcAft>
-              <a:buClrTx/>
-              <a:buSzTx/>
-              <a:buFontTx/>
-              <a:buNone/>
-              <a:tabLst/>
-              <a:defRPr sz="1800">
-                <a:solidFill>
-                  <a:srgbClr val="FFFFFF"/>
-                </a:solidFill>
-              </a:defRPr>
-            </a:pPr>
-            <a:r>
-              <a:rPr kumimoji="0" sz="1800" b="0" i="0" u="none" strike="noStrike" kern="1200" cap="none" spc="0" normalizeH="0" baseline="0" noProof="0">
-                <a:ln>
-                  <a:noFill/>
-                </a:ln>
-                <a:solidFill>
-                  <a:srgbClr val="FFFFFF"/>
-                </a:solidFill>
-                <a:effectLst/>
-                <a:uLnTx/>
-                <a:uFillTx/>
-                <a:latin typeface="Calibri"/>
-                <a:ea typeface="+mn-ea"/>
-                <a:cs typeface="+mn-cs"/>
-              </a:rPr>
-              <a:t>  You ask → Claude answers → repeat</a:t>
-            </a:r>
-          </a:p>
-          <a:p>
-            <a:pPr marL="0" marR="0" lvl="0" indent="0" algn="l" defTabSz="457200" rtl="0" eaLnBrk="1" fontAlgn="auto" latinLnBrk="0" hangingPunct="1">
-              <a:lnSpc>
-                <a:spcPct val="100000"/>
-              </a:lnSpc>
-              <a:spcBef>
-                <a:spcPts val="0"/>
-              </a:spcBef>
-              <a:spcAft>
-                <a:spcPts val="1200"/>
-              </a:spcAft>
-              <a:buClrTx/>
-              <a:buSzTx/>
-              <a:buFontTx/>
-              <a:buNone/>
-              <a:tabLst/>
-              <a:defRPr sz="1800">
-                <a:solidFill>
-                  <a:srgbClr val="FFFFFF"/>
-                </a:solidFill>
-              </a:defRPr>
-            </a:pPr>
-            <a:r>
-              <a:rPr kumimoji="0" sz="1800" b="0" i="0" u="none" strike="noStrike" kern="1200" cap="none" spc="0" normalizeH="0" baseline="0" noProof="0">
-                <a:ln>
-                  <a:noFill/>
-                </a:ln>
-                <a:solidFill>
-                  <a:srgbClr val="FFFFFF"/>
-                </a:solidFill>
-                <a:effectLst/>
-                <a:uLnTx/>
-                <a:uFillTx/>
-                <a:latin typeface="Calibri"/>
-                <a:ea typeface="+mn-ea"/>
-                <a:cs typeface="+mn-cs"/>
-              </a:rPr>
-              <a:t>  You stay in the chat the whole time</a:t>
-            </a:r>
-          </a:p>
-          <a:p>
-            <a:pPr marL="0" marR="0" lvl="0" indent="0" algn="l" defTabSz="457200" rtl="0" eaLnBrk="1" fontAlgn="auto" latinLnBrk="0" hangingPunct="1">
-              <a:lnSpc>
-                <a:spcPct val="100000"/>
-              </a:lnSpc>
-              <a:spcBef>
-                <a:spcPts val="0"/>
-              </a:spcBef>
-              <a:spcAft>
-                <a:spcPts val="1200"/>
-              </a:spcAft>
-              <a:buClrTx/>
-              <a:buSzTx/>
-              <a:buFontTx/>
-              <a:buNone/>
-              <a:tabLst/>
-              <a:defRPr sz="1800">
-                <a:solidFill>
-                  <a:srgbClr val="FFFFFF"/>
-                </a:solidFill>
-              </a:defRPr>
-            </a:pPr>
-            <a:r>
-              <a:rPr kumimoji="0" sz="1800" b="0" i="0" u="none" strike="noStrike" kern="1200" cap="none" spc="0" normalizeH="0" baseline="0" noProof="0">
-                <a:ln>
-                  <a:noFill/>
-                </a:ln>
-                <a:solidFill>
-                  <a:srgbClr val="FFFFFF"/>
-                </a:solidFill>
-                <a:effectLst/>
-                <a:uLnTx/>
-                <a:uFillTx/>
-                <a:latin typeface="Calibri"/>
-                <a:ea typeface="+mn-ea"/>
-                <a:cs typeface="+mn-cs"/>
-              </a:rPr>
-              <a:t>  Great for real-time collaboration</a:t>
-            </a:r>
-          </a:p>
-          <a:p>
-            <a:pPr marL="0" marR="0" lvl="0" indent="0" algn="l" defTabSz="457200" rtl="0" eaLnBrk="1" fontAlgn="auto" latinLnBrk="0" hangingPunct="1">
-              <a:lnSpc>
-                <a:spcPct val="100000"/>
-              </a:lnSpc>
-              <a:spcBef>
-                <a:spcPts val="0"/>
-              </a:spcBef>
-              <a:spcAft>
-                <a:spcPts val="1200"/>
-              </a:spcAft>
-              <a:buClrTx/>
-              <a:buSzTx/>
-              <a:buFontTx/>
-              <a:buNone/>
-              <a:tabLst/>
-              <a:defRPr sz="1800">
-                <a:solidFill>
-                  <a:srgbClr val="FFFFFF"/>
-                </a:solidFill>
-              </a:defRPr>
-            </a:pPr>
-            <a:r>
-              <a:rPr kumimoji="0" sz="1800" b="0" i="0" u="none" strike="noStrike" kern="1200" cap="none" spc="0" normalizeH="0" baseline="0" noProof="0">
-                <a:ln>
-                  <a:noFill/>
-                </a:ln>
-                <a:solidFill>
-                  <a:srgbClr val="FFFFFF"/>
-                </a:solidFill>
-                <a:effectLst/>
-                <a:uLnTx/>
-                <a:uFillTx/>
-                <a:latin typeface="Calibri"/>
-                <a:ea typeface="+mn-ea"/>
-                <a:cs typeface="+mn-cs"/>
-              </a:rPr>
-              <a:t>  Immediate feedback and iteration</a:t>
-            </a:r>
-          </a:p>
-        </p:txBody>
-      </p:sp>
-      <p:sp>
-        <p:nvSpPr>
-          <p:cNvPr id="6" name="TextBox 5">
-            <a:extLst>
-              <a:ext uri="{FF2B5EF4-FFF2-40B4-BE49-F238E27FC236}">
-                <a16:creationId xmlns:a16="http://schemas.microsoft.com/office/drawing/2014/main" id="{1B1B1D5D-E934-7C33-E35D-0D76F7A0930D}"/>
-              </a:ext>
-            </a:extLst>
-          </p:cNvPr>
-          <p:cNvSpPr txBox="1"/>
-          <p:nvPr/>
-        </p:nvSpPr>
-        <p:spPr>
-          <a:xfrm>
-            <a:off x="6370167" y="1463040"/>
-            <a:ext cx="5364327" cy="731520"/>
-          </a:xfrm>
-          <a:prstGeom prst="rect">
-            <a:avLst/>
-          </a:prstGeom>
-          <a:noFill/>
-        </p:spPr>
-        <p:txBody>
-          <a:bodyPr wrap="none">
-            <a:spAutoFit/>
-          </a:bodyPr>
-          <a:lstStyle/>
-          <a:p>
-            <a:pPr marL="0" marR="0" lvl="0" indent="0" algn="ctr" defTabSz="457200" rtl="0" eaLnBrk="1" fontAlgn="auto" latinLnBrk="0" hangingPunct="1">
-              <a:lnSpc>
-                <a:spcPct val="100000"/>
-              </a:lnSpc>
-              <a:spcBef>
-                <a:spcPts val="0"/>
-              </a:spcBef>
-              <a:spcAft>
-                <a:spcPts val="0"/>
-              </a:spcAft>
-              <a:buClrTx/>
-              <a:buSzTx/>
-              <a:buFontTx/>
-              <a:buNone/>
-              <a:tabLst/>
-              <a:defRPr sz="2800" b="1">
-                <a:solidFill>
-                  <a:srgbClr val="00D4AA"/>
-                </a:solidFill>
-              </a:defRPr>
-            </a:pPr>
-            <a:r>
-              <a:rPr kumimoji="0" sz="2800" b="1" i="0" u="none" strike="noStrike" kern="1200" cap="none" spc="0" normalizeH="0" baseline="0" noProof="0">
-                <a:ln>
-                  <a:noFill/>
-                </a:ln>
-                <a:solidFill>
-                  <a:srgbClr val="00D4AA"/>
-                </a:solidFill>
-                <a:effectLst/>
-                <a:uLnTx/>
-                <a:uFillTx/>
-                <a:latin typeface="Calibri"/>
-                <a:ea typeface="+mn-ea"/>
-                <a:cs typeface="+mn-cs"/>
-              </a:rPr>
-              <a:t>Claude for Work (NEW Preview)</a:t>
-            </a:r>
-          </a:p>
-        </p:txBody>
-      </p:sp>
-      <p:sp>
-        <p:nvSpPr>
-          <p:cNvPr id="7" name="TextBox 6">
-            <a:extLst>
-              <a:ext uri="{FF2B5EF4-FFF2-40B4-BE49-F238E27FC236}">
-                <a16:creationId xmlns:a16="http://schemas.microsoft.com/office/drawing/2014/main" id="{9AEEBC51-4FB4-1A8D-646C-94CAA517A4B3}"/>
-              </a:ext>
-            </a:extLst>
-          </p:cNvPr>
-          <p:cNvSpPr txBox="1"/>
-          <p:nvPr/>
-        </p:nvSpPr>
-        <p:spPr>
-          <a:xfrm>
-            <a:off x="6370167" y="2286000"/>
-            <a:ext cx="5364327" cy="3657600"/>
-          </a:xfrm>
-          <a:prstGeom prst="rect">
-            <a:avLst/>
-          </a:prstGeom>
-          <a:noFill/>
-        </p:spPr>
-        <p:txBody>
-          <a:bodyPr wrap="square">
-            <a:spAutoFit/>
-          </a:bodyPr>
-          <a:lstStyle/>
-          <a:p>
-            <a:pPr marL="0" marR="0" lvl="0" indent="0" algn="l" defTabSz="457200" rtl="0" eaLnBrk="1" fontAlgn="auto" latinLnBrk="0" hangingPunct="1">
-              <a:lnSpc>
-                <a:spcPct val="100000"/>
-              </a:lnSpc>
-              <a:spcBef>
-                <a:spcPts val="0"/>
-              </a:spcBef>
-              <a:spcAft>
-                <a:spcPts val="1200"/>
-              </a:spcAft>
-              <a:buClrTx/>
-              <a:buSzTx/>
-              <a:buFontTx/>
-              <a:buNone/>
-              <a:tabLst/>
-              <a:defRPr sz="1800">
-                <a:solidFill>
-                  <a:srgbClr val="FFFFFF"/>
-                </a:solidFill>
-              </a:defRPr>
-            </a:pPr>
-            <a:r>
-              <a:rPr kumimoji="0" sz="1800" b="0" i="0" u="none" strike="noStrike" kern="1200" cap="none" spc="0" normalizeH="0" baseline="0" noProof="0">
-                <a:ln>
-                  <a:noFill/>
-                </a:ln>
-                <a:solidFill>
-                  <a:srgbClr val="FFFFFF"/>
-                </a:solidFill>
-                <a:effectLst/>
-                <a:uLnTx/>
-                <a:uFillTx/>
-                <a:latin typeface="Calibri"/>
-                <a:ea typeface="+mn-ea"/>
-                <a:cs typeface="+mn-cs"/>
-              </a:rPr>
-              <a:t>  Three modes: Chat, Cowork, Code tabs</a:t>
-            </a:r>
-          </a:p>
-          <a:p>
-            <a:pPr marL="0" marR="0" lvl="0" indent="0" algn="l" defTabSz="457200" rtl="0" eaLnBrk="1" fontAlgn="auto" latinLnBrk="0" hangingPunct="1">
-              <a:lnSpc>
-                <a:spcPct val="100000"/>
-              </a:lnSpc>
-              <a:spcBef>
-                <a:spcPts val="0"/>
-              </a:spcBef>
-              <a:spcAft>
-                <a:spcPts val="1200"/>
-              </a:spcAft>
-              <a:buClrTx/>
-              <a:buSzTx/>
-              <a:buFontTx/>
-              <a:buNone/>
-              <a:tabLst/>
-              <a:defRPr sz="1800">
-                <a:solidFill>
-                  <a:srgbClr val="FFFFFF"/>
-                </a:solidFill>
-              </a:defRPr>
-            </a:pPr>
-            <a:r>
-              <a:rPr kumimoji="0" sz="1800" b="0" i="0" u="none" strike="noStrike" kern="1200" cap="none" spc="0" normalizeH="0" baseline="0" noProof="0">
-                <a:ln>
-                  <a:noFill/>
-                </a:ln>
-                <a:solidFill>
-                  <a:srgbClr val="FFFFFF"/>
-                </a:solidFill>
-                <a:effectLst/>
-                <a:uLnTx/>
-                <a:uFillTx/>
-                <a:latin typeface="Calibri"/>
-                <a:ea typeface="+mn-ea"/>
-                <a:cs typeface="+mn-cs"/>
-              </a:rPr>
-              <a:t>  Set goal → Walk away → Come back later</a:t>
-            </a:r>
-          </a:p>
-          <a:p>
-            <a:pPr marL="0" marR="0" lvl="0" indent="0" algn="l" defTabSz="457200" rtl="0" eaLnBrk="1" fontAlgn="auto" latinLnBrk="0" hangingPunct="1">
-              <a:lnSpc>
-                <a:spcPct val="100000"/>
-              </a:lnSpc>
-              <a:spcBef>
-                <a:spcPts val="0"/>
-              </a:spcBef>
-              <a:spcAft>
-                <a:spcPts val="1200"/>
-              </a:spcAft>
-              <a:buClrTx/>
-              <a:buSzTx/>
-              <a:buFontTx/>
-              <a:buNone/>
-              <a:tabLst/>
-              <a:defRPr sz="1800">
-                <a:solidFill>
-                  <a:srgbClr val="FFFFFF"/>
-                </a:solidFill>
-              </a:defRPr>
-            </a:pPr>
-            <a:r>
-              <a:rPr kumimoji="0" sz="1800" b="0" i="0" u="none" strike="noStrike" kern="1200" cap="none" spc="0" normalizeH="0" baseline="0" noProof="0">
-                <a:ln>
-                  <a:noFill/>
-                </a:ln>
-                <a:solidFill>
-                  <a:srgbClr val="FFFFFF"/>
-                </a:solidFill>
-                <a:effectLst/>
-                <a:uLnTx/>
-                <a:uFillTx/>
-                <a:latin typeface="Calibri"/>
-                <a:ea typeface="+mn-ea"/>
-                <a:cs typeface="+mn-cs"/>
-              </a:rPr>
-              <a:t>  Works autonomously in background</a:t>
-            </a:r>
-          </a:p>
-          <a:p>
-            <a:pPr marL="0" marR="0" lvl="0" indent="0" algn="l" defTabSz="457200" rtl="0" eaLnBrk="1" fontAlgn="auto" latinLnBrk="0" hangingPunct="1">
-              <a:lnSpc>
-                <a:spcPct val="100000"/>
-              </a:lnSpc>
-              <a:spcBef>
-                <a:spcPts val="0"/>
-              </a:spcBef>
-              <a:spcAft>
-                <a:spcPts val="1200"/>
-              </a:spcAft>
-              <a:buClrTx/>
-              <a:buSzTx/>
-              <a:buFontTx/>
-              <a:buNone/>
-              <a:tabLst/>
-              <a:defRPr sz="1800">
-                <a:solidFill>
-                  <a:srgbClr val="FFFFFF"/>
-                </a:solidFill>
-              </a:defRPr>
-            </a:pPr>
-            <a:r>
-              <a:rPr kumimoji="0" sz="1800" b="0" i="0" u="none" strike="noStrike" kern="1200" cap="none" spc="0" normalizeH="0" baseline="0" noProof="0">
-                <a:ln>
-                  <a:noFill/>
-                </a:ln>
-                <a:solidFill>
-                  <a:srgbClr val="FFFFFF"/>
-                </a:solidFill>
-                <a:effectLst/>
-                <a:uLnTx/>
-                <a:uFillTx/>
-                <a:latin typeface="Calibri"/>
-                <a:ea typeface="+mn-ea"/>
-                <a:cs typeface="+mn-cs"/>
-              </a:rPr>
-              <a:t>  Handles complex multi-step tasks</a:t>
-            </a:r>
-          </a:p>
-          <a:p>
-            <a:pPr marL="0" marR="0" lvl="0" indent="0" algn="l" defTabSz="457200" rtl="0" eaLnBrk="1" fontAlgn="auto" latinLnBrk="0" hangingPunct="1">
-              <a:lnSpc>
-                <a:spcPct val="100000"/>
-              </a:lnSpc>
-              <a:spcBef>
-                <a:spcPts val="0"/>
-              </a:spcBef>
-              <a:spcAft>
-                <a:spcPts val="1200"/>
-              </a:spcAft>
-              <a:buClrTx/>
-              <a:buSzTx/>
-              <a:buFontTx/>
-              <a:buNone/>
-              <a:tabLst/>
-              <a:defRPr sz="1800">
-                <a:solidFill>
-                  <a:srgbClr val="FFFFFF"/>
-                </a:solidFill>
-              </a:defRPr>
-            </a:pPr>
-            <a:r>
-              <a:rPr kumimoji="0" sz="1800" b="0" i="0" u="none" strike="noStrike" kern="1200" cap="none" spc="0" normalizeH="0" baseline="0" noProof="0">
-                <a:ln>
-                  <a:noFill/>
-                </a:ln>
-                <a:solidFill>
-                  <a:srgbClr val="FFFFFF"/>
-                </a:solidFill>
-                <a:effectLst/>
-                <a:uLnTx/>
-                <a:uFillTx/>
-                <a:latin typeface="Calibri"/>
-                <a:ea typeface="+mn-ea"/>
-                <a:cs typeface="+mn-cs"/>
-              </a:rPr>
-              <a:t>  Task presets: 'Optimize my week', 'Organize screenshots', etc.</a:t>
-            </a:r>
-          </a:p>
-          <a:p>
-            <a:pPr marL="0" marR="0" lvl="0" indent="0" algn="l" defTabSz="457200" rtl="0" eaLnBrk="1" fontAlgn="auto" latinLnBrk="0" hangingPunct="1">
-              <a:lnSpc>
-                <a:spcPct val="100000"/>
-              </a:lnSpc>
-              <a:spcBef>
-                <a:spcPts val="0"/>
-              </a:spcBef>
-              <a:spcAft>
-                <a:spcPts val="1200"/>
-              </a:spcAft>
-              <a:buClrTx/>
-              <a:buSzTx/>
-              <a:buFontTx/>
-              <a:buNone/>
-              <a:tabLst/>
-              <a:defRPr sz="1800">
-                <a:solidFill>
-                  <a:srgbClr val="FFFFFF"/>
-                </a:solidFill>
-              </a:defRPr>
-            </a:pPr>
-            <a:r>
-              <a:rPr kumimoji="0" sz="1800" b="0" i="0" u="none" strike="noStrike" kern="1200" cap="none" spc="0" normalizeH="0" baseline="0" noProof="0">
-                <a:ln>
-                  <a:noFill/>
-                </a:ln>
-                <a:solidFill>
-                  <a:srgbClr val="FFFFFF"/>
-                </a:solidFill>
-                <a:effectLst/>
-                <a:uLnTx/>
-                <a:uFillTx/>
-                <a:latin typeface="Calibri"/>
-                <a:ea typeface="+mn-ea"/>
-                <a:cs typeface="+mn-cs"/>
-              </a:rPr>
-              <a:t>  You check in when YOU want</a:t>
-            </a:r>
-          </a:p>
-          <a:p>
-            <a:pPr marL="0" marR="0" lvl="0" indent="0" algn="l" defTabSz="457200" rtl="0" eaLnBrk="1" fontAlgn="auto" latinLnBrk="0" hangingPunct="1">
-              <a:lnSpc>
-                <a:spcPct val="100000"/>
-              </a:lnSpc>
-              <a:spcBef>
-                <a:spcPts val="0"/>
-              </a:spcBef>
-              <a:spcAft>
-                <a:spcPts val="1200"/>
-              </a:spcAft>
-              <a:buClrTx/>
-              <a:buSzTx/>
-              <a:buFontTx/>
-              <a:buNone/>
-              <a:tabLst/>
-              <a:defRPr sz="1800">
-                <a:solidFill>
-                  <a:srgbClr val="FFFFFF"/>
-                </a:solidFill>
-              </a:defRPr>
-            </a:pPr>
-            <a:r>
-              <a:rPr kumimoji="0" sz="1800" b="0" i="0" u="none" strike="noStrike" kern="1200" cap="none" spc="0" normalizeH="0" baseline="0" noProof="0">
-                <a:ln>
-                  <a:noFill/>
-                </a:ln>
-                <a:solidFill>
-                  <a:srgbClr val="FFFFFF"/>
-                </a:solidFill>
-                <a:effectLst/>
-                <a:uLnTx/>
-                <a:uFillTx/>
-                <a:latin typeface="Calibri"/>
-                <a:ea typeface="+mn-ea"/>
-                <a:cs typeface="+mn-cs"/>
-              </a:rPr>
-              <a:t>  Available: Windows + Mac Preview</a:t>
-            </a:r>
-          </a:p>
-          <a:p>
-            <a:pPr marL="0" marR="0" lvl="0" indent="0" algn="l" defTabSz="457200" rtl="0" eaLnBrk="1" fontAlgn="auto" latinLnBrk="0" hangingPunct="1">
-              <a:lnSpc>
-                <a:spcPct val="100000"/>
-              </a:lnSpc>
-              <a:spcBef>
-                <a:spcPts val="0"/>
-              </a:spcBef>
-              <a:spcAft>
-                <a:spcPts val="1200"/>
-              </a:spcAft>
-              <a:buClrTx/>
-              <a:buSzTx/>
-              <a:buFontTx/>
-              <a:buNone/>
-              <a:tabLst/>
-              <a:defRPr sz="1800">
-                <a:solidFill>
-                  <a:srgbClr val="FFFFFF"/>
-                </a:solidFill>
-              </a:defRPr>
-            </a:pPr>
-            <a:r>
-              <a:rPr kumimoji="0" sz="1800" b="0" i="0" u="none" strike="noStrike" kern="1200" cap="none" spc="0" normalizeH="0" baseline="0" noProof="0">
-                <a:ln>
-                  <a:noFill/>
-                </a:ln>
-                <a:solidFill>
-                  <a:srgbClr val="FFFFFF"/>
-                </a:solidFill>
-                <a:effectLst/>
-                <a:uLnTx/>
-                <a:uFillTx/>
-                <a:latin typeface="Calibri"/>
-                <a:ea typeface="+mn-ea"/>
-                <a:cs typeface="+mn-cs"/>
-              </a:rPr>
-              <a:t>  Plugin integration (customize workflows)</a:t>
-            </a:r>
-          </a:p>
-        </p:txBody>
-      </p:sp>
-      <p:sp>
-        <p:nvSpPr>
           <p:cNvPr id="14" name="TextBox 13"/>
           <p:cNvSpPr txBox="1"/>
           <p:nvPr/>
@@ -27471,543 +26607,6 @@
           <a:chExt cx="0" cy="0"/>
         </a:xfrm>
       </p:grpSpPr>
-      <p:sp>
-        <p:nvSpPr>
-          <p:cNvPr id="2" name="TextBox 1">
-            <a:extLst>
-              <a:ext uri="{FF2B5EF4-FFF2-40B4-BE49-F238E27FC236}">
-                <a16:creationId xmlns:a16="http://schemas.microsoft.com/office/drawing/2014/main" id="{BB6F2101-4F98-C246-7F6A-CA3CC9B094DC}"/>
-              </a:ext>
-            </a:extLst>
-          </p:cNvPr>
-          <p:cNvSpPr txBox="1"/>
-          <p:nvPr/>
-        </p:nvSpPr>
-        <p:spPr>
-          <a:xfrm>
-            <a:off x="457200" y="365760"/>
-            <a:ext cx="11277295" cy="822960"/>
-          </a:xfrm>
-          <a:prstGeom prst="rect">
-            <a:avLst/>
-          </a:prstGeom>
-          <a:noFill/>
-        </p:spPr>
-        <p:txBody>
-          <a:bodyPr wrap="none">
-            <a:spAutoFit/>
-          </a:bodyPr>
-          <a:lstStyle/>
-          <a:p>
-            <a:pPr marL="0" marR="0" lvl="0" indent="0" algn="l" defTabSz="457200" rtl="0" eaLnBrk="1" fontAlgn="auto" latinLnBrk="0" hangingPunct="1">
-              <a:lnSpc>
-                <a:spcPct val="100000"/>
-              </a:lnSpc>
-              <a:spcBef>
-                <a:spcPts val="0"/>
-              </a:spcBef>
-              <a:spcAft>
-                <a:spcPts val="0"/>
-              </a:spcAft>
-              <a:buClrTx/>
-              <a:buSzTx/>
-              <a:buFontTx/>
-              <a:buNone/>
-              <a:tabLst/>
-              <a:defRPr sz="4000" b="1">
-                <a:solidFill>
-                  <a:srgbClr val="FFFFFF"/>
-                </a:solidFill>
-              </a:defRPr>
-            </a:pPr>
-            <a:r>
-              <a:rPr kumimoji="0" sz="4000" b="1" i="0" u="none" strike="noStrike" kern="1200" cap="none" spc="0" normalizeH="0" baseline="0" noProof="0">
-                <a:ln>
-                  <a:noFill/>
-                </a:ln>
-                <a:solidFill>
-                  <a:srgbClr val="FFFFFF"/>
-                </a:solidFill>
-                <a:effectLst/>
-                <a:uLnTx/>
-                <a:uFillTx/>
-                <a:latin typeface="Calibri"/>
-                <a:ea typeface="+mn-ea"/>
-                <a:cs typeface="+mn-cs"/>
-              </a:rPr>
-              <a:t>When to Use Claude for Work</a:t>
-            </a:r>
-          </a:p>
-        </p:txBody>
-      </p:sp>
-      <p:sp>
-        <p:nvSpPr>
-          <p:cNvPr id="3" name="Rectangle 2">
-            <a:extLst>
-              <a:ext uri="{FF2B5EF4-FFF2-40B4-BE49-F238E27FC236}">
-                <a16:creationId xmlns:a16="http://schemas.microsoft.com/office/drawing/2014/main" id="{D1BA573A-E4B7-822F-B58F-C8B4687FAE8F}"/>
-              </a:ext>
-            </a:extLst>
-          </p:cNvPr>
-          <p:cNvSpPr/>
-          <p:nvPr/>
-        </p:nvSpPr>
-        <p:spPr>
-          <a:xfrm>
-            <a:off x="457200" y="1234440"/>
-            <a:ext cx="1828800" cy="36576"/>
-          </a:xfrm>
-          <a:prstGeom prst="rect">
-            <a:avLst/>
-          </a:prstGeom>
-          <a:solidFill>
-            <a:srgbClr val="00D4AA"/>
-          </a:solidFill>
-          <a:ln>
-            <a:noFill/>
-          </a:ln>
-        </p:spPr>
-        <p:style>
-          <a:lnRef idx="1">
-            <a:schemeClr val="accent1"/>
-          </a:lnRef>
-          <a:fillRef idx="3">
-            <a:schemeClr val="accent1"/>
-          </a:fillRef>
-          <a:effectRef idx="2">
-            <a:schemeClr val="accent1"/>
-          </a:effectRef>
-          <a:fontRef idx="minor">
-            <a:schemeClr val="lt1"/>
-          </a:fontRef>
-        </p:style>
-        <p:txBody>
-          <a:bodyPr rtlCol="0" anchor="ctr"/>
-          <a:lstStyle/>
-          <a:p>
-            <a:pPr marL="0" marR="0" lvl="0" indent="0" algn="ctr" defTabSz="457200" rtl="0" eaLnBrk="1" fontAlgn="auto" latinLnBrk="0" hangingPunct="1">
-              <a:lnSpc>
-                <a:spcPct val="100000"/>
-              </a:lnSpc>
-              <a:spcBef>
-                <a:spcPts val="0"/>
-              </a:spcBef>
-              <a:spcAft>
-                <a:spcPts val="0"/>
-              </a:spcAft>
-              <a:buClrTx/>
-              <a:buSzTx/>
-              <a:buFontTx/>
-              <a:buNone/>
-              <a:tabLst/>
-              <a:defRPr/>
-            </a:pPr>
-            <a:endParaRPr kumimoji="0" sz="1800" b="0" i="0" u="none" strike="noStrike" kern="1200" cap="none" spc="0" normalizeH="0" baseline="0" noProof="0">
-              <a:ln>
-                <a:noFill/>
-              </a:ln>
-              <a:solidFill>
-                <a:prstClr val="white"/>
-              </a:solidFill>
-              <a:effectLst/>
-              <a:uLnTx/>
-              <a:uFillTx/>
-              <a:latin typeface="Calibri"/>
-              <a:ea typeface="+mn-ea"/>
-              <a:cs typeface="+mn-cs"/>
-            </a:endParaRPr>
-          </a:p>
-        </p:txBody>
-      </p:sp>
-      <p:sp>
-        <p:nvSpPr>
-          <p:cNvPr id="4" name="TextBox 3">
-            <a:extLst>
-              <a:ext uri="{FF2B5EF4-FFF2-40B4-BE49-F238E27FC236}">
-                <a16:creationId xmlns:a16="http://schemas.microsoft.com/office/drawing/2014/main" id="{DF607436-CA4A-12EA-4CC2-583FD5C95E76}"/>
-              </a:ext>
-            </a:extLst>
-          </p:cNvPr>
-          <p:cNvSpPr txBox="1"/>
-          <p:nvPr/>
-        </p:nvSpPr>
-        <p:spPr>
-          <a:xfrm>
-            <a:off x="457200" y="1463040"/>
-            <a:ext cx="11277295" cy="4572000"/>
-          </a:xfrm>
-          <a:prstGeom prst="rect">
-            <a:avLst/>
-          </a:prstGeom>
-          <a:noFill/>
-        </p:spPr>
-        <p:txBody>
-          <a:bodyPr wrap="square">
-            <a:spAutoFit/>
-          </a:bodyPr>
-          <a:lstStyle/>
-          <a:p>
-            <a:pPr marL="0" marR="0" lvl="0" indent="0" algn="l" defTabSz="457200" rtl="0" eaLnBrk="1" fontAlgn="auto" latinLnBrk="0" hangingPunct="1">
-              <a:lnSpc>
-                <a:spcPct val="100000"/>
-              </a:lnSpc>
-              <a:spcBef>
-                <a:spcPts val="800"/>
-              </a:spcBef>
-              <a:spcAft>
-                <a:spcPts val="800"/>
-              </a:spcAft>
-              <a:buClrTx/>
-              <a:buSzTx/>
-              <a:buFontTx/>
-              <a:buNone/>
-              <a:tabLst/>
-              <a:defRPr sz="2200">
-                <a:solidFill>
-                  <a:srgbClr val="FFFFFF"/>
-                </a:solidFill>
-              </a:defRPr>
-            </a:pPr>
-            <a:r>
-              <a:rPr kumimoji="0" sz="2200" b="0" i="0" u="none" strike="noStrike" kern="1200" cap="none" spc="0" normalizeH="0" baseline="0" noProof="0">
-                <a:ln>
-                  <a:noFill/>
-                </a:ln>
-                <a:solidFill>
-                  <a:srgbClr val="FFFFFF"/>
-                </a:solidFill>
-                <a:effectLst/>
-                <a:uLnTx/>
-                <a:uFillTx/>
-                <a:latin typeface="Calibri"/>
-                <a:ea typeface="+mn-ea"/>
-                <a:cs typeface="+mn-cs"/>
-              </a:rPr>
-              <a:t>  ✅ PERFECT FOR: Complex multi-step tasks (2+ hours of work)</a:t>
-            </a:r>
-          </a:p>
-          <a:p>
-            <a:pPr marL="0" marR="0" lvl="0" indent="0" algn="l" defTabSz="457200" rtl="0" eaLnBrk="1" fontAlgn="auto" latinLnBrk="0" hangingPunct="1">
-              <a:lnSpc>
-                <a:spcPct val="100000"/>
-              </a:lnSpc>
-              <a:spcBef>
-                <a:spcPts val="800"/>
-              </a:spcBef>
-              <a:spcAft>
-                <a:spcPts val="800"/>
-              </a:spcAft>
-              <a:buClrTx/>
-              <a:buSzTx/>
-              <a:buFontTx/>
-              <a:buNone/>
-              <a:tabLst/>
-              <a:defRPr sz="2200">
-                <a:solidFill>
-                  <a:srgbClr val="FFFFFF"/>
-                </a:solidFill>
-              </a:defRPr>
-            </a:pPr>
-            <a:r>
-              <a:rPr kumimoji="0" sz="2200" b="0" i="0" u="none" strike="noStrike" kern="1200" cap="none" spc="0" normalizeH="0" baseline="0" noProof="0">
-                <a:ln>
-                  <a:noFill/>
-                </a:ln>
-                <a:solidFill>
-                  <a:srgbClr val="FFFFFF"/>
-                </a:solidFill>
-                <a:effectLst/>
-                <a:uLnTx/>
-                <a:uFillTx/>
-                <a:latin typeface="Calibri"/>
-                <a:ea typeface="+mn-ea"/>
-                <a:cs typeface="+mn-cs"/>
-              </a:rPr>
-              <a:t>     • Competitive research &amp; analysis</a:t>
-            </a:r>
-          </a:p>
-          <a:p>
-            <a:pPr marL="0" marR="0" lvl="0" indent="0" algn="l" defTabSz="457200" rtl="0" eaLnBrk="1" fontAlgn="auto" latinLnBrk="0" hangingPunct="1">
-              <a:lnSpc>
-                <a:spcPct val="100000"/>
-              </a:lnSpc>
-              <a:spcBef>
-                <a:spcPts val="800"/>
-              </a:spcBef>
-              <a:spcAft>
-                <a:spcPts val="800"/>
-              </a:spcAft>
-              <a:buClrTx/>
-              <a:buSzTx/>
-              <a:buFontTx/>
-              <a:buNone/>
-              <a:tabLst/>
-              <a:defRPr sz="2200">
-                <a:solidFill>
-                  <a:srgbClr val="FFFFFF"/>
-                </a:solidFill>
-              </a:defRPr>
-            </a:pPr>
-            <a:r>
-              <a:rPr kumimoji="0" sz="2200" b="0" i="0" u="none" strike="noStrike" kern="1200" cap="none" spc="0" normalizeH="0" baseline="0" noProof="0">
-                <a:ln>
-                  <a:noFill/>
-                </a:ln>
-                <a:solidFill>
-                  <a:srgbClr val="FFFFFF"/>
-                </a:solidFill>
-                <a:effectLst/>
-                <a:uLnTx/>
-                <a:uFillTx/>
-                <a:latin typeface="Calibri"/>
-                <a:ea typeface="+mn-ea"/>
-                <a:cs typeface="+mn-cs"/>
-              </a:rPr>
-              <a:t>     • Writing long documents (PRDs, reports, proposals)</a:t>
-            </a:r>
-          </a:p>
-          <a:p>
-            <a:pPr marL="0" marR="0" lvl="0" indent="0" algn="l" defTabSz="457200" rtl="0" eaLnBrk="1" fontAlgn="auto" latinLnBrk="0" hangingPunct="1">
-              <a:lnSpc>
-                <a:spcPct val="100000"/>
-              </a:lnSpc>
-              <a:spcBef>
-                <a:spcPts val="800"/>
-              </a:spcBef>
-              <a:spcAft>
-                <a:spcPts val="800"/>
-              </a:spcAft>
-              <a:buClrTx/>
-              <a:buSzTx/>
-              <a:buFontTx/>
-              <a:buNone/>
-              <a:tabLst/>
-              <a:defRPr sz="2200">
-                <a:solidFill>
-                  <a:srgbClr val="FFFFFF"/>
-                </a:solidFill>
-              </a:defRPr>
-            </a:pPr>
-            <a:r>
-              <a:rPr kumimoji="0" sz="2200" b="0" i="0" u="none" strike="noStrike" kern="1200" cap="none" spc="0" normalizeH="0" baseline="0" noProof="0">
-                <a:ln>
-                  <a:noFill/>
-                </a:ln>
-                <a:solidFill>
-                  <a:srgbClr val="FFFFFF"/>
-                </a:solidFill>
-                <a:effectLst/>
-                <a:uLnTx/>
-                <a:uFillTx/>
-                <a:latin typeface="Calibri"/>
-                <a:ea typeface="+mn-ea"/>
-                <a:cs typeface="+mn-cs"/>
-              </a:rPr>
-              <a:t>     • Data analysis across multiple files</a:t>
-            </a:r>
-          </a:p>
-          <a:p>
-            <a:pPr marL="0" marR="0" lvl="0" indent="0" algn="l" defTabSz="457200" rtl="0" eaLnBrk="1" fontAlgn="auto" latinLnBrk="0" hangingPunct="1">
-              <a:lnSpc>
-                <a:spcPct val="100000"/>
-              </a:lnSpc>
-              <a:spcBef>
-                <a:spcPts val="800"/>
-              </a:spcBef>
-              <a:spcAft>
-                <a:spcPts val="800"/>
-              </a:spcAft>
-              <a:buClrTx/>
-              <a:buSzTx/>
-              <a:buFontTx/>
-              <a:buNone/>
-              <a:tabLst/>
-              <a:defRPr sz="2200">
-                <a:solidFill>
-                  <a:srgbClr val="FFFFFF"/>
-                </a:solidFill>
-              </a:defRPr>
-            </a:pPr>
-            <a:r>
-              <a:rPr kumimoji="0" sz="2200" b="0" i="0" u="none" strike="noStrike" kern="1200" cap="none" spc="0" normalizeH="0" baseline="0" noProof="0">
-                <a:ln>
-                  <a:noFill/>
-                </a:ln>
-                <a:solidFill>
-                  <a:srgbClr val="FFFFFF"/>
-                </a:solidFill>
-                <a:effectLst/>
-                <a:uLnTx/>
-                <a:uFillTx/>
-                <a:latin typeface="Calibri"/>
-                <a:ea typeface="+mn-ea"/>
-                <a:cs typeface="+mn-cs"/>
-              </a:rPr>
-              <a:t>     • Content creation with multiple iterations</a:t>
-            </a:r>
-          </a:p>
-          <a:p>
-            <a:pPr marL="0" marR="0" lvl="0" indent="0" algn="l" defTabSz="457200" rtl="0" eaLnBrk="1" fontAlgn="auto" latinLnBrk="0" hangingPunct="1">
-              <a:lnSpc>
-                <a:spcPct val="100000"/>
-              </a:lnSpc>
-              <a:spcBef>
-                <a:spcPts val="800"/>
-              </a:spcBef>
-              <a:spcAft>
-                <a:spcPts val="800"/>
-              </a:spcAft>
-              <a:buClrTx/>
-              <a:buSzTx/>
-              <a:buFontTx/>
-              <a:buNone/>
-              <a:tabLst/>
-              <a:defRPr sz="2200">
-                <a:solidFill>
-                  <a:srgbClr val="FFFFFF"/>
-                </a:solidFill>
-              </a:defRPr>
-            </a:pPr>
-            <a:r>
-              <a:rPr kumimoji="0" sz="2200" b="0" i="0" u="none" strike="noStrike" kern="1200" cap="none" spc="0" normalizeH="0" baseline="0" noProof="0">
-                <a:ln>
-                  <a:noFill/>
-                </a:ln>
-                <a:solidFill>
-                  <a:srgbClr val="FFFFFF"/>
-                </a:solidFill>
-                <a:effectLst/>
-                <a:uLnTx/>
-                <a:uFillTx/>
-                <a:latin typeface="Calibri"/>
-                <a:ea typeface="+mn-ea"/>
-                <a:cs typeface="+mn-cs"/>
-              </a:rPr>
-              <a:t>  ❌ NOT IDEAL FOR: Quick questions, real-time collaboration, learning/exploration</a:t>
-            </a:r>
-          </a:p>
-          <a:p>
-            <a:pPr marL="0" marR="0" lvl="0" indent="0" algn="l" defTabSz="457200" rtl="0" eaLnBrk="1" fontAlgn="auto" latinLnBrk="0" hangingPunct="1">
-              <a:lnSpc>
-                <a:spcPct val="100000"/>
-              </a:lnSpc>
-              <a:spcBef>
-                <a:spcPts val="800"/>
-              </a:spcBef>
-              <a:spcAft>
-                <a:spcPts val="800"/>
-              </a:spcAft>
-              <a:buClrTx/>
-              <a:buSzTx/>
-              <a:buFontTx/>
-              <a:buNone/>
-              <a:tabLst/>
-              <a:defRPr sz="2200">
-                <a:solidFill>
-                  <a:srgbClr val="FFFFFF"/>
-                </a:solidFill>
-              </a:defRPr>
-            </a:pPr>
-            <a:r>
-              <a:rPr kumimoji="0" sz="2200" b="0" i="0" u="none" strike="noStrike" kern="1200" cap="none" spc="0" normalizeH="0" baseline="0" noProof="0">
-                <a:ln>
-                  <a:noFill/>
-                </a:ln>
-                <a:solidFill>
-                  <a:srgbClr val="FFFFFF"/>
-                </a:solidFill>
-                <a:effectLst/>
-                <a:uLnTx/>
-                <a:uFillTx/>
-                <a:latin typeface="Calibri"/>
-                <a:ea typeface="+mn-ea"/>
-                <a:cs typeface="+mn-cs"/>
-              </a:rPr>
-              <a:t>  🎯 THE RULE: If you'd normally block 2+ hours on calendar → Use Cowork. Quick task → Use Claude.ai</a:t>
-            </a:r>
-          </a:p>
-          <a:p>
-            <a:pPr marL="0" marR="0" lvl="0" indent="0" algn="l" defTabSz="457200" rtl="0" eaLnBrk="1" fontAlgn="auto" latinLnBrk="0" hangingPunct="1">
-              <a:lnSpc>
-                <a:spcPct val="100000"/>
-              </a:lnSpc>
-              <a:spcBef>
-                <a:spcPts val="800"/>
-              </a:spcBef>
-              <a:spcAft>
-                <a:spcPts val="800"/>
-              </a:spcAft>
-              <a:buClrTx/>
-              <a:buSzTx/>
-              <a:buFontTx/>
-              <a:buNone/>
-              <a:tabLst/>
-              <a:defRPr sz="2200">
-                <a:solidFill>
-                  <a:srgbClr val="FFFFFF"/>
-                </a:solidFill>
-              </a:defRPr>
-            </a:pPr>
-            <a:r>
-              <a:rPr kumimoji="0" sz="2200" b="0" i="0" u="none" strike="noStrike" kern="1200" cap="none" spc="0" normalizeH="0" baseline="0" noProof="0">
-                <a:ln>
-                  <a:noFill/>
-                </a:ln>
-                <a:solidFill>
-                  <a:srgbClr val="FFFFFF"/>
-                </a:solidFill>
-                <a:effectLst/>
-                <a:uLnTx/>
-                <a:uFillTx/>
-                <a:latin typeface="Calibri"/>
-                <a:ea typeface="+mn-ea"/>
-                <a:cs typeface="+mn-cs"/>
-              </a:rPr>
-              <a:t>  💻 HOW TO GET IT: Download Claude Desktop App (Windows/Mac) - Pro/Team subscribers get autonomous features in Preview</a:t>
-            </a:r>
-          </a:p>
-          <a:p>
-            <a:pPr marL="0" marR="0" lvl="0" indent="0" algn="l" defTabSz="457200" rtl="0" eaLnBrk="1" fontAlgn="auto" latinLnBrk="0" hangingPunct="1">
-              <a:lnSpc>
-                <a:spcPct val="100000"/>
-              </a:lnSpc>
-              <a:spcBef>
-                <a:spcPts val="800"/>
-              </a:spcBef>
-              <a:spcAft>
-                <a:spcPts val="800"/>
-              </a:spcAft>
-              <a:buClrTx/>
-              <a:buSzTx/>
-              <a:buFontTx/>
-              <a:buNone/>
-              <a:tabLst/>
-              <a:defRPr sz="2200">
-                <a:solidFill>
-                  <a:srgbClr val="FFFFFF"/>
-                </a:solidFill>
-              </a:defRPr>
-            </a:pPr>
-            <a:r>
-              <a:rPr kumimoji="0" sz="2200" b="0" i="0" u="none" strike="noStrike" kern="1200" cap="none" spc="0" normalizeH="0" baseline="0" noProof="0">
-                <a:ln>
-                  <a:noFill/>
-                </a:ln>
-                <a:solidFill>
-                  <a:srgbClr val="FFFFFF"/>
-                </a:solidFill>
-                <a:effectLst/>
-                <a:uLnTx/>
-                <a:uFillTx/>
-                <a:latin typeface="Calibri"/>
-                <a:ea typeface="+mn-ea"/>
-                <a:cs typeface="+mn-cs"/>
-              </a:rPr>
-              <a:t>  ⚠️ PREVIEW NOTE: Early access = expect bugs, limited rollout, features evolving</a:t>
-            </a:r>
-          </a:p>
-        </p:txBody>
-      </p:sp>
       <p:sp>
         <p:nvSpPr>
           <p:cNvPr id="18" name="TextBox 17"/>

--- a/slides/Day1_Claude_for_Business.pptx
+++ b/slides/Day1_Claude_for_Business.pptx
@@ -11,6 +11,7 @@
     <p:sldId id="256" r:id="rId2"/>
     <p:sldId id="257" r:id="rId3"/>
     <p:sldId id="258" r:id="rId4"/>
+    <p:sldId id="346" r:id="rId90"/>
     <p:sldId id="264" r:id="rId5"/>
     <p:sldId id="268" r:id="rId6"/>
     <p:sldId id="269" r:id="rId7"/>
@@ -32,6 +33,7 @@
     <p:sldId id="297" r:id="rId23"/>
     <p:sldId id="293" r:id="rId24"/>
     <p:sldId id="280" r:id="rId25"/>
+    <p:sldId id="347" r:id="rId91"/>
     <p:sldId id="259" r:id="rId26"/>
     <p:sldId id="260" r:id="rId27"/>
     <p:sldId id="261" r:id="rId28"/>
@@ -50,6 +52,7 @@
     <p:sldId id="276" r:id="rId41"/>
     <p:sldId id="343" r:id="rId42"/>
     <p:sldId id="298" r:id="rId43"/>
+    <p:sldId id="348" r:id="rId92"/>
     <p:sldId id="277" r:id="rId44"/>
     <p:sldId id="315" r:id="rId45"/>
     <p:sldId id="279" r:id="rId46"/>
@@ -65,6 +68,7 @@
     <p:sldId id="278" r:id="rId56"/>
     <p:sldId id="344" r:id="rId57"/>
     <p:sldId id="309" r:id="rId58"/>
+    <p:sldId id="349" r:id="rId93"/>
     <p:sldId id="310" r:id="rId59"/>
     <p:sldId id="311" r:id="rId60"/>
     <p:sldId id="312" r:id="rId61"/>
@@ -28715,7 +28719,7 @@
               </a:defRPr>
             </a:pPr>
             <a:r>
-              <a:t>What are Projects?</a:t>
+              <a:t>What Are Projects?</a:t>
             </a:r>
           </a:p>
         </p:txBody>
@@ -38508,7 +38512,7 @@
               </a:defRPr>
             </a:pPr>
             <a:r>
-              <a:t>What are Artifacts?</a:t>
+              <a:t>What Are Artifacts?</a:t>
             </a:r>
           </a:p>
         </p:txBody>
@@ -48224,6 +48228,934 @@
             </a:pPr>
             <a:r>
               <a:t>- © 2026 AIA Copilot</a:t>
+            </a:r>
+          </a:p>
+        </p:txBody>
+      </p:sp>
+    </p:spTree>
+  </p:cSld>
+  <p:clrMapOvr>
+    <a:masterClrMapping/>
+  </p:clrMapOvr>
+</p:sld>
+</file>
+
+<file path=ppt/slides/slide82.xml><?xml version="1.0" encoding="utf-8"?>
+<p:sld xmlns:a="http://schemas.openxmlformats.org/drawingml/2006/main" xmlns:p="http://schemas.openxmlformats.org/presentationml/2006/main" xmlns:r="http://schemas.openxmlformats.org/officeDocument/2006/relationships">
+  <p:cSld>
+    <p:bg>
+      <p:bgPr>
+        <a:solidFill>
+          <a:srgbClr val="1F2D3D"/>
+        </a:solidFill>
+        <a:effectLst/>
+      </p:bgPr>
+    </p:bg>
+    <p:spTree>
+      <p:nvGrpSpPr>
+        <p:cNvPr id="1" name=""/>
+        <p:cNvGrpSpPr/>
+        <p:nvPr/>
+      </p:nvGrpSpPr>
+      <p:grpSpPr/>
+      <p:sp>
+        <p:nvSpPr>
+          <p:cNvPr id="2" name="Rectangle 1"/>
+          <p:cNvSpPr/>
+          <p:nvPr/>
+        </p:nvSpPr>
+        <p:spPr>
+          <a:xfrm>
+            <a:off x="365760" y="1371600"/>
+            <a:ext cx="73152" cy="2743200"/>
+          </a:xfrm>
+          <a:prstGeom prst="rect">
+            <a:avLst/>
+          </a:prstGeom>
+          <a:solidFill>
+            <a:srgbClr val="14B8A6"/>
+          </a:solidFill>
+          <a:ln>
+            <a:noFill/>
+          </a:ln>
+        </p:spPr>
+        <p:style>
+          <a:lnRef idx="1">
+            <a:schemeClr val="accent1"/>
+          </a:lnRef>
+          <a:fillRef idx="3">
+            <a:schemeClr val="accent1"/>
+          </a:fillRef>
+          <a:effectRef idx="2">
+            <a:schemeClr val="accent1"/>
+          </a:effectRef>
+          <a:fontRef idx="minor">
+            <a:schemeClr val="lt1"/>
+          </a:fontRef>
+        </p:style>
+        <p:txBody>
+          <a:bodyPr rtlCol="0" anchor="ctr"/>
+          <a:lstStyle/>
+          <a:p>
+            <a:pPr algn="ctr"/>
+          </a:p>
+        </p:txBody>
+      </p:sp>
+      <p:sp>
+        <p:nvSpPr>
+          <p:cNvPr id="3" name="TextBox 2"/>
+          <p:cNvSpPr txBox="1"/>
+          <p:nvPr/>
+        </p:nvSpPr>
+        <p:spPr>
+          <a:xfrm>
+            <a:off x="731520" y="1371600"/>
+            <a:ext cx="2743200" cy="548640"/>
+          </a:xfrm>
+          <a:prstGeom prst="rect">
+            <a:avLst/>
+          </a:prstGeom>
+          <a:noFill/>
+        </p:spPr>
+        <p:txBody>
+          <a:bodyPr wrap="none">
+            <a:spAutoFit/>
+          </a:bodyPr>
+          <a:lstStyle/>
+          <a:p>
+            <a:pPr>
+              <a:defRPr sz="1600" b="1">
+                <a:solidFill>
+                  <a:srgbClr val="14B8A6"/>
+                </a:solidFill>
+              </a:defRPr>
+            </a:pPr>
+            <a:r>
+              <a:t>SECTION 1</a:t>
+            </a:r>
+          </a:p>
+        </p:txBody>
+      </p:sp>
+      <p:sp>
+        <p:nvSpPr>
+          <p:cNvPr id="4" name="TextBox 3"/>
+          <p:cNvSpPr txBox="1"/>
+          <p:nvPr/>
+        </p:nvSpPr>
+        <p:spPr>
+          <a:xfrm>
+            <a:off x="731520" y="2011680"/>
+            <a:ext cx="10058400" cy="1097280"/>
+          </a:xfrm>
+          <a:prstGeom prst="rect">
+            <a:avLst/>
+          </a:prstGeom>
+          <a:noFill/>
+        </p:spPr>
+        <p:txBody>
+          <a:bodyPr wrap="none">
+            <a:spAutoFit/>
+          </a:bodyPr>
+          <a:lstStyle/>
+          <a:p>
+            <a:pPr>
+              <a:defRPr sz="5600" b="1">
+                <a:solidFill>
+                  <a:srgbClr val="FFFFFF"/>
+                </a:solidFill>
+              </a:defRPr>
+            </a:pPr>
+            <a:r>
+              <a:t>Claude Interface</a:t>
+            </a:r>
+            <a:br/>
+            <a:r>
+              <a:t>&amp; Prompt Engineering</a:t>
+            </a:r>
+          </a:p>
+        </p:txBody>
+      </p:sp>
+      <p:sp>
+        <p:nvSpPr>
+          <p:cNvPr id="5" name="TextBox 4"/>
+          <p:cNvSpPr txBox="1"/>
+          <p:nvPr/>
+        </p:nvSpPr>
+        <p:spPr>
+          <a:xfrm>
+            <a:off x="731520" y="3200400"/>
+            <a:ext cx="10058400" cy="548640"/>
+          </a:xfrm>
+          <a:prstGeom prst="rect">
+            <a:avLst/>
+          </a:prstGeom>
+          <a:noFill/>
+        </p:spPr>
+        <p:txBody>
+          <a:bodyPr wrap="none">
+            <a:spAutoFit/>
+          </a:bodyPr>
+          <a:lstStyle/>
+          <a:p>
+            <a:pPr>
+              <a:defRPr sz="2200">
+                <a:solidFill>
+                  <a:srgbClr val="9CA3AF"/>
+                </a:solidFill>
+              </a:defRPr>
+            </a:pPr>
+            <a:r>
+              <a:t>Navigate the tool, then master the core skill</a:t>
+            </a:r>
+          </a:p>
+        </p:txBody>
+      </p:sp>
+      <p:sp>
+        <p:nvSpPr>
+          <p:cNvPr id="6" name="Rounded Rectangle 5"/>
+          <p:cNvSpPr/>
+          <p:nvPr/>
+        </p:nvSpPr>
+        <p:spPr>
+          <a:xfrm>
+            <a:off x="731520" y="4023360"/>
+            <a:ext cx="1828800" cy="457200"/>
+          </a:xfrm>
+          <a:prstGeom prst="roundRect">
+            <a:avLst/>
+          </a:prstGeom>
+          <a:solidFill>
+            <a:srgbClr val="24354A"/>
+          </a:solidFill>
+          <a:ln w="12700">
+            <a:solidFill>
+              <a:srgbClr val="14B8A6"/>
+            </a:solidFill>
+          </a:ln>
+        </p:spPr>
+        <p:style>
+          <a:lnRef idx="1">
+            <a:schemeClr val="accent1"/>
+          </a:lnRef>
+          <a:fillRef idx="3">
+            <a:schemeClr val="accent1"/>
+          </a:fillRef>
+          <a:effectRef idx="2">
+            <a:schemeClr val="accent1"/>
+          </a:effectRef>
+          <a:fontRef idx="minor">
+            <a:schemeClr val="lt1"/>
+          </a:fontRef>
+        </p:style>
+        <p:txBody>
+          <a:bodyPr rtlCol="0" anchor="ctr"/>
+          <a:lstStyle/>
+          <a:p>
+            <a:pPr algn="ctr">
+              <a:defRPr sz="1400" b="1">
+                <a:solidFill>
+                  <a:srgbClr val="14B8A6"/>
+                </a:solidFill>
+              </a:defRPr>
+            </a:pPr>
+            <a:r>
+              <a:t>2 hours 30 min</a:t>
+            </a:r>
+          </a:p>
+        </p:txBody>
+      </p:sp>
+    </p:spTree>
+  </p:cSld>
+  <p:clrMapOvr>
+    <a:masterClrMapping/>
+  </p:clrMapOvr>
+</p:sld>
+</file>
+
+<file path=ppt/slides/slide83.xml><?xml version="1.0" encoding="utf-8"?>
+<p:sld xmlns:a="http://schemas.openxmlformats.org/drawingml/2006/main" xmlns:p="http://schemas.openxmlformats.org/presentationml/2006/main" xmlns:r="http://schemas.openxmlformats.org/officeDocument/2006/relationships">
+  <p:cSld>
+    <p:bg>
+      <p:bgPr>
+        <a:solidFill>
+          <a:srgbClr val="1F2D3D"/>
+        </a:solidFill>
+        <a:effectLst/>
+      </p:bgPr>
+    </p:bg>
+    <p:spTree>
+      <p:nvGrpSpPr>
+        <p:cNvPr id="1" name=""/>
+        <p:cNvGrpSpPr/>
+        <p:nvPr/>
+      </p:nvGrpSpPr>
+      <p:grpSpPr/>
+      <p:sp>
+        <p:nvSpPr>
+          <p:cNvPr id="2" name="Rectangle 1"/>
+          <p:cNvSpPr/>
+          <p:nvPr/>
+        </p:nvSpPr>
+        <p:spPr>
+          <a:xfrm>
+            <a:off x="365760" y="1371600"/>
+            <a:ext cx="73152" cy="2743200"/>
+          </a:xfrm>
+          <a:prstGeom prst="rect">
+            <a:avLst/>
+          </a:prstGeom>
+          <a:solidFill>
+            <a:srgbClr val="14B8A6"/>
+          </a:solidFill>
+          <a:ln>
+            <a:noFill/>
+          </a:ln>
+        </p:spPr>
+        <p:style>
+          <a:lnRef idx="1">
+            <a:schemeClr val="accent1"/>
+          </a:lnRef>
+          <a:fillRef idx="3">
+            <a:schemeClr val="accent1"/>
+          </a:fillRef>
+          <a:effectRef idx="2">
+            <a:schemeClr val="accent1"/>
+          </a:effectRef>
+          <a:fontRef idx="minor">
+            <a:schemeClr val="lt1"/>
+          </a:fontRef>
+        </p:style>
+        <p:txBody>
+          <a:bodyPr rtlCol="0" anchor="ctr"/>
+          <a:lstStyle/>
+          <a:p>
+            <a:pPr algn="ctr"/>
+          </a:p>
+        </p:txBody>
+      </p:sp>
+      <p:sp>
+        <p:nvSpPr>
+          <p:cNvPr id="3" name="TextBox 2"/>
+          <p:cNvSpPr txBox="1"/>
+          <p:nvPr/>
+        </p:nvSpPr>
+        <p:spPr>
+          <a:xfrm>
+            <a:off x="731520" y="1371600"/>
+            <a:ext cx="2743200" cy="548640"/>
+          </a:xfrm>
+          <a:prstGeom prst="rect">
+            <a:avLst/>
+          </a:prstGeom>
+          <a:noFill/>
+        </p:spPr>
+        <p:txBody>
+          <a:bodyPr wrap="none">
+            <a:spAutoFit/>
+          </a:bodyPr>
+          <a:lstStyle/>
+          <a:p>
+            <a:pPr>
+              <a:defRPr sz="1600" b="1">
+                <a:solidFill>
+                  <a:srgbClr val="14B8A6"/>
+                </a:solidFill>
+              </a:defRPr>
+            </a:pPr>
+            <a:r>
+              <a:t>SECTION 2</a:t>
+            </a:r>
+          </a:p>
+        </p:txBody>
+      </p:sp>
+      <p:sp>
+        <p:nvSpPr>
+          <p:cNvPr id="4" name="TextBox 3"/>
+          <p:cNvSpPr txBox="1"/>
+          <p:nvPr/>
+        </p:nvSpPr>
+        <p:spPr>
+          <a:xfrm>
+            <a:off x="731520" y="2011680"/>
+            <a:ext cx="10058400" cy="1097280"/>
+          </a:xfrm>
+          <a:prstGeom prst="rect">
+            <a:avLst/>
+          </a:prstGeom>
+          <a:noFill/>
+        </p:spPr>
+        <p:txBody>
+          <a:bodyPr wrap="none">
+            <a:spAutoFit/>
+          </a:bodyPr>
+          <a:lstStyle/>
+          <a:p>
+            <a:pPr>
+              <a:defRPr sz="5600" b="1">
+                <a:solidFill>
+                  <a:srgbClr val="FFFFFF"/>
+                </a:solidFill>
+              </a:defRPr>
+            </a:pPr>
+            <a:r>
+              <a:t>Models, Settings</a:t>
+            </a:r>
+            <a:br/>
+            <a:r>
+              <a:t>&amp; Projects</a:t>
+            </a:r>
+          </a:p>
+        </p:txBody>
+      </p:sp>
+      <p:sp>
+        <p:nvSpPr>
+          <p:cNvPr id="5" name="TextBox 4"/>
+          <p:cNvSpPr txBox="1"/>
+          <p:nvPr/>
+        </p:nvSpPr>
+        <p:spPr>
+          <a:xfrm>
+            <a:off x="731520" y="3200400"/>
+            <a:ext cx="10058400" cy="548640"/>
+          </a:xfrm>
+          <a:prstGeom prst="rect">
+            <a:avLst/>
+          </a:prstGeom>
+          <a:noFill/>
+        </p:spPr>
+        <p:txBody>
+          <a:bodyPr wrap="none">
+            <a:spAutoFit/>
+          </a:bodyPr>
+          <a:lstStyle/>
+          <a:p>
+            <a:pPr>
+              <a:defRPr sz="2200">
+                <a:solidFill>
+                  <a:srgbClr val="9CA3AF"/>
+                </a:solidFill>
+              </a:defRPr>
+            </a:pPr>
+            <a:r>
+              <a:t>Choose the right engine, configure your workspace, organize your work</a:t>
+            </a:r>
+          </a:p>
+        </p:txBody>
+      </p:sp>
+      <p:sp>
+        <p:nvSpPr>
+          <p:cNvPr id="6" name="Rounded Rectangle 5"/>
+          <p:cNvSpPr/>
+          <p:nvPr/>
+        </p:nvSpPr>
+        <p:spPr>
+          <a:xfrm>
+            <a:off x="731520" y="4023360"/>
+            <a:ext cx="1828800" cy="457200"/>
+          </a:xfrm>
+          <a:prstGeom prst="roundRect">
+            <a:avLst/>
+          </a:prstGeom>
+          <a:solidFill>
+            <a:srgbClr val="24354A"/>
+          </a:solidFill>
+          <a:ln w="12700">
+            <a:solidFill>
+              <a:srgbClr val="14B8A6"/>
+            </a:solidFill>
+          </a:ln>
+        </p:spPr>
+        <p:style>
+          <a:lnRef idx="1">
+            <a:schemeClr val="accent1"/>
+          </a:lnRef>
+          <a:fillRef idx="3">
+            <a:schemeClr val="accent1"/>
+          </a:fillRef>
+          <a:effectRef idx="2">
+            <a:schemeClr val="accent1"/>
+          </a:effectRef>
+          <a:fontRef idx="minor">
+            <a:schemeClr val="lt1"/>
+          </a:fontRef>
+        </p:style>
+        <p:txBody>
+          <a:bodyPr rtlCol="0" anchor="ctr"/>
+          <a:lstStyle/>
+          <a:p>
+            <a:pPr algn="ctr">
+              <a:defRPr sz="1400" b="1">
+                <a:solidFill>
+                  <a:srgbClr val="14B8A6"/>
+                </a:solidFill>
+              </a:defRPr>
+            </a:pPr>
+            <a:r>
+              <a:t>1 hour 30 min</a:t>
+            </a:r>
+          </a:p>
+        </p:txBody>
+      </p:sp>
+    </p:spTree>
+  </p:cSld>
+  <p:clrMapOvr>
+    <a:masterClrMapping/>
+  </p:clrMapOvr>
+</p:sld>
+</file>
+
+<file path=ppt/slides/slide84.xml><?xml version="1.0" encoding="utf-8"?>
+<p:sld xmlns:a="http://schemas.openxmlformats.org/drawingml/2006/main" xmlns:p="http://schemas.openxmlformats.org/presentationml/2006/main" xmlns:r="http://schemas.openxmlformats.org/officeDocument/2006/relationships">
+  <p:cSld>
+    <p:bg>
+      <p:bgPr>
+        <a:solidFill>
+          <a:srgbClr val="1F2D3D"/>
+        </a:solidFill>
+        <a:effectLst/>
+      </p:bgPr>
+    </p:bg>
+    <p:spTree>
+      <p:nvGrpSpPr>
+        <p:cNvPr id="1" name=""/>
+        <p:cNvGrpSpPr/>
+        <p:nvPr/>
+      </p:nvGrpSpPr>
+      <p:grpSpPr/>
+      <p:sp>
+        <p:nvSpPr>
+          <p:cNvPr id="2" name="Rectangle 1"/>
+          <p:cNvSpPr/>
+          <p:nvPr/>
+        </p:nvSpPr>
+        <p:spPr>
+          <a:xfrm>
+            <a:off x="365760" y="1371600"/>
+            <a:ext cx="73152" cy="2743200"/>
+          </a:xfrm>
+          <a:prstGeom prst="rect">
+            <a:avLst/>
+          </a:prstGeom>
+          <a:solidFill>
+            <a:srgbClr val="14B8A6"/>
+          </a:solidFill>
+          <a:ln>
+            <a:noFill/>
+          </a:ln>
+        </p:spPr>
+        <p:style>
+          <a:lnRef idx="1">
+            <a:schemeClr val="accent1"/>
+          </a:lnRef>
+          <a:fillRef idx="3">
+            <a:schemeClr val="accent1"/>
+          </a:fillRef>
+          <a:effectRef idx="2">
+            <a:schemeClr val="accent1"/>
+          </a:effectRef>
+          <a:fontRef idx="minor">
+            <a:schemeClr val="lt1"/>
+          </a:fontRef>
+        </p:style>
+        <p:txBody>
+          <a:bodyPr rtlCol="0" anchor="ctr"/>
+          <a:lstStyle/>
+          <a:p>
+            <a:pPr algn="ctr"/>
+          </a:p>
+        </p:txBody>
+      </p:sp>
+      <p:sp>
+        <p:nvSpPr>
+          <p:cNvPr id="3" name="TextBox 2"/>
+          <p:cNvSpPr txBox="1"/>
+          <p:nvPr/>
+        </p:nvSpPr>
+        <p:spPr>
+          <a:xfrm>
+            <a:off x="731520" y="1371600"/>
+            <a:ext cx="2743200" cy="548640"/>
+          </a:xfrm>
+          <a:prstGeom prst="rect">
+            <a:avLst/>
+          </a:prstGeom>
+          <a:noFill/>
+        </p:spPr>
+        <p:txBody>
+          <a:bodyPr wrap="none">
+            <a:spAutoFit/>
+          </a:bodyPr>
+          <a:lstStyle/>
+          <a:p>
+            <a:pPr>
+              <a:defRPr sz="1600" b="1">
+                <a:solidFill>
+                  <a:srgbClr val="14B8A6"/>
+                </a:solidFill>
+              </a:defRPr>
+            </a:pPr>
+            <a:r>
+              <a:t>SECTION 3</a:t>
+            </a:r>
+          </a:p>
+        </p:txBody>
+      </p:sp>
+      <p:sp>
+        <p:nvSpPr>
+          <p:cNvPr id="4" name="TextBox 3"/>
+          <p:cNvSpPr txBox="1"/>
+          <p:nvPr/>
+        </p:nvSpPr>
+        <p:spPr>
+          <a:xfrm>
+            <a:off x="731520" y="2011680"/>
+            <a:ext cx="10058400" cy="1097280"/>
+          </a:xfrm>
+          <a:prstGeom prst="rect">
+            <a:avLst/>
+          </a:prstGeom>
+          <a:noFill/>
+        </p:spPr>
+        <p:txBody>
+          <a:bodyPr wrap="none">
+            <a:spAutoFit/>
+          </a:bodyPr>
+          <a:lstStyle/>
+          <a:p>
+            <a:pPr>
+              <a:defRPr sz="5600" b="1">
+                <a:solidFill>
+                  <a:srgbClr val="FFFFFF"/>
+                </a:solidFill>
+              </a:defRPr>
+            </a:pPr>
+            <a:r>
+              <a:t>Analysis Prompts</a:t>
+            </a:r>
+            <a:br/>
+            <a:r>
+              <a:t>&amp; Claude in Excel</a:t>
+            </a:r>
+          </a:p>
+        </p:txBody>
+      </p:sp>
+      <p:sp>
+        <p:nvSpPr>
+          <p:cNvPr id="5" name="TextBox 4"/>
+          <p:cNvSpPr txBox="1"/>
+          <p:nvPr/>
+        </p:nvSpPr>
+        <p:spPr>
+          <a:xfrm>
+            <a:off x="731520" y="3200400"/>
+            <a:ext cx="10058400" cy="548640"/>
+          </a:xfrm>
+          <a:prstGeom prst="rect">
+            <a:avLst/>
+          </a:prstGeom>
+          <a:noFill/>
+        </p:spPr>
+        <p:txBody>
+          <a:bodyPr wrap="none">
+            <a:spAutoFit/>
+          </a:bodyPr>
+          <a:lstStyle/>
+          <a:p>
+            <a:pPr>
+              <a:defRPr sz="2200">
+                <a:solidFill>
+                  <a:srgbClr val="9CA3AF"/>
+                </a:solidFill>
+              </a:defRPr>
+            </a:pPr>
+            <a:r>
+              <a:t>Turn data into decisions — in the browser and in your spreadsheets</a:t>
+            </a:r>
+          </a:p>
+        </p:txBody>
+      </p:sp>
+      <p:sp>
+        <p:nvSpPr>
+          <p:cNvPr id="6" name="Rounded Rectangle 5"/>
+          <p:cNvSpPr/>
+          <p:nvPr/>
+        </p:nvSpPr>
+        <p:spPr>
+          <a:xfrm>
+            <a:off x="731520" y="4023360"/>
+            <a:ext cx="1828800" cy="457200"/>
+          </a:xfrm>
+          <a:prstGeom prst="roundRect">
+            <a:avLst/>
+          </a:prstGeom>
+          <a:solidFill>
+            <a:srgbClr val="24354A"/>
+          </a:solidFill>
+          <a:ln w="12700">
+            <a:solidFill>
+              <a:srgbClr val="14B8A6"/>
+            </a:solidFill>
+          </a:ln>
+        </p:spPr>
+        <p:style>
+          <a:lnRef idx="1">
+            <a:schemeClr val="accent1"/>
+          </a:lnRef>
+          <a:fillRef idx="3">
+            <a:schemeClr val="accent1"/>
+          </a:fillRef>
+          <a:effectRef idx="2">
+            <a:schemeClr val="accent1"/>
+          </a:effectRef>
+          <a:fontRef idx="minor">
+            <a:schemeClr val="lt1"/>
+          </a:fontRef>
+        </p:style>
+        <p:txBody>
+          <a:bodyPr rtlCol="0" anchor="ctr"/>
+          <a:lstStyle/>
+          <a:p>
+            <a:pPr algn="ctr">
+              <a:defRPr sz="1400" b="1">
+                <a:solidFill>
+                  <a:srgbClr val="14B8A6"/>
+                </a:solidFill>
+              </a:defRPr>
+            </a:pPr>
+            <a:r>
+              <a:t>1 hour 15 min</a:t>
+            </a:r>
+          </a:p>
+        </p:txBody>
+      </p:sp>
+    </p:spTree>
+  </p:cSld>
+  <p:clrMapOvr>
+    <a:masterClrMapping/>
+  </p:clrMapOvr>
+</p:sld>
+</file>
+
+<file path=ppt/slides/slide85.xml><?xml version="1.0" encoding="utf-8"?>
+<p:sld xmlns:a="http://schemas.openxmlformats.org/drawingml/2006/main" xmlns:p="http://schemas.openxmlformats.org/presentationml/2006/main" xmlns:r="http://schemas.openxmlformats.org/officeDocument/2006/relationships">
+  <p:cSld>
+    <p:bg>
+      <p:bgPr>
+        <a:solidFill>
+          <a:srgbClr val="1F2D3D"/>
+        </a:solidFill>
+        <a:effectLst/>
+      </p:bgPr>
+    </p:bg>
+    <p:spTree>
+      <p:nvGrpSpPr>
+        <p:cNvPr id="1" name=""/>
+        <p:cNvGrpSpPr/>
+        <p:nvPr/>
+      </p:nvGrpSpPr>
+      <p:grpSpPr/>
+      <p:sp>
+        <p:nvSpPr>
+          <p:cNvPr id="2" name="Rectangle 1"/>
+          <p:cNvSpPr/>
+          <p:nvPr/>
+        </p:nvSpPr>
+        <p:spPr>
+          <a:xfrm>
+            <a:off x="365760" y="1371600"/>
+            <a:ext cx="73152" cy="2743200"/>
+          </a:xfrm>
+          <a:prstGeom prst="rect">
+            <a:avLst/>
+          </a:prstGeom>
+          <a:solidFill>
+            <a:srgbClr val="14B8A6"/>
+          </a:solidFill>
+          <a:ln>
+            <a:noFill/>
+          </a:ln>
+        </p:spPr>
+        <p:style>
+          <a:lnRef idx="1">
+            <a:schemeClr val="accent1"/>
+          </a:lnRef>
+          <a:fillRef idx="3">
+            <a:schemeClr val="accent1"/>
+          </a:fillRef>
+          <a:effectRef idx="2">
+            <a:schemeClr val="accent1"/>
+          </a:effectRef>
+          <a:fontRef idx="minor">
+            <a:schemeClr val="lt1"/>
+          </a:fontRef>
+        </p:style>
+        <p:txBody>
+          <a:bodyPr rtlCol="0" anchor="ctr"/>
+          <a:lstStyle/>
+          <a:p>
+            <a:pPr algn="ctr"/>
+          </a:p>
+        </p:txBody>
+      </p:sp>
+      <p:sp>
+        <p:nvSpPr>
+          <p:cNvPr id="3" name="TextBox 2"/>
+          <p:cNvSpPr txBox="1"/>
+          <p:nvPr/>
+        </p:nvSpPr>
+        <p:spPr>
+          <a:xfrm>
+            <a:off x="731520" y="1371600"/>
+            <a:ext cx="2743200" cy="548640"/>
+          </a:xfrm>
+          <a:prstGeom prst="rect">
+            <a:avLst/>
+          </a:prstGeom>
+          <a:noFill/>
+        </p:spPr>
+        <p:txBody>
+          <a:bodyPr wrap="none">
+            <a:spAutoFit/>
+          </a:bodyPr>
+          <a:lstStyle/>
+          <a:p>
+            <a:pPr>
+              <a:defRPr sz="1600" b="1">
+                <a:solidFill>
+                  <a:srgbClr val="14B8A6"/>
+                </a:solidFill>
+              </a:defRPr>
+            </a:pPr>
+            <a:r>
+              <a:t>SECTION 4</a:t>
+            </a:r>
+          </a:p>
+        </p:txBody>
+      </p:sp>
+      <p:sp>
+        <p:nvSpPr>
+          <p:cNvPr id="4" name="TextBox 3"/>
+          <p:cNvSpPr txBox="1"/>
+          <p:nvPr/>
+        </p:nvSpPr>
+        <p:spPr>
+          <a:xfrm>
+            <a:off x="731520" y="2011680"/>
+            <a:ext cx="10058400" cy="1097280"/>
+          </a:xfrm>
+          <a:prstGeom prst="rect">
+            <a:avLst/>
+          </a:prstGeom>
+          <a:noFill/>
+        </p:spPr>
+        <p:txBody>
+          <a:bodyPr wrap="none">
+            <a:spAutoFit/>
+          </a:bodyPr>
+          <a:lstStyle/>
+          <a:p>
+            <a:pPr>
+              <a:defRPr sz="5600" b="1">
+                <a:solidFill>
+                  <a:srgbClr val="FFFFFF"/>
+                </a:solidFill>
+              </a:defRPr>
+            </a:pPr>
+            <a:r>
+              <a:t>Artifacts, Files</a:t>
+            </a:r>
+            <a:br/>
+            <a:r>
+              <a:t>&amp; Integrations</a:t>
+            </a:r>
+          </a:p>
+        </p:txBody>
+      </p:sp>
+      <p:sp>
+        <p:nvSpPr>
+          <p:cNvPr id="5" name="TextBox 4"/>
+          <p:cNvSpPr txBox="1"/>
+          <p:nvPr/>
+        </p:nvSpPr>
+        <p:spPr>
+          <a:xfrm>
+            <a:off x="731520" y="3200400"/>
+            <a:ext cx="10058400" cy="548640"/>
+          </a:xfrm>
+          <a:prstGeom prst="rect">
+            <a:avLst/>
+          </a:prstGeom>
+          <a:noFill/>
+        </p:spPr>
+        <p:txBody>
+          <a:bodyPr wrap="none">
+            <a:spAutoFit/>
+          </a:bodyPr>
+          <a:lstStyle/>
+          <a:p>
+            <a:pPr>
+              <a:defRPr sz="2200">
+                <a:solidFill>
+                  <a:srgbClr val="9CA3AF"/>
+                </a:solidFill>
+              </a:defRPr>
+            </a:pPr>
+            <a:r>
+              <a:t>Create deliverables, work with files, and connect your tools</a:t>
+            </a:r>
+          </a:p>
+        </p:txBody>
+      </p:sp>
+      <p:sp>
+        <p:nvSpPr>
+          <p:cNvPr id="6" name="Rounded Rectangle 5"/>
+          <p:cNvSpPr/>
+          <p:nvPr/>
+        </p:nvSpPr>
+        <p:spPr>
+          <a:xfrm>
+            <a:off x="731520" y="4023360"/>
+            <a:ext cx="1828800" cy="457200"/>
+          </a:xfrm>
+          <a:prstGeom prst="roundRect">
+            <a:avLst/>
+          </a:prstGeom>
+          <a:solidFill>
+            <a:srgbClr val="24354A"/>
+          </a:solidFill>
+          <a:ln w="12700">
+            <a:solidFill>
+              <a:srgbClr val="14B8A6"/>
+            </a:solidFill>
+          </a:ln>
+        </p:spPr>
+        <p:style>
+          <a:lnRef idx="1">
+            <a:schemeClr val="accent1"/>
+          </a:lnRef>
+          <a:fillRef idx="3">
+            <a:schemeClr val="accent1"/>
+          </a:fillRef>
+          <a:effectRef idx="2">
+            <a:schemeClr val="accent1"/>
+          </a:effectRef>
+          <a:fontRef idx="minor">
+            <a:schemeClr val="lt1"/>
+          </a:fontRef>
+        </p:style>
+        <p:txBody>
+          <a:bodyPr rtlCol="0" anchor="ctr"/>
+          <a:lstStyle/>
+          <a:p>
+            <a:pPr algn="ctr">
+              <a:defRPr sz="1400" b="1">
+                <a:solidFill>
+                  <a:srgbClr val="14B8A6"/>
+                </a:solidFill>
+              </a:defRPr>
+            </a:pPr>
+            <a:r>
+              <a:t>1 hour 30 min</a:t>
             </a:r>
           </a:p>
         </p:txBody>

--- a/slides/Day1_Claude_for_Business.pptx
+++ b/slides/Day1_Claude_for_Business.pptx
@@ -21230,7 +21230,7 @@
         </p:nvSpPr>
         <p:spPr>
           <a:xfrm>
-            <a:off x="731520" y="3200400"/>
+            <a:off x="731520" y="3840480"/>
             <a:ext cx="10058400" cy="548640"/>
           </a:xfrm>
           <a:prstGeom prst="rect">
@@ -21253,60 +21253,6 @@
             </a:pPr>
             <a:r>
               <a:t>Choose the right engine, configure your workspace, organize your work</a:t>
-            </a:r>
-          </a:p>
-        </p:txBody>
-      </p:sp>
-      <p:sp>
-        <p:nvSpPr>
-          <p:cNvPr id="6" name="Rounded Rectangle 5"/>
-          <p:cNvSpPr/>
-          <p:nvPr/>
-        </p:nvSpPr>
-        <p:spPr>
-          <a:xfrm>
-            <a:off x="731520" y="4023360"/>
-            <a:ext cx="1828800" cy="457200"/>
-          </a:xfrm>
-          <a:prstGeom prst="roundRect">
-            <a:avLst/>
-          </a:prstGeom>
-          <a:solidFill>
-            <a:srgbClr val="24354A"/>
-          </a:solidFill>
-          <a:ln w="12700">
-            <a:solidFill>
-              <a:srgbClr val="14B8A6"/>
-            </a:solidFill>
-          </a:ln>
-        </p:spPr>
-        <p:style>
-          <a:lnRef idx="1">
-            <a:schemeClr val="accent1"/>
-          </a:lnRef>
-          <a:fillRef idx="3">
-            <a:schemeClr val="accent1"/>
-          </a:fillRef>
-          <a:effectRef idx="2">
-            <a:schemeClr val="accent1"/>
-          </a:effectRef>
-          <a:fontRef idx="minor">
-            <a:schemeClr val="lt1"/>
-          </a:fontRef>
-        </p:style>
-        <p:txBody>
-          <a:bodyPr rtlCol="0" anchor="ctr"/>
-          <a:lstStyle/>
-          <a:p>
-            <a:pPr algn="ctr">
-              <a:defRPr sz="1400" b="1">
-                <a:solidFill>
-                  <a:srgbClr val="14B8A6"/>
-                </a:solidFill>
-              </a:defRPr>
-            </a:pPr>
-            <a:r>
-              <a:t>1 hour 30 min</a:t>
             </a:r>
           </a:p>
         </p:txBody>
@@ -30029,7 +29975,7 @@
         </p:nvSpPr>
         <p:spPr>
           <a:xfrm>
-            <a:off x="731520" y="3200400"/>
+            <a:off x="731520" y="3840480"/>
             <a:ext cx="10058400" cy="548640"/>
           </a:xfrm>
           <a:prstGeom prst="rect">
@@ -30052,60 +29998,6 @@
             </a:pPr>
             <a:r>
               <a:t>Navigate the tool, then master the core skill</a:t>
-            </a:r>
-          </a:p>
-        </p:txBody>
-      </p:sp>
-      <p:sp>
-        <p:nvSpPr>
-          <p:cNvPr id="6" name="Rounded Rectangle 5"/>
-          <p:cNvSpPr/>
-          <p:nvPr/>
-        </p:nvSpPr>
-        <p:spPr>
-          <a:xfrm>
-            <a:off x="731520" y="4023360"/>
-            <a:ext cx="1828800" cy="457200"/>
-          </a:xfrm>
-          <a:prstGeom prst="roundRect">
-            <a:avLst/>
-          </a:prstGeom>
-          <a:solidFill>
-            <a:srgbClr val="24354A"/>
-          </a:solidFill>
-          <a:ln w="12700">
-            <a:solidFill>
-              <a:srgbClr val="14B8A6"/>
-            </a:solidFill>
-          </a:ln>
-        </p:spPr>
-        <p:style>
-          <a:lnRef idx="1">
-            <a:schemeClr val="accent1"/>
-          </a:lnRef>
-          <a:fillRef idx="3">
-            <a:schemeClr val="accent1"/>
-          </a:fillRef>
-          <a:effectRef idx="2">
-            <a:schemeClr val="accent1"/>
-          </a:effectRef>
-          <a:fontRef idx="minor">
-            <a:schemeClr val="lt1"/>
-          </a:fontRef>
-        </p:style>
-        <p:txBody>
-          <a:bodyPr rtlCol="0" anchor="ctr"/>
-          <a:lstStyle/>
-          <a:p>
-            <a:pPr algn="ctr">
-              <a:defRPr sz="1400" b="1">
-                <a:solidFill>
-                  <a:srgbClr val="14B8A6"/>
-                </a:solidFill>
-              </a:defRPr>
-            </a:pPr>
-            <a:r>
-              <a:t>2 hours 30 min</a:t>
             </a:r>
           </a:p>
         </p:txBody>
@@ -32594,7 +32486,7 @@
         </p:nvSpPr>
         <p:spPr>
           <a:xfrm>
-            <a:off x="731520" y="3200400"/>
+            <a:off x="731520" y="3840480"/>
             <a:ext cx="10058400" cy="548640"/>
           </a:xfrm>
           <a:prstGeom prst="rect">
@@ -32617,60 +32509,6 @@
             </a:pPr>
             <a:r>
               <a:t>Turn data into decisions — in the browser and in your spreadsheets</a:t>
-            </a:r>
-          </a:p>
-        </p:txBody>
-      </p:sp>
-      <p:sp>
-        <p:nvSpPr>
-          <p:cNvPr id="6" name="Rounded Rectangle 5"/>
-          <p:cNvSpPr/>
-          <p:nvPr/>
-        </p:nvSpPr>
-        <p:spPr>
-          <a:xfrm>
-            <a:off x="731520" y="4023360"/>
-            <a:ext cx="1828800" cy="457200"/>
-          </a:xfrm>
-          <a:prstGeom prst="roundRect">
-            <a:avLst/>
-          </a:prstGeom>
-          <a:solidFill>
-            <a:srgbClr val="24354A"/>
-          </a:solidFill>
-          <a:ln w="12700">
-            <a:solidFill>
-              <a:srgbClr val="14B8A6"/>
-            </a:solidFill>
-          </a:ln>
-        </p:spPr>
-        <p:style>
-          <a:lnRef idx="1">
-            <a:schemeClr val="accent1"/>
-          </a:lnRef>
-          <a:fillRef idx="3">
-            <a:schemeClr val="accent1"/>
-          </a:fillRef>
-          <a:effectRef idx="2">
-            <a:schemeClr val="accent1"/>
-          </a:effectRef>
-          <a:fontRef idx="minor">
-            <a:schemeClr val="lt1"/>
-          </a:fontRef>
-        </p:style>
-        <p:txBody>
-          <a:bodyPr rtlCol="0" anchor="ctr"/>
-          <a:lstStyle/>
-          <a:p>
-            <a:pPr algn="ctr">
-              <a:defRPr sz="1400" b="1">
-                <a:solidFill>
-                  <a:srgbClr val="14B8A6"/>
-                </a:solidFill>
-              </a:defRPr>
-            </a:pPr>
-            <a:r>
-              <a:t>1 hour 15 min</a:t>
             </a:r>
           </a:p>
         </p:txBody>
@@ -39240,7 +39078,7 @@
         </p:nvSpPr>
         <p:spPr>
           <a:xfrm>
-            <a:off x="731520" y="3200400"/>
+            <a:off x="731520" y="3840480"/>
             <a:ext cx="10058400" cy="548640"/>
           </a:xfrm>
           <a:prstGeom prst="rect">
@@ -39263,60 +39101,6 @@
             </a:pPr>
             <a:r>
               <a:t>Create deliverables, work with files, and connect your tools</a:t>
-            </a:r>
-          </a:p>
-        </p:txBody>
-      </p:sp>
-      <p:sp>
-        <p:nvSpPr>
-          <p:cNvPr id="6" name="Rounded Rectangle 5"/>
-          <p:cNvSpPr/>
-          <p:nvPr/>
-        </p:nvSpPr>
-        <p:spPr>
-          <a:xfrm>
-            <a:off x="731520" y="4023360"/>
-            <a:ext cx="1828800" cy="457200"/>
-          </a:xfrm>
-          <a:prstGeom prst="roundRect">
-            <a:avLst/>
-          </a:prstGeom>
-          <a:solidFill>
-            <a:srgbClr val="24354A"/>
-          </a:solidFill>
-          <a:ln w="12700">
-            <a:solidFill>
-              <a:srgbClr val="14B8A6"/>
-            </a:solidFill>
-          </a:ln>
-        </p:spPr>
-        <p:style>
-          <a:lnRef idx="1">
-            <a:schemeClr val="accent1"/>
-          </a:lnRef>
-          <a:fillRef idx="3">
-            <a:schemeClr val="accent1"/>
-          </a:fillRef>
-          <a:effectRef idx="2">
-            <a:schemeClr val="accent1"/>
-          </a:effectRef>
-          <a:fontRef idx="minor">
-            <a:schemeClr val="lt1"/>
-          </a:fontRef>
-        </p:style>
-        <p:txBody>
-          <a:bodyPr rtlCol="0" anchor="ctr"/>
-          <a:lstStyle/>
-          <a:p>
-            <a:pPr algn="ctr">
-              <a:defRPr sz="1400" b="1">
-                <a:solidFill>
-                  <a:srgbClr val="14B8A6"/>
-                </a:solidFill>
-              </a:defRPr>
-            </a:pPr>
-            <a:r>
-              <a:t>1 hour 30 min</a:t>
             </a:r>
           </a:p>
         </p:txBody>

--- a/slides/Day1_Claude_for_Business.pptx
+++ b/slides/Day1_Claude_for_Business.pptx
@@ -82,6 +82,7 @@
     <p:sldId id="321" r:id="rId69"/>
     <p:sldId id="322" r:id="rId70"/>
     <p:sldId id="323" r:id="rId71"/>
+    <p:sldId id="350" r:id="rId94"/>
     <p:sldId id="325" r:id="rId72"/>
     <p:sldId id="326" r:id="rId73"/>
     <p:sldId id="327" r:id="rId74"/>
@@ -48940,6 +48941,668 @@
 </p:sld>
 </file>
 
+<file path=ppt/slides/slide86.xml><?xml version="1.0" encoding="utf-8"?>
+<p:sld xmlns:a="http://schemas.openxmlformats.org/drawingml/2006/main" xmlns:p="http://schemas.openxmlformats.org/presentationml/2006/main" xmlns:r="http://schemas.openxmlformats.org/officeDocument/2006/relationships">
+  <p:cSld>
+    <p:bg>
+      <p:bgPr>
+        <a:solidFill>
+          <a:srgbClr val="0B0F1A"/>
+        </a:solidFill>
+        <a:effectLst/>
+      </p:bgPr>
+    </p:bg>
+    <p:spTree>
+      <p:nvGrpSpPr>
+        <p:cNvPr id="1" name=""/>
+        <p:cNvGrpSpPr/>
+        <p:nvPr/>
+      </p:nvGrpSpPr>
+      <p:grpSpPr/>
+      <p:sp>
+        <p:nvSpPr>
+          <p:cNvPr id="2" name="TextBox 1"/>
+          <p:cNvSpPr txBox="1"/>
+          <p:nvPr/>
+        </p:nvSpPr>
+        <p:spPr>
+          <a:xfrm>
+            <a:off x="457200" y="274320"/>
+            <a:ext cx="11247120" cy="822960"/>
+          </a:xfrm>
+          <a:prstGeom prst="rect">
+            <a:avLst/>
+          </a:prstGeom>
+          <a:noFill/>
+        </p:spPr>
+        <p:txBody>
+          <a:bodyPr wrap="none">
+            <a:spAutoFit/>
+          </a:bodyPr>
+          <a:lstStyle/>
+          <a:p>
+            <a:pPr>
+              <a:defRPr sz="4000" b="1">
+                <a:solidFill>
+                  <a:srgbClr val="FFFFFF"/>
+                </a:solidFill>
+              </a:defRPr>
+            </a:pPr>
+            <a:r>
+              <a:t>Claude in PowerPoint</a:t>
+            </a:r>
+          </a:p>
+        </p:txBody>
+      </p:sp>
+      <p:sp>
+        <p:nvSpPr>
+          <p:cNvPr id="3" name="TextBox 2"/>
+          <p:cNvSpPr txBox="1"/>
+          <p:nvPr/>
+        </p:nvSpPr>
+        <p:spPr>
+          <a:xfrm>
+            <a:off x="457200" y="1005840"/>
+            <a:ext cx="11247120" cy="457200"/>
+          </a:xfrm>
+          <a:prstGeom prst="rect">
+            <a:avLst/>
+          </a:prstGeom>
+          <a:noFill/>
+        </p:spPr>
+        <p:txBody>
+          <a:bodyPr wrap="none">
+            <a:spAutoFit/>
+          </a:bodyPr>
+          <a:lstStyle/>
+          <a:p>
+            <a:pPr>
+              <a:defRPr sz="1800" i="1">
+                <a:solidFill>
+                  <a:srgbClr val="14B8A6"/>
+                </a:solidFill>
+              </a:defRPr>
+            </a:pPr>
+            <a:r>
+              <a:t>Research Preview  •  Available for Max, Team, and Enterprise</a:t>
+            </a:r>
+          </a:p>
+        </p:txBody>
+      </p:sp>
+      <p:sp>
+        <p:nvSpPr>
+          <p:cNvPr id="4" name="Rounded Rectangle 3"/>
+          <p:cNvSpPr/>
+          <p:nvPr/>
+        </p:nvSpPr>
+        <p:spPr>
+          <a:xfrm>
+            <a:off x="457200" y="1737360"/>
+            <a:ext cx="3474720" cy="3200400"/>
+          </a:xfrm>
+          <a:prstGeom prst="roundRect">
+            <a:avLst/>
+          </a:prstGeom>
+          <a:solidFill>
+            <a:srgbClr val="141A2A"/>
+          </a:solidFill>
+          <a:ln w="19050">
+            <a:solidFill>
+              <a:srgbClr val="14B8A6"/>
+            </a:solidFill>
+          </a:ln>
+        </p:spPr>
+        <p:style>
+          <a:lnRef idx="1">
+            <a:schemeClr val="accent1"/>
+          </a:lnRef>
+          <a:fillRef idx="3">
+            <a:schemeClr val="accent1"/>
+          </a:fillRef>
+          <a:effectRef idx="2">
+            <a:schemeClr val="accent1"/>
+          </a:effectRef>
+          <a:fontRef idx="minor">
+            <a:schemeClr val="lt1"/>
+          </a:fontRef>
+        </p:style>
+        <p:txBody>
+          <a:bodyPr rtlCol="0" anchor="ctr"/>
+          <a:lstStyle/>
+          <a:p>
+            <a:pPr algn="ctr"/>
+          </a:p>
+        </p:txBody>
+      </p:sp>
+      <p:sp>
+        <p:nvSpPr>
+          <p:cNvPr id="5" name="TextBox 4"/>
+          <p:cNvSpPr txBox="1"/>
+          <p:nvPr/>
+        </p:nvSpPr>
+        <p:spPr>
+          <a:xfrm>
+            <a:off x="640080" y="1920240"/>
+            <a:ext cx="3108960" cy="457200"/>
+          </a:xfrm>
+          <a:prstGeom prst="rect">
+            <a:avLst/>
+          </a:prstGeom>
+          <a:noFill/>
+        </p:spPr>
+        <p:txBody>
+          <a:bodyPr wrap="none">
+            <a:spAutoFit/>
+          </a:bodyPr>
+          <a:lstStyle/>
+          <a:p>
+            <a:pPr algn="ctr">
+              <a:defRPr sz="3000"/>
+            </a:pPr>
+            <a:r>
+              <a:t>🎨</a:t>
+            </a:r>
+          </a:p>
+        </p:txBody>
+      </p:sp>
+      <p:sp>
+        <p:nvSpPr>
+          <p:cNvPr id="6" name="TextBox 5"/>
+          <p:cNvSpPr txBox="1"/>
+          <p:nvPr/>
+        </p:nvSpPr>
+        <p:spPr>
+          <a:xfrm>
+            <a:off x="640080" y="2377440"/>
+            <a:ext cx="3108960" cy="457200"/>
+          </a:xfrm>
+          <a:prstGeom prst="rect">
+            <a:avLst/>
+          </a:prstGeom>
+          <a:noFill/>
+        </p:spPr>
+        <p:txBody>
+          <a:bodyPr wrap="none">
+            <a:spAutoFit/>
+          </a:bodyPr>
+          <a:lstStyle/>
+          <a:p>
+            <a:pPr algn="ctr">
+              <a:defRPr sz="2000" b="1">
+                <a:solidFill>
+                  <a:srgbClr val="FFFFFF"/>
+                </a:solidFill>
+              </a:defRPr>
+            </a:pPr>
+            <a:r>
+              <a:t>Build &amp; Design</a:t>
+            </a:r>
+          </a:p>
+        </p:txBody>
+      </p:sp>
+      <p:sp>
+        <p:nvSpPr>
+          <p:cNvPr id="7" name="TextBox 6"/>
+          <p:cNvSpPr txBox="1"/>
+          <p:nvPr/>
+        </p:nvSpPr>
+        <p:spPr>
+          <a:xfrm>
+            <a:off x="640080" y="2926080"/>
+            <a:ext cx="3108960" cy="1828800"/>
+          </a:xfrm>
+          <a:prstGeom prst="rect">
+            <a:avLst/>
+          </a:prstGeom>
+          <a:noFill/>
+        </p:spPr>
+        <p:txBody>
+          <a:bodyPr wrap="square">
+            <a:spAutoFit/>
+          </a:bodyPr>
+          <a:lstStyle/>
+          <a:p>
+            <a:pPr algn="ctr">
+              <a:defRPr sz="1400">
+                <a:solidFill>
+                  <a:srgbClr val="D1D5DB"/>
+                </a:solidFill>
+              </a:defRPr>
+            </a:pPr>
+            <a:r>
+              <a:t>Create new slides from</a:t>
+            </a:r>
+            <a:br/>
+            <a:r>
+              <a:t>a prompt or outline</a:t>
+            </a:r>
+            <a:br/>
+            <a:r>
+              <a:t>Apply consistent branding</a:t>
+            </a:r>
+            <a:br/>
+            <a:r>
+              <a:t>Redesign existing decks</a:t>
+            </a:r>
+            <a:br/>
+            <a:r>
+              <a:t>Powered by Opus 4.6</a:t>
+            </a:r>
+          </a:p>
+        </p:txBody>
+      </p:sp>
+      <p:sp>
+        <p:nvSpPr>
+          <p:cNvPr id="8" name="Rounded Rectangle 7"/>
+          <p:cNvSpPr/>
+          <p:nvPr/>
+        </p:nvSpPr>
+        <p:spPr>
+          <a:xfrm>
+            <a:off x="4206240" y="1737360"/>
+            <a:ext cx="3474720" cy="3200400"/>
+          </a:xfrm>
+          <a:prstGeom prst="roundRect">
+            <a:avLst/>
+          </a:prstGeom>
+          <a:solidFill>
+            <a:srgbClr val="141A2A"/>
+          </a:solidFill>
+          <a:ln w="19050">
+            <a:solidFill>
+              <a:srgbClr val="14B8A6"/>
+            </a:solidFill>
+          </a:ln>
+        </p:spPr>
+        <p:style>
+          <a:lnRef idx="1">
+            <a:schemeClr val="accent1"/>
+          </a:lnRef>
+          <a:fillRef idx="3">
+            <a:schemeClr val="accent1"/>
+          </a:fillRef>
+          <a:effectRef idx="2">
+            <a:schemeClr val="accent1"/>
+          </a:effectRef>
+          <a:fontRef idx="minor">
+            <a:schemeClr val="lt1"/>
+          </a:fontRef>
+        </p:style>
+        <p:txBody>
+          <a:bodyPr rtlCol="0" anchor="ctr"/>
+          <a:lstStyle/>
+          <a:p>
+            <a:pPr algn="ctr"/>
+          </a:p>
+        </p:txBody>
+      </p:sp>
+      <p:sp>
+        <p:nvSpPr>
+          <p:cNvPr id="9" name="TextBox 8"/>
+          <p:cNvSpPr txBox="1"/>
+          <p:nvPr/>
+        </p:nvSpPr>
+        <p:spPr>
+          <a:xfrm>
+            <a:off x="4389120" y="1920240"/>
+            <a:ext cx="3108960" cy="457200"/>
+          </a:xfrm>
+          <a:prstGeom prst="rect">
+            <a:avLst/>
+          </a:prstGeom>
+          <a:noFill/>
+        </p:spPr>
+        <p:txBody>
+          <a:bodyPr wrap="none">
+            <a:spAutoFit/>
+          </a:bodyPr>
+          <a:lstStyle/>
+          <a:p>
+            <a:pPr algn="ctr">
+              <a:defRPr sz="3000"/>
+            </a:pPr>
+            <a:r>
+              <a:t>📝</a:t>
+            </a:r>
+          </a:p>
+        </p:txBody>
+      </p:sp>
+      <p:sp>
+        <p:nvSpPr>
+          <p:cNvPr id="10" name="TextBox 9"/>
+          <p:cNvSpPr txBox="1"/>
+          <p:nvPr/>
+        </p:nvSpPr>
+        <p:spPr>
+          <a:xfrm>
+            <a:off x="4389120" y="2377440"/>
+            <a:ext cx="3108960" cy="457200"/>
+          </a:xfrm>
+          <a:prstGeom prst="rect">
+            <a:avLst/>
+          </a:prstGeom>
+          <a:noFill/>
+        </p:spPr>
+        <p:txBody>
+          <a:bodyPr wrap="none">
+            <a:spAutoFit/>
+          </a:bodyPr>
+          <a:lstStyle/>
+          <a:p>
+            <a:pPr algn="ctr">
+              <a:defRPr sz="2000" b="1">
+                <a:solidFill>
+                  <a:srgbClr val="FFFFFF"/>
+                </a:solidFill>
+              </a:defRPr>
+            </a:pPr>
+            <a:r>
+              <a:t>Edit &amp; Refine</a:t>
+            </a:r>
+          </a:p>
+        </p:txBody>
+      </p:sp>
+      <p:sp>
+        <p:nvSpPr>
+          <p:cNvPr id="11" name="TextBox 10"/>
+          <p:cNvSpPr txBox="1"/>
+          <p:nvPr/>
+        </p:nvSpPr>
+        <p:spPr>
+          <a:xfrm>
+            <a:off x="4389120" y="2926080"/>
+            <a:ext cx="3108960" cy="1828800"/>
+          </a:xfrm>
+          <a:prstGeom prst="rect">
+            <a:avLst/>
+          </a:prstGeom>
+          <a:noFill/>
+        </p:spPr>
+        <p:txBody>
+          <a:bodyPr wrap="square">
+            <a:spAutoFit/>
+          </a:bodyPr>
+          <a:lstStyle/>
+          <a:p>
+            <a:pPr algn="ctr">
+              <a:defRPr sz="1400">
+                <a:solidFill>
+                  <a:srgbClr val="D1D5DB"/>
+                </a:solidFill>
+              </a:defRPr>
+            </a:pPr>
+            <a:r>
+              <a:t>Rewrite slide content</a:t>
+            </a:r>
+            <a:br/>
+            <a:r>
+              <a:t>Fix formatting issues</a:t>
+            </a:r>
+            <a:br/>
+            <a:r>
+              <a:t>Improve data visualizations</a:t>
+            </a:r>
+            <a:br/>
+            <a:r>
+              <a:t>Condense or expand sections</a:t>
+            </a:r>
+            <a:br/>
+            <a:r>
+              <a:t>Maintain brand guidelines</a:t>
+            </a:r>
+          </a:p>
+        </p:txBody>
+      </p:sp>
+      <p:sp>
+        <p:nvSpPr>
+          <p:cNvPr id="12" name="Rounded Rectangle 11"/>
+          <p:cNvSpPr/>
+          <p:nvPr/>
+        </p:nvSpPr>
+        <p:spPr>
+          <a:xfrm>
+            <a:off x="7955279" y="1737360"/>
+            <a:ext cx="3474720" cy="3200400"/>
+          </a:xfrm>
+          <a:prstGeom prst="roundRect">
+            <a:avLst/>
+          </a:prstGeom>
+          <a:solidFill>
+            <a:srgbClr val="141A2A"/>
+          </a:solidFill>
+          <a:ln w="19050">
+            <a:solidFill>
+              <a:srgbClr val="14B8A6"/>
+            </a:solidFill>
+          </a:ln>
+        </p:spPr>
+        <p:style>
+          <a:lnRef idx="1">
+            <a:schemeClr val="accent1"/>
+          </a:lnRef>
+          <a:fillRef idx="3">
+            <a:schemeClr val="accent1"/>
+          </a:fillRef>
+          <a:effectRef idx="2">
+            <a:schemeClr val="accent1"/>
+          </a:effectRef>
+          <a:fontRef idx="minor">
+            <a:schemeClr val="lt1"/>
+          </a:fontRef>
+        </p:style>
+        <p:txBody>
+          <a:bodyPr rtlCol="0" anchor="ctr"/>
+          <a:lstStyle/>
+          <a:p>
+            <a:pPr algn="ctr"/>
+          </a:p>
+        </p:txBody>
+      </p:sp>
+      <p:sp>
+        <p:nvSpPr>
+          <p:cNvPr id="13" name="TextBox 12"/>
+          <p:cNvSpPr txBox="1"/>
+          <p:nvPr/>
+        </p:nvSpPr>
+        <p:spPr>
+          <a:xfrm>
+            <a:off x="8138159" y="1920240"/>
+            <a:ext cx="3108960" cy="457200"/>
+          </a:xfrm>
+          <a:prstGeom prst="rect">
+            <a:avLst/>
+          </a:prstGeom>
+          <a:noFill/>
+        </p:spPr>
+        <p:txBody>
+          <a:bodyPr wrap="none">
+            <a:spAutoFit/>
+          </a:bodyPr>
+          <a:lstStyle/>
+          <a:p>
+            <a:pPr algn="ctr">
+              <a:defRPr sz="3000"/>
+            </a:pPr>
+            <a:r>
+              <a:t>💡</a:t>
+            </a:r>
+          </a:p>
+        </p:txBody>
+      </p:sp>
+      <p:sp>
+        <p:nvSpPr>
+          <p:cNvPr id="14" name="TextBox 13"/>
+          <p:cNvSpPr txBox="1"/>
+          <p:nvPr/>
+        </p:nvSpPr>
+        <p:spPr>
+          <a:xfrm>
+            <a:off x="8138159" y="2377440"/>
+            <a:ext cx="3108960" cy="457200"/>
+          </a:xfrm>
+          <a:prstGeom prst="rect">
+            <a:avLst/>
+          </a:prstGeom>
+          <a:noFill/>
+        </p:spPr>
+        <p:txBody>
+          <a:bodyPr wrap="none">
+            <a:spAutoFit/>
+          </a:bodyPr>
+          <a:lstStyle/>
+          <a:p>
+            <a:pPr algn="ctr">
+              <a:defRPr sz="2000" b="1">
+                <a:solidFill>
+                  <a:srgbClr val="FFFFFF"/>
+                </a:solidFill>
+              </a:defRPr>
+            </a:pPr>
+            <a:r>
+              <a:t>Analyze &amp; Advise</a:t>
+            </a:r>
+          </a:p>
+        </p:txBody>
+      </p:sp>
+      <p:sp>
+        <p:nvSpPr>
+          <p:cNvPr id="15" name="TextBox 14"/>
+          <p:cNvSpPr txBox="1"/>
+          <p:nvPr/>
+        </p:nvSpPr>
+        <p:spPr>
+          <a:xfrm>
+            <a:off x="8138159" y="2926080"/>
+            <a:ext cx="3108960" cy="1828800"/>
+          </a:xfrm>
+          <a:prstGeom prst="rect">
+            <a:avLst/>
+          </a:prstGeom>
+          <a:noFill/>
+        </p:spPr>
+        <p:txBody>
+          <a:bodyPr wrap="square">
+            <a:spAutoFit/>
+          </a:bodyPr>
+          <a:lstStyle/>
+          <a:p>
+            <a:pPr algn="ctr">
+              <a:defRPr sz="1400">
+                <a:solidFill>
+                  <a:srgbClr val="D1D5DB"/>
+                </a:solidFill>
+              </a:defRPr>
+            </a:pPr>
+            <a:r>
+              <a:t>Review your deck for</a:t>
+            </a:r>
+            <a:br/>
+            <a:r>
+              <a:t>clarity and flow</a:t>
+            </a:r>
+            <a:br/>
+            <a:r>
+              <a:t>Suggest better layouts</a:t>
+            </a:r>
+            <a:br/>
+            <a:r>
+              <a:t>Extract key messages</a:t>
+            </a:r>
+            <a:br/>
+            <a:r>
+              <a:t>Prepare speaker notes</a:t>
+            </a:r>
+          </a:p>
+        </p:txBody>
+      </p:sp>
+      <p:sp>
+        <p:nvSpPr>
+          <p:cNvPr id="16" name="Rounded Rectangle 15"/>
+          <p:cNvSpPr/>
+          <p:nvPr/>
+        </p:nvSpPr>
+        <p:spPr>
+          <a:xfrm>
+            <a:off x="457200" y="5212080"/>
+            <a:ext cx="11247120" cy="731520"/>
+          </a:xfrm>
+          <a:prstGeom prst="roundRect">
+            <a:avLst/>
+          </a:prstGeom>
+          <a:solidFill>
+            <a:srgbClr val="141A2A"/>
+          </a:solidFill>
+          <a:ln w="12700">
+            <a:solidFill>
+              <a:srgbClr val="14B8A6"/>
+            </a:solidFill>
+          </a:ln>
+        </p:spPr>
+        <p:style>
+          <a:lnRef idx="1">
+            <a:schemeClr val="accent1"/>
+          </a:lnRef>
+          <a:fillRef idx="3">
+            <a:schemeClr val="accent1"/>
+          </a:fillRef>
+          <a:effectRef idx="2">
+            <a:schemeClr val="accent1"/>
+          </a:effectRef>
+          <a:fontRef idx="minor">
+            <a:schemeClr val="lt1"/>
+          </a:fontRef>
+        </p:style>
+        <p:txBody>
+          <a:bodyPr rtlCol="0" anchor="ctr"/>
+          <a:lstStyle/>
+          <a:p>
+            <a:pPr algn="ctr"/>
+          </a:p>
+        </p:txBody>
+      </p:sp>
+      <p:sp>
+        <p:nvSpPr>
+          <p:cNvPr id="17" name="TextBox 16"/>
+          <p:cNvSpPr txBox="1"/>
+          <p:nvPr/>
+        </p:nvSpPr>
+        <p:spPr>
+          <a:xfrm>
+            <a:off x="731520" y="5303520"/>
+            <a:ext cx="10698480" cy="548640"/>
+          </a:xfrm>
+          <a:prstGeom prst="rect">
+            <a:avLst/>
+          </a:prstGeom>
+          <a:noFill/>
+        </p:spPr>
+        <p:txBody>
+          <a:bodyPr wrap="square">
+            <a:spAutoFit/>
+          </a:bodyPr>
+          <a:lstStyle/>
+          <a:p>
+            <a:pPr algn="ctr">
+              <a:defRPr sz="1500">
+                <a:solidFill>
+                  <a:srgbClr val="9CA3AF"/>
+                </a:solidFill>
+              </a:defRPr>
+            </a:pPr>
+            <a:r>
+              <a:t>Claude now integrates directly into Excel, PowerPoint, and Google Docs — your AI assistant lives inside the tools you already use</a:t>
+            </a:r>
+          </a:p>
+        </p:txBody>
+      </p:sp>
+    </p:spTree>
+  </p:cSld>
+  <p:clrMapOvr>
+    <a:masterClrMapping/>
+  </p:clrMapOvr>
+</p:sld>
+</file>
+
 <file path=ppt/slides/slide9.xml><?xml version="1.0" encoding="utf-8"?>
 <p:sld xmlns:a="http://schemas.openxmlformats.org/drawingml/2006/main" xmlns:r="http://schemas.openxmlformats.org/officeDocument/2006/relationships" xmlns:p="http://schemas.openxmlformats.org/presentationml/2006/main">
   <p:cSld>

--- a/slides/Day1_Claude_for_Business.pptx
+++ b/slides/Day1_Claude_for_Business.pptx
@@ -5,95 +5,96 @@
     <p:sldMasterId id="2147483648" r:id="rId1"/>
   </p:sldMasterIdLst>
   <p:notesMasterIdLst>
-    <p:notesMasterId r:id="rId83"/>
+    <p:notesMasterId r:id="rId88"/>
   </p:notesMasterIdLst>
   <p:sldIdLst>
     <p:sldId id="256" r:id="rId2"/>
     <p:sldId id="257" r:id="rId3"/>
     <p:sldId id="258" r:id="rId4"/>
-    <p:sldId id="346" r:id="rId90"/>
-    <p:sldId id="264" r:id="rId5"/>
-    <p:sldId id="268" r:id="rId6"/>
-    <p:sldId id="269" r:id="rId7"/>
-    <p:sldId id="281" r:id="rId8"/>
-    <p:sldId id="282" r:id="rId9"/>
-    <p:sldId id="283" r:id="rId10"/>
-    <p:sldId id="284" r:id="rId11"/>
-    <p:sldId id="285" r:id="rId12"/>
-    <p:sldId id="286" r:id="rId13"/>
-    <p:sldId id="287" r:id="rId14"/>
-    <p:sldId id="296" r:id="rId15"/>
-    <p:sldId id="288" r:id="rId16"/>
-    <p:sldId id="289" r:id="rId17"/>
-    <p:sldId id="290" r:id="rId18"/>
-    <p:sldId id="291" r:id="rId19"/>
-    <p:sldId id="292" r:id="rId20"/>
-    <p:sldId id="294" r:id="rId21"/>
-    <p:sldId id="295" r:id="rId22"/>
-    <p:sldId id="297" r:id="rId23"/>
-    <p:sldId id="293" r:id="rId24"/>
-    <p:sldId id="280" r:id="rId25"/>
-    <p:sldId id="347" r:id="rId91"/>
-    <p:sldId id="259" r:id="rId26"/>
-    <p:sldId id="260" r:id="rId27"/>
-    <p:sldId id="261" r:id="rId28"/>
-    <p:sldId id="262" r:id="rId29"/>
-    <p:sldId id="271" r:id="rId30"/>
-    <p:sldId id="335" r:id="rId31"/>
-    <p:sldId id="336" r:id="rId32"/>
-    <p:sldId id="337" r:id="rId33"/>
-    <p:sldId id="266" r:id="rId34"/>
-    <p:sldId id="267" r:id="rId35"/>
-    <p:sldId id="342" r:id="rId36"/>
-    <p:sldId id="272" r:id="rId37"/>
-    <p:sldId id="273" r:id="rId38"/>
-    <p:sldId id="274" r:id="rId39"/>
-    <p:sldId id="275" r:id="rId40"/>
-    <p:sldId id="276" r:id="rId41"/>
-    <p:sldId id="343" r:id="rId42"/>
-    <p:sldId id="298" r:id="rId43"/>
-    <p:sldId id="348" r:id="rId92"/>
-    <p:sldId id="277" r:id="rId44"/>
-    <p:sldId id="315" r:id="rId45"/>
-    <p:sldId id="279" r:id="rId46"/>
-    <p:sldId id="299" r:id="rId47"/>
-    <p:sldId id="300" r:id="rId48"/>
-    <p:sldId id="301" r:id="rId49"/>
-    <p:sldId id="302" r:id="rId50"/>
-    <p:sldId id="303" r:id="rId51"/>
-    <p:sldId id="304" r:id="rId52"/>
-    <p:sldId id="305" r:id="rId53"/>
-    <p:sldId id="306" r:id="rId54"/>
-    <p:sldId id="307" r:id="rId55"/>
-    <p:sldId id="278" r:id="rId56"/>
-    <p:sldId id="344" r:id="rId57"/>
-    <p:sldId id="309" r:id="rId58"/>
-    <p:sldId id="349" r:id="rId93"/>
-    <p:sldId id="310" r:id="rId59"/>
-    <p:sldId id="311" r:id="rId60"/>
-    <p:sldId id="312" r:id="rId61"/>
-    <p:sldId id="313" r:id="rId62"/>
-    <p:sldId id="314" r:id="rId63"/>
-    <p:sldId id="317" r:id="rId64"/>
-    <p:sldId id="318" r:id="rId65"/>
-    <p:sldId id="316" r:id="rId66"/>
-    <p:sldId id="319" r:id="rId67"/>
-    <p:sldId id="320" r:id="rId68"/>
-    <p:sldId id="321" r:id="rId69"/>
-    <p:sldId id="322" r:id="rId70"/>
-    <p:sldId id="323" r:id="rId71"/>
-    <p:sldId id="350" r:id="rId94"/>
-    <p:sldId id="325" r:id="rId72"/>
-    <p:sldId id="326" r:id="rId73"/>
-    <p:sldId id="327" r:id="rId74"/>
-    <p:sldId id="345" r:id="rId75"/>
-    <p:sldId id="328" r:id="rId76"/>
-    <p:sldId id="329" r:id="rId77"/>
-    <p:sldId id="330" r:id="rId78"/>
-    <p:sldId id="331" r:id="rId79"/>
-    <p:sldId id="332" r:id="rId80"/>
-    <p:sldId id="333" r:id="rId81"/>
-    <p:sldId id="334" r:id="rId82"/>
+    <p:sldId id="346" r:id="rId5"/>
+    <p:sldId id="264" r:id="rId6"/>
+    <p:sldId id="268" r:id="rId7"/>
+    <p:sldId id="269" r:id="rId8"/>
+    <p:sldId id="281" r:id="rId9"/>
+    <p:sldId id="282" r:id="rId10"/>
+    <p:sldId id="283" r:id="rId11"/>
+    <p:sldId id="284" r:id="rId12"/>
+    <p:sldId id="285" r:id="rId13"/>
+    <p:sldId id="286" r:id="rId14"/>
+    <p:sldId id="287" r:id="rId15"/>
+    <p:sldId id="296" r:id="rId16"/>
+    <p:sldId id="288" r:id="rId17"/>
+    <p:sldId id="289" r:id="rId18"/>
+    <p:sldId id="290" r:id="rId19"/>
+    <p:sldId id="291" r:id="rId20"/>
+    <p:sldId id="292" r:id="rId21"/>
+    <p:sldId id="294" r:id="rId22"/>
+    <p:sldId id="295" r:id="rId23"/>
+    <p:sldId id="297" r:id="rId24"/>
+    <p:sldId id="293" r:id="rId25"/>
+    <p:sldId id="280" r:id="rId26"/>
+    <p:sldId id="347" r:id="rId27"/>
+    <p:sldId id="259" r:id="rId28"/>
+    <p:sldId id="260" r:id="rId29"/>
+    <p:sldId id="261" r:id="rId30"/>
+    <p:sldId id="262" r:id="rId31"/>
+    <p:sldId id="271" r:id="rId32"/>
+    <p:sldId id="335" r:id="rId33"/>
+    <p:sldId id="336" r:id="rId34"/>
+    <p:sldId id="337" r:id="rId35"/>
+    <p:sldId id="351" r:id="rId95"/>
+    <p:sldId id="352" r:id="rId96"/>
+    <p:sldId id="266" r:id="rId36"/>
+    <p:sldId id="267" r:id="rId37"/>
+    <p:sldId id="272" r:id="rId39"/>
+    <p:sldId id="273" r:id="rId40"/>
+    <p:sldId id="274" r:id="rId41"/>
+    <p:sldId id="275" r:id="rId42"/>
+    <p:sldId id="276" r:id="rId43"/>
+    <p:sldId id="343" r:id="rId44"/>
+    <p:sldId id="298" r:id="rId45"/>
+    <p:sldId id="348" r:id="rId46"/>
+    <p:sldId id="277" r:id="rId47"/>
+    <p:sldId id="315" r:id="rId48"/>
+    <p:sldId id="279" r:id="rId49"/>
+    <p:sldId id="299" r:id="rId50"/>
+    <p:sldId id="300" r:id="rId51"/>
+    <p:sldId id="301" r:id="rId52"/>
+    <p:sldId id="302" r:id="rId53"/>
+    <p:sldId id="303" r:id="rId54"/>
+    <p:sldId id="304" r:id="rId55"/>
+    <p:sldId id="305" r:id="rId56"/>
+    <p:sldId id="306" r:id="rId57"/>
+    <p:sldId id="307" r:id="rId58"/>
+    <p:sldId id="278" r:id="rId59"/>
+    <p:sldId id="344" r:id="rId60"/>
+    <p:sldId id="309" r:id="rId61"/>
+    <p:sldId id="349" r:id="rId62"/>
+    <p:sldId id="310" r:id="rId63"/>
+    <p:sldId id="311" r:id="rId64"/>
+    <p:sldId id="312" r:id="rId65"/>
+    <p:sldId id="313" r:id="rId66"/>
+    <p:sldId id="314" r:id="rId67"/>
+    <p:sldId id="317" r:id="rId68"/>
+    <p:sldId id="318" r:id="rId69"/>
+    <p:sldId id="316" r:id="rId70"/>
+    <p:sldId id="319" r:id="rId71"/>
+    <p:sldId id="320" r:id="rId72"/>
+    <p:sldId id="321" r:id="rId73"/>
+    <p:sldId id="322" r:id="rId74"/>
+    <p:sldId id="323" r:id="rId75"/>
+    <p:sldId id="350" r:id="rId76"/>
+    <p:sldId id="325" r:id="rId77"/>
+    <p:sldId id="326" r:id="rId78"/>
+    <p:sldId id="327" r:id="rId79"/>
+    <p:sldId id="345" r:id="rId80"/>
+    <p:sldId id="328" r:id="rId81"/>
+    <p:sldId id="329" r:id="rId82"/>
+    <p:sldId id="330" r:id="rId83"/>
+    <p:sldId id="331" r:id="rId84"/>
+    <p:sldId id="332" r:id="rId85"/>
+    <p:sldId id="333" r:id="rId86"/>
+    <p:sldId id="334" r:id="rId87"/>
   </p:sldIdLst>
   <p:sldSz cx="12192000" cy="6858000"/>
   <p:notesSz cx="6858000" cy="9144000"/>
@@ -214,7 +215,7 @@
 <file path=ppt/revisionInfo.xml><?xml version="1.0" encoding="utf-8"?>
 <p1510:revInfo xmlns:a="http://schemas.openxmlformats.org/drawingml/2006/main" xmlns:r="http://schemas.openxmlformats.org/officeDocument/2006/relationships" xmlns:p1510="http://schemas.microsoft.com/office/powerpoint/2015/10/main">
   <p1510:revLst>
-    <p1510:client id="{7A8C2843-E5FF-413E-AF65-23AFCC76FC85}" v="22" dt="2026-02-16T06:47:36.069"/>
+    <p1510:client id="{7A8C2843-E5FF-413E-AF65-23AFCC76FC85}" v="23" dt="2026-02-16T14:30:33.999"/>
     <p1510:client id="{8A2C6AB8-6D9A-4FFF-AEDA-02DF086C3C35}" v="10" dt="2026-02-16T06:24:02.729"/>
   </p1510:revLst>
 </p1510:revInfo>
@@ -21089,7 +21090,7 @@
 </file>
 
 <file path=ppt/slides/slide26.xml><?xml version="1.0" encoding="utf-8"?>
-<p:sld xmlns:a="http://schemas.openxmlformats.org/drawingml/2006/main" xmlns:p="http://schemas.openxmlformats.org/presentationml/2006/main" xmlns:r="http://schemas.openxmlformats.org/officeDocument/2006/relationships">
+<p:sld xmlns:a="http://schemas.openxmlformats.org/drawingml/2006/main" xmlns:r="http://schemas.openxmlformats.org/officeDocument/2006/relationships" xmlns:p="http://schemas.openxmlformats.org/presentationml/2006/main">
   <p:cSld>
     <p:bg>
       <p:bgPr>
@@ -21105,7 +21106,14 @@
         <p:cNvGrpSpPr/>
         <p:nvPr/>
       </p:nvGrpSpPr>
-      <p:grpSpPr/>
+      <p:grpSpPr>
+        <a:xfrm>
+          <a:off x="0" y="0"/>
+          <a:ext cx="0" cy="0"/>
+          <a:chOff x="0" y="0"/>
+          <a:chExt cx="0" cy="0"/>
+        </a:xfrm>
+      </p:grpSpPr>
       <p:sp>
         <p:nvSpPr>
           <p:cNvPr id="2" name="Rectangle 1"/>
@@ -21146,6 +21154,7 @@
           <a:lstStyle/>
           <a:p>
             <a:pPr algn="ctr"/>
+            <a:endParaRPr/>
           </a:p>
         </p:txBody>
       </p:sp>
@@ -29834,7 +29843,7 @@
 </file>
 
 <file path=ppt/slides/slide4.xml><?xml version="1.0" encoding="utf-8"?>
-<p:sld xmlns:a="http://schemas.openxmlformats.org/drawingml/2006/main" xmlns:p="http://schemas.openxmlformats.org/presentationml/2006/main" xmlns:r="http://schemas.openxmlformats.org/officeDocument/2006/relationships">
+<p:sld xmlns:a="http://schemas.openxmlformats.org/drawingml/2006/main" xmlns:r="http://schemas.openxmlformats.org/officeDocument/2006/relationships" xmlns:p="http://schemas.openxmlformats.org/presentationml/2006/main">
   <p:cSld>
     <p:bg>
       <p:bgPr>
@@ -29850,7 +29859,14 @@
         <p:cNvGrpSpPr/>
         <p:nvPr/>
       </p:nvGrpSpPr>
-      <p:grpSpPr/>
+      <p:grpSpPr>
+        <a:xfrm>
+          <a:off x="0" y="0"/>
+          <a:ext cx="0" cy="0"/>
+          <a:chOff x="0" y="0"/>
+          <a:chExt cx="0" cy="0"/>
+        </a:xfrm>
+      </p:grpSpPr>
       <p:sp>
         <p:nvSpPr>
           <p:cNvPr id="2" name="Rectangle 1"/>
@@ -29891,6 +29907,7 @@
           <a:lstStyle/>
           <a:p>
             <a:pPr algn="ctr"/>
+            <a:endParaRPr/>
           </a:p>
         </p:txBody>
       </p:sp>
@@ -32345,7 +32362,7 @@
 </file>
 
 <file path=ppt/slides/slide45.xml><?xml version="1.0" encoding="utf-8"?>
-<p:sld xmlns:a="http://schemas.openxmlformats.org/drawingml/2006/main" xmlns:p="http://schemas.openxmlformats.org/presentationml/2006/main" xmlns:r="http://schemas.openxmlformats.org/officeDocument/2006/relationships">
+<p:sld xmlns:a="http://schemas.openxmlformats.org/drawingml/2006/main" xmlns:r="http://schemas.openxmlformats.org/officeDocument/2006/relationships" xmlns:p="http://schemas.openxmlformats.org/presentationml/2006/main">
   <p:cSld>
     <p:bg>
       <p:bgPr>
@@ -32361,7 +32378,14 @@
         <p:cNvGrpSpPr/>
         <p:nvPr/>
       </p:nvGrpSpPr>
-      <p:grpSpPr/>
+      <p:grpSpPr>
+        <a:xfrm>
+          <a:off x="0" y="0"/>
+          <a:ext cx="0" cy="0"/>
+          <a:chOff x="0" y="0"/>
+          <a:chExt cx="0" cy="0"/>
+        </a:xfrm>
+      </p:grpSpPr>
       <p:sp>
         <p:nvSpPr>
           <p:cNvPr id="2" name="Rectangle 1"/>
@@ -32402,6 +32426,7 @@
           <a:lstStyle/>
           <a:p>
             <a:pPr algn="ctr"/>
+            <a:endParaRPr/>
           </a:p>
         </p:txBody>
       </p:sp>
@@ -38937,7 +38962,7 @@
 </file>
 
 <file path=ppt/slides/slide61.xml><?xml version="1.0" encoding="utf-8"?>
-<p:sld xmlns:a="http://schemas.openxmlformats.org/drawingml/2006/main" xmlns:p="http://schemas.openxmlformats.org/presentationml/2006/main" xmlns:r="http://schemas.openxmlformats.org/officeDocument/2006/relationships">
+<p:sld xmlns:a="http://schemas.openxmlformats.org/drawingml/2006/main" xmlns:r="http://schemas.openxmlformats.org/officeDocument/2006/relationships" xmlns:p="http://schemas.openxmlformats.org/presentationml/2006/main">
   <p:cSld>
     <p:bg>
       <p:bgPr>
@@ -38953,7 +38978,14 @@
         <p:cNvGrpSpPr/>
         <p:nvPr/>
       </p:nvGrpSpPr>
-      <p:grpSpPr/>
+      <p:grpSpPr>
+        <a:xfrm>
+          <a:off x="0" y="0"/>
+          <a:ext cx="0" cy="0"/>
+          <a:chOff x="0" y="0"/>
+          <a:chExt cx="0" cy="0"/>
+        </a:xfrm>
+      </p:grpSpPr>
       <p:sp>
         <p:nvSpPr>
           <p:cNvPr id="2" name="Rectangle 1"/>
@@ -38994,6 +39026,7 @@
           <a:lstStyle/>
           <a:p>
             <a:pPr algn="ctr"/>
+            <a:endParaRPr/>
           </a:p>
         </p:txBody>
       </p:sp>
@@ -43215,23 +43248,95 @@
       </p:grpSpPr>
       <p:sp>
         <p:nvSpPr>
-          <p:cNvPr id="2" name="Rectangle 1"/>
+          <p:cNvPr id="2" name="TextBox 1"/>
+          <p:cNvSpPr txBox="1"/>
+          <p:nvPr/>
+        </p:nvSpPr>
+        <p:spPr>
+          <a:xfrm>
+            <a:off x="457200" y="274320"/>
+            <a:ext cx="11247120" cy="822960"/>
+          </a:xfrm>
+          <a:prstGeom prst="rect">
+            <a:avLst/>
+          </a:prstGeom>
+          <a:noFill/>
+        </p:spPr>
+        <p:txBody>
+          <a:bodyPr wrap="none">
+            <a:spAutoFit/>
+          </a:bodyPr>
+          <a:lstStyle/>
+          <a:p>
+            <a:pPr>
+              <a:defRPr sz="4000" b="1">
+                <a:solidFill>
+                  <a:srgbClr val="FFFFFF"/>
+                </a:solidFill>
+              </a:defRPr>
+            </a:pPr>
+            <a:r>
+              <a:t>Claude in PowerPoint</a:t>
+            </a:r>
+          </a:p>
+        </p:txBody>
+      </p:sp>
+      <p:sp>
+        <p:nvSpPr>
+          <p:cNvPr id="3" name="TextBox 2"/>
+          <p:cNvSpPr txBox="1"/>
+          <p:nvPr/>
+        </p:nvSpPr>
+        <p:spPr>
+          <a:xfrm>
+            <a:off x="457200" y="1005840"/>
+            <a:ext cx="11247120" cy="457200"/>
+          </a:xfrm>
+          <a:prstGeom prst="rect">
+            <a:avLst/>
+          </a:prstGeom>
+          <a:noFill/>
+        </p:spPr>
+        <p:txBody>
+          <a:bodyPr wrap="none">
+            <a:spAutoFit/>
+          </a:bodyPr>
+          <a:lstStyle/>
+          <a:p>
+            <a:pPr>
+              <a:defRPr sz="1800" i="1">
+                <a:solidFill>
+                  <a:srgbClr val="14B8A6"/>
+                </a:solidFill>
+              </a:defRPr>
+            </a:pPr>
+            <a:r>
+              <a:t>Research Preview  •  Available for Max, Team, and Enterprise</a:t>
+            </a:r>
+          </a:p>
+        </p:txBody>
+      </p:sp>
+      <p:sp>
+        <p:nvSpPr>
+          <p:cNvPr id="4" name="Rounded Rectangle 3"/>
           <p:cNvSpPr/>
           <p:nvPr/>
         </p:nvSpPr>
         <p:spPr>
           <a:xfrm>
-            <a:off x="0" y="1828800"/>
-            <a:ext cx="137160" cy="3200400"/>
-          </a:xfrm>
-          <a:prstGeom prst="rect">
+            <a:off x="457200" y="1737360"/>
+            <a:ext cx="3474720" cy="3200400"/>
+          </a:xfrm>
+          <a:prstGeom prst="roundRect">
             <a:avLst/>
           </a:prstGeom>
           <a:solidFill>
-            <a:srgbClr val="00D4AA"/>
+            <a:srgbClr val="141A2A"/>
           </a:solidFill>
-          <a:ln>
-            <a:noFill/>
+          <a:ln w="19050">
+            <a:solidFill>
+              <a:srgbClr val="14B8A6"/>
+            </a:solidFill>
           </a:ln>
         </p:spPr>
         <p:style>
@@ -43259,14 +43364,80 @@
       </p:sp>
       <p:sp>
         <p:nvSpPr>
-          <p:cNvPr id="3" name="TextBox 2"/>
-          <p:cNvSpPr txBox="1"/>
-          <p:nvPr/>
-        </p:nvSpPr>
-        <p:spPr>
-          <a:xfrm>
-            <a:off x="457200" y="2286000"/>
-            <a:ext cx="11277295" cy="1371600"/>
+          <p:cNvPr id="5" name="TextBox 4"/>
+          <p:cNvSpPr txBox="1"/>
+          <p:nvPr/>
+        </p:nvSpPr>
+        <p:spPr>
+          <a:xfrm>
+            <a:off x="640080" y="1920240"/>
+            <a:ext cx="3108960" cy="457200"/>
+          </a:xfrm>
+          <a:prstGeom prst="rect">
+            <a:avLst/>
+          </a:prstGeom>
+          <a:noFill/>
+        </p:spPr>
+        <p:txBody>
+          <a:bodyPr wrap="none">
+            <a:spAutoFit/>
+          </a:bodyPr>
+          <a:lstStyle/>
+          <a:p>
+            <a:pPr algn="ctr">
+              <a:defRPr sz="3000"/>
+            </a:pPr>
+            <a:r>
+              <a:t>🎨</a:t>
+            </a:r>
+          </a:p>
+        </p:txBody>
+      </p:sp>
+      <p:sp>
+        <p:nvSpPr>
+          <p:cNvPr id="6" name="TextBox 5"/>
+          <p:cNvSpPr txBox="1"/>
+          <p:nvPr/>
+        </p:nvSpPr>
+        <p:spPr>
+          <a:xfrm>
+            <a:off x="640080" y="2377440"/>
+            <a:ext cx="3108960" cy="457200"/>
+          </a:xfrm>
+          <a:prstGeom prst="rect">
+            <a:avLst/>
+          </a:prstGeom>
+          <a:noFill/>
+        </p:spPr>
+        <p:txBody>
+          <a:bodyPr wrap="none">
+            <a:spAutoFit/>
+          </a:bodyPr>
+          <a:lstStyle/>
+          <a:p>
+            <a:pPr algn="ctr">
+              <a:defRPr sz="2000" b="1">
+                <a:solidFill>
+                  <a:srgbClr val="FFFFFF"/>
+                </a:solidFill>
+              </a:defRPr>
+            </a:pPr>
+            <a:r>
+              <a:t>Build &amp; Design</a:t>
+            </a:r>
+          </a:p>
+        </p:txBody>
+      </p:sp>
+      <p:sp>
+        <p:nvSpPr>
+          <p:cNvPr id="7" name="TextBox 6"/>
+          <p:cNvSpPr txBox="1"/>
+          <p:nvPr/>
+        </p:nvSpPr>
+        <p:spPr>
+          <a:xfrm>
+            <a:off x="640080" y="2926080"/>
+            <a:ext cx="3108960" cy="1828800"/>
           </a:xfrm>
           <a:prstGeom prst="rect">
             <a:avLst/>
@@ -43279,29 +43450,157 @@
           </a:bodyPr>
           <a:lstStyle/>
           <a:p>
-            <a:pPr>
-              <a:defRPr sz="5600" b="1">
+            <a:pPr algn="ctr">
+              <a:defRPr sz="1400">
+                <a:solidFill>
+                  <a:srgbClr val="D1D5DB"/>
+                </a:solidFill>
+              </a:defRPr>
+            </a:pPr>
+            <a:r>
+              <a:t>Create new slides from</a:t>
+            </a:r>
+            <a:br/>
+            <a:r>
+              <a:t>a prompt or outline</a:t>
+            </a:r>
+            <a:br/>
+            <a:r>
+              <a:t>Apply consistent branding</a:t>
+            </a:r>
+            <a:br/>
+            <a:r>
+              <a:t>Redesign existing decks</a:t>
+            </a:r>
+            <a:br/>
+            <a:r>
+              <a:t>Powered by Opus 4.6</a:t>
+            </a:r>
+          </a:p>
+        </p:txBody>
+      </p:sp>
+      <p:sp>
+        <p:nvSpPr>
+          <p:cNvPr id="8" name="Rounded Rectangle 7"/>
+          <p:cNvSpPr/>
+          <p:nvPr/>
+        </p:nvSpPr>
+        <p:spPr>
+          <a:xfrm>
+            <a:off x="4206240" y="1737360"/>
+            <a:ext cx="3474720" cy="3200400"/>
+          </a:xfrm>
+          <a:prstGeom prst="roundRect">
+            <a:avLst/>
+          </a:prstGeom>
+          <a:solidFill>
+            <a:srgbClr val="141A2A"/>
+          </a:solidFill>
+          <a:ln w="19050">
+            <a:solidFill>
+              <a:srgbClr val="14B8A6"/>
+            </a:solidFill>
+          </a:ln>
+        </p:spPr>
+        <p:style>
+          <a:lnRef idx="1">
+            <a:schemeClr val="accent1"/>
+          </a:lnRef>
+          <a:fillRef idx="3">
+            <a:schemeClr val="accent1"/>
+          </a:fillRef>
+          <a:effectRef idx="2">
+            <a:schemeClr val="accent1"/>
+          </a:effectRef>
+          <a:fontRef idx="minor">
+            <a:schemeClr val="lt1"/>
+          </a:fontRef>
+        </p:style>
+        <p:txBody>
+          <a:bodyPr rtlCol="0" anchor="ctr"/>
+          <a:lstStyle/>
+          <a:p>
+            <a:pPr algn="ctr"/>
+            <a:endParaRPr/>
+          </a:p>
+        </p:txBody>
+      </p:sp>
+      <p:sp>
+        <p:nvSpPr>
+          <p:cNvPr id="9" name="TextBox 8"/>
+          <p:cNvSpPr txBox="1"/>
+          <p:nvPr/>
+        </p:nvSpPr>
+        <p:spPr>
+          <a:xfrm>
+            <a:off x="4389120" y="1920240"/>
+            <a:ext cx="3108960" cy="457200"/>
+          </a:xfrm>
+          <a:prstGeom prst="rect">
+            <a:avLst/>
+          </a:prstGeom>
+          <a:noFill/>
+        </p:spPr>
+        <p:txBody>
+          <a:bodyPr wrap="none">
+            <a:spAutoFit/>
+          </a:bodyPr>
+          <a:lstStyle/>
+          <a:p>
+            <a:pPr algn="ctr">
+              <a:defRPr sz="3000"/>
+            </a:pPr>
+            <a:r>
+              <a:t>📝</a:t>
+            </a:r>
+          </a:p>
+        </p:txBody>
+      </p:sp>
+      <p:sp>
+        <p:nvSpPr>
+          <p:cNvPr id="10" name="TextBox 9"/>
+          <p:cNvSpPr txBox="1"/>
+          <p:nvPr/>
+        </p:nvSpPr>
+        <p:spPr>
+          <a:xfrm>
+            <a:off x="4389120" y="2377440"/>
+            <a:ext cx="3108960" cy="457200"/>
+          </a:xfrm>
+          <a:prstGeom prst="rect">
+            <a:avLst/>
+          </a:prstGeom>
+          <a:noFill/>
+        </p:spPr>
+        <p:txBody>
+          <a:bodyPr wrap="none">
+            <a:spAutoFit/>
+          </a:bodyPr>
+          <a:lstStyle/>
+          <a:p>
+            <a:pPr algn="ctr">
+              <a:defRPr sz="2000" b="1">
                 <a:solidFill>
                   <a:srgbClr val="FFFFFF"/>
                 </a:solidFill>
               </a:defRPr>
             </a:pPr>
             <a:r>
-              <a:t>Role-Specific Workflows</a:t>
-            </a:r>
-          </a:p>
-        </p:txBody>
-      </p:sp>
-      <p:sp>
-        <p:nvSpPr>
-          <p:cNvPr id="4" name="TextBox 3"/>
-          <p:cNvSpPr txBox="1"/>
-          <p:nvPr/>
-        </p:nvSpPr>
-        <p:spPr>
-          <a:xfrm>
-            <a:off x="457200" y="3840480"/>
-            <a:ext cx="11277295" cy="914400"/>
+              <a:t>Edit &amp; Refine</a:t>
+            </a:r>
+          </a:p>
+        </p:txBody>
+      </p:sp>
+      <p:sp>
+        <p:nvSpPr>
+          <p:cNvPr id="11" name="TextBox 10"/>
+          <p:cNvSpPr txBox="1"/>
+          <p:nvPr/>
+        </p:nvSpPr>
+        <p:spPr>
+          <a:xfrm>
+            <a:off x="4389120" y="2926080"/>
+            <a:ext cx="3108960" cy="1828800"/>
           </a:xfrm>
           <a:prstGeom prst="rect">
             <a:avLst/>
@@ -43314,15 +43613,275 @@
           </a:bodyPr>
           <a:lstStyle/>
           <a:p>
-            <a:pPr>
-              <a:defRPr sz="2400">
-                <a:solidFill>
-                  <a:srgbClr val="8B95A5"/>
-                </a:solidFill>
-              </a:defRPr>
-            </a:pPr>
-            <a:r>
-              <a:t>Claude in action for different jobs</a:t>
+            <a:pPr algn="ctr">
+              <a:defRPr sz="1400">
+                <a:solidFill>
+                  <a:srgbClr val="D1D5DB"/>
+                </a:solidFill>
+              </a:defRPr>
+            </a:pPr>
+            <a:r>
+              <a:t>Rewrite slide content</a:t>
+            </a:r>
+            <a:br/>
+            <a:r>
+              <a:t>Fix formatting issues</a:t>
+            </a:r>
+            <a:br/>
+            <a:r>
+              <a:t>Improve data visualizations</a:t>
+            </a:r>
+            <a:br/>
+            <a:r>
+              <a:t>Condense or expand sections</a:t>
+            </a:r>
+            <a:br/>
+            <a:r>
+              <a:t>Maintain brand guidelines</a:t>
+            </a:r>
+          </a:p>
+        </p:txBody>
+      </p:sp>
+      <p:sp>
+        <p:nvSpPr>
+          <p:cNvPr id="12" name="Rounded Rectangle 11"/>
+          <p:cNvSpPr/>
+          <p:nvPr/>
+        </p:nvSpPr>
+        <p:spPr>
+          <a:xfrm>
+            <a:off x="7955279" y="1737360"/>
+            <a:ext cx="3474720" cy="3200400"/>
+          </a:xfrm>
+          <a:prstGeom prst="roundRect">
+            <a:avLst/>
+          </a:prstGeom>
+          <a:solidFill>
+            <a:srgbClr val="141A2A"/>
+          </a:solidFill>
+          <a:ln w="19050">
+            <a:solidFill>
+              <a:srgbClr val="14B8A6"/>
+            </a:solidFill>
+          </a:ln>
+        </p:spPr>
+        <p:style>
+          <a:lnRef idx="1">
+            <a:schemeClr val="accent1"/>
+          </a:lnRef>
+          <a:fillRef idx="3">
+            <a:schemeClr val="accent1"/>
+          </a:fillRef>
+          <a:effectRef idx="2">
+            <a:schemeClr val="accent1"/>
+          </a:effectRef>
+          <a:fontRef idx="minor">
+            <a:schemeClr val="lt1"/>
+          </a:fontRef>
+        </p:style>
+        <p:txBody>
+          <a:bodyPr rtlCol="0" anchor="ctr"/>
+          <a:lstStyle/>
+          <a:p>
+            <a:pPr algn="ctr"/>
+            <a:endParaRPr/>
+          </a:p>
+        </p:txBody>
+      </p:sp>
+      <p:sp>
+        <p:nvSpPr>
+          <p:cNvPr id="13" name="TextBox 12"/>
+          <p:cNvSpPr txBox="1"/>
+          <p:nvPr/>
+        </p:nvSpPr>
+        <p:spPr>
+          <a:xfrm>
+            <a:off x="8138159" y="1920240"/>
+            <a:ext cx="3108960" cy="457200"/>
+          </a:xfrm>
+          <a:prstGeom prst="rect">
+            <a:avLst/>
+          </a:prstGeom>
+          <a:noFill/>
+        </p:spPr>
+        <p:txBody>
+          <a:bodyPr wrap="none">
+            <a:spAutoFit/>
+          </a:bodyPr>
+          <a:lstStyle/>
+          <a:p>
+            <a:pPr algn="ctr">
+              <a:defRPr sz="3000"/>
+            </a:pPr>
+            <a:r>
+              <a:t>💡</a:t>
+            </a:r>
+          </a:p>
+        </p:txBody>
+      </p:sp>
+      <p:sp>
+        <p:nvSpPr>
+          <p:cNvPr id="14" name="TextBox 13"/>
+          <p:cNvSpPr txBox="1"/>
+          <p:nvPr/>
+        </p:nvSpPr>
+        <p:spPr>
+          <a:xfrm>
+            <a:off x="8138159" y="2377440"/>
+            <a:ext cx="3108960" cy="457200"/>
+          </a:xfrm>
+          <a:prstGeom prst="rect">
+            <a:avLst/>
+          </a:prstGeom>
+          <a:noFill/>
+        </p:spPr>
+        <p:txBody>
+          <a:bodyPr wrap="none">
+            <a:spAutoFit/>
+          </a:bodyPr>
+          <a:lstStyle/>
+          <a:p>
+            <a:pPr algn="ctr">
+              <a:defRPr sz="2000" b="1">
+                <a:solidFill>
+                  <a:srgbClr val="FFFFFF"/>
+                </a:solidFill>
+              </a:defRPr>
+            </a:pPr>
+            <a:r>
+              <a:t>Analyze &amp; Advise</a:t>
+            </a:r>
+          </a:p>
+        </p:txBody>
+      </p:sp>
+      <p:sp>
+        <p:nvSpPr>
+          <p:cNvPr id="15" name="TextBox 14"/>
+          <p:cNvSpPr txBox="1"/>
+          <p:nvPr/>
+        </p:nvSpPr>
+        <p:spPr>
+          <a:xfrm>
+            <a:off x="8138159" y="2926080"/>
+            <a:ext cx="3108960" cy="1828800"/>
+          </a:xfrm>
+          <a:prstGeom prst="rect">
+            <a:avLst/>
+          </a:prstGeom>
+          <a:noFill/>
+        </p:spPr>
+        <p:txBody>
+          <a:bodyPr wrap="square">
+            <a:spAutoFit/>
+          </a:bodyPr>
+          <a:lstStyle/>
+          <a:p>
+            <a:pPr algn="ctr">
+              <a:defRPr sz="1400">
+                <a:solidFill>
+                  <a:srgbClr val="D1D5DB"/>
+                </a:solidFill>
+              </a:defRPr>
+            </a:pPr>
+            <a:r>
+              <a:t>Review your deck for</a:t>
+            </a:r>
+            <a:br/>
+            <a:r>
+              <a:t>clarity and flow</a:t>
+            </a:r>
+            <a:br/>
+            <a:r>
+              <a:t>Suggest better layouts</a:t>
+            </a:r>
+            <a:br/>
+            <a:r>
+              <a:t>Extract key messages</a:t>
+            </a:r>
+            <a:br/>
+            <a:r>
+              <a:t>Prepare speaker notes</a:t>
+            </a:r>
+          </a:p>
+        </p:txBody>
+      </p:sp>
+      <p:sp>
+        <p:nvSpPr>
+          <p:cNvPr id="16" name="Rounded Rectangle 15"/>
+          <p:cNvSpPr/>
+          <p:nvPr/>
+        </p:nvSpPr>
+        <p:spPr>
+          <a:xfrm>
+            <a:off x="457200" y="5212080"/>
+            <a:ext cx="11247120" cy="731520"/>
+          </a:xfrm>
+          <a:prstGeom prst="roundRect">
+            <a:avLst/>
+          </a:prstGeom>
+          <a:solidFill>
+            <a:srgbClr val="141A2A"/>
+          </a:solidFill>
+          <a:ln w="12700">
+            <a:solidFill>
+              <a:srgbClr val="14B8A6"/>
+            </a:solidFill>
+          </a:ln>
+        </p:spPr>
+        <p:style>
+          <a:lnRef idx="1">
+            <a:schemeClr val="accent1"/>
+          </a:lnRef>
+          <a:fillRef idx="3">
+            <a:schemeClr val="accent1"/>
+          </a:fillRef>
+          <a:effectRef idx="2">
+            <a:schemeClr val="accent1"/>
+          </a:effectRef>
+          <a:fontRef idx="minor">
+            <a:schemeClr val="lt1"/>
+          </a:fontRef>
+        </p:style>
+        <p:txBody>
+          <a:bodyPr rtlCol="0" anchor="ctr"/>
+          <a:lstStyle/>
+          <a:p>
+            <a:pPr algn="ctr"/>
+            <a:endParaRPr/>
+          </a:p>
+        </p:txBody>
+      </p:sp>
+      <p:sp>
+        <p:nvSpPr>
+          <p:cNvPr id="17" name="TextBox 16"/>
+          <p:cNvSpPr txBox="1"/>
+          <p:nvPr/>
+        </p:nvSpPr>
+        <p:spPr>
+          <a:xfrm>
+            <a:off x="731520" y="5303520"/>
+            <a:ext cx="10698480" cy="548640"/>
+          </a:xfrm>
+          <a:prstGeom prst="rect">
+            <a:avLst/>
+          </a:prstGeom>
+          <a:noFill/>
+        </p:spPr>
+        <p:txBody>
+          <a:bodyPr wrap="square">
+            <a:spAutoFit/>
+          </a:bodyPr>
+          <a:lstStyle/>
+          <a:p>
+            <a:pPr algn="ctr">
+              <a:defRPr sz="1500">
+                <a:solidFill>
+                  <a:srgbClr val="9CA3AF"/>
+                </a:solidFill>
+              </a:defRPr>
+            </a:pPr>
+            <a:r>
+              <a:t>Claude now integrates directly into Excel, PowerPoint, and Google Docs — your AI assistant lives inside the tools you already use</a:t>
             </a:r>
           </a:p>
         </p:txBody>
@@ -43362,97 +43921,16 @@
       </p:grpSpPr>
       <p:sp>
         <p:nvSpPr>
-          <p:cNvPr id="2" name="TextBox 1"/>
-          <p:cNvSpPr txBox="1"/>
-          <p:nvPr/>
-        </p:nvSpPr>
-        <p:spPr>
-          <a:xfrm>
-            <a:off x="457200" y="365760"/>
-            <a:ext cx="11277295" cy="731520"/>
-          </a:xfrm>
-          <a:prstGeom prst="rect">
-            <a:avLst/>
-          </a:prstGeom>
-          <a:noFill/>
-        </p:spPr>
-        <p:txBody>
-          <a:bodyPr wrap="none">
-            <a:spAutoFit/>
-          </a:bodyPr>
-          <a:lstStyle/>
-          <a:p>
-            <a:pPr algn="ctr">
-              <a:defRPr sz="3600" b="1">
-                <a:solidFill>
-                  <a:srgbClr val="FFFFFF"/>
-                </a:solidFill>
-              </a:defRPr>
-            </a:pPr>
-            <a:r>
-              <a:t>Marketing Workflow</a:t>
-            </a:r>
-          </a:p>
-        </p:txBody>
-      </p:sp>
-      <p:sp>
-        <p:nvSpPr>
-          <p:cNvPr id="3" name="Rounded Rectangle 2"/>
+          <p:cNvPr id="2" name="Rectangle 1"/>
           <p:cNvSpPr/>
           <p:nvPr/>
         </p:nvSpPr>
         <p:spPr>
           <a:xfrm>
-            <a:off x="2941167" y="1371600"/>
-            <a:ext cx="822960" cy="822960"/>
-          </a:xfrm>
-          <a:prstGeom prst="roundRect">
-            <a:avLst/>
-          </a:prstGeom>
-          <a:solidFill>
-            <a:srgbClr val="141A26"/>
-          </a:solidFill>
-          <a:ln w="25400">
-            <a:solidFill>
-              <a:srgbClr val="00D4AA"/>
-            </a:solidFill>
-          </a:ln>
-        </p:spPr>
-        <p:style>
-          <a:lnRef idx="1">
-            <a:schemeClr val="accent1"/>
-          </a:lnRef>
-          <a:fillRef idx="3">
-            <a:schemeClr val="accent1"/>
-          </a:fillRef>
-          <a:effectRef idx="2">
-            <a:schemeClr val="accent1"/>
-          </a:effectRef>
-          <a:fontRef idx="minor">
-            <a:schemeClr val="lt1"/>
-          </a:fontRef>
-        </p:style>
-        <p:txBody>
-          <a:bodyPr rtlCol="0" anchor="ctr"/>
-          <a:lstStyle/>
-          <a:p>
-            <a:pPr algn="ctr"/>
-            <a:endParaRPr/>
-          </a:p>
-        </p:txBody>
-      </p:sp>
-      <p:sp>
-        <p:nvSpPr>
-          <p:cNvPr id="4" name="Oval 3"/>
-          <p:cNvSpPr/>
-          <p:nvPr/>
-        </p:nvSpPr>
-        <p:spPr>
-          <a:xfrm>
-            <a:off x="3604107" y="1211580"/>
-            <a:ext cx="320040" cy="320040"/>
-          </a:xfrm>
-          <a:prstGeom prst="ellipse">
+            <a:off x="0" y="1828800"/>
+            <a:ext cx="137160" cy="3200400"/>
+          </a:xfrm>
+          <a:prstGeom prst="rect">
             <a:avLst/>
           </a:prstGeom>
           <a:solidFill>
@@ -43487,935 +43965,14 @@
       </p:sp>
       <p:sp>
         <p:nvSpPr>
-          <p:cNvPr id="5" name="TextBox 4"/>
-          <p:cNvSpPr txBox="1"/>
-          <p:nvPr/>
-        </p:nvSpPr>
-        <p:spPr>
-          <a:xfrm>
-            <a:off x="3604107" y="1211580"/>
-            <a:ext cx="320040" cy="320040"/>
-          </a:xfrm>
-          <a:prstGeom prst="rect">
-            <a:avLst/>
-          </a:prstGeom>
-          <a:noFill/>
-        </p:spPr>
-        <p:txBody>
-          <a:bodyPr wrap="none" anchor="ctr">
-            <a:spAutoFit/>
-          </a:bodyPr>
-          <a:lstStyle/>
-          <a:p>
-            <a:pPr algn="ctr">
-              <a:defRPr sz="1400" b="1">
-                <a:solidFill>
-                  <a:srgbClr val="0B0F1A"/>
-                </a:solidFill>
-              </a:defRPr>
-            </a:pPr>
-            <a:r>
-              <a:t>1</a:t>
-            </a:r>
-          </a:p>
-        </p:txBody>
-      </p:sp>
-      <p:sp>
-        <p:nvSpPr>
-          <p:cNvPr id="6" name="TextBox 5"/>
-          <p:cNvSpPr txBox="1"/>
-          <p:nvPr/>
-        </p:nvSpPr>
-        <p:spPr>
-          <a:xfrm>
-            <a:off x="2941167" y="1371600"/>
-            <a:ext cx="822960" cy="822960"/>
-          </a:xfrm>
-          <a:prstGeom prst="rect">
-            <a:avLst/>
-          </a:prstGeom>
-          <a:noFill/>
-        </p:spPr>
-        <p:txBody>
-          <a:bodyPr wrap="none" anchor="ctr">
-            <a:spAutoFit/>
-          </a:bodyPr>
-          <a:lstStyle/>
-          <a:p>
-            <a:pPr algn="ctr">
-              <a:defRPr sz="2800" b="1">
-                <a:solidFill>
-                  <a:srgbClr val="00D4AA"/>
-                </a:solidFill>
-              </a:defRPr>
-            </a:pPr>
-            <a:r>
-              <a:t>1</a:t>
-            </a:r>
-          </a:p>
-        </p:txBody>
-      </p:sp>
-      <p:sp>
-        <p:nvSpPr>
-          <p:cNvPr id="7" name="Right Arrow 6"/>
-          <p:cNvSpPr/>
-          <p:nvPr/>
-        </p:nvSpPr>
-        <p:spPr>
-          <a:xfrm>
-            <a:off x="3855567" y="1645920"/>
-            <a:ext cx="365760" cy="274320"/>
-          </a:xfrm>
-          <a:prstGeom prst="rightArrow">
-            <a:avLst/>
-          </a:prstGeom>
-          <a:solidFill>
-            <a:srgbClr val="8B95A5"/>
-          </a:solidFill>
-          <a:ln>
-            <a:noFill/>
-          </a:ln>
-        </p:spPr>
-        <p:style>
-          <a:lnRef idx="1">
-            <a:schemeClr val="accent1"/>
-          </a:lnRef>
-          <a:fillRef idx="3">
-            <a:schemeClr val="accent1"/>
-          </a:fillRef>
-          <a:effectRef idx="2">
-            <a:schemeClr val="accent1"/>
-          </a:effectRef>
-          <a:fontRef idx="minor">
-            <a:schemeClr val="lt1"/>
-          </a:fontRef>
-        </p:style>
-        <p:txBody>
-          <a:bodyPr rtlCol="0" anchor="ctr"/>
-          <a:lstStyle/>
-          <a:p>
-            <a:pPr algn="ctr"/>
-            <a:endParaRPr/>
-          </a:p>
-        </p:txBody>
-      </p:sp>
-      <p:sp>
-        <p:nvSpPr>
-          <p:cNvPr id="8" name="Rounded Rectangle 7"/>
-          <p:cNvSpPr/>
-          <p:nvPr/>
-        </p:nvSpPr>
-        <p:spPr>
-          <a:xfrm>
-            <a:off x="4312767" y="1371600"/>
-            <a:ext cx="822960" cy="822960"/>
-          </a:xfrm>
-          <a:prstGeom prst="roundRect">
-            <a:avLst/>
-          </a:prstGeom>
-          <a:solidFill>
-            <a:srgbClr val="141A26"/>
-          </a:solidFill>
-          <a:ln w="25400">
-            <a:solidFill>
-              <a:srgbClr val="00D4AA"/>
-            </a:solidFill>
-          </a:ln>
-        </p:spPr>
-        <p:style>
-          <a:lnRef idx="1">
-            <a:schemeClr val="accent1"/>
-          </a:lnRef>
-          <a:fillRef idx="3">
-            <a:schemeClr val="accent1"/>
-          </a:fillRef>
-          <a:effectRef idx="2">
-            <a:schemeClr val="accent1"/>
-          </a:effectRef>
-          <a:fontRef idx="minor">
-            <a:schemeClr val="lt1"/>
-          </a:fontRef>
-        </p:style>
-        <p:txBody>
-          <a:bodyPr rtlCol="0" anchor="ctr"/>
-          <a:lstStyle/>
-          <a:p>
-            <a:pPr algn="ctr"/>
-            <a:endParaRPr/>
-          </a:p>
-        </p:txBody>
-      </p:sp>
-      <p:sp>
-        <p:nvSpPr>
-          <p:cNvPr id="9" name="Oval 8"/>
-          <p:cNvSpPr/>
-          <p:nvPr/>
-        </p:nvSpPr>
-        <p:spPr>
-          <a:xfrm>
-            <a:off x="4975707" y="1211580"/>
-            <a:ext cx="320040" cy="320040"/>
-          </a:xfrm>
-          <a:prstGeom prst="ellipse">
-            <a:avLst/>
-          </a:prstGeom>
-          <a:solidFill>
-            <a:srgbClr val="00D4AA"/>
-          </a:solidFill>
-          <a:ln>
-            <a:noFill/>
-          </a:ln>
-        </p:spPr>
-        <p:style>
-          <a:lnRef idx="1">
-            <a:schemeClr val="accent1"/>
-          </a:lnRef>
-          <a:fillRef idx="3">
-            <a:schemeClr val="accent1"/>
-          </a:fillRef>
-          <a:effectRef idx="2">
-            <a:schemeClr val="accent1"/>
-          </a:effectRef>
-          <a:fontRef idx="minor">
-            <a:schemeClr val="lt1"/>
-          </a:fontRef>
-        </p:style>
-        <p:txBody>
-          <a:bodyPr rtlCol="0" anchor="ctr"/>
-          <a:lstStyle/>
-          <a:p>
-            <a:pPr algn="ctr"/>
-            <a:endParaRPr/>
-          </a:p>
-        </p:txBody>
-      </p:sp>
-      <p:sp>
-        <p:nvSpPr>
-          <p:cNvPr id="10" name="TextBox 9"/>
-          <p:cNvSpPr txBox="1"/>
-          <p:nvPr/>
-        </p:nvSpPr>
-        <p:spPr>
-          <a:xfrm>
-            <a:off x="4975707" y="1211580"/>
-            <a:ext cx="320040" cy="320040"/>
-          </a:xfrm>
-          <a:prstGeom prst="rect">
-            <a:avLst/>
-          </a:prstGeom>
-          <a:noFill/>
-        </p:spPr>
-        <p:txBody>
-          <a:bodyPr wrap="none" anchor="ctr">
-            <a:spAutoFit/>
-          </a:bodyPr>
-          <a:lstStyle/>
-          <a:p>
-            <a:pPr algn="ctr">
-              <a:defRPr sz="1400" b="1">
-                <a:solidFill>
-                  <a:srgbClr val="0B0F1A"/>
-                </a:solidFill>
-              </a:defRPr>
-            </a:pPr>
-            <a:r>
-              <a:t>2</a:t>
-            </a:r>
-          </a:p>
-        </p:txBody>
-      </p:sp>
-      <p:sp>
-        <p:nvSpPr>
-          <p:cNvPr id="11" name="TextBox 10"/>
-          <p:cNvSpPr txBox="1"/>
-          <p:nvPr/>
-        </p:nvSpPr>
-        <p:spPr>
-          <a:xfrm>
-            <a:off x="4312767" y="1371600"/>
-            <a:ext cx="822960" cy="822960"/>
-          </a:xfrm>
-          <a:prstGeom prst="rect">
-            <a:avLst/>
-          </a:prstGeom>
-          <a:noFill/>
-        </p:spPr>
-        <p:txBody>
-          <a:bodyPr wrap="none" anchor="ctr">
-            <a:spAutoFit/>
-          </a:bodyPr>
-          <a:lstStyle/>
-          <a:p>
-            <a:pPr algn="ctr">
-              <a:defRPr sz="2800" b="1">
-                <a:solidFill>
-                  <a:srgbClr val="00D4AA"/>
-                </a:solidFill>
-              </a:defRPr>
-            </a:pPr>
-            <a:r>
-              <a:t>2</a:t>
-            </a:r>
-          </a:p>
-        </p:txBody>
-      </p:sp>
-      <p:sp>
-        <p:nvSpPr>
-          <p:cNvPr id="12" name="Right Arrow 11"/>
-          <p:cNvSpPr/>
-          <p:nvPr/>
-        </p:nvSpPr>
-        <p:spPr>
-          <a:xfrm>
-            <a:off x="5227167" y="1645920"/>
-            <a:ext cx="365760" cy="274320"/>
-          </a:xfrm>
-          <a:prstGeom prst="rightArrow">
-            <a:avLst/>
-          </a:prstGeom>
-          <a:solidFill>
-            <a:srgbClr val="8B95A5"/>
-          </a:solidFill>
-          <a:ln>
-            <a:noFill/>
-          </a:ln>
-        </p:spPr>
-        <p:style>
-          <a:lnRef idx="1">
-            <a:schemeClr val="accent1"/>
-          </a:lnRef>
-          <a:fillRef idx="3">
-            <a:schemeClr val="accent1"/>
-          </a:fillRef>
-          <a:effectRef idx="2">
-            <a:schemeClr val="accent1"/>
-          </a:effectRef>
-          <a:fontRef idx="minor">
-            <a:schemeClr val="lt1"/>
-          </a:fontRef>
-        </p:style>
-        <p:txBody>
-          <a:bodyPr rtlCol="0" anchor="ctr"/>
-          <a:lstStyle/>
-          <a:p>
-            <a:pPr algn="ctr"/>
-            <a:endParaRPr/>
-          </a:p>
-        </p:txBody>
-      </p:sp>
-      <p:sp>
-        <p:nvSpPr>
-          <p:cNvPr id="13" name="Rounded Rectangle 12"/>
-          <p:cNvSpPr/>
-          <p:nvPr/>
-        </p:nvSpPr>
-        <p:spPr>
-          <a:xfrm>
-            <a:off x="5684367" y="1371600"/>
-            <a:ext cx="822960" cy="822960"/>
-          </a:xfrm>
-          <a:prstGeom prst="roundRect">
-            <a:avLst/>
-          </a:prstGeom>
-          <a:solidFill>
-            <a:srgbClr val="141A26"/>
-          </a:solidFill>
-          <a:ln w="25400">
-            <a:solidFill>
-              <a:srgbClr val="00D4AA"/>
-            </a:solidFill>
-          </a:ln>
-        </p:spPr>
-        <p:style>
-          <a:lnRef idx="1">
-            <a:schemeClr val="accent1"/>
-          </a:lnRef>
-          <a:fillRef idx="3">
-            <a:schemeClr val="accent1"/>
-          </a:fillRef>
-          <a:effectRef idx="2">
-            <a:schemeClr val="accent1"/>
-          </a:effectRef>
-          <a:fontRef idx="minor">
-            <a:schemeClr val="lt1"/>
-          </a:fontRef>
-        </p:style>
-        <p:txBody>
-          <a:bodyPr rtlCol="0" anchor="ctr"/>
-          <a:lstStyle/>
-          <a:p>
-            <a:pPr algn="ctr"/>
-            <a:endParaRPr/>
-          </a:p>
-        </p:txBody>
-      </p:sp>
-      <p:sp>
-        <p:nvSpPr>
-          <p:cNvPr id="14" name="Oval 13"/>
-          <p:cNvSpPr/>
-          <p:nvPr/>
-        </p:nvSpPr>
-        <p:spPr>
-          <a:xfrm>
-            <a:off x="6347307" y="1211580"/>
-            <a:ext cx="320040" cy="320040"/>
-          </a:xfrm>
-          <a:prstGeom prst="ellipse">
-            <a:avLst/>
-          </a:prstGeom>
-          <a:solidFill>
-            <a:srgbClr val="00D4AA"/>
-          </a:solidFill>
-          <a:ln>
-            <a:noFill/>
-          </a:ln>
-        </p:spPr>
-        <p:style>
-          <a:lnRef idx="1">
-            <a:schemeClr val="accent1"/>
-          </a:lnRef>
-          <a:fillRef idx="3">
-            <a:schemeClr val="accent1"/>
-          </a:fillRef>
-          <a:effectRef idx="2">
-            <a:schemeClr val="accent1"/>
-          </a:effectRef>
-          <a:fontRef idx="minor">
-            <a:schemeClr val="lt1"/>
-          </a:fontRef>
-        </p:style>
-        <p:txBody>
-          <a:bodyPr rtlCol="0" anchor="ctr"/>
-          <a:lstStyle/>
-          <a:p>
-            <a:pPr algn="ctr"/>
-            <a:endParaRPr/>
-          </a:p>
-        </p:txBody>
-      </p:sp>
-      <p:sp>
-        <p:nvSpPr>
-          <p:cNvPr id="15" name="TextBox 14"/>
-          <p:cNvSpPr txBox="1"/>
-          <p:nvPr/>
-        </p:nvSpPr>
-        <p:spPr>
-          <a:xfrm>
-            <a:off x="6347307" y="1211580"/>
-            <a:ext cx="320040" cy="320040"/>
-          </a:xfrm>
-          <a:prstGeom prst="rect">
-            <a:avLst/>
-          </a:prstGeom>
-          <a:noFill/>
-        </p:spPr>
-        <p:txBody>
-          <a:bodyPr wrap="none" anchor="ctr">
-            <a:spAutoFit/>
-          </a:bodyPr>
-          <a:lstStyle/>
-          <a:p>
-            <a:pPr algn="ctr">
-              <a:defRPr sz="1400" b="1">
-                <a:solidFill>
-                  <a:srgbClr val="0B0F1A"/>
-                </a:solidFill>
-              </a:defRPr>
-            </a:pPr>
-            <a:r>
-              <a:t>3</a:t>
-            </a:r>
-          </a:p>
-        </p:txBody>
-      </p:sp>
-      <p:sp>
-        <p:nvSpPr>
-          <p:cNvPr id="16" name="TextBox 15"/>
-          <p:cNvSpPr txBox="1"/>
-          <p:nvPr/>
-        </p:nvSpPr>
-        <p:spPr>
-          <a:xfrm>
-            <a:off x="5684367" y="1371600"/>
-            <a:ext cx="822960" cy="822960"/>
-          </a:xfrm>
-          <a:prstGeom prst="rect">
-            <a:avLst/>
-          </a:prstGeom>
-          <a:noFill/>
-        </p:spPr>
-        <p:txBody>
-          <a:bodyPr wrap="none" anchor="ctr">
-            <a:spAutoFit/>
-          </a:bodyPr>
-          <a:lstStyle/>
-          <a:p>
-            <a:pPr algn="ctr">
-              <a:defRPr sz="2800" b="1">
-                <a:solidFill>
-                  <a:srgbClr val="00D4AA"/>
-                </a:solidFill>
-              </a:defRPr>
-            </a:pPr>
-            <a:r>
-              <a:t>3</a:t>
-            </a:r>
-          </a:p>
-        </p:txBody>
-      </p:sp>
-      <p:sp>
-        <p:nvSpPr>
-          <p:cNvPr id="17" name="Right Arrow 16"/>
-          <p:cNvSpPr/>
-          <p:nvPr/>
-        </p:nvSpPr>
-        <p:spPr>
-          <a:xfrm>
-            <a:off x="6598767" y="1645920"/>
-            <a:ext cx="365760" cy="274320"/>
-          </a:xfrm>
-          <a:prstGeom prst="rightArrow">
-            <a:avLst/>
-          </a:prstGeom>
-          <a:solidFill>
-            <a:srgbClr val="8B95A5"/>
-          </a:solidFill>
-          <a:ln>
-            <a:noFill/>
-          </a:ln>
-        </p:spPr>
-        <p:style>
-          <a:lnRef idx="1">
-            <a:schemeClr val="accent1"/>
-          </a:lnRef>
-          <a:fillRef idx="3">
-            <a:schemeClr val="accent1"/>
-          </a:fillRef>
-          <a:effectRef idx="2">
-            <a:schemeClr val="accent1"/>
-          </a:effectRef>
-          <a:fontRef idx="minor">
-            <a:schemeClr val="lt1"/>
-          </a:fontRef>
-        </p:style>
-        <p:txBody>
-          <a:bodyPr rtlCol="0" anchor="ctr"/>
-          <a:lstStyle/>
-          <a:p>
-            <a:pPr algn="ctr"/>
-            <a:endParaRPr/>
-          </a:p>
-        </p:txBody>
-      </p:sp>
-      <p:sp>
-        <p:nvSpPr>
-          <p:cNvPr id="18" name="Rounded Rectangle 17"/>
-          <p:cNvSpPr/>
-          <p:nvPr/>
-        </p:nvSpPr>
-        <p:spPr>
-          <a:xfrm>
-            <a:off x="7055967" y="1371600"/>
-            <a:ext cx="822960" cy="822960"/>
-          </a:xfrm>
-          <a:prstGeom prst="roundRect">
-            <a:avLst/>
-          </a:prstGeom>
-          <a:solidFill>
-            <a:srgbClr val="141A26"/>
-          </a:solidFill>
-          <a:ln w="25400">
-            <a:solidFill>
-              <a:srgbClr val="00D4AA"/>
-            </a:solidFill>
-          </a:ln>
-        </p:spPr>
-        <p:style>
-          <a:lnRef idx="1">
-            <a:schemeClr val="accent1"/>
-          </a:lnRef>
-          <a:fillRef idx="3">
-            <a:schemeClr val="accent1"/>
-          </a:fillRef>
-          <a:effectRef idx="2">
-            <a:schemeClr val="accent1"/>
-          </a:effectRef>
-          <a:fontRef idx="minor">
-            <a:schemeClr val="lt1"/>
-          </a:fontRef>
-        </p:style>
-        <p:txBody>
-          <a:bodyPr rtlCol="0" anchor="ctr"/>
-          <a:lstStyle/>
-          <a:p>
-            <a:pPr algn="ctr"/>
-            <a:endParaRPr/>
-          </a:p>
-        </p:txBody>
-      </p:sp>
-      <p:sp>
-        <p:nvSpPr>
-          <p:cNvPr id="19" name="Oval 18"/>
-          <p:cNvSpPr/>
-          <p:nvPr/>
-        </p:nvSpPr>
-        <p:spPr>
-          <a:xfrm>
-            <a:off x="7718907" y="1211580"/>
-            <a:ext cx="320040" cy="320040"/>
-          </a:xfrm>
-          <a:prstGeom prst="ellipse">
-            <a:avLst/>
-          </a:prstGeom>
-          <a:solidFill>
-            <a:srgbClr val="00D4AA"/>
-          </a:solidFill>
-          <a:ln>
-            <a:noFill/>
-          </a:ln>
-        </p:spPr>
-        <p:style>
-          <a:lnRef idx="1">
-            <a:schemeClr val="accent1"/>
-          </a:lnRef>
-          <a:fillRef idx="3">
-            <a:schemeClr val="accent1"/>
-          </a:fillRef>
-          <a:effectRef idx="2">
-            <a:schemeClr val="accent1"/>
-          </a:effectRef>
-          <a:fontRef idx="minor">
-            <a:schemeClr val="lt1"/>
-          </a:fontRef>
-        </p:style>
-        <p:txBody>
-          <a:bodyPr rtlCol="0" anchor="ctr"/>
-          <a:lstStyle/>
-          <a:p>
-            <a:pPr algn="ctr"/>
-            <a:endParaRPr/>
-          </a:p>
-        </p:txBody>
-      </p:sp>
-      <p:sp>
-        <p:nvSpPr>
-          <p:cNvPr id="20" name="TextBox 19"/>
-          <p:cNvSpPr txBox="1"/>
-          <p:nvPr/>
-        </p:nvSpPr>
-        <p:spPr>
-          <a:xfrm>
-            <a:off x="7718907" y="1211580"/>
-            <a:ext cx="320040" cy="320040"/>
-          </a:xfrm>
-          <a:prstGeom prst="rect">
-            <a:avLst/>
-          </a:prstGeom>
-          <a:noFill/>
-        </p:spPr>
-        <p:txBody>
-          <a:bodyPr wrap="none" anchor="ctr">
-            <a:spAutoFit/>
-          </a:bodyPr>
-          <a:lstStyle/>
-          <a:p>
-            <a:pPr algn="ctr">
-              <a:defRPr sz="1400" b="1">
-                <a:solidFill>
-                  <a:srgbClr val="0B0F1A"/>
-                </a:solidFill>
-              </a:defRPr>
-            </a:pPr>
-            <a:r>
-              <a:t>4</a:t>
-            </a:r>
-          </a:p>
-        </p:txBody>
-      </p:sp>
-      <p:sp>
-        <p:nvSpPr>
-          <p:cNvPr id="21" name="TextBox 20"/>
-          <p:cNvSpPr txBox="1"/>
-          <p:nvPr/>
-        </p:nvSpPr>
-        <p:spPr>
-          <a:xfrm>
-            <a:off x="7055967" y="1371600"/>
-            <a:ext cx="822960" cy="822960"/>
-          </a:xfrm>
-          <a:prstGeom prst="rect">
-            <a:avLst/>
-          </a:prstGeom>
-          <a:noFill/>
-        </p:spPr>
-        <p:txBody>
-          <a:bodyPr wrap="none" anchor="ctr">
-            <a:spAutoFit/>
-          </a:bodyPr>
-          <a:lstStyle/>
-          <a:p>
-            <a:pPr algn="ctr">
-              <a:defRPr sz="2800" b="1">
-                <a:solidFill>
-                  <a:srgbClr val="00D4AA"/>
-                </a:solidFill>
-              </a:defRPr>
-            </a:pPr>
-            <a:r>
-              <a:t>4</a:t>
-            </a:r>
-          </a:p>
-        </p:txBody>
-      </p:sp>
-      <p:sp>
-        <p:nvSpPr>
-          <p:cNvPr id="22" name="Right Arrow 21"/>
-          <p:cNvSpPr/>
-          <p:nvPr/>
-        </p:nvSpPr>
-        <p:spPr>
-          <a:xfrm>
-            <a:off x="7970367" y="1645920"/>
-            <a:ext cx="365760" cy="274320"/>
-          </a:xfrm>
-          <a:prstGeom prst="rightArrow">
-            <a:avLst/>
-          </a:prstGeom>
-          <a:solidFill>
-            <a:srgbClr val="8B95A5"/>
-          </a:solidFill>
-          <a:ln>
-            <a:noFill/>
-          </a:ln>
-        </p:spPr>
-        <p:style>
-          <a:lnRef idx="1">
-            <a:schemeClr val="accent1"/>
-          </a:lnRef>
-          <a:fillRef idx="3">
-            <a:schemeClr val="accent1"/>
-          </a:fillRef>
-          <a:effectRef idx="2">
-            <a:schemeClr val="accent1"/>
-          </a:effectRef>
-          <a:fontRef idx="minor">
-            <a:schemeClr val="lt1"/>
-          </a:fontRef>
-        </p:style>
-        <p:txBody>
-          <a:bodyPr rtlCol="0" anchor="ctr"/>
-          <a:lstStyle/>
-          <a:p>
-            <a:pPr algn="ctr"/>
-            <a:endParaRPr/>
-          </a:p>
-        </p:txBody>
-      </p:sp>
-      <p:sp>
-        <p:nvSpPr>
-          <p:cNvPr id="23" name="Rounded Rectangle 22"/>
-          <p:cNvSpPr/>
-          <p:nvPr/>
-        </p:nvSpPr>
-        <p:spPr>
-          <a:xfrm>
-            <a:off x="8427567" y="1371600"/>
-            <a:ext cx="822960" cy="822960"/>
-          </a:xfrm>
-          <a:prstGeom prst="roundRect">
-            <a:avLst/>
-          </a:prstGeom>
-          <a:solidFill>
-            <a:srgbClr val="141A26"/>
-          </a:solidFill>
-          <a:ln w="25400">
-            <a:solidFill>
-              <a:srgbClr val="00D4AA"/>
-            </a:solidFill>
-          </a:ln>
-        </p:spPr>
-        <p:style>
-          <a:lnRef idx="1">
-            <a:schemeClr val="accent1"/>
-          </a:lnRef>
-          <a:fillRef idx="3">
-            <a:schemeClr val="accent1"/>
-          </a:fillRef>
-          <a:effectRef idx="2">
-            <a:schemeClr val="accent1"/>
-          </a:effectRef>
-          <a:fontRef idx="minor">
-            <a:schemeClr val="lt1"/>
-          </a:fontRef>
-        </p:style>
-        <p:txBody>
-          <a:bodyPr rtlCol="0" anchor="ctr"/>
-          <a:lstStyle/>
-          <a:p>
-            <a:pPr algn="ctr"/>
-            <a:endParaRPr/>
-          </a:p>
-        </p:txBody>
-      </p:sp>
-      <p:sp>
-        <p:nvSpPr>
-          <p:cNvPr id="24" name="Oval 23"/>
-          <p:cNvSpPr/>
-          <p:nvPr/>
-        </p:nvSpPr>
-        <p:spPr>
-          <a:xfrm>
-            <a:off x="9090507" y="1211580"/>
-            <a:ext cx="320040" cy="320040"/>
-          </a:xfrm>
-          <a:prstGeom prst="ellipse">
-            <a:avLst/>
-          </a:prstGeom>
-          <a:solidFill>
-            <a:srgbClr val="00D4AA"/>
-          </a:solidFill>
-          <a:ln>
-            <a:noFill/>
-          </a:ln>
-        </p:spPr>
-        <p:style>
-          <a:lnRef idx="1">
-            <a:schemeClr val="accent1"/>
-          </a:lnRef>
-          <a:fillRef idx="3">
-            <a:schemeClr val="accent1"/>
-          </a:fillRef>
-          <a:effectRef idx="2">
-            <a:schemeClr val="accent1"/>
-          </a:effectRef>
-          <a:fontRef idx="minor">
-            <a:schemeClr val="lt1"/>
-          </a:fontRef>
-        </p:style>
-        <p:txBody>
-          <a:bodyPr rtlCol="0" anchor="ctr"/>
-          <a:lstStyle/>
-          <a:p>
-            <a:pPr algn="ctr"/>
-            <a:endParaRPr/>
-          </a:p>
-        </p:txBody>
-      </p:sp>
-      <p:sp>
-        <p:nvSpPr>
-          <p:cNvPr id="25" name="TextBox 24"/>
-          <p:cNvSpPr txBox="1"/>
-          <p:nvPr/>
-        </p:nvSpPr>
-        <p:spPr>
-          <a:xfrm>
-            <a:off x="9090507" y="1211580"/>
-            <a:ext cx="320040" cy="320040"/>
-          </a:xfrm>
-          <a:prstGeom prst="rect">
-            <a:avLst/>
-          </a:prstGeom>
-          <a:noFill/>
-        </p:spPr>
-        <p:txBody>
-          <a:bodyPr wrap="none" anchor="ctr">
-            <a:spAutoFit/>
-          </a:bodyPr>
-          <a:lstStyle/>
-          <a:p>
-            <a:pPr algn="ctr">
-              <a:defRPr sz="1400" b="1">
-                <a:solidFill>
-                  <a:srgbClr val="0B0F1A"/>
-                </a:solidFill>
-              </a:defRPr>
-            </a:pPr>
-            <a:r>
-              <a:t>5</a:t>
-            </a:r>
-          </a:p>
-        </p:txBody>
-      </p:sp>
-      <p:sp>
-        <p:nvSpPr>
-          <p:cNvPr id="26" name="TextBox 25"/>
-          <p:cNvSpPr txBox="1"/>
-          <p:nvPr/>
-        </p:nvSpPr>
-        <p:spPr>
-          <a:xfrm>
-            <a:off x="8427567" y="1371600"/>
-            <a:ext cx="822960" cy="822960"/>
-          </a:xfrm>
-          <a:prstGeom prst="rect">
-            <a:avLst/>
-          </a:prstGeom>
-          <a:noFill/>
-        </p:spPr>
-        <p:txBody>
-          <a:bodyPr wrap="none" anchor="ctr">
-            <a:spAutoFit/>
-          </a:bodyPr>
-          <a:lstStyle/>
-          <a:p>
-            <a:pPr algn="ctr">
-              <a:defRPr sz="2800" b="1">
-                <a:solidFill>
-                  <a:srgbClr val="00D4AA"/>
-                </a:solidFill>
-              </a:defRPr>
-            </a:pPr>
-            <a:r>
-              <a:t>5</a:t>
-            </a:r>
-          </a:p>
-        </p:txBody>
-      </p:sp>
-      <p:sp>
-        <p:nvSpPr>
-          <p:cNvPr id="27" name="TextBox 26"/>
-          <p:cNvSpPr txBox="1"/>
-          <p:nvPr/>
-        </p:nvSpPr>
-        <p:spPr>
-          <a:xfrm>
-            <a:off x="1371600" y="2743200"/>
-            <a:ext cx="457200" cy="457200"/>
-          </a:xfrm>
-          <a:prstGeom prst="rect">
-            <a:avLst/>
-          </a:prstGeom>
-          <a:noFill/>
-        </p:spPr>
-        <p:txBody>
-          <a:bodyPr wrap="none">
-            <a:spAutoFit/>
-          </a:bodyPr>
-          <a:lstStyle/>
-          <a:p>
-            <a:pPr>
-              <a:defRPr sz="2000" b="1">
-                <a:solidFill>
-                  <a:srgbClr val="00D4AA"/>
-                </a:solidFill>
-              </a:defRPr>
-            </a:pPr>
-            <a:r>
-              <a:t>1</a:t>
-            </a:r>
-          </a:p>
-        </p:txBody>
-      </p:sp>
-      <p:sp>
-        <p:nvSpPr>
-          <p:cNvPr id="28" name="TextBox 27"/>
-          <p:cNvSpPr txBox="1"/>
-          <p:nvPr/>
-        </p:nvSpPr>
-        <p:spPr>
-          <a:xfrm>
-            <a:off x="1828800" y="2743200"/>
-            <a:ext cx="8991295" cy="548640"/>
+          <p:cNvPr id="3" name="TextBox 2"/>
+          <p:cNvSpPr txBox="1"/>
+          <p:nvPr/>
+        </p:nvSpPr>
+        <p:spPr>
+          <a:xfrm>
+            <a:off x="457200" y="2286000"/>
+            <a:ext cx="11277295" cy="1371600"/>
           </a:xfrm>
           <a:prstGeom prst="rect">
             <a:avLst/>
@@ -44429,63 +43986,28 @@
           <a:lstStyle/>
           <a:p>
             <a:pPr>
-              <a:defRPr sz="1800">
+              <a:defRPr sz="5600" b="1">
                 <a:solidFill>
                   <a:srgbClr val="FFFFFF"/>
                 </a:solidFill>
               </a:defRPr>
             </a:pPr>
             <a:r>
-              <a:t>Upload competitor research PDFs</a:t>
-            </a:r>
-          </a:p>
-        </p:txBody>
-      </p:sp>
-      <p:sp>
-        <p:nvSpPr>
-          <p:cNvPr id="29" name="TextBox 28"/>
-          <p:cNvSpPr txBox="1"/>
-          <p:nvPr/>
-        </p:nvSpPr>
-        <p:spPr>
-          <a:xfrm>
-            <a:off x="1371600" y="3383280"/>
-            <a:ext cx="457200" cy="457200"/>
-          </a:xfrm>
-          <a:prstGeom prst="rect">
-            <a:avLst/>
-          </a:prstGeom>
-          <a:noFill/>
-        </p:spPr>
-        <p:txBody>
-          <a:bodyPr wrap="none">
-            <a:spAutoFit/>
-          </a:bodyPr>
-          <a:lstStyle/>
-          <a:p>
-            <a:pPr>
-              <a:defRPr sz="2000" b="1">
-                <a:solidFill>
-                  <a:srgbClr val="00D4AA"/>
-                </a:solidFill>
-              </a:defRPr>
-            </a:pPr>
-            <a:r>
-              <a:t>2</a:t>
-            </a:r>
-          </a:p>
-        </p:txBody>
-      </p:sp>
-      <p:sp>
-        <p:nvSpPr>
-          <p:cNvPr id="30" name="TextBox 29"/>
-          <p:cNvSpPr txBox="1"/>
-          <p:nvPr/>
-        </p:nvSpPr>
-        <p:spPr>
-          <a:xfrm>
-            <a:off x="1828800" y="3383280"/>
-            <a:ext cx="8991295" cy="548640"/>
+              <a:t>Role-Specific Workflows</a:t>
+            </a:r>
+          </a:p>
+        </p:txBody>
+      </p:sp>
+      <p:sp>
+        <p:nvSpPr>
+          <p:cNvPr id="4" name="TextBox 3"/>
+          <p:cNvSpPr txBox="1"/>
+          <p:nvPr/>
+        </p:nvSpPr>
+        <p:spPr>
+          <a:xfrm>
+            <a:off x="457200" y="3840480"/>
+            <a:ext cx="11277295" cy="914400"/>
           </a:xfrm>
           <a:prstGeom prst="rect">
             <a:avLst/>
@@ -44499,224 +44021,14 @@
           <a:lstStyle/>
           <a:p>
             <a:pPr>
-              <a:defRPr sz="1800">
-                <a:solidFill>
-                  <a:srgbClr val="FFFFFF"/>
-                </a:solidFill>
-              </a:defRPr>
-            </a:pPr>
-            <a:r>
-              <a:t>Ask: 'Summarize their positioning'</a:t>
-            </a:r>
-          </a:p>
-        </p:txBody>
-      </p:sp>
-      <p:sp>
-        <p:nvSpPr>
-          <p:cNvPr id="31" name="TextBox 30"/>
-          <p:cNvSpPr txBox="1"/>
-          <p:nvPr/>
-        </p:nvSpPr>
-        <p:spPr>
-          <a:xfrm>
-            <a:off x="1371600" y="4023360"/>
-            <a:ext cx="457200" cy="457200"/>
-          </a:xfrm>
-          <a:prstGeom prst="rect">
-            <a:avLst/>
-          </a:prstGeom>
-          <a:noFill/>
-        </p:spPr>
-        <p:txBody>
-          <a:bodyPr wrap="none">
-            <a:spAutoFit/>
-          </a:bodyPr>
-          <a:lstStyle/>
-          <a:p>
-            <a:pPr>
-              <a:defRPr sz="2000" b="1">
-                <a:solidFill>
-                  <a:srgbClr val="00D4AA"/>
-                </a:solidFill>
-              </a:defRPr>
-            </a:pPr>
-            <a:r>
-              <a:t>3</a:t>
-            </a:r>
-          </a:p>
-        </p:txBody>
-      </p:sp>
-      <p:sp>
-        <p:nvSpPr>
-          <p:cNvPr id="32" name="TextBox 31"/>
-          <p:cNvSpPr txBox="1"/>
-          <p:nvPr/>
-        </p:nvSpPr>
-        <p:spPr>
-          <a:xfrm>
-            <a:off x="1828800" y="4023360"/>
-            <a:ext cx="8991295" cy="548640"/>
-          </a:xfrm>
-          <a:prstGeom prst="rect">
-            <a:avLst/>
-          </a:prstGeom>
-          <a:noFill/>
-        </p:spPr>
-        <p:txBody>
-          <a:bodyPr wrap="square">
-            <a:spAutoFit/>
-          </a:bodyPr>
-          <a:lstStyle/>
-          <a:p>
-            <a:pPr>
-              <a:defRPr sz="1800">
-                <a:solidFill>
-                  <a:srgbClr val="FFFFFF"/>
-                </a:solidFill>
-              </a:defRPr>
-            </a:pPr>
-            <a:r>
-              <a:t>Request: 'Draft our differentiation message'</a:t>
-            </a:r>
-          </a:p>
-        </p:txBody>
-      </p:sp>
-      <p:sp>
-        <p:nvSpPr>
-          <p:cNvPr id="33" name="TextBox 32"/>
-          <p:cNvSpPr txBox="1"/>
-          <p:nvPr/>
-        </p:nvSpPr>
-        <p:spPr>
-          <a:xfrm>
-            <a:off x="1371600" y="4663440"/>
-            <a:ext cx="457200" cy="457200"/>
-          </a:xfrm>
-          <a:prstGeom prst="rect">
-            <a:avLst/>
-          </a:prstGeom>
-          <a:noFill/>
-        </p:spPr>
-        <p:txBody>
-          <a:bodyPr wrap="none">
-            <a:spAutoFit/>
-          </a:bodyPr>
-          <a:lstStyle/>
-          <a:p>
-            <a:pPr>
-              <a:defRPr sz="2000" b="1">
-                <a:solidFill>
-                  <a:srgbClr val="00D4AA"/>
-                </a:solidFill>
-              </a:defRPr>
-            </a:pPr>
-            <a:r>
-              <a:t>4</a:t>
-            </a:r>
-          </a:p>
-        </p:txBody>
-      </p:sp>
-      <p:sp>
-        <p:nvSpPr>
-          <p:cNvPr id="34" name="TextBox 33"/>
-          <p:cNvSpPr txBox="1"/>
-          <p:nvPr/>
-        </p:nvSpPr>
-        <p:spPr>
-          <a:xfrm>
-            <a:off x="1828800" y="4663440"/>
-            <a:ext cx="8991295" cy="548640"/>
-          </a:xfrm>
-          <a:prstGeom prst="rect">
-            <a:avLst/>
-          </a:prstGeom>
-          <a:noFill/>
-        </p:spPr>
-        <p:txBody>
-          <a:bodyPr wrap="square">
-            <a:spAutoFit/>
-          </a:bodyPr>
-          <a:lstStyle/>
-          <a:p>
-            <a:pPr>
-              <a:defRPr sz="1800">
-                <a:solidFill>
-                  <a:srgbClr val="FFFFFF"/>
-                </a:solidFill>
-              </a:defRPr>
-            </a:pPr>
-            <a:r>
-              <a:t>Refine: 'Make it more concise'</a:t>
-            </a:r>
-          </a:p>
-        </p:txBody>
-      </p:sp>
-      <p:sp>
-        <p:nvSpPr>
-          <p:cNvPr id="35" name="TextBox 34"/>
-          <p:cNvSpPr txBox="1"/>
-          <p:nvPr/>
-        </p:nvSpPr>
-        <p:spPr>
-          <a:xfrm>
-            <a:off x="1371600" y="5303520"/>
-            <a:ext cx="457200" cy="457200"/>
-          </a:xfrm>
-          <a:prstGeom prst="rect">
-            <a:avLst/>
-          </a:prstGeom>
-          <a:noFill/>
-        </p:spPr>
-        <p:txBody>
-          <a:bodyPr wrap="none">
-            <a:spAutoFit/>
-          </a:bodyPr>
-          <a:lstStyle/>
-          <a:p>
-            <a:pPr>
-              <a:defRPr sz="2000" b="1">
-                <a:solidFill>
-                  <a:srgbClr val="00D4AA"/>
-                </a:solidFill>
-              </a:defRPr>
-            </a:pPr>
-            <a:r>
-              <a:t>5</a:t>
-            </a:r>
-          </a:p>
-        </p:txBody>
-      </p:sp>
-      <p:sp>
-        <p:nvSpPr>
-          <p:cNvPr id="36" name="TextBox 35"/>
-          <p:cNvSpPr txBox="1"/>
-          <p:nvPr/>
-        </p:nvSpPr>
-        <p:spPr>
-          <a:xfrm>
-            <a:off x="1828800" y="5303520"/>
-            <a:ext cx="8991295" cy="548640"/>
-          </a:xfrm>
-          <a:prstGeom prst="rect">
-            <a:avLst/>
-          </a:prstGeom>
-          <a:noFill/>
-        </p:spPr>
-        <p:txBody>
-          <a:bodyPr wrap="square">
-            <a:spAutoFit/>
-          </a:bodyPr>
-          <a:lstStyle/>
-          <a:p>
-            <a:pPr>
-              <a:defRPr sz="1800">
-                <a:solidFill>
-                  <a:srgbClr val="FFFFFF"/>
-                </a:solidFill>
-              </a:defRPr>
-            </a:pPr>
-            <a:r>
-              <a:t>Create: 'Turn into email campaign'</a:t>
+              <a:defRPr sz="2400">
+                <a:solidFill>
+                  <a:srgbClr val="8B95A5"/>
+                </a:solidFill>
+              </a:defRPr>
+            </a:pPr>
+            <a:r>
+              <a:t>Claude in action for different jobs</a:t>
             </a:r>
           </a:p>
         </p:txBody>
@@ -44784,7 +44096,7 @@
               </a:defRPr>
             </a:pPr>
             <a:r>
-              <a:t>Sales Workflow</a:t>
+              <a:t>Marketing Workflow</a:t>
             </a:r>
           </a:p>
         </p:txBody>
@@ -45830,7 +45142,7 @@
               </a:defRPr>
             </a:pPr>
             <a:r>
-              <a:t>Upload prospect company info</a:t>
+              <a:t>Upload competitor research PDFs</a:t>
             </a:r>
           </a:p>
         </p:txBody>
@@ -45900,7 +45212,7 @@
               </a:defRPr>
             </a:pPr>
             <a:r>
-              <a:t>Ask: 'What are their pain points?'</a:t>
+              <a:t>Ask: 'Summarize their positioning'</a:t>
             </a:r>
           </a:p>
         </p:txBody>
@@ -45970,7 +45282,7 @@
               </a:defRPr>
             </a:pPr>
             <a:r>
-              <a:t>Request: 'Draft personalized pitch'</a:t>
+              <a:t>Request: 'Draft our differentiation message'</a:t>
             </a:r>
           </a:p>
         </p:txBody>
@@ -46040,7 +45352,7 @@
               </a:defRPr>
             </a:pPr>
             <a:r>
-              <a:t>Create: 'Email sequence for follow-up'</a:t>
+              <a:t>Refine: 'Make it more concise'</a:t>
             </a:r>
           </a:p>
         </p:txBody>
@@ -46110,7 +45422,7 @@
               </a:defRPr>
             </a:pPr>
             <a:r>
-              <a:t>Generate: 'Objection handling script'</a:t>
+              <a:t>Create: 'Turn into email campaign'</a:t>
             </a:r>
           </a:p>
         </p:txBody>
@@ -46150,23 +45462,60 @@
       </p:grpSpPr>
       <p:sp>
         <p:nvSpPr>
-          <p:cNvPr id="2" name="Rounded Rectangle 1"/>
+          <p:cNvPr id="2" name="TextBox 1"/>
+          <p:cNvSpPr txBox="1"/>
+          <p:nvPr/>
+        </p:nvSpPr>
+        <p:spPr>
+          <a:xfrm>
+            <a:off x="457200" y="365760"/>
+            <a:ext cx="11277295" cy="731520"/>
+          </a:xfrm>
+          <a:prstGeom prst="rect">
+            <a:avLst/>
+          </a:prstGeom>
+          <a:noFill/>
+        </p:spPr>
+        <p:txBody>
+          <a:bodyPr wrap="none">
+            <a:spAutoFit/>
+          </a:bodyPr>
+          <a:lstStyle/>
+          <a:p>
+            <a:pPr algn="ctr">
+              <a:defRPr sz="3600" b="1">
+                <a:solidFill>
+                  <a:srgbClr val="FFFFFF"/>
+                </a:solidFill>
+              </a:defRPr>
+            </a:pPr>
+            <a:r>
+              <a:t>Sales Workflow</a:t>
+            </a:r>
+          </a:p>
+        </p:txBody>
+      </p:sp>
+      <p:sp>
+        <p:nvSpPr>
+          <p:cNvPr id="3" name="Rounded Rectangle 2"/>
           <p:cNvSpPr/>
           <p:nvPr/>
         </p:nvSpPr>
         <p:spPr>
           <a:xfrm>
-            <a:off x="457200" y="365760"/>
-            <a:ext cx="1097280" cy="457200"/>
+            <a:off x="2941167" y="1371600"/>
+            <a:ext cx="822960" cy="822960"/>
           </a:xfrm>
           <a:prstGeom prst="roundRect">
             <a:avLst/>
           </a:prstGeom>
           <a:solidFill>
-            <a:srgbClr val="14B8A6"/>
+            <a:srgbClr val="141A26"/>
           </a:solidFill>
-          <a:ln>
-            <a:noFill/>
+          <a:ln w="25400">
+            <a:solidFill>
+              <a:srgbClr val="00D4AA"/>
+            </a:solidFill>
           </a:ln>
         </p:spPr>
         <p:style>
@@ -46187,110 +45536,30 @@
           <a:bodyPr rtlCol="0" anchor="ctr"/>
           <a:lstStyle/>
           <a:p>
-            <a:pPr algn="ctr">
-              <a:defRPr sz="1400" b="1">
-                <a:solidFill>
-                  <a:srgbClr val="FFFFFF"/>
-                </a:solidFill>
-              </a:defRPr>
-            </a:pPr>
-            <a:r>
-              <a:t>LAB 4</a:t>
-            </a:r>
-          </a:p>
-        </p:txBody>
-      </p:sp>
-      <p:sp>
-        <p:nvSpPr>
-          <p:cNvPr id="3" name="TextBox 2"/>
-          <p:cNvSpPr txBox="1"/>
-          <p:nvPr/>
-        </p:nvSpPr>
-        <p:spPr>
-          <a:xfrm>
-            <a:off x="457200" y="1005840"/>
-            <a:ext cx="11247120" cy="731520"/>
-          </a:xfrm>
-          <a:prstGeom prst="rect">
-            <a:avLst/>
-          </a:prstGeom>
-          <a:noFill/>
-        </p:spPr>
-        <p:txBody>
-          <a:bodyPr wrap="none">
-            <a:spAutoFit/>
-          </a:bodyPr>
-          <a:lstStyle/>
-          <a:p>
-            <a:pPr>
-              <a:defRPr sz="3600" b="1">
-                <a:solidFill>
-                  <a:srgbClr val="FFFFFF"/>
-                </a:solidFill>
-              </a:defRPr>
-            </a:pPr>
-            <a:r>
-              <a:t>Executive Briefing Challenge</a:t>
-            </a:r>
-          </a:p>
-        </p:txBody>
-      </p:sp>
-      <p:sp>
-        <p:nvSpPr>
-          <p:cNvPr id="4" name="TextBox 3"/>
-          <p:cNvSpPr txBox="1"/>
-          <p:nvPr/>
-        </p:nvSpPr>
-        <p:spPr>
-          <a:xfrm>
-            <a:off x="457200" y="1737360"/>
-            <a:ext cx="11247120" cy="457200"/>
-          </a:xfrm>
-          <a:prstGeom prst="rect">
-            <a:avLst/>
-          </a:prstGeom>
-          <a:noFill/>
-        </p:spPr>
-        <p:txBody>
-          <a:bodyPr wrap="none">
-            <a:spAutoFit/>
-          </a:bodyPr>
-          <a:lstStyle/>
-          <a:p>
-            <a:pPr>
-              <a:defRPr sz="1800" i="1">
-                <a:solidFill>
-                  <a:srgbClr val="9CA3AF"/>
-                </a:solidFill>
-              </a:defRPr>
-            </a:pPr>
-            <a:r>
-              <a:t>30 minutes  •  Tie it all together  •  Real deliverable you'll use Monday</a:t>
-            </a:r>
-          </a:p>
-        </p:txBody>
-      </p:sp>
-      <p:sp>
-        <p:nvSpPr>
-          <p:cNvPr id="5" name="Rounded Rectangle 4"/>
+            <a:pPr algn="ctr"/>
+            <a:endParaRPr/>
+          </a:p>
+        </p:txBody>
+      </p:sp>
+      <p:sp>
+        <p:nvSpPr>
+          <p:cNvPr id="4" name="Oval 3"/>
           <p:cNvSpPr/>
           <p:nvPr/>
         </p:nvSpPr>
         <p:spPr>
           <a:xfrm>
-            <a:off x="457200" y="2468880"/>
-            <a:ext cx="3566160" cy="3200400"/>
-          </a:xfrm>
-          <a:prstGeom prst="roundRect">
+            <a:off x="3604107" y="1211580"/>
+            <a:ext cx="320040" cy="320040"/>
+          </a:xfrm>
+          <a:prstGeom prst="ellipse">
             <a:avLst/>
           </a:prstGeom>
           <a:solidFill>
-            <a:srgbClr val="24354A"/>
+            <a:srgbClr val="00D4AA"/>
           </a:solidFill>
-          <a:ln w="19050">
-            <a:solidFill>
-              <a:srgbClr val="14B8A6"/>
-            </a:solidFill>
+          <a:ln>
+            <a:noFill/>
           </a:ln>
         </p:spPr>
         <p:style>
@@ -46318,173 +45587,93 @@
       </p:sp>
       <p:sp>
         <p:nvSpPr>
+          <p:cNvPr id="5" name="TextBox 4"/>
+          <p:cNvSpPr txBox="1"/>
+          <p:nvPr/>
+        </p:nvSpPr>
+        <p:spPr>
+          <a:xfrm>
+            <a:off x="3604107" y="1211580"/>
+            <a:ext cx="320040" cy="320040"/>
+          </a:xfrm>
+          <a:prstGeom prst="rect">
+            <a:avLst/>
+          </a:prstGeom>
+          <a:noFill/>
+        </p:spPr>
+        <p:txBody>
+          <a:bodyPr wrap="none" anchor="ctr">
+            <a:spAutoFit/>
+          </a:bodyPr>
+          <a:lstStyle/>
+          <a:p>
+            <a:pPr algn="ctr">
+              <a:defRPr sz="1400" b="1">
+                <a:solidFill>
+                  <a:srgbClr val="0B0F1A"/>
+                </a:solidFill>
+              </a:defRPr>
+            </a:pPr>
+            <a:r>
+              <a:t>1</a:t>
+            </a:r>
+          </a:p>
+        </p:txBody>
+      </p:sp>
+      <p:sp>
+        <p:nvSpPr>
           <p:cNvPr id="6" name="TextBox 5"/>
           <p:cNvSpPr txBox="1"/>
           <p:nvPr/>
         </p:nvSpPr>
         <p:spPr>
           <a:xfrm>
-            <a:off x="640080" y="2651760"/>
-            <a:ext cx="3200400" cy="548640"/>
-          </a:xfrm>
-          <a:prstGeom prst="rect">
-            <a:avLst/>
-          </a:prstGeom>
-          <a:noFill/>
-        </p:spPr>
-        <p:txBody>
-          <a:bodyPr wrap="none">
+            <a:off x="2941167" y="1371600"/>
+            <a:ext cx="822960" cy="822960"/>
+          </a:xfrm>
+          <a:prstGeom prst="rect">
+            <a:avLst/>
+          </a:prstGeom>
+          <a:noFill/>
+        </p:spPr>
+        <p:txBody>
+          <a:bodyPr wrap="none" anchor="ctr">
             <a:spAutoFit/>
           </a:bodyPr>
           <a:lstStyle/>
           <a:p>
             <a:pPr algn="ctr">
-              <a:defRPr sz="3000"/>
-            </a:pPr>
-            <a:r>
-              <a:t>🗂️</a:t>
-            </a:r>
-          </a:p>
-        </p:txBody>
-      </p:sp>
-      <p:sp>
-        <p:nvSpPr>
-          <p:cNvPr id="7" name="TextBox 6"/>
-          <p:cNvSpPr txBox="1"/>
-          <p:nvPr/>
-        </p:nvSpPr>
-        <p:spPr>
-          <a:xfrm>
-            <a:off x="640080" y="3200400"/>
-            <a:ext cx="3200400" cy="457200"/>
-          </a:xfrm>
-          <a:prstGeom prst="rect">
-            <a:avLst/>
-          </a:prstGeom>
-          <a:noFill/>
-        </p:spPr>
-        <p:txBody>
-          <a:bodyPr wrap="none">
-            <a:spAutoFit/>
-          </a:bodyPr>
-          <a:lstStyle/>
-          <a:p>
-            <a:pPr algn="ctr">
-              <a:defRPr sz="1800" b="1">
-                <a:solidFill>
-                  <a:srgbClr val="FFFFFF"/>
-                </a:solidFill>
-              </a:defRPr>
-            </a:pPr>
-            <a:r>
-              <a:t>Set Up</a:t>
-            </a:r>
-          </a:p>
-        </p:txBody>
-      </p:sp>
-      <p:sp>
-        <p:nvSpPr>
-          <p:cNvPr id="8" name="TextBox 7"/>
-          <p:cNvSpPr txBox="1"/>
-          <p:nvPr/>
-        </p:nvSpPr>
-        <p:spPr>
-          <a:xfrm>
-            <a:off x="640080" y="3749039"/>
-            <a:ext cx="3200400" cy="1645920"/>
-          </a:xfrm>
-          <a:prstGeom prst="rect">
-            <a:avLst/>
-          </a:prstGeom>
-          <a:noFill/>
-        </p:spPr>
-        <p:txBody>
-          <a:bodyPr wrap="square">
-            <a:spAutoFit/>
-          </a:bodyPr>
-          <a:lstStyle/>
-          <a:p>
-            <a:pPr algn="ctr">
-              <a:defRPr sz="1300">
-                <a:solidFill>
-                  <a:srgbClr val="D1D5DB"/>
-                </a:solidFill>
-              </a:defRPr>
-            </a:pPr>
-            <a:r>
-              <a:t>Create a Project called</a:t>
-            </a:r>
-            <a:br/>
-            <a:r>
-              <a:t>'Executive Briefing'.</a:t>
-            </a:r>
-            <a:br/>
-            <a:r>
-              <a:t>Add custom instructions.</a:t>
-            </a:r>
-            <a:br/>
-            <a:r>
-              <a:t>Upload all provided files.</a:t>
-            </a:r>
-          </a:p>
-        </p:txBody>
-      </p:sp>
-      <p:sp>
-        <p:nvSpPr>
-          <p:cNvPr id="9" name="TextBox 8"/>
-          <p:cNvSpPr txBox="1"/>
-          <p:nvPr/>
-        </p:nvSpPr>
-        <p:spPr>
-          <a:xfrm>
-            <a:off x="640080" y="5303520"/>
-            <a:ext cx="3200400" cy="365760"/>
-          </a:xfrm>
-          <a:prstGeom prst="rect">
-            <a:avLst/>
-          </a:prstGeom>
-          <a:noFill/>
-        </p:spPr>
-        <p:txBody>
-          <a:bodyPr wrap="none">
-            <a:spAutoFit/>
-          </a:bodyPr>
-          <a:lstStyle/>
-          <a:p>
-            <a:pPr algn="ctr">
-              <a:defRPr sz="1200" i="1">
-                <a:solidFill>
-                  <a:srgbClr val="14B8A6"/>
-                </a:solidFill>
-              </a:defRPr>
-            </a:pPr>
-            <a:r>
-              <a:t>5 min</a:t>
-            </a:r>
-          </a:p>
-        </p:txBody>
-      </p:sp>
-      <p:sp>
-        <p:nvSpPr>
-          <p:cNvPr id="10" name="Rounded Rectangle 9"/>
+              <a:defRPr sz="2800" b="1">
+                <a:solidFill>
+                  <a:srgbClr val="00D4AA"/>
+                </a:solidFill>
+              </a:defRPr>
+            </a:pPr>
+            <a:r>
+              <a:t>1</a:t>
+            </a:r>
+          </a:p>
+        </p:txBody>
+      </p:sp>
+      <p:sp>
+        <p:nvSpPr>
+          <p:cNvPr id="7" name="Right Arrow 6"/>
           <p:cNvSpPr/>
           <p:nvPr/>
         </p:nvSpPr>
         <p:spPr>
           <a:xfrm>
-            <a:off x="4206240" y="2468880"/>
-            <a:ext cx="3566160" cy="3200400"/>
-          </a:xfrm>
-          <a:prstGeom prst="roundRect">
+            <a:off x="3855567" y="1645920"/>
+            <a:ext cx="365760" cy="274320"/>
+          </a:xfrm>
+          <a:prstGeom prst="rightArrow">
             <a:avLst/>
           </a:prstGeom>
           <a:solidFill>
-            <a:srgbClr val="24354A"/>
+            <a:srgbClr val="8B95A5"/>
           </a:solidFill>
-          <a:ln w="19050">
-            <a:solidFill>
-              <a:srgbClr val="14B8A6"/>
-            </a:solidFill>
+          <a:ln>
+            <a:noFill/>
           </a:ln>
         </p:spPr>
         <p:style>
@@ -46512,172 +45701,24 @@
       </p:sp>
       <p:sp>
         <p:nvSpPr>
-          <p:cNvPr id="11" name="TextBox 10"/>
-          <p:cNvSpPr txBox="1"/>
-          <p:nvPr/>
-        </p:nvSpPr>
-        <p:spPr>
-          <a:xfrm>
-            <a:off x="4389120" y="2651760"/>
-            <a:ext cx="3200400" cy="548640"/>
-          </a:xfrm>
-          <a:prstGeom prst="rect">
-            <a:avLst/>
-          </a:prstGeom>
-          <a:noFill/>
-        </p:spPr>
-        <p:txBody>
-          <a:bodyPr wrap="none">
-            <a:spAutoFit/>
-          </a:bodyPr>
-          <a:lstStyle/>
-          <a:p>
-            <a:pPr algn="ctr">
-              <a:defRPr sz="3000"/>
-            </a:pPr>
-            <a:r>
-              <a:t>🔍</a:t>
-            </a:r>
-          </a:p>
-        </p:txBody>
-      </p:sp>
-      <p:sp>
-        <p:nvSpPr>
-          <p:cNvPr id="12" name="TextBox 11"/>
-          <p:cNvSpPr txBox="1"/>
-          <p:nvPr/>
-        </p:nvSpPr>
-        <p:spPr>
-          <a:xfrm>
-            <a:off x="4389120" y="3200400"/>
-            <a:ext cx="3200400" cy="457200"/>
-          </a:xfrm>
-          <a:prstGeom prst="rect">
-            <a:avLst/>
-          </a:prstGeom>
-          <a:noFill/>
-        </p:spPr>
-        <p:txBody>
-          <a:bodyPr wrap="none">
-            <a:spAutoFit/>
-          </a:bodyPr>
-          <a:lstStyle/>
-          <a:p>
-            <a:pPr algn="ctr">
-              <a:defRPr sz="1800" b="1">
-                <a:solidFill>
-                  <a:srgbClr val="FFFFFF"/>
-                </a:solidFill>
-              </a:defRPr>
-            </a:pPr>
-            <a:r>
-              <a:t>Analyze &amp; Build</a:t>
-            </a:r>
-          </a:p>
-        </p:txBody>
-      </p:sp>
-      <p:sp>
-        <p:nvSpPr>
-          <p:cNvPr id="13" name="TextBox 12"/>
-          <p:cNvSpPr txBox="1"/>
-          <p:nvPr/>
-        </p:nvSpPr>
-        <p:spPr>
-          <a:xfrm>
-            <a:off x="4389120" y="3749039"/>
-            <a:ext cx="3200400" cy="1645920"/>
-          </a:xfrm>
-          <a:prstGeom prst="rect">
-            <a:avLst/>
-          </a:prstGeom>
-          <a:noFill/>
-        </p:spPr>
-        <p:txBody>
-          <a:bodyPr wrap="square">
-            <a:spAutoFit/>
-          </a:bodyPr>
-          <a:lstStyle/>
-          <a:p>
-            <a:pPr algn="ctr">
-              <a:defRPr sz="1300">
-                <a:solidFill>
-                  <a:srgbClr val="D1D5DB"/>
-                </a:solidFill>
-              </a:defRPr>
-            </a:pPr>
-            <a:r>
-              <a:t>Use prompting skills to</a:t>
-            </a:r>
-            <a:br/>
-            <a:r>
-              <a:t>extract insights from</a:t>
-            </a:r>
-            <a:br/>
-            <a:r>
-              <a:t>multiple file types.</a:t>
-            </a:r>
-            <a:br/>
-            <a:r>
-              <a:t>Iterate until output is sharp.</a:t>
-            </a:r>
-          </a:p>
-        </p:txBody>
-      </p:sp>
-      <p:sp>
-        <p:nvSpPr>
-          <p:cNvPr id="14" name="TextBox 13"/>
-          <p:cNvSpPr txBox="1"/>
-          <p:nvPr/>
-        </p:nvSpPr>
-        <p:spPr>
-          <a:xfrm>
-            <a:off x="4389120" y="5303520"/>
-            <a:ext cx="3200400" cy="365760"/>
-          </a:xfrm>
-          <a:prstGeom prst="rect">
-            <a:avLst/>
-          </a:prstGeom>
-          <a:noFill/>
-        </p:spPr>
-        <p:txBody>
-          <a:bodyPr wrap="none">
-            <a:spAutoFit/>
-          </a:bodyPr>
-          <a:lstStyle/>
-          <a:p>
-            <a:pPr algn="ctr">
-              <a:defRPr sz="1200" i="1">
-                <a:solidFill>
-                  <a:srgbClr val="14B8A6"/>
-                </a:solidFill>
-              </a:defRPr>
-            </a:pPr>
-            <a:r>
-              <a:t>15 min</a:t>
-            </a:r>
-          </a:p>
-        </p:txBody>
-      </p:sp>
-      <p:sp>
-        <p:nvSpPr>
-          <p:cNvPr id="15" name="Rounded Rectangle 14"/>
+          <p:cNvPr id="8" name="Rounded Rectangle 7"/>
           <p:cNvSpPr/>
           <p:nvPr/>
         </p:nvSpPr>
         <p:spPr>
           <a:xfrm>
-            <a:off x="7955280" y="2468880"/>
-            <a:ext cx="3566160" cy="3200400"/>
+            <a:off x="4312767" y="1371600"/>
+            <a:ext cx="822960" cy="822960"/>
           </a:xfrm>
           <a:prstGeom prst="roundRect">
             <a:avLst/>
           </a:prstGeom>
           <a:solidFill>
-            <a:srgbClr val="24354A"/>
+            <a:srgbClr val="141A26"/>
           </a:solidFill>
-          <a:ln w="19050">
+          <a:ln w="25400">
             <a:solidFill>
-              <a:srgbClr val="14B8A6"/>
+              <a:srgbClr val="00D4AA"/>
             </a:solidFill>
           </a:ln>
         </p:spPr>
@@ -46706,14 +45747,740 @@
       </p:sp>
       <p:sp>
         <p:nvSpPr>
+          <p:cNvPr id="9" name="Oval 8"/>
+          <p:cNvSpPr/>
+          <p:nvPr/>
+        </p:nvSpPr>
+        <p:spPr>
+          <a:xfrm>
+            <a:off x="4975707" y="1211580"/>
+            <a:ext cx="320040" cy="320040"/>
+          </a:xfrm>
+          <a:prstGeom prst="ellipse">
+            <a:avLst/>
+          </a:prstGeom>
+          <a:solidFill>
+            <a:srgbClr val="00D4AA"/>
+          </a:solidFill>
+          <a:ln>
+            <a:noFill/>
+          </a:ln>
+        </p:spPr>
+        <p:style>
+          <a:lnRef idx="1">
+            <a:schemeClr val="accent1"/>
+          </a:lnRef>
+          <a:fillRef idx="3">
+            <a:schemeClr val="accent1"/>
+          </a:fillRef>
+          <a:effectRef idx="2">
+            <a:schemeClr val="accent1"/>
+          </a:effectRef>
+          <a:fontRef idx="minor">
+            <a:schemeClr val="lt1"/>
+          </a:fontRef>
+        </p:style>
+        <p:txBody>
+          <a:bodyPr rtlCol="0" anchor="ctr"/>
+          <a:lstStyle/>
+          <a:p>
+            <a:pPr algn="ctr"/>
+            <a:endParaRPr/>
+          </a:p>
+        </p:txBody>
+      </p:sp>
+      <p:sp>
+        <p:nvSpPr>
+          <p:cNvPr id="10" name="TextBox 9"/>
+          <p:cNvSpPr txBox="1"/>
+          <p:nvPr/>
+        </p:nvSpPr>
+        <p:spPr>
+          <a:xfrm>
+            <a:off x="4975707" y="1211580"/>
+            <a:ext cx="320040" cy="320040"/>
+          </a:xfrm>
+          <a:prstGeom prst="rect">
+            <a:avLst/>
+          </a:prstGeom>
+          <a:noFill/>
+        </p:spPr>
+        <p:txBody>
+          <a:bodyPr wrap="none" anchor="ctr">
+            <a:spAutoFit/>
+          </a:bodyPr>
+          <a:lstStyle/>
+          <a:p>
+            <a:pPr algn="ctr">
+              <a:defRPr sz="1400" b="1">
+                <a:solidFill>
+                  <a:srgbClr val="0B0F1A"/>
+                </a:solidFill>
+              </a:defRPr>
+            </a:pPr>
+            <a:r>
+              <a:t>2</a:t>
+            </a:r>
+          </a:p>
+        </p:txBody>
+      </p:sp>
+      <p:sp>
+        <p:nvSpPr>
+          <p:cNvPr id="11" name="TextBox 10"/>
+          <p:cNvSpPr txBox="1"/>
+          <p:nvPr/>
+        </p:nvSpPr>
+        <p:spPr>
+          <a:xfrm>
+            <a:off x="4312767" y="1371600"/>
+            <a:ext cx="822960" cy="822960"/>
+          </a:xfrm>
+          <a:prstGeom prst="rect">
+            <a:avLst/>
+          </a:prstGeom>
+          <a:noFill/>
+        </p:spPr>
+        <p:txBody>
+          <a:bodyPr wrap="none" anchor="ctr">
+            <a:spAutoFit/>
+          </a:bodyPr>
+          <a:lstStyle/>
+          <a:p>
+            <a:pPr algn="ctr">
+              <a:defRPr sz="2800" b="1">
+                <a:solidFill>
+                  <a:srgbClr val="00D4AA"/>
+                </a:solidFill>
+              </a:defRPr>
+            </a:pPr>
+            <a:r>
+              <a:t>2</a:t>
+            </a:r>
+          </a:p>
+        </p:txBody>
+      </p:sp>
+      <p:sp>
+        <p:nvSpPr>
+          <p:cNvPr id="12" name="Right Arrow 11"/>
+          <p:cNvSpPr/>
+          <p:nvPr/>
+        </p:nvSpPr>
+        <p:spPr>
+          <a:xfrm>
+            <a:off x="5227167" y="1645920"/>
+            <a:ext cx="365760" cy="274320"/>
+          </a:xfrm>
+          <a:prstGeom prst="rightArrow">
+            <a:avLst/>
+          </a:prstGeom>
+          <a:solidFill>
+            <a:srgbClr val="8B95A5"/>
+          </a:solidFill>
+          <a:ln>
+            <a:noFill/>
+          </a:ln>
+        </p:spPr>
+        <p:style>
+          <a:lnRef idx="1">
+            <a:schemeClr val="accent1"/>
+          </a:lnRef>
+          <a:fillRef idx="3">
+            <a:schemeClr val="accent1"/>
+          </a:fillRef>
+          <a:effectRef idx="2">
+            <a:schemeClr val="accent1"/>
+          </a:effectRef>
+          <a:fontRef idx="minor">
+            <a:schemeClr val="lt1"/>
+          </a:fontRef>
+        </p:style>
+        <p:txBody>
+          <a:bodyPr rtlCol="0" anchor="ctr"/>
+          <a:lstStyle/>
+          <a:p>
+            <a:pPr algn="ctr"/>
+            <a:endParaRPr/>
+          </a:p>
+        </p:txBody>
+      </p:sp>
+      <p:sp>
+        <p:nvSpPr>
+          <p:cNvPr id="13" name="Rounded Rectangle 12"/>
+          <p:cNvSpPr/>
+          <p:nvPr/>
+        </p:nvSpPr>
+        <p:spPr>
+          <a:xfrm>
+            <a:off x="5684367" y="1371600"/>
+            <a:ext cx="822960" cy="822960"/>
+          </a:xfrm>
+          <a:prstGeom prst="roundRect">
+            <a:avLst/>
+          </a:prstGeom>
+          <a:solidFill>
+            <a:srgbClr val="141A26"/>
+          </a:solidFill>
+          <a:ln w="25400">
+            <a:solidFill>
+              <a:srgbClr val="00D4AA"/>
+            </a:solidFill>
+          </a:ln>
+        </p:spPr>
+        <p:style>
+          <a:lnRef idx="1">
+            <a:schemeClr val="accent1"/>
+          </a:lnRef>
+          <a:fillRef idx="3">
+            <a:schemeClr val="accent1"/>
+          </a:fillRef>
+          <a:effectRef idx="2">
+            <a:schemeClr val="accent1"/>
+          </a:effectRef>
+          <a:fontRef idx="minor">
+            <a:schemeClr val="lt1"/>
+          </a:fontRef>
+        </p:style>
+        <p:txBody>
+          <a:bodyPr rtlCol="0" anchor="ctr"/>
+          <a:lstStyle/>
+          <a:p>
+            <a:pPr algn="ctr"/>
+            <a:endParaRPr/>
+          </a:p>
+        </p:txBody>
+      </p:sp>
+      <p:sp>
+        <p:nvSpPr>
+          <p:cNvPr id="14" name="Oval 13"/>
+          <p:cNvSpPr/>
+          <p:nvPr/>
+        </p:nvSpPr>
+        <p:spPr>
+          <a:xfrm>
+            <a:off x="6347307" y="1211580"/>
+            <a:ext cx="320040" cy="320040"/>
+          </a:xfrm>
+          <a:prstGeom prst="ellipse">
+            <a:avLst/>
+          </a:prstGeom>
+          <a:solidFill>
+            <a:srgbClr val="00D4AA"/>
+          </a:solidFill>
+          <a:ln>
+            <a:noFill/>
+          </a:ln>
+        </p:spPr>
+        <p:style>
+          <a:lnRef idx="1">
+            <a:schemeClr val="accent1"/>
+          </a:lnRef>
+          <a:fillRef idx="3">
+            <a:schemeClr val="accent1"/>
+          </a:fillRef>
+          <a:effectRef idx="2">
+            <a:schemeClr val="accent1"/>
+          </a:effectRef>
+          <a:fontRef idx="minor">
+            <a:schemeClr val="lt1"/>
+          </a:fontRef>
+        </p:style>
+        <p:txBody>
+          <a:bodyPr rtlCol="0" anchor="ctr"/>
+          <a:lstStyle/>
+          <a:p>
+            <a:pPr algn="ctr"/>
+            <a:endParaRPr/>
+          </a:p>
+        </p:txBody>
+      </p:sp>
+      <p:sp>
+        <p:nvSpPr>
+          <p:cNvPr id="15" name="TextBox 14"/>
+          <p:cNvSpPr txBox="1"/>
+          <p:nvPr/>
+        </p:nvSpPr>
+        <p:spPr>
+          <a:xfrm>
+            <a:off x="6347307" y="1211580"/>
+            <a:ext cx="320040" cy="320040"/>
+          </a:xfrm>
+          <a:prstGeom prst="rect">
+            <a:avLst/>
+          </a:prstGeom>
+          <a:noFill/>
+        </p:spPr>
+        <p:txBody>
+          <a:bodyPr wrap="none" anchor="ctr">
+            <a:spAutoFit/>
+          </a:bodyPr>
+          <a:lstStyle/>
+          <a:p>
+            <a:pPr algn="ctr">
+              <a:defRPr sz="1400" b="1">
+                <a:solidFill>
+                  <a:srgbClr val="0B0F1A"/>
+                </a:solidFill>
+              </a:defRPr>
+            </a:pPr>
+            <a:r>
+              <a:t>3</a:t>
+            </a:r>
+          </a:p>
+        </p:txBody>
+      </p:sp>
+      <p:sp>
+        <p:nvSpPr>
           <p:cNvPr id="16" name="TextBox 15"/>
           <p:cNvSpPr txBox="1"/>
           <p:nvPr/>
         </p:nvSpPr>
         <p:spPr>
           <a:xfrm>
-            <a:off x="8138160" y="2651760"/>
-            <a:ext cx="3200400" cy="548640"/>
+            <a:off x="5684367" y="1371600"/>
+            <a:ext cx="822960" cy="822960"/>
+          </a:xfrm>
+          <a:prstGeom prst="rect">
+            <a:avLst/>
+          </a:prstGeom>
+          <a:noFill/>
+        </p:spPr>
+        <p:txBody>
+          <a:bodyPr wrap="none" anchor="ctr">
+            <a:spAutoFit/>
+          </a:bodyPr>
+          <a:lstStyle/>
+          <a:p>
+            <a:pPr algn="ctr">
+              <a:defRPr sz="2800" b="1">
+                <a:solidFill>
+                  <a:srgbClr val="00D4AA"/>
+                </a:solidFill>
+              </a:defRPr>
+            </a:pPr>
+            <a:r>
+              <a:t>3</a:t>
+            </a:r>
+          </a:p>
+        </p:txBody>
+      </p:sp>
+      <p:sp>
+        <p:nvSpPr>
+          <p:cNvPr id="17" name="Right Arrow 16"/>
+          <p:cNvSpPr/>
+          <p:nvPr/>
+        </p:nvSpPr>
+        <p:spPr>
+          <a:xfrm>
+            <a:off x="6598767" y="1645920"/>
+            <a:ext cx="365760" cy="274320"/>
+          </a:xfrm>
+          <a:prstGeom prst="rightArrow">
+            <a:avLst/>
+          </a:prstGeom>
+          <a:solidFill>
+            <a:srgbClr val="8B95A5"/>
+          </a:solidFill>
+          <a:ln>
+            <a:noFill/>
+          </a:ln>
+        </p:spPr>
+        <p:style>
+          <a:lnRef idx="1">
+            <a:schemeClr val="accent1"/>
+          </a:lnRef>
+          <a:fillRef idx="3">
+            <a:schemeClr val="accent1"/>
+          </a:fillRef>
+          <a:effectRef idx="2">
+            <a:schemeClr val="accent1"/>
+          </a:effectRef>
+          <a:fontRef idx="minor">
+            <a:schemeClr val="lt1"/>
+          </a:fontRef>
+        </p:style>
+        <p:txBody>
+          <a:bodyPr rtlCol="0" anchor="ctr"/>
+          <a:lstStyle/>
+          <a:p>
+            <a:pPr algn="ctr"/>
+            <a:endParaRPr/>
+          </a:p>
+        </p:txBody>
+      </p:sp>
+      <p:sp>
+        <p:nvSpPr>
+          <p:cNvPr id="18" name="Rounded Rectangle 17"/>
+          <p:cNvSpPr/>
+          <p:nvPr/>
+        </p:nvSpPr>
+        <p:spPr>
+          <a:xfrm>
+            <a:off x="7055967" y="1371600"/>
+            <a:ext cx="822960" cy="822960"/>
+          </a:xfrm>
+          <a:prstGeom prst="roundRect">
+            <a:avLst/>
+          </a:prstGeom>
+          <a:solidFill>
+            <a:srgbClr val="141A26"/>
+          </a:solidFill>
+          <a:ln w="25400">
+            <a:solidFill>
+              <a:srgbClr val="00D4AA"/>
+            </a:solidFill>
+          </a:ln>
+        </p:spPr>
+        <p:style>
+          <a:lnRef idx="1">
+            <a:schemeClr val="accent1"/>
+          </a:lnRef>
+          <a:fillRef idx="3">
+            <a:schemeClr val="accent1"/>
+          </a:fillRef>
+          <a:effectRef idx="2">
+            <a:schemeClr val="accent1"/>
+          </a:effectRef>
+          <a:fontRef idx="minor">
+            <a:schemeClr val="lt1"/>
+          </a:fontRef>
+        </p:style>
+        <p:txBody>
+          <a:bodyPr rtlCol="0" anchor="ctr"/>
+          <a:lstStyle/>
+          <a:p>
+            <a:pPr algn="ctr"/>
+            <a:endParaRPr/>
+          </a:p>
+        </p:txBody>
+      </p:sp>
+      <p:sp>
+        <p:nvSpPr>
+          <p:cNvPr id="19" name="Oval 18"/>
+          <p:cNvSpPr/>
+          <p:nvPr/>
+        </p:nvSpPr>
+        <p:spPr>
+          <a:xfrm>
+            <a:off x="7718907" y="1211580"/>
+            <a:ext cx="320040" cy="320040"/>
+          </a:xfrm>
+          <a:prstGeom prst="ellipse">
+            <a:avLst/>
+          </a:prstGeom>
+          <a:solidFill>
+            <a:srgbClr val="00D4AA"/>
+          </a:solidFill>
+          <a:ln>
+            <a:noFill/>
+          </a:ln>
+        </p:spPr>
+        <p:style>
+          <a:lnRef idx="1">
+            <a:schemeClr val="accent1"/>
+          </a:lnRef>
+          <a:fillRef idx="3">
+            <a:schemeClr val="accent1"/>
+          </a:fillRef>
+          <a:effectRef idx="2">
+            <a:schemeClr val="accent1"/>
+          </a:effectRef>
+          <a:fontRef idx="minor">
+            <a:schemeClr val="lt1"/>
+          </a:fontRef>
+        </p:style>
+        <p:txBody>
+          <a:bodyPr rtlCol="0" anchor="ctr"/>
+          <a:lstStyle/>
+          <a:p>
+            <a:pPr algn="ctr"/>
+            <a:endParaRPr/>
+          </a:p>
+        </p:txBody>
+      </p:sp>
+      <p:sp>
+        <p:nvSpPr>
+          <p:cNvPr id="20" name="TextBox 19"/>
+          <p:cNvSpPr txBox="1"/>
+          <p:nvPr/>
+        </p:nvSpPr>
+        <p:spPr>
+          <a:xfrm>
+            <a:off x="7718907" y="1211580"/>
+            <a:ext cx="320040" cy="320040"/>
+          </a:xfrm>
+          <a:prstGeom prst="rect">
+            <a:avLst/>
+          </a:prstGeom>
+          <a:noFill/>
+        </p:spPr>
+        <p:txBody>
+          <a:bodyPr wrap="none" anchor="ctr">
+            <a:spAutoFit/>
+          </a:bodyPr>
+          <a:lstStyle/>
+          <a:p>
+            <a:pPr algn="ctr">
+              <a:defRPr sz="1400" b="1">
+                <a:solidFill>
+                  <a:srgbClr val="0B0F1A"/>
+                </a:solidFill>
+              </a:defRPr>
+            </a:pPr>
+            <a:r>
+              <a:t>4</a:t>
+            </a:r>
+          </a:p>
+        </p:txBody>
+      </p:sp>
+      <p:sp>
+        <p:nvSpPr>
+          <p:cNvPr id="21" name="TextBox 20"/>
+          <p:cNvSpPr txBox="1"/>
+          <p:nvPr/>
+        </p:nvSpPr>
+        <p:spPr>
+          <a:xfrm>
+            <a:off x="7055967" y="1371600"/>
+            <a:ext cx="822960" cy="822960"/>
+          </a:xfrm>
+          <a:prstGeom prst="rect">
+            <a:avLst/>
+          </a:prstGeom>
+          <a:noFill/>
+        </p:spPr>
+        <p:txBody>
+          <a:bodyPr wrap="none" anchor="ctr">
+            <a:spAutoFit/>
+          </a:bodyPr>
+          <a:lstStyle/>
+          <a:p>
+            <a:pPr algn="ctr">
+              <a:defRPr sz="2800" b="1">
+                <a:solidFill>
+                  <a:srgbClr val="00D4AA"/>
+                </a:solidFill>
+              </a:defRPr>
+            </a:pPr>
+            <a:r>
+              <a:t>4</a:t>
+            </a:r>
+          </a:p>
+        </p:txBody>
+      </p:sp>
+      <p:sp>
+        <p:nvSpPr>
+          <p:cNvPr id="22" name="Right Arrow 21"/>
+          <p:cNvSpPr/>
+          <p:nvPr/>
+        </p:nvSpPr>
+        <p:spPr>
+          <a:xfrm>
+            <a:off x="7970367" y="1645920"/>
+            <a:ext cx="365760" cy="274320"/>
+          </a:xfrm>
+          <a:prstGeom prst="rightArrow">
+            <a:avLst/>
+          </a:prstGeom>
+          <a:solidFill>
+            <a:srgbClr val="8B95A5"/>
+          </a:solidFill>
+          <a:ln>
+            <a:noFill/>
+          </a:ln>
+        </p:spPr>
+        <p:style>
+          <a:lnRef idx="1">
+            <a:schemeClr val="accent1"/>
+          </a:lnRef>
+          <a:fillRef idx="3">
+            <a:schemeClr val="accent1"/>
+          </a:fillRef>
+          <a:effectRef idx="2">
+            <a:schemeClr val="accent1"/>
+          </a:effectRef>
+          <a:fontRef idx="minor">
+            <a:schemeClr val="lt1"/>
+          </a:fontRef>
+        </p:style>
+        <p:txBody>
+          <a:bodyPr rtlCol="0" anchor="ctr"/>
+          <a:lstStyle/>
+          <a:p>
+            <a:pPr algn="ctr"/>
+            <a:endParaRPr/>
+          </a:p>
+        </p:txBody>
+      </p:sp>
+      <p:sp>
+        <p:nvSpPr>
+          <p:cNvPr id="23" name="Rounded Rectangle 22"/>
+          <p:cNvSpPr/>
+          <p:nvPr/>
+        </p:nvSpPr>
+        <p:spPr>
+          <a:xfrm>
+            <a:off x="8427567" y="1371600"/>
+            <a:ext cx="822960" cy="822960"/>
+          </a:xfrm>
+          <a:prstGeom prst="roundRect">
+            <a:avLst/>
+          </a:prstGeom>
+          <a:solidFill>
+            <a:srgbClr val="141A26"/>
+          </a:solidFill>
+          <a:ln w="25400">
+            <a:solidFill>
+              <a:srgbClr val="00D4AA"/>
+            </a:solidFill>
+          </a:ln>
+        </p:spPr>
+        <p:style>
+          <a:lnRef idx="1">
+            <a:schemeClr val="accent1"/>
+          </a:lnRef>
+          <a:fillRef idx="3">
+            <a:schemeClr val="accent1"/>
+          </a:fillRef>
+          <a:effectRef idx="2">
+            <a:schemeClr val="accent1"/>
+          </a:effectRef>
+          <a:fontRef idx="minor">
+            <a:schemeClr val="lt1"/>
+          </a:fontRef>
+        </p:style>
+        <p:txBody>
+          <a:bodyPr rtlCol="0" anchor="ctr"/>
+          <a:lstStyle/>
+          <a:p>
+            <a:pPr algn="ctr"/>
+            <a:endParaRPr/>
+          </a:p>
+        </p:txBody>
+      </p:sp>
+      <p:sp>
+        <p:nvSpPr>
+          <p:cNvPr id="24" name="Oval 23"/>
+          <p:cNvSpPr/>
+          <p:nvPr/>
+        </p:nvSpPr>
+        <p:spPr>
+          <a:xfrm>
+            <a:off x="9090507" y="1211580"/>
+            <a:ext cx="320040" cy="320040"/>
+          </a:xfrm>
+          <a:prstGeom prst="ellipse">
+            <a:avLst/>
+          </a:prstGeom>
+          <a:solidFill>
+            <a:srgbClr val="00D4AA"/>
+          </a:solidFill>
+          <a:ln>
+            <a:noFill/>
+          </a:ln>
+        </p:spPr>
+        <p:style>
+          <a:lnRef idx="1">
+            <a:schemeClr val="accent1"/>
+          </a:lnRef>
+          <a:fillRef idx="3">
+            <a:schemeClr val="accent1"/>
+          </a:fillRef>
+          <a:effectRef idx="2">
+            <a:schemeClr val="accent1"/>
+          </a:effectRef>
+          <a:fontRef idx="minor">
+            <a:schemeClr val="lt1"/>
+          </a:fontRef>
+        </p:style>
+        <p:txBody>
+          <a:bodyPr rtlCol="0" anchor="ctr"/>
+          <a:lstStyle/>
+          <a:p>
+            <a:pPr algn="ctr"/>
+            <a:endParaRPr/>
+          </a:p>
+        </p:txBody>
+      </p:sp>
+      <p:sp>
+        <p:nvSpPr>
+          <p:cNvPr id="25" name="TextBox 24"/>
+          <p:cNvSpPr txBox="1"/>
+          <p:nvPr/>
+        </p:nvSpPr>
+        <p:spPr>
+          <a:xfrm>
+            <a:off x="9090507" y="1211580"/>
+            <a:ext cx="320040" cy="320040"/>
+          </a:xfrm>
+          <a:prstGeom prst="rect">
+            <a:avLst/>
+          </a:prstGeom>
+          <a:noFill/>
+        </p:spPr>
+        <p:txBody>
+          <a:bodyPr wrap="none" anchor="ctr">
+            <a:spAutoFit/>
+          </a:bodyPr>
+          <a:lstStyle/>
+          <a:p>
+            <a:pPr algn="ctr">
+              <a:defRPr sz="1400" b="1">
+                <a:solidFill>
+                  <a:srgbClr val="0B0F1A"/>
+                </a:solidFill>
+              </a:defRPr>
+            </a:pPr>
+            <a:r>
+              <a:t>5</a:t>
+            </a:r>
+          </a:p>
+        </p:txBody>
+      </p:sp>
+      <p:sp>
+        <p:nvSpPr>
+          <p:cNvPr id="26" name="TextBox 25"/>
+          <p:cNvSpPr txBox="1"/>
+          <p:nvPr/>
+        </p:nvSpPr>
+        <p:spPr>
+          <a:xfrm>
+            <a:off x="8427567" y="1371600"/>
+            <a:ext cx="822960" cy="822960"/>
+          </a:xfrm>
+          <a:prstGeom prst="rect">
+            <a:avLst/>
+          </a:prstGeom>
+          <a:noFill/>
+        </p:spPr>
+        <p:txBody>
+          <a:bodyPr wrap="none" anchor="ctr">
+            <a:spAutoFit/>
+          </a:bodyPr>
+          <a:lstStyle/>
+          <a:p>
+            <a:pPr algn="ctr">
+              <a:defRPr sz="2800" b="1">
+                <a:solidFill>
+                  <a:srgbClr val="00D4AA"/>
+                </a:solidFill>
+              </a:defRPr>
+            </a:pPr>
+            <a:r>
+              <a:t>5</a:t>
+            </a:r>
+          </a:p>
+        </p:txBody>
+      </p:sp>
+      <p:sp>
+        <p:nvSpPr>
+          <p:cNvPr id="27" name="TextBox 26"/>
+          <p:cNvSpPr txBox="1"/>
+          <p:nvPr/>
+        </p:nvSpPr>
+        <p:spPr>
+          <a:xfrm>
+            <a:off x="1371600" y="2743200"/>
+            <a:ext cx="457200" cy="457200"/>
           </a:xfrm>
           <a:prstGeom prst="rect">
             <a:avLst/>
@@ -46726,25 +46493,64 @@
           </a:bodyPr>
           <a:lstStyle/>
           <a:p>
-            <a:pPr algn="ctr">
-              <a:defRPr sz="3000"/>
-            </a:pPr>
-            <a:r>
-              <a:t>✨</a:t>
-            </a:r>
-          </a:p>
-        </p:txBody>
-      </p:sp>
-      <p:sp>
-        <p:nvSpPr>
-          <p:cNvPr id="17" name="TextBox 16"/>
-          <p:cNvSpPr txBox="1"/>
-          <p:nvPr/>
-        </p:nvSpPr>
-        <p:spPr>
-          <a:xfrm>
-            <a:off x="8138160" y="3200400"/>
-            <a:ext cx="3200400" cy="457200"/>
+            <a:pPr>
+              <a:defRPr sz="2000" b="1">
+                <a:solidFill>
+                  <a:srgbClr val="00D4AA"/>
+                </a:solidFill>
+              </a:defRPr>
+            </a:pPr>
+            <a:r>
+              <a:t>1</a:t>
+            </a:r>
+          </a:p>
+        </p:txBody>
+      </p:sp>
+      <p:sp>
+        <p:nvSpPr>
+          <p:cNvPr id="28" name="TextBox 27"/>
+          <p:cNvSpPr txBox="1"/>
+          <p:nvPr/>
+        </p:nvSpPr>
+        <p:spPr>
+          <a:xfrm>
+            <a:off x="1828800" y="2743200"/>
+            <a:ext cx="8991295" cy="548640"/>
+          </a:xfrm>
+          <a:prstGeom prst="rect">
+            <a:avLst/>
+          </a:prstGeom>
+          <a:noFill/>
+        </p:spPr>
+        <p:txBody>
+          <a:bodyPr wrap="square">
+            <a:spAutoFit/>
+          </a:bodyPr>
+          <a:lstStyle/>
+          <a:p>
+            <a:pPr>
+              <a:defRPr sz="1800">
+                <a:solidFill>
+                  <a:srgbClr val="FFFFFF"/>
+                </a:solidFill>
+              </a:defRPr>
+            </a:pPr>
+            <a:r>
+              <a:t>Upload prospect company info</a:t>
+            </a:r>
+          </a:p>
+        </p:txBody>
+      </p:sp>
+      <p:sp>
+        <p:nvSpPr>
+          <p:cNvPr id="29" name="TextBox 28"/>
+          <p:cNvSpPr txBox="1"/>
+          <p:nvPr/>
+        </p:nvSpPr>
+        <p:spPr>
+          <a:xfrm>
+            <a:off x="1371600" y="3383280"/>
+            <a:ext cx="457200" cy="457200"/>
           </a:xfrm>
           <a:prstGeom prst="rect">
             <a:avLst/>
@@ -46757,29 +46563,29 @@
           </a:bodyPr>
           <a:lstStyle/>
           <a:p>
-            <a:pPr algn="ctr">
-              <a:defRPr sz="1800" b="1">
-                <a:solidFill>
-                  <a:srgbClr val="FFFFFF"/>
-                </a:solidFill>
-              </a:defRPr>
-            </a:pPr>
-            <a:r>
-              <a:t>Polish &amp; Present</a:t>
-            </a:r>
-          </a:p>
-        </p:txBody>
-      </p:sp>
-      <p:sp>
-        <p:nvSpPr>
-          <p:cNvPr id="18" name="TextBox 17"/>
-          <p:cNvSpPr txBox="1"/>
-          <p:nvPr/>
-        </p:nvSpPr>
-        <p:spPr>
-          <a:xfrm>
-            <a:off x="8138160" y="3749039"/>
-            <a:ext cx="3200400" cy="1645920"/>
+            <a:pPr>
+              <a:defRPr sz="2000" b="1">
+                <a:solidFill>
+                  <a:srgbClr val="00D4AA"/>
+                </a:solidFill>
+              </a:defRPr>
+            </a:pPr>
+            <a:r>
+              <a:t>2</a:t>
+            </a:r>
+          </a:p>
+        </p:txBody>
+      </p:sp>
+      <p:sp>
+        <p:nvSpPr>
+          <p:cNvPr id="30" name="TextBox 29"/>
+          <p:cNvSpPr txBox="1"/>
+          <p:nvPr/>
+        </p:nvSpPr>
+        <p:spPr>
+          <a:xfrm>
+            <a:off x="1828800" y="3383280"/>
+            <a:ext cx="8991295" cy="548640"/>
           </a:xfrm>
           <a:prstGeom prst="rect">
             <a:avLst/>
@@ -46792,41 +46598,29 @@
           </a:bodyPr>
           <a:lstStyle/>
           <a:p>
-            <a:pPr algn="ctr">
-              <a:defRPr sz="1300">
-                <a:solidFill>
-                  <a:srgbClr val="D1D5DB"/>
-                </a:solidFill>
-              </a:defRPr>
-            </a:pPr>
-            <a:r>
-              <a:t>Create a polished</a:t>
-            </a:r>
-            <a:br/>
-            <a:r>
-              <a:t>executive briefing artifact.</a:t>
-            </a:r>
-            <a:br/>
-            <a:r>
-              <a:t>Add charts, format for</a:t>
-            </a:r>
-            <a:br/>
-            <a:r>
-              <a:t>your VP. Share with class.</a:t>
-            </a:r>
-          </a:p>
-        </p:txBody>
-      </p:sp>
-      <p:sp>
-        <p:nvSpPr>
-          <p:cNvPr id="19" name="TextBox 18"/>
-          <p:cNvSpPr txBox="1"/>
-          <p:nvPr/>
-        </p:nvSpPr>
-        <p:spPr>
-          <a:xfrm>
-            <a:off x="8138160" y="5303520"/>
-            <a:ext cx="3200400" cy="365760"/>
+            <a:pPr>
+              <a:defRPr sz="1800">
+                <a:solidFill>
+                  <a:srgbClr val="FFFFFF"/>
+                </a:solidFill>
+              </a:defRPr>
+            </a:pPr>
+            <a:r>
+              <a:t>Ask: 'What are their pain points?'</a:t>
+            </a:r>
+          </a:p>
+        </p:txBody>
+      </p:sp>
+      <p:sp>
+        <p:nvSpPr>
+          <p:cNvPr id="31" name="TextBox 30"/>
+          <p:cNvSpPr txBox="1"/>
+          <p:nvPr/>
+        </p:nvSpPr>
+        <p:spPr>
+          <a:xfrm>
+            <a:off x="1371600" y="4023360"/>
+            <a:ext cx="457200" cy="457200"/>
           </a:xfrm>
           <a:prstGeom prst="rect">
             <a:avLst/>
@@ -46839,15 +46633,190 @@
           </a:bodyPr>
           <a:lstStyle/>
           <a:p>
-            <a:pPr algn="ctr">
-              <a:defRPr sz="1200" i="1">
-                <a:solidFill>
-                  <a:srgbClr val="14B8A6"/>
-                </a:solidFill>
-              </a:defRPr>
-            </a:pPr>
-            <a:r>
-              <a:t>10 min</a:t>
+            <a:pPr>
+              <a:defRPr sz="2000" b="1">
+                <a:solidFill>
+                  <a:srgbClr val="00D4AA"/>
+                </a:solidFill>
+              </a:defRPr>
+            </a:pPr>
+            <a:r>
+              <a:t>3</a:t>
+            </a:r>
+          </a:p>
+        </p:txBody>
+      </p:sp>
+      <p:sp>
+        <p:nvSpPr>
+          <p:cNvPr id="32" name="TextBox 31"/>
+          <p:cNvSpPr txBox="1"/>
+          <p:nvPr/>
+        </p:nvSpPr>
+        <p:spPr>
+          <a:xfrm>
+            <a:off x="1828800" y="4023360"/>
+            <a:ext cx="8991295" cy="548640"/>
+          </a:xfrm>
+          <a:prstGeom prst="rect">
+            <a:avLst/>
+          </a:prstGeom>
+          <a:noFill/>
+        </p:spPr>
+        <p:txBody>
+          <a:bodyPr wrap="square">
+            <a:spAutoFit/>
+          </a:bodyPr>
+          <a:lstStyle/>
+          <a:p>
+            <a:pPr>
+              <a:defRPr sz="1800">
+                <a:solidFill>
+                  <a:srgbClr val="FFFFFF"/>
+                </a:solidFill>
+              </a:defRPr>
+            </a:pPr>
+            <a:r>
+              <a:t>Request: 'Draft personalized pitch'</a:t>
+            </a:r>
+          </a:p>
+        </p:txBody>
+      </p:sp>
+      <p:sp>
+        <p:nvSpPr>
+          <p:cNvPr id="33" name="TextBox 32"/>
+          <p:cNvSpPr txBox="1"/>
+          <p:nvPr/>
+        </p:nvSpPr>
+        <p:spPr>
+          <a:xfrm>
+            <a:off x="1371600" y="4663440"/>
+            <a:ext cx="457200" cy="457200"/>
+          </a:xfrm>
+          <a:prstGeom prst="rect">
+            <a:avLst/>
+          </a:prstGeom>
+          <a:noFill/>
+        </p:spPr>
+        <p:txBody>
+          <a:bodyPr wrap="none">
+            <a:spAutoFit/>
+          </a:bodyPr>
+          <a:lstStyle/>
+          <a:p>
+            <a:pPr>
+              <a:defRPr sz="2000" b="1">
+                <a:solidFill>
+                  <a:srgbClr val="00D4AA"/>
+                </a:solidFill>
+              </a:defRPr>
+            </a:pPr>
+            <a:r>
+              <a:t>4</a:t>
+            </a:r>
+          </a:p>
+        </p:txBody>
+      </p:sp>
+      <p:sp>
+        <p:nvSpPr>
+          <p:cNvPr id="34" name="TextBox 33"/>
+          <p:cNvSpPr txBox="1"/>
+          <p:nvPr/>
+        </p:nvSpPr>
+        <p:spPr>
+          <a:xfrm>
+            <a:off x="1828800" y="4663440"/>
+            <a:ext cx="8991295" cy="548640"/>
+          </a:xfrm>
+          <a:prstGeom prst="rect">
+            <a:avLst/>
+          </a:prstGeom>
+          <a:noFill/>
+        </p:spPr>
+        <p:txBody>
+          <a:bodyPr wrap="square">
+            <a:spAutoFit/>
+          </a:bodyPr>
+          <a:lstStyle/>
+          <a:p>
+            <a:pPr>
+              <a:defRPr sz="1800">
+                <a:solidFill>
+                  <a:srgbClr val="FFFFFF"/>
+                </a:solidFill>
+              </a:defRPr>
+            </a:pPr>
+            <a:r>
+              <a:t>Create: 'Email sequence for follow-up'</a:t>
+            </a:r>
+          </a:p>
+        </p:txBody>
+      </p:sp>
+      <p:sp>
+        <p:nvSpPr>
+          <p:cNvPr id="35" name="TextBox 34"/>
+          <p:cNvSpPr txBox="1"/>
+          <p:nvPr/>
+        </p:nvSpPr>
+        <p:spPr>
+          <a:xfrm>
+            <a:off x="1371600" y="5303520"/>
+            <a:ext cx="457200" cy="457200"/>
+          </a:xfrm>
+          <a:prstGeom prst="rect">
+            <a:avLst/>
+          </a:prstGeom>
+          <a:noFill/>
+        </p:spPr>
+        <p:txBody>
+          <a:bodyPr wrap="none">
+            <a:spAutoFit/>
+          </a:bodyPr>
+          <a:lstStyle/>
+          <a:p>
+            <a:pPr>
+              <a:defRPr sz="2000" b="1">
+                <a:solidFill>
+                  <a:srgbClr val="00D4AA"/>
+                </a:solidFill>
+              </a:defRPr>
+            </a:pPr>
+            <a:r>
+              <a:t>5</a:t>
+            </a:r>
+          </a:p>
+        </p:txBody>
+      </p:sp>
+      <p:sp>
+        <p:nvSpPr>
+          <p:cNvPr id="36" name="TextBox 35"/>
+          <p:cNvSpPr txBox="1"/>
+          <p:nvPr/>
+        </p:nvSpPr>
+        <p:spPr>
+          <a:xfrm>
+            <a:off x="1828800" y="5303520"/>
+            <a:ext cx="8991295" cy="548640"/>
+          </a:xfrm>
+          <a:prstGeom prst="rect">
+            <a:avLst/>
+          </a:prstGeom>
+          <a:noFill/>
+        </p:spPr>
+        <p:txBody>
+          <a:bodyPr wrap="square">
+            <a:spAutoFit/>
+          </a:bodyPr>
+          <a:lstStyle/>
+          <a:p>
+            <a:pPr>
+              <a:defRPr sz="1800">
+                <a:solidFill>
+                  <a:srgbClr val="FFFFFF"/>
+                </a:solidFill>
+              </a:defRPr>
+            </a:pPr>
+            <a:r>
+              <a:t>Generate: 'Objection handling script'</a:t>
             </a:r>
           </a:p>
         </p:txBody>
@@ -46887,20 +46856,20 @@
       </p:grpSpPr>
       <p:sp>
         <p:nvSpPr>
-          <p:cNvPr id="2" name="Rectangle 1"/>
+          <p:cNvPr id="2" name="Rounded Rectangle 1"/>
           <p:cNvSpPr/>
           <p:nvPr/>
         </p:nvSpPr>
         <p:spPr>
           <a:xfrm>
-            <a:off x="0" y="1828800"/>
-            <a:ext cx="137160" cy="3200400"/>
-          </a:xfrm>
-          <a:prstGeom prst="rect">
+            <a:off x="457200" y="365760"/>
+            <a:ext cx="1097280" cy="457200"/>
+          </a:xfrm>
+          <a:prstGeom prst="roundRect">
             <a:avLst/>
           </a:prstGeom>
           <a:solidFill>
-            <a:srgbClr val="00D4AA"/>
+            <a:srgbClr val="14B8A6"/>
           </a:solidFill>
           <a:ln>
             <a:noFill/>
@@ -46924,6 +46893,130 @@
           <a:bodyPr rtlCol="0" anchor="ctr"/>
           <a:lstStyle/>
           <a:p>
+            <a:pPr algn="ctr">
+              <a:defRPr sz="1400" b="1">
+                <a:solidFill>
+                  <a:srgbClr val="FFFFFF"/>
+                </a:solidFill>
+              </a:defRPr>
+            </a:pPr>
+            <a:r>
+              <a:t>LAB 4</a:t>
+            </a:r>
+          </a:p>
+        </p:txBody>
+      </p:sp>
+      <p:sp>
+        <p:nvSpPr>
+          <p:cNvPr id="3" name="TextBox 2"/>
+          <p:cNvSpPr txBox="1"/>
+          <p:nvPr/>
+        </p:nvSpPr>
+        <p:spPr>
+          <a:xfrm>
+            <a:off x="457200" y="1005840"/>
+            <a:ext cx="11247120" cy="731520"/>
+          </a:xfrm>
+          <a:prstGeom prst="rect">
+            <a:avLst/>
+          </a:prstGeom>
+          <a:noFill/>
+        </p:spPr>
+        <p:txBody>
+          <a:bodyPr wrap="none">
+            <a:spAutoFit/>
+          </a:bodyPr>
+          <a:lstStyle/>
+          <a:p>
+            <a:pPr>
+              <a:defRPr sz="3600" b="1">
+                <a:solidFill>
+                  <a:srgbClr val="FFFFFF"/>
+                </a:solidFill>
+              </a:defRPr>
+            </a:pPr>
+            <a:r>
+              <a:t>Executive Briefing Challenge</a:t>
+            </a:r>
+          </a:p>
+        </p:txBody>
+      </p:sp>
+      <p:sp>
+        <p:nvSpPr>
+          <p:cNvPr id="4" name="TextBox 3"/>
+          <p:cNvSpPr txBox="1"/>
+          <p:nvPr/>
+        </p:nvSpPr>
+        <p:spPr>
+          <a:xfrm>
+            <a:off x="457200" y="1737360"/>
+            <a:ext cx="11247120" cy="457200"/>
+          </a:xfrm>
+          <a:prstGeom prst="rect">
+            <a:avLst/>
+          </a:prstGeom>
+          <a:noFill/>
+        </p:spPr>
+        <p:txBody>
+          <a:bodyPr wrap="none">
+            <a:spAutoFit/>
+          </a:bodyPr>
+          <a:lstStyle/>
+          <a:p>
+            <a:pPr>
+              <a:defRPr sz="1800" i="1">
+                <a:solidFill>
+                  <a:srgbClr val="9CA3AF"/>
+                </a:solidFill>
+              </a:defRPr>
+            </a:pPr>
+            <a:r>
+              <a:t>30 minutes  •  Tie it all together  •  Real deliverable you'll use Monday</a:t>
+            </a:r>
+          </a:p>
+        </p:txBody>
+      </p:sp>
+      <p:sp>
+        <p:nvSpPr>
+          <p:cNvPr id="5" name="Rounded Rectangle 4"/>
+          <p:cNvSpPr/>
+          <p:nvPr/>
+        </p:nvSpPr>
+        <p:spPr>
+          <a:xfrm>
+            <a:off x="457200" y="2468880"/>
+            <a:ext cx="3566160" cy="3200400"/>
+          </a:xfrm>
+          <a:prstGeom prst="roundRect">
+            <a:avLst/>
+          </a:prstGeom>
+          <a:solidFill>
+            <a:srgbClr val="24354A"/>
+          </a:solidFill>
+          <a:ln w="19050">
+            <a:solidFill>
+              <a:srgbClr val="14B8A6"/>
+            </a:solidFill>
+          </a:ln>
+        </p:spPr>
+        <p:style>
+          <a:lnRef idx="1">
+            <a:schemeClr val="accent1"/>
+          </a:lnRef>
+          <a:fillRef idx="3">
+            <a:schemeClr val="accent1"/>
+          </a:fillRef>
+          <a:effectRef idx="2">
+            <a:schemeClr val="accent1"/>
+          </a:effectRef>
+          <a:fontRef idx="minor">
+            <a:schemeClr val="lt1"/>
+          </a:fontRef>
+        </p:style>
+        <p:txBody>
+          <a:bodyPr rtlCol="0" anchor="ctr"/>
+          <a:lstStyle/>
+          <a:p>
             <a:pPr algn="ctr"/>
             <a:endParaRPr/>
           </a:p>
@@ -46931,14 +47024,80 @@
       </p:sp>
       <p:sp>
         <p:nvSpPr>
-          <p:cNvPr id="3" name="TextBox 2"/>
-          <p:cNvSpPr txBox="1"/>
-          <p:nvPr/>
-        </p:nvSpPr>
-        <p:spPr>
-          <a:xfrm>
-            <a:off x="457200" y="2286000"/>
-            <a:ext cx="11277295" cy="1371600"/>
+          <p:cNvPr id="6" name="TextBox 5"/>
+          <p:cNvSpPr txBox="1"/>
+          <p:nvPr/>
+        </p:nvSpPr>
+        <p:spPr>
+          <a:xfrm>
+            <a:off x="640080" y="2651760"/>
+            <a:ext cx="3200400" cy="548640"/>
+          </a:xfrm>
+          <a:prstGeom prst="rect">
+            <a:avLst/>
+          </a:prstGeom>
+          <a:noFill/>
+        </p:spPr>
+        <p:txBody>
+          <a:bodyPr wrap="none">
+            <a:spAutoFit/>
+          </a:bodyPr>
+          <a:lstStyle/>
+          <a:p>
+            <a:pPr algn="ctr">
+              <a:defRPr sz="3000"/>
+            </a:pPr>
+            <a:r>
+              <a:t>🗂️</a:t>
+            </a:r>
+          </a:p>
+        </p:txBody>
+      </p:sp>
+      <p:sp>
+        <p:nvSpPr>
+          <p:cNvPr id="7" name="TextBox 6"/>
+          <p:cNvSpPr txBox="1"/>
+          <p:nvPr/>
+        </p:nvSpPr>
+        <p:spPr>
+          <a:xfrm>
+            <a:off x="640080" y="3200400"/>
+            <a:ext cx="3200400" cy="457200"/>
+          </a:xfrm>
+          <a:prstGeom prst="rect">
+            <a:avLst/>
+          </a:prstGeom>
+          <a:noFill/>
+        </p:spPr>
+        <p:txBody>
+          <a:bodyPr wrap="none">
+            <a:spAutoFit/>
+          </a:bodyPr>
+          <a:lstStyle/>
+          <a:p>
+            <a:pPr algn="ctr">
+              <a:defRPr sz="1800" b="1">
+                <a:solidFill>
+                  <a:srgbClr val="FFFFFF"/>
+                </a:solidFill>
+              </a:defRPr>
+            </a:pPr>
+            <a:r>
+              <a:t>Set Up</a:t>
+            </a:r>
+          </a:p>
+        </p:txBody>
+      </p:sp>
+      <p:sp>
+        <p:nvSpPr>
+          <p:cNvPr id="8" name="TextBox 7"/>
+          <p:cNvSpPr txBox="1"/>
+          <p:nvPr/>
+        </p:nvSpPr>
+        <p:spPr>
+          <a:xfrm>
+            <a:off x="640080" y="3749039"/>
+            <a:ext cx="3200400" cy="1645920"/>
           </a:xfrm>
           <a:prstGeom prst="rect">
             <a:avLst/>
@@ -46951,15 +47110,450 @@
           </a:bodyPr>
           <a:lstStyle/>
           <a:p>
-            <a:pPr>
-              <a:defRPr sz="5600" b="1">
+            <a:pPr algn="ctr">
+              <a:defRPr sz="1300">
+                <a:solidFill>
+                  <a:srgbClr val="D1D5DB"/>
+                </a:solidFill>
+              </a:defRPr>
+            </a:pPr>
+            <a:r>
+              <a:t>Create a Project called</a:t>
+            </a:r>
+            <a:br/>
+            <a:r>
+              <a:t>'Executive Briefing'.</a:t>
+            </a:r>
+            <a:br/>
+            <a:r>
+              <a:t>Add custom instructions.</a:t>
+            </a:r>
+            <a:br/>
+            <a:r>
+              <a:t>Upload all provided files.</a:t>
+            </a:r>
+          </a:p>
+        </p:txBody>
+      </p:sp>
+      <p:sp>
+        <p:nvSpPr>
+          <p:cNvPr id="9" name="TextBox 8"/>
+          <p:cNvSpPr txBox="1"/>
+          <p:nvPr/>
+        </p:nvSpPr>
+        <p:spPr>
+          <a:xfrm>
+            <a:off x="640080" y="5303520"/>
+            <a:ext cx="3200400" cy="365760"/>
+          </a:xfrm>
+          <a:prstGeom prst="rect">
+            <a:avLst/>
+          </a:prstGeom>
+          <a:noFill/>
+        </p:spPr>
+        <p:txBody>
+          <a:bodyPr wrap="none">
+            <a:spAutoFit/>
+          </a:bodyPr>
+          <a:lstStyle/>
+          <a:p>
+            <a:pPr algn="ctr">
+              <a:defRPr sz="1200" i="1">
+                <a:solidFill>
+                  <a:srgbClr val="14B8A6"/>
+                </a:solidFill>
+              </a:defRPr>
+            </a:pPr>
+            <a:r>
+              <a:t>5 min</a:t>
+            </a:r>
+          </a:p>
+        </p:txBody>
+      </p:sp>
+      <p:sp>
+        <p:nvSpPr>
+          <p:cNvPr id="10" name="Rounded Rectangle 9"/>
+          <p:cNvSpPr/>
+          <p:nvPr/>
+        </p:nvSpPr>
+        <p:spPr>
+          <a:xfrm>
+            <a:off x="4206240" y="2468880"/>
+            <a:ext cx="3566160" cy="3200400"/>
+          </a:xfrm>
+          <a:prstGeom prst="roundRect">
+            <a:avLst/>
+          </a:prstGeom>
+          <a:solidFill>
+            <a:srgbClr val="24354A"/>
+          </a:solidFill>
+          <a:ln w="19050">
+            <a:solidFill>
+              <a:srgbClr val="14B8A6"/>
+            </a:solidFill>
+          </a:ln>
+        </p:spPr>
+        <p:style>
+          <a:lnRef idx="1">
+            <a:schemeClr val="accent1"/>
+          </a:lnRef>
+          <a:fillRef idx="3">
+            <a:schemeClr val="accent1"/>
+          </a:fillRef>
+          <a:effectRef idx="2">
+            <a:schemeClr val="accent1"/>
+          </a:effectRef>
+          <a:fontRef idx="minor">
+            <a:schemeClr val="lt1"/>
+          </a:fontRef>
+        </p:style>
+        <p:txBody>
+          <a:bodyPr rtlCol="0" anchor="ctr"/>
+          <a:lstStyle/>
+          <a:p>
+            <a:pPr algn="ctr"/>
+            <a:endParaRPr/>
+          </a:p>
+        </p:txBody>
+      </p:sp>
+      <p:sp>
+        <p:nvSpPr>
+          <p:cNvPr id="11" name="TextBox 10"/>
+          <p:cNvSpPr txBox="1"/>
+          <p:nvPr/>
+        </p:nvSpPr>
+        <p:spPr>
+          <a:xfrm>
+            <a:off x="4389120" y="2651760"/>
+            <a:ext cx="3200400" cy="548640"/>
+          </a:xfrm>
+          <a:prstGeom prst="rect">
+            <a:avLst/>
+          </a:prstGeom>
+          <a:noFill/>
+        </p:spPr>
+        <p:txBody>
+          <a:bodyPr wrap="none">
+            <a:spAutoFit/>
+          </a:bodyPr>
+          <a:lstStyle/>
+          <a:p>
+            <a:pPr algn="ctr">
+              <a:defRPr sz="3000"/>
+            </a:pPr>
+            <a:r>
+              <a:t>🔍</a:t>
+            </a:r>
+          </a:p>
+        </p:txBody>
+      </p:sp>
+      <p:sp>
+        <p:nvSpPr>
+          <p:cNvPr id="12" name="TextBox 11"/>
+          <p:cNvSpPr txBox="1"/>
+          <p:nvPr/>
+        </p:nvSpPr>
+        <p:spPr>
+          <a:xfrm>
+            <a:off x="4389120" y="3200400"/>
+            <a:ext cx="3200400" cy="457200"/>
+          </a:xfrm>
+          <a:prstGeom prst="rect">
+            <a:avLst/>
+          </a:prstGeom>
+          <a:noFill/>
+        </p:spPr>
+        <p:txBody>
+          <a:bodyPr wrap="none">
+            <a:spAutoFit/>
+          </a:bodyPr>
+          <a:lstStyle/>
+          <a:p>
+            <a:pPr algn="ctr">
+              <a:defRPr sz="1800" b="1">
                 <a:solidFill>
                   <a:srgbClr val="FFFFFF"/>
                 </a:solidFill>
               </a:defRPr>
             </a:pPr>
             <a:r>
-              <a:t>Wrap-up &amp; Q&amp;A</a:t>
+              <a:t>Analyze &amp; Build</a:t>
+            </a:r>
+          </a:p>
+        </p:txBody>
+      </p:sp>
+      <p:sp>
+        <p:nvSpPr>
+          <p:cNvPr id="13" name="TextBox 12"/>
+          <p:cNvSpPr txBox="1"/>
+          <p:nvPr/>
+        </p:nvSpPr>
+        <p:spPr>
+          <a:xfrm>
+            <a:off x="4389120" y="3749039"/>
+            <a:ext cx="3200400" cy="1645920"/>
+          </a:xfrm>
+          <a:prstGeom prst="rect">
+            <a:avLst/>
+          </a:prstGeom>
+          <a:noFill/>
+        </p:spPr>
+        <p:txBody>
+          <a:bodyPr wrap="square">
+            <a:spAutoFit/>
+          </a:bodyPr>
+          <a:lstStyle/>
+          <a:p>
+            <a:pPr algn="ctr">
+              <a:defRPr sz="1300">
+                <a:solidFill>
+                  <a:srgbClr val="D1D5DB"/>
+                </a:solidFill>
+              </a:defRPr>
+            </a:pPr>
+            <a:r>
+              <a:t>Use prompting skills to</a:t>
+            </a:r>
+            <a:br/>
+            <a:r>
+              <a:t>extract insights from</a:t>
+            </a:r>
+            <a:br/>
+            <a:r>
+              <a:t>multiple file types.</a:t>
+            </a:r>
+            <a:br/>
+            <a:r>
+              <a:t>Iterate until output is sharp.</a:t>
+            </a:r>
+          </a:p>
+        </p:txBody>
+      </p:sp>
+      <p:sp>
+        <p:nvSpPr>
+          <p:cNvPr id="14" name="TextBox 13"/>
+          <p:cNvSpPr txBox="1"/>
+          <p:nvPr/>
+        </p:nvSpPr>
+        <p:spPr>
+          <a:xfrm>
+            <a:off x="4389120" y="5303520"/>
+            <a:ext cx="3200400" cy="365760"/>
+          </a:xfrm>
+          <a:prstGeom prst="rect">
+            <a:avLst/>
+          </a:prstGeom>
+          <a:noFill/>
+        </p:spPr>
+        <p:txBody>
+          <a:bodyPr wrap="none">
+            <a:spAutoFit/>
+          </a:bodyPr>
+          <a:lstStyle/>
+          <a:p>
+            <a:pPr algn="ctr">
+              <a:defRPr sz="1200" i="1">
+                <a:solidFill>
+                  <a:srgbClr val="14B8A6"/>
+                </a:solidFill>
+              </a:defRPr>
+            </a:pPr>
+            <a:r>
+              <a:t>15 min</a:t>
+            </a:r>
+          </a:p>
+        </p:txBody>
+      </p:sp>
+      <p:sp>
+        <p:nvSpPr>
+          <p:cNvPr id="15" name="Rounded Rectangle 14"/>
+          <p:cNvSpPr/>
+          <p:nvPr/>
+        </p:nvSpPr>
+        <p:spPr>
+          <a:xfrm>
+            <a:off x="7955280" y="2468880"/>
+            <a:ext cx="3566160" cy="3200400"/>
+          </a:xfrm>
+          <a:prstGeom prst="roundRect">
+            <a:avLst/>
+          </a:prstGeom>
+          <a:solidFill>
+            <a:srgbClr val="24354A"/>
+          </a:solidFill>
+          <a:ln w="19050">
+            <a:solidFill>
+              <a:srgbClr val="14B8A6"/>
+            </a:solidFill>
+          </a:ln>
+        </p:spPr>
+        <p:style>
+          <a:lnRef idx="1">
+            <a:schemeClr val="accent1"/>
+          </a:lnRef>
+          <a:fillRef idx="3">
+            <a:schemeClr val="accent1"/>
+          </a:fillRef>
+          <a:effectRef idx="2">
+            <a:schemeClr val="accent1"/>
+          </a:effectRef>
+          <a:fontRef idx="minor">
+            <a:schemeClr val="lt1"/>
+          </a:fontRef>
+        </p:style>
+        <p:txBody>
+          <a:bodyPr rtlCol="0" anchor="ctr"/>
+          <a:lstStyle/>
+          <a:p>
+            <a:pPr algn="ctr"/>
+            <a:endParaRPr/>
+          </a:p>
+        </p:txBody>
+      </p:sp>
+      <p:sp>
+        <p:nvSpPr>
+          <p:cNvPr id="16" name="TextBox 15"/>
+          <p:cNvSpPr txBox="1"/>
+          <p:nvPr/>
+        </p:nvSpPr>
+        <p:spPr>
+          <a:xfrm>
+            <a:off x="8138160" y="2651760"/>
+            <a:ext cx="3200400" cy="548640"/>
+          </a:xfrm>
+          <a:prstGeom prst="rect">
+            <a:avLst/>
+          </a:prstGeom>
+          <a:noFill/>
+        </p:spPr>
+        <p:txBody>
+          <a:bodyPr wrap="none">
+            <a:spAutoFit/>
+          </a:bodyPr>
+          <a:lstStyle/>
+          <a:p>
+            <a:pPr algn="ctr">
+              <a:defRPr sz="3000"/>
+            </a:pPr>
+            <a:r>
+              <a:t>✨</a:t>
+            </a:r>
+          </a:p>
+        </p:txBody>
+      </p:sp>
+      <p:sp>
+        <p:nvSpPr>
+          <p:cNvPr id="17" name="TextBox 16"/>
+          <p:cNvSpPr txBox="1"/>
+          <p:nvPr/>
+        </p:nvSpPr>
+        <p:spPr>
+          <a:xfrm>
+            <a:off x="8138160" y="3200400"/>
+            <a:ext cx="3200400" cy="457200"/>
+          </a:xfrm>
+          <a:prstGeom prst="rect">
+            <a:avLst/>
+          </a:prstGeom>
+          <a:noFill/>
+        </p:spPr>
+        <p:txBody>
+          <a:bodyPr wrap="none">
+            <a:spAutoFit/>
+          </a:bodyPr>
+          <a:lstStyle/>
+          <a:p>
+            <a:pPr algn="ctr">
+              <a:defRPr sz="1800" b="1">
+                <a:solidFill>
+                  <a:srgbClr val="FFFFFF"/>
+                </a:solidFill>
+              </a:defRPr>
+            </a:pPr>
+            <a:r>
+              <a:t>Polish &amp; Present</a:t>
+            </a:r>
+          </a:p>
+        </p:txBody>
+      </p:sp>
+      <p:sp>
+        <p:nvSpPr>
+          <p:cNvPr id="18" name="TextBox 17"/>
+          <p:cNvSpPr txBox="1"/>
+          <p:nvPr/>
+        </p:nvSpPr>
+        <p:spPr>
+          <a:xfrm>
+            <a:off x="8138160" y="3749039"/>
+            <a:ext cx="3200400" cy="1645920"/>
+          </a:xfrm>
+          <a:prstGeom prst="rect">
+            <a:avLst/>
+          </a:prstGeom>
+          <a:noFill/>
+        </p:spPr>
+        <p:txBody>
+          <a:bodyPr wrap="square">
+            <a:spAutoFit/>
+          </a:bodyPr>
+          <a:lstStyle/>
+          <a:p>
+            <a:pPr algn="ctr">
+              <a:defRPr sz="1300">
+                <a:solidFill>
+                  <a:srgbClr val="D1D5DB"/>
+                </a:solidFill>
+              </a:defRPr>
+            </a:pPr>
+            <a:r>
+              <a:t>Create a polished</a:t>
+            </a:r>
+            <a:br/>
+            <a:r>
+              <a:t>executive briefing artifact.</a:t>
+            </a:r>
+            <a:br/>
+            <a:r>
+              <a:t>Add charts, format for</a:t>
+            </a:r>
+            <a:br/>
+            <a:r>
+              <a:t>your VP. Share with class.</a:t>
+            </a:r>
+          </a:p>
+        </p:txBody>
+      </p:sp>
+      <p:sp>
+        <p:nvSpPr>
+          <p:cNvPr id="19" name="TextBox 18"/>
+          <p:cNvSpPr txBox="1"/>
+          <p:nvPr/>
+        </p:nvSpPr>
+        <p:spPr>
+          <a:xfrm>
+            <a:off x="8138160" y="5303520"/>
+            <a:ext cx="3200400" cy="365760"/>
+          </a:xfrm>
+          <a:prstGeom prst="rect">
+            <a:avLst/>
+          </a:prstGeom>
+          <a:noFill/>
+        </p:spPr>
+        <p:txBody>
+          <a:bodyPr wrap="none">
+            <a:spAutoFit/>
+          </a:bodyPr>
+          <a:lstStyle/>
+          <a:p>
+            <a:pPr algn="ctr">
+              <a:defRPr sz="1200" i="1">
+                <a:solidFill>
+                  <a:srgbClr val="14B8A6"/>
+                </a:solidFill>
+              </a:defRPr>
+            </a:pPr>
+            <a:r>
+              <a:t>10 min</a:t>
             </a:r>
           </a:p>
         </p:txBody>
@@ -47146,49 +47740,14 @@
       </p:grpSpPr>
       <p:sp>
         <p:nvSpPr>
-          <p:cNvPr id="2" name="TextBox 1"/>
-          <p:cNvSpPr txBox="1"/>
-          <p:nvPr/>
-        </p:nvSpPr>
-        <p:spPr>
-          <a:xfrm>
-            <a:off x="457200" y="457200"/>
-            <a:ext cx="11277295" cy="731520"/>
-          </a:xfrm>
-          <a:prstGeom prst="rect">
-            <a:avLst/>
-          </a:prstGeom>
-          <a:noFill/>
-        </p:spPr>
-        <p:txBody>
-          <a:bodyPr wrap="none">
-            <a:spAutoFit/>
-          </a:bodyPr>
-          <a:lstStyle/>
-          <a:p>
-            <a:pPr algn="ctr">
-              <a:defRPr sz="3600" b="1">
-                <a:solidFill>
-                  <a:srgbClr val="FFFFFF"/>
-                </a:solidFill>
-              </a:defRPr>
-            </a:pPr>
-            <a:r>
-              <a:t>What We Covered Today</a:t>
-            </a:r>
-          </a:p>
-        </p:txBody>
-      </p:sp>
-      <p:sp>
-        <p:nvSpPr>
-          <p:cNvPr id="3" name="Rectangle 2"/>
+          <p:cNvPr id="2" name="Rectangle 1"/>
           <p:cNvSpPr/>
           <p:nvPr/>
         </p:nvSpPr>
         <p:spPr>
           <a:xfrm>
-            <a:off x="6077559" y="1371600"/>
-            <a:ext cx="36576" cy="4572000"/>
+            <a:off x="0" y="1828800"/>
+            <a:ext cx="137160" cy="3200400"/>
           </a:xfrm>
           <a:prstGeom prst="rect">
             <a:avLst/>
@@ -47225,49 +47784,14 @@
       </p:sp>
       <p:sp>
         <p:nvSpPr>
-          <p:cNvPr id="4" name="TextBox 3"/>
-          <p:cNvSpPr txBox="1"/>
-          <p:nvPr/>
-        </p:nvSpPr>
-        <p:spPr>
-          <a:xfrm>
-            <a:off x="457200" y="1463040"/>
-            <a:ext cx="5364327" cy="731520"/>
-          </a:xfrm>
-          <a:prstGeom prst="rect">
-            <a:avLst/>
-          </a:prstGeom>
-          <a:noFill/>
-        </p:spPr>
-        <p:txBody>
-          <a:bodyPr wrap="none">
-            <a:spAutoFit/>
-          </a:bodyPr>
-          <a:lstStyle/>
-          <a:p>
-            <a:pPr algn="ctr">
-              <a:defRPr sz="2800" b="1">
-                <a:solidFill>
-                  <a:srgbClr val="00D4AA"/>
-                </a:solidFill>
-              </a:defRPr>
-            </a:pPr>
-            <a:r>
-              <a:t>Morning</a:t>
-            </a:r>
-          </a:p>
-        </p:txBody>
-      </p:sp>
-      <p:sp>
-        <p:nvSpPr>
-          <p:cNvPr id="5" name="TextBox 4"/>
+          <p:cNvPr id="3" name="TextBox 2"/>
           <p:cNvSpPr txBox="1"/>
           <p:nvPr/>
         </p:nvSpPr>
         <p:spPr>
           <a:xfrm>
             <a:off x="457200" y="2286000"/>
-            <a:ext cx="5364327" cy="3657600"/>
+            <a:ext cx="11277295" cy="1371600"/>
           </a:xfrm>
           <a:prstGeom prst="rect">
             <a:avLst/>
@@ -47281,150 +47805,14 @@
           <a:lstStyle/>
           <a:p>
             <a:pPr>
-              <a:spcAft>
-                <a:spcPts val="1200"/>
-              </a:spcAft>
-              <a:defRPr sz="1800">
+              <a:defRPr sz="5600" b="1">
                 <a:solidFill>
                   <a:srgbClr val="FFFFFF"/>
                 </a:solidFill>
               </a:defRPr>
             </a:pPr>
             <a:r>
-              <a:t>  Claude model family</a:t>
-            </a:r>
-          </a:p>
-          <a:p>
-            <a:pPr>
-              <a:spcAft>
-                <a:spcPts val="1200"/>
-              </a:spcAft>
-              <a:defRPr sz="1800">
-                <a:solidFill>
-                  <a:srgbClr val="FFFFFF"/>
-                </a:solidFill>
-              </a:defRPr>
-            </a:pPr>
-            <a:r>
-              <a:t>  Claude.ai interface and Projects</a:t>
-            </a:r>
-          </a:p>
-          <a:p>
-            <a:pPr>
-              <a:spcAft>
-                <a:spcPts val="1200"/>
-              </a:spcAft>
-              <a:defRPr sz="1800">
-                <a:solidFill>
-                  <a:srgbClr val="FFFFFF"/>
-                </a:solidFill>
-              </a:defRPr>
-            </a:pPr>
-            <a:r>
-              <a:t>  Prompt engineering (GOLDEN framework)</a:t>
-            </a:r>
-          </a:p>
-        </p:txBody>
-      </p:sp>
-      <p:sp>
-        <p:nvSpPr>
-          <p:cNvPr id="6" name="TextBox 5"/>
-          <p:cNvSpPr txBox="1"/>
-          <p:nvPr/>
-        </p:nvSpPr>
-        <p:spPr>
-          <a:xfrm>
-            <a:off x="6370167" y="1463040"/>
-            <a:ext cx="5364327" cy="731520"/>
-          </a:xfrm>
-          <a:prstGeom prst="rect">
-            <a:avLst/>
-          </a:prstGeom>
-          <a:noFill/>
-        </p:spPr>
-        <p:txBody>
-          <a:bodyPr wrap="none">
-            <a:spAutoFit/>
-          </a:bodyPr>
-          <a:lstStyle/>
-          <a:p>
-            <a:pPr algn="ctr">
-              <a:defRPr sz="2800" b="1">
-                <a:solidFill>
-                  <a:srgbClr val="0078D4"/>
-                </a:solidFill>
-              </a:defRPr>
-            </a:pPr>
-            <a:r>
-              <a:t>Afternoon</a:t>
-            </a:r>
-          </a:p>
-        </p:txBody>
-      </p:sp>
-      <p:sp>
-        <p:nvSpPr>
-          <p:cNvPr id="7" name="TextBox 6"/>
-          <p:cNvSpPr txBox="1"/>
-          <p:nvPr/>
-        </p:nvSpPr>
-        <p:spPr>
-          <a:xfrm>
-            <a:off x="6370167" y="2286000"/>
-            <a:ext cx="5364327" cy="3657600"/>
-          </a:xfrm>
-          <a:prstGeom prst="rect">
-            <a:avLst/>
-          </a:prstGeom>
-          <a:noFill/>
-        </p:spPr>
-        <p:txBody>
-          <a:bodyPr wrap="square">
-            <a:spAutoFit/>
-          </a:bodyPr>
-          <a:lstStyle/>
-          <a:p>
-            <a:pPr>
-              <a:spcAft>
-                <a:spcPts val="1200"/>
-              </a:spcAft>
-              <a:defRPr sz="1800">
-                <a:solidFill>
-                  <a:srgbClr val="FFFFFF"/>
-                </a:solidFill>
-              </a:defRPr>
-            </a:pPr>
-            <a:r>
-              <a:t>  Claude in Excel</a:t>
-            </a:r>
-          </a:p>
-          <a:p>
-            <a:pPr>
-              <a:spcAft>
-                <a:spcPts val="1200"/>
-              </a:spcAft>
-              <a:defRPr sz="1800">
-                <a:solidFill>
-                  <a:srgbClr val="FFFFFF"/>
-                </a:solidFill>
-              </a:defRPr>
-            </a:pPr>
-            <a:r>
-              <a:t>  Artifacts</a:t>
-            </a:r>
-          </a:p>
-          <a:p>
-            <a:pPr>
-              <a:spcAft>
-                <a:spcPts val="1200"/>
-              </a:spcAft>
-              <a:defRPr sz="1800">
-                <a:solidFill>
-                  <a:srgbClr val="FFFFFF"/>
-                </a:solidFill>
-              </a:defRPr>
-            </a:pPr>
-            <a:r>
-              <a:t>  File handling</a:t>
+              <a:t>Wrap-up &amp; Q&amp;A</a:t>
             </a:r>
           </a:p>
         </p:txBody>
@@ -47464,14 +47852,49 @@
       </p:grpSpPr>
       <p:sp>
         <p:nvSpPr>
-          <p:cNvPr id="2" name="Rectangle 1"/>
+          <p:cNvPr id="2" name="TextBox 1"/>
+          <p:cNvSpPr txBox="1"/>
+          <p:nvPr/>
+        </p:nvSpPr>
+        <p:spPr>
+          <a:xfrm>
+            <a:off x="457200" y="457200"/>
+            <a:ext cx="11277295" cy="731520"/>
+          </a:xfrm>
+          <a:prstGeom prst="rect">
+            <a:avLst/>
+          </a:prstGeom>
+          <a:noFill/>
+        </p:spPr>
+        <p:txBody>
+          <a:bodyPr wrap="none">
+            <a:spAutoFit/>
+          </a:bodyPr>
+          <a:lstStyle/>
+          <a:p>
+            <a:pPr algn="ctr">
+              <a:defRPr sz="3600" b="1">
+                <a:solidFill>
+                  <a:srgbClr val="FFFFFF"/>
+                </a:solidFill>
+              </a:defRPr>
+            </a:pPr>
+            <a:r>
+              <a:t>What We Covered Today</a:t>
+            </a:r>
+          </a:p>
+        </p:txBody>
+      </p:sp>
+      <p:sp>
+        <p:nvSpPr>
+          <p:cNvPr id="3" name="Rectangle 2"/>
           <p:cNvSpPr/>
           <p:nvPr/>
         </p:nvSpPr>
         <p:spPr>
           <a:xfrm>
-            <a:off x="0" y="1188720"/>
-            <a:ext cx="91440" cy="5029200"/>
+            <a:off x="6077559" y="1371600"/>
+            <a:ext cx="36576" cy="4572000"/>
           </a:xfrm>
           <a:prstGeom prst="rect">
             <a:avLst/>
@@ -47508,14 +47931,14 @@
       </p:sp>
       <p:sp>
         <p:nvSpPr>
-          <p:cNvPr id="3" name="TextBox 2"/>
-          <p:cNvSpPr txBox="1"/>
-          <p:nvPr/>
-        </p:nvSpPr>
-        <p:spPr>
-          <a:xfrm>
-            <a:off x="457200" y="365760"/>
-            <a:ext cx="11277295" cy="822960"/>
+          <p:cNvPr id="4" name="TextBox 3"/>
+          <p:cNvSpPr txBox="1"/>
+          <p:nvPr/>
+        </p:nvSpPr>
+        <p:spPr>
+          <a:xfrm>
+            <a:off x="457200" y="1463040"/>
+            <a:ext cx="5364327" cy="731520"/>
           </a:xfrm>
           <a:prstGeom prst="rect">
             <a:avLst/>
@@ -47528,60 +47951,16 @@
           </a:bodyPr>
           <a:lstStyle/>
           <a:p>
-            <a:pPr>
-              <a:defRPr sz="4000" b="1">
-                <a:solidFill>
-                  <a:srgbClr val="FFFFFF"/>
-                </a:solidFill>
-              </a:defRPr>
-            </a:pPr>
-            <a:r>
-              <a:t>Key Takeaways</a:t>
-            </a:r>
-          </a:p>
-        </p:txBody>
-      </p:sp>
-      <p:sp>
-        <p:nvSpPr>
-          <p:cNvPr id="4" name="Oval 3"/>
-          <p:cNvSpPr/>
-          <p:nvPr/>
-        </p:nvSpPr>
-        <p:spPr>
-          <a:xfrm>
-            <a:off x="457200" y="1371600"/>
-            <a:ext cx="411480" cy="411480"/>
-          </a:xfrm>
-          <a:prstGeom prst="ellipse">
-            <a:avLst/>
-          </a:prstGeom>
-          <a:solidFill>
-            <a:srgbClr val="00D4AA"/>
-          </a:solidFill>
-          <a:ln>
-            <a:noFill/>
-          </a:ln>
-        </p:spPr>
-        <p:style>
-          <a:lnRef idx="1">
-            <a:schemeClr val="accent1"/>
-          </a:lnRef>
-          <a:fillRef idx="3">
-            <a:schemeClr val="accent1"/>
-          </a:fillRef>
-          <a:effectRef idx="2">
-            <a:schemeClr val="accent1"/>
-          </a:effectRef>
-          <a:fontRef idx="minor">
-            <a:schemeClr val="lt1"/>
-          </a:fontRef>
-        </p:style>
-        <p:txBody>
-          <a:bodyPr rtlCol="0" anchor="ctr"/>
-          <a:lstStyle/>
-          <a:p>
-            <a:pPr algn="ctr"/>
-            <a:endParaRPr/>
+            <a:pPr algn="ctr">
+              <a:defRPr sz="2800" b="1">
+                <a:solidFill>
+                  <a:srgbClr val="00D4AA"/>
+                </a:solidFill>
+              </a:defRPr>
+            </a:pPr>
+            <a:r>
+              <a:t>Morning</a:t>
+            </a:r>
           </a:p>
         </p:txBody>
       </p:sp>
@@ -47593,43 +47972,8 @@
         </p:nvSpPr>
         <p:spPr>
           <a:xfrm>
-            <a:off x="457200" y="1371600"/>
-            <a:ext cx="411480" cy="411480"/>
-          </a:xfrm>
-          <a:prstGeom prst="rect">
-            <a:avLst/>
-          </a:prstGeom>
-          <a:noFill/>
-        </p:spPr>
-        <p:txBody>
-          <a:bodyPr wrap="none" anchor="ctr">
-            <a:spAutoFit/>
-          </a:bodyPr>
-          <a:lstStyle/>
-          <a:p>
-            <a:pPr algn="ctr">
-              <a:defRPr sz="2000" b="1">
-                <a:solidFill>
-                  <a:srgbClr val="0B0F1A"/>
-                </a:solidFill>
-              </a:defRPr>
-            </a:pPr>
-            <a:r>
-              <a:t>v</a:t>
-            </a:r>
-          </a:p>
-        </p:txBody>
-      </p:sp>
-      <p:sp>
-        <p:nvSpPr>
-          <p:cNvPr id="6" name="TextBox 5"/>
-          <p:cNvSpPr txBox="1"/>
-          <p:nvPr/>
-        </p:nvSpPr>
-        <p:spPr>
-          <a:xfrm>
-            <a:off x="1005840" y="1417320"/>
-            <a:ext cx="10728655" cy="731520"/>
+            <a:off x="457200" y="2286000"/>
+            <a:ext cx="5364327" cy="3657600"/>
           </a:xfrm>
           <a:prstGeom prst="rect">
             <a:avLst/>
@@ -47643,107 +47987,96 @@
           <a:lstStyle/>
           <a:p>
             <a:pPr>
-              <a:defRPr sz="2200">
+              <a:spcAft>
+                <a:spcPts val="1200"/>
+              </a:spcAft>
+              <a:defRPr sz="1800">
                 <a:solidFill>
                   <a:srgbClr val="FFFFFF"/>
                 </a:solidFill>
               </a:defRPr>
             </a:pPr>
             <a:r>
-              <a:t>Be specific in prompts - GOLDEN framework helps</a:t>
-            </a:r>
-          </a:p>
-        </p:txBody>
-      </p:sp>
-      <p:sp>
-        <p:nvSpPr>
-          <p:cNvPr id="7" name="Oval 6"/>
-          <p:cNvSpPr/>
-          <p:nvPr/>
-        </p:nvSpPr>
-        <p:spPr>
-          <a:xfrm>
-            <a:off x="457200" y="2194560"/>
-            <a:ext cx="411480" cy="411480"/>
-          </a:xfrm>
-          <a:prstGeom prst="ellipse">
-            <a:avLst/>
-          </a:prstGeom>
-          <a:solidFill>
-            <a:srgbClr val="00D4AA"/>
-          </a:solidFill>
-          <a:ln>
-            <a:noFill/>
-          </a:ln>
-        </p:spPr>
-        <p:style>
-          <a:lnRef idx="1">
-            <a:schemeClr val="accent1"/>
-          </a:lnRef>
-          <a:fillRef idx="3">
-            <a:schemeClr val="accent1"/>
-          </a:fillRef>
-          <a:effectRef idx="2">
-            <a:schemeClr val="accent1"/>
-          </a:effectRef>
-          <a:fontRef idx="minor">
-            <a:schemeClr val="lt1"/>
-          </a:fontRef>
-        </p:style>
-        <p:txBody>
-          <a:bodyPr rtlCol="0" anchor="ctr"/>
-          <a:lstStyle/>
-          <a:p>
-            <a:pPr algn="ctr"/>
-            <a:endParaRPr/>
-          </a:p>
-        </p:txBody>
-      </p:sp>
-      <p:sp>
-        <p:nvSpPr>
-          <p:cNvPr id="8" name="TextBox 7"/>
-          <p:cNvSpPr txBox="1"/>
-          <p:nvPr/>
-        </p:nvSpPr>
-        <p:spPr>
-          <a:xfrm>
-            <a:off x="457200" y="2194560"/>
-            <a:ext cx="411480" cy="411480"/>
-          </a:xfrm>
-          <a:prstGeom prst="rect">
-            <a:avLst/>
-          </a:prstGeom>
-          <a:noFill/>
-        </p:spPr>
-        <p:txBody>
-          <a:bodyPr wrap="none" anchor="ctr">
+              <a:t>  Claude model family</a:t>
+            </a:r>
+          </a:p>
+          <a:p>
+            <a:pPr>
+              <a:spcAft>
+                <a:spcPts val="1200"/>
+              </a:spcAft>
+              <a:defRPr sz="1800">
+                <a:solidFill>
+                  <a:srgbClr val="FFFFFF"/>
+                </a:solidFill>
+              </a:defRPr>
+            </a:pPr>
+            <a:r>
+              <a:t>  Claude.ai interface and Projects</a:t>
+            </a:r>
+          </a:p>
+          <a:p>
+            <a:pPr>
+              <a:spcAft>
+                <a:spcPts val="1200"/>
+              </a:spcAft>
+              <a:defRPr sz="1800">
+                <a:solidFill>
+                  <a:srgbClr val="FFFFFF"/>
+                </a:solidFill>
+              </a:defRPr>
+            </a:pPr>
+            <a:r>
+              <a:t>  Prompt engineering (GOLDEN framework)</a:t>
+            </a:r>
+          </a:p>
+        </p:txBody>
+      </p:sp>
+      <p:sp>
+        <p:nvSpPr>
+          <p:cNvPr id="6" name="TextBox 5"/>
+          <p:cNvSpPr txBox="1"/>
+          <p:nvPr/>
+        </p:nvSpPr>
+        <p:spPr>
+          <a:xfrm>
+            <a:off x="6370167" y="1463040"/>
+            <a:ext cx="5364327" cy="731520"/>
+          </a:xfrm>
+          <a:prstGeom prst="rect">
+            <a:avLst/>
+          </a:prstGeom>
+          <a:noFill/>
+        </p:spPr>
+        <p:txBody>
+          <a:bodyPr wrap="none">
             <a:spAutoFit/>
           </a:bodyPr>
           <a:lstStyle/>
           <a:p>
             <a:pPr algn="ctr">
-              <a:defRPr sz="2000" b="1">
-                <a:solidFill>
-                  <a:srgbClr val="0B0F1A"/>
-                </a:solidFill>
-              </a:defRPr>
-            </a:pPr>
-            <a:r>
-              <a:t>v</a:t>
-            </a:r>
-          </a:p>
-        </p:txBody>
-      </p:sp>
-      <p:sp>
-        <p:nvSpPr>
-          <p:cNvPr id="9" name="TextBox 8"/>
-          <p:cNvSpPr txBox="1"/>
-          <p:nvPr/>
-        </p:nvSpPr>
-        <p:spPr>
-          <a:xfrm>
-            <a:off x="1005840" y="2240280"/>
-            <a:ext cx="10728655" cy="731520"/>
+              <a:defRPr sz="2800" b="1">
+                <a:solidFill>
+                  <a:srgbClr val="0078D4"/>
+                </a:solidFill>
+              </a:defRPr>
+            </a:pPr>
+            <a:r>
+              <a:t>Afternoon</a:t>
+            </a:r>
+          </a:p>
+        </p:txBody>
+      </p:sp>
+      <p:sp>
+        <p:nvSpPr>
+          <p:cNvPr id="7" name="TextBox 6"/>
+          <p:cNvSpPr txBox="1"/>
+          <p:nvPr/>
+        </p:nvSpPr>
+        <p:spPr>
+          <a:xfrm>
+            <a:off x="6370167" y="2286000"/>
+            <a:ext cx="5364327" cy="3657600"/>
           </a:xfrm>
           <a:prstGeom prst="rect">
             <a:avLst/>
@@ -47757,356 +48090,47 @@
           <a:lstStyle/>
           <a:p>
             <a:pPr>
-              <a:defRPr sz="2200">
+              <a:spcAft>
+                <a:spcPts val="1200"/>
+              </a:spcAft>
+              <a:defRPr sz="1800">
                 <a:solidFill>
                   <a:srgbClr val="FFFFFF"/>
                 </a:solidFill>
               </a:defRPr>
             </a:pPr>
             <a:r>
-              <a:t>Use Projects for recurring work</a:t>
-            </a:r>
-          </a:p>
-        </p:txBody>
-      </p:sp>
-      <p:sp>
-        <p:nvSpPr>
-          <p:cNvPr id="10" name="Oval 9"/>
-          <p:cNvSpPr/>
-          <p:nvPr/>
-        </p:nvSpPr>
-        <p:spPr>
-          <a:xfrm>
-            <a:off x="457200" y="3017520"/>
-            <a:ext cx="411480" cy="411480"/>
-          </a:xfrm>
-          <a:prstGeom prst="ellipse">
-            <a:avLst/>
-          </a:prstGeom>
-          <a:solidFill>
-            <a:srgbClr val="00D4AA"/>
-          </a:solidFill>
-          <a:ln>
-            <a:noFill/>
-          </a:ln>
-        </p:spPr>
-        <p:style>
-          <a:lnRef idx="1">
-            <a:schemeClr val="accent1"/>
-          </a:lnRef>
-          <a:fillRef idx="3">
-            <a:schemeClr val="accent1"/>
-          </a:fillRef>
-          <a:effectRef idx="2">
-            <a:schemeClr val="accent1"/>
-          </a:effectRef>
-          <a:fontRef idx="minor">
-            <a:schemeClr val="lt1"/>
-          </a:fontRef>
-        </p:style>
-        <p:txBody>
-          <a:bodyPr rtlCol="0" anchor="ctr"/>
-          <a:lstStyle/>
-          <a:p>
-            <a:pPr algn="ctr"/>
-            <a:endParaRPr/>
-          </a:p>
-        </p:txBody>
-      </p:sp>
-      <p:sp>
-        <p:nvSpPr>
-          <p:cNvPr id="11" name="TextBox 10"/>
-          <p:cNvSpPr txBox="1"/>
-          <p:nvPr/>
-        </p:nvSpPr>
-        <p:spPr>
-          <a:xfrm>
-            <a:off x="457200" y="3017520"/>
-            <a:ext cx="411480" cy="411480"/>
-          </a:xfrm>
-          <a:prstGeom prst="rect">
-            <a:avLst/>
-          </a:prstGeom>
-          <a:noFill/>
-        </p:spPr>
-        <p:txBody>
-          <a:bodyPr wrap="none" anchor="ctr">
-            <a:spAutoFit/>
-          </a:bodyPr>
-          <a:lstStyle/>
-          <a:p>
-            <a:pPr algn="ctr">
-              <a:defRPr sz="2000" b="1">
-                <a:solidFill>
-                  <a:srgbClr val="0B0F1A"/>
-                </a:solidFill>
-              </a:defRPr>
-            </a:pPr>
-            <a:r>
-              <a:t>v</a:t>
-            </a:r>
-          </a:p>
-        </p:txBody>
-      </p:sp>
-      <p:sp>
-        <p:nvSpPr>
-          <p:cNvPr id="12" name="TextBox 11"/>
-          <p:cNvSpPr txBox="1"/>
-          <p:nvPr/>
-        </p:nvSpPr>
-        <p:spPr>
-          <a:xfrm>
-            <a:off x="1005840" y="3063240"/>
-            <a:ext cx="10728655" cy="731520"/>
-          </a:xfrm>
-          <a:prstGeom prst="rect">
-            <a:avLst/>
-          </a:prstGeom>
-          <a:noFill/>
-        </p:spPr>
-        <p:txBody>
-          <a:bodyPr wrap="square">
-            <a:spAutoFit/>
-          </a:bodyPr>
-          <a:lstStyle/>
+              <a:t>  Claude in Excel</a:t>
+            </a:r>
+          </a:p>
           <a:p>
             <a:pPr>
-              <a:defRPr sz="2200">
+              <a:spcAft>
+                <a:spcPts val="1200"/>
+              </a:spcAft>
+              <a:defRPr sz="1800">
                 <a:solidFill>
                   <a:srgbClr val="FFFFFF"/>
                 </a:solidFill>
               </a:defRPr>
             </a:pPr>
             <a:r>
-              <a:t>Iterate, don't start over</a:t>
-            </a:r>
-          </a:p>
-        </p:txBody>
-      </p:sp>
-      <p:sp>
-        <p:nvSpPr>
-          <p:cNvPr id="13" name="Oval 12"/>
-          <p:cNvSpPr/>
-          <p:nvPr/>
-        </p:nvSpPr>
-        <p:spPr>
-          <a:xfrm>
-            <a:off x="457200" y="3840480"/>
-            <a:ext cx="411480" cy="411480"/>
-          </a:xfrm>
-          <a:prstGeom prst="ellipse">
-            <a:avLst/>
-          </a:prstGeom>
-          <a:solidFill>
-            <a:srgbClr val="00D4AA"/>
-          </a:solidFill>
-          <a:ln>
-            <a:noFill/>
-          </a:ln>
-        </p:spPr>
-        <p:style>
-          <a:lnRef idx="1">
-            <a:schemeClr val="accent1"/>
-          </a:lnRef>
-          <a:fillRef idx="3">
-            <a:schemeClr val="accent1"/>
-          </a:fillRef>
-          <a:effectRef idx="2">
-            <a:schemeClr val="accent1"/>
-          </a:effectRef>
-          <a:fontRef idx="minor">
-            <a:schemeClr val="lt1"/>
-          </a:fontRef>
-        </p:style>
-        <p:txBody>
-          <a:bodyPr rtlCol="0" anchor="ctr"/>
-          <a:lstStyle/>
-          <a:p>
-            <a:pPr algn="ctr"/>
-            <a:endParaRPr/>
-          </a:p>
-        </p:txBody>
-      </p:sp>
-      <p:sp>
-        <p:nvSpPr>
-          <p:cNvPr id="14" name="TextBox 13"/>
-          <p:cNvSpPr txBox="1"/>
-          <p:nvPr/>
-        </p:nvSpPr>
-        <p:spPr>
-          <a:xfrm>
-            <a:off x="457200" y="3840480"/>
-            <a:ext cx="411480" cy="411480"/>
-          </a:xfrm>
-          <a:prstGeom prst="rect">
-            <a:avLst/>
-          </a:prstGeom>
-          <a:noFill/>
-        </p:spPr>
-        <p:txBody>
-          <a:bodyPr wrap="none" anchor="ctr">
-            <a:spAutoFit/>
-          </a:bodyPr>
-          <a:lstStyle/>
-          <a:p>
-            <a:pPr algn="ctr">
-              <a:defRPr sz="2000" b="1">
-                <a:solidFill>
-                  <a:srgbClr val="0B0F1A"/>
-                </a:solidFill>
-              </a:defRPr>
-            </a:pPr>
-            <a:r>
-              <a:t>v</a:t>
-            </a:r>
-          </a:p>
-        </p:txBody>
-      </p:sp>
-      <p:sp>
-        <p:nvSpPr>
-          <p:cNvPr id="15" name="TextBox 14"/>
-          <p:cNvSpPr txBox="1"/>
-          <p:nvPr/>
-        </p:nvSpPr>
-        <p:spPr>
-          <a:xfrm>
-            <a:off x="1005840" y="3886200"/>
-            <a:ext cx="10728655" cy="731520"/>
-          </a:xfrm>
-          <a:prstGeom prst="rect">
-            <a:avLst/>
-          </a:prstGeom>
-          <a:noFill/>
-        </p:spPr>
-        <p:txBody>
-          <a:bodyPr wrap="square">
-            <a:spAutoFit/>
-          </a:bodyPr>
-          <a:lstStyle/>
+              <a:t>  Artifacts</a:t>
+            </a:r>
+          </a:p>
           <a:p>
             <a:pPr>
-              <a:defRPr sz="2200">
+              <a:spcAft>
+                <a:spcPts val="1200"/>
+              </a:spcAft>
+              <a:defRPr sz="1800">
                 <a:solidFill>
                   <a:srgbClr val="FFFFFF"/>
                 </a:solidFill>
               </a:defRPr>
             </a:pPr>
             <a:r>
-              <a:t>Claude in Excel = in-context help</a:t>
-            </a:r>
-          </a:p>
-        </p:txBody>
-      </p:sp>
-      <p:sp>
-        <p:nvSpPr>
-          <p:cNvPr id="16" name="Oval 15"/>
-          <p:cNvSpPr/>
-          <p:nvPr/>
-        </p:nvSpPr>
-        <p:spPr>
-          <a:xfrm>
-            <a:off x="457200" y="4663440"/>
-            <a:ext cx="411480" cy="411480"/>
-          </a:xfrm>
-          <a:prstGeom prst="ellipse">
-            <a:avLst/>
-          </a:prstGeom>
-          <a:solidFill>
-            <a:srgbClr val="00D4AA"/>
-          </a:solidFill>
-          <a:ln>
-            <a:noFill/>
-          </a:ln>
-        </p:spPr>
-        <p:style>
-          <a:lnRef idx="1">
-            <a:schemeClr val="accent1"/>
-          </a:lnRef>
-          <a:fillRef idx="3">
-            <a:schemeClr val="accent1"/>
-          </a:fillRef>
-          <a:effectRef idx="2">
-            <a:schemeClr val="accent1"/>
-          </a:effectRef>
-          <a:fontRef idx="minor">
-            <a:schemeClr val="lt1"/>
-          </a:fontRef>
-        </p:style>
-        <p:txBody>
-          <a:bodyPr rtlCol="0" anchor="ctr"/>
-          <a:lstStyle/>
-          <a:p>
-            <a:pPr algn="ctr"/>
-            <a:endParaRPr/>
-          </a:p>
-        </p:txBody>
-      </p:sp>
-      <p:sp>
-        <p:nvSpPr>
-          <p:cNvPr id="17" name="TextBox 16"/>
-          <p:cNvSpPr txBox="1"/>
-          <p:nvPr/>
-        </p:nvSpPr>
-        <p:spPr>
-          <a:xfrm>
-            <a:off x="457200" y="4663440"/>
-            <a:ext cx="411480" cy="411480"/>
-          </a:xfrm>
-          <a:prstGeom prst="rect">
-            <a:avLst/>
-          </a:prstGeom>
-          <a:noFill/>
-        </p:spPr>
-        <p:txBody>
-          <a:bodyPr wrap="none" anchor="ctr">
-            <a:spAutoFit/>
-          </a:bodyPr>
-          <a:lstStyle/>
-          <a:p>
-            <a:pPr algn="ctr">
-              <a:defRPr sz="2000" b="1">
-                <a:solidFill>
-                  <a:srgbClr val="0B0F1A"/>
-                </a:solidFill>
-              </a:defRPr>
-            </a:pPr>
-            <a:r>
-              <a:t>v</a:t>
-            </a:r>
-          </a:p>
-        </p:txBody>
-      </p:sp>
-      <p:sp>
-        <p:nvSpPr>
-          <p:cNvPr id="18" name="TextBox 17"/>
-          <p:cNvSpPr txBox="1"/>
-          <p:nvPr/>
-        </p:nvSpPr>
-        <p:spPr>
-          <a:xfrm>
-            <a:off x="1005840" y="4709160"/>
-            <a:ext cx="10728655" cy="731520"/>
-          </a:xfrm>
-          <a:prstGeom prst="rect">
-            <a:avLst/>
-          </a:prstGeom>
-          <a:noFill/>
-        </p:spPr>
-        <p:txBody>
-          <a:bodyPr wrap="square">
-            <a:spAutoFit/>
-          </a:bodyPr>
-          <a:lstStyle/>
-          <a:p>
-            <a:pPr>
-              <a:defRPr sz="2200">
-                <a:solidFill>
-                  <a:srgbClr val="FFFFFF"/>
-                </a:solidFill>
-              </a:defRPr>
-            </a:pPr>
-            <a:r>
-              <a:t>Verify AI outputs - Claude helps, you validate</a:t>
+              <a:t>  File handling</a:t>
             </a:r>
           </a:p>
         </p:txBody>
@@ -48146,49 +48170,14 @@
       </p:grpSpPr>
       <p:sp>
         <p:nvSpPr>
-          <p:cNvPr id="2" name="TextBox 1"/>
-          <p:cNvSpPr txBox="1"/>
-          <p:nvPr/>
-        </p:nvSpPr>
-        <p:spPr>
-          <a:xfrm>
-            <a:off x="457200" y="365760"/>
-            <a:ext cx="11277295" cy="822960"/>
-          </a:xfrm>
-          <a:prstGeom prst="rect">
-            <a:avLst/>
-          </a:prstGeom>
-          <a:noFill/>
-        </p:spPr>
-        <p:txBody>
-          <a:bodyPr wrap="none">
-            <a:spAutoFit/>
-          </a:bodyPr>
-          <a:lstStyle/>
-          <a:p>
-            <a:pPr>
-              <a:defRPr sz="4000" b="1">
-                <a:solidFill>
-                  <a:srgbClr val="FFFFFF"/>
-                </a:solidFill>
-              </a:defRPr>
-            </a:pPr>
-            <a:r>
-              <a:t>Resources</a:t>
-            </a:r>
-          </a:p>
-        </p:txBody>
-      </p:sp>
-      <p:sp>
-        <p:nvSpPr>
-          <p:cNvPr id="3" name="Rectangle 2"/>
+          <p:cNvPr id="2" name="Rectangle 1"/>
           <p:cNvSpPr/>
           <p:nvPr/>
         </p:nvSpPr>
         <p:spPr>
           <a:xfrm>
-            <a:off x="457200" y="1234440"/>
-            <a:ext cx="1828800" cy="36576"/>
+            <a:off x="0" y="1188720"/>
+            <a:ext cx="91440" cy="5029200"/>
           </a:xfrm>
           <a:prstGeom prst="rect">
             <a:avLst/>
@@ -48225,14 +48214,128 @@
       </p:sp>
       <p:sp>
         <p:nvSpPr>
-          <p:cNvPr id="4" name="TextBox 3"/>
-          <p:cNvSpPr txBox="1"/>
-          <p:nvPr/>
-        </p:nvSpPr>
-        <p:spPr>
-          <a:xfrm>
-            <a:off x="457200" y="1463040"/>
-            <a:ext cx="11277295" cy="4572000"/>
+          <p:cNvPr id="3" name="TextBox 2"/>
+          <p:cNvSpPr txBox="1"/>
+          <p:nvPr/>
+        </p:nvSpPr>
+        <p:spPr>
+          <a:xfrm>
+            <a:off x="457200" y="365760"/>
+            <a:ext cx="11277295" cy="822960"/>
+          </a:xfrm>
+          <a:prstGeom prst="rect">
+            <a:avLst/>
+          </a:prstGeom>
+          <a:noFill/>
+        </p:spPr>
+        <p:txBody>
+          <a:bodyPr wrap="none">
+            <a:spAutoFit/>
+          </a:bodyPr>
+          <a:lstStyle/>
+          <a:p>
+            <a:pPr>
+              <a:defRPr sz="4000" b="1">
+                <a:solidFill>
+                  <a:srgbClr val="FFFFFF"/>
+                </a:solidFill>
+              </a:defRPr>
+            </a:pPr>
+            <a:r>
+              <a:t>Key Takeaways</a:t>
+            </a:r>
+          </a:p>
+        </p:txBody>
+      </p:sp>
+      <p:sp>
+        <p:nvSpPr>
+          <p:cNvPr id="4" name="Oval 3"/>
+          <p:cNvSpPr/>
+          <p:nvPr/>
+        </p:nvSpPr>
+        <p:spPr>
+          <a:xfrm>
+            <a:off x="457200" y="1371600"/>
+            <a:ext cx="411480" cy="411480"/>
+          </a:xfrm>
+          <a:prstGeom prst="ellipse">
+            <a:avLst/>
+          </a:prstGeom>
+          <a:solidFill>
+            <a:srgbClr val="00D4AA"/>
+          </a:solidFill>
+          <a:ln>
+            <a:noFill/>
+          </a:ln>
+        </p:spPr>
+        <p:style>
+          <a:lnRef idx="1">
+            <a:schemeClr val="accent1"/>
+          </a:lnRef>
+          <a:fillRef idx="3">
+            <a:schemeClr val="accent1"/>
+          </a:fillRef>
+          <a:effectRef idx="2">
+            <a:schemeClr val="accent1"/>
+          </a:effectRef>
+          <a:fontRef idx="minor">
+            <a:schemeClr val="lt1"/>
+          </a:fontRef>
+        </p:style>
+        <p:txBody>
+          <a:bodyPr rtlCol="0" anchor="ctr"/>
+          <a:lstStyle/>
+          <a:p>
+            <a:pPr algn="ctr"/>
+            <a:endParaRPr/>
+          </a:p>
+        </p:txBody>
+      </p:sp>
+      <p:sp>
+        <p:nvSpPr>
+          <p:cNvPr id="5" name="TextBox 4"/>
+          <p:cNvSpPr txBox="1"/>
+          <p:nvPr/>
+        </p:nvSpPr>
+        <p:spPr>
+          <a:xfrm>
+            <a:off x="457200" y="1371600"/>
+            <a:ext cx="411480" cy="411480"/>
+          </a:xfrm>
+          <a:prstGeom prst="rect">
+            <a:avLst/>
+          </a:prstGeom>
+          <a:noFill/>
+        </p:spPr>
+        <p:txBody>
+          <a:bodyPr wrap="none" anchor="ctr">
+            <a:spAutoFit/>
+          </a:bodyPr>
+          <a:lstStyle/>
+          <a:p>
+            <a:pPr algn="ctr">
+              <a:defRPr sz="2000" b="1">
+                <a:solidFill>
+                  <a:srgbClr val="0B0F1A"/>
+                </a:solidFill>
+              </a:defRPr>
+            </a:pPr>
+            <a:r>
+              <a:t>v</a:t>
+            </a:r>
+          </a:p>
+        </p:txBody>
+      </p:sp>
+      <p:sp>
+        <p:nvSpPr>
+          <p:cNvPr id="6" name="TextBox 5"/>
+          <p:cNvSpPr txBox="1"/>
+          <p:nvPr/>
+        </p:nvSpPr>
+        <p:spPr>
+          <a:xfrm>
+            <a:off x="1005840" y="1417320"/>
+            <a:ext cx="10728655" cy="731520"/>
           </a:xfrm>
           <a:prstGeom prst="rect">
             <a:avLst/>
@@ -48246,12 +48349,6 @@
           <a:lstStyle/>
           <a:p>
             <a:pPr>
-              <a:spcBef>
-                <a:spcPts val="800"/>
-              </a:spcBef>
-              <a:spcAft>
-                <a:spcPts val="800"/>
-              </a:spcAft>
               <a:defRPr sz="2200">
                 <a:solidFill>
                   <a:srgbClr val="FFFFFF"/>
@@ -48259,17 +48356,113 @@
               </a:defRPr>
             </a:pPr>
             <a:r>
-              <a:t>  Official Docs: docs.claude.com</a:t>
-            </a:r>
-          </a:p>
+              <a:t>Be specific in prompts - GOLDEN framework helps</a:t>
+            </a:r>
+          </a:p>
+        </p:txBody>
+      </p:sp>
+      <p:sp>
+        <p:nvSpPr>
+          <p:cNvPr id="7" name="Oval 6"/>
+          <p:cNvSpPr/>
+          <p:nvPr/>
+        </p:nvSpPr>
+        <p:spPr>
+          <a:xfrm>
+            <a:off x="457200" y="2194560"/>
+            <a:ext cx="411480" cy="411480"/>
+          </a:xfrm>
+          <a:prstGeom prst="ellipse">
+            <a:avLst/>
+          </a:prstGeom>
+          <a:solidFill>
+            <a:srgbClr val="00D4AA"/>
+          </a:solidFill>
+          <a:ln>
+            <a:noFill/>
+          </a:ln>
+        </p:spPr>
+        <p:style>
+          <a:lnRef idx="1">
+            <a:schemeClr val="accent1"/>
+          </a:lnRef>
+          <a:fillRef idx="3">
+            <a:schemeClr val="accent1"/>
+          </a:fillRef>
+          <a:effectRef idx="2">
+            <a:schemeClr val="accent1"/>
+          </a:effectRef>
+          <a:fontRef idx="minor">
+            <a:schemeClr val="lt1"/>
+          </a:fontRef>
+        </p:style>
+        <p:txBody>
+          <a:bodyPr rtlCol="0" anchor="ctr"/>
+          <a:lstStyle/>
+          <a:p>
+            <a:pPr algn="ctr"/>
+            <a:endParaRPr/>
+          </a:p>
+        </p:txBody>
+      </p:sp>
+      <p:sp>
+        <p:nvSpPr>
+          <p:cNvPr id="8" name="TextBox 7"/>
+          <p:cNvSpPr txBox="1"/>
+          <p:nvPr/>
+        </p:nvSpPr>
+        <p:spPr>
+          <a:xfrm>
+            <a:off x="457200" y="2194560"/>
+            <a:ext cx="411480" cy="411480"/>
+          </a:xfrm>
+          <a:prstGeom prst="rect">
+            <a:avLst/>
+          </a:prstGeom>
+          <a:noFill/>
+        </p:spPr>
+        <p:txBody>
+          <a:bodyPr wrap="none" anchor="ctr">
+            <a:spAutoFit/>
+          </a:bodyPr>
+          <a:lstStyle/>
+          <a:p>
+            <a:pPr algn="ctr">
+              <a:defRPr sz="2000" b="1">
+                <a:solidFill>
+                  <a:srgbClr val="0B0F1A"/>
+                </a:solidFill>
+              </a:defRPr>
+            </a:pPr>
+            <a:r>
+              <a:t>v</a:t>
+            </a:r>
+          </a:p>
+        </p:txBody>
+      </p:sp>
+      <p:sp>
+        <p:nvSpPr>
+          <p:cNvPr id="9" name="TextBox 8"/>
+          <p:cNvSpPr txBox="1"/>
+          <p:nvPr/>
+        </p:nvSpPr>
+        <p:spPr>
+          <a:xfrm>
+            <a:off x="1005840" y="2240280"/>
+            <a:ext cx="10728655" cy="731520"/>
+          </a:xfrm>
+          <a:prstGeom prst="rect">
+            <a:avLst/>
+          </a:prstGeom>
+          <a:noFill/>
+        </p:spPr>
+        <p:txBody>
+          <a:bodyPr wrap="square">
+            <a:spAutoFit/>
+          </a:bodyPr>
+          <a:lstStyle/>
           <a:p>
             <a:pPr>
-              <a:spcBef>
-                <a:spcPts val="800"/>
-              </a:spcBef>
-              <a:spcAft>
-                <a:spcPts val="800"/>
-              </a:spcAft>
               <a:defRPr sz="2200">
                 <a:solidFill>
                   <a:srgbClr val="FFFFFF"/>
@@ -48277,17 +48470,113 @@
               </a:defRPr>
             </a:pPr>
             <a:r>
-              <a:t>  Support: support.claude.com</a:t>
-            </a:r>
-          </a:p>
+              <a:t>Use Projects for recurring work</a:t>
+            </a:r>
+          </a:p>
+        </p:txBody>
+      </p:sp>
+      <p:sp>
+        <p:nvSpPr>
+          <p:cNvPr id="10" name="Oval 9"/>
+          <p:cNvSpPr/>
+          <p:nvPr/>
+        </p:nvSpPr>
+        <p:spPr>
+          <a:xfrm>
+            <a:off x="457200" y="3017520"/>
+            <a:ext cx="411480" cy="411480"/>
+          </a:xfrm>
+          <a:prstGeom prst="ellipse">
+            <a:avLst/>
+          </a:prstGeom>
+          <a:solidFill>
+            <a:srgbClr val="00D4AA"/>
+          </a:solidFill>
+          <a:ln>
+            <a:noFill/>
+          </a:ln>
+        </p:spPr>
+        <p:style>
+          <a:lnRef idx="1">
+            <a:schemeClr val="accent1"/>
+          </a:lnRef>
+          <a:fillRef idx="3">
+            <a:schemeClr val="accent1"/>
+          </a:fillRef>
+          <a:effectRef idx="2">
+            <a:schemeClr val="accent1"/>
+          </a:effectRef>
+          <a:fontRef idx="minor">
+            <a:schemeClr val="lt1"/>
+          </a:fontRef>
+        </p:style>
+        <p:txBody>
+          <a:bodyPr rtlCol="0" anchor="ctr"/>
+          <a:lstStyle/>
+          <a:p>
+            <a:pPr algn="ctr"/>
+            <a:endParaRPr/>
+          </a:p>
+        </p:txBody>
+      </p:sp>
+      <p:sp>
+        <p:nvSpPr>
+          <p:cNvPr id="11" name="TextBox 10"/>
+          <p:cNvSpPr txBox="1"/>
+          <p:nvPr/>
+        </p:nvSpPr>
+        <p:spPr>
+          <a:xfrm>
+            <a:off x="457200" y="3017520"/>
+            <a:ext cx="411480" cy="411480"/>
+          </a:xfrm>
+          <a:prstGeom prst="rect">
+            <a:avLst/>
+          </a:prstGeom>
+          <a:noFill/>
+        </p:spPr>
+        <p:txBody>
+          <a:bodyPr wrap="none" anchor="ctr">
+            <a:spAutoFit/>
+          </a:bodyPr>
+          <a:lstStyle/>
+          <a:p>
+            <a:pPr algn="ctr">
+              <a:defRPr sz="2000" b="1">
+                <a:solidFill>
+                  <a:srgbClr val="0B0F1A"/>
+                </a:solidFill>
+              </a:defRPr>
+            </a:pPr>
+            <a:r>
+              <a:t>v</a:t>
+            </a:r>
+          </a:p>
+        </p:txBody>
+      </p:sp>
+      <p:sp>
+        <p:nvSpPr>
+          <p:cNvPr id="12" name="TextBox 11"/>
+          <p:cNvSpPr txBox="1"/>
+          <p:nvPr/>
+        </p:nvSpPr>
+        <p:spPr>
+          <a:xfrm>
+            <a:off x="1005840" y="3063240"/>
+            <a:ext cx="10728655" cy="731520"/>
+          </a:xfrm>
+          <a:prstGeom prst="rect">
+            <a:avLst/>
+          </a:prstGeom>
+          <a:noFill/>
+        </p:spPr>
+        <p:txBody>
+          <a:bodyPr wrap="square">
+            <a:spAutoFit/>
+          </a:bodyPr>
+          <a:lstStyle/>
           <a:p>
             <a:pPr>
-              <a:spcBef>
-                <a:spcPts val="800"/>
-              </a:spcBef>
-              <a:spcAft>
-                <a:spcPts val="800"/>
-              </a:spcAft>
               <a:defRPr sz="2200">
                 <a:solidFill>
                   <a:srgbClr val="FFFFFF"/>
@@ -48295,17 +48584,113 @@
               </a:defRPr>
             </a:pPr>
             <a:r>
-              <a:t>  Anthropic Blog: anthropic.com/news</a:t>
-            </a:r>
-          </a:p>
+              <a:t>Iterate, don't start over</a:t>
+            </a:r>
+          </a:p>
+        </p:txBody>
+      </p:sp>
+      <p:sp>
+        <p:nvSpPr>
+          <p:cNvPr id="13" name="Oval 12"/>
+          <p:cNvSpPr/>
+          <p:nvPr/>
+        </p:nvSpPr>
+        <p:spPr>
+          <a:xfrm>
+            <a:off x="457200" y="3840480"/>
+            <a:ext cx="411480" cy="411480"/>
+          </a:xfrm>
+          <a:prstGeom prst="ellipse">
+            <a:avLst/>
+          </a:prstGeom>
+          <a:solidFill>
+            <a:srgbClr val="00D4AA"/>
+          </a:solidFill>
+          <a:ln>
+            <a:noFill/>
+          </a:ln>
+        </p:spPr>
+        <p:style>
+          <a:lnRef idx="1">
+            <a:schemeClr val="accent1"/>
+          </a:lnRef>
+          <a:fillRef idx="3">
+            <a:schemeClr val="accent1"/>
+          </a:fillRef>
+          <a:effectRef idx="2">
+            <a:schemeClr val="accent1"/>
+          </a:effectRef>
+          <a:fontRef idx="minor">
+            <a:schemeClr val="lt1"/>
+          </a:fontRef>
+        </p:style>
+        <p:txBody>
+          <a:bodyPr rtlCol="0" anchor="ctr"/>
+          <a:lstStyle/>
+          <a:p>
+            <a:pPr algn="ctr"/>
+            <a:endParaRPr/>
+          </a:p>
+        </p:txBody>
+      </p:sp>
+      <p:sp>
+        <p:nvSpPr>
+          <p:cNvPr id="14" name="TextBox 13"/>
+          <p:cNvSpPr txBox="1"/>
+          <p:nvPr/>
+        </p:nvSpPr>
+        <p:spPr>
+          <a:xfrm>
+            <a:off x="457200" y="3840480"/>
+            <a:ext cx="411480" cy="411480"/>
+          </a:xfrm>
+          <a:prstGeom prst="rect">
+            <a:avLst/>
+          </a:prstGeom>
+          <a:noFill/>
+        </p:spPr>
+        <p:txBody>
+          <a:bodyPr wrap="none" anchor="ctr">
+            <a:spAutoFit/>
+          </a:bodyPr>
+          <a:lstStyle/>
+          <a:p>
+            <a:pPr algn="ctr">
+              <a:defRPr sz="2000" b="1">
+                <a:solidFill>
+                  <a:srgbClr val="0B0F1A"/>
+                </a:solidFill>
+              </a:defRPr>
+            </a:pPr>
+            <a:r>
+              <a:t>v</a:t>
+            </a:r>
+          </a:p>
+        </p:txBody>
+      </p:sp>
+      <p:sp>
+        <p:nvSpPr>
+          <p:cNvPr id="15" name="TextBox 14"/>
+          <p:cNvSpPr txBox="1"/>
+          <p:nvPr/>
+        </p:nvSpPr>
+        <p:spPr>
+          <a:xfrm>
+            <a:off x="1005840" y="3886200"/>
+            <a:ext cx="10728655" cy="731520"/>
+          </a:xfrm>
+          <a:prstGeom prst="rect">
+            <a:avLst/>
+          </a:prstGeom>
+          <a:noFill/>
+        </p:spPr>
+        <p:txBody>
+          <a:bodyPr wrap="square">
+            <a:spAutoFit/>
+          </a:bodyPr>
+          <a:lstStyle/>
           <a:p>
             <a:pPr>
-              <a:spcBef>
-                <a:spcPts val="800"/>
-              </a:spcBef>
-              <a:spcAft>
-                <a:spcPts val="800"/>
-              </a:spcAft>
               <a:defRPr sz="2200">
                 <a:solidFill>
                   <a:srgbClr val="FFFFFF"/>
@@ -48313,17 +48698,113 @@
               </a:defRPr>
             </a:pPr>
             <a:r>
-              <a:t>  Trust Center: anthropic.com/trust</a:t>
-            </a:r>
-          </a:p>
+              <a:t>Claude in Excel = in-context help</a:t>
+            </a:r>
+          </a:p>
+        </p:txBody>
+      </p:sp>
+      <p:sp>
+        <p:nvSpPr>
+          <p:cNvPr id="16" name="Oval 15"/>
+          <p:cNvSpPr/>
+          <p:nvPr/>
+        </p:nvSpPr>
+        <p:spPr>
+          <a:xfrm>
+            <a:off x="457200" y="4663440"/>
+            <a:ext cx="411480" cy="411480"/>
+          </a:xfrm>
+          <a:prstGeom prst="ellipse">
+            <a:avLst/>
+          </a:prstGeom>
+          <a:solidFill>
+            <a:srgbClr val="00D4AA"/>
+          </a:solidFill>
+          <a:ln>
+            <a:noFill/>
+          </a:ln>
+        </p:spPr>
+        <p:style>
+          <a:lnRef idx="1">
+            <a:schemeClr val="accent1"/>
+          </a:lnRef>
+          <a:fillRef idx="3">
+            <a:schemeClr val="accent1"/>
+          </a:fillRef>
+          <a:effectRef idx="2">
+            <a:schemeClr val="accent1"/>
+          </a:effectRef>
+          <a:fontRef idx="minor">
+            <a:schemeClr val="lt1"/>
+          </a:fontRef>
+        </p:style>
+        <p:txBody>
+          <a:bodyPr rtlCol="0" anchor="ctr"/>
+          <a:lstStyle/>
+          <a:p>
+            <a:pPr algn="ctr"/>
+            <a:endParaRPr/>
+          </a:p>
+        </p:txBody>
+      </p:sp>
+      <p:sp>
+        <p:nvSpPr>
+          <p:cNvPr id="17" name="TextBox 16"/>
+          <p:cNvSpPr txBox="1"/>
+          <p:nvPr/>
+        </p:nvSpPr>
+        <p:spPr>
+          <a:xfrm>
+            <a:off x="457200" y="4663440"/>
+            <a:ext cx="411480" cy="411480"/>
+          </a:xfrm>
+          <a:prstGeom prst="rect">
+            <a:avLst/>
+          </a:prstGeom>
+          <a:noFill/>
+        </p:spPr>
+        <p:txBody>
+          <a:bodyPr wrap="none" anchor="ctr">
+            <a:spAutoFit/>
+          </a:bodyPr>
+          <a:lstStyle/>
+          <a:p>
+            <a:pPr algn="ctr">
+              <a:defRPr sz="2000" b="1">
+                <a:solidFill>
+                  <a:srgbClr val="0B0F1A"/>
+                </a:solidFill>
+              </a:defRPr>
+            </a:pPr>
+            <a:r>
+              <a:t>v</a:t>
+            </a:r>
+          </a:p>
+        </p:txBody>
+      </p:sp>
+      <p:sp>
+        <p:nvSpPr>
+          <p:cNvPr id="18" name="TextBox 17"/>
+          <p:cNvSpPr txBox="1"/>
+          <p:nvPr/>
+        </p:nvSpPr>
+        <p:spPr>
+          <a:xfrm>
+            <a:off x="1005840" y="4709160"/>
+            <a:ext cx="10728655" cy="731520"/>
+          </a:xfrm>
+          <a:prstGeom prst="rect">
+            <a:avLst/>
+          </a:prstGeom>
+          <a:noFill/>
+        </p:spPr>
+        <p:txBody>
+          <a:bodyPr wrap="square">
+            <a:spAutoFit/>
+          </a:bodyPr>
+          <a:lstStyle/>
           <a:p>
             <a:pPr>
-              <a:spcBef>
-                <a:spcPts val="800"/>
-              </a:spcBef>
-              <a:spcAft>
-                <a:spcPts val="800"/>
-              </a:spcAft>
               <a:defRPr sz="2200">
                 <a:solidFill>
                   <a:srgbClr val="FFFFFF"/>
@@ -48331,7 +48812,7 @@
               </a:defRPr>
             </a:pPr>
             <a:r>
-              <a:t>  Handouts: Claude Code Quick Reference, Prompt Engineering Cheatsheet</a:t>
+              <a:t>Verify AI outputs - Claude helps, you validate</a:t>
             </a:r>
           </a:p>
         </p:txBody>
@@ -48399,7 +48880,7 @@
               </a:defRPr>
             </a:pPr>
             <a:r>
-              <a:t>Practice Assignment (Optional)</a:t>
+              <a:t>Resources</a:t>
             </a:r>
           </a:p>
         </p:txBody>
@@ -48484,7 +48965,7 @@
               </a:defRPr>
             </a:pPr>
             <a:r>
-              <a:t>  Try 3 tasks with Claude this week:</a:t>
+              <a:t>  Official Docs: docs.claude.com</a:t>
             </a:r>
           </a:p>
           <a:p>
@@ -48502,7 +48983,7 @@
               </a:defRPr>
             </a:pPr>
             <a:r>
-              <a:t>  1. Something you do monthly (turn into a Project)</a:t>
+              <a:t>  Support: support.claude.com</a:t>
             </a:r>
           </a:p>
           <a:p>
@@ -48520,7 +49001,7 @@
               </a:defRPr>
             </a:pPr>
             <a:r>
-              <a:t>  2. A complex prompt (use GOLDEN framework)</a:t>
+              <a:t>  Anthropic Blog: anthropic.com/news</a:t>
             </a:r>
           </a:p>
           <a:p>
@@ -48538,7 +49019,7 @@
               </a:defRPr>
             </a:pPr>
             <a:r>
-              <a:t>  3. Excel formula help or data analysis</a:t>
+              <a:t>  Trust Center: anthropic.com/trust</a:t>
             </a:r>
           </a:p>
           <a:p>
@@ -48556,7 +49037,7 @@
               </a:defRPr>
             </a:pPr>
             <a:r>
-              <a:t>  Track results: What worked? Time saved?</a:t>
+              <a:t>  Handouts: Claude Code Quick Reference, Prompt Engineering Cheatsheet</a:t>
             </a:r>
           </a:p>
         </p:txBody>
@@ -48624,7 +49105,7 @@
               </a:defRPr>
             </a:pPr>
             <a:r>
-              <a:t>Questions?</a:t>
+              <a:t>Practice Assignment (Optional)</a:t>
             </a:r>
           </a:p>
         </p:txBody>
@@ -48709,7 +49190,7 @@
               </a:defRPr>
             </a:pPr>
             <a:r>
-              <a:t>  Licensing and access</a:t>
+              <a:t>  Try 3 tasks with Claude this week:</a:t>
             </a:r>
           </a:p>
           <a:p>
@@ -48727,7 +49208,7 @@
               </a:defRPr>
             </a:pPr>
             <a:r>
-              <a:t>  Security and data privacy</a:t>
+              <a:t>  1. Something you do monthly (turn into a Project)</a:t>
             </a:r>
           </a:p>
           <a:p>
@@ -48745,7 +49226,7 @@
               </a:defRPr>
             </a:pPr>
             <a:r>
-              <a:t>  When to use which tool</a:t>
+              <a:t>  2. A complex prompt (use GOLDEN framework)</a:t>
             </a:r>
           </a:p>
           <a:p>
@@ -48763,7 +49244,7 @@
               </a:defRPr>
             </a:pPr>
             <a:r>
-              <a:t>  Advanced prompting techniques</a:t>
+              <a:t>  3. Excel formula help or data analysis</a:t>
             </a:r>
           </a:p>
           <a:p>
@@ -48781,7 +49262,7 @@
               </a:defRPr>
             </a:pPr>
             <a:r>
-              <a:t>  Real-world use cases</a:t>
+              <a:t>  Track results: What worked? Time saved?</a:t>
             </a:r>
           </a:p>
         </p:txBody>
@@ -48827,29 +49308,29 @@
         </p:nvSpPr>
         <p:spPr>
           <a:xfrm>
-            <a:off x="457200" y="2286000"/>
-            <a:ext cx="11277295" cy="2286000"/>
-          </a:xfrm>
-          <a:prstGeom prst="rect">
-            <a:avLst/>
-          </a:prstGeom>
-          <a:noFill/>
-        </p:spPr>
-        <p:txBody>
-          <a:bodyPr wrap="square">
+            <a:off x="457200" y="365760"/>
+            <a:ext cx="11277295" cy="822960"/>
+          </a:xfrm>
+          <a:prstGeom prst="rect">
+            <a:avLst/>
+          </a:prstGeom>
+          <a:noFill/>
+        </p:spPr>
+        <p:txBody>
+          <a:bodyPr wrap="none">
             <a:spAutoFit/>
           </a:bodyPr>
           <a:lstStyle/>
           <a:p>
-            <a:pPr algn="ctr">
-              <a:defRPr sz="8000" b="1">
-                <a:solidFill>
-                  <a:srgbClr val="00D4AA"/>
-                </a:solidFill>
-              </a:defRPr>
-            </a:pPr>
-            <a:r>
-              <a:t>Thank You</a:t>
+            <a:pPr>
+              <a:defRPr sz="4000" b="1">
+                <a:solidFill>
+                  <a:srgbClr val="FFFFFF"/>
+                </a:solidFill>
+              </a:defRPr>
+            </a:pPr>
+            <a:r>
+              <a:t>Questions?</a:t>
             </a:r>
           </a:p>
         </p:txBody>
@@ -48862,8 +49343,8 @@
         </p:nvSpPr>
         <p:spPr>
           <a:xfrm>
-            <a:off x="0" y="4754880"/>
-            <a:ext cx="12191695" cy="36576"/>
+            <a:off x="457200" y="1234440"/>
+            <a:ext cx="1828800" cy="36576"/>
           </a:xfrm>
           <a:prstGeom prst="rect">
             <a:avLst/>
@@ -48906,29 +49387,107 @@
         </p:nvSpPr>
         <p:spPr>
           <a:xfrm>
-            <a:off x="457200" y="5029200"/>
-            <a:ext cx="11277295" cy="457200"/>
-          </a:xfrm>
-          <a:prstGeom prst="rect">
-            <a:avLst/>
-          </a:prstGeom>
-          <a:noFill/>
-        </p:spPr>
-        <p:txBody>
-          <a:bodyPr wrap="none">
+            <a:off x="457200" y="1463040"/>
+            <a:ext cx="11277295" cy="4572000"/>
+          </a:xfrm>
+          <a:prstGeom prst="rect">
+            <a:avLst/>
+          </a:prstGeom>
+          <a:noFill/>
+        </p:spPr>
+        <p:txBody>
+          <a:bodyPr wrap="square">
             <a:spAutoFit/>
           </a:bodyPr>
           <a:lstStyle/>
           <a:p>
-            <a:pPr algn="r">
-              <a:defRPr sz="2000">
-                <a:solidFill>
-                  <a:srgbClr val="8B95A5"/>
-                </a:solidFill>
-              </a:defRPr>
-            </a:pPr>
-            <a:r>
-              <a:t>- © 2026 AIA Copilot</a:t>
+            <a:pPr>
+              <a:spcBef>
+                <a:spcPts val="800"/>
+              </a:spcBef>
+              <a:spcAft>
+                <a:spcPts val="800"/>
+              </a:spcAft>
+              <a:defRPr sz="2200">
+                <a:solidFill>
+                  <a:srgbClr val="FFFFFF"/>
+                </a:solidFill>
+              </a:defRPr>
+            </a:pPr>
+            <a:r>
+              <a:t>  Licensing and access</a:t>
+            </a:r>
+          </a:p>
+          <a:p>
+            <a:pPr>
+              <a:spcBef>
+                <a:spcPts val="800"/>
+              </a:spcBef>
+              <a:spcAft>
+                <a:spcPts val="800"/>
+              </a:spcAft>
+              <a:defRPr sz="2200">
+                <a:solidFill>
+                  <a:srgbClr val="FFFFFF"/>
+                </a:solidFill>
+              </a:defRPr>
+            </a:pPr>
+            <a:r>
+              <a:t>  Security and data privacy</a:t>
+            </a:r>
+          </a:p>
+          <a:p>
+            <a:pPr>
+              <a:spcBef>
+                <a:spcPts val="800"/>
+              </a:spcBef>
+              <a:spcAft>
+                <a:spcPts val="800"/>
+              </a:spcAft>
+              <a:defRPr sz="2200">
+                <a:solidFill>
+                  <a:srgbClr val="FFFFFF"/>
+                </a:solidFill>
+              </a:defRPr>
+            </a:pPr>
+            <a:r>
+              <a:t>  When to use which tool</a:t>
+            </a:r>
+          </a:p>
+          <a:p>
+            <a:pPr>
+              <a:spcBef>
+                <a:spcPts val="800"/>
+              </a:spcBef>
+              <a:spcAft>
+                <a:spcPts val="800"/>
+              </a:spcAft>
+              <a:defRPr sz="2200">
+                <a:solidFill>
+                  <a:srgbClr val="FFFFFF"/>
+                </a:solidFill>
+              </a:defRPr>
+            </a:pPr>
+            <a:r>
+              <a:t>  Advanced prompting techniques</a:t>
+            </a:r>
+          </a:p>
+          <a:p>
+            <a:pPr>
+              <a:spcBef>
+                <a:spcPts val="800"/>
+              </a:spcBef>
+              <a:spcAft>
+                <a:spcPts val="800"/>
+              </a:spcAft>
+              <a:defRPr sz="2200">
+                <a:solidFill>
+                  <a:srgbClr val="FFFFFF"/>
+                </a:solidFill>
+              </a:defRPr>
+            </a:pPr>
+            <a:r>
+              <a:t>  Real-world use cases</a:t>
             </a:r>
           </a:p>
         </p:txBody>
@@ -48989,7 +49548,7 @@
               </a:defRPr>
             </a:pPr>
             <a:r>
-              <a:t>Claude in PowerPoint</a:t>
+              <a:t>Claude's Memory</a:t>
             </a:r>
           </a:p>
         </p:txBody>
@@ -49019,12 +49578,12 @@
             <a:pPr>
               <a:defRPr sz="1800" i="1">
                 <a:solidFill>
-                  <a:srgbClr val="14B8A6"/>
-                </a:solidFill>
-              </a:defRPr>
-            </a:pPr>
-            <a:r>
-              <a:t>Research Preview  •  Available for Max, Team, and Enterprise</a:t>
+                  <a:srgbClr val="9CA3AF"/>
+                </a:solidFill>
+              </a:defRPr>
+            </a:pPr>
+            <a:r>
+              <a:t>Claude remembers context across conversations — so you don't have to repeat yourself</a:t>
             </a:r>
           </a:p>
         </p:txBody>
@@ -49038,7 +49597,7 @@
         <p:spPr>
           <a:xfrm>
             <a:off x="457200" y="1737360"/>
-            <a:ext cx="3474720" cy="3200400"/>
+            <a:ext cx="3474720" cy="3474720"/>
           </a:xfrm>
           <a:prstGeom prst="roundRect">
             <a:avLst/>
@@ -49100,7 +49659,7 @@
               <a:defRPr sz="3000"/>
             </a:pPr>
             <a:r>
-              <a:t>🎨</a:t>
+              <a:t>🔍</a:t>
             </a:r>
           </a:p>
         </p:txBody>
@@ -49114,42 +49673,7 @@
         <p:spPr>
           <a:xfrm>
             <a:off x="640080" y="2377440"/>
-            <a:ext cx="3108960" cy="457200"/>
-          </a:xfrm>
-          <a:prstGeom prst="rect">
-            <a:avLst/>
-          </a:prstGeom>
-          <a:noFill/>
-        </p:spPr>
-        <p:txBody>
-          <a:bodyPr wrap="none">
-            <a:spAutoFit/>
-          </a:bodyPr>
-          <a:lstStyle/>
-          <a:p>
-            <a:pPr algn="ctr">
-              <a:defRPr sz="2000" b="1">
-                <a:solidFill>
-                  <a:srgbClr val="FFFFFF"/>
-                </a:solidFill>
-              </a:defRPr>
-            </a:pPr>
-            <a:r>
-              <a:t>Build &amp; Design</a:t>
-            </a:r>
-          </a:p>
-        </p:txBody>
-      </p:sp>
-      <p:sp>
-        <p:nvSpPr>
-          <p:cNvPr id="7" name="TextBox 6"/>
-          <p:cNvSpPr txBox="1"/>
-          <p:nvPr/>
-        </p:nvSpPr>
-        <p:spPr>
-          <a:xfrm>
-            <a:off x="640080" y="2926080"/>
-            <a:ext cx="3108960" cy="1828800"/>
+            <a:ext cx="3108960" cy="640080"/>
           </a:xfrm>
           <a:prstGeom prst="rect">
             <a:avLst/>
@@ -49163,6 +49687,45 @@
           <a:lstStyle/>
           <a:p>
             <a:pPr algn="ctr">
+              <a:defRPr sz="1800" b="1">
+                <a:solidFill>
+                  <a:srgbClr val="FFFFFF"/>
+                </a:solidFill>
+              </a:defRPr>
+            </a:pPr>
+            <a:r>
+              <a:t>Search &amp; Reference</a:t>
+            </a:r>
+            <a:br/>
+            <a:r>
+              <a:t>Past Chats</a:t>
+            </a:r>
+          </a:p>
+        </p:txBody>
+      </p:sp>
+      <p:sp>
+        <p:nvSpPr>
+          <p:cNvPr id="7" name="TextBox 6"/>
+          <p:cNvSpPr txBox="1"/>
+          <p:nvPr/>
+        </p:nvSpPr>
+        <p:spPr>
+          <a:xfrm>
+            <a:off x="640080" y="3108960"/>
+            <a:ext cx="3108960" cy="1828800"/>
+          </a:xfrm>
+          <a:prstGeom prst="rect">
+            <a:avLst/>
+          </a:prstGeom>
+          <a:noFill/>
+        </p:spPr>
+        <p:txBody>
+          <a:bodyPr wrap="square">
+            <a:spAutoFit/>
+          </a:bodyPr>
+          <a:lstStyle/>
+          <a:p>
+            <a:pPr algn="ctr">
               <a:defRPr sz="1400">
                 <a:solidFill>
                   <a:srgbClr val="D1D5DB"/>
@@ -49170,23 +49733,23 @@
               </a:defRPr>
             </a:pPr>
             <a:r>
-              <a:t>Create new slides from</a:t>
+              <a:t>Claude searches your</a:t>
             </a:r>
             <a:br/>
             <a:r>
-              <a:t>a prompt or outline</a:t>
+              <a:t>previous conversations</a:t>
             </a:r>
             <a:br/>
             <a:r>
-              <a:t>Apply consistent branding</a:t>
+              <a:t>for relevant context.</a:t>
             </a:r>
             <a:br/>
             <a:r>
-              <a:t>Redesign existing decks</a:t>
+              <a:t>Finds details you forgot.</a:t>
             </a:r>
             <a:br/>
             <a:r>
-              <a:t>Powered by Opus 4.6</a:t>
+              <a:t>Works across all chats.</a:t>
             </a:r>
           </a:p>
         </p:txBody>
@@ -49200,7 +49763,7 @@
         <p:spPr>
           <a:xfrm>
             <a:off x="4206240" y="1737360"/>
-            <a:ext cx="3474720" cy="3200400"/>
+            <a:ext cx="3474720" cy="3474720"/>
           </a:xfrm>
           <a:prstGeom prst="roundRect">
             <a:avLst/>
@@ -49262,7 +49825,7 @@
               <a:defRPr sz="3000"/>
             </a:pPr>
             <a:r>
-              <a:t>📝</a:t>
+              <a:t>🧠</a:t>
             </a:r>
           </a:p>
         </p:txBody>
@@ -49276,42 +49839,7 @@
         <p:spPr>
           <a:xfrm>
             <a:off x="4389120" y="2377440"/>
-            <a:ext cx="3108960" cy="457200"/>
-          </a:xfrm>
-          <a:prstGeom prst="rect">
-            <a:avLst/>
-          </a:prstGeom>
-          <a:noFill/>
-        </p:spPr>
-        <p:txBody>
-          <a:bodyPr wrap="none">
-            <a:spAutoFit/>
-          </a:bodyPr>
-          <a:lstStyle/>
-          <a:p>
-            <a:pPr algn="ctr">
-              <a:defRPr sz="2000" b="1">
-                <a:solidFill>
-                  <a:srgbClr val="FFFFFF"/>
-                </a:solidFill>
-              </a:defRPr>
-            </a:pPr>
-            <a:r>
-              <a:t>Edit &amp; Refine</a:t>
-            </a:r>
-          </a:p>
-        </p:txBody>
-      </p:sp>
-      <p:sp>
-        <p:nvSpPr>
-          <p:cNvPr id="11" name="TextBox 10"/>
-          <p:cNvSpPr txBox="1"/>
-          <p:nvPr/>
-        </p:nvSpPr>
-        <p:spPr>
-          <a:xfrm>
-            <a:off x="4389120" y="2926080"/>
-            <a:ext cx="3108960" cy="1828800"/>
+            <a:ext cx="3108960" cy="640080"/>
           </a:xfrm>
           <a:prstGeom prst="rect">
             <a:avLst/>
@@ -49325,6 +49853,45 @@
           <a:lstStyle/>
           <a:p>
             <a:pPr algn="ctr">
+              <a:defRPr sz="1800" b="1">
+                <a:solidFill>
+                  <a:srgbClr val="FFFFFF"/>
+                </a:solidFill>
+              </a:defRPr>
+            </a:pPr>
+            <a:r>
+              <a:t>Generate Memory</a:t>
+            </a:r>
+            <a:br/>
+            <a:r>
+              <a:t>from History</a:t>
+            </a:r>
+          </a:p>
+        </p:txBody>
+      </p:sp>
+      <p:sp>
+        <p:nvSpPr>
+          <p:cNvPr id="11" name="TextBox 10"/>
+          <p:cNvSpPr txBox="1"/>
+          <p:nvPr/>
+        </p:nvSpPr>
+        <p:spPr>
+          <a:xfrm>
+            <a:off x="4389120" y="3108960"/>
+            <a:ext cx="3108960" cy="1828800"/>
+          </a:xfrm>
+          <a:prstGeom prst="rect">
+            <a:avLst/>
+          </a:prstGeom>
+          <a:noFill/>
+        </p:spPr>
+        <p:txBody>
+          <a:bodyPr wrap="square">
+            <a:spAutoFit/>
+          </a:bodyPr>
+          <a:lstStyle/>
+          <a:p>
+            <a:pPr algn="ctr">
               <a:defRPr sz="1400">
                 <a:solidFill>
                   <a:srgbClr val="D1D5DB"/>
@@ -49332,23 +49899,27 @@
               </a:defRPr>
             </a:pPr>
             <a:r>
-              <a:t>Rewrite slide content</a:t>
+              <a:t>Claude builds memory</a:t>
             </a:r>
             <a:br/>
             <a:r>
-              <a:t>Fix formatting issues</a:t>
+              <a:t>from your chat patterns.</a:t>
             </a:r>
             <a:br/>
             <a:r>
-              <a:t>Improve data visualizations</a:t>
+              <a:t>Remembers preferences,</a:t>
             </a:r>
             <a:br/>
             <a:r>
-              <a:t>Condense or expand sections</a:t>
+              <a:t>projects, and context.</a:t>
             </a:r>
             <a:br/>
             <a:r>
-              <a:t>Maintain brand guidelines</a:t>
+              <a:t>Controls both chats</a:t>
+            </a:r>
+            <a:br/>
+            <a:r>
+              <a:t>and Projects.</a:t>
             </a:r>
           </a:p>
         </p:txBody>
@@ -49362,7 +49933,7 @@
         <p:spPr>
           <a:xfrm>
             <a:off x="7955279" y="1737360"/>
-            <a:ext cx="3474720" cy="3200400"/>
+            <a:ext cx="3474720" cy="3474720"/>
           </a:xfrm>
           <a:prstGeom prst="roundRect">
             <a:avLst/>
@@ -49424,7 +49995,7 @@
               <a:defRPr sz="3000"/>
             </a:pPr>
             <a:r>
-              <a:t>💡</a:t>
+              <a:t>👁️</a:t>
             </a:r>
           </a:p>
         </p:txBody>
@@ -49438,7 +50009,93 @@
         <p:spPr>
           <a:xfrm>
             <a:off x="8138159" y="2377440"/>
-            <a:ext cx="3108960" cy="457200"/>
+            <a:ext cx="3108960" cy="640080"/>
+          </a:xfrm>
+          <a:prstGeom prst="rect">
+            <a:avLst/>
+          </a:prstGeom>
+          <a:noFill/>
+        </p:spPr>
+        <p:txBody>
+          <a:bodyPr wrap="square">
+            <a:spAutoFit/>
+          </a:bodyPr>
+          <a:lstStyle/>
+          <a:p>
+            <a:pPr algn="ctr">
+              <a:defRPr sz="1800" b="1">
+                <a:solidFill>
+                  <a:srgbClr val="FFFFFF"/>
+                </a:solidFill>
+              </a:defRPr>
+            </a:pPr>
+            <a:r>
+              <a:t>View Your Memory</a:t>
+            </a:r>
+          </a:p>
+        </p:txBody>
+      </p:sp>
+      <p:sp>
+        <p:nvSpPr>
+          <p:cNvPr id="15" name="TextBox 14"/>
+          <p:cNvSpPr txBox="1"/>
+          <p:nvPr/>
+        </p:nvSpPr>
+        <p:spPr>
+          <a:xfrm>
+            <a:off x="8138159" y="3108960"/>
+            <a:ext cx="3108960" cy="1828800"/>
+          </a:xfrm>
+          <a:prstGeom prst="rect">
+            <a:avLst/>
+          </a:prstGeom>
+          <a:noFill/>
+        </p:spPr>
+        <p:txBody>
+          <a:bodyPr wrap="square">
+            <a:spAutoFit/>
+          </a:bodyPr>
+          <a:lstStyle/>
+          <a:p>
+            <a:pPr algn="ctr">
+              <a:defRPr sz="1400">
+                <a:solidFill>
+                  <a:srgbClr val="D1D5DB"/>
+                </a:solidFill>
+              </a:defRPr>
+            </a:pPr>
+            <a:r>
+              <a:t>See exactly what Claude</a:t>
+            </a:r>
+            <a:br/>
+            <a:r>
+              <a:t>remembers about you.</a:t>
+            </a:r>
+            <a:br/>
+            <a:r>
+              <a:t>Edit or delete entries.</a:t>
+            </a:r>
+            <a:br/>
+            <a:r>
+              <a:t>Full transparency —</a:t>
+            </a:r>
+            <a:br/>
+            <a:r>
+              <a:t>no hidden knowledge.</a:t>
+            </a:r>
+          </a:p>
+        </p:txBody>
+      </p:sp>
+      <p:sp>
+        <p:nvSpPr>
+          <p:cNvPr id="16" name="TextBox 15"/>
+          <p:cNvSpPr txBox="1"/>
+          <p:nvPr/>
+        </p:nvSpPr>
+        <p:spPr>
+          <a:xfrm>
+            <a:off x="457200" y="5486400"/>
+            <a:ext cx="11247120" cy="457200"/>
           </a:xfrm>
           <a:prstGeom prst="rect">
             <a:avLst/>
@@ -49452,79 +50109,124 @@
           <a:lstStyle/>
           <a:p>
             <a:pPr algn="ctr">
-              <a:defRPr sz="2000" b="1">
+              <a:defRPr sz="1500" i="1">
+                <a:solidFill>
+                  <a:srgbClr val="14B8A6"/>
+                </a:solidFill>
+              </a:defRPr>
+            </a:pPr>
+            <a:r>
+              <a:t>Settings → Memory → Enable both toggles for the best experience</a:t>
+            </a:r>
+          </a:p>
+        </p:txBody>
+      </p:sp>
+    </p:spTree>
+  </p:cSld>
+  <p:clrMapOvr>
+    <a:masterClrMapping/>
+  </p:clrMapOvr>
+</p:sld>
+</file>
+
+<file path=ppt/slides/slide87.xml><?xml version="1.0" encoding="utf-8"?>
+<p:sld xmlns:a="http://schemas.openxmlformats.org/drawingml/2006/main" xmlns:p="http://schemas.openxmlformats.org/presentationml/2006/main" xmlns:r="http://schemas.openxmlformats.org/officeDocument/2006/relationships">
+  <p:cSld>
+    <p:bg>
+      <p:bgPr>
+        <a:solidFill>
+          <a:srgbClr val="0B0F1A"/>
+        </a:solidFill>
+        <a:effectLst/>
+      </p:bgPr>
+    </p:bg>
+    <p:spTree>
+      <p:nvGrpSpPr>
+        <p:cNvPr id="1" name=""/>
+        <p:cNvGrpSpPr/>
+        <p:nvPr/>
+      </p:nvGrpSpPr>
+      <p:grpSpPr/>
+      <p:sp>
+        <p:nvSpPr>
+          <p:cNvPr id="2" name="TextBox 1"/>
+          <p:cNvSpPr txBox="1"/>
+          <p:nvPr/>
+        </p:nvSpPr>
+        <p:spPr>
+          <a:xfrm>
+            <a:off x="457200" y="274320"/>
+            <a:ext cx="11247120" cy="822960"/>
+          </a:xfrm>
+          <a:prstGeom prst="rect">
+            <a:avLst/>
+          </a:prstGeom>
+          <a:noFill/>
+        </p:spPr>
+        <p:txBody>
+          <a:bodyPr wrap="none">
+            <a:spAutoFit/>
+          </a:bodyPr>
+          <a:lstStyle/>
+          <a:p>
+            <a:pPr>
+              <a:defRPr sz="4000" b="1">
                 <a:solidFill>
                   <a:srgbClr val="FFFFFF"/>
                 </a:solidFill>
               </a:defRPr>
             </a:pPr>
             <a:r>
-              <a:t>Analyze &amp; Advise</a:t>
-            </a:r>
-          </a:p>
-        </p:txBody>
-      </p:sp>
-      <p:sp>
-        <p:nvSpPr>
-          <p:cNvPr id="15" name="TextBox 14"/>
-          <p:cNvSpPr txBox="1"/>
-          <p:nvPr/>
-        </p:nvSpPr>
-        <p:spPr>
-          <a:xfrm>
-            <a:off x="8138159" y="2926080"/>
-            <a:ext cx="3108960" cy="1828800"/>
-          </a:xfrm>
-          <a:prstGeom prst="rect">
-            <a:avLst/>
-          </a:prstGeom>
-          <a:noFill/>
-        </p:spPr>
-        <p:txBody>
-          <a:bodyPr wrap="square">
+              <a:t>Capabilities &amp; Privacy Controls</a:t>
+            </a:r>
+          </a:p>
+        </p:txBody>
+      </p:sp>
+      <p:sp>
+        <p:nvSpPr>
+          <p:cNvPr id="3" name="TextBox 2"/>
+          <p:cNvSpPr txBox="1"/>
+          <p:nvPr/>
+        </p:nvSpPr>
+        <p:spPr>
+          <a:xfrm>
+            <a:off x="457200" y="1005840"/>
+            <a:ext cx="11247120" cy="457200"/>
+          </a:xfrm>
+          <a:prstGeom prst="rect">
+            <a:avLst/>
+          </a:prstGeom>
+          <a:noFill/>
+        </p:spPr>
+        <p:txBody>
+          <a:bodyPr wrap="none">
             <a:spAutoFit/>
           </a:bodyPr>
           <a:lstStyle/>
           <a:p>
-            <a:pPr algn="ctr">
-              <a:defRPr sz="1400">
-                <a:solidFill>
-                  <a:srgbClr val="D1D5DB"/>
-                </a:solidFill>
-              </a:defRPr>
-            </a:pPr>
-            <a:r>
-              <a:t>Review your deck for</a:t>
-            </a:r>
-            <a:br/>
-            <a:r>
-              <a:t>clarity and flow</a:t>
-            </a:r>
-            <a:br/>
-            <a:r>
-              <a:t>Suggest better layouts</a:t>
-            </a:r>
-            <a:br/>
-            <a:r>
-              <a:t>Extract key messages</a:t>
-            </a:r>
-            <a:br/>
-            <a:r>
-              <a:t>Prepare speaker notes</a:t>
-            </a:r>
-          </a:p>
-        </p:txBody>
-      </p:sp>
-      <p:sp>
-        <p:nvSpPr>
-          <p:cNvPr id="16" name="Rounded Rectangle 15"/>
+            <a:pPr>
+              <a:defRPr sz="1800" i="1">
+                <a:solidFill>
+                  <a:srgbClr val="9CA3AF"/>
+                </a:solidFill>
+              </a:defRPr>
+            </a:pPr>
+            <a:r>
+              <a:t>Enable these features before you start — they unlock everything we'll use today</a:t>
+            </a:r>
+          </a:p>
+        </p:txBody>
+      </p:sp>
+      <p:sp>
+        <p:nvSpPr>
+          <p:cNvPr id="4" name="Rounded Rectangle 3"/>
           <p:cNvSpPr/>
           <p:nvPr/>
         </p:nvSpPr>
         <p:spPr>
           <a:xfrm>
-            <a:off x="457200" y="5212080"/>
-            <a:ext cx="11247120" cy="731520"/>
+            <a:off x="457200" y="1737360"/>
+            <a:ext cx="5303520" cy="3931920"/>
           </a:xfrm>
           <a:prstGeom prst="roundRect">
             <a:avLst/>
@@ -49532,7 +50234,7 @@
           <a:solidFill>
             <a:srgbClr val="141A2A"/>
           </a:solidFill>
-          <a:ln w="12700">
+          <a:ln w="19050">
             <a:solidFill>
               <a:srgbClr val="14B8A6"/>
             </a:solidFill>
@@ -49562,14 +50264,49 @@
       </p:sp>
       <p:sp>
         <p:nvSpPr>
-          <p:cNvPr id="17" name="TextBox 16"/>
-          <p:cNvSpPr txBox="1"/>
-          <p:nvPr/>
-        </p:nvSpPr>
-        <p:spPr>
-          <a:xfrm>
-            <a:off x="731520" y="5303520"/>
-            <a:ext cx="10698480" cy="548640"/>
+          <p:cNvPr id="5" name="TextBox 4"/>
+          <p:cNvSpPr txBox="1"/>
+          <p:nvPr/>
+        </p:nvSpPr>
+        <p:spPr>
+          <a:xfrm>
+            <a:off x="731520" y="1920240"/>
+            <a:ext cx="4754880" cy="457200"/>
+          </a:xfrm>
+          <a:prstGeom prst="rect">
+            <a:avLst/>
+          </a:prstGeom>
+          <a:noFill/>
+        </p:spPr>
+        <p:txBody>
+          <a:bodyPr wrap="none">
+            <a:spAutoFit/>
+          </a:bodyPr>
+          <a:lstStyle/>
+          <a:p>
+            <a:pPr>
+              <a:defRPr sz="2200" b="1">
+                <a:solidFill>
+                  <a:srgbClr val="14B8A6"/>
+                </a:solidFill>
+              </a:defRPr>
+            </a:pPr>
+            <a:r>
+              <a:t>Capabilities (Enable All)</a:t>
+            </a:r>
+          </a:p>
+        </p:txBody>
+      </p:sp>
+      <p:sp>
+        <p:nvSpPr>
+          <p:cNvPr id="6" name="TextBox 5"/>
+          <p:cNvSpPr txBox="1"/>
+          <p:nvPr/>
+        </p:nvSpPr>
+        <p:spPr>
+          <a:xfrm>
+            <a:off x="731520" y="2468880"/>
+            <a:ext cx="4754880" cy="2926080"/>
           </a:xfrm>
           <a:prstGeom prst="rect">
             <a:avLst/>
@@ -49582,15 +50319,226 @@
           </a:bodyPr>
           <a:lstStyle/>
           <a:p>
-            <a:pPr algn="ctr">
-              <a:defRPr sz="1500">
-                <a:solidFill>
-                  <a:srgbClr val="9CA3AF"/>
-                </a:solidFill>
-              </a:defRPr>
-            </a:pPr>
-            <a:r>
-              <a:t>Claude now integrates directly into Excel, PowerPoint, and Google Docs — your AI assistant lives inside the tools you already use</a:t>
+            <a:pPr>
+              <a:spcAft>
+                <a:spcPts val="800"/>
+              </a:spcAft>
+              <a:defRPr sz="1600">
+                <a:solidFill>
+                  <a:srgbClr val="D1D5DB"/>
+                </a:solidFill>
+              </a:defRPr>
+            </a:pPr>
+            <a:r>
+              <a:t>✅  Artifacts — documents, code, visualizations</a:t>
+            </a:r>
+          </a:p>
+          <a:p>
+            <a:pPr>
+              <a:spcAft>
+                <a:spcPts val="800"/>
+              </a:spcAft>
+              <a:defRPr sz="1600">
+                <a:solidFill>
+                  <a:srgbClr val="D1D5DB"/>
+                </a:solidFill>
+              </a:defRPr>
+            </a:pPr>
+            <a:r>
+              <a:t>✅  Code execution &amp; file creation — docs, spreadsheets, PPTs, PDFs</a:t>
+            </a:r>
+          </a:p>
+          <a:p>
+            <a:pPr>
+              <a:spcAft>
+                <a:spcPts val="800"/>
+              </a:spcAft>
+              <a:defRPr sz="1600">
+                <a:solidFill>
+                  <a:srgbClr val="D1D5DB"/>
+                </a:solidFill>
+              </a:defRPr>
+            </a:pPr>
+            <a:r>
+              <a:t>✅  Web search — Claude finds current information automatically</a:t>
+            </a:r>
+          </a:p>
+          <a:p>
+            <a:pPr>
+              <a:spcAft>
+                <a:spcPts val="800"/>
+              </a:spcAft>
+              <a:defRPr sz="1600">
+                <a:solidFill>
+                  <a:srgbClr val="D1D5DB"/>
+                </a:solidFill>
+              </a:defRPr>
+            </a:pPr>
+            <a:r>
+              <a:t>✅  Memory — search past chats + learn from history</a:t>
+            </a:r>
+          </a:p>
+        </p:txBody>
+      </p:sp>
+      <p:sp>
+        <p:nvSpPr>
+          <p:cNvPr id="7" name="Rounded Rectangle 6"/>
+          <p:cNvSpPr/>
+          <p:nvPr/>
+        </p:nvSpPr>
+        <p:spPr>
+          <a:xfrm>
+            <a:off x="6217920" y="1737360"/>
+            <a:ext cx="5303520" cy="3931920"/>
+          </a:xfrm>
+          <a:prstGeom prst="roundRect">
+            <a:avLst/>
+          </a:prstGeom>
+          <a:solidFill>
+            <a:srgbClr val="141A2A"/>
+          </a:solidFill>
+          <a:ln w="19050">
+            <a:solidFill>
+              <a:srgbClr val="14B8A6"/>
+            </a:solidFill>
+          </a:ln>
+        </p:spPr>
+        <p:style>
+          <a:lnRef idx="1">
+            <a:schemeClr val="accent1"/>
+          </a:lnRef>
+          <a:fillRef idx="3">
+            <a:schemeClr val="accent1"/>
+          </a:fillRef>
+          <a:effectRef idx="2">
+            <a:schemeClr val="accent1"/>
+          </a:effectRef>
+          <a:fontRef idx="minor">
+            <a:schemeClr val="lt1"/>
+          </a:fontRef>
+        </p:style>
+        <p:txBody>
+          <a:bodyPr rtlCol="0" anchor="ctr"/>
+          <a:lstStyle/>
+          <a:p>
+            <a:pPr algn="ctr"/>
+          </a:p>
+        </p:txBody>
+      </p:sp>
+      <p:sp>
+        <p:nvSpPr>
+          <p:cNvPr id="8" name="TextBox 7"/>
+          <p:cNvSpPr txBox="1"/>
+          <p:nvPr/>
+        </p:nvSpPr>
+        <p:spPr>
+          <a:xfrm>
+            <a:off x="6492240" y="1920240"/>
+            <a:ext cx="4754880" cy="457200"/>
+          </a:xfrm>
+          <a:prstGeom prst="rect">
+            <a:avLst/>
+          </a:prstGeom>
+          <a:noFill/>
+        </p:spPr>
+        <p:txBody>
+          <a:bodyPr wrap="none">
+            <a:spAutoFit/>
+          </a:bodyPr>
+          <a:lstStyle/>
+          <a:p>
+            <a:pPr>
+              <a:defRPr sz="2200" b="1">
+                <a:solidFill>
+                  <a:srgbClr val="14B8A6"/>
+                </a:solidFill>
+              </a:defRPr>
+            </a:pPr>
+            <a:r>
+              <a:t>Privacy Controls</a:t>
+            </a:r>
+          </a:p>
+        </p:txBody>
+      </p:sp>
+      <p:sp>
+        <p:nvSpPr>
+          <p:cNvPr id="9" name="TextBox 8"/>
+          <p:cNvSpPr txBox="1"/>
+          <p:nvPr/>
+        </p:nvSpPr>
+        <p:spPr>
+          <a:xfrm>
+            <a:off x="6492240" y="2468880"/>
+            <a:ext cx="4754880" cy="2926080"/>
+          </a:xfrm>
+          <a:prstGeom prst="rect">
+            <a:avLst/>
+          </a:prstGeom>
+          <a:noFill/>
+        </p:spPr>
+        <p:txBody>
+          <a:bodyPr wrap="square">
+            <a:spAutoFit/>
+          </a:bodyPr>
+          <a:lstStyle/>
+          <a:p>
+            <a:pPr>
+              <a:spcAft>
+                <a:spcPts val="800"/>
+              </a:spcAft>
+              <a:defRPr sz="1600">
+                <a:solidFill>
+                  <a:srgbClr val="D1D5DB"/>
+                </a:solidFill>
+              </a:defRPr>
+            </a:pPr>
+            <a:r>
+              <a:t>🔒  Training opt-out — paid plans OFF by default</a:t>
+            </a:r>
+          </a:p>
+          <a:p>
+            <a:pPr>
+              <a:spcAft>
+                <a:spcPts val="800"/>
+              </a:spcAft>
+              <a:defRPr sz="1600">
+                <a:solidFill>
+                  <a:srgbClr val="D1D5DB"/>
+                </a:solidFill>
+              </a:defRPr>
+            </a:pPr>
+            <a:r>
+              <a:t>🕶️  Incognito chats — not saved, not used for training, not added to memory</a:t>
+            </a:r>
+          </a:p>
+          <a:p>
+            <a:pPr>
+              <a:spcAft>
+                <a:spcPts val="800"/>
+              </a:spcAft>
+              <a:defRPr sz="1600">
+                <a:solidFill>
+                  <a:srgbClr val="D1D5DB"/>
+                </a:solidFill>
+              </a:defRPr>
+            </a:pPr>
+            <a:r>
+              <a:t>⚠️  30-day retention for abuse detection</a:t>
+            </a:r>
+          </a:p>
+          <a:p>
+            <a:pPr>
+              <a:spcAft>
+                <a:spcPts val="800"/>
+              </a:spcAft>
+              <a:defRPr sz="1600">
+                <a:solidFill>
+                  <a:srgbClr val="D1D5DB"/>
+                </a:solidFill>
+              </a:defRPr>
+            </a:pPr>
+            <a:r>
+              <a:t>🏢  Team/Enterprise — zero data retention, full isolation</a:t>
             </a:r>
           </a:p>
         </p:txBody>
@@ -50339,4 +51287,26 @@
     </a:ext>
   </a:extLst>
 </a:theme>
+</file>
+
+<file path=ppt/webextensions/taskpanes.xml><?xml version="1.0" encoding="utf-8"?>
+<wetp:taskpanes xmlns:wetp="http://schemas.microsoft.com/office/webextensions/taskpanes/2010/11">
+  <wetp:taskpane dockstate="right" visibility="0" width="438" row="1">
+    <wetp:webextensionref xmlns:r="http://schemas.openxmlformats.org/officeDocument/2006/relationships" r:id="rId1"/>
+  </wetp:taskpane>
+</wetp:taskpanes>
+</file>
+
+<file path=ppt/webextensions/webextension1.xml><?xml version="1.0" encoding="utf-8"?>
+<we:webextension xmlns:we="http://schemas.microsoft.com/office/webextensions/webextension/2010/11" id="{C920E337-D44A-4148-B6B4-463D6CF2BDB0}">
+  <we:reference id="f5f369e5-aa35-49d7-ad7b-638152ddb008" version="1.0.0.0" store="EXCatalog" storeType="EXCatalog"/>
+  <we:alternateReferences>
+    <we:reference id="WA200010001" version="1.0.0.0" store="en-US" storeType="OMEX"/>
+  </we:alternateReferences>
+  <we:properties>
+    <we:property name="Office.AutoShowTaskpaneWithDocument" value="true"/>
+  </we:properties>
+  <we:bindings/>
+  <we:snapshot xmlns:r="http://schemas.openxmlformats.org/officeDocument/2006/relationships"/>
+</we:webextension>
 </file>
--- a/slides/Day1_Claude_for_Business.pptx
+++ b/slides/Day1_Claude_for_Business.pptx
@@ -85,6 +85,7 @@
     <p:sldId id="323" r:id="rId75"/>
     <p:sldId id="350" r:id="rId76"/>
     <p:sldId id="353" r:id="rId97"/>
+    <p:sldId id="354" r:id="rId98"/>
     <p:sldId id="325" r:id="rId77"/>
     <p:sldId id="326" r:id="rId78"/>
     <p:sldId id="327" r:id="rId79"/>
@@ -4051,225 +4052,6 @@
 </p:notes>
 </file>
 
-<file path=ppt/notesSlides/notesSlide29.xml><?xml version="1.0" encoding="utf-8"?>
-<p:notes xmlns:a="http://schemas.openxmlformats.org/drawingml/2006/main" xmlns:r="http://schemas.openxmlformats.org/officeDocument/2006/relationships" xmlns:p="http://schemas.openxmlformats.org/presentationml/2006/main">
-  <p:cSld>
-    <p:spTree>
-      <p:nvGrpSpPr>
-        <p:cNvPr id="1" name="">
-          <a:extLst>
-            <a:ext uri="{FF2B5EF4-FFF2-40B4-BE49-F238E27FC236}">
-              <a16:creationId xmlns:a16="http://schemas.microsoft.com/office/drawing/2014/main" id="{DF15C318-5F1F-F80D-938E-F8A08E8E3A52}"/>
-            </a:ext>
-          </a:extLst>
-        </p:cNvPr>
-        <p:cNvGrpSpPr/>
-        <p:nvPr/>
-      </p:nvGrpSpPr>
-      <p:grpSpPr>
-        <a:xfrm>
-          <a:off x="0" y="0"/>
-          <a:ext cx="0" cy="0"/>
-          <a:chOff x="0" y="0"/>
-          <a:chExt cx="0" cy="0"/>
-        </a:xfrm>
-      </p:grpSpPr>
-      <p:sp>
-        <p:nvSpPr>
-          <p:cNvPr id="2" name="Slide Image Placeholder 1">
-            <a:extLst>
-              <a:ext uri="{FF2B5EF4-FFF2-40B4-BE49-F238E27FC236}">
-                <a16:creationId xmlns:a16="http://schemas.microsoft.com/office/drawing/2014/main" id="{3C5151CC-8B2A-F718-EF45-D9B57AEC6CC1}"/>
-              </a:ext>
-            </a:extLst>
-          </p:cNvPr>
-          <p:cNvSpPr>
-            <a:spLocks noGrp="1" noRot="1" noChangeAspect="1"/>
-          </p:cNvSpPr>
-          <p:nvPr>
-            <p:ph type="sldImg" idx="2"/>
-          </p:nvPr>
-        </p:nvSpPr>
-        <p:spPr/>
-      </p:sp>
-      <p:sp>
-        <p:nvSpPr>
-          <p:cNvPr id="3" name="Notes Placeholder 2">
-            <a:extLst>
-              <a:ext uri="{FF2B5EF4-FFF2-40B4-BE49-F238E27FC236}">
-                <a16:creationId xmlns:a16="http://schemas.microsoft.com/office/drawing/2014/main" id="{35BE5E34-B5B4-A94B-E835-3901220AAFAB}"/>
-              </a:ext>
-            </a:extLst>
-          </p:cNvPr>
-          <p:cNvSpPr>
-            <a:spLocks noGrp="1"/>
-          </p:cNvSpPr>
-          <p:nvPr>
-            <p:ph type="body" sz="quarter" idx="3"/>
-          </p:nvPr>
-        </p:nvSpPr>
-        <p:spPr/>
-        <p:txBody>
-          <a:bodyPr/>
-          <a:lstStyle/>
-          <a:p>
-            <a:r>
-              <a:t>TIME: 5 min</a:t>
-            </a:r>
-          </a:p>
-          <a:p>
-            <a:endParaRPr/>
-          </a:p>
-          <a:p>
-            <a:r>
-              <a:t>OPEN WITH:</a:t>
-            </a:r>
-          </a:p>
-          <a:p>
-            <a:r>
-              <a:t>   The Claude desktop app is evolving - it's adding autonomous agent capabilities. This is where Anthropic is taking the platform. Download the desktop app, you get these features.</a:t>
-            </a:r>
-          </a:p>
-          <a:p>
-            <a:endParaRPr/>
-          </a:p>
-          <a:p>
-            <a:r>
-              <a:t>KEY POINTS:</a:t>
-            </a:r>
-          </a:p>
-          <a:p>
-            <a:r>
-              <a:t>   * Claude Desktop App (Windows + Mac) is adding autonomous agent capabilities</a:t>
-            </a:r>
-          </a:p>
-          <a:p>
-            <a:r>
-              <a:t>   * This is the direction: Desktop = advanced interface with autonomous work, Web = real-time collaboration</a:t>
-            </a:r>
-          </a:p>
-          <a:p>
-            <a:r>
-              <a:t>   * Download desktop app → You get web features PLUS autonomous agents as they roll out</a:t>
-            </a:r>
-          </a:p>
-          <a:p>
-            <a:r>
-              <a:t>   * UI: Three tabs at top - Chat (regular), Cowork (autonomous), Code (developer)</a:t>
-            </a:r>
-          </a:p>
-          <a:p>
-            <a:r>
-              <a:t>   * Cowork interface: Pick preset task OR type custom command, choose folder, select model, click 'Let's go'</a:t>
-            </a:r>
-          </a:p>
-          <a:p>
-            <a:r>
-              <a:t>   * You set direction with detail level: High-level overview, MVP scoping, Detailed spec, or custom</a:t>
-            </a:r>
-          </a:p>
-          <a:p>
-            <a:r>
-              <a:t>   * Claude works in background while you attend meetings, work on other tasks, or go to lunch</a:t>
-            </a:r>
-          </a:p>
-          <a:p>
-            <a:r>
-              <a:t>   * Check progress when ready - it's still working if you don't check in</a:t>
-            </a:r>
-          </a:p>
-          <a:p>
-            <a:r>
-              <a:t>   * PREVIEW status: Early access for Claude Pro/Team subscribers, expect some rough edges</a:t>
-            </a:r>
-          </a:p>
-          <a:p>
-            <a:r>
-              <a:t>   * This is where AI is heading - we'll explore these concepts deeply on Day 4 (Agent Teams)</a:t>
-            </a:r>
-          </a:p>
-          <a:p>
-            <a:r>
-              <a:t>   * Task presets like 'Optimize my week', 'Organize screenshots', 'Find insights in files' - one-click delegation</a:t>
-            </a:r>
-          </a:p>
-          <a:p>
-            <a:endParaRPr/>
-          </a:p>
-          <a:p>
-            <a:r>
-              <a:t>ASK THE CLASS:</a:t>
-            </a:r>
-          </a:p>
-          <a:p>
-            <a:r>
-              <a:t>   "What's a task you do monthly that takes 2-3 hours you'd love to delegate completely?"</a:t>
-            </a:r>
-          </a:p>
-          <a:p>
-            <a:r>
-              <a:t>   [PAUSE for 30-60 seconds]</a:t>
-            </a:r>
-          </a:p>
-          <a:p>
-            <a:endParaRPr/>
-          </a:p>
-          <a:p>
-            <a:r>
-              <a:t>REAL-WORLD EXAMPLE:</a:t>
-            </a:r>
-          </a:p>
-          <a:p>
-            <a:r>
-              <a:t>   Product manager scenario: You need competitive analysis of 5 products. Claude.ai: You spend 45 minutes prompting back-and-forth. Claude for Work: Tell it 'Research 5 competitors, analyze features, create comparison table with pricing', choose detail level, walk away. Come back in an hour to polished analysis.</a:t>
-            </a:r>
-          </a:p>
-          <a:p>
-            <a:endParaRPr/>
-          </a:p>
-          <a:p>
-            <a:r>
-              <a:t>TRANSITION:</a:t>
-            </a:r>
-          </a:p>
-          <a:p>
-            <a:r>
-              <a:t>   Let me show you what kinds of tasks work best with this</a:t>
-            </a:r>
-          </a:p>
-        </p:txBody>
-      </p:sp>
-      <p:sp>
-        <p:nvSpPr>
-          <p:cNvPr id="4" name="Slide Number Placeholder 3">
-            <a:extLst>
-              <a:ext uri="{FF2B5EF4-FFF2-40B4-BE49-F238E27FC236}">
-                <a16:creationId xmlns:a16="http://schemas.microsoft.com/office/drawing/2014/main" id="{7F3407F3-9F10-26DD-E643-5064369FE00E}"/>
-              </a:ext>
-            </a:extLst>
-          </p:cNvPr>
-          <p:cNvSpPr>
-            <a:spLocks noGrp="1"/>
-          </p:cNvSpPr>
-          <p:nvPr>
-            <p:ph type="sldNum" sz="quarter" idx="5"/>
-          </p:nvPr>
-        </p:nvSpPr>
-        <p:spPr/>
-      </p:sp>
-    </p:spTree>
-    <p:extLst>
-      <p:ext uri="{BB962C8B-B14F-4D97-AF65-F5344CB8AC3E}">
-        <p14:creationId xmlns:p14="http://schemas.microsoft.com/office/powerpoint/2010/main" val="1765566828"/>
-      </p:ext>
-    </p:extLst>
-  </p:cSld>
-  <p:clrMapOvr>
-    <a:masterClrMapping/>
-  </p:clrMapOvr>
-</p:notes>
-</file>
-
 <file path=ppt/notesSlides/notesSlide3.xml><?xml version="1.0" encoding="utf-8"?>
 <p:notes xmlns:a="http://schemas.openxmlformats.org/drawingml/2006/main" xmlns:r="http://schemas.openxmlformats.org/officeDocument/2006/relationships" xmlns:p="http://schemas.openxmlformats.org/presentationml/2006/main">
   <p:cSld>
@@ -43701,7 +43483,7 @@
 </file>
 
 <file path=ppt/slides/slide77.xml><?xml version="1.0" encoding="utf-8"?>
-<p:sld xmlns:a="http://schemas.openxmlformats.org/drawingml/2006/main" xmlns:r="http://schemas.openxmlformats.org/officeDocument/2006/relationships" xmlns:p="http://schemas.openxmlformats.org/presentationml/2006/main">
+<p:sld xmlns:a="http://schemas.openxmlformats.org/drawingml/2006/main" xmlns:p="http://schemas.openxmlformats.org/presentationml/2006/main" xmlns:r="http://schemas.openxmlformats.org/officeDocument/2006/relationships">
   <p:cSld>
     <p:bg>
       <p:bgPr>
@@ -43717,33 +43499,98 @@
         <p:cNvGrpSpPr/>
         <p:nvPr/>
       </p:nvGrpSpPr>
-      <p:grpSpPr>
-        <a:xfrm>
-          <a:off x="0" y="0"/>
-          <a:ext cx="0" cy="0"/>
-          <a:chOff x="0" y="0"/>
-          <a:chExt cx="0" cy="0"/>
-        </a:xfrm>
-      </p:grpSpPr>
-      <p:sp>
-        <p:nvSpPr>
-          <p:cNvPr id="2" name="Rectangle 1"/>
+      <p:grpSpPr/>
+      <p:sp>
+        <p:nvSpPr>
+          <p:cNvPr id="2" name="TextBox 1"/>
+          <p:cNvSpPr txBox="1"/>
+          <p:nvPr/>
+        </p:nvSpPr>
+        <p:spPr>
+          <a:xfrm>
+            <a:off x="457200" y="274320"/>
+            <a:ext cx="11247120" cy="822960"/>
+          </a:xfrm>
+          <a:prstGeom prst="rect">
+            <a:avLst/>
+          </a:prstGeom>
+          <a:noFill/>
+        </p:spPr>
+        <p:txBody>
+          <a:bodyPr wrap="none">
+            <a:spAutoFit/>
+          </a:bodyPr>
+          <a:lstStyle/>
+          <a:p>
+            <a:pPr>
+              <a:defRPr sz="4000" b="1">
+                <a:solidFill>
+                  <a:srgbClr val="FFFFFF"/>
+                </a:solidFill>
+              </a:defRPr>
+            </a:pPr>
+            <a:r>
+              <a:t>Claude for Chrome</a:t>
+            </a:r>
+          </a:p>
+        </p:txBody>
+      </p:sp>
+      <p:sp>
+        <p:nvSpPr>
+          <p:cNvPr id="3" name="TextBox 2"/>
+          <p:cNvSpPr txBox="1"/>
+          <p:nvPr/>
+        </p:nvSpPr>
+        <p:spPr>
+          <a:xfrm>
+            <a:off x="457200" y="1005840"/>
+            <a:ext cx="11247120" cy="457200"/>
+          </a:xfrm>
+          <a:prstGeom prst="rect">
+            <a:avLst/>
+          </a:prstGeom>
+          <a:noFill/>
+        </p:spPr>
+        <p:txBody>
+          <a:bodyPr wrap="none">
+            <a:spAutoFit/>
+          </a:bodyPr>
+          <a:lstStyle/>
+          <a:p>
+            <a:pPr>
+              <a:defRPr sz="1800" i="1">
+                <a:solidFill>
+                  <a:srgbClr val="9CA3AF"/>
+                </a:solidFill>
+              </a:defRPr>
+            </a:pPr>
+            <a:r>
+              <a:t>AI assistant in your browser side panel — sees your screen, acts on any webpage</a:t>
+            </a:r>
+          </a:p>
+        </p:txBody>
+      </p:sp>
+      <p:sp>
+        <p:nvSpPr>
+          <p:cNvPr id="4" name="Rounded Rectangle 3"/>
           <p:cNvSpPr/>
           <p:nvPr/>
         </p:nvSpPr>
         <p:spPr>
           <a:xfrm>
-            <a:off x="0" y="1828800"/>
-            <a:ext cx="137160" cy="3200400"/>
-          </a:xfrm>
-          <a:prstGeom prst="rect">
+            <a:off x="457200" y="1737360"/>
+            <a:ext cx="3474720" cy="3474720"/>
+          </a:xfrm>
+          <a:prstGeom prst="roundRect">
             <a:avLst/>
           </a:prstGeom>
           <a:solidFill>
-            <a:srgbClr val="00D4AA"/>
+            <a:srgbClr val="141A2A"/>
           </a:solidFill>
-          <a:ln>
-            <a:noFill/>
+          <a:ln w="19050">
+            <a:solidFill>
+              <a:srgbClr val="14B8A6"/>
+            </a:solidFill>
           </a:ln>
         </p:spPr>
         <p:style>
@@ -43765,20 +43612,85 @@
           <a:lstStyle/>
           <a:p>
             <a:pPr algn="ctr"/>
-            <a:endParaRPr/>
-          </a:p>
-        </p:txBody>
-      </p:sp>
-      <p:sp>
-        <p:nvSpPr>
-          <p:cNvPr id="3" name="TextBox 2"/>
-          <p:cNvSpPr txBox="1"/>
-          <p:nvPr/>
-        </p:nvSpPr>
-        <p:spPr>
-          <a:xfrm>
-            <a:off x="457200" y="2286000"/>
-            <a:ext cx="11277295" cy="1371600"/>
+          </a:p>
+        </p:txBody>
+      </p:sp>
+      <p:sp>
+        <p:nvSpPr>
+          <p:cNvPr id="5" name="TextBox 4"/>
+          <p:cNvSpPr txBox="1"/>
+          <p:nvPr/>
+        </p:nvSpPr>
+        <p:spPr>
+          <a:xfrm>
+            <a:off x="640080" y="1920240"/>
+            <a:ext cx="3108960" cy="457200"/>
+          </a:xfrm>
+          <a:prstGeom prst="rect">
+            <a:avLst/>
+          </a:prstGeom>
+          <a:noFill/>
+        </p:spPr>
+        <p:txBody>
+          <a:bodyPr wrap="none">
+            <a:spAutoFit/>
+          </a:bodyPr>
+          <a:lstStyle/>
+          <a:p>
+            <a:pPr algn="ctr">
+              <a:defRPr sz="3000"/>
+            </a:pPr>
+            <a:r>
+              <a:t>🌐</a:t>
+            </a:r>
+          </a:p>
+        </p:txBody>
+      </p:sp>
+      <p:sp>
+        <p:nvSpPr>
+          <p:cNvPr id="6" name="TextBox 5"/>
+          <p:cNvSpPr txBox="1"/>
+          <p:nvPr/>
+        </p:nvSpPr>
+        <p:spPr>
+          <a:xfrm>
+            <a:off x="640080" y="2377440"/>
+            <a:ext cx="3108960" cy="457200"/>
+          </a:xfrm>
+          <a:prstGeom prst="rect">
+            <a:avLst/>
+          </a:prstGeom>
+          <a:noFill/>
+        </p:spPr>
+        <p:txBody>
+          <a:bodyPr wrap="none">
+            <a:spAutoFit/>
+          </a:bodyPr>
+          <a:lstStyle/>
+          <a:p>
+            <a:pPr algn="ctr">
+              <a:defRPr sz="2000" b="1">
+                <a:solidFill>
+                  <a:srgbClr val="FFFFFF"/>
+                </a:solidFill>
+              </a:defRPr>
+            </a:pPr>
+            <a:r>
+              <a:t>Browse with AI</a:t>
+            </a:r>
+          </a:p>
+        </p:txBody>
+      </p:sp>
+      <p:sp>
+        <p:nvSpPr>
+          <p:cNvPr id="7" name="TextBox 6"/>
+          <p:cNvSpPr txBox="1"/>
+          <p:nvPr/>
+        </p:nvSpPr>
+        <p:spPr>
+          <a:xfrm>
+            <a:off x="640080" y="2926080"/>
+            <a:ext cx="3108960" cy="2011680"/>
           </a:xfrm>
           <a:prstGeom prst="rect">
             <a:avLst/>
@@ -43791,29 +43703,156 @@
           </a:bodyPr>
           <a:lstStyle/>
           <a:p>
-            <a:pPr>
-              <a:defRPr sz="5600" b="1">
+            <a:pPr algn="ctr">
+              <a:defRPr sz="1400">
+                <a:solidFill>
+                  <a:srgbClr val="D1D5DB"/>
+                </a:solidFill>
+              </a:defRPr>
+            </a:pPr>
+            <a:r>
+              <a:t>Side panel stays open</a:t>
+            </a:r>
+            <a:br/>
+            <a:r>
+              <a:t>while you browse.</a:t>
+            </a:r>
+            <a:br/>
+            <a:r>
+              <a:t>Ask questions about</a:t>
+            </a:r>
+            <a:br/>
+            <a:r>
+              <a:t>any page you're viewing.</a:t>
+            </a:r>
+            <a:br/>
+            <a:r>
+              <a:t>No copy-paste needed.</a:t>
+            </a:r>
+          </a:p>
+        </p:txBody>
+      </p:sp>
+      <p:sp>
+        <p:nvSpPr>
+          <p:cNvPr id="8" name="Rounded Rectangle 7"/>
+          <p:cNvSpPr/>
+          <p:nvPr/>
+        </p:nvSpPr>
+        <p:spPr>
+          <a:xfrm>
+            <a:off x="4206240" y="1737360"/>
+            <a:ext cx="3474720" cy="3474720"/>
+          </a:xfrm>
+          <a:prstGeom prst="roundRect">
+            <a:avLst/>
+          </a:prstGeom>
+          <a:solidFill>
+            <a:srgbClr val="141A2A"/>
+          </a:solidFill>
+          <a:ln w="19050">
+            <a:solidFill>
+              <a:srgbClr val="14B8A6"/>
+            </a:solidFill>
+          </a:ln>
+        </p:spPr>
+        <p:style>
+          <a:lnRef idx="1">
+            <a:schemeClr val="accent1"/>
+          </a:lnRef>
+          <a:fillRef idx="3">
+            <a:schemeClr val="accent1"/>
+          </a:fillRef>
+          <a:effectRef idx="2">
+            <a:schemeClr val="accent1"/>
+          </a:effectRef>
+          <a:fontRef idx="minor">
+            <a:schemeClr val="lt1"/>
+          </a:fontRef>
+        </p:style>
+        <p:txBody>
+          <a:bodyPr rtlCol="0" anchor="ctr"/>
+          <a:lstStyle/>
+          <a:p>
+            <a:pPr algn="ctr"/>
+          </a:p>
+        </p:txBody>
+      </p:sp>
+      <p:sp>
+        <p:nvSpPr>
+          <p:cNvPr id="9" name="TextBox 8"/>
+          <p:cNvSpPr txBox="1"/>
+          <p:nvPr/>
+        </p:nvSpPr>
+        <p:spPr>
+          <a:xfrm>
+            <a:off x="4389120" y="1920240"/>
+            <a:ext cx="3108960" cy="457200"/>
+          </a:xfrm>
+          <a:prstGeom prst="rect">
+            <a:avLst/>
+          </a:prstGeom>
+          <a:noFill/>
+        </p:spPr>
+        <p:txBody>
+          <a:bodyPr wrap="none">
+            <a:spAutoFit/>
+          </a:bodyPr>
+          <a:lstStyle/>
+          <a:p>
+            <a:pPr algn="ctr">
+              <a:defRPr sz="3000"/>
+            </a:pPr>
+            <a:r>
+              <a:t>📋</a:t>
+            </a:r>
+          </a:p>
+        </p:txBody>
+      </p:sp>
+      <p:sp>
+        <p:nvSpPr>
+          <p:cNvPr id="10" name="TextBox 9"/>
+          <p:cNvSpPr txBox="1"/>
+          <p:nvPr/>
+        </p:nvSpPr>
+        <p:spPr>
+          <a:xfrm>
+            <a:off x="4389120" y="2377440"/>
+            <a:ext cx="3108960" cy="457200"/>
+          </a:xfrm>
+          <a:prstGeom prst="rect">
+            <a:avLst/>
+          </a:prstGeom>
+          <a:noFill/>
+        </p:spPr>
+        <p:txBody>
+          <a:bodyPr wrap="none">
+            <a:spAutoFit/>
+          </a:bodyPr>
+          <a:lstStyle/>
+          <a:p>
+            <a:pPr algn="ctr">
+              <a:defRPr sz="2000" b="1">
                 <a:solidFill>
                   <a:srgbClr val="FFFFFF"/>
                 </a:solidFill>
               </a:defRPr>
             </a:pPr>
             <a:r>
-              <a:t>Role-Specific Workflows</a:t>
-            </a:r>
-          </a:p>
-        </p:txBody>
-      </p:sp>
-      <p:sp>
-        <p:nvSpPr>
-          <p:cNvPr id="4" name="TextBox 3"/>
-          <p:cNvSpPr txBox="1"/>
-          <p:nvPr/>
-        </p:nvSpPr>
-        <p:spPr>
-          <a:xfrm>
-            <a:off x="457200" y="3840480"/>
-            <a:ext cx="11277295" cy="914400"/>
+              <a:t>Summarize &amp; Extract</a:t>
+            </a:r>
+          </a:p>
+        </p:txBody>
+      </p:sp>
+      <p:sp>
+        <p:nvSpPr>
+          <p:cNvPr id="11" name="TextBox 10"/>
+          <p:cNvSpPr txBox="1"/>
+          <p:nvPr/>
+        </p:nvSpPr>
+        <p:spPr>
+          <a:xfrm>
+            <a:off x="4389120" y="2926080"/>
+            <a:ext cx="3108960" cy="2011680"/>
           </a:xfrm>
           <a:prstGeom prst="rect">
             <a:avLst/>
@@ -43826,15 +43865,228 @@
           </a:bodyPr>
           <a:lstStyle/>
           <a:p>
-            <a:pPr>
-              <a:defRPr sz="2400">
-                <a:solidFill>
-                  <a:srgbClr val="8B95A5"/>
-                </a:solidFill>
-              </a:defRPr>
-            </a:pPr>
-            <a:r>
-              <a:t>Claude in action for different jobs</a:t>
+            <a:pPr algn="ctr">
+              <a:defRPr sz="1400">
+                <a:solidFill>
+                  <a:srgbClr val="D1D5DB"/>
+                </a:solidFill>
+              </a:defRPr>
+            </a:pPr>
+            <a:r>
+              <a:t>Summarize long articles</a:t>
+            </a:r>
+            <a:br/>
+            <a:r>
+              <a:t>Extract key data points</a:t>
+            </a:r>
+            <a:br/>
+            <a:r>
+              <a:t>Compare across tabs</a:t>
+            </a:r>
+            <a:br/>
+            <a:r>
+              <a:t>Pull info from tables</a:t>
+            </a:r>
+            <a:br/>
+            <a:r>
+              <a:t>Research in half the time</a:t>
+            </a:r>
+          </a:p>
+        </p:txBody>
+      </p:sp>
+      <p:sp>
+        <p:nvSpPr>
+          <p:cNvPr id="12" name="Rounded Rectangle 11"/>
+          <p:cNvSpPr/>
+          <p:nvPr/>
+        </p:nvSpPr>
+        <p:spPr>
+          <a:xfrm>
+            <a:off x="7955279" y="1737360"/>
+            <a:ext cx="3474720" cy="3474720"/>
+          </a:xfrm>
+          <a:prstGeom prst="roundRect">
+            <a:avLst/>
+          </a:prstGeom>
+          <a:solidFill>
+            <a:srgbClr val="141A2A"/>
+          </a:solidFill>
+          <a:ln w="19050">
+            <a:solidFill>
+              <a:srgbClr val="14B8A6"/>
+            </a:solidFill>
+          </a:ln>
+        </p:spPr>
+        <p:style>
+          <a:lnRef idx="1">
+            <a:schemeClr val="accent1"/>
+          </a:lnRef>
+          <a:fillRef idx="3">
+            <a:schemeClr val="accent1"/>
+          </a:fillRef>
+          <a:effectRef idx="2">
+            <a:schemeClr val="accent1"/>
+          </a:effectRef>
+          <a:fontRef idx="minor">
+            <a:schemeClr val="lt1"/>
+          </a:fontRef>
+        </p:style>
+        <p:txBody>
+          <a:bodyPr rtlCol="0" anchor="ctr"/>
+          <a:lstStyle/>
+          <a:p>
+            <a:pPr algn="ctr"/>
+          </a:p>
+        </p:txBody>
+      </p:sp>
+      <p:sp>
+        <p:nvSpPr>
+          <p:cNvPr id="13" name="TextBox 12"/>
+          <p:cNvSpPr txBox="1"/>
+          <p:nvPr/>
+        </p:nvSpPr>
+        <p:spPr>
+          <a:xfrm>
+            <a:off x="8138159" y="1920240"/>
+            <a:ext cx="3108960" cy="457200"/>
+          </a:xfrm>
+          <a:prstGeom prst="rect">
+            <a:avLst/>
+          </a:prstGeom>
+          <a:noFill/>
+        </p:spPr>
+        <p:txBody>
+          <a:bodyPr wrap="none">
+            <a:spAutoFit/>
+          </a:bodyPr>
+          <a:lstStyle/>
+          <a:p>
+            <a:pPr algn="ctr">
+              <a:defRPr sz="3000"/>
+            </a:pPr>
+            <a:r>
+              <a:t>⚡</a:t>
+            </a:r>
+          </a:p>
+        </p:txBody>
+      </p:sp>
+      <p:sp>
+        <p:nvSpPr>
+          <p:cNvPr id="14" name="TextBox 13"/>
+          <p:cNvSpPr txBox="1"/>
+          <p:nvPr/>
+        </p:nvSpPr>
+        <p:spPr>
+          <a:xfrm>
+            <a:off x="8138159" y="2377440"/>
+            <a:ext cx="3108960" cy="457200"/>
+          </a:xfrm>
+          <a:prstGeom prst="rect">
+            <a:avLst/>
+          </a:prstGeom>
+          <a:noFill/>
+        </p:spPr>
+        <p:txBody>
+          <a:bodyPr wrap="none">
+            <a:spAutoFit/>
+          </a:bodyPr>
+          <a:lstStyle/>
+          <a:p>
+            <a:pPr algn="ctr">
+              <a:defRPr sz="2000" b="1">
+                <a:solidFill>
+                  <a:srgbClr val="FFFFFF"/>
+                </a:solidFill>
+              </a:defRPr>
+            </a:pPr>
+            <a:r>
+              <a:t>Automate Workflows</a:t>
+            </a:r>
+          </a:p>
+        </p:txBody>
+      </p:sp>
+      <p:sp>
+        <p:nvSpPr>
+          <p:cNvPr id="15" name="TextBox 14"/>
+          <p:cNvSpPr txBox="1"/>
+          <p:nvPr/>
+        </p:nvSpPr>
+        <p:spPr>
+          <a:xfrm>
+            <a:off x="8138159" y="2926080"/>
+            <a:ext cx="3108960" cy="2011680"/>
+          </a:xfrm>
+          <a:prstGeom prst="rect">
+            <a:avLst/>
+          </a:prstGeom>
+          <a:noFill/>
+        </p:spPr>
+        <p:txBody>
+          <a:bodyPr wrap="square">
+            <a:spAutoFit/>
+          </a:bodyPr>
+          <a:lstStyle/>
+          <a:p>
+            <a:pPr algn="ctr">
+              <a:defRPr sz="1400">
+                <a:solidFill>
+                  <a:srgbClr val="D1D5DB"/>
+                </a:solidFill>
+              </a:defRPr>
+            </a:pPr>
+            <a:r>
+              <a:t>Fill out web forms</a:t>
+            </a:r>
+            <a:br/>
+            <a:r>
+              <a:t>Draft emails in Gmail</a:t>
+            </a:r>
+            <a:br/>
+            <a:r>
+              <a:t>Navigate complex sites</a:t>
+            </a:r>
+            <a:br/>
+            <a:r>
+              <a:t>Automate repetitive tasks</a:t>
+            </a:r>
+            <a:br/>
+            <a:r>
+              <a:t>Claude sees what you see</a:t>
+            </a:r>
+          </a:p>
+        </p:txBody>
+      </p:sp>
+      <p:sp>
+        <p:nvSpPr>
+          <p:cNvPr id="16" name="TextBox 15"/>
+          <p:cNvSpPr txBox="1"/>
+          <p:nvPr/>
+        </p:nvSpPr>
+        <p:spPr>
+          <a:xfrm>
+            <a:off x="457200" y="5486400"/>
+            <a:ext cx="11247120" cy="457200"/>
+          </a:xfrm>
+          <a:prstGeom prst="rect">
+            <a:avLst/>
+          </a:prstGeom>
+          <a:noFill/>
+        </p:spPr>
+        <p:txBody>
+          <a:bodyPr wrap="none">
+            <a:spAutoFit/>
+          </a:bodyPr>
+          <a:lstStyle/>
+          <a:p>
+            <a:pPr algn="ctr">
+              <a:defRPr sz="1500" i="1">
+                <a:solidFill>
+                  <a:srgbClr val="14B8A6"/>
+                </a:solidFill>
+              </a:defRPr>
+            </a:pPr>
+            <a:r>
+              <a:t>Free Chrome extension  •  Install from Chrome Web Store  •  Works with your existing Claude account</a:t>
             </a:r>
           </a:p>
         </p:txBody>
@@ -43874,97 +44126,16 @@
       </p:grpSpPr>
       <p:sp>
         <p:nvSpPr>
-          <p:cNvPr id="2" name="TextBox 1"/>
-          <p:cNvSpPr txBox="1"/>
-          <p:nvPr/>
-        </p:nvSpPr>
-        <p:spPr>
-          <a:xfrm>
-            <a:off x="457200" y="365760"/>
-            <a:ext cx="11277295" cy="731520"/>
-          </a:xfrm>
-          <a:prstGeom prst="rect">
-            <a:avLst/>
-          </a:prstGeom>
-          <a:noFill/>
-        </p:spPr>
-        <p:txBody>
-          <a:bodyPr wrap="none">
-            <a:spAutoFit/>
-          </a:bodyPr>
-          <a:lstStyle/>
-          <a:p>
-            <a:pPr algn="ctr">
-              <a:defRPr sz="3600" b="1">
-                <a:solidFill>
-                  <a:srgbClr val="FFFFFF"/>
-                </a:solidFill>
-              </a:defRPr>
-            </a:pPr>
-            <a:r>
-              <a:t>Marketing Workflow</a:t>
-            </a:r>
-          </a:p>
-        </p:txBody>
-      </p:sp>
-      <p:sp>
-        <p:nvSpPr>
-          <p:cNvPr id="3" name="Rounded Rectangle 2"/>
+          <p:cNvPr id="2" name="Rectangle 1"/>
           <p:cNvSpPr/>
           <p:nvPr/>
         </p:nvSpPr>
         <p:spPr>
           <a:xfrm>
-            <a:off x="2941167" y="1371600"/>
-            <a:ext cx="822960" cy="822960"/>
-          </a:xfrm>
-          <a:prstGeom prst="roundRect">
-            <a:avLst/>
-          </a:prstGeom>
-          <a:solidFill>
-            <a:srgbClr val="141A26"/>
-          </a:solidFill>
-          <a:ln w="25400">
-            <a:solidFill>
-              <a:srgbClr val="00D4AA"/>
-            </a:solidFill>
-          </a:ln>
-        </p:spPr>
-        <p:style>
-          <a:lnRef idx="1">
-            <a:schemeClr val="accent1"/>
-          </a:lnRef>
-          <a:fillRef idx="3">
-            <a:schemeClr val="accent1"/>
-          </a:fillRef>
-          <a:effectRef idx="2">
-            <a:schemeClr val="accent1"/>
-          </a:effectRef>
-          <a:fontRef idx="minor">
-            <a:schemeClr val="lt1"/>
-          </a:fontRef>
-        </p:style>
-        <p:txBody>
-          <a:bodyPr rtlCol="0" anchor="ctr"/>
-          <a:lstStyle/>
-          <a:p>
-            <a:pPr algn="ctr"/>
-            <a:endParaRPr/>
-          </a:p>
-        </p:txBody>
-      </p:sp>
-      <p:sp>
-        <p:nvSpPr>
-          <p:cNvPr id="4" name="Oval 3"/>
-          <p:cNvSpPr/>
-          <p:nvPr/>
-        </p:nvSpPr>
-        <p:spPr>
-          <a:xfrm>
-            <a:off x="3604107" y="1211580"/>
-            <a:ext cx="320040" cy="320040"/>
-          </a:xfrm>
-          <a:prstGeom prst="ellipse">
+            <a:off x="0" y="1828800"/>
+            <a:ext cx="137160" cy="3200400"/>
+          </a:xfrm>
+          <a:prstGeom prst="rect">
             <a:avLst/>
           </a:prstGeom>
           <a:solidFill>
@@ -43999,935 +44170,14 @@
       </p:sp>
       <p:sp>
         <p:nvSpPr>
-          <p:cNvPr id="5" name="TextBox 4"/>
-          <p:cNvSpPr txBox="1"/>
-          <p:nvPr/>
-        </p:nvSpPr>
-        <p:spPr>
-          <a:xfrm>
-            <a:off x="3604107" y="1211580"/>
-            <a:ext cx="320040" cy="320040"/>
-          </a:xfrm>
-          <a:prstGeom prst="rect">
-            <a:avLst/>
-          </a:prstGeom>
-          <a:noFill/>
-        </p:spPr>
-        <p:txBody>
-          <a:bodyPr wrap="none" anchor="ctr">
-            <a:spAutoFit/>
-          </a:bodyPr>
-          <a:lstStyle/>
-          <a:p>
-            <a:pPr algn="ctr">
-              <a:defRPr sz="1400" b="1">
-                <a:solidFill>
-                  <a:srgbClr val="0B0F1A"/>
-                </a:solidFill>
-              </a:defRPr>
-            </a:pPr>
-            <a:r>
-              <a:t>1</a:t>
-            </a:r>
-          </a:p>
-        </p:txBody>
-      </p:sp>
-      <p:sp>
-        <p:nvSpPr>
-          <p:cNvPr id="6" name="TextBox 5"/>
-          <p:cNvSpPr txBox="1"/>
-          <p:nvPr/>
-        </p:nvSpPr>
-        <p:spPr>
-          <a:xfrm>
-            <a:off x="2941167" y="1371600"/>
-            <a:ext cx="822960" cy="822960"/>
-          </a:xfrm>
-          <a:prstGeom prst="rect">
-            <a:avLst/>
-          </a:prstGeom>
-          <a:noFill/>
-        </p:spPr>
-        <p:txBody>
-          <a:bodyPr wrap="none" anchor="ctr">
-            <a:spAutoFit/>
-          </a:bodyPr>
-          <a:lstStyle/>
-          <a:p>
-            <a:pPr algn="ctr">
-              <a:defRPr sz="2800" b="1">
-                <a:solidFill>
-                  <a:srgbClr val="00D4AA"/>
-                </a:solidFill>
-              </a:defRPr>
-            </a:pPr>
-            <a:r>
-              <a:t>1</a:t>
-            </a:r>
-          </a:p>
-        </p:txBody>
-      </p:sp>
-      <p:sp>
-        <p:nvSpPr>
-          <p:cNvPr id="7" name="Right Arrow 6"/>
-          <p:cNvSpPr/>
-          <p:nvPr/>
-        </p:nvSpPr>
-        <p:spPr>
-          <a:xfrm>
-            <a:off x="3855567" y="1645920"/>
-            <a:ext cx="365760" cy="274320"/>
-          </a:xfrm>
-          <a:prstGeom prst="rightArrow">
-            <a:avLst/>
-          </a:prstGeom>
-          <a:solidFill>
-            <a:srgbClr val="8B95A5"/>
-          </a:solidFill>
-          <a:ln>
-            <a:noFill/>
-          </a:ln>
-        </p:spPr>
-        <p:style>
-          <a:lnRef idx="1">
-            <a:schemeClr val="accent1"/>
-          </a:lnRef>
-          <a:fillRef idx="3">
-            <a:schemeClr val="accent1"/>
-          </a:fillRef>
-          <a:effectRef idx="2">
-            <a:schemeClr val="accent1"/>
-          </a:effectRef>
-          <a:fontRef idx="minor">
-            <a:schemeClr val="lt1"/>
-          </a:fontRef>
-        </p:style>
-        <p:txBody>
-          <a:bodyPr rtlCol="0" anchor="ctr"/>
-          <a:lstStyle/>
-          <a:p>
-            <a:pPr algn="ctr"/>
-            <a:endParaRPr/>
-          </a:p>
-        </p:txBody>
-      </p:sp>
-      <p:sp>
-        <p:nvSpPr>
-          <p:cNvPr id="8" name="Rounded Rectangle 7"/>
-          <p:cNvSpPr/>
-          <p:nvPr/>
-        </p:nvSpPr>
-        <p:spPr>
-          <a:xfrm>
-            <a:off x="4312767" y="1371600"/>
-            <a:ext cx="822960" cy="822960"/>
-          </a:xfrm>
-          <a:prstGeom prst="roundRect">
-            <a:avLst/>
-          </a:prstGeom>
-          <a:solidFill>
-            <a:srgbClr val="141A26"/>
-          </a:solidFill>
-          <a:ln w="25400">
-            <a:solidFill>
-              <a:srgbClr val="00D4AA"/>
-            </a:solidFill>
-          </a:ln>
-        </p:spPr>
-        <p:style>
-          <a:lnRef idx="1">
-            <a:schemeClr val="accent1"/>
-          </a:lnRef>
-          <a:fillRef idx="3">
-            <a:schemeClr val="accent1"/>
-          </a:fillRef>
-          <a:effectRef idx="2">
-            <a:schemeClr val="accent1"/>
-          </a:effectRef>
-          <a:fontRef idx="minor">
-            <a:schemeClr val="lt1"/>
-          </a:fontRef>
-        </p:style>
-        <p:txBody>
-          <a:bodyPr rtlCol="0" anchor="ctr"/>
-          <a:lstStyle/>
-          <a:p>
-            <a:pPr algn="ctr"/>
-            <a:endParaRPr/>
-          </a:p>
-        </p:txBody>
-      </p:sp>
-      <p:sp>
-        <p:nvSpPr>
-          <p:cNvPr id="9" name="Oval 8"/>
-          <p:cNvSpPr/>
-          <p:nvPr/>
-        </p:nvSpPr>
-        <p:spPr>
-          <a:xfrm>
-            <a:off x="4975707" y="1211580"/>
-            <a:ext cx="320040" cy="320040"/>
-          </a:xfrm>
-          <a:prstGeom prst="ellipse">
-            <a:avLst/>
-          </a:prstGeom>
-          <a:solidFill>
-            <a:srgbClr val="00D4AA"/>
-          </a:solidFill>
-          <a:ln>
-            <a:noFill/>
-          </a:ln>
-        </p:spPr>
-        <p:style>
-          <a:lnRef idx="1">
-            <a:schemeClr val="accent1"/>
-          </a:lnRef>
-          <a:fillRef idx="3">
-            <a:schemeClr val="accent1"/>
-          </a:fillRef>
-          <a:effectRef idx="2">
-            <a:schemeClr val="accent1"/>
-          </a:effectRef>
-          <a:fontRef idx="minor">
-            <a:schemeClr val="lt1"/>
-          </a:fontRef>
-        </p:style>
-        <p:txBody>
-          <a:bodyPr rtlCol="0" anchor="ctr"/>
-          <a:lstStyle/>
-          <a:p>
-            <a:pPr algn="ctr"/>
-            <a:endParaRPr/>
-          </a:p>
-        </p:txBody>
-      </p:sp>
-      <p:sp>
-        <p:nvSpPr>
-          <p:cNvPr id="10" name="TextBox 9"/>
-          <p:cNvSpPr txBox="1"/>
-          <p:nvPr/>
-        </p:nvSpPr>
-        <p:spPr>
-          <a:xfrm>
-            <a:off x="4975707" y="1211580"/>
-            <a:ext cx="320040" cy="320040"/>
-          </a:xfrm>
-          <a:prstGeom prst="rect">
-            <a:avLst/>
-          </a:prstGeom>
-          <a:noFill/>
-        </p:spPr>
-        <p:txBody>
-          <a:bodyPr wrap="none" anchor="ctr">
-            <a:spAutoFit/>
-          </a:bodyPr>
-          <a:lstStyle/>
-          <a:p>
-            <a:pPr algn="ctr">
-              <a:defRPr sz="1400" b="1">
-                <a:solidFill>
-                  <a:srgbClr val="0B0F1A"/>
-                </a:solidFill>
-              </a:defRPr>
-            </a:pPr>
-            <a:r>
-              <a:t>2</a:t>
-            </a:r>
-          </a:p>
-        </p:txBody>
-      </p:sp>
-      <p:sp>
-        <p:nvSpPr>
-          <p:cNvPr id="11" name="TextBox 10"/>
-          <p:cNvSpPr txBox="1"/>
-          <p:nvPr/>
-        </p:nvSpPr>
-        <p:spPr>
-          <a:xfrm>
-            <a:off x="4312767" y="1371600"/>
-            <a:ext cx="822960" cy="822960"/>
-          </a:xfrm>
-          <a:prstGeom prst="rect">
-            <a:avLst/>
-          </a:prstGeom>
-          <a:noFill/>
-        </p:spPr>
-        <p:txBody>
-          <a:bodyPr wrap="none" anchor="ctr">
-            <a:spAutoFit/>
-          </a:bodyPr>
-          <a:lstStyle/>
-          <a:p>
-            <a:pPr algn="ctr">
-              <a:defRPr sz="2800" b="1">
-                <a:solidFill>
-                  <a:srgbClr val="00D4AA"/>
-                </a:solidFill>
-              </a:defRPr>
-            </a:pPr>
-            <a:r>
-              <a:t>2</a:t>
-            </a:r>
-          </a:p>
-        </p:txBody>
-      </p:sp>
-      <p:sp>
-        <p:nvSpPr>
-          <p:cNvPr id="12" name="Right Arrow 11"/>
-          <p:cNvSpPr/>
-          <p:nvPr/>
-        </p:nvSpPr>
-        <p:spPr>
-          <a:xfrm>
-            <a:off x="5227167" y="1645920"/>
-            <a:ext cx="365760" cy="274320"/>
-          </a:xfrm>
-          <a:prstGeom prst="rightArrow">
-            <a:avLst/>
-          </a:prstGeom>
-          <a:solidFill>
-            <a:srgbClr val="8B95A5"/>
-          </a:solidFill>
-          <a:ln>
-            <a:noFill/>
-          </a:ln>
-        </p:spPr>
-        <p:style>
-          <a:lnRef idx="1">
-            <a:schemeClr val="accent1"/>
-          </a:lnRef>
-          <a:fillRef idx="3">
-            <a:schemeClr val="accent1"/>
-          </a:fillRef>
-          <a:effectRef idx="2">
-            <a:schemeClr val="accent1"/>
-          </a:effectRef>
-          <a:fontRef idx="minor">
-            <a:schemeClr val="lt1"/>
-          </a:fontRef>
-        </p:style>
-        <p:txBody>
-          <a:bodyPr rtlCol="0" anchor="ctr"/>
-          <a:lstStyle/>
-          <a:p>
-            <a:pPr algn="ctr"/>
-            <a:endParaRPr/>
-          </a:p>
-        </p:txBody>
-      </p:sp>
-      <p:sp>
-        <p:nvSpPr>
-          <p:cNvPr id="13" name="Rounded Rectangle 12"/>
-          <p:cNvSpPr/>
-          <p:nvPr/>
-        </p:nvSpPr>
-        <p:spPr>
-          <a:xfrm>
-            <a:off x="5684367" y="1371600"/>
-            <a:ext cx="822960" cy="822960"/>
-          </a:xfrm>
-          <a:prstGeom prst="roundRect">
-            <a:avLst/>
-          </a:prstGeom>
-          <a:solidFill>
-            <a:srgbClr val="141A26"/>
-          </a:solidFill>
-          <a:ln w="25400">
-            <a:solidFill>
-              <a:srgbClr val="00D4AA"/>
-            </a:solidFill>
-          </a:ln>
-        </p:spPr>
-        <p:style>
-          <a:lnRef idx="1">
-            <a:schemeClr val="accent1"/>
-          </a:lnRef>
-          <a:fillRef idx="3">
-            <a:schemeClr val="accent1"/>
-          </a:fillRef>
-          <a:effectRef idx="2">
-            <a:schemeClr val="accent1"/>
-          </a:effectRef>
-          <a:fontRef idx="minor">
-            <a:schemeClr val="lt1"/>
-          </a:fontRef>
-        </p:style>
-        <p:txBody>
-          <a:bodyPr rtlCol="0" anchor="ctr"/>
-          <a:lstStyle/>
-          <a:p>
-            <a:pPr algn="ctr"/>
-            <a:endParaRPr/>
-          </a:p>
-        </p:txBody>
-      </p:sp>
-      <p:sp>
-        <p:nvSpPr>
-          <p:cNvPr id="14" name="Oval 13"/>
-          <p:cNvSpPr/>
-          <p:nvPr/>
-        </p:nvSpPr>
-        <p:spPr>
-          <a:xfrm>
-            <a:off x="6347307" y="1211580"/>
-            <a:ext cx="320040" cy="320040"/>
-          </a:xfrm>
-          <a:prstGeom prst="ellipse">
-            <a:avLst/>
-          </a:prstGeom>
-          <a:solidFill>
-            <a:srgbClr val="00D4AA"/>
-          </a:solidFill>
-          <a:ln>
-            <a:noFill/>
-          </a:ln>
-        </p:spPr>
-        <p:style>
-          <a:lnRef idx="1">
-            <a:schemeClr val="accent1"/>
-          </a:lnRef>
-          <a:fillRef idx="3">
-            <a:schemeClr val="accent1"/>
-          </a:fillRef>
-          <a:effectRef idx="2">
-            <a:schemeClr val="accent1"/>
-          </a:effectRef>
-          <a:fontRef idx="minor">
-            <a:schemeClr val="lt1"/>
-          </a:fontRef>
-        </p:style>
-        <p:txBody>
-          <a:bodyPr rtlCol="0" anchor="ctr"/>
-          <a:lstStyle/>
-          <a:p>
-            <a:pPr algn="ctr"/>
-            <a:endParaRPr/>
-          </a:p>
-        </p:txBody>
-      </p:sp>
-      <p:sp>
-        <p:nvSpPr>
-          <p:cNvPr id="15" name="TextBox 14"/>
-          <p:cNvSpPr txBox="1"/>
-          <p:nvPr/>
-        </p:nvSpPr>
-        <p:spPr>
-          <a:xfrm>
-            <a:off x="6347307" y="1211580"/>
-            <a:ext cx="320040" cy="320040"/>
-          </a:xfrm>
-          <a:prstGeom prst="rect">
-            <a:avLst/>
-          </a:prstGeom>
-          <a:noFill/>
-        </p:spPr>
-        <p:txBody>
-          <a:bodyPr wrap="none" anchor="ctr">
-            <a:spAutoFit/>
-          </a:bodyPr>
-          <a:lstStyle/>
-          <a:p>
-            <a:pPr algn="ctr">
-              <a:defRPr sz="1400" b="1">
-                <a:solidFill>
-                  <a:srgbClr val="0B0F1A"/>
-                </a:solidFill>
-              </a:defRPr>
-            </a:pPr>
-            <a:r>
-              <a:t>3</a:t>
-            </a:r>
-          </a:p>
-        </p:txBody>
-      </p:sp>
-      <p:sp>
-        <p:nvSpPr>
-          <p:cNvPr id="16" name="TextBox 15"/>
-          <p:cNvSpPr txBox="1"/>
-          <p:nvPr/>
-        </p:nvSpPr>
-        <p:spPr>
-          <a:xfrm>
-            <a:off x="5684367" y="1371600"/>
-            <a:ext cx="822960" cy="822960"/>
-          </a:xfrm>
-          <a:prstGeom prst="rect">
-            <a:avLst/>
-          </a:prstGeom>
-          <a:noFill/>
-        </p:spPr>
-        <p:txBody>
-          <a:bodyPr wrap="none" anchor="ctr">
-            <a:spAutoFit/>
-          </a:bodyPr>
-          <a:lstStyle/>
-          <a:p>
-            <a:pPr algn="ctr">
-              <a:defRPr sz="2800" b="1">
-                <a:solidFill>
-                  <a:srgbClr val="00D4AA"/>
-                </a:solidFill>
-              </a:defRPr>
-            </a:pPr>
-            <a:r>
-              <a:t>3</a:t>
-            </a:r>
-          </a:p>
-        </p:txBody>
-      </p:sp>
-      <p:sp>
-        <p:nvSpPr>
-          <p:cNvPr id="17" name="Right Arrow 16"/>
-          <p:cNvSpPr/>
-          <p:nvPr/>
-        </p:nvSpPr>
-        <p:spPr>
-          <a:xfrm>
-            <a:off x="6598767" y="1645920"/>
-            <a:ext cx="365760" cy="274320"/>
-          </a:xfrm>
-          <a:prstGeom prst="rightArrow">
-            <a:avLst/>
-          </a:prstGeom>
-          <a:solidFill>
-            <a:srgbClr val="8B95A5"/>
-          </a:solidFill>
-          <a:ln>
-            <a:noFill/>
-          </a:ln>
-        </p:spPr>
-        <p:style>
-          <a:lnRef idx="1">
-            <a:schemeClr val="accent1"/>
-          </a:lnRef>
-          <a:fillRef idx="3">
-            <a:schemeClr val="accent1"/>
-          </a:fillRef>
-          <a:effectRef idx="2">
-            <a:schemeClr val="accent1"/>
-          </a:effectRef>
-          <a:fontRef idx="minor">
-            <a:schemeClr val="lt1"/>
-          </a:fontRef>
-        </p:style>
-        <p:txBody>
-          <a:bodyPr rtlCol="0" anchor="ctr"/>
-          <a:lstStyle/>
-          <a:p>
-            <a:pPr algn="ctr"/>
-            <a:endParaRPr/>
-          </a:p>
-        </p:txBody>
-      </p:sp>
-      <p:sp>
-        <p:nvSpPr>
-          <p:cNvPr id="18" name="Rounded Rectangle 17"/>
-          <p:cNvSpPr/>
-          <p:nvPr/>
-        </p:nvSpPr>
-        <p:spPr>
-          <a:xfrm>
-            <a:off x="7055967" y="1371600"/>
-            <a:ext cx="822960" cy="822960"/>
-          </a:xfrm>
-          <a:prstGeom prst="roundRect">
-            <a:avLst/>
-          </a:prstGeom>
-          <a:solidFill>
-            <a:srgbClr val="141A26"/>
-          </a:solidFill>
-          <a:ln w="25400">
-            <a:solidFill>
-              <a:srgbClr val="00D4AA"/>
-            </a:solidFill>
-          </a:ln>
-        </p:spPr>
-        <p:style>
-          <a:lnRef idx="1">
-            <a:schemeClr val="accent1"/>
-          </a:lnRef>
-          <a:fillRef idx="3">
-            <a:schemeClr val="accent1"/>
-          </a:fillRef>
-          <a:effectRef idx="2">
-            <a:schemeClr val="accent1"/>
-          </a:effectRef>
-          <a:fontRef idx="minor">
-            <a:schemeClr val="lt1"/>
-          </a:fontRef>
-        </p:style>
-        <p:txBody>
-          <a:bodyPr rtlCol="0" anchor="ctr"/>
-          <a:lstStyle/>
-          <a:p>
-            <a:pPr algn="ctr"/>
-            <a:endParaRPr/>
-          </a:p>
-        </p:txBody>
-      </p:sp>
-      <p:sp>
-        <p:nvSpPr>
-          <p:cNvPr id="19" name="Oval 18"/>
-          <p:cNvSpPr/>
-          <p:nvPr/>
-        </p:nvSpPr>
-        <p:spPr>
-          <a:xfrm>
-            <a:off x="7718907" y="1211580"/>
-            <a:ext cx="320040" cy="320040"/>
-          </a:xfrm>
-          <a:prstGeom prst="ellipse">
-            <a:avLst/>
-          </a:prstGeom>
-          <a:solidFill>
-            <a:srgbClr val="00D4AA"/>
-          </a:solidFill>
-          <a:ln>
-            <a:noFill/>
-          </a:ln>
-        </p:spPr>
-        <p:style>
-          <a:lnRef idx="1">
-            <a:schemeClr val="accent1"/>
-          </a:lnRef>
-          <a:fillRef idx="3">
-            <a:schemeClr val="accent1"/>
-          </a:fillRef>
-          <a:effectRef idx="2">
-            <a:schemeClr val="accent1"/>
-          </a:effectRef>
-          <a:fontRef idx="minor">
-            <a:schemeClr val="lt1"/>
-          </a:fontRef>
-        </p:style>
-        <p:txBody>
-          <a:bodyPr rtlCol="0" anchor="ctr"/>
-          <a:lstStyle/>
-          <a:p>
-            <a:pPr algn="ctr"/>
-            <a:endParaRPr/>
-          </a:p>
-        </p:txBody>
-      </p:sp>
-      <p:sp>
-        <p:nvSpPr>
-          <p:cNvPr id="20" name="TextBox 19"/>
-          <p:cNvSpPr txBox="1"/>
-          <p:nvPr/>
-        </p:nvSpPr>
-        <p:spPr>
-          <a:xfrm>
-            <a:off x="7718907" y="1211580"/>
-            <a:ext cx="320040" cy="320040"/>
-          </a:xfrm>
-          <a:prstGeom prst="rect">
-            <a:avLst/>
-          </a:prstGeom>
-          <a:noFill/>
-        </p:spPr>
-        <p:txBody>
-          <a:bodyPr wrap="none" anchor="ctr">
-            <a:spAutoFit/>
-          </a:bodyPr>
-          <a:lstStyle/>
-          <a:p>
-            <a:pPr algn="ctr">
-              <a:defRPr sz="1400" b="1">
-                <a:solidFill>
-                  <a:srgbClr val="0B0F1A"/>
-                </a:solidFill>
-              </a:defRPr>
-            </a:pPr>
-            <a:r>
-              <a:t>4</a:t>
-            </a:r>
-          </a:p>
-        </p:txBody>
-      </p:sp>
-      <p:sp>
-        <p:nvSpPr>
-          <p:cNvPr id="21" name="TextBox 20"/>
-          <p:cNvSpPr txBox="1"/>
-          <p:nvPr/>
-        </p:nvSpPr>
-        <p:spPr>
-          <a:xfrm>
-            <a:off x="7055967" y="1371600"/>
-            <a:ext cx="822960" cy="822960"/>
-          </a:xfrm>
-          <a:prstGeom prst="rect">
-            <a:avLst/>
-          </a:prstGeom>
-          <a:noFill/>
-        </p:spPr>
-        <p:txBody>
-          <a:bodyPr wrap="none" anchor="ctr">
-            <a:spAutoFit/>
-          </a:bodyPr>
-          <a:lstStyle/>
-          <a:p>
-            <a:pPr algn="ctr">
-              <a:defRPr sz="2800" b="1">
-                <a:solidFill>
-                  <a:srgbClr val="00D4AA"/>
-                </a:solidFill>
-              </a:defRPr>
-            </a:pPr>
-            <a:r>
-              <a:t>4</a:t>
-            </a:r>
-          </a:p>
-        </p:txBody>
-      </p:sp>
-      <p:sp>
-        <p:nvSpPr>
-          <p:cNvPr id="22" name="Right Arrow 21"/>
-          <p:cNvSpPr/>
-          <p:nvPr/>
-        </p:nvSpPr>
-        <p:spPr>
-          <a:xfrm>
-            <a:off x="7970367" y="1645920"/>
-            <a:ext cx="365760" cy="274320"/>
-          </a:xfrm>
-          <a:prstGeom prst="rightArrow">
-            <a:avLst/>
-          </a:prstGeom>
-          <a:solidFill>
-            <a:srgbClr val="8B95A5"/>
-          </a:solidFill>
-          <a:ln>
-            <a:noFill/>
-          </a:ln>
-        </p:spPr>
-        <p:style>
-          <a:lnRef idx="1">
-            <a:schemeClr val="accent1"/>
-          </a:lnRef>
-          <a:fillRef idx="3">
-            <a:schemeClr val="accent1"/>
-          </a:fillRef>
-          <a:effectRef idx="2">
-            <a:schemeClr val="accent1"/>
-          </a:effectRef>
-          <a:fontRef idx="minor">
-            <a:schemeClr val="lt1"/>
-          </a:fontRef>
-        </p:style>
-        <p:txBody>
-          <a:bodyPr rtlCol="0" anchor="ctr"/>
-          <a:lstStyle/>
-          <a:p>
-            <a:pPr algn="ctr"/>
-            <a:endParaRPr/>
-          </a:p>
-        </p:txBody>
-      </p:sp>
-      <p:sp>
-        <p:nvSpPr>
-          <p:cNvPr id="23" name="Rounded Rectangle 22"/>
-          <p:cNvSpPr/>
-          <p:nvPr/>
-        </p:nvSpPr>
-        <p:spPr>
-          <a:xfrm>
-            <a:off x="8427567" y="1371600"/>
-            <a:ext cx="822960" cy="822960"/>
-          </a:xfrm>
-          <a:prstGeom prst="roundRect">
-            <a:avLst/>
-          </a:prstGeom>
-          <a:solidFill>
-            <a:srgbClr val="141A26"/>
-          </a:solidFill>
-          <a:ln w="25400">
-            <a:solidFill>
-              <a:srgbClr val="00D4AA"/>
-            </a:solidFill>
-          </a:ln>
-        </p:spPr>
-        <p:style>
-          <a:lnRef idx="1">
-            <a:schemeClr val="accent1"/>
-          </a:lnRef>
-          <a:fillRef idx="3">
-            <a:schemeClr val="accent1"/>
-          </a:fillRef>
-          <a:effectRef idx="2">
-            <a:schemeClr val="accent1"/>
-          </a:effectRef>
-          <a:fontRef idx="minor">
-            <a:schemeClr val="lt1"/>
-          </a:fontRef>
-        </p:style>
-        <p:txBody>
-          <a:bodyPr rtlCol="0" anchor="ctr"/>
-          <a:lstStyle/>
-          <a:p>
-            <a:pPr algn="ctr"/>
-            <a:endParaRPr/>
-          </a:p>
-        </p:txBody>
-      </p:sp>
-      <p:sp>
-        <p:nvSpPr>
-          <p:cNvPr id="24" name="Oval 23"/>
-          <p:cNvSpPr/>
-          <p:nvPr/>
-        </p:nvSpPr>
-        <p:spPr>
-          <a:xfrm>
-            <a:off x="9090507" y="1211580"/>
-            <a:ext cx="320040" cy="320040"/>
-          </a:xfrm>
-          <a:prstGeom prst="ellipse">
-            <a:avLst/>
-          </a:prstGeom>
-          <a:solidFill>
-            <a:srgbClr val="00D4AA"/>
-          </a:solidFill>
-          <a:ln>
-            <a:noFill/>
-          </a:ln>
-        </p:spPr>
-        <p:style>
-          <a:lnRef idx="1">
-            <a:schemeClr val="accent1"/>
-          </a:lnRef>
-          <a:fillRef idx="3">
-            <a:schemeClr val="accent1"/>
-          </a:fillRef>
-          <a:effectRef idx="2">
-            <a:schemeClr val="accent1"/>
-          </a:effectRef>
-          <a:fontRef idx="minor">
-            <a:schemeClr val="lt1"/>
-          </a:fontRef>
-        </p:style>
-        <p:txBody>
-          <a:bodyPr rtlCol="0" anchor="ctr"/>
-          <a:lstStyle/>
-          <a:p>
-            <a:pPr algn="ctr"/>
-            <a:endParaRPr/>
-          </a:p>
-        </p:txBody>
-      </p:sp>
-      <p:sp>
-        <p:nvSpPr>
-          <p:cNvPr id="25" name="TextBox 24"/>
-          <p:cNvSpPr txBox="1"/>
-          <p:nvPr/>
-        </p:nvSpPr>
-        <p:spPr>
-          <a:xfrm>
-            <a:off x="9090507" y="1211580"/>
-            <a:ext cx="320040" cy="320040"/>
-          </a:xfrm>
-          <a:prstGeom prst="rect">
-            <a:avLst/>
-          </a:prstGeom>
-          <a:noFill/>
-        </p:spPr>
-        <p:txBody>
-          <a:bodyPr wrap="none" anchor="ctr">
-            <a:spAutoFit/>
-          </a:bodyPr>
-          <a:lstStyle/>
-          <a:p>
-            <a:pPr algn="ctr">
-              <a:defRPr sz="1400" b="1">
-                <a:solidFill>
-                  <a:srgbClr val="0B0F1A"/>
-                </a:solidFill>
-              </a:defRPr>
-            </a:pPr>
-            <a:r>
-              <a:t>5</a:t>
-            </a:r>
-          </a:p>
-        </p:txBody>
-      </p:sp>
-      <p:sp>
-        <p:nvSpPr>
-          <p:cNvPr id="26" name="TextBox 25"/>
-          <p:cNvSpPr txBox="1"/>
-          <p:nvPr/>
-        </p:nvSpPr>
-        <p:spPr>
-          <a:xfrm>
-            <a:off x="8427567" y="1371600"/>
-            <a:ext cx="822960" cy="822960"/>
-          </a:xfrm>
-          <a:prstGeom prst="rect">
-            <a:avLst/>
-          </a:prstGeom>
-          <a:noFill/>
-        </p:spPr>
-        <p:txBody>
-          <a:bodyPr wrap="none" anchor="ctr">
-            <a:spAutoFit/>
-          </a:bodyPr>
-          <a:lstStyle/>
-          <a:p>
-            <a:pPr algn="ctr">
-              <a:defRPr sz="2800" b="1">
-                <a:solidFill>
-                  <a:srgbClr val="00D4AA"/>
-                </a:solidFill>
-              </a:defRPr>
-            </a:pPr>
-            <a:r>
-              <a:t>5</a:t>
-            </a:r>
-          </a:p>
-        </p:txBody>
-      </p:sp>
-      <p:sp>
-        <p:nvSpPr>
-          <p:cNvPr id="27" name="TextBox 26"/>
-          <p:cNvSpPr txBox="1"/>
-          <p:nvPr/>
-        </p:nvSpPr>
-        <p:spPr>
-          <a:xfrm>
-            <a:off x="1371600" y="2743200"/>
-            <a:ext cx="457200" cy="457200"/>
-          </a:xfrm>
-          <a:prstGeom prst="rect">
-            <a:avLst/>
-          </a:prstGeom>
-          <a:noFill/>
-        </p:spPr>
-        <p:txBody>
-          <a:bodyPr wrap="none">
-            <a:spAutoFit/>
-          </a:bodyPr>
-          <a:lstStyle/>
-          <a:p>
-            <a:pPr>
-              <a:defRPr sz="2000" b="1">
-                <a:solidFill>
-                  <a:srgbClr val="00D4AA"/>
-                </a:solidFill>
-              </a:defRPr>
-            </a:pPr>
-            <a:r>
-              <a:t>1</a:t>
-            </a:r>
-          </a:p>
-        </p:txBody>
-      </p:sp>
-      <p:sp>
-        <p:nvSpPr>
-          <p:cNvPr id="28" name="TextBox 27"/>
-          <p:cNvSpPr txBox="1"/>
-          <p:nvPr/>
-        </p:nvSpPr>
-        <p:spPr>
-          <a:xfrm>
-            <a:off x="1828800" y="2743200"/>
-            <a:ext cx="8991295" cy="548640"/>
+          <p:cNvPr id="3" name="TextBox 2"/>
+          <p:cNvSpPr txBox="1"/>
+          <p:nvPr/>
+        </p:nvSpPr>
+        <p:spPr>
+          <a:xfrm>
+            <a:off x="457200" y="2286000"/>
+            <a:ext cx="11277295" cy="1371600"/>
           </a:xfrm>
           <a:prstGeom prst="rect">
             <a:avLst/>
@@ -44941,63 +44191,28 @@
           <a:lstStyle/>
           <a:p>
             <a:pPr>
-              <a:defRPr sz="1800">
+              <a:defRPr sz="5600" b="1">
                 <a:solidFill>
                   <a:srgbClr val="FFFFFF"/>
                 </a:solidFill>
               </a:defRPr>
             </a:pPr>
             <a:r>
-              <a:t>Upload competitor research PDFs</a:t>
-            </a:r>
-          </a:p>
-        </p:txBody>
-      </p:sp>
-      <p:sp>
-        <p:nvSpPr>
-          <p:cNvPr id="29" name="TextBox 28"/>
-          <p:cNvSpPr txBox="1"/>
-          <p:nvPr/>
-        </p:nvSpPr>
-        <p:spPr>
-          <a:xfrm>
-            <a:off x="1371600" y="3383280"/>
-            <a:ext cx="457200" cy="457200"/>
-          </a:xfrm>
-          <a:prstGeom prst="rect">
-            <a:avLst/>
-          </a:prstGeom>
-          <a:noFill/>
-        </p:spPr>
-        <p:txBody>
-          <a:bodyPr wrap="none">
-            <a:spAutoFit/>
-          </a:bodyPr>
-          <a:lstStyle/>
-          <a:p>
-            <a:pPr>
-              <a:defRPr sz="2000" b="1">
-                <a:solidFill>
-                  <a:srgbClr val="00D4AA"/>
-                </a:solidFill>
-              </a:defRPr>
-            </a:pPr>
-            <a:r>
-              <a:t>2</a:t>
-            </a:r>
-          </a:p>
-        </p:txBody>
-      </p:sp>
-      <p:sp>
-        <p:nvSpPr>
-          <p:cNvPr id="30" name="TextBox 29"/>
-          <p:cNvSpPr txBox="1"/>
-          <p:nvPr/>
-        </p:nvSpPr>
-        <p:spPr>
-          <a:xfrm>
-            <a:off x="1828800" y="3383280"/>
-            <a:ext cx="8991295" cy="548640"/>
+              <a:t>Role-Specific Workflows</a:t>
+            </a:r>
+          </a:p>
+        </p:txBody>
+      </p:sp>
+      <p:sp>
+        <p:nvSpPr>
+          <p:cNvPr id="4" name="TextBox 3"/>
+          <p:cNvSpPr txBox="1"/>
+          <p:nvPr/>
+        </p:nvSpPr>
+        <p:spPr>
+          <a:xfrm>
+            <a:off x="457200" y="3840480"/>
+            <a:ext cx="11277295" cy="914400"/>
           </a:xfrm>
           <a:prstGeom prst="rect">
             <a:avLst/>
@@ -45011,224 +44226,14 @@
           <a:lstStyle/>
           <a:p>
             <a:pPr>
-              <a:defRPr sz="1800">
-                <a:solidFill>
-                  <a:srgbClr val="FFFFFF"/>
-                </a:solidFill>
-              </a:defRPr>
-            </a:pPr>
-            <a:r>
-              <a:t>Ask: 'Summarize their positioning'</a:t>
-            </a:r>
-          </a:p>
-        </p:txBody>
-      </p:sp>
-      <p:sp>
-        <p:nvSpPr>
-          <p:cNvPr id="31" name="TextBox 30"/>
-          <p:cNvSpPr txBox="1"/>
-          <p:nvPr/>
-        </p:nvSpPr>
-        <p:spPr>
-          <a:xfrm>
-            <a:off x="1371600" y="4023360"/>
-            <a:ext cx="457200" cy="457200"/>
-          </a:xfrm>
-          <a:prstGeom prst="rect">
-            <a:avLst/>
-          </a:prstGeom>
-          <a:noFill/>
-        </p:spPr>
-        <p:txBody>
-          <a:bodyPr wrap="none">
-            <a:spAutoFit/>
-          </a:bodyPr>
-          <a:lstStyle/>
-          <a:p>
-            <a:pPr>
-              <a:defRPr sz="2000" b="1">
-                <a:solidFill>
-                  <a:srgbClr val="00D4AA"/>
-                </a:solidFill>
-              </a:defRPr>
-            </a:pPr>
-            <a:r>
-              <a:t>3</a:t>
-            </a:r>
-          </a:p>
-        </p:txBody>
-      </p:sp>
-      <p:sp>
-        <p:nvSpPr>
-          <p:cNvPr id="32" name="TextBox 31"/>
-          <p:cNvSpPr txBox="1"/>
-          <p:nvPr/>
-        </p:nvSpPr>
-        <p:spPr>
-          <a:xfrm>
-            <a:off x="1828800" y="4023360"/>
-            <a:ext cx="8991295" cy="548640"/>
-          </a:xfrm>
-          <a:prstGeom prst="rect">
-            <a:avLst/>
-          </a:prstGeom>
-          <a:noFill/>
-        </p:spPr>
-        <p:txBody>
-          <a:bodyPr wrap="square">
-            <a:spAutoFit/>
-          </a:bodyPr>
-          <a:lstStyle/>
-          <a:p>
-            <a:pPr>
-              <a:defRPr sz="1800">
-                <a:solidFill>
-                  <a:srgbClr val="FFFFFF"/>
-                </a:solidFill>
-              </a:defRPr>
-            </a:pPr>
-            <a:r>
-              <a:t>Request: 'Draft our differentiation message'</a:t>
-            </a:r>
-          </a:p>
-        </p:txBody>
-      </p:sp>
-      <p:sp>
-        <p:nvSpPr>
-          <p:cNvPr id="33" name="TextBox 32"/>
-          <p:cNvSpPr txBox="1"/>
-          <p:nvPr/>
-        </p:nvSpPr>
-        <p:spPr>
-          <a:xfrm>
-            <a:off x="1371600" y="4663440"/>
-            <a:ext cx="457200" cy="457200"/>
-          </a:xfrm>
-          <a:prstGeom prst="rect">
-            <a:avLst/>
-          </a:prstGeom>
-          <a:noFill/>
-        </p:spPr>
-        <p:txBody>
-          <a:bodyPr wrap="none">
-            <a:spAutoFit/>
-          </a:bodyPr>
-          <a:lstStyle/>
-          <a:p>
-            <a:pPr>
-              <a:defRPr sz="2000" b="1">
-                <a:solidFill>
-                  <a:srgbClr val="00D4AA"/>
-                </a:solidFill>
-              </a:defRPr>
-            </a:pPr>
-            <a:r>
-              <a:t>4</a:t>
-            </a:r>
-          </a:p>
-        </p:txBody>
-      </p:sp>
-      <p:sp>
-        <p:nvSpPr>
-          <p:cNvPr id="34" name="TextBox 33"/>
-          <p:cNvSpPr txBox="1"/>
-          <p:nvPr/>
-        </p:nvSpPr>
-        <p:spPr>
-          <a:xfrm>
-            <a:off x="1828800" y="4663440"/>
-            <a:ext cx="8991295" cy="548640"/>
-          </a:xfrm>
-          <a:prstGeom prst="rect">
-            <a:avLst/>
-          </a:prstGeom>
-          <a:noFill/>
-        </p:spPr>
-        <p:txBody>
-          <a:bodyPr wrap="square">
-            <a:spAutoFit/>
-          </a:bodyPr>
-          <a:lstStyle/>
-          <a:p>
-            <a:pPr>
-              <a:defRPr sz="1800">
-                <a:solidFill>
-                  <a:srgbClr val="FFFFFF"/>
-                </a:solidFill>
-              </a:defRPr>
-            </a:pPr>
-            <a:r>
-              <a:t>Refine: 'Make it more concise'</a:t>
-            </a:r>
-          </a:p>
-        </p:txBody>
-      </p:sp>
-      <p:sp>
-        <p:nvSpPr>
-          <p:cNvPr id="35" name="TextBox 34"/>
-          <p:cNvSpPr txBox="1"/>
-          <p:nvPr/>
-        </p:nvSpPr>
-        <p:spPr>
-          <a:xfrm>
-            <a:off x="1371600" y="5303520"/>
-            <a:ext cx="457200" cy="457200"/>
-          </a:xfrm>
-          <a:prstGeom prst="rect">
-            <a:avLst/>
-          </a:prstGeom>
-          <a:noFill/>
-        </p:spPr>
-        <p:txBody>
-          <a:bodyPr wrap="none">
-            <a:spAutoFit/>
-          </a:bodyPr>
-          <a:lstStyle/>
-          <a:p>
-            <a:pPr>
-              <a:defRPr sz="2000" b="1">
-                <a:solidFill>
-                  <a:srgbClr val="00D4AA"/>
-                </a:solidFill>
-              </a:defRPr>
-            </a:pPr>
-            <a:r>
-              <a:t>5</a:t>
-            </a:r>
-          </a:p>
-        </p:txBody>
-      </p:sp>
-      <p:sp>
-        <p:nvSpPr>
-          <p:cNvPr id="36" name="TextBox 35"/>
-          <p:cNvSpPr txBox="1"/>
-          <p:nvPr/>
-        </p:nvSpPr>
-        <p:spPr>
-          <a:xfrm>
-            <a:off x="1828800" y="5303520"/>
-            <a:ext cx="8991295" cy="548640"/>
-          </a:xfrm>
-          <a:prstGeom prst="rect">
-            <a:avLst/>
-          </a:prstGeom>
-          <a:noFill/>
-        </p:spPr>
-        <p:txBody>
-          <a:bodyPr wrap="square">
-            <a:spAutoFit/>
-          </a:bodyPr>
-          <a:lstStyle/>
-          <a:p>
-            <a:pPr>
-              <a:defRPr sz="1800">
-                <a:solidFill>
-                  <a:srgbClr val="FFFFFF"/>
-                </a:solidFill>
-              </a:defRPr>
-            </a:pPr>
-            <a:r>
-              <a:t>Create: 'Turn into email campaign'</a:t>
+              <a:defRPr sz="2400">
+                <a:solidFill>
+                  <a:srgbClr val="8B95A5"/>
+                </a:solidFill>
+              </a:defRPr>
+            </a:pPr>
+            <a:r>
+              <a:t>Claude in action for different jobs</a:t>
             </a:r>
           </a:p>
         </p:txBody>
@@ -45296,7 +44301,7 @@
               </a:defRPr>
             </a:pPr>
             <a:r>
-              <a:t>Sales Workflow</a:t>
+              <a:t>Marketing Workflow</a:t>
             </a:r>
           </a:p>
         </p:txBody>
@@ -46342,7 +45347,7 @@
               </a:defRPr>
             </a:pPr>
             <a:r>
-              <a:t>Upload prospect company info</a:t>
+              <a:t>Upload competitor research PDFs</a:t>
             </a:r>
           </a:p>
         </p:txBody>
@@ -46412,7 +45417,7 @@
               </a:defRPr>
             </a:pPr>
             <a:r>
-              <a:t>Ask: 'What are their pain points?'</a:t>
+              <a:t>Ask: 'Summarize their positioning'</a:t>
             </a:r>
           </a:p>
         </p:txBody>
@@ -46482,7 +45487,7 @@
               </a:defRPr>
             </a:pPr>
             <a:r>
-              <a:t>Request: 'Draft personalized pitch'</a:t>
+              <a:t>Request: 'Draft our differentiation message'</a:t>
             </a:r>
           </a:p>
         </p:txBody>
@@ -46552,7 +45557,7 @@
               </a:defRPr>
             </a:pPr>
             <a:r>
-              <a:t>Create: 'Email sequence for follow-up'</a:t>
+              <a:t>Refine: 'Make it more concise'</a:t>
             </a:r>
           </a:p>
         </p:txBody>
@@ -46622,7 +45627,7 @@
               </a:defRPr>
             </a:pPr>
             <a:r>
-              <a:t>Generate: 'Objection handling script'</a:t>
+              <a:t>Create: 'Turn into email campaign'</a:t>
             </a:r>
           </a:p>
         </p:txBody>
@@ -46809,23 +45814,60 @@
       </p:grpSpPr>
       <p:sp>
         <p:nvSpPr>
-          <p:cNvPr id="2" name="Rounded Rectangle 1"/>
+          <p:cNvPr id="2" name="TextBox 1"/>
+          <p:cNvSpPr txBox="1"/>
+          <p:nvPr/>
+        </p:nvSpPr>
+        <p:spPr>
+          <a:xfrm>
+            <a:off x="457200" y="365760"/>
+            <a:ext cx="11277295" cy="731520"/>
+          </a:xfrm>
+          <a:prstGeom prst="rect">
+            <a:avLst/>
+          </a:prstGeom>
+          <a:noFill/>
+        </p:spPr>
+        <p:txBody>
+          <a:bodyPr wrap="none">
+            <a:spAutoFit/>
+          </a:bodyPr>
+          <a:lstStyle/>
+          <a:p>
+            <a:pPr algn="ctr">
+              <a:defRPr sz="3600" b="1">
+                <a:solidFill>
+                  <a:srgbClr val="FFFFFF"/>
+                </a:solidFill>
+              </a:defRPr>
+            </a:pPr>
+            <a:r>
+              <a:t>Sales Workflow</a:t>
+            </a:r>
+          </a:p>
+        </p:txBody>
+      </p:sp>
+      <p:sp>
+        <p:nvSpPr>
+          <p:cNvPr id="3" name="Rounded Rectangle 2"/>
           <p:cNvSpPr/>
           <p:nvPr/>
         </p:nvSpPr>
         <p:spPr>
           <a:xfrm>
-            <a:off x="457200" y="365760"/>
-            <a:ext cx="1097280" cy="457200"/>
+            <a:off x="2941167" y="1371600"/>
+            <a:ext cx="822960" cy="822960"/>
           </a:xfrm>
           <a:prstGeom prst="roundRect">
             <a:avLst/>
           </a:prstGeom>
           <a:solidFill>
-            <a:srgbClr val="14B8A6"/>
+            <a:srgbClr val="141A26"/>
           </a:solidFill>
-          <a:ln>
-            <a:noFill/>
+          <a:ln w="25400">
+            <a:solidFill>
+              <a:srgbClr val="00D4AA"/>
+            </a:solidFill>
           </a:ln>
         </p:spPr>
         <p:style>
@@ -46846,110 +45888,30 @@
           <a:bodyPr rtlCol="0" anchor="ctr"/>
           <a:lstStyle/>
           <a:p>
-            <a:pPr algn="ctr">
-              <a:defRPr sz="1400" b="1">
-                <a:solidFill>
-                  <a:srgbClr val="FFFFFF"/>
-                </a:solidFill>
-              </a:defRPr>
-            </a:pPr>
-            <a:r>
-              <a:t>LAB 4</a:t>
-            </a:r>
-          </a:p>
-        </p:txBody>
-      </p:sp>
-      <p:sp>
-        <p:nvSpPr>
-          <p:cNvPr id="3" name="TextBox 2"/>
-          <p:cNvSpPr txBox="1"/>
-          <p:nvPr/>
-        </p:nvSpPr>
-        <p:spPr>
-          <a:xfrm>
-            <a:off x="457200" y="1005840"/>
-            <a:ext cx="11247120" cy="731520"/>
-          </a:xfrm>
-          <a:prstGeom prst="rect">
-            <a:avLst/>
-          </a:prstGeom>
-          <a:noFill/>
-        </p:spPr>
-        <p:txBody>
-          <a:bodyPr wrap="none">
-            <a:spAutoFit/>
-          </a:bodyPr>
-          <a:lstStyle/>
-          <a:p>
-            <a:pPr>
-              <a:defRPr sz="3600" b="1">
-                <a:solidFill>
-                  <a:srgbClr val="FFFFFF"/>
-                </a:solidFill>
-              </a:defRPr>
-            </a:pPr>
-            <a:r>
-              <a:t>Executive Briefing Challenge</a:t>
-            </a:r>
-          </a:p>
-        </p:txBody>
-      </p:sp>
-      <p:sp>
-        <p:nvSpPr>
-          <p:cNvPr id="4" name="TextBox 3"/>
-          <p:cNvSpPr txBox="1"/>
-          <p:nvPr/>
-        </p:nvSpPr>
-        <p:spPr>
-          <a:xfrm>
-            <a:off x="457200" y="1737360"/>
-            <a:ext cx="11247120" cy="457200"/>
-          </a:xfrm>
-          <a:prstGeom prst="rect">
-            <a:avLst/>
-          </a:prstGeom>
-          <a:noFill/>
-        </p:spPr>
-        <p:txBody>
-          <a:bodyPr wrap="none">
-            <a:spAutoFit/>
-          </a:bodyPr>
-          <a:lstStyle/>
-          <a:p>
-            <a:pPr>
-              <a:defRPr sz="1800" i="1">
-                <a:solidFill>
-                  <a:srgbClr val="9CA3AF"/>
-                </a:solidFill>
-              </a:defRPr>
-            </a:pPr>
-            <a:r>
-              <a:t>30 minutes  •  Tie it all together  •  Real deliverable you'll use Monday</a:t>
-            </a:r>
-          </a:p>
-        </p:txBody>
-      </p:sp>
-      <p:sp>
-        <p:nvSpPr>
-          <p:cNvPr id="5" name="Rounded Rectangle 4"/>
+            <a:pPr algn="ctr"/>
+            <a:endParaRPr/>
+          </a:p>
+        </p:txBody>
+      </p:sp>
+      <p:sp>
+        <p:nvSpPr>
+          <p:cNvPr id="4" name="Oval 3"/>
           <p:cNvSpPr/>
           <p:nvPr/>
         </p:nvSpPr>
         <p:spPr>
           <a:xfrm>
-            <a:off x="457200" y="2468880"/>
-            <a:ext cx="3566160" cy="3200400"/>
-          </a:xfrm>
-          <a:prstGeom prst="roundRect">
+            <a:off x="3604107" y="1211580"/>
+            <a:ext cx="320040" cy="320040"/>
+          </a:xfrm>
+          <a:prstGeom prst="ellipse">
             <a:avLst/>
           </a:prstGeom>
           <a:solidFill>
-            <a:srgbClr val="24354A"/>
+            <a:srgbClr val="00D4AA"/>
           </a:solidFill>
-          <a:ln w="19050">
-            <a:solidFill>
-              <a:srgbClr val="14B8A6"/>
-            </a:solidFill>
+          <a:ln>
+            <a:noFill/>
           </a:ln>
         </p:spPr>
         <p:style>
@@ -46977,173 +45939,93 @@
       </p:sp>
       <p:sp>
         <p:nvSpPr>
+          <p:cNvPr id="5" name="TextBox 4"/>
+          <p:cNvSpPr txBox="1"/>
+          <p:nvPr/>
+        </p:nvSpPr>
+        <p:spPr>
+          <a:xfrm>
+            <a:off x="3604107" y="1211580"/>
+            <a:ext cx="320040" cy="320040"/>
+          </a:xfrm>
+          <a:prstGeom prst="rect">
+            <a:avLst/>
+          </a:prstGeom>
+          <a:noFill/>
+        </p:spPr>
+        <p:txBody>
+          <a:bodyPr wrap="none" anchor="ctr">
+            <a:spAutoFit/>
+          </a:bodyPr>
+          <a:lstStyle/>
+          <a:p>
+            <a:pPr algn="ctr">
+              <a:defRPr sz="1400" b="1">
+                <a:solidFill>
+                  <a:srgbClr val="0B0F1A"/>
+                </a:solidFill>
+              </a:defRPr>
+            </a:pPr>
+            <a:r>
+              <a:t>1</a:t>
+            </a:r>
+          </a:p>
+        </p:txBody>
+      </p:sp>
+      <p:sp>
+        <p:nvSpPr>
           <p:cNvPr id="6" name="TextBox 5"/>
           <p:cNvSpPr txBox="1"/>
           <p:nvPr/>
         </p:nvSpPr>
         <p:spPr>
           <a:xfrm>
-            <a:off x="640080" y="2651760"/>
-            <a:ext cx="3200400" cy="548640"/>
-          </a:xfrm>
-          <a:prstGeom prst="rect">
-            <a:avLst/>
-          </a:prstGeom>
-          <a:noFill/>
-        </p:spPr>
-        <p:txBody>
-          <a:bodyPr wrap="none">
+            <a:off x="2941167" y="1371600"/>
+            <a:ext cx="822960" cy="822960"/>
+          </a:xfrm>
+          <a:prstGeom prst="rect">
+            <a:avLst/>
+          </a:prstGeom>
+          <a:noFill/>
+        </p:spPr>
+        <p:txBody>
+          <a:bodyPr wrap="none" anchor="ctr">
             <a:spAutoFit/>
           </a:bodyPr>
           <a:lstStyle/>
           <a:p>
             <a:pPr algn="ctr">
-              <a:defRPr sz="3000"/>
-            </a:pPr>
-            <a:r>
-              <a:t>🗂️</a:t>
-            </a:r>
-          </a:p>
-        </p:txBody>
-      </p:sp>
-      <p:sp>
-        <p:nvSpPr>
-          <p:cNvPr id="7" name="TextBox 6"/>
-          <p:cNvSpPr txBox="1"/>
-          <p:nvPr/>
-        </p:nvSpPr>
-        <p:spPr>
-          <a:xfrm>
-            <a:off x="640080" y="3200400"/>
-            <a:ext cx="3200400" cy="457200"/>
-          </a:xfrm>
-          <a:prstGeom prst="rect">
-            <a:avLst/>
-          </a:prstGeom>
-          <a:noFill/>
-        </p:spPr>
-        <p:txBody>
-          <a:bodyPr wrap="none">
-            <a:spAutoFit/>
-          </a:bodyPr>
-          <a:lstStyle/>
-          <a:p>
-            <a:pPr algn="ctr">
-              <a:defRPr sz="1800" b="1">
-                <a:solidFill>
-                  <a:srgbClr val="FFFFFF"/>
-                </a:solidFill>
-              </a:defRPr>
-            </a:pPr>
-            <a:r>
-              <a:t>Set Up</a:t>
-            </a:r>
-          </a:p>
-        </p:txBody>
-      </p:sp>
-      <p:sp>
-        <p:nvSpPr>
-          <p:cNvPr id="8" name="TextBox 7"/>
-          <p:cNvSpPr txBox="1"/>
-          <p:nvPr/>
-        </p:nvSpPr>
-        <p:spPr>
-          <a:xfrm>
-            <a:off x="640080" y="3749039"/>
-            <a:ext cx="3200400" cy="1645920"/>
-          </a:xfrm>
-          <a:prstGeom prst="rect">
-            <a:avLst/>
-          </a:prstGeom>
-          <a:noFill/>
-        </p:spPr>
-        <p:txBody>
-          <a:bodyPr wrap="square">
-            <a:spAutoFit/>
-          </a:bodyPr>
-          <a:lstStyle/>
-          <a:p>
-            <a:pPr algn="ctr">
-              <a:defRPr sz="1300">
-                <a:solidFill>
-                  <a:srgbClr val="D1D5DB"/>
-                </a:solidFill>
-              </a:defRPr>
-            </a:pPr>
-            <a:r>
-              <a:t>Create a Project called</a:t>
-            </a:r>
-            <a:br/>
-            <a:r>
-              <a:t>'Executive Briefing'.</a:t>
-            </a:r>
-            <a:br/>
-            <a:r>
-              <a:t>Add custom instructions.</a:t>
-            </a:r>
-            <a:br/>
-            <a:r>
-              <a:t>Upload all provided files.</a:t>
-            </a:r>
-          </a:p>
-        </p:txBody>
-      </p:sp>
-      <p:sp>
-        <p:nvSpPr>
-          <p:cNvPr id="9" name="TextBox 8"/>
-          <p:cNvSpPr txBox="1"/>
-          <p:nvPr/>
-        </p:nvSpPr>
-        <p:spPr>
-          <a:xfrm>
-            <a:off x="640080" y="5303520"/>
-            <a:ext cx="3200400" cy="365760"/>
-          </a:xfrm>
-          <a:prstGeom prst="rect">
-            <a:avLst/>
-          </a:prstGeom>
-          <a:noFill/>
-        </p:spPr>
-        <p:txBody>
-          <a:bodyPr wrap="none">
-            <a:spAutoFit/>
-          </a:bodyPr>
-          <a:lstStyle/>
-          <a:p>
-            <a:pPr algn="ctr">
-              <a:defRPr sz="1200" i="1">
-                <a:solidFill>
-                  <a:srgbClr val="14B8A6"/>
-                </a:solidFill>
-              </a:defRPr>
-            </a:pPr>
-            <a:r>
-              <a:t>5 min</a:t>
-            </a:r>
-          </a:p>
-        </p:txBody>
-      </p:sp>
-      <p:sp>
-        <p:nvSpPr>
-          <p:cNvPr id="10" name="Rounded Rectangle 9"/>
+              <a:defRPr sz="2800" b="1">
+                <a:solidFill>
+                  <a:srgbClr val="00D4AA"/>
+                </a:solidFill>
+              </a:defRPr>
+            </a:pPr>
+            <a:r>
+              <a:t>1</a:t>
+            </a:r>
+          </a:p>
+        </p:txBody>
+      </p:sp>
+      <p:sp>
+        <p:nvSpPr>
+          <p:cNvPr id="7" name="Right Arrow 6"/>
           <p:cNvSpPr/>
           <p:nvPr/>
         </p:nvSpPr>
         <p:spPr>
           <a:xfrm>
-            <a:off x="4206240" y="2468880"/>
-            <a:ext cx="3566160" cy="3200400"/>
-          </a:xfrm>
-          <a:prstGeom prst="roundRect">
+            <a:off x="3855567" y="1645920"/>
+            <a:ext cx="365760" cy="274320"/>
+          </a:xfrm>
+          <a:prstGeom prst="rightArrow">
             <a:avLst/>
           </a:prstGeom>
           <a:solidFill>
-            <a:srgbClr val="24354A"/>
+            <a:srgbClr val="8B95A5"/>
           </a:solidFill>
-          <a:ln w="19050">
-            <a:solidFill>
-              <a:srgbClr val="14B8A6"/>
-            </a:solidFill>
+          <a:ln>
+            <a:noFill/>
           </a:ln>
         </p:spPr>
         <p:style>
@@ -47171,172 +46053,24 @@
       </p:sp>
       <p:sp>
         <p:nvSpPr>
-          <p:cNvPr id="11" name="TextBox 10"/>
-          <p:cNvSpPr txBox="1"/>
-          <p:nvPr/>
-        </p:nvSpPr>
-        <p:spPr>
-          <a:xfrm>
-            <a:off x="4389120" y="2651760"/>
-            <a:ext cx="3200400" cy="548640"/>
-          </a:xfrm>
-          <a:prstGeom prst="rect">
-            <a:avLst/>
-          </a:prstGeom>
-          <a:noFill/>
-        </p:spPr>
-        <p:txBody>
-          <a:bodyPr wrap="none">
-            <a:spAutoFit/>
-          </a:bodyPr>
-          <a:lstStyle/>
-          <a:p>
-            <a:pPr algn="ctr">
-              <a:defRPr sz="3000"/>
-            </a:pPr>
-            <a:r>
-              <a:t>🔍</a:t>
-            </a:r>
-          </a:p>
-        </p:txBody>
-      </p:sp>
-      <p:sp>
-        <p:nvSpPr>
-          <p:cNvPr id="12" name="TextBox 11"/>
-          <p:cNvSpPr txBox="1"/>
-          <p:nvPr/>
-        </p:nvSpPr>
-        <p:spPr>
-          <a:xfrm>
-            <a:off x="4389120" y="3200400"/>
-            <a:ext cx="3200400" cy="457200"/>
-          </a:xfrm>
-          <a:prstGeom prst="rect">
-            <a:avLst/>
-          </a:prstGeom>
-          <a:noFill/>
-        </p:spPr>
-        <p:txBody>
-          <a:bodyPr wrap="none">
-            <a:spAutoFit/>
-          </a:bodyPr>
-          <a:lstStyle/>
-          <a:p>
-            <a:pPr algn="ctr">
-              <a:defRPr sz="1800" b="1">
-                <a:solidFill>
-                  <a:srgbClr val="FFFFFF"/>
-                </a:solidFill>
-              </a:defRPr>
-            </a:pPr>
-            <a:r>
-              <a:t>Analyze &amp; Build</a:t>
-            </a:r>
-          </a:p>
-        </p:txBody>
-      </p:sp>
-      <p:sp>
-        <p:nvSpPr>
-          <p:cNvPr id="13" name="TextBox 12"/>
-          <p:cNvSpPr txBox="1"/>
-          <p:nvPr/>
-        </p:nvSpPr>
-        <p:spPr>
-          <a:xfrm>
-            <a:off x="4389120" y="3749039"/>
-            <a:ext cx="3200400" cy="1645920"/>
-          </a:xfrm>
-          <a:prstGeom prst="rect">
-            <a:avLst/>
-          </a:prstGeom>
-          <a:noFill/>
-        </p:spPr>
-        <p:txBody>
-          <a:bodyPr wrap="square">
-            <a:spAutoFit/>
-          </a:bodyPr>
-          <a:lstStyle/>
-          <a:p>
-            <a:pPr algn="ctr">
-              <a:defRPr sz="1300">
-                <a:solidFill>
-                  <a:srgbClr val="D1D5DB"/>
-                </a:solidFill>
-              </a:defRPr>
-            </a:pPr>
-            <a:r>
-              <a:t>Use prompting skills to</a:t>
-            </a:r>
-            <a:br/>
-            <a:r>
-              <a:t>extract insights from</a:t>
-            </a:r>
-            <a:br/>
-            <a:r>
-              <a:t>multiple file types.</a:t>
-            </a:r>
-            <a:br/>
-            <a:r>
-              <a:t>Iterate until output is sharp.</a:t>
-            </a:r>
-          </a:p>
-        </p:txBody>
-      </p:sp>
-      <p:sp>
-        <p:nvSpPr>
-          <p:cNvPr id="14" name="TextBox 13"/>
-          <p:cNvSpPr txBox="1"/>
-          <p:nvPr/>
-        </p:nvSpPr>
-        <p:spPr>
-          <a:xfrm>
-            <a:off x="4389120" y="5303520"/>
-            <a:ext cx="3200400" cy="365760"/>
-          </a:xfrm>
-          <a:prstGeom prst="rect">
-            <a:avLst/>
-          </a:prstGeom>
-          <a:noFill/>
-        </p:spPr>
-        <p:txBody>
-          <a:bodyPr wrap="none">
-            <a:spAutoFit/>
-          </a:bodyPr>
-          <a:lstStyle/>
-          <a:p>
-            <a:pPr algn="ctr">
-              <a:defRPr sz="1200" i="1">
-                <a:solidFill>
-                  <a:srgbClr val="14B8A6"/>
-                </a:solidFill>
-              </a:defRPr>
-            </a:pPr>
-            <a:r>
-              <a:t>15 min</a:t>
-            </a:r>
-          </a:p>
-        </p:txBody>
-      </p:sp>
-      <p:sp>
-        <p:nvSpPr>
-          <p:cNvPr id="15" name="Rounded Rectangle 14"/>
+          <p:cNvPr id="8" name="Rounded Rectangle 7"/>
           <p:cNvSpPr/>
           <p:nvPr/>
         </p:nvSpPr>
         <p:spPr>
           <a:xfrm>
-            <a:off x="7955280" y="2468880"/>
-            <a:ext cx="3566160" cy="3200400"/>
+            <a:off x="4312767" y="1371600"/>
+            <a:ext cx="822960" cy="822960"/>
           </a:xfrm>
           <a:prstGeom prst="roundRect">
             <a:avLst/>
           </a:prstGeom>
           <a:solidFill>
-            <a:srgbClr val="24354A"/>
+            <a:srgbClr val="141A26"/>
           </a:solidFill>
-          <a:ln w="19050">
+          <a:ln w="25400">
             <a:solidFill>
-              <a:srgbClr val="14B8A6"/>
+              <a:srgbClr val="00D4AA"/>
             </a:solidFill>
           </a:ln>
         </p:spPr>
@@ -47365,14 +46099,740 @@
       </p:sp>
       <p:sp>
         <p:nvSpPr>
+          <p:cNvPr id="9" name="Oval 8"/>
+          <p:cNvSpPr/>
+          <p:nvPr/>
+        </p:nvSpPr>
+        <p:spPr>
+          <a:xfrm>
+            <a:off x="4975707" y="1211580"/>
+            <a:ext cx="320040" cy="320040"/>
+          </a:xfrm>
+          <a:prstGeom prst="ellipse">
+            <a:avLst/>
+          </a:prstGeom>
+          <a:solidFill>
+            <a:srgbClr val="00D4AA"/>
+          </a:solidFill>
+          <a:ln>
+            <a:noFill/>
+          </a:ln>
+        </p:spPr>
+        <p:style>
+          <a:lnRef idx="1">
+            <a:schemeClr val="accent1"/>
+          </a:lnRef>
+          <a:fillRef idx="3">
+            <a:schemeClr val="accent1"/>
+          </a:fillRef>
+          <a:effectRef idx="2">
+            <a:schemeClr val="accent1"/>
+          </a:effectRef>
+          <a:fontRef idx="minor">
+            <a:schemeClr val="lt1"/>
+          </a:fontRef>
+        </p:style>
+        <p:txBody>
+          <a:bodyPr rtlCol="0" anchor="ctr"/>
+          <a:lstStyle/>
+          <a:p>
+            <a:pPr algn="ctr"/>
+            <a:endParaRPr/>
+          </a:p>
+        </p:txBody>
+      </p:sp>
+      <p:sp>
+        <p:nvSpPr>
+          <p:cNvPr id="10" name="TextBox 9"/>
+          <p:cNvSpPr txBox="1"/>
+          <p:nvPr/>
+        </p:nvSpPr>
+        <p:spPr>
+          <a:xfrm>
+            <a:off x="4975707" y="1211580"/>
+            <a:ext cx="320040" cy="320040"/>
+          </a:xfrm>
+          <a:prstGeom prst="rect">
+            <a:avLst/>
+          </a:prstGeom>
+          <a:noFill/>
+        </p:spPr>
+        <p:txBody>
+          <a:bodyPr wrap="none" anchor="ctr">
+            <a:spAutoFit/>
+          </a:bodyPr>
+          <a:lstStyle/>
+          <a:p>
+            <a:pPr algn="ctr">
+              <a:defRPr sz="1400" b="1">
+                <a:solidFill>
+                  <a:srgbClr val="0B0F1A"/>
+                </a:solidFill>
+              </a:defRPr>
+            </a:pPr>
+            <a:r>
+              <a:t>2</a:t>
+            </a:r>
+          </a:p>
+        </p:txBody>
+      </p:sp>
+      <p:sp>
+        <p:nvSpPr>
+          <p:cNvPr id="11" name="TextBox 10"/>
+          <p:cNvSpPr txBox="1"/>
+          <p:nvPr/>
+        </p:nvSpPr>
+        <p:spPr>
+          <a:xfrm>
+            <a:off x="4312767" y="1371600"/>
+            <a:ext cx="822960" cy="822960"/>
+          </a:xfrm>
+          <a:prstGeom prst="rect">
+            <a:avLst/>
+          </a:prstGeom>
+          <a:noFill/>
+        </p:spPr>
+        <p:txBody>
+          <a:bodyPr wrap="none" anchor="ctr">
+            <a:spAutoFit/>
+          </a:bodyPr>
+          <a:lstStyle/>
+          <a:p>
+            <a:pPr algn="ctr">
+              <a:defRPr sz="2800" b="1">
+                <a:solidFill>
+                  <a:srgbClr val="00D4AA"/>
+                </a:solidFill>
+              </a:defRPr>
+            </a:pPr>
+            <a:r>
+              <a:t>2</a:t>
+            </a:r>
+          </a:p>
+        </p:txBody>
+      </p:sp>
+      <p:sp>
+        <p:nvSpPr>
+          <p:cNvPr id="12" name="Right Arrow 11"/>
+          <p:cNvSpPr/>
+          <p:nvPr/>
+        </p:nvSpPr>
+        <p:spPr>
+          <a:xfrm>
+            <a:off x="5227167" y="1645920"/>
+            <a:ext cx="365760" cy="274320"/>
+          </a:xfrm>
+          <a:prstGeom prst="rightArrow">
+            <a:avLst/>
+          </a:prstGeom>
+          <a:solidFill>
+            <a:srgbClr val="8B95A5"/>
+          </a:solidFill>
+          <a:ln>
+            <a:noFill/>
+          </a:ln>
+        </p:spPr>
+        <p:style>
+          <a:lnRef idx="1">
+            <a:schemeClr val="accent1"/>
+          </a:lnRef>
+          <a:fillRef idx="3">
+            <a:schemeClr val="accent1"/>
+          </a:fillRef>
+          <a:effectRef idx="2">
+            <a:schemeClr val="accent1"/>
+          </a:effectRef>
+          <a:fontRef idx="minor">
+            <a:schemeClr val="lt1"/>
+          </a:fontRef>
+        </p:style>
+        <p:txBody>
+          <a:bodyPr rtlCol="0" anchor="ctr"/>
+          <a:lstStyle/>
+          <a:p>
+            <a:pPr algn="ctr"/>
+            <a:endParaRPr/>
+          </a:p>
+        </p:txBody>
+      </p:sp>
+      <p:sp>
+        <p:nvSpPr>
+          <p:cNvPr id="13" name="Rounded Rectangle 12"/>
+          <p:cNvSpPr/>
+          <p:nvPr/>
+        </p:nvSpPr>
+        <p:spPr>
+          <a:xfrm>
+            <a:off x="5684367" y="1371600"/>
+            <a:ext cx="822960" cy="822960"/>
+          </a:xfrm>
+          <a:prstGeom prst="roundRect">
+            <a:avLst/>
+          </a:prstGeom>
+          <a:solidFill>
+            <a:srgbClr val="141A26"/>
+          </a:solidFill>
+          <a:ln w="25400">
+            <a:solidFill>
+              <a:srgbClr val="00D4AA"/>
+            </a:solidFill>
+          </a:ln>
+        </p:spPr>
+        <p:style>
+          <a:lnRef idx="1">
+            <a:schemeClr val="accent1"/>
+          </a:lnRef>
+          <a:fillRef idx="3">
+            <a:schemeClr val="accent1"/>
+          </a:fillRef>
+          <a:effectRef idx="2">
+            <a:schemeClr val="accent1"/>
+          </a:effectRef>
+          <a:fontRef idx="minor">
+            <a:schemeClr val="lt1"/>
+          </a:fontRef>
+        </p:style>
+        <p:txBody>
+          <a:bodyPr rtlCol="0" anchor="ctr"/>
+          <a:lstStyle/>
+          <a:p>
+            <a:pPr algn="ctr"/>
+            <a:endParaRPr/>
+          </a:p>
+        </p:txBody>
+      </p:sp>
+      <p:sp>
+        <p:nvSpPr>
+          <p:cNvPr id="14" name="Oval 13"/>
+          <p:cNvSpPr/>
+          <p:nvPr/>
+        </p:nvSpPr>
+        <p:spPr>
+          <a:xfrm>
+            <a:off x="6347307" y="1211580"/>
+            <a:ext cx="320040" cy="320040"/>
+          </a:xfrm>
+          <a:prstGeom prst="ellipse">
+            <a:avLst/>
+          </a:prstGeom>
+          <a:solidFill>
+            <a:srgbClr val="00D4AA"/>
+          </a:solidFill>
+          <a:ln>
+            <a:noFill/>
+          </a:ln>
+        </p:spPr>
+        <p:style>
+          <a:lnRef idx="1">
+            <a:schemeClr val="accent1"/>
+          </a:lnRef>
+          <a:fillRef idx="3">
+            <a:schemeClr val="accent1"/>
+          </a:fillRef>
+          <a:effectRef idx="2">
+            <a:schemeClr val="accent1"/>
+          </a:effectRef>
+          <a:fontRef idx="minor">
+            <a:schemeClr val="lt1"/>
+          </a:fontRef>
+        </p:style>
+        <p:txBody>
+          <a:bodyPr rtlCol="0" anchor="ctr"/>
+          <a:lstStyle/>
+          <a:p>
+            <a:pPr algn="ctr"/>
+            <a:endParaRPr/>
+          </a:p>
+        </p:txBody>
+      </p:sp>
+      <p:sp>
+        <p:nvSpPr>
+          <p:cNvPr id="15" name="TextBox 14"/>
+          <p:cNvSpPr txBox="1"/>
+          <p:nvPr/>
+        </p:nvSpPr>
+        <p:spPr>
+          <a:xfrm>
+            <a:off x="6347307" y="1211580"/>
+            <a:ext cx="320040" cy="320040"/>
+          </a:xfrm>
+          <a:prstGeom prst="rect">
+            <a:avLst/>
+          </a:prstGeom>
+          <a:noFill/>
+        </p:spPr>
+        <p:txBody>
+          <a:bodyPr wrap="none" anchor="ctr">
+            <a:spAutoFit/>
+          </a:bodyPr>
+          <a:lstStyle/>
+          <a:p>
+            <a:pPr algn="ctr">
+              <a:defRPr sz="1400" b="1">
+                <a:solidFill>
+                  <a:srgbClr val="0B0F1A"/>
+                </a:solidFill>
+              </a:defRPr>
+            </a:pPr>
+            <a:r>
+              <a:t>3</a:t>
+            </a:r>
+          </a:p>
+        </p:txBody>
+      </p:sp>
+      <p:sp>
+        <p:nvSpPr>
           <p:cNvPr id="16" name="TextBox 15"/>
           <p:cNvSpPr txBox="1"/>
           <p:nvPr/>
         </p:nvSpPr>
         <p:spPr>
           <a:xfrm>
-            <a:off x="8138160" y="2651760"/>
-            <a:ext cx="3200400" cy="548640"/>
+            <a:off x="5684367" y="1371600"/>
+            <a:ext cx="822960" cy="822960"/>
+          </a:xfrm>
+          <a:prstGeom prst="rect">
+            <a:avLst/>
+          </a:prstGeom>
+          <a:noFill/>
+        </p:spPr>
+        <p:txBody>
+          <a:bodyPr wrap="none" anchor="ctr">
+            <a:spAutoFit/>
+          </a:bodyPr>
+          <a:lstStyle/>
+          <a:p>
+            <a:pPr algn="ctr">
+              <a:defRPr sz="2800" b="1">
+                <a:solidFill>
+                  <a:srgbClr val="00D4AA"/>
+                </a:solidFill>
+              </a:defRPr>
+            </a:pPr>
+            <a:r>
+              <a:t>3</a:t>
+            </a:r>
+          </a:p>
+        </p:txBody>
+      </p:sp>
+      <p:sp>
+        <p:nvSpPr>
+          <p:cNvPr id="17" name="Right Arrow 16"/>
+          <p:cNvSpPr/>
+          <p:nvPr/>
+        </p:nvSpPr>
+        <p:spPr>
+          <a:xfrm>
+            <a:off x="6598767" y="1645920"/>
+            <a:ext cx="365760" cy="274320"/>
+          </a:xfrm>
+          <a:prstGeom prst="rightArrow">
+            <a:avLst/>
+          </a:prstGeom>
+          <a:solidFill>
+            <a:srgbClr val="8B95A5"/>
+          </a:solidFill>
+          <a:ln>
+            <a:noFill/>
+          </a:ln>
+        </p:spPr>
+        <p:style>
+          <a:lnRef idx="1">
+            <a:schemeClr val="accent1"/>
+          </a:lnRef>
+          <a:fillRef idx="3">
+            <a:schemeClr val="accent1"/>
+          </a:fillRef>
+          <a:effectRef idx="2">
+            <a:schemeClr val="accent1"/>
+          </a:effectRef>
+          <a:fontRef idx="minor">
+            <a:schemeClr val="lt1"/>
+          </a:fontRef>
+        </p:style>
+        <p:txBody>
+          <a:bodyPr rtlCol="0" anchor="ctr"/>
+          <a:lstStyle/>
+          <a:p>
+            <a:pPr algn="ctr"/>
+            <a:endParaRPr/>
+          </a:p>
+        </p:txBody>
+      </p:sp>
+      <p:sp>
+        <p:nvSpPr>
+          <p:cNvPr id="18" name="Rounded Rectangle 17"/>
+          <p:cNvSpPr/>
+          <p:nvPr/>
+        </p:nvSpPr>
+        <p:spPr>
+          <a:xfrm>
+            <a:off x="7055967" y="1371600"/>
+            <a:ext cx="822960" cy="822960"/>
+          </a:xfrm>
+          <a:prstGeom prst="roundRect">
+            <a:avLst/>
+          </a:prstGeom>
+          <a:solidFill>
+            <a:srgbClr val="141A26"/>
+          </a:solidFill>
+          <a:ln w="25400">
+            <a:solidFill>
+              <a:srgbClr val="00D4AA"/>
+            </a:solidFill>
+          </a:ln>
+        </p:spPr>
+        <p:style>
+          <a:lnRef idx="1">
+            <a:schemeClr val="accent1"/>
+          </a:lnRef>
+          <a:fillRef idx="3">
+            <a:schemeClr val="accent1"/>
+          </a:fillRef>
+          <a:effectRef idx="2">
+            <a:schemeClr val="accent1"/>
+          </a:effectRef>
+          <a:fontRef idx="minor">
+            <a:schemeClr val="lt1"/>
+          </a:fontRef>
+        </p:style>
+        <p:txBody>
+          <a:bodyPr rtlCol="0" anchor="ctr"/>
+          <a:lstStyle/>
+          <a:p>
+            <a:pPr algn="ctr"/>
+            <a:endParaRPr/>
+          </a:p>
+        </p:txBody>
+      </p:sp>
+      <p:sp>
+        <p:nvSpPr>
+          <p:cNvPr id="19" name="Oval 18"/>
+          <p:cNvSpPr/>
+          <p:nvPr/>
+        </p:nvSpPr>
+        <p:spPr>
+          <a:xfrm>
+            <a:off x="7718907" y="1211580"/>
+            <a:ext cx="320040" cy="320040"/>
+          </a:xfrm>
+          <a:prstGeom prst="ellipse">
+            <a:avLst/>
+          </a:prstGeom>
+          <a:solidFill>
+            <a:srgbClr val="00D4AA"/>
+          </a:solidFill>
+          <a:ln>
+            <a:noFill/>
+          </a:ln>
+        </p:spPr>
+        <p:style>
+          <a:lnRef idx="1">
+            <a:schemeClr val="accent1"/>
+          </a:lnRef>
+          <a:fillRef idx="3">
+            <a:schemeClr val="accent1"/>
+          </a:fillRef>
+          <a:effectRef idx="2">
+            <a:schemeClr val="accent1"/>
+          </a:effectRef>
+          <a:fontRef idx="minor">
+            <a:schemeClr val="lt1"/>
+          </a:fontRef>
+        </p:style>
+        <p:txBody>
+          <a:bodyPr rtlCol="0" anchor="ctr"/>
+          <a:lstStyle/>
+          <a:p>
+            <a:pPr algn="ctr"/>
+            <a:endParaRPr/>
+          </a:p>
+        </p:txBody>
+      </p:sp>
+      <p:sp>
+        <p:nvSpPr>
+          <p:cNvPr id="20" name="TextBox 19"/>
+          <p:cNvSpPr txBox="1"/>
+          <p:nvPr/>
+        </p:nvSpPr>
+        <p:spPr>
+          <a:xfrm>
+            <a:off x="7718907" y="1211580"/>
+            <a:ext cx="320040" cy="320040"/>
+          </a:xfrm>
+          <a:prstGeom prst="rect">
+            <a:avLst/>
+          </a:prstGeom>
+          <a:noFill/>
+        </p:spPr>
+        <p:txBody>
+          <a:bodyPr wrap="none" anchor="ctr">
+            <a:spAutoFit/>
+          </a:bodyPr>
+          <a:lstStyle/>
+          <a:p>
+            <a:pPr algn="ctr">
+              <a:defRPr sz="1400" b="1">
+                <a:solidFill>
+                  <a:srgbClr val="0B0F1A"/>
+                </a:solidFill>
+              </a:defRPr>
+            </a:pPr>
+            <a:r>
+              <a:t>4</a:t>
+            </a:r>
+          </a:p>
+        </p:txBody>
+      </p:sp>
+      <p:sp>
+        <p:nvSpPr>
+          <p:cNvPr id="21" name="TextBox 20"/>
+          <p:cNvSpPr txBox="1"/>
+          <p:nvPr/>
+        </p:nvSpPr>
+        <p:spPr>
+          <a:xfrm>
+            <a:off x="7055967" y="1371600"/>
+            <a:ext cx="822960" cy="822960"/>
+          </a:xfrm>
+          <a:prstGeom prst="rect">
+            <a:avLst/>
+          </a:prstGeom>
+          <a:noFill/>
+        </p:spPr>
+        <p:txBody>
+          <a:bodyPr wrap="none" anchor="ctr">
+            <a:spAutoFit/>
+          </a:bodyPr>
+          <a:lstStyle/>
+          <a:p>
+            <a:pPr algn="ctr">
+              <a:defRPr sz="2800" b="1">
+                <a:solidFill>
+                  <a:srgbClr val="00D4AA"/>
+                </a:solidFill>
+              </a:defRPr>
+            </a:pPr>
+            <a:r>
+              <a:t>4</a:t>
+            </a:r>
+          </a:p>
+        </p:txBody>
+      </p:sp>
+      <p:sp>
+        <p:nvSpPr>
+          <p:cNvPr id="22" name="Right Arrow 21"/>
+          <p:cNvSpPr/>
+          <p:nvPr/>
+        </p:nvSpPr>
+        <p:spPr>
+          <a:xfrm>
+            <a:off x="7970367" y="1645920"/>
+            <a:ext cx="365760" cy="274320"/>
+          </a:xfrm>
+          <a:prstGeom prst="rightArrow">
+            <a:avLst/>
+          </a:prstGeom>
+          <a:solidFill>
+            <a:srgbClr val="8B95A5"/>
+          </a:solidFill>
+          <a:ln>
+            <a:noFill/>
+          </a:ln>
+        </p:spPr>
+        <p:style>
+          <a:lnRef idx="1">
+            <a:schemeClr val="accent1"/>
+          </a:lnRef>
+          <a:fillRef idx="3">
+            <a:schemeClr val="accent1"/>
+          </a:fillRef>
+          <a:effectRef idx="2">
+            <a:schemeClr val="accent1"/>
+          </a:effectRef>
+          <a:fontRef idx="minor">
+            <a:schemeClr val="lt1"/>
+          </a:fontRef>
+        </p:style>
+        <p:txBody>
+          <a:bodyPr rtlCol="0" anchor="ctr"/>
+          <a:lstStyle/>
+          <a:p>
+            <a:pPr algn="ctr"/>
+            <a:endParaRPr/>
+          </a:p>
+        </p:txBody>
+      </p:sp>
+      <p:sp>
+        <p:nvSpPr>
+          <p:cNvPr id="23" name="Rounded Rectangle 22"/>
+          <p:cNvSpPr/>
+          <p:nvPr/>
+        </p:nvSpPr>
+        <p:spPr>
+          <a:xfrm>
+            <a:off x="8427567" y="1371600"/>
+            <a:ext cx="822960" cy="822960"/>
+          </a:xfrm>
+          <a:prstGeom prst="roundRect">
+            <a:avLst/>
+          </a:prstGeom>
+          <a:solidFill>
+            <a:srgbClr val="141A26"/>
+          </a:solidFill>
+          <a:ln w="25400">
+            <a:solidFill>
+              <a:srgbClr val="00D4AA"/>
+            </a:solidFill>
+          </a:ln>
+        </p:spPr>
+        <p:style>
+          <a:lnRef idx="1">
+            <a:schemeClr val="accent1"/>
+          </a:lnRef>
+          <a:fillRef idx="3">
+            <a:schemeClr val="accent1"/>
+          </a:fillRef>
+          <a:effectRef idx="2">
+            <a:schemeClr val="accent1"/>
+          </a:effectRef>
+          <a:fontRef idx="minor">
+            <a:schemeClr val="lt1"/>
+          </a:fontRef>
+        </p:style>
+        <p:txBody>
+          <a:bodyPr rtlCol="0" anchor="ctr"/>
+          <a:lstStyle/>
+          <a:p>
+            <a:pPr algn="ctr"/>
+            <a:endParaRPr/>
+          </a:p>
+        </p:txBody>
+      </p:sp>
+      <p:sp>
+        <p:nvSpPr>
+          <p:cNvPr id="24" name="Oval 23"/>
+          <p:cNvSpPr/>
+          <p:nvPr/>
+        </p:nvSpPr>
+        <p:spPr>
+          <a:xfrm>
+            <a:off x="9090507" y="1211580"/>
+            <a:ext cx="320040" cy="320040"/>
+          </a:xfrm>
+          <a:prstGeom prst="ellipse">
+            <a:avLst/>
+          </a:prstGeom>
+          <a:solidFill>
+            <a:srgbClr val="00D4AA"/>
+          </a:solidFill>
+          <a:ln>
+            <a:noFill/>
+          </a:ln>
+        </p:spPr>
+        <p:style>
+          <a:lnRef idx="1">
+            <a:schemeClr val="accent1"/>
+          </a:lnRef>
+          <a:fillRef idx="3">
+            <a:schemeClr val="accent1"/>
+          </a:fillRef>
+          <a:effectRef idx="2">
+            <a:schemeClr val="accent1"/>
+          </a:effectRef>
+          <a:fontRef idx="minor">
+            <a:schemeClr val="lt1"/>
+          </a:fontRef>
+        </p:style>
+        <p:txBody>
+          <a:bodyPr rtlCol="0" anchor="ctr"/>
+          <a:lstStyle/>
+          <a:p>
+            <a:pPr algn="ctr"/>
+            <a:endParaRPr/>
+          </a:p>
+        </p:txBody>
+      </p:sp>
+      <p:sp>
+        <p:nvSpPr>
+          <p:cNvPr id="25" name="TextBox 24"/>
+          <p:cNvSpPr txBox="1"/>
+          <p:nvPr/>
+        </p:nvSpPr>
+        <p:spPr>
+          <a:xfrm>
+            <a:off x="9090507" y="1211580"/>
+            <a:ext cx="320040" cy="320040"/>
+          </a:xfrm>
+          <a:prstGeom prst="rect">
+            <a:avLst/>
+          </a:prstGeom>
+          <a:noFill/>
+        </p:spPr>
+        <p:txBody>
+          <a:bodyPr wrap="none" anchor="ctr">
+            <a:spAutoFit/>
+          </a:bodyPr>
+          <a:lstStyle/>
+          <a:p>
+            <a:pPr algn="ctr">
+              <a:defRPr sz="1400" b="1">
+                <a:solidFill>
+                  <a:srgbClr val="0B0F1A"/>
+                </a:solidFill>
+              </a:defRPr>
+            </a:pPr>
+            <a:r>
+              <a:t>5</a:t>
+            </a:r>
+          </a:p>
+        </p:txBody>
+      </p:sp>
+      <p:sp>
+        <p:nvSpPr>
+          <p:cNvPr id="26" name="TextBox 25"/>
+          <p:cNvSpPr txBox="1"/>
+          <p:nvPr/>
+        </p:nvSpPr>
+        <p:spPr>
+          <a:xfrm>
+            <a:off x="8427567" y="1371600"/>
+            <a:ext cx="822960" cy="822960"/>
+          </a:xfrm>
+          <a:prstGeom prst="rect">
+            <a:avLst/>
+          </a:prstGeom>
+          <a:noFill/>
+        </p:spPr>
+        <p:txBody>
+          <a:bodyPr wrap="none" anchor="ctr">
+            <a:spAutoFit/>
+          </a:bodyPr>
+          <a:lstStyle/>
+          <a:p>
+            <a:pPr algn="ctr">
+              <a:defRPr sz="2800" b="1">
+                <a:solidFill>
+                  <a:srgbClr val="00D4AA"/>
+                </a:solidFill>
+              </a:defRPr>
+            </a:pPr>
+            <a:r>
+              <a:t>5</a:t>
+            </a:r>
+          </a:p>
+        </p:txBody>
+      </p:sp>
+      <p:sp>
+        <p:nvSpPr>
+          <p:cNvPr id="27" name="TextBox 26"/>
+          <p:cNvSpPr txBox="1"/>
+          <p:nvPr/>
+        </p:nvSpPr>
+        <p:spPr>
+          <a:xfrm>
+            <a:off x="1371600" y="2743200"/>
+            <a:ext cx="457200" cy="457200"/>
           </a:xfrm>
           <a:prstGeom prst="rect">
             <a:avLst/>
@@ -47385,25 +46845,64 @@
           </a:bodyPr>
           <a:lstStyle/>
           <a:p>
-            <a:pPr algn="ctr">
-              <a:defRPr sz="3000"/>
-            </a:pPr>
-            <a:r>
-              <a:t>✨</a:t>
-            </a:r>
-          </a:p>
-        </p:txBody>
-      </p:sp>
-      <p:sp>
-        <p:nvSpPr>
-          <p:cNvPr id="17" name="TextBox 16"/>
-          <p:cNvSpPr txBox="1"/>
-          <p:nvPr/>
-        </p:nvSpPr>
-        <p:spPr>
-          <a:xfrm>
-            <a:off x="8138160" y="3200400"/>
-            <a:ext cx="3200400" cy="457200"/>
+            <a:pPr>
+              <a:defRPr sz="2000" b="1">
+                <a:solidFill>
+                  <a:srgbClr val="00D4AA"/>
+                </a:solidFill>
+              </a:defRPr>
+            </a:pPr>
+            <a:r>
+              <a:t>1</a:t>
+            </a:r>
+          </a:p>
+        </p:txBody>
+      </p:sp>
+      <p:sp>
+        <p:nvSpPr>
+          <p:cNvPr id="28" name="TextBox 27"/>
+          <p:cNvSpPr txBox="1"/>
+          <p:nvPr/>
+        </p:nvSpPr>
+        <p:spPr>
+          <a:xfrm>
+            <a:off x="1828800" y="2743200"/>
+            <a:ext cx="8991295" cy="548640"/>
+          </a:xfrm>
+          <a:prstGeom prst="rect">
+            <a:avLst/>
+          </a:prstGeom>
+          <a:noFill/>
+        </p:spPr>
+        <p:txBody>
+          <a:bodyPr wrap="square">
+            <a:spAutoFit/>
+          </a:bodyPr>
+          <a:lstStyle/>
+          <a:p>
+            <a:pPr>
+              <a:defRPr sz="1800">
+                <a:solidFill>
+                  <a:srgbClr val="FFFFFF"/>
+                </a:solidFill>
+              </a:defRPr>
+            </a:pPr>
+            <a:r>
+              <a:t>Upload prospect company info</a:t>
+            </a:r>
+          </a:p>
+        </p:txBody>
+      </p:sp>
+      <p:sp>
+        <p:nvSpPr>
+          <p:cNvPr id="29" name="TextBox 28"/>
+          <p:cNvSpPr txBox="1"/>
+          <p:nvPr/>
+        </p:nvSpPr>
+        <p:spPr>
+          <a:xfrm>
+            <a:off x="1371600" y="3383280"/>
+            <a:ext cx="457200" cy="457200"/>
           </a:xfrm>
           <a:prstGeom prst="rect">
             <a:avLst/>
@@ -47416,29 +46915,29 @@
           </a:bodyPr>
           <a:lstStyle/>
           <a:p>
-            <a:pPr algn="ctr">
-              <a:defRPr sz="1800" b="1">
-                <a:solidFill>
-                  <a:srgbClr val="FFFFFF"/>
-                </a:solidFill>
-              </a:defRPr>
-            </a:pPr>
-            <a:r>
-              <a:t>Polish &amp; Present</a:t>
-            </a:r>
-          </a:p>
-        </p:txBody>
-      </p:sp>
-      <p:sp>
-        <p:nvSpPr>
-          <p:cNvPr id="18" name="TextBox 17"/>
-          <p:cNvSpPr txBox="1"/>
-          <p:nvPr/>
-        </p:nvSpPr>
-        <p:spPr>
-          <a:xfrm>
-            <a:off x="8138160" y="3749039"/>
-            <a:ext cx="3200400" cy="1645920"/>
+            <a:pPr>
+              <a:defRPr sz="2000" b="1">
+                <a:solidFill>
+                  <a:srgbClr val="00D4AA"/>
+                </a:solidFill>
+              </a:defRPr>
+            </a:pPr>
+            <a:r>
+              <a:t>2</a:t>
+            </a:r>
+          </a:p>
+        </p:txBody>
+      </p:sp>
+      <p:sp>
+        <p:nvSpPr>
+          <p:cNvPr id="30" name="TextBox 29"/>
+          <p:cNvSpPr txBox="1"/>
+          <p:nvPr/>
+        </p:nvSpPr>
+        <p:spPr>
+          <a:xfrm>
+            <a:off x="1828800" y="3383280"/>
+            <a:ext cx="8991295" cy="548640"/>
           </a:xfrm>
           <a:prstGeom prst="rect">
             <a:avLst/>
@@ -47451,41 +46950,29 @@
           </a:bodyPr>
           <a:lstStyle/>
           <a:p>
-            <a:pPr algn="ctr">
-              <a:defRPr sz="1300">
-                <a:solidFill>
-                  <a:srgbClr val="D1D5DB"/>
-                </a:solidFill>
-              </a:defRPr>
-            </a:pPr>
-            <a:r>
-              <a:t>Create a polished</a:t>
-            </a:r>
-            <a:br/>
-            <a:r>
-              <a:t>executive briefing artifact.</a:t>
-            </a:r>
-            <a:br/>
-            <a:r>
-              <a:t>Add charts, format for</a:t>
-            </a:r>
-            <a:br/>
-            <a:r>
-              <a:t>your VP. Share with class.</a:t>
-            </a:r>
-          </a:p>
-        </p:txBody>
-      </p:sp>
-      <p:sp>
-        <p:nvSpPr>
-          <p:cNvPr id="19" name="TextBox 18"/>
-          <p:cNvSpPr txBox="1"/>
-          <p:nvPr/>
-        </p:nvSpPr>
-        <p:spPr>
-          <a:xfrm>
-            <a:off x="8138160" y="5303520"/>
-            <a:ext cx="3200400" cy="365760"/>
+            <a:pPr>
+              <a:defRPr sz="1800">
+                <a:solidFill>
+                  <a:srgbClr val="FFFFFF"/>
+                </a:solidFill>
+              </a:defRPr>
+            </a:pPr>
+            <a:r>
+              <a:t>Ask: 'What are their pain points?'</a:t>
+            </a:r>
+          </a:p>
+        </p:txBody>
+      </p:sp>
+      <p:sp>
+        <p:nvSpPr>
+          <p:cNvPr id="31" name="TextBox 30"/>
+          <p:cNvSpPr txBox="1"/>
+          <p:nvPr/>
+        </p:nvSpPr>
+        <p:spPr>
+          <a:xfrm>
+            <a:off x="1371600" y="4023360"/>
+            <a:ext cx="457200" cy="457200"/>
           </a:xfrm>
           <a:prstGeom prst="rect">
             <a:avLst/>
@@ -47498,15 +46985,190 @@
           </a:bodyPr>
           <a:lstStyle/>
           <a:p>
-            <a:pPr algn="ctr">
-              <a:defRPr sz="1200" i="1">
-                <a:solidFill>
-                  <a:srgbClr val="14B8A6"/>
-                </a:solidFill>
-              </a:defRPr>
-            </a:pPr>
-            <a:r>
-              <a:t>10 min</a:t>
+            <a:pPr>
+              <a:defRPr sz="2000" b="1">
+                <a:solidFill>
+                  <a:srgbClr val="00D4AA"/>
+                </a:solidFill>
+              </a:defRPr>
+            </a:pPr>
+            <a:r>
+              <a:t>3</a:t>
+            </a:r>
+          </a:p>
+        </p:txBody>
+      </p:sp>
+      <p:sp>
+        <p:nvSpPr>
+          <p:cNvPr id="32" name="TextBox 31"/>
+          <p:cNvSpPr txBox="1"/>
+          <p:nvPr/>
+        </p:nvSpPr>
+        <p:spPr>
+          <a:xfrm>
+            <a:off x="1828800" y="4023360"/>
+            <a:ext cx="8991295" cy="548640"/>
+          </a:xfrm>
+          <a:prstGeom prst="rect">
+            <a:avLst/>
+          </a:prstGeom>
+          <a:noFill/>
+        </p:spPr>
+        <p:txBody>
+          <a:bodyPr wrap="square">
+            <a:spAutoFit/>
+          </a:bodyPr>
+          <a:lstStyle/>
+          <a:p>
+            <a:pPr>
+              <a:defRPr sz="1800">
+                <a:solidFill>
+                  <a:srgbClr val="FFFFFF"/>
+                </a:solidFill>
+              </a:defRPr>
+            </a:pPr>
+            <a:r>
+              <a:t>Request: 'Draft personalized pitch'</a:t>
+            </a:r>
+          </a:p>
+        </p:txBody>
+      </p:sp>
+      <p:sp>
+        <p:nvSpPr>
+          <p:cNvPr id="33" name="TextBox 32"/>
+          <p:cNvSpPr txBox="1"/>
+          <p:nvPr/>
+        </p:nvSpPr>
+        <p:spPr>
+          <a:xfrm>
+            <a:off x="1371600" y="4663440"/>
+            <a:ext cx="457200" cy="457200"/>
+          </a:xfrm>
+          <a:prstGeom prst="rect">
+            <a:avLst/>
+          </a:prstGeom>
+          <a:noFill/>
+        </p:spPr>
+        <p:txBody>
+          <a:bodyPr wrap="none">
+            <a:spAutoFit/>
+          </a:bodyPr>
+          <a:lstStyle/>
+          <a:p>
+            <a:pPr>
+              <a:defRPr sz="2000" b="1">
+                <a:solidFill>
+                  <a:srgbClr val="00D4AA"/>
+                </a:solidFill>
+              </a:defRPr>
+            </a:pPr>
+            <a:r>
+              <a:t>4</a:t>
+            </a:r>
+          </a:p>
+        </p:txBody>
+      </p:sp>
+      <p:sp>
+        <p:nvSpPr>
+          <p:cNvPr id="34" name="TextBox 33"/>
+          <p:cNvSpPr txBox="1"/>
+          <p:nvPr/>
+        </p:nvSpPr>
+        <p:spPr>
+          <a:xfrm>
+            <a:off x="1828800" y="4663440"/>
+            <a:ext cx="8991295" cy="548640"/>
+          </a:xfrm>
+          <a:prstGeom prst="rect">
+            <a:avLst/>
+          </a:prstGeom>
+          <a:noFill/>
+        </p:spPr>
+        <p:txBody>
+          <a:bodyPr wrap="square">
+            <a:spAutoFit/>
+          </a:bodyPr>
+          <a:lstStyle/>
+          <a:p>
+            <a:pPr>
+              <a:defRPr sz="1800">
+                <a:solidFill>
+                  <a:srgbClr val="FFFFFF"/>
+                </a:solidFill>
+              </a:defRPr>
+            </a:pPr>
+            <a:r>
+              <a:t>Create: 'Email sequence for follow-up'</a:t>
+            </a:r>
+          </a:p>
+        </p:txBody>
+      </p:sp>
+      <p:sp>
+        <p:nvSpPr>
+          <p:cNvPr id="35" name="TextBox 34"/>
+          <p:cNvSpPr txBox="1"/>
+          <p:nvPr/>
+        </p:nvSpPr>
+        <p:spPr>
+          <a:xfrm>
+            <a:off x="1371600" y="5303520"/>
+            <a:ext cx="457200" cy="457200"/>
+          </a:xfrm>
+          <a:prstGeom prst="rect">
+            <a:avLst/>
+          </a:prstGeom>
+          <a:noFill/>
+        </p:spPr>
+        <p:txBody>
+          <a:bodyPr wrap="none">
+            <a:spAutoFit/>
+          </a:bodyPr>
+          <a:lstStyle/>
+          <a:p>
+            <a:pPr>
+              <a:defRPr sz="2000" b="1">
+                <a:solidFill>
+                  <a:srgbClr val="00D4AA"/>
+                </a:solidFill>
+              </a:defRPr>
+            </a:pPr>
+            <a:r>
+              <a:t>5</a:t>
+            </a:r>
+          </a:p>
+        </p:txBody>
+      </p:sp>
+      <p:sp>
+        <p:nvSpPr>
+          <p:cNvPr id="36" name="TextBox 35"/>
+          <p:cNvSpPr txBox="1"/>
+          <p:nvPr/>
+        </p:nvSpPr>
+        <p:spPr>
+          <a:xfrm>
+            <a:off x="1828800" y="5303520"/>
+            <a:ext cx="8991295" cy="548640"/>
+          </a:xfrm>
+          <a:prstGeom prst="rect">
+            <a:avLst/>
+          </a:prstGeom>
+          <a:noFill/>
+        </p:spPr>
+        <p:txBody>
+          <a:bodyPr wrap="square">
+            <a:spAutoFit/>
+          </a:bodyPr>
+          <a:lstStyle/>
+          <a:p>
+            <a:pPr>
+              <a:defRPr sz="1800">
+                <a:solidFill>
+                  <a:srgbClr val="FFFFFF"/>
+                </a:solidFill>
+              </a:defRPr>
+            </a:pPr>
+            <a:r>
+              <a:t>Generate: 'Objection handling script'</a:t>
             </a:r>
           </a:p>
         </p:txBody>
@@ -47546,20 +47208,20 @@
       </p:grpSpPr>
       <p:sp>
         <p:nvSpPr>
-          <p:cNvPr id="2" name="Rectangle 1"/>
+          <p:cNvPr id="2" name="Rounded Rectangle 1"/>
           <p:cNvSpPr/>
           <p:nvPr/>
         </p:nvSpPr>
         <p:spPr>
           <a:xfrm>
-            <a:off x="0" y="1828800"/>
-            <a:ext cx="137160" cy="3200400"/>
-          </a:xfrm>
-          <a:prstGeom prst="rect">
+            <a:off x="457200" y="365760"/>
+            <a:ext cx="1097280" cy="457200"/>
+          </a:xfrm>
+          <a:prstGeom prst="roundRect">
             <a:avLst/>
           </a:prstGeom>
           <a:solidFill>
-            <a:srgbClr val="00D4AA"/>
+            <a:srgbClr val="14B8A6"/>
           </a:solidFill>
           <a:ln>
             <a:noFill/>
@@ -47583,6 +47245,130 @@
           <a:bodyPr rtlCol="0" anchor="ctr"/>
           <a:lstStyle/>
           <a:p>
+            <a:pPr algn="ctr">
+              <a:defRPr sz="1400" b="1">
+                <a:solidFill>
+                  <a:srgbClr val="FFFFFF"/>
+                </a:solidFill>
+              </a:defRPr>
+            </a:pPr>
+            <a:r>
+              <a:t>LAB 4</a:t>
+            </a:r>
+          </a:p>
+        </p:txBody>
+      </p:sp>
+      <p:sp>
+        <p:nvSpPr>
+          <p:cNvPr id="3" name="TextBox 2"/>
+          <p:cNvSpPr txBox="1"/>
+          <p:nvPr/>
+        </p:nvSpPr>
+        <p:spPr>
+          <a:xfrm>
+            <a:off x="457200" y="1005840"/>
+            <a:ext cx="11247120" cy="731520"/>
+          </a:xfrm>
+          <a:prstGeom prst="rect">
+            <a:avLst/>
+          </a:prstGeom>
+          <a:noFill/>
+        </p:spPr>
+        <p:txBody>
+          <a:bodyPr wrap="none">
+            <a:spAutoFit/>
+          </a:bodyPr>
+          <a:lstStyle/>
+          <a:p>
+            <a:pPr>
+              <a:defRPr sz="3600" b="1">
+                <a:solidFill>
+                  <a:srgbClr val="FFFFFF"/>
+                </a:solidFill>
+              </a:defRPr>
+            </a:pPr>
+            <a:r>
+              <a:t>Executive Briefing Challenge</a:t>
+            </a:r>
+          </a:p>
+        </p:txBody>
+      </p:sp>
+      <p:sp>
+        <p:nvSpPr>
+          <p:cNvPr id="4" name="TextBox 3"/>
+          <p:cNvSpPr txBox="1"/>
+          <p:nvPr/>
+        </p:nvSpPr>
+        <p:spPr>
+          <a:xfrm>
+            <a:off x="457200" y="1737360"/>
+            <a:ext cx="11247120" cy="457200"/>
+          </a:xfrm>
+          <a:prstGeom prst="rect">
+            <a:avLst/>
+          </a:prstGeom>
+          <a:noFill/>
+        </p:spPr>
+        <p:txBody>
+          <a:bodyPr wrap="none">
+            <a:spAutoFit/>
+          </a:bodyPr>
+          <a:lstStyle/>
+          <a:p>
+            <a:pPr>
+              <a:defRPr sz="1800" i="1">
+                <a:solidFill>
+                  <a:srgbClr val="9CA3AF"/>
+                </a:solidFill>
+              </a:defRPr>
+            </a:pPr>
+            <a:r>
+              <a:t>30 minutes  •  Tie it all together  •  Real deliverable you'll use Monday</a:t>
+            </a:r>
+          </a:p>
+        </p:txBody>
+      </p:sp>
+      <p:sp>
+        <p:nvSpPr>
+          <p:cNvPr id="5" name="Rounded Rectangle 4"/>
+          <p:cNvSpPr/>
+          <p:nvPr/>
+        </p:nvSpPr>
+        <p:spPr>
+          <a:xfrm>
+            <a:off x="457200" y="2468880"/>
+            <a:ext cx="3566160" cy="3200400"/>
+          </a:xfrm>
+          <a:prstGeom prst="roundRect">
+            <a:avLst/>
+          </a:prstGeom>
+          <a:solidFill>
+            <a:srgbClr val="24354A"/>
+          </a:solidFill>
+          <a:ln w="19050">
+            <a:solidFill>
+              <a:srgbClr val="14B8A6"/>
+            </a:solidFill>
+          </a:ln>
+        </p:spPr>
+        <p:style>
+          <a:lnRef idx="1">
+            <a:schemeClr val="accent1"/>
+          </a:lnRef>
+          <a:fillRef idx="3">
+            <a:schemeClr val="accent1"/>
+          </a:fillRef>
+          <a:effectRef idx="2">
+            <a:schemeClr val="accent1"/>
+          </a:effectRef>
+          <a:fontRef idx="minor">
+            <a:schemeClr val="lt1"/>
+          </a:fontRef>
+        </p:style>
+        <p:txBody>
+          <a:bodyPr rtlCol="0" anchor="ctr"/>
+          <a:lstStyle/>
+          <a:p>
             <a:pPr algn="ctr"/>
             <a:endParaRPr/>
           </a:p>
@@ -47590,14 +47376,80 @@
       </p:sp>
       <p:sp>
         <p:nvSpPr>
-          <p:cNvPr id="3" name="TextBox 2"/>
-          <p:cNvSpPr txBox="1"/>
-          <p:nvPr/>
-        </p:nvSpPr>
-        <p:spPr>
-          <a:xfrm>
-            <a:off x="457200" y="2286000"/>
-            <a:ext cx="11277295" cy="1371600"/>
+          <p:cNvPr id="6" name="TextBox 5"/>
+          <p:cNvSpPr txBox="1"/>
+          <p:nvPr/>
+        </p:nvSpPr>
+        <p:spPr>
+          <a:xfrm>
+            <a:off x="640080" y="2651760"/>
+            <a:ext cx="3200400" cy="548640"/>
+          </a:xfrm>
+          <a:prstGeom prst="rect">
+            <a:avLst/>
+          </a:prstGeom>
+          <a:noFill/>
+        </p:spPr>
+        <p:txBody>
+          <a:bodyPr wrap="none">
+            <a:spAutoFit/>
+          </a:bodyPr>
+          <a:lstStyle/>
+          <a:p>
+            <a:pPr algn="ctr">
+              <a:defRPr sz="3000"/>
+            </a:pPr>
+            <a:r>
+              <a:t>🗂️</a:t>
+            </a:r>
+          </a:p>
+        </p:txBody>
+      </p:sp>
+      <p:sp>
+        <p:nvSpPr>
+          <p:cNvPr id="7" name="TextBox 6"/>
+          <p:cNvSpPr txBox="1"/>
+          <p:nvPr/>
+        </p:nvSpPr>
+        <p:spPr>
+          <a:xfrm>
+            <a:off x="640080" y="3200400"/>
+            <a:ext cx="3200400" cy="457200"/>
+          </a:xfrm>
+          <a:prstGeom prst="rect">
+            <a:avLst/>
+          </a:prstGeom>
+          <a:noFill/>
+        </p:spPr>
+        <p:txBody>
+          <a:bodyPr wrap="none">
+            <a:spAutoFit/>
+          </a:bodyPr>
+          <a:lstStyle/>
+          <a:p>
+            <a:pPr algn="ctr">
+              <a:defRPr sz="1800" b="1">
+                <a:solidFill>
+                  <a:srgbClr val="FFFFFF"/>
+                </a:solidFill>
+              </a:defRPr>
+            </a:pPr>
+            <a:r>
+              <a:t>Set Up</a:t>
+            </a:r>
+          </a:p>
+        </p:txBody>
+      </p:sp>
+      <p:sp>
+        <p:nvSpPr>
+          <p:cNvPr id="8" name="TextBox 7"/>
+          <p:cNvSpPr txBox="1"/>
+          <p:nvPr/>
+        </p:nvSpPr>
+        <p:spPr>
+          <a:xfrm>
+            <a:off x="640080" y="3749039"/>
+            <a:ext cx="3200400" cy="1645920"/>
           </a:xfrm>
           <a:prstGeom prst="rect">
             <a:avLst/>
@@ -47610,15 +47462,450 @@
           </a:bodyPr>
           <a:lstStyle/>
           <a:p>
-            <a:pPr>
-              <a:defRPr sz="5600" b="1">
+            <a:pPr algn="ctr">
+              <a:defRPr sz="1300">
+                <a:solidFill>
+                  <a:srgbClr val="D1D5DB"/>
+                </a:solidFill>
+              </a:defRPr>
+            </a:pPr>
+            <a:r>
+              <a:t>Create a Project called</a:t>
+            </a:r>
+            <a:br/>
+            <a:r>
+              <a:t>'Executive Briefing'.</a:t>
+            </a:r>
+            <a:br/>
+            <a:r>
+              <a:t>Add custom instructions.</a:t>
+            </a:r>
+            <a:br/>
+            <a:r>
+              <a:t>Upload all provided files.</a:t>
+            </a:r>
+          </a:p>
+        </p:txBody>
+      </p:sp>
+      <p:sp>
+        <p:nvSpPr>
+          <p:cNvPr id="9" name="TextBox 8"/>
+          <p:cNvSpPr txBox="1"/>
+          <p:nvPr/>
+        </p:nvSpPr>
+        <p:spPr>
+          <a:xfrm>
+            <a:off x="640080" y="5303520"/>
+            <a:ext cx="3200400" cy="365760"/>
+          </a:xfrm>
+          <a:prstGeom prst="rect">
+            <a:avLst/>
+          </a:prstGeom>
+          <a:noFill/>
+        </p:spPr>
+        <p:txBody>
+          <a:bodyPr wrap="none">
+            <a:spAutoFit/>
+          </a:bodyPr>
+          <a:lstStyle/>
+          <a:p>
+            <a:pPr algn="ctr">
+              <a:defRPr sz="1200" i="1">
+                <a:solidFill>
+                  <a:srgbClr val="14B8A6"/>
+                </a:solidFill>
+              </a:defRPr>
+            </a:pPr>
+            <a:r>
+              <a:t>5 min</a:t>
+            </a:r>
+          </a:p>
+        </p:txBody>
+      </p:sp>
+      <p:sp>
+        <p:nvSpPr>
+          <p:cNvPr id="10" name="Rounded Rectangle 9"/>
+          <p:cNvSpPr/>
+          <p:nvPr/>
+        </p:nvSpPr>
+        <p:spPr>
+          <a:xfrm>
+            <a:off x="4206240" y="2468880"/>
+            <a:ext cx="3566160" cy="3200400"/>
+          </a:xfrm>
+          <a:prstGeom prst="roundRect">
+            <a:avLst/>
+          </a:prstGeom>
+          <a:solidFill>
+            <a:srgbClr val="24354A"/>
+          </a:solidFill>
+          <a:ln w="19050">
+            <a:solidFill>
+              <a:srgbClr val="14B8A6"/>
+            </a:solidFill>
+          </a:ln>
+        </p:spPr>
+        <p:style>
+          <a:lnRef idx="1">
+            <a:schemeClr val="accent1"/>
+          </a:lnRef>
+          <a:fillRef idx="3">
+            <a:schemeClr val="accent1"/>
+          </a:fillRef>
+          <a:effectRef idx="2">
+            <a:schemeClr val="accent1"/>
+          </a:effectRef>
+          <a:fontRef idx="minor">
+            <a:schemeClr val="lt1"/>
+          </a:fontRef>
+        </p:style>
+        <p:txBody>
+          <a:bodyPr rtlCol="0" anchor="ctr"/>
+          <a:lstStyle/>
+          <a:p>
+            <a:pPr algn="ctr"/>
+            <a:endParaRPr/>
+          </a:p>
+        </p:txBody>
+      </p:sp>
+      <p:sp>
+        <p:nvSpPr>
+          <p:cNvPr id="11" name="TextBox 10"/>
+          <p:cNvSpPr txBox="1"/>
+          <p:nvPr/>
+        </p:nvSpPr>
+        <p:spPr>
+          <a:xfrm>
+            <a:off x="4389120" y="2651760"/>
+            <a:ext cx="3200400" cy="548640"/>
+          </a:xfrm>
+          <a:prstGeom prst="rect">
+            <a:avLst/>
+          </a:prstGeom>
+          <a:noFill/>
+        </p:spPr>
+        <p:txBody>
+          <a:bodyPr wrap="none">
+            <a:spAutoFit/>
+          </a:bodyPr>
+          <a:lstStyle/>
+          <a:p>
+            <a:pPr algn="ctr">
+              <a:defRPr sz="3000"/>
+            </a:pPr>
+            <a:r>
+              <a:t>🔍</a:t>
+            </a:r>
+          </a:p>
+        </p:txBody>
+      </p:sp>
+      <p:sp>
+        <p:nvSpPr>
+          <p:cNvPr id="12" name="TextBox 11"/>
+          <p:cNvSpPr txBox="1"/>
+          <p:nvPr/>
+        </p:nvSpPr>
+        <p:spPr>
+          <a:xfrm>
+            <a:off x="4389120" y="3200400"/>
+            <a:ext cx="3200400" cy="457200"/>
+          </a:xfrm>
+          <a:prstGeom prst="rect">
+            <a:avLst/>
+          </a:prstGeom>
+          <a:noFill/>
+        </p:spPr>
+        <p:txBody>
+          <a:bodyPr wrap="none">
+            <a:spAutoFit/>
+          </a:bodyPr>
+          <a:lstStyle/>
+          <a:p>
+            <a:pPr algn="ctr">
+              <a:defRPr sz="1800" b="1">
                 <a:solidFill>
                   <a:srgbClr val="FFFFFF"/>
                 </a:solidFill>
               </a:defRPr>
             </a:pPr>
             <a:r>
-              <a:t>Wrap-up &amp; Q&amp;A</a:t>
+              <a:t>Analyze &amp; Build</a:t>
+            </a:r>
+          </a:p>
+        </p:txBody>
+      </p:sp>
+      <p:sp>
+        <p:nvSpPr>
+          <p:cNvPr id="13" name="TextBox 12"/>
+          <p:cNvSpPr txBox="1"/>
+          <p:nvPr/>
+        </p:nvSpPr>
+        <p:spPr>
+          <a:xfrm>
+            <a:off x="4389120" y="3749039"/>
+            <a:ext cx="3200400" cy="1645920"/>
+          </a:xfrm>
+          <a:prstGeom prst="rect">
+            <a:avLst/>
+          </a:prstGeom>
+          <a:noFill/>
+        </p:spPr>
+        <p:txBody>
+          <a:bodyPr wrap="square">
+            <a:spAutoFit/>
+          </a:bodyPr>
+          <a:lstStyle/>
+          <a:p>
+            <a:pPr algn="ctr">
+              <a:defRPr sz="1300">
+                <a:solidFill>
+                  <a:srgbClr val="D1D5DB"/>
+                </a:solidFill>
+              </a:defRPr>
+            </a:pPr>
+            <a:r>
+              <a:t>Use prompting skills to</a:t>
+            </a:r>
+            <a:br/>
+            <a:r>
+              <a:t>extract insights from</a:t>
+            </a:r>
+            <a:br/>
+            <a:r>
+              <a:t>multiple file types.</a:t>
+            </a:r>
+            <a:br/>
+            <a:r>
+              <a:t>Iterate until output is sharp.</a:t>
+            </a:r>
+          </a:p>
+        </p:txBody>
+      </p:sp>
+      <p:sp>
+        <p:nvSpPr>
+          <p:cNvPr id="14" name="TextBox 13"/>
+          <p:cNvSpPr txBox="1"/>
+          <p:nvPr/>
+        </p:nvSpPr>
+        <p:spPr>
+          <a:xfrm>
+            <a:off x="4389120" y="5303520"/>
+            <a:ext cx="3200400" cy="365760"/>
+          </a:xfrm>
+          <a:prstGeom prst="rect">
+            <a:avLst/>
+          </a:prstGeom>
+          <a:noFill/>
+        </p:spPr>
+        <p:txBody>
+          <a:bodyPr wrap="none">
+            <a:spAutoFit/>
+          </a:bodyPr>
+          <a:lstStyle/>
+          <a:p>
+            <a:pPr algn="ctr">
+              <a:defRPr sz="1200" i="1">
+                <a:solidFill>
+                  <a:srgbClr val="14B8A6"/>
+                </a:solidFill>
+              </a:defRPr>
+            </a:pPr>
+            <a:r>
+              <a:t>15 min</a:t>
+            </a:r>
+          </a:p>
+        </p:txBody>
+      </p:sp>
+      <p:sp>
+        <p:nvSpPr>
+          <p:cNvPr id="15" name="Rounded Rectangle 14"/>
+          <p:cNvSpPr/>
+          <p:nvPr/>
+        </p:nvSpPr>
+        <p:spPr>
+          <a:xfrm>
+            <a:off x="7955280" y="2468880"/>
+            <a:ext cx="3566160" cy="3200400"/>
+          </a:xfrm>
+          <a:prstGeom prst="roundRect">
+            <a:avLst/>
+          </a:prstGeom>
+          <a:solidFill>
+            <a:srgbClr val="24354A"/>
+          </a:solidFill>
+          <a:ln w="19050">
+            <a:solidFill>
+              <a:srgbClr val="14B8A6"/>
+            </a:solidFill>
+          </a:ln>
+        </p:spPr>
+        <p:style>
+          <a:lnRef idx="1">
+            <a:schemeClr val="accent1"/>
+          </a:lnRef>
+          <a:fillRef idx="3">
+            <a:schemeClr val="accent1"/>
+          </a:fillRef>
+          <a:effectRef idx="2">
+            <a:schemeClr val="accent1"/>
+          </a:effectRef>
+          <a:fontRef idx="minor">
+            <a:schemeClr val="lt1"/>
+          </a:fontRef>
+        </p:style>
+        <p:txBody>
+          <a:bodyPr rtlCol="0" anchor="ctr"/>
+          <a:lstStyle/>
+          <a:p>
+            <a:pPr algn="ctr"/>
+            <a:endParaRPr/>
+          </a:p>
+        </p:txBody>
+      </p:sp>
+      <p:sp>
+        <p:nvSpPr>
+          <p:cNvPr id="16" name="TextBox 15"/>
+          <p:cNvSpPr txBox="1"/>
+          <p:nvPr/>
+        </p:nvSpPr>
+        <p:spPr>
+          <a:xfrm>
+            <a:off x="8138160" y="2651760"/>
+            <a:ext cx="3200400" cy="548640"/>
+          </a:xfrm>
+          <a:prstGeom prst="rect">
+            <a:avLst/>
+          </a:prstGeom>
+          <a:noFill/>
+        </p:spPr>
+        <p:txBody>
+          <a:bodyPr wrap="none">
+            <a:spAutoFit/>
+          </a:bodyPr>
+          <a:lstStyle/>
+          <a:p>
+            <a:pPr algn="ctr">
+              <a:defRPr sz="3000"/>
+            </a:pPr>
+            <a:r>
+              <a:t>✨</a:t>
+            </a:r>
+          </a:p>
+        </p:txBody>
+      </p:sp>
+      <p:sp>
+        <p:nvSpPr>
+          <p:cNvPr id="17" name="TextBox 16"/>
+          <p:cNvSpPr txBox="1"/>
+          <p:nvPr/>
+        </p:nvSpPr>
+        <p:spPr>
+          <a:xfrm>
+            <a:off x="8138160" y="3200400"/>
+            <a:ext cx="3200400" cy="457200"/>
+          </a:xfrm>
+          <a:prstGeom prst="rect">
+            <a:avLst/>
+          </a:prstGeom>
+          <a:noFill/>
+        </p:spPr>
+        <p:txBody>
+          <a:bodyPr wrap="none">
+            <a:spAutoFit/>
+          </a:bodyPr>
+          <a:lstStyle/>
+          <a:p>
+            <a:pPr algn="ctr">
+              <a:defRPr sz="1800" b="1">
+                <a:solidFill>
+                  <a:srgbClr val="FFFFFF"/>
+                </a:solidFill>
+              </a:defRPr>
+            </a:pPr>
+            <a:r>
+              <a:t>Polish &amp; Present</a:t>
+            </a:r>
+          </a:p>
+        </p:txBody>
+      </p:sp>
+      <p:sp>
+        <p:nvSpPr>
+          <p:cNvPr id="18" name="TextBox 17"/>
+          <p:cNvSpPr txBox="1"/>
+          <p:nvPr/>
+        </p:nvSpPr>
+        <p:spPr>
+          <a:xfrm>
+            <a:off x="8138160" y="3749039"/>
+            <a:ext cx="3200400" cy="1645920"/>
+          </a:xfrm>
+          <a:prstGeom prst="rect">
+            <a:avLst/>
+          </a:prstGeom>
+          <a:noFill/>
+        </p:spPr>
+        <p:txBody>
+          <a:bodyPr wrap="square">
+            <a:spAutoFit/>
+          </a:bodyPr>
+          <a:lstStyle/>
+          <a:p>
+            <a:pPr algn="ctr">
+              <a:defRPr sz="1300">
+                <a:solidFill>
+                  <a:srgbClr val="D1D5DB"/>
+                </a:solidFill>
+              </a:defRPr>
+            </a:pPr>
+            <a:r>
+              <a:t>Create a polished</a:t>
+            </a:r>
+            <a:br/>
+            <a:r>
+              <a:t>executive briefing artifact.</a:t>
+            </a:r>
+            <a:br/>
+            <a:r>
+              <a:t>Add charts, format for</a:t>
+            </a:r>
+            <a:br/>
+            <a:r>
+              <a:t>your VP. Share with class.</a:t>
+            </a:r>
+          </a:p>
+        </p:txBody>
+      </p:sp>
+      <p:sp>
+        <p:nvSpPr>
+          <p:cNvPr id="19" name="TextBox 18"/>
+          <p:cNvSpPr txBox="1"/>
+          <p:nvPr/>
+        </p:nvSpPr>
+        <p:spPr>
+          <a:xfrm>
+            <a:off x="8138160" y="5303520"/>
+            <a:ext cx="3200400" cy="365760"/>
+          </a:xfrm>
+          <a:prstGeom prst="rect">
+            <a:avLst/>
+          </a:prstGeom>
+          <a:noFill/>
+        </p:spPr>
+        <p:txBody>
+          <a:bodyPr wrap="none">
+            <a:spAutoFit/>
+          </a:bodyPr>
+          <a:lstStyle/>
+          <a:p>
+            <a:pPr algn="ctr">
+              <a:defRPr sz="1200" i="1">
+                <a:solidFill>
+                  <a:srgbClr val="14B8A6"/>
+                </a:solidFill>
+              </a:defRPr>
+            </a:pPr>
+            <a:r>
+              <a:t>10 min</a:t>
             </a:r>
           </a:p>
         </p:txBody>
@@ -47658,49 +47945,14 @@
       </p:grpSpPr>
       <p:sp>
         <p:nvSpPr>
-          <p:cNvPr id="2" name="TextBox 1"/>
-          <p:cNvSpPr txBox="1"/>
-          <p:nvPr/>
-        </p:nvSpPr>
-        <p:spPr>
-          <a:xfrm>
-            <a:off x="457200" y="457200"/>
-            <a:ext cx="11277295" cy="731520"/>
-          </a:xfrm>
-          <a:prstGeom prst="rect">
-            <a:avLst/>
-          </a:prstGeom>
-          <a:noFill/>
-        </p:spPr>
-        <p:txBody>
-          <a:bodyPr wrap="none">
-            <a:spAutoFit/>
-          </a:bodyPr>
-          <a:lstStyle/>
-          <a:p>
-            <a:pPr algn="ctr">
-              <a:defRPr sz="3600" b="1">
-                <a:solidFill>
-                  <a:srgbClr val="FFFFFF"/>
-                </a:solidFill>
-              </a:defRPr>
-            </a:pPr>
-            <a:r>
-              <a:t>What We Covered Today</a:t>
-            </a:r>
-          </a:p>
-        </p:txBody>
-      </p:sp>
-      <p:sp>
-        <p:nvSpPr>
-          <p:cNvPr id="3" name="Rectangle 2"/>
+          <p:cNvPr id="2" name="Rectangle 1"/>
           <p:cNvSpPr/>
           <p:nvPr/>
         </p:nvSpPr>
         <p:spPr>
           <a:xfrm>
-            <a:off x="6077559" y="1371600"/>
-            <a:ext cx="36576" cy="4572000"/>
+            <a:off x="0" y="1828800"/>
+            <a:ext cx="137160" cy="3200400"/>
           </a:xfrm>
           <a:prstGeom prst="rect">
             <a:avLst/>
@@ -47737,49 +47989,14 @@
       </p:sp>
       <p:sp>
         <p:nvSpPr>
-          <p:cNvPr id="4" name="TextBox 3"/>
-          <p:cNvSpPr txBox="1"/>
-          <p:nvPr/>
-        </p:nvSpPr>
-        <p:spPr>
-          <a:xfrm>
-            <a:off x="457200" y="1463040"/>
-            <a:ext cx="5364327" cy="731520"/>
-          </a:xfrm>
-          <a:prstGeom prst="rect">
-            <a:avLst/>
-          </a:prstGeom>
-          <a:noFill/>
-        </p:spPr>
-        <p:txBody>
-          <a:bodyPr wrap="none">
-            <a:spAutoFit/>
-          </a:bodyPr>
-          <a:lstStyle/>
-          <a:p>
-            <a:pPr algn="ctr">
-              <a:defRPr sz="2800" b="1">
-                <a:solidFill>
-                  <a:srgbClr val="00D4AA"/>
-                </a:solidFill>
-              </a:defRPr>
-            </a:pPr>
-            <a:r>
-              <a:t>Morning</a:t>
-            </a:r>
-          </a:p>
-        </p:txBody>
-      </p:sp>
-      <p:sp>
-        <p:nvSpPr>
-          <p:cNvPr id="5" name="TextBox 4"/>
+          <p:cNvPr id="3" name="TextBox 2"/>
           <p:cNvSpPr txBox="1"/>
           <p:nvPr/>
         </p:nvSpPr>
         <p:spPr>
           <a:xfrm>
             <a:off x="457200" y="2286000"/>
-            <a:ext cx="5364327" cy="3657600"/>
+            <a:ext cx="11277295" cy="1371600"/>
           </a:xfrm>
           <a:prstGeom prst="rect">
             <a:avLst/>
@@ -47793,150 +48010,14 @@
           <a:lstStyle/>
           <a:p>
             <a:pPr>
-              <a:spcAft>
-                <a:spcPts val="1200"/>
-              </a:spcAft>
-              <a:defRPr sz="1800">
+              <a:defRPr sz="5600" b="1">
                 <a:solidFill>
                   <a:srgbClr val="FFFFFF"/>
                 </a:solidFill>
               </a:defRPr>
             </a:pPr>
             <a:r>
-              <a:t>  Claude model family</a:t>
-            </a:r>
-          </a:p>
-          <a:p>
-            <a:pPr>
-              <a:spcAft>
-                <a:spcPts val="1200"/>
-              </a:spcAft>
-              <a:defRPr sz="1800">
-                <a:solidFill>
-                  <a:srgbClr val="FFFFFF"/>
-                </a:solidFill>
-              </a:defRPr>
-            </a:pPr>
-            <a:r>
-              <a:t>  Claude.ai interface and Projects</a:t>
-            </a:r>
-          </a:p>
-          <a:p>
-            <a:pPr>
-              <a:spcAft>
-                <a:spcPts val="1200"/>
-              </a:spcAft>
-              <a:defRPr sz="1800">
-                <a:solidFill>
-                  <a:srgbClr val="FFFFFF"/>
-                </a:solidFill>
-              </a:defRPr>
-            </a:pPr>
-            <a:r>
-              <a:t>  Prompt engineering (GOLDEN framework)</a:t>
-            </a:r>
-          </a:p>
-        </p:txBody>
-      </p:sp>
-      <p:sp>
-        <p:nvSpPr>
-          <p:cNvPr id="6" name="TextBox 5"/>
-          <p:cNvSpPr txBox="1"/>
-          <p:nvPr/>
-        </p:nvSpPr>
-        <p:spPr>
-          <a:xfrm>
-            <a:off x="6370167" y="1463040"/>
-            <a:ext cx="5364327" cy="731520"/>
-          </a:xfrm>
-          <a:prstGeom prst="rect">
-            <a:avLst/>
-          </a:prstGeom>
-          <a:noFill/>
-        </p:spPr>
-        <p:txBody>
-          <a:bodyPr wrap="none">
-            <a:spAutoFit/>
-          </a:bodyPr>
-          <a:lstStyle/>
-          <a:p>
-            <a:pPr algn="ctr">
-              <a:defRPr sz="2800" b="1">
-                <a:solidFill>
-                  <a:srgbClr val="0078D4"/>
-                </a:solidFill>
-              </a:defRPr>
-            </a:pPr>
-            <a:r>
-              <a:t>Afternoon</a:t>
-            </a:r>
-          </a:p>
-        </p:txBody>
-      </p:sp>
-      <p:sp>
-        <p:nvSpPr>
-          <p:cNvPr id="7" name="TextBox 6"/>
-          <p:cNvSpPr txBox="1"/>
-          <p:nvPr/>
-        </p:nvSpPr>
-        <p:spPr>
-          <a:xfrm>
-            <a:off x="6370167" y="2286000"/>
-            <a:ext cx="5364327" cy="3657600"/>
-          </a:xfrm>
-          <a:prstGeom prst="rect">
-            <a:avLst/>
-          </a:prstGeom>
-          <a:noFill/>
-        </p:spPr>
-        <p:txBody>
-          <a:bodyPr wrap="square">
-            <a:spAutoFit/>
-          </a:bodyPr>
-          <a:lstStyle/>
-          <a:p>
-            <a:pPr>
-              <a:spcAft>
-                <a:spcPts val="1200"/>
-              </a:spcAft>
-              <a:defRPr sz="1800">
-                <a:solidFill>
-                  <a:srgbClr val="FFFFFF"/>
-                </a:solidFill>
-              </a:defRPr>
-            </a:pPr>
-            <a:r>
-              <a:t>  Claude in Excel</a:t>
-            </a:r>
-          </a:p>
-          <a:p>
-            <a:pPr>
-              <a:spcAft>
-                <a:spcPts val="1200"/>
-              </a:spcAft>
-              <a:defRPr sz="1800">
-                <a:solidFill>
-                  <a:srgbClr val="FFFFFF"/>
-                </a:solidFill>
-              </a:defRPr>
-            </a:pPr>
-            <a:r>
-              <a:t>  Artifacts</a:t>
-            </a:r>
-          </a:p>
-          <a:p>
-            <a:pPr>
-              <a:spcAft>
-                <a:spcPts val="1200"/>
-              </a:spcAft>
-              <a:defRPr sz="1800">
-                <a:solidFill>
-                  <a:srgbClr val="FFFFFF"/>
-                </a:solidFill>
-              </a:defRPr>
-            </a:pPr>
-            <a:r>
-              <a:t>  File handling</a:t>
+              <a:t>Wrap-up &amp; Q&amp;A</a:t>
             </a:r>
           </a:p>
         </p:txBody>
@@ -47976,14 +48057,49 @@
       </p:grpSpPr>
       <p:sp>
         <p:nvSpPr>
-          <p:cNvPr id="2" name="Rectangle 1"/>
+          <p:cNvPr id="2" name="TextBox 1"/>
+          <p:cNvSpPr txBox="1"/>
+          <p:nvPr/>
+        </p:nvSpPr>
+        <p:spPr>
+          <a:xfrm>
+            <a:off x="457200" y="457200"/>
+            <a:ext cx="11277295" cy="731520"/>
+          </a:xfrm>
+          <a:prstGeom prst="rect">
+            <a:avLst/>
+          </a:prstGeom>
+          <a:noFill/>
+        </p:spPr>
+        <p:txBody>
+          <a:bodyPr wrap="none">
+            <a:spAutoFit/>
+          </a:bodyPr>
+          <a:lstStyle/>
+          <a:p>
+            <a:pPr algn="ctr">
+              <a:defRPr sz="3600" b="1">
+                <a:solidFill>
+                  <a:srgbClr val="FFFFFF"/>
+                </a:solidFill>
+              </a:defRPr>
+            </a:pPr>
+            <a:r>
+              <a:t>What We Covered Today</a:t>
+            </a:r>
+          </a:p>
+        </p:txBody>
+      </p:sp>
+      <p:sp>
+        <p:nvSpPr>
+          <p:cNvPr id="3" name="Rectangle 2"/>
           <p:cNvSpPr/>
           <p:nvPr/>
         </p:nvSpPr>
         <p:spPr>
           <a:xfrm>
-            <a:off x="0" y="1188720"/>
-            <a:ext cx="91440" cy="5029200"/>
+            <a:off x="6077559" y="1371600"/>
+            <a:ext cx="36576" cy="4572000"/>
           </a:xfrm>
           <a:prstGeom prst="rect">
             <a:avLst/>
@@ -48020,14 +48136,14 @@
       </p:sp>
       <p:sp>
         <p:nvSpPr>
-          <p:cNvPr id="3" name="TextBox 2"/>
-          <p:cNvSpPr txBox="1"/>
-          <p:nvPr/>
-        </p:nvSpPr>
-        <p:spPr>
-          <a:xfrm>
-            <a:off x="457200" y="365760"/>
-            <a:ext cx="11277295" cy="822960"/>
+          <p:cNvPr id="4" name="TextBox 3"/>
+          <p:cNvSpPr txBox="1"/>
+          <p:nvPr/>
+        </p:nvSpPr>
+        <p:spPr>
+          <a:xfrm>
+            <a:off x="457200" y="1463040"/>
+            <a:ext cx="5364327" cy="731520"/>
           </a:xfrm>
           <a:prstGeom prst="rect">
             <a:avLst/>
@@ -48040,60 +48156,16 @@
           </a:bodyPr>
           <a:lstStyle/>
           <a:p>
-            <a:pPr>
-              <a:defRPr sz="4000" b="1">
-                <a:solidFill>
-                  <a:srgbClr val="FFFFFF"/>
-                </a:solidFill>
-              </a:defRPr>
-            </a:pPr>
-            <a:r>
-              <a:t>Key Takeaways</a:t>
-            </a:r>
-          </a:p>
-        </p:txBody>
-      </p:sp>
-      <p:sp>
-        <p:nvSpPr>
-          <p:cNvPr id="4" name="Oval 3"/>
-          <p:cNvSpPr/>
-          <p:nvPr/>
-        </p:nvSpPr>
-        <p:spPr>
-          <a:xfrm>
-            <a:off x="457200" y="1371600"/>
-            <a:ext cx="411480" cy="411480"/>
-          </a:xfrm>
-          <a:prstGeom prst="ellipse">
-            <a:avLst/>
-          </a:prstGeom>
-          <a:solidFill>
-            <a:srgbClr val="00D4AA"/>
-          </a:solidFill>
-          <a:ln>
-            <a:noFill/>
-          </a:ln>
-        </p:spPr>
-        <p:style>
-          <a:lnRef idx="1">
-            <a:schemeClr val="accent1"/>
-          </a:lnRef>
-          <a:fillRef idx="3">
-            <a:schemeClr val="accent1"/>
-          </a:fillRef>
-          <a:effectRef idx="2">
-            <a:schemeClr val="accent1"/>
-          </a:effectRef>
-          <a:fontRef idx="minor">
-            <a:schemeClr val="lt1"/>
-          </a:fontRef>
-        </p:style>
-        <p:txBody>
-          <a:bodyPr rtlCol="0" anchor="ctr"/>
-          <a:lstStyle/>
-          <a:p>
-            <a:pPr algn="ctr"/>
-            <a:endParaRPr/>
+            <a:pPr algn="ctr">
+              <a:defRPr sz="2800" b="1">
+                <a:solidFill>
+                  <a:srgbClr val="00D4AA"/>
+                </a:solidFill>
+              </a:defRPr>
+            </a:pPr>
+            <a:r>
+              <a:t>Morning</a:t>
+            </a:r>
           </a:p>
         </p:txBody>
       </p:sp>
@@ -48105,43 +48177,8 @@
         </p:nvSpPr>
         <p:spPr>
           <a:xfrm>
-            <a:off x="457200" y="1371600"/>
-            <a:ext cx="411480" cy="411480"/>
-          </a:xfrm>
-          <a:prstGeom prst="rect">
-            <a:avLst/>
-          </a:prstGeom>
-          <a:noFill/>
-        </p:spPr>
-        <p:txBody>
-          <a:bodyPr wrap="none" anchor="ctr">
-            <a:spAutoFit/>
-          </a:bodyPr>
-          <a:lstStyle/>
-          <a:p>
-            <a:pPr algn="ctr">
-              <a:defRPr sz="2000" b="1">
-                <a:solidFill>
-                  <a:srgbClr val="0B0F1A"/>
-                </a:solidFill>
-              </a:defRPr>
-            </a:pPr>
-            <a:r>
-              <a:t>v</a:t>
-            </a:r>
-          </a:p>
-        </p:txBody>
-      </p:sp>
-      <p:sp>
-        <p:nvSpPr>
-          <p:cNvPr id="6" name="TextBox 5"/>
-          <p:cNvSpPr txBox="1"/>
-          <p:nvPr/>
-        </p:nvSpPr>
-        <p:spPr>
-          <a:xfrm>
-            <a:off x="1005840" y="1417320"/>
-            <a:ext cx="10728655" cy="731520"/>
+            <a:off x="457200" y="2286000"/>
+            <a:ext cx="5364327" cy="3657600"/>
           </a:xfrm>
           <a:prstGeom prst="rect">
             <a:avLst/>
@@ -48155,107 +48192,96 @@
           <a:lstStyle/>
           <a:p>
             <a:pPr>
-              <a:defRPr sz="2200">
+              <a:spcAft>
+                <a:spcPts val="1200"/>
+              </a:spcAft>
+              <a:defRPr sz="1800">
                 <a:solidFill>
                   <a:srgbClr val="FFFFFF"/>
                 </a:solidFill>
               </a:defRPr>
             </a:pPr>
             <a:r>
-              <a:t>Be specific in prompts - GOLDEN framework helps</a:t>
-            </a:r>
-          </a:p>
-        </p:txBody>
-      </p:sp>
-      <p:sp>
-        <p:nvSpPr>
-          <p:cNvPr id="7" name="Oval 6"/>
-          <p:cNvSpPr/>
-          <p:nvPr/>
-        </p:nvSpPr>
-        <p:spPr>
-          <a:xfrm>
-            <a:off x="457200" y="2194560"/>
-            <a:ext cx="411480" cy="411480"/>
-          </a:xfrm>
-          <a:prstGeom prst="ellipse">
-            <a:avLst/>
-          </a:prstGeom>
-          <a:solidFill>
-            <a:srgbClr val="00D4AA"/>
-          </a:solidFill>
-          <a:ln>
-            <a:noFill/>
-          </a:ln>
-        </p:spPr>
-        <p:style>
-          <a:lnRef idx="1">
-            <a:schemeClr val="accent1"/>
-          </a:lnRef>
-          <a:fillRef idx="3">
-            <a:schemeClr val="accent1"/>
-          </a:fillRef>
-          <a:effectRef idx="2">
-            <a:schemeClr val="accent1"/>
-          </a:effectRef>
-          <a:fontRef idx="minor">
-            <a:schemeClr val="lt1"/>
-          </a:fontRef>
-        </p:style>
-        <p:txBody>
-          <a:bodyPr rtlCol="0" anchor="ctr"/>
-          <a:lstStyle/>
-          <a:p>
-            <a:pPr algn="ctr"/>
-            <a:endParaRPr/>
-          </a:p>
-        </p:txBody>
-      </p:sp>
-      <p:sp>
-        <p:nvSpPr>
-          <p:cNvPr id="8" name="TextBox 7"/>
-          <p:cNvSpPr txBox="1"/>
-          <p:nvPr/>
-        </p:nvSpPr>
-        <p:spPr>
-          <a:xfrm>
-            <a:off x="457200" y="2194560"/>
-            <a:ext cx="411480" cy="411480"/>
-          </a:xfrm>
-          <a:prstGeom prst="rect">
-            <a:avLst/>
-          </a:prstGeom>
-          <a:noFill/>
-        </p:spPr>
-        <p:txBody>
-          <a:bodyPr wrap="none" anchor="ctr">
+              <a:t>  Claude model family</a:t>
+            </a:r>
+          </a:p>
+          <a:p>
+            <a:pPr>
+              <a:spcAft>
+                <a:spcPts val="1200"/>
+              </a:spcAft>
+              <a:defRPr sz="1800">
+                <a:solidFill>
+                  <a:srgbClr val="FFFFFF"/>
+                </a:solidFill>
+              </a:defRPr>
+            </a:pPr>
+            <a:r>
+              <a:t>  Claude.ai interface and Projects</a:t>
+            </a:r>
+          </a:p>
+          <a:p>
+            <a:pPr>
+              <a:spcAft>
+                <a:spcPts val="1200"/>
+              </a:spcAft>
+              <a:defRPr sz="1800">
+                <a:solidFill>
+                  <a:srgbClr val="FFFFFF"/>
+                </a:solidFill>
+              </a:defRPr>
+            </a:pPr>
+            <a:r>
+              <a:t>  Prompt engineering (GOLDEN framework)</a:t>
+            </a:r>
+          </a:p>
+        </p:txBody>
+      </p:sp>
+      <p:sp>
+        <p:nvSpPr>
+          <p:cNvPr id="6" name="TextBox 5"/>
+          <p:cNvSpPr txBox="1"/>
+          <p:nvPr/>
+        </p:nvSpPr>
+        <p:spPr>
+          <a:xfrm>
+            <a:off x="6370167" y="1463040"/>
+            <a:ext cx="5364327" cy="731520"/>
+          </a:xfrm>
+          <a:prstGeom prst="rect">
+            <a:avLst/>
+          </a:prstGeom>
+          <a:noFill/>
+        </p:spPr>
+        <p:txBody>
+          <a:bodyPr wrap="none">
             <a:spAutoFit/>
           </a:bodyPr>
           <a:lstStyle/>
           <a:p>
             <a:pPr algn="ctr">
-              <a:defRPr sz="2000" b="1">
-                <a:solidFill>
-                  <a:srgbClr val="0B0F1A"/>
-                </a:solidFill>
-              </a:defRPr>
-            </a:pPr>
-            <a:r>
-              <a:t>v</a:t>
-            </a:r>
-          </a:p>
-        </p:txBody>
-      </p:sp>
-      <p:sp>
-        <p:nvSpPr>
-          <p:cNvPr id="9" name="TextBox 8"/>
-          <p:cNvSpPr txBox="1"/>
-          <p:nvPr/>
-        </p:nvSpPr>
-        <p:spPr>
-          <a:xfrm>
-            <a:off x="1005840" y="2240280"/>
-            <a:ext cx="10728655" cy="731520"/>
+              <a:defRPr sz="2800" b="1">
+                <a:solidFill>
+                  <a:srgbClr val="0078D4"/>
+                </a:solidFill>
+              </a:defRPr>
+            </a:pPr>
+            <a:r>
+              <a:t>Afternoon</a:t>
+            </a:r>
+          </a:p>
+        </p:txBody>
+      </p:sp>
+      <p:sp>
+        <p:nvSpPr>
+          <p:cNvPr id="7" name="TextBox 6"/>
+          <p:cNvSpPr txBox="1"/>
+          <p:nvPr/>
+        </p:nvSpPr>
+        <p:spPr>
+          <a:xfrm>
+            <a:off x="6370167" y="2286000"/>
+            <a:ext cx="5364327" cy="3657600"/>
           </a:xfrm>
           <a:prstGeom prst="rect">
             <a:avLst/>
@@ -48269,356 +48295,47 @@
           <a:lstStyle/>
           <a:p>
             <a:pPr>
-              <a:defRPr sz="2200">
+              <a:spcAft>
+                <a:spcPts val="1200"/>
+              </a:spcAft>
+              <a:defRPr sz="1800">
                 <a:solidFill>
                   <a:srgbClr val="FFFFFF"/>
                 </a:solidFill>
               </a:defRPr>
             </a:pPr>
             <a:r>
-              <a:t>Use Projects for recurring work</a:t>
-            </a:r>
-          </a:p>
-        </p:txBody>
-      </p:sp>
-      <p:sp>
-        <p:nvSpPr>
-          <p:cNvPr id="10" name="Oval 9"/>
-          <p:cNvSpPr/>
-          <p:nvPr/>
-        </p:nvSpPr>
-        <p:spPr>
-          <a:xfrm>
-            <a:off x="457200" y="3017520"/>
-            <a:ext cx="411480" cy="411480"/>
-          </a:xfrm>
-          <a:prstGeom prst="ellipse">
-            <a:avLst/>
-          </a:prstGeom>
-          <a:solidFill>
-            <a:srgbClr val="00D4AA"/>
-          </a:solidFill>
-          <a:ln>
-            <a:noFill/>
-          </a:ln>
-        </p:spPr>
-        <p:style>
-          <a:lnRef idx="1">
-            <a:schemeClr val="accent1"/>
-          </a:lnRef>
-          <a:fillRef idx="3">
-            <a:schemeClr val="accent1"/>
-          </a:fillRef>
-          <a:effectRef idx="2">
-            <a:schemeClr val="accent1"/>
-          </a:effectRef>
-          <a:fontRef idx="minor">
-            <a:schemeClr val="lt1"/>
-          </a:fontRef>
-        </p:style>
-        <p:txBody>
-          <a:bodyPr rtlCol="0" anchor="ctr"/>
-          <a:lstStyle/>
-          <a:p>
-            <a:pPr algn="ctr"/>
-            <a:endParaRPr/>
-          </a:p>
-        </p:txBody>
-      </p:sp>
-      <p:sp>
-        <p:nvSpPr>
-          <p:cNvPr id="11" name="TextBox 10"/>
-          <p:cNvSpPr txBox="1"/>
-          <p:nvPr/>
-        </p:nvSpPr>
-        <p:spPr>
-          <a:xfrm>
-            <a:off x="457200" y="3017520"/>
-            <a:ext cx="411480" cy="411480"/>
-          </a:xfrm>
-          <a:prstGeom prst="rect">
-            <a:avLst/>
-          </a:prstGeom>
-          <a:noFill/>
-        </p:spPr>
-        <p:txBody>
-          <a:bodyPr wrap="none" anchor="ctr">
-            <a:spAutoFit/>
-          </a:bodyPr>
-          <a:lstStyle/>
-          <a:p>
-            <a:pPr algn="ctr">
-              <a:defRPr sz="2000" b="1">
-                <a:solidFill>
-                  <a:srgbClr val="0B0F1A"/>
-                </a:solidFill>
-              </a:defRPr>
-            </a:pPr>
-            <a:r>
-              <a:t>v</a:t>
-            </a:r>
-          </a:p>
-        </p:txBody>
-      </p:sp>
-      <p:sp>
-        <p:nvSpPr>
-          <p:cNvPr id="12" name="TextBox 11"/>
-          <p:cNvSpPr txBox="1"/>
-          <p:nvPr/>
-        </p:nvSpPr>
-        <p:spPr>
-          <a:xfrm>
-            <a:off x="1005840" y="3063240"/>
-            <a:ext cx="10728655" cy="731520"/>
-          </a:xfrm>
-          <a:prstGeom prst="rect">
-            <a:avLst/>
-          </a:prstGeom>
-          <a:noFill/>
-        </p:spPr>
-        <p:txBody>
-          <a:bodyPr wrap="square">
-            <a:spAutoFit/>
-          </a:bodyPr>
-          <a:lstStyle/>
+              <a:t>  Claude in Excel</a:t>
+            </a:r>
+          </a:p>
           <a:p>
             <a:pPr>
-              <a:defRPr sz="2200">
+              <a:spcAft>
+                <a:spcPts val="1200"/>
+              </a:spcAft>
+              <a:defRPr sz="1800">
                 <a:solidFill>
                   <a:srgbClr val="FFFFFF"/>
                 </a:solidFill>
               </a:defRPr>
             </a:pPr>
             <a:r>
-              <a:t>Iterate, don't start over</a:t>
-            </a:r>
-          </a:p>
-        </p:txBody>
-      </p:sp>
-      <p:sp>
-        <p:nvSpPr>
-          <p:cNvPr id="13" name="Oval 12"/>
-          <p:cNvSpPr/>
-          <p:nvPr/>
-        </p:nvSpPr>
-        <p:spPr>
-          <a:xfrm>
-            <a:off x="457200" y="3840480"/>
-            <a:ext cx="411480" cy="411480"/>
-          </a:xfrm>
-          <a:prstGeom prst="ellipse">
-            <a:avLst/>
-          </a:prstGeom>
-          <a:solidFill>
-            <a:srgbClr val="00D4AA"/>
-          </a:solidFill>
-          <a:ln>
-            <a:noFill/>
-          </a:ln>
-        </p:spPr>
-        <p:style>
-          <a:lnRef idx="1">
-            <a:schemeClr val="accent1"/>
-          </a:lnRef>
-          <a:fillRef idx="3">
-            <a:schemeClr val="accent1"/>
-          </a:fillRef>
-          <a:effectRef idx="2">
-            <a:schemeClr val="accent1"/>
-          </a:effectRef>
-          <a:fontRef idx="minor">
-            <a:schemeClr val="lt1"/>
-          </a:fontRef>
-        </p:style>
-        <p:txBody>
-          <a:bodyPr rtlCol="0" anchor="ctr"/>
-          <a:lstStyle/>
-          <a:p>
-            <a:pPr algn="ctr"/>
-            <a:endParaRPr/>
-          </a:p>
-        </p:txBody>
-      </p:sp>
-      <p:sp>
-        <p:nvSpPr>
-          <p:cNvPr id="14" name="TextBox 13"/>
-          <p:cNvSpPr txBox="1"/>
-          <p:nvPr/>
-        </p:nvSpPr>
-        <p:spPr>
-          <a:xfrm>
-            <a:off x="457200" y="3840480"/>
-            <a:ext cx="411480" cy="411480"/>
-          </a:xfrm>
-          <a:prstGeom prst="rect">
-            <a:avLst/>
-          </a:prstGeom>
-          <a:noFill/>
-        </p:spPr>
-        <p:txBody>
-          <a:bodyPr wrap="none" anchor="ctr">
-            <a:spAutoFit/>
-          </a:bodyPr>
-          <a:lstStyle/>
-          <a:p>
-            <a:pPr algn="ctr">
-              <a:defRPr sz="2000" b="1">
-                <a:solidFill>
-                  <a:srgbClr val="0B0F1A"/>
-                </a:solidFill>
-              </a:defRPr>
-            </a:pPr>
-            <a:r>
-              <a:t>v</a:t>
-            </a:r>
-          </a:p>
-        </p:txBody>
-      </p:sp>
-      <p:sp>
-        <p:nvSpPr>
-          <p:cNvPr id="15" name="TextBox 14"/>
-          <p:cNvSpPr txBox="1"/>
-          <p:nvPr/>
-        </p:nvSpPr>
-        <p:spPr>
-          <a:xfrm>
-            <a:off x="1005840" y="3886200"/>
-            <a:ext cx="10728655" cy="731520"/>
-          </a:xfrm>
-          <a:prstGeom prst="rect">
-            <a:avLst/>
-          </a:prstGeom>
-          <a:noFill/>
-        </p:spPr>
-        <p:txBody>
-          <a:bodyPr wrap="square">
-            <a:spAutoFit/>
-          </a:bodyPr>
-          <a:lstStyle/>
+              <a:t>  Artifacts</a:t>
+            </a:r>
+          </a:p>
           <a:p>
             <a:pPr>
-              <a:defRPr sz="2200">
+              <a:spcAft>
+                <a:spcPts val="1200"/>
+              </a:spcAft>
+              <a:defRPr sz="1800">
                 <a:solidFill>
                   <a:srgbClr val="FFFFFF"/>
                 </a:solidFill>
               </a:defRPr>
             </a:pPr>
             <a:r>
-              <a:t>Claude in Excel = in-context help</a:t>
-            </a:r>
-          </a:p>
-        </p:txBody>
-      </p:sp>
-      <p:sp>
-        <p:nvSpPr>
-          <p:cNvPr id="16" name="Oval 15"/>
-          <p:cNvSpPr/>
-          <p:nvPr/>
-        </p:nvSpPr>
-        <p:spPr>
-          <a:xfrm>
-            <a:off x="457200" y="4663440"/>
-            <a:ext cx="411480" cy="411480"/>
-          </a:xfrm>
-          <a:prstGeom prst="ellipse">
-            <a:avLst/>
-          </a:prstGeom>
-          <a:solidFill>
-            <a:srgbClr val="00D4AA"/>
-          </a:solidFill>
-          <a:ln>
-            <a:noFill/>
-          </a:ln>
-        </p:spPr>
-        <p:style>
-          <a:lnRef idx="1">
-            <a:schemeClr val="accent1"/>
-          </a:lnRef>
-          <a:fillRef idx="3">
-            <a:schemeClr val="accent1"/>
-          </a:fillRef>
-          <a:effectRef idx="2">
-            <a:schemeClr val="accent1"/>
-          </a:effectRef>
-          <a:fontRef idx="minor">
-            <a:schemeClr val="lt1"/>
-          </a:fontRef>
-        </p:style>
-        <p:txBody>
-          <a:bodyPr rtlCol="0" anchor="ctr"/>
-          <a:lstStyle/>
-          <a:p>
-            <a:pPr algn="ctr"/>
-            <a:endParaRPr/>
-          </a:p>
-        </p:txBody>
-      </p:sp>
-      <p:sp>
-        <p:nvSpPr>
-          <p:cNvPr id="17" name="TextBox 16"/>
-          <p:cNvSpPr txBox="1"/>
-          <p:nvPr/>
-        </p:nvSpPr>
-        <p:spPr>
-          <a:xfrm>
-            <a:off x="457200" y="4663440"/>
-            <a:ext cx="411480" cy="411480"/>
-          </a:xfrm>
-          <a:prstGeom prst="rect">
-            <a:avLst/>
-          </a:prstGeom>
-          <a:noFill/>
-        </p:spPr>
-        <p:txBody>
-          <a:bodyPr wrap="none" anchor="ctr">
-            <a:spAutoFit/>
-          </a:bodyPr>
-          <a:lstStyle/>
-          <a:p>
-            <a:pPr algn="ctr">
-              <a:defRPr sz="2000" b="1">
-                <a:solidFill>
-                  <a:srgbClr val="0B0F1A"/>
-                </a:solidFill>
-              </a:defRPr>
-            </a:pPr>
-            <a:r>
-              <a:t>v</a:t>
-            </a:r>
-          </a:p>
-        </p:txBody>
-      </p:sp>
-      <p:sp>
-        <p:nvSpPr>
-          <p:cNvPr id="18" name="TextBox 17"/>
-          <p:cNvSpPr txBox="1"/>
-          <p:nvPr/>
-        </p:nvSpPr>
-        <p:spPr>
-          <a:xfrm>
-            <a:off x="1005840" y="4709160"/>
-            <a:ext cx="10728655" cy="731520"/>
-          </a:xfrm>
-          <a:prstGeom prst="rect">
-            <a:avLst/>
-          </a:prstGeom>
-          <a:noFill/>
-        </p:spPr>
-        <p:txBody>
-          <a:bodyPr wrap="square">
-            <a:spAutoFit/>
-          </a:bodyPr>
-          <a:lstStyle/>
-          <a:p>
-            <a:pPr>
-              <a:defRPr sz="2200">
-                <a:solidFill>
-                  <a:srgbClr val="FFFFFF"/>
-                </a:solidFill>
-              </a:defRPr>
-            </a:pPr>
-            <a:r>
-              <a:t>Verify AI outputs - Claude helps, you validate</a:t>
+              <a:t>  File handling</a:t>
             </a:r>
           </a:p>
         </p:txBody>
@@ -48658,49 +48375,14 @@
       </p:grpSpPr>
       <p:sp>
         <p:nvSpPr>
-          <p:cNvPr id="2" name="TextBox 1"/>
-          <p:cNvSpPr txBox="1"/>
-          <p:nvPr/>
-        </p:nvSpPr>
-        <p:spPr>
-          <a:xfrm>
-            <a:off x="457200" y="365760"/>
-            <a:ext cx="11277295" cy="822960"/>
-          </a:xfrm>
-          <a:prstGeom prst="rect">
-            <a:avLst/>
-          </a:prstGeom>
-          <a:noFill/>
-        </p:spPr>
-        <p:txBody>
-          <a:bodyPr wrap="none">
-            <a:spAutoFit/>
-          </a:bodyPr>
-          <a:lstStyle/>
-          <a:p>
-            <a:pPr>
-              <a:defRPr sz="4000" b="1">
-                <a:solidFill>
-                  <a:srgbClr val="FFFFFF"/>
-                </a:solidFill>
-              </a:defRPr>
-            </a:pPr>
-            <a:r>
-              <a:t>Resources</a:t>
-            </a:r>
-          </a:p>
-        </p:txBody>
-      </p:sp>
-      <p:sp>
-        <p:nvSpPr>
-          <p:cNvPr id="3" name="Rectangle 2"/>
+          <p:cNvPr id="2" name="Rectangle 1"/>
           <p:cNvSpPr/>
           <p:nvPr/>
         </p:nvSpPr>
         <p:spPr>
           <a:xfrm>
-            <a:off x="457200" y="1234440"/>
-            <a:ext cx="1828800" cy="36576"/>
+            <a:off x="0" y="1188720"/>
+            <a:ext cx="91440" cy="5029200"/>
           </a:xfrm>
           <a:prstGeom prst="rect">
             <a:avLst/>
@@ -48737,14 +48419,128 @@
       </p:sp>
       <p:sp>
         <p:nvSpPr>
-          <p:cNvPr id="4" name="TextBox 3"/>
-          <p:cNvSpPr txBox="1"/>
-          <p:nvPr/>
-        </p:nvSpPr>
-        <p:spPr>
-          <a:xfrm>
-            <a:off x="457200" y="1463040"/>
-            <a:ext cx="11277295" cy="4572000"/>
+          <p:cNvPr id="3" name="TextBox 2"/>
+          <p:cNvSpPr txBox="1"/>
+          <p:nvPr/>
+        </p:nvSpPr>
+        <p:spPr>
+          <a:xfrm>
+            <a:off x="457200" y="365760"/>
+            <a:ext cx="11277295" cy="822960"/>
+          </a:xfrm>
+          <a:prstGeom prst="rect">
+            <a:avLst/>
+          </a:prstGeom>
+          <a:noFill/>
+        </p:spPr>
+        <p:txBody>
+          <a:bodyPr wrap="none">
+            <a:spAutoFit/>
+          </a:bodyPr>
+          <a:lstStyle/>
+          <a:p>
+            <a:pPr>
+              <a:defRPr sz="4000" b="1">
+                <a:solidFill>
+                  <a:srgbClr val="FFFFFF"/>
+                </a:solidFill>
+              </a:defRPr>
+            </a:pPr>
+            <a:r>
+              <a:t>Key Takeaways</a:t>
+            </a:r>
+          </a:p>
+        </p:txBody>
+      </p:sp>
+      <p:sp>
+        <p:nvSpPr>
+          <p:cNvPr id="4" name="Oval 3"/>
+          <p:cNvSpPr/>
+          <p:nvPr/>
+        </p:nvSpPr>
+        <p:spPr>
+          <a:xfrm>
+            <a:off x="457200" y="1371600"/>
+            <a:ext cx="411480" cy="411480"/>
+          </a:xfrm>
+          <a:prstGeom prst="ellipse">
+            <a:avLst/>
+          </a:prstGeom>
+          <a:solidFill>
+            <a:srgbClr val="00D4AA"/>
+          </a:solidFill>
+          <a:ln>
+            <a:noFill/>
+          </a:ln>
+        </p:spPr>
+        <p:style>
+          <a:lnRef idx="1">
+            <a:schemeClr val="accent1"/>
+          </a:lnRef>
+          <a:fillRef idx="3">
+            <a:schemeClr val="accent1"/>
+          </a:fillRef>
+          <a:effectRef idx="2">
+            <a:schemeClr val="accent1"/>
+          </a:effectRef>
+          <a:fontRef idx="minor">
+            <a:schemeClr val="lt1"/>
+          </a:fontRef>
+        </p:style>
+        <p:txBody>
+          <a:bodyPr rtlCol="0" anchor="ctr"/>
+          <a:lstStyle/>
+          <a:p>
+            <a:pPr algn="ctr"/>
+            <a:endParaRPr/>
+          </a:p>
+        </p:txBody>
+      </p:sp>
+      <p:sp>
+        <p:nvSpPr>
+          <p:cNvPr id="5" name="TextBox 4"/>
+          <p:cNvSpPr txBox="1"/>
+          <p:nvPr/>
+        </p:nvSpPr>
+        <p:spPr>
+          <a:xfrm>
+            <a:off x="457200" y="1371600"/>
+            <a:ext cx="411480" cy="411480"/>
+          </a:xfrm>
+          <a:prstGeom prst="rect">
+            <a:avLst/>
+          </a:prstGeom>
+          <a:noFill/>
+        </p:spPr>
+        <p:txBody>
+          <a:bodyPr wrap="none" anchor="ctr">
+            <a:spAutoFit/>
+          </a:bodyPr>
+          <a:lstStyle/>
+          <a:p>
+            <a:pPr algn="ctr">
+              <a:defRPr sz="2000" b="1">
+                <a:solidFill>
+                  <a:srgbClr val="0B0F1A"/>
+                </a:solidFill>
+              </a:defRPr>
+            </a:pPr>
+            <a:r>
+              <a:t>v</a:t>
+            </a:r>
+          </a:p>
+        </p:txBody>
+      </p:sp>
+      <p:sp>
+        <p:nvSpPr>
+          <p:cNvPr id="6" name="TextBox 5"/>
+          <p:cNvSpPr txBox="1"/>
+          <p:nvPr/>
+        </p:nvSpPr>
+        <p:spPr>
+          <a:xfrm>
+            <a:off x="1005840" y="1417320"/>
+            <a:ext cx="10728655" cy="731520"/>
           </a:xfrm>
           <a:prstGeom prst="rect">
             <a:avLst/>
@@ -48758,12 +48554,6 @@
           <a:lstStyle/>
           <a:p>
             <a:pPr>
-              <a:spcBef>
-                <a:spcPts val="800"/>
-              </a:spcBef>
-              <a:spcAft>
-                <a:spcPts val="800"/>
-              </a:spcAft>
               <a:defRPr sz="2200">
                 <a:solidFill>
                   <a:srgbClr val="FFFFFF"/>
@@ -48771,17 +48561,113 @@
               </a:defRPr>
             </a:pPr>
             <a:r>
-              <a:t>  Official Docs: docs.claude.com</a:t>
-            </a:r>
-          </a:p>
+              <a:t>Be specific in prompts - GOLDEN framework helps</a:t>
+            </a:r>
+          </a:p>
+        </p:txBody>
+      </p:sp>
+      <p:sp>
+        <p:nvSpPr>
+          <p:cNvPr id="7" name="Oval 6"/>
+          <p:cNvSpPr/>
+          <p:nvPr/>
+        </p:nvSpPr>
+        <p:spPr>
+          <a:xfrm>
+            <a:off x="457200" y="2194560"/>
+            <a:ext cx="411480" cy="411480"/>
+          </a:xfrm>
+          <a:prstGeom prst="ellipse">
+            <a:avLst/>
+          </a:prstGeom>
+          <a:solidFill>
+            <a:srgbClr val="00D4AA"/>
+          </a:solidFill>
+          <a:ln>
+            <a:noFill/>
+          </a:ln>
+        </p:spPr>
+        <p:style>
+          <a:lnRef idx="1">
+            <a:schemeClr val="accent1"/>
+          </a:lnRef>
+          <a:fillRef idx="3">
+            <a:schemeClr val="accent1"/>
+          </a:fillRef>
+          <a:effectRef idx="2">
+            <a:schemeClr val="accent1"/>
+          </a:effectRef>
+          <a:fontRef idx="minor">
+            <a:schemeClr val="lt1"/>
+          </a:fontRef>
+        </p:style>
+        <p:txBody>
+          <a:bodyPr rtlCol="0" anchor="ctr"/>
+          <a:lstStyle/>
+          <a:p>
+            <a:pPr algn="ctr"/>
+            <a:endParaRPr/>
+          </a:p>
+        </p:txBody>
+      </p:sp>
+      <p:sp>
+        <p:nvSpPr>
+          <p:cNvPr id="8" name="TextBox 7"/>
+          <p:cNvSpPr txBox="1"/>
+          <p:nvPr/>
+        </p:nvSpPr>
+        <p:spPr>
+          <a:xfrm>
+            <a:off x="457200" y="2194560"/>
+            <a:ext cx="411480" cy="411480"/>
+          </a:xfrm>
+          <a:prstGeom prst="rect">
+            <a:avLst/>
+          </a:prstGeom>
+          <a:noFill/>
+        </p:spPr>
+        <p:txBody>
+          <a:bodyPr wrap="none" anchor="ctr">
+            <a:spAutoFit/>
+          </a:bodyPr>
+          <a:lstStyle/>
+          <a:p>
+            <a:pPr algn="ctr">
+              <a:defRPr sz="2000" b="1">
+                <a:solidFill>
+                  <a:srgbClr val="0B0F1A"/>
+                </a:solidFill>
+              </a:defRPr>
+            </a:pPr>
+            <a:r>
+              <a:t>v</a:t>
+            </a:r>
+          </a:p>
+        </p:txBody>
+      </p:sp>
+      <p:sp>
+        <p:nvSpPr>
+          <p:cNvPr id="9" name="TextBox 8"/>
+          <p:cNvSpPr txBox="1"/>
+          <p:nvPr/>
+        </p:nvSpPr>
+        <p:spPr>
+          <a:xfrm>
+            <a:off x="1005840" y="2240280"/>
+            <a:ext cx="10728655" cy="731520"/>
+          </a:xfrm>
+          <a:prstGeom prst="rect">
+            <a:avLst/>
+          </a:prstGeom>
+          <a:noFill/>
+        </p:spPr>
+        <p:txBody>
+          <a:bodyPr wrap="square">
+            <a:spAutoFit/>
+          </a:bodyPr>
+          <a:lstStyle/>
           <a:p>
             <a:pPr>
-              <a:spcBef>
-                <a:spcPts val="800"/>
-              </a:spcBef>
-              <a:spcAft>
-                <a:spcPts val="800"/>
-              </a:spcAft>
               <a:defRPr sz="2200">
                 <a:solidFill>
                   <a:srgbClr val="FFFFFF"/>
@@ -48789,17 +48675,113 @@
               </a:defRPr>
             </a:pPr>
             <a:r>
-              <a:t>  Support: support.claude.com</a:t>
-            </a:r>
-          </a:p>
+              <a:t>Use Projects for recurring work</a:t>
+            </a:r>
+          </a:p>
+        </p:txBody>
+      </p:sp>
+      <p:sp>
+        <p:nvSpPr>
+          <p:cNvPr id="10" name="Oval 9"/>
+          <p:cNvSpPr/>
+          <p:nvPr/>
+        </p:nvSpPr>
+        <p:spPr>
+          <a:xfrm>
+            <a:off x="457200" y="3017520"/>
+            <a:ext cx="411480" cy="411480"/>
+          </a:xfrm>
+          <a:prstGeom prst="ellipse">
+            <a:avLst/>
+          </a:prstGeom>
+          <a:solidFill>
+            <a:srgbClr val="00D4AA"/>
+          </a:solidFill>
+          <a:ln>
+            <a:noFill/>
+          </a:ln>
+        </p:spPr>
+        <p:style>
+          <a:lnRef idx="1">
+            <a:schemeClr val="accent1"/>
+          </a:lnRef>
+          <a:fillRef idx="3">
+            <a:schemeClr val="accent1"/>
+          </a:fillRef>
+          <a:effectRef idx="2">
+            <a:schemeClr val="accent1"/>
+          </a:effectRef>
+          <a:fontRef idx="minor">
+            <a:schemeClr val="lt1"/>
+          </a:fontRef>
+        </p:style>
+        <p:txBody>
+          <a:bodyPr rtlCol="0" anchor="ctr"/>
+          <a:lstStyle/>
+          <a:p>
+            <a:pPr algn="ctr"/>
+            <a:endParaRPr/>
+          </a:p>
+        </p:txBody>
+      </p:sp>
+      <p:sp>
+        <p:nvSpPr>
+          <p:cNvPr id="11" name="TextBox 10"/>
+          <p:cNvSpPr txBox="1"/>
+          <p:nvPr/>
+        </p:nvSpPr>
+        <p:spPr>
+          <a:xfrm>
+            <a:off x="457200" y="3017520"/>
+            <a:ext cx="411480" cy="411480"/>
+          </a:xfrm>
+          <a:prstGeom prst="rect">
+            <a:avLst/>
+          </a:prstGeom>
+          <a:noFill/>
+        </p:spPr>
+        <p:txBody>
+          <a:bodyPr wrap="none" anchor="ctr">
+            <a:spAutoFit/>
+          </a:bodyPr>
+          <a:lstStyle/>
+          <a:p>
+            <a:pPr algn="ctr">
+              <a:defRPr sz="2000" b="1">
+                <a:solidFill>
+                  <a:srgbClr val="0B0F1A"/>
+                </a:solidFill>
+              </a:defRPr>
+            </a:pPr>
+            <a:r>
+              <a:t>v</a:t>
+            </a:r>
+          </a:p>
+        </p:txBody>
+      </p:sp>
+      <p:sp>
+        <p:nvSpPr>
+          <p:cNvPr id="12" name="TextBox 11"/>
+          <p:cNvSpPr txBox="1"/>
+          <p:nvPr/>
+        </p:nvSpPr>
+        <p:spPr>
+          <a:xfrm>
+            <a:off x="1005840" y="3063240"/>
+            <a:ext cx="10728655" cy="731520"/>
+          </a:xfrm>
+          <a:prstGeom prst="rect">
+            <a:avLst/>
+          </a:prstGeom>
+          <a:noFill/>
+        </p:spPr>
+        <p:txBody>
+          <a:bodyPr wrap="square">
+            <a:spAutoFit/>
+          </a:bodyPr>
+          <a:lstStyle/>
           <a:p>
             <a:pPr>
-              <a:spcBef>
-                <a:spcPts val="800"/>
-              </a:spcBef>
-              <a:spcAft>
-                <a:spcPts val="800"/>
-              </a:spcAft>
               <a:defRPr sz="2200">
                 <a:solidFill>
                   <a:srgbClr val="FFFFFF"/>
@@ -48807,17 +48789,113 @@
               </a:defRPr>
             </a:pPr>
             <a:r>
-              <a:t>  Anthropic Blog: anthropic.com/news</a:t>
-            </a:r>
-          </a:p>
+              <a:t>Iterate, don't start over</a:t>
+            </a:r>
+          </a:p>
+        </p:txBody>
+      </p:sp>
+      <p:sp>
+        <p:nvSpPr>
+          <p:cNvPr id="13" name="Oval 12"/>
+          <p:cNvSpPr/>
+          <p:nvPr/>
+        </p:nvSpPr>
+        <p:spPr>
+          <a:xfrm>
+            <a:off x="457200" y="3840480"/>
+            <a:ext cx="411480" cy="411480"/>
+          </a:xfrm>
+          <a:prstGeom prst="ellipse">
+            <a:avLst/>
+          </a:prstGeom>
+          <a:solidFill>
+            <a:srgbClr val="00D4AA"/>
+          </a:solidFill>
+          <a:ln>
+            <a:noFill/>
+          </a:ln>
+        </p:spPr>
+        <p:style>
+          <a:lnRef idx="1">
+            <a:schemeClr val="accent1"/>
+          </a:lnRef>
+          <a:fillRef idx="3">
+            <a:schemeClr val="accent1"/>
+          </a:fillRef>
+          <a:effectRef idx="2">
+            <a:schemeClr val="accent1"/>
+          </a:effectRef>
+          <a:fontRef idx="minor">
+            <a:schemeClr val="lt1"/>
+          </a:fontRef>
+        </p:style>
+        <p:txBody>
+          <a:bodyPr rtlCol="0" anchor="ctr"/>
+          <a:lstStyle/>
+          <a:p>
+            <a:pPr algn="ctr"/>
+            <a:endParaRPr/>
+          </a:p>
+        </p:txBody>
+      </p:sp>
+      <p:sp>
+        <p:nvSpPr>
+          <p:cNvPr id="14" name="TextBox 13"/>
+          <p:cNvSpPr txBox="1"/>
+          <p:nvPr/>
+        </p:nvSpPr>
+        <p:spPr>
+          <a:xfrm>
+            <a:off x="457200" y="3840480"/>
+            <a:ext cx="411480" cy="411480"/>
+          </a:xfrm>
+          <a:prstGeom prst="rect">
+            <a:avLst/>
+          </a:prstGeom>
+          <a:noFill/>
+        </p:spPr>
+        <p:txBody>
+          <a:bodyPr wrap="none" anchor="ctr">
+            <a:spAutoFit/>
+          </a:bodyPr>
+          <a:lstStyle/>
+          <a:p>
+            <a:pPr algn="ctr">
+              <a:defRPr sz="2000" b="1">
+                <a:solidFill>
+                  <a:srgbClr val="0B0F1A"/>
+                </a:solidFill>
+              </a:defRPr>
+            </a:pPr>
+            <a:r>
+              <a:t>v</a:t>
+            </a:r>
+          </a:p>
+        </p:txBody>
+      </p:sp>
+      <p:sp>
+        <p:nvSpPr>
+          <p:cNvPr id="15" name="TextBox 14"/>
+          <p:cNvSpPr txBox="1"/>
+          <p:nvPr/>
+        </p:nvSpPr>
+        <p:spPr>
+          <a:xfrm>
+            <a:off x="1005840" y="3886200"/>
+            <a:ext cx="10728655" cy="731520"/>
+          </a:xfrm>
+          <a:prstGeom prst="rect">
+            <a:avLst/>
+          </a:prstGeom>
+          <a:noFill/>
+        </p:spPr>
+        <p:txBody>
+          <a:bodyPr wrap="square">
+            <a:spAutoFit/>
+          </a:bodyPr>
+          <a:lstStyle/>
           <a:p>
             <a:pPr>
-              <a:spcBef>
-                <a:spcPts val="800"/>
-              </a:spcBef>
-              <a:spcAft>
-                <a:spcPts val="800"/>
-              </a:spcAft>
               <a:defRPr sz="2200">
                 <a:solidFill>
                   <a:srgbClr val="FFFFFF"/>
@@ -48825,17 +48903,113 @@
               </a:defRPr>
             </a:pPr>
             <a:r>
-              <a:t>  Trust Center: anthropic.com/trust</a:t>
-            </a:r>
-          </a:p>
+              <a:t>Claude in Excel = in-context help</a:t>
+            </a:r>
+          </a:p>
+        </p:txBody>
+      </p:sp>
+      <p:sp>
+        <p:nvSpPr>
+          <p:cNvPr id="16" name="Oval 15"/>
+          <p:cNvSpPr/>
+          <p:nvPr/>
+        </p:nvSpPr>
+        <p:spPr>
+          <a:xfrm>
+            <a:off x="457200" y="4663440"/>
+            <a:ext cx="411480" cy="411480"/>
+          </a:xfrm>
+          <a:prstGeom prst="ellipse">
+            <a:avLst/>
+          </a:prstGeom>
+          <a:solidFill>
+            <a:srgbClr val="00D4AA"/>
+          </a:solidFill>
+          <a:ln>
+            <a:noFill/>
+          </a:ln>
+        </p:spPr>
+        <p:style>
+          <a:lnRef idx="1">
+            <a:schemeClr val="accent1"/>
+          </a:lnRef>
+          <a:fillRef idx="3">
+            <a:schemeClr val="accent1"/>
+          </a:fillRef>
+          <a:effectRef idx="2">
+            <a:schemeClr val="accent1"/>
+          </a:effectRef>
+          <a:fontRef idx="minor">
+            <a:schemeClr val="lt1"/>
+          </a:fontRef>
+        </p:style>
+        <p:txBody>
+          <a:bodyPr rtlCol="0" anchor="ctr"/>
+          <a:lstStyle/>
+          <a:p>
+            <a:pPr algn="ctr"/>
+            <a:endParaRPr/>
+          </a:p>
+        </p:txBody>
+      </p:sp>
+      <p:sp>
+        <p:nvSpPr>
+          <p:cNvPr id="17" name="TextBox 16"/>
+          <p:cNvSpPr txBox="1"/>
+          <p:nvPr/>
+        </p:nvSpPr>
+        <p:spPr>
+          <a:xfrm>
+            <a:off x="457200" y="4663440"/>
+            <a:ext cx="411480" cy="411480"/>
+          </a:xfrm>
+          <a:prstGeom prst="rect">
+            <a:avLst/>
+          </a:prstGeom>
+          <a:noFill/>
+        </p:spPr>
+        <p:txBody>
+          <a:bodyPr wrap="none" anchor="ctr">
+            <a:spAutoFit/>
+          </a:bodyPr>
+          <a:lstStyle/>
+          <a:p>
+            <a:pPr algn="ctr">
+              <a:defRPr sz="2000" b="1">
+                <a:solidFill>
+                  <a:srgbClr val="0B0F1A"/>
+                </a:solidFill>
+              </a:defRPr>
+            </a:pPr>
+            <a:r>
+              <a:t>v</a:t>
+            </a:r>
+          </a:p>
+        </p:txBody>
+      </p:sp>
+      <p:sp>
+        <p:nvSpPr>
+          <p:cNvPr id="18" name="TextBox 17"/>
+          <p:cNvSpPr txBox="1"/>
+          <p:nvPr/>
+        </p:nvSpPr>
+        <p:spPr>
+          <a:xfrm>
+            <a:off x="1005840" y="4709160"/>
+            <a:ext cx="10728655" cy="731520"/>
+          </a:xfrm>
+          <a:prstGeom prst="rect">
+            <a:avLst/>
+          </a:prstGeom>
+          <a:noFill/>
+        </p:spPr>
+        <p:txBody>
+          <a:bodyPr wrap="square">
+            <a:spAutoFit/>
+          </a:bodyPr>
+          <a:lstStyle/>
           <a:p>
             <a:pPr>
-              <a:spcBef>
-                <a:spcPts val="800"/>
-              </a:spcBef>
-              <a:spcAft>
-                <a:spcPts val="800"/>
-              </a:spcAft>
               <a:defRPr sz="2200">
                 <a:solidFill>
                   <a:srgbClr val="FFFFFF"/>
@@ -48843,7 +49017,7 @@
               </a:defRPr>
             </a:pPr>
             <a:r>
-              <a:t>  Handouts: Claude Code Quick Reference, Prompt Engineering Cheatsheet</a:t>
+              <a:t>Verify AI outputs - Claude helps, you validate</a:t>
             </a:r>
           </a:p>
         </p:txBody>
@@ -48911,7 +49085,7 @@
               </a:defRPr>
             </a:pPr>
             <a:r>
-              <a:t>Practice Assignment (Optional)</a:t>
+              <a:t>Resources</a:t>
             </a:r>
           </a:p>
         </p:txBody>
@@ -48996,7 +49170,7 @@
               </a:defRPr>
             </a:pPr>
             <a:r>
-              <a:t>  Try 3 tasks with Claude this week:</a:t>
+              <a:t>  Official Docs: docs.claude.com</a:t>
             </a:r>
           </a:p>
           <a:p>
@@ -49014,7 +49188,7 @@
               </a:defRPr>
             </a:pPr>
             <a:r>
-              <a:t>  1. Something you do monthly (turn into a Project)</a:t>
+              <a:t>  Support: support.claude.com</a:t>
             </a:r>
           </a:p>
           <a:p>
@@ -49032,7 +49206,7 @@
               </a:defRPr>
             </a:pPr>
             <a:r>
-              <a:t>  2. A complex prompt (use GOLDEN framework)</a:t>
+              <a:t>  Anthropic Blog: anthropic.com/news</a:t>
             </a:r>
           </a:p>
           <a:p>
@@ -49050,7 +49224,7 @@
               </a:defRPr>
             </a:pPr>
             <a:r>
-              <a:t>  3. Excel formula help or data analysis</a:t>
+              <a:t>  Trust Center: anthropic.com/trust</a:t>
             </a:r>
           </a:p>
           <a:p>
@@ -49068,7 +49242,7 @@
               </a:defRPr>
             </a:pPr>
             <a:r>
-              <a:t>  Track results: What worked? Time saved?</a:t>
+              <a:t>  Handouts: Claude Code Quick Reference, Prompt Engineering Cheatsheet</a:t>
             </a:r>
           </a:p>
         </p:txBody>
@@ -49136,7 +49310,7 @@
               </a:defRPr>
             </a:pPr>
             <a:r>
-              <a:t>Questions?</a:t>
+              <a:t>Practice Assignment (Optional)</a:t>
             </a:r>
           </a:p>
         </p:txBody>
@@ -49221,7 +49395,7 @@
               </a:defRPr>
             </a:pPr>
             <a:r>
-              <a:t>  Licensing and access</a:t>
+              <a:t>  Try 3 tasks with Claude this week:</a:t>
             </a:r>
           </a:p>
           <a:p>
@@ -49239,7 +49413,7 @@
               </a:defRPr>
             </a:pPr>
             <a:r>
-              <a:t>  Security and data privacy</a:t>
+              <a:t>  1. Something you do monthly (turn into a Project)</a:t>
             </a:r>
           </a:p>
           <a:p>
@@ -49257,7 +49431,7 @@
               </a:defRPr>
             </a:pPr>
             <a:r>
-              <a:t>  When to use which tool</a:t>
+              <a:t>  2. A complex prompt (use GOLDEN framework)</a:t>
             </a:r>
           </a:p>
           <a:p>
@@ -49275,7 +49449,7 @@
               </a:defRPr>
             </a:pPr>
             <a:r>
-              <a:t>  Advanced prompting techniques</a:t>
+              <a:t>  3. Excel formula help or data analysis</a:t>
             </a:r>
           </a:p>
           <a:p>
@@ -49293,7 +49467,7 @@
               </a:defRPr>
             </a:pPr>
             <a:r>
-              <a:t>  Real-world use cases</a:t>
+              <a:t>  Track results: What worked? Time saved?</a:t>
             </a:r>
           </a:p>
         </p:txBody>
@@ -49307,7 +49481,7 @@
 </file>
 
 <file path=ppt/slides/slide87.xml><?xml version="1.0" encoding="utf-8"?>
-<p:sld xmlns:a="http://schemas.openxmlformats.org/drawingml/2006/main" xmlns:p="http://schemas.openxmlformats.org/presentationml/2006/main" xmlns:r="http://schemas.openxmlformats.org/officeDocument/2006/relationships">
+<p:sld xmlns:a="http://schemas.openxmlformats.org/drawingml/2006/main" xmlns:r="http://schemas.openxmlformats.org/officeDocument/2006/relationships" xmlns:p="http://schemas.openxmlformats.org/presentationml/2006/main">
   <p:cSld>
     <p:bg>
       <p:bgPr>
@@ -49323,7 +49497,14 @@
         <p:cNvGrpSpPr/>
         <p:nvPr/>
       </p:nvGrpSpPr>
-      <p:grpSpPr/>
+      <p:grpSpPr>
+        <a:xfrm>
+          <a:off x="0" y="0"/>
+          <a:ext cx="0" cy="0"/>
+          <a:chOff x="0" y="0"/>
+          <a:chExt cx="0" cy="0"/>
+        </a:xfrm>
+      </p:grpSpPr>
       <p:sp>
         <p:nvSpPr>
           <p:cNvPr id="2" name="TextBox 1"/>
@@ -49332,8 +49513,8 @@
         </p:nvSpPr>
         <p:spPr>
           <a:xfrm>
-            <a:off x="457200" y="274320"/>
-            <a:ext cx="11247120" cy="822960"/>
+            <a:off x="457200" y="365760"/>
+            <a:ext cx="11277295" cy="822960"/>
           </a:xfrm>
           <a:prstGeom prst="rect">
             <a:avLst/>
@@ -49354,67 +49535,30 @@
               </a:defRPr>
             </a:pPr>
             <a:r>
-              <a:t>Claude's Memory</a:t>
-            </a:r>
-          </a:p>
-        </p:txBody>
-      </p:sp>
-      <p:sp>
-        <p:nvSpPr>
-          <p:cNvPr id="3" name="TextBox 2"/>
-          <p:cNvSpPr txBox="1"/>
-          <p:nvPr/>
-        </p:nvSpPr>
-        <p:spPr>
-          <a:xfrm>
-            <a:off x="457200" y="1005840"/>
-            <a:ext cx="11247120" cy="457200"/>
-          </a:xfrm>
-          <a:prstGeom prst="rect">
-            <a:avLst/>
-          </a:prstGeom>
-          <a:noFill/>
-        </p:spPr>
-        <p:txBody>
-          <a:bodyPr wrap="none">
-            <a:spAutoFit/>
-          </a:bodyPr>
-          <a:lstStyle/>
-          <a:p>
-            <a:pPr>
-              <a:defRPr sz="1800" i="1">
-                <a:solidFill>
-                  <a:srgbClr val="9CA3AF"/>
-                </a:solidFill>
-              </a:defRPr>
-            </a:pPr>
-            <a:r>
-              <a:t>Claude remembers context across conversations — so you don't have to repeat yourself</a:t>
-            </a:r>
-          </a:p>
-        </p:txBody>
-      </p:sp>
-      <p:sp>
-        <p:nvSpPr>
-          <p:cNvPr id="4" name="Rounded Rectangle 3"/>
+              <a:t>Questions?</a:t>
+            </a:r>
+          </a:p>
+        </p:txBody>
+      </p:sp>
+      <p:sp>
+        <p:nvSpPr>
+          <p:cNvPr id="3" name="Rectangle 2"/>
           <p:cNvSpPr/>
           <p:nvPr/>
         </p:nvSpPr>
         <p:spPr>
           <a:xfrm>
-            <a:off x="457200" y="1737360"/>
-            <a:ext cx="3474720" cy="3474720"/>
-          </a:xfrm>
-          <a:prstGeom prst="roundRect">
+            <a:off x="457200" y="1234440"/>
+            <a:ext cx="1828800" cy="36576"/>
+          </a:xfrm>
+          <a:prstGeom prst="rect">
             <a:avLst/>
           </a:prstGeom>
           <a:solidFill>
-            <a:srgbClr val="141A2A"/>
+            <a:srgbClr val="00D4AA"/>
           </a:solidFill>
-          <a:ln w="19050">
-            <a:solidFill>
-              <a:srgbClr val="14B8A6"/>
-            </a:solidFill>
+          <a:ln>
+            <a:noFill/>
           </a:ln>
         </p:spPr>
         <p:style>
@@ -49436,50 +49580,20 @@
           <a:lstStyle/>
           <a:p>
             <a:pPr algn="ctr"/>
-          </a:p>
-        </p:txBody>
-      </p:sp>
-      <p:sp>
-        <p:nvSpPr>
-          <p:cNvPr id="5" name="TextBox 4"/>
-          <p:cNvSpPr txBox="1"/>
-          <p:nvPr/>
-        </p:nvSpPr>
-        <p:spPr>
-          <a:xfrm>
-            <a:off x="640080" y="1920240"/>
-            <a:ext cx="3108960" cy="457200"/>
-          </a:xfrm>
-          <a:prstGeom prst="rect">
-            <a:avLst/>
-          </a:prstGeom>
-          <a:noFill/>
-        </p:spPr>
-        <p:txBody>
-          <a:bodyPr wrap="none">
-            <a:spAutoFit/>
-          </a:bodyPr>
-          <a:lstStyle/>
-          <a:p>
-            <a:pPr algn="ctr">
-              <a:defRPr sz="3000"/>
-            </a:pPr>
-            <a:r>
-              <a:t>🔍</a:t>
-            </a:r>
-          </a:p>
-        </p:txBody>
-      </p:sp>
-      <p:sp>
-        <p:nvSpPr>
-          <p:cNvPr id="6" name="TextBox 5"/>
-          <p:cNvSpPr txBox="1"/>
-          <p:nvPr/>
-        </p:nvSpPr>
-        <p:spPr>
-          <a:xfrm>
-            <a:off x="640080" y="2377440"/>
-            <a:ext cx="3108960" cy="640080"/>
+            <a:endParaRPr/>
+          </a:p>
+        </p:txBody>
+      </p:sp>
+      <p:sp>
+        <p:nvSpPr>
+          <p:cNvPr id="4" name="TextBox 3"/>
+          <p:cNvSpPr txBox="1"/>
+          <p:nvPr/>
+        </p:nvSpPr>
+        <p:spPr>
+          <a:xfrm>
+            <a:off x="457200" y="1463040"/>
+            <a:ext cx="11277295" cy="4572000"/>
           </a:xfrm>
           <a:prstGeom prst="rect">
             <a:avLst/>
@@ -49492,437 +49606,93 @@
           </a:bodyPr>
           <a:lstStyle/>
           <a:p>
-            <a:pPr algn="ctr">
-              <a:defRPr sz="1800" b="1">
+            <a:pPr>
+              <a:spcBef>
+                <a:spcPts val="800"/>
+              </a:spcBef>
+              <a:spcAft>
+                <a:spcPts val="800"/>
+              </a:spcAft>
+              <a:defRPr sz="2200">
                 <a:solidFill>
                   <a:srgbClr val="FFFFFF"/>
                 </a:solidFill>
               </a:defRPr>
             </a:pPr>
             <a:r>
-              <a:t>Search &amp; Reference</a:t>
-            </a:r>
-            <a:br/>
-            <a:r>
-              <a:t>Past Chats</a:t>
-            </a:r>
-          </a:p>
-        </p:txBody>
-      </p:sp>
-      <p:sp>
-        <p:nvSpPr>
-          <p:cNvPr id="7" name="TextBox 6"/>
-          <p:cNvSpPr txBox="1"/>
-          <p:nvPr/>
-        </p:nvSpPr>
-        <p:spPr>
-          <a:xfrm>
-            <a:off x="640080" y="3108960"/>
-            <a:ext cx="3108960" cy="1828800"/>
-          </a:xfrm>
-          <a:prstGeom prst="rect">
-            <a:avLst/>
-          </a:prstGeom>
-          <a:noFill/>
-        </p:spPr>
-        <p:txBody>
-          <a:bodyPr wrap="square">
-            <a:spAutoFit/>
-          </a:bodyPr>
-          <a:lstStyle/>
-          <a:p>
-            <a:pPr algn="ctr">
-              <a:defRPr sz="1400">
-                <a:solidFill>
-                  <a:srgbClr val="D1D5DB"/>
-                </a:solidFill>
-              </a:defRPr>
-            </a:pPr>
-            <a:r>
-              <a:t>Claude searches your</a:t>
-            </a:r>
-            <a:br/>
-            <a:r>
-              <a:t>previous conversations</a:t>
-            </a:r>
-            <a:br/>
-            <a:r>
-              <a:t>for relevant context.</a:t>
-            </a:r>
-            <a:br/>
-            <a:r>
-              <a:t>Finds details you forgot.</a:t>
-            </a:r>
-            <a:br/>
-            <a:r>
-              <a:t>Works across all chats.</a:t>
-            </a:r>
-          </a:p>
-        </p:txBody>
-      </p:sp>
-      <p:sp>
-        <p:nvSpPr>
-          <p:cNvPr id="8" name="Rounded Rectangle 7"/>
-          <p:cNvSpPr/>
-          <p:nvPr/>
-        </p:nvSpPr>
-        <p:spPr>
-          <a:xfrm>
-            <a:off x="4206240" y="1737360"/>
-            <a:ext cx="3474720" cy="3474720"/>
-          </a:xfrm>
-          <a:prstGeom prst="roundRect">
-            <a:avLst/>
-          </a:prstGeom>
-          <a:solidFill>
-            <a:srgbClr val="141A2A"/>
-          </a:solidFill>
-          <a:ln w="19050">
-            <a:solidFill>
-              <a:srgbClr val="14B8A6"/>
-            </a:solidFill>
-          </a:ln>
-        </p:spPr>
-        <p:style>
-          <a:lnRef idx="1">
-            <a:schemeClr val="accent1"/>
-          </a:lnRef>
-          <a:fillRef idx="3">
-            <a:schemeClr val="accent1"/>
-          </a:fillRef>
-          <a:effectRef idx="2">
-            <a:schemeClr val="accent1"/>
-          </a:effectRef>
-          <a:fontRef idx="minor">
-            <a:schemeClr val="lt1"/>
-          </a:fontRef>
-        </p:style>
-        <p:txBody>
-          <a:bodyPr rtlCol="0" anchor="ctr"/>
-          <a:lstStyle/>
-          <a:p>
-            <a:pPr algn="ctr"/>
-          </a:p>
-        </p:txBody>
-      </p:sp>
-      <p:sp>
-        <p:nvSpPr>
-          <p:cNvPr id="9" name="TextBox 8"/>
-          <p:cNvSpPr txBox="1"/>
-          <p:nvPr/>
-        </p:nvSpPr>
-        <p:spPr>
-          <a:xfrm>
-            <a:off x="4389120" y="1920240"/>
-            <a:ext cx="3108960" cy="457200"/>
-          </a:xfrm>
-          <a:prstGeom prst="rect">
-            <a:avLst/>
-          </a:prstGeom>
-          <a:noFill/>
-        </p:spPr>
-        <p:txBody>
-          <a:bodyPr wrap="none">
-            <a:spAutoFit/>
-          </a:bodyPr>
-          <a:lstStyle/>
-          <a:p>
-            <a:pPr algn="ctr">
-              <a:defRPr sz="3000"/>
-            </a:pPr>
-            <a:r>
-              <a:t>🧠</a:t>
-            </a:r>
-          </a:p>
-        </p:txBody>
-      </p:sp>
-      <p:sp>
-        <p:nvSpPr>
-          <p:cNvPr id="10" name="TextBox 9"/>
-          <p:cNvSpPr txBox="1"/>
-          <p:nvPr/>
-        </p:nvSpPr>
-        <p:spPr>
-          <a:xfrm>
-            <a:off x="4389120" y="2377440"/>
-            <a:ext cx="3108960" cy="640080"/>
-          </a:xfrm>
-          <a:prstGeom prst="rect">
-            <a:avLst/>
-          </a:prstGeom>
-          <a:noFill/>
-        </p:spPr>
-        <p:txBody>
-          <a:bodyPr wrap="square">
-            <a:spAutoFit/>
-          </a:bodyPr>
-          <a:lstStyle/>
-          <a:p>
-            <a:pPr algn="ctr">
-              <a:defRPr sz="1800" b="1">
+              <a:t>  Licensing and access</a:t>
+            </a:r>
+          </a:p>
+          <a:p>
+            <a:pPr>
+              <a:spcBef>
+                <a:spcPts val="800"/>
+              </a:spcBef>
+              <a:spcAft>
+                <a:spcPts val="800"/>
+              </a:spcAft>
+              <a:defRPr sz="2200">
                 <a:solidFill>
                   <a:srgbClr val="FFFFFF"/>
                 </a:solidFill>
               </a:defRPr>
             </a:pPr>
             <a:r>
-              <a:t>Generate Memory</a:t>
-            </a:r>
-            <a:br/>
-            <a:r>
-              <a:t>from History</a:t>
-            </a:r>
-          </a:p>
-        </p:txBody>
-      </p:sp>
-      <p:sp>
-        <p:nvSpPr>
-          <p:cNvPr id="11" name="TextBox 10"/>
-          <p:cNvSpPr txBox="1"/>
-          <p:nvPr/>
-        </p:nvSpPr>
-        <p:spPr>
-          <a:xfrm>
-            <a:off x="4389120" y="3108960"/>
-            <a:ext cx="3108960" cy="1828800"/>
-          </a:xfrm>
-          <a:prstGeom prst="rect">
-            <a:avLst/>
-          </a:prstGeom>
-          <a:noFill/>
-        </p:spPr>
-        <p:txBody>
-          <a:bodyPr wrap="square">
-            <a:spAutoFit/>
-          </a:bodyPr>
-          <a:lstStyle/>
-          <a:p>
-            <a:pPr algn="ctr">
-              <a:defRPr sz="1400">
-                <a:solidFill>
-                  <a:srgbClr val="D1D5DB"/>
-                </a:solidFill>
-              </a:defRPr>
-            </a:pPr>
-            <a:r>
-              <a:t>Claude builds memory</a:t>
-            </a:r>
-            <a:br/>
-            <a:r>
-              <a:t>from your chat patterns.</a:t>
-            </a:r>
-            <a:br/>
-            <a:r>
-              <a:t>Remembers preferences,</a:t>
-            </a:r>
-            <a:br/>
-            <a:r>
-              <a:t>projects, and context.</a:t>
-            </a:r>
-            <a:br/>
-            <a:r>
-              <a:t>Controls both chats</a:t>
-            </a:r>
-            <a:br/>
-            <a:r>
-              <a:t>and Projects.</a:t>
-            </a:r>
-          </a:p>
-        </p:txBody>
-      </p:sp>
-      <p:sp>
-        <p:nvSpPr>
-          <p:cNvPr id="12" name="Rounded Rectangle 11"/>
-          <p:cNvSpPr/>
-          <p:nvPr/>
-        </p:nvSpPr>
-        <p:spPr>
-          <a:xfrm>
-            <a:off x="7955279" y="1737360"/>
-            <a:ext cx="3474720" cy="3474720"/>
-          </a:xfrm>
-          <a:prstGeom prst="roundRect">
-            <a:avLst/>
-          </a:prstGeom>
-          <a:solidFill>
-            <a:srgbClr val="141A2A"/>
-          </a:solidFill>
-          <a:ln w="19050">
-            <a:solidFill>
-              <a:srgbClr val="14B8A6"/>
-            </a:solidFill>
-          </a:ln>
-        </p:spPr>
-        <p:style>
-          <a:lnRef idx="1">
-            <a:schemeClr val="accent1"/>
-          </a:lnRef>
-          <a:fillRef idx="3">
-            <a:schemeClr val="accent1"/>
-          </a:fillRef>
-          <a:effectRef idx="2">
-            <a:schemeClr val="accent1"/>
-          </a:effectRef>
-          <a:fontRef idx="minor">
-            <a:schemeClr val="lt1"/>
-          </a:fontRef>
-        </p:style>
-        <p:txBody>
-          <a:bodyPr rtlCol="0" anchor="ctr"/>
-          <a:lstStyle/>
-          <a:p>
-            <a:pPr algn="ctr"/>
-          </a:p>
-        </p:txBody>
-      </p:sp>
-      <p:sp>
-        <p:nvSpPr>
-          <p:cNvPr id="13" name="TextBox 12"/>
-          <p:cNvSpPr txBox="1"/>
-          <p:nvPr/>
-        </p:nvSpPr>
-        <p:spPr>
-          <a:xfrm>
-            <a:off x="8138159" y="1920240"/>
-            <a:ext cx="3108960" cy="457200"/>
-          </a:xfrm>
-          <a:prstGeom prst="rect">
-            <a:avLst/>
-          </a:prstGeom>
-          <a:noFill/>
-        </p:spPr>
-        <p:txBody>
-          <a:bodyPr wrap="none">
-            <a:spAutoFit/>
-          </a:bodyPr>
-          <a:lstStyle/>
-          <a:p>
-            <a:pPr algn="ctr">
-              <a:defRPr sz="3000"/>
-            </a:pPr>
-            <a:r>
-              <a:t>👁️</a:t>
-            </a:r>
-          </a:p>
-        </p:txBody>
-      </p:sp>
-      <p:sp>
-        <p:nvSpPr>
-          <p:cNvPr id="14" name="TextBox 13"/>
-          <p:cNvSpPr txBox="1"/>
-          <p:nvPr/>
-        </p:nvSpPr>
-        <p:spPr>
-          <a:xfrm>
-            <a:off x="8138159" y="2377440"/>
-            <a:ext cx="3108960" cy="640080"/>
-          </a:xfrm>
-          <a:prstGeom prst="rect">
-            <a:avLst/>
-          </a:prstGeom>
-          <a:noFill/>
-        </p:spPr>
-        <p:txBody>
-          <a:bodyPr wrap="square">
-            <a:spAutoFit/>
-          </a:bodyPr>
-          <a:lstStyle/>
-          <a:p>
-            <a:pPr algn="ctr">
-              <a:defRPr sz="1800" b="1">
+              <a:t>  Security and data privacy</a:t>
+            </a:r>
+          </a:p>
+          <a:p>
+            <a:pPr>
+              <a:spcBef>
+                <a:spcPts val="800"/>
+              </a:spcBef>
+              <a:spcAft>
+                <a:spcPts val="800"/>
+              </a:spcAft>
+              <a:defRPr sz="2200">
                 <a:solidFill>
                   <a:srgbClr val="FFFFFF"/>
                 </a:solidFill>
               </a:defRPr>
             </a:pPr>
             <a:r>
-              <a:t>View Your Memory</a:t>
-            </a:r>
-          </a:p>
-        </p:txBody>
-      </p:sp>
-      <p:sp>
-        <p:nvSpPr>
-          <p:cNvPr id="15" name="TextBox 14"/>
-          <p:cNvSpPr txBox="1"/>
-          <p:nvPr/>
-        </p:nvSpPr>
-        <p:spPr>
-          <a:xfrm>
-            <a:off x="8138159" y="3108960"/>
-            <a:ext cx="3108960" cy="1828800"/>
-          </a:xfrm>
-          <a:prstGeom prst="rect">
-            <a:avLst/>
-          </a:prstGeom>
-          <a:noFill/>
-        </p:spPr>
-        <p:txBody>
-          <a:bodyPr wrap="square">
-            <a:spAutoFit/>
-          </a:bodyPr>
-          <a:lstStyle/>
-          <a:p>
-            <a:pPr algn="ctr">
-              <a:defRPr sz="1400">
-                <a:solidFill>
-                  <a:srgbClr val="D1D5DB"/>
-                </a:solidFill>
-              </a:defRPr>
-            </a:pPr>
-            <a:r>
-              <a:t>See exactly what Claude</a:t>
-            </a:r>
-            <a:br/>
-            <a:r>
-              <a:t>remembers about you.</a:t>
-            </a:r>
-            <a:br/>
-            <a:r>
-              <a:t>Edit or delete entries.</a:t>
-            </a:r>
-            <a:br/>
-            <a:r>
-              <a:t>Full transparency —</a:t>
-            </a:r>
-            <a:br/>
-            <a:r>
-              <a:t>no hidden knowledge.</a:t>
-            </a:r>
-          </a:p>
-        </p:txBody>
-      </p:sp>
-      <p:sp>
-        <p:nvSpPr>
-          <p:cNvPr id="16" name="TextBox 15"/>
-          <p:cNvSpPr txBox="1"/>
-          <p:nvPr/>
-        </p:nvSpPr>
-        <p:spPr>
-          <a:xfrm>
-            <a:off x="457200" y="5486400"/>
-            <a:ext cx="11247120" cy="457200"/>
-          </a:xfrm>
-          <a:prstGeom prst="rect">
-            <a:avLst/>
-          </a:prstGeom>
-          <a:noFill/>
-        </p:spPr>
-        <p:txBody>
-          <a:bodyPr wrap="none">
-            <a:spAutoFit/>
-          </a:bodyPr>
-          <a:lstStyle/>
-          <a:p>
-            <a:pPr algn="ctr">
-              <a:defRPr sz="1500" i="1">
-                <a:solidFill>
-                  <a:srgbClr val="14B8A6"/>
-                </a:solidFill>
-              </a:defRPr>
-            </a:pPr>
-            <a:r>
-              <a:t>Settings → Memory → Enable both toggles for the best experience</a:t>
+              <a:t>  When to use which tool</a:t>
+            </a:r>
+          </a:p>
+          <a:p>
+            <a:pPr>
+              <a:spcBef>
+                <a:spcPts val="800"/>
+              </a:spcBef>
+              <a:spcAft>
+                <a:spcPts val="800"/>
+              </a:spcAft>
+              <a:defRPr sz="2200">
+                <a:solidFill>
+                  <a:srgbClr val="FFFFFF"/>
+                </a:solidFill>
+              </a:defRPr>
+            </a:pPr>
+            <a:r>
+              <a:t>  Advanced prompting techniques</a:t>
+            </a:r>
+          </a:p>
+          <a:p>
+            <a:pPr>
+              <a:spcBef>
+                <a:spcPts val="800"/>
+              </a:spcBef>
+              <a:spcAft>
+                <a:spcPts val="800"/>
+              </a:spcAft>
+              <a:defRPr sz="2200">
+                <a:solidFill>
+                  <a:srgbClr val="FFFFFF"/>
+                </a:solidFill>
+              </a:defRPr>
+            </a:pPr>
+            <a:r>
+              <a:t>  Real-world use cases</a:t>
             </a:r>
           </a:p>
         </p:txBody>
@@ -49983,7 +49753,7 @@
               </a:defRPr>
             </a:pPr>
             <a:r>
-              <a:t>Claude for Chrome</a:t>
+              <a:t>Claude's Memory</a:t>
             </a:r>
           </a:p>
         </p:txBody>
@@ -50018,7 +49788,7 @@
               </a:defRPr>
             </a:pPr>
             <a:r>
-              <a:t>AI assistant in your browser side panel — sees your screen, acts on any webpage</a:t>
+              <a:t>Claude remembers context across conversations — so you don't have to repeat yourself</a:t>
             </a:r>
           </a:p>
         </p:txBody>
@@ -50094,7 +49864,7 @@
               <a:defRPr sz="3000"/>
             </a:pPr>
             <a:r>
-              <a:t>🌐</a:t>
+              <a:t>🔍</a:t>
             </a:r>
           </a:p>
         </p:txBody>
@@ -50108,42 +49878,7 @@
         <p:spPr>
           <a:xfrm>
             <a:off x="640080" y="2377440"/>
-            <a:ext cx="3108960" cy="457200"/>
-          </a:xfrm>
-          <a:prstGeom prst="rect">
-            <a:avLst/>
-          </a:prstGeom>
-          <a:noFill/>
-        </p:spPr>
-        <p:txBody>
-          <a:bodyPr wrap="none">
-            <a:spAutoFit/>
-          </a:bodyPr>
-          <a:lstStyle/>
-          <a:p>
-            <a:pPr algn="ctr">
-              <a:defRPr sz="2000" b="1">
-                <a:solidFill>
-                  <a:srgbClr val="FFFFFF"/>
-                </a:solidFill>
-              </a:defRPr>
-            </a:pPr>
-            <a:r>
-              <a:t>Browse with AI</a:t>
-            </a:r>
-          </a:p>
-        </p:txBody>
-      </p:sp>
-      <p:sp>
-        <p:nvSpPr>
-          <p:cNvPr id="7" name="TextBox 6"/>
-          <p:cNvSpPr txBox="1"/>
-          <p:nvPr/>
-        </p:nvSpPr>
-        <p:spPr>
-          <a:xfrm>
-            <a:off x="640080" y="2926080"/>
-            <a:ext cx="3108960" cy="2011680"/>
+            <a:ext cx="3108960" cy="640080"/>
           </a:xfrm>
           <a:prstGeom prst="rect">
             <a:avLst/>
@@ -50157,6 +49892,45 @@
           <a:lstStyle/>
           <a:p>
             <a:pPr algn="ctr">
+              <a:defRPr sz="1800" b="1">
+                <a:solidFill>
+                  <a:srgbClr val="FFFFFF"/>
+                </a:solidFill>
+              </a:defRPr>
+            </a:pPr>
+            <a:r>
+              <a:t>Search &amp; Reference</a:t>
+            </a:r>
+            <a:br/>
+            <a:r>
+              <a:t>Past Chats</a:t>
+            </a:r>
+          </a:p>
+        </p:txBody>
+      </p:sp>
+      <p:sp>
+        <p:nvSpPr>
+          <p:cNvPr id="7" name="TextBox 6"/>
+          <p:cNvSpPr txBox="1"/>
+          <p:nvPr/>
+        </p:nvSpPr>
+        <p:spPr>
+          <a:xfrm>
+            <a:off x="640080" y="3108960"/>
+            <a:ext cx="3108960" cy="1828800"/>
+          </a:xfrm>
+          <a:prstGeom prst="rect">
+            <a:avLst/>
+          </a:prstGeom>
+          <a:noFill/>
+        </p:spPr>
+        <p:txBody>
+          <a:bodyPr wrap="square">
+            <a:spAutoFit/>
+          </a:bodyPr>
+          <a:lstStyle/>
+          <a:p>
+            <a:pPr algn="ctr">
               <a:defRPr sz="1400">
                 <a:solidFill>
                   <a:srgbClr val="D1D5DB"/>
@@ -50164,23 +49938,23 @@
               </a:defRPr>
             </a:pPr>
             <a:r>
-              <a:t>Side panel stays open</a:t>
+              <a:t>Claude searches your</a:t>
             </a:r>
             <a:br/>
             <a:r>
-              <a:t>while you browse.</a:t>
+              <a:t>previous conversations</a:t>
             </a:r>
             <a:br/>
             <a:r>
-              <a:t>Ask questions about</a:t>
+              <a:t>for relevant context.</a:t>
             </a:r>
             <a:br/>
             <a:r>
-              <a:t>any page you're viewing.</a:t>
+              <a:t>Finds details you forgot.</a:t>
             </a:r>
             <a:br/>
             <a:r>
-              <a:t>No copy-paste needed.</a:t>
+              <a:t>Works across all chats.</a:t>
             </a:r>
           </a:p>
         </p:txBody>
@@ -50256,7 +50030,7 @@
               <a:defRPr sz="3000"/>
             </a:pPr>
             <a:r>
-              <a:t>📋</a:t>
+              <a:t>🧠</a:t>
             </a:r>
           </a:p>
         </p:txBody>
@@ -50270,42 +50044,7 @@
         <p:spPr>
           <a:xfrm>
             <a:off x="4389120" y="2377440"/>
-            <a:ext cx="3108960" cy="457200"/>
-          </a:xfrm>
-          <a:prstGeom prst="rect">
-            <a:avLst/>
-          </a:prstGeom>
-          <a:noFill/>
-        </p:spPr>
-        <p:txBody>
-          <a:bodyPr wrap="none">
-            <a:spAutoFit/>
-          </a:bodyPr>
-          <a:lstStyle/>
-          <a:p>
-            <a:pPr algn="ctr">
-              <a:defRPr sz="2000" b="1">
-                <a:solidFill>
-                  <a:srgbClr val="FFFFFF"/>
-                </a:solidFill>
-              </a:defRPr>
-            </a:pPr>
-            <a:r>
-              <a:t>Summarize &amp; Extract</a:t>
-            </a:r>
-          </a:p>
-        </p:txBody>
-      </p:sp>
-      <p:sp>
-        <p:nvSpPr>
-          <p:cNvPr id="11" name="TextBox 10"/>
-          <p:cNvSpPr txBox="1"/>
-          <p:nvPr/>
-        </p:nvSpPr>
-        <p:spPr>
-          <a:xfrm>
-            <a:off x="4389120" y="2926080"/>
-            <a:ext cx="3108960" cy="2011680"/>
+            <a:ext cx="3108960" cy="640080"/>
           </a:xfrm>
           <a:prstGeom prst="rect">
             <a:avLst/>
@@ -50319,6 +50058,45 @@
           <a:lstStyle/>
           <a:p>
             <a:pPr algn="ctr">
+              <a:defRPr sz="1800" b="1">
+                <a:solidFill>
+                  <a:srgbClr val="FFFFFF"/>
+                </a:solidFill>
+              </a:defRPr>
+            </a:pPr>
+            <a:r>
+              <a:t>Generate Memory</a:t>
+            </a:r>
+            <a:br/>
+            <a:r>
+              <a:t>from History</a:t>
+            </a:r>
+          </a:p>
+        </p:txBody>
+      </p:sp>
+      <p:sp>
+        <p:nvSpPr>
+          <p:cNvPr id="11" name="TextBox 10"/>
+          <p:cNvSpPr txBox="1"/>
+          <p:nvPr/>
+        </p:nvSpPr>
+        <p:spPr>
+          <a:xfrm>
+            <a:off x="4389120" y="3108960"/>
+            <a:ext cx="3108960" cy="1828800"/>
+          </a:xfrm>
+          <a:prstGeom prst="rect">
+            <a:avLst/>
+          </a:prstGeom>
+          <a:noFill/>
+        </p:spPr>
+        <p:txBody>
+          <a:bodyPr wrap="square">
+            <a:spAutoFit/>
+          </a:bodyPr>
+          <a:lstStyle/>
+          <a:p>
+            <a:pPr algn="ctr">
               <a:defRPr sz="1400">
                 <a:solidFill>
                   <a:srgbClr val="D1D5DB"/>
@@ -50326,23 +50104,27 @@
               </a:defRPr>
             </a:pPr>
             <a:r>
-              <a:t>Summarize long articles</a:t>
+              <a:t>Claude builds memory</a:t>
             </a:r>
             <a:br/>
             <a:r>
-              <a:t>Extract key data points</a:t>
+              <a:t>from your chat patterns.</a:t>
             </a:r>
             <a:br/>
             <a:r>
-              <a:t>Compare across tabs</a:t>
+              <a:t>Remembers preferences,</a:t>
             </a:r>
             <a:br/>
             <a:r>
-              <a:t>Pull info from tables</a:t>
+              <a:t>projects, and context.</a:t>
             </a:r>
             <a:br/>
             <a:r>
-              <a:t>Research in half the time</a:t>
+              <a:t>Controls both chats</a:t>
+            </a:r>
+            <a:br/>
+            <a:r>
+              <a:t>and Projects.</a:t>
             </a:r>
           </a:p>
         </p:txBody>
@@ -50418,7 +50200,7 @@
               <a:defRPr sz="3000"/>
             </a:pPr>
             <a:r>
-              <a:t>⚡</a:t>
+              <a:t>👁️</a:t>
             </a:r>
           </a:p>
         </p:txBody>
@@ -50432,7 +50214,93 @@
         <p:spPr>
           <a:xfrm>
             <a:off x="8138159" y="2377440"/>
-            <a:ext cx="3108960" cy="457200"/>
+            <a:ext cx="3108960" cy="640080"/>
+          </a:xfrm>
+          <a:prstGeom prst="rect">
+            <a:avLst/>
+          </a:prstGeom>
+          <a:noFill/>
+        </p:spPr>
+        <p:txBody>
+          <a:bodyPr wrap="square">
+            <a:spAutoFit/>
+          </a:bodyPr>
+          <a:lstStyle/>
+          <a:p>
+            <a:pPr algn="ctr">
+              <a:defRPr sz="1800" b="1">
+                <a:solidFill>
+                  <a:srgbClr val="FFFFFF"/>
+                </a:solidFill>
+              </a:defRPr>
+            </a:pPr>
+            <a:r>
+              <a:t>View Your Memory</a:t>
+            </a:r>
+          </a:p>
+        </p:txBody>
+      </p:sp>
+      <p:sp>
+        <p:nvSpPr>
+          <p:cNvPr id="15" name="TextBox 14"/>
+          <p:cNvSpPr txBox="1"/>
+          <p:nvPr/>
+        </p:nvSpPr>
+        <p:spPr>
+          <a:xfrm>
+            <a:off x="8138159" y="3108960"/>
+            <a:ext cx="3108960" cy="1828800"/>
+          </a:xfrm>
+          <a:prstGeom prst="rect">
+            <a:avLst/>
+          </a:prstGeom>
+          <a:noFill/>
+        </p:spPr>
+        <p:txBody>
+          <a:bodyPr wrap="square">
+            <a:spAutoFit/>
+          </a:bodyPr>
+          <a:lstStyle/>
+          <a:p>
+            <a:pPr algn="ctr">
+              <a:defRPr sz="1400">
+                <a:solidFill>
+                  <a:srgbClr val="D1D5DB"/>
+                </a:solidFill>
+              </a:defRPr>
+            </a:pPr>
+            <a:r>
+              <a:t>See exactly what Claude</a:t>
+            </a:r>
+            <a:br/>
+            <a:r>
+              <a:t>remembers about you.</a:t>
+            </a:r>
+            <a:br/>
+            <a:r>
+              <a:t>Edit or delete entries.</a:t>
+            </a:r>
+            <a:br/>
+            <a:r>
+              <a:t>Full transparency —</a:t>
+            </a:r>
+            <a:br/>
+            <a:r>
+              <a:t>no hidden knowledge.</a:t>
+            </a:r>
+          </a:p>
+        </p:txBody>
+      </p:sp>
+      <p:sp>
+        <p:nvSpPr>
+          <p:cNvPr id="16" name="TextBox 15"/>
+          <p:cNvSpPr txBox="1"/>
+          <p:nvPr/>
+        </p:nvSpPr>
+        <p:spPr>
+          <a:xfrm>
+            <a:off x="457200" y="5486400"/>
+            <a:ext cx="11247120" cy="457200"/>
           </a:xfrm>
           <a:prstGeom prst="rect">
             <a:avLst/>
@@ -50446,28 +50314,274 @@
           <a:lstStyle/>
           <a:p>
             <a:pPr algn="ctr">
-              <a:defRPr sz="2000" b="1">
+              <a:defRPr sz="1500" i="1">
+                <a:solidFill>
+                  <a:srgbClr val="14B8A6"/>
+                </a:solidFill>
+              </a:defRPr>
+            </a:pPr>
+            <a:r>
+              <a:t>Settings → Memory → Enable both toggles for the best experience</a:t>
+            </a:r>
+          </a:p>
+        </p:txBody>
+      </p:sp>
+    </p:spTree>
+  </p:cSld>
+  <p:clrMapOvr>
+    <a:masterClrMapping/>
+  </p:clrMapOvr>
+</p:sld>
+</file>
+
+<file path=ppt/slides/slide89.xml><?xml version="1.0" encoding="utf-8"?>
+<p:sld xmlns:a="http://schemas.openxmlformats.org/drawingml/2006/main" xmlns:p="http://schemas.openxmlformats.org/presentationml/2006/main" xmlns:r="http://schemas.openxmlformats.org/officeDocument/2006/relationships">
+  <p:cSld>
+    <p:bg>
+      <p:bgPr>
+        <a:solidFill>
+          <a:srgbClr val="0B0F1A"/>
+        </a:solidFill>
+        <a:effectLst/>
+      </p:bgPr>
+    </p:bg>
+    <p:spTree>
+      <p:nvGrpSpPr>
+        <p:cNvPr id="1" name=""/>
+        <p:cNvGrpSpPr/>
+        <p:nvPr/>
+      </p:nvGrpSpPr>
+      <p:grpSpPr/>
+      <p:sp>
+        <p:nvSpPr>
+          <p:cNvPr id="2" name="TextBox 1"/>
+          <p:cNvSpPr txBox="1"/>
+          <p:nvPr/>
+        </p:nvSpPr>
+        <p:spPr>
+          <a:xfrm>
+            <a:off x="457200" y="274320"/>
+            <a:ext cx="11247120" cy="822960"/>
+          </a:xfrm>
+          <a:prstGeom prst="rect">
+            <a:avLst/>
+          </a:prstGeom>
+          <a:noFill/>
+        </p:spPr>
+        <p:txBody>
+          <a:bodyPr wrap="none">
+            <a:spAutoFit/>
+          </a:bodyPr>
+          <a:lstStyle/>
+          <a:p>
+            <a:pPr>
+              <a:defRPr sz="4000" b="1">
                 <a:solidFill>
                   <a:srgbClr val="FFFFFF"/>
                 </a:solidFill>
               </a:defRPr>
             </a:pPr>
             <a:r>
-              <a:t>Automate Workflows</a:t>
-            </a:r>
-          </a:p>
-        </p:txBody>
-      </p:sp>
-      <p:sp>
-        <p:nvSpPr>
-          <p:cNvPr id="15" name="TextBox 14"/>
-          <p:cNvSpPr txBox="1"/>
-          <p:nvPr/>
-        </p:nvSpPr>
-        <p:spPr>
-          <a:xfrm>
-            <a:off x="8138159" y="2926080"/>
-            <a:ext cx="3108960" cy="2011680"/>
+              <a:t>Beyond Built-In: Custom Connectors</a:t>
+            </a:r>
+          </a:p>
+        </p:txBody>
+      </p:sp>
+      <p:sp>
+        <p:nvSpPr>
+          <p:cNvPr id="3" name="TextBox 2"/>
+          <p:cNvSpPr txBox="1"/>
+          <p:nvPr/>
+        </p:nvSpPr>
+        <p:spPr>
+          <a:xfrm>
+            <a:off x="457200" y="1005840"/>
+            <a:ext cx="11247120" cy="457200"/>
+          </a:xfrm>
+          <a:prstGeom prst="rect">
+            <a:avLst/>
+          </a:prstGeom>
+          <a:noFill/>
+        </p:spPr>
+        <p:txBody>
+          <a:bodyPr wrap="none">
+            <a:spAutoFit/>
+          </a:bodyPr>
+          <a:lstStyle/>
+          <a:p>
+            <a:pPr>
+              <a:defRPr sz="2000" i="1">
+                <a:solidFill>
+                  <a:srgbClr val="9CA3AF"/>
+                </a:solidFill>
+              </a:defRPr>
+            </a:pPr>
+            <a:r>
+              <a:t>Claude isn't limited to what ships out of the box</a:t>
+            </a:r>
+          </a:p>
+        </p:txBody>
+      </p:sp>
+      <p:sp>
+        <p:nvSpPr>
+          <p:cNvPr id="4" name="Rounded Rectangle 3"/>
+          <p:cNvSpPr/>
+          <p:nvPr/>
+        </p:nvSpPr>
+        <p:spPr>
+          <a:xfrm>
+            <a:off x="457200" y="1737360"/>
+            <a:ext cx="5303520" cy="4114800"/>
+          </a:xfrm>
+          <a:prstGeom prst="roundRect">
+            <a:avLst/>
+          </a:prstGeom>
+          <a:solidFill>
+            <a:srgbClr val="141A2A"/>
+          </a:solidFill>
+          <a:ln w="19050">
+            <a:solidFill>
+              <a:srgbClr val="14B8A6"/>
+            </a:solidFill>
+          </a:ln>
+        </p:spPr>
+        <p:style>
+          <a:lnRef idx="1">
+            <a:schemeClr val="accent1"/>
+          </a:lnRef>
+          <a:fillRef idx="3">
+            <a:schemeClr val="accent1"/>
+          </a:fillRef>
+          <a:effectRef idx="2">
+            <a:schemeClr val="accent1"/>
+          </a:effectRef>
+          <a:fontRef idx="minor">
+            <a:schemeClr val="lt1"/>
+          </a:fontRef>
+        </p:style>
+        <p:txBody>
+          <a:bodyPr rtlCol="0" anchor="ctr"/>
+          <a:lstStyle/>
+          <a:p>
+            <a:pPr algn="ctr"/>
+          </a:p>
+        </p:txBody>
+      </p:sp>
+      <p:sp>
+        <p:nvSpPr>
+          <p:cNvPr id="5" name="TextBox 4"/>
+          <p:cNvSpPr txBox="1"/>
+          <p:nvPr/>
+        </p:nvSpPr>
+        <p:spPr>
+          <a:xfrm>
+            <a:off x="731520" y="1920240"/>
+            <a:ext cx="4754880" cy="457200"/>
+          </a:xfrm>
+          <a:prstGeom prst="rect">
+            <a:avLst/>
+          </a:prstGeom>
+          <a:noFill/>
+        </p:spPr>
+        <p:txBody>
+          <a:bodyPr wrap="none">
+            <a:spAutoFit/>
+          </a:bodyPr>
+          <a:lstStyle/>
+          <a:p>
+            <a:pPr algn="ctr">
+              <a:defRPr sz="3000"/>
+            </a:pPr>
+            <a:r>
+              <a:t>🔌</a:t>
+            </a:r>
+          </a:p>
+        </p:txBody>
+      </p:sp>
+      <p:sp>
+        <p:nvSpPr>
+          <p:cNvPr id="6" name="TextBox 5"/>
+          <p:cNvSpPr txBox="1"/>
+          <p:nvPr/>
+        </p:nvSpPr>
+        <p:spPr>
+          <a:xfrm>
+            <a:off x="731520" y="2377440"/>
+            <a:ext cx="4754880" cy="457200"/>
+          </a:xfrm>
+          <a:prstGeom prst="rect">
+            <a:avLst/>
+          </a:prstGeom>
+          <a:noFill/>
+        </p:spPr>
+        <p:txBody>
+          <a:bodyPr wrap="none">
+            <a:spAutoFit/>
+          </a:bodyPr>
+          <a:lstStyle/>
+          <a:p>
+            <a:pPr algn="ctr">
+              <a:defRPr sz="2200" b="1">
+                <a:solidFill>
+                  <a:srgbClr val="FFFFFF"/>
+                </a:solidFill>
+              </a:defRPr>
+            </a:pPr>
+            <a:r>
+              <a:t>Integrations Panel</a:t>
+            </a:r>
+          </a:p>
+        </p:txBody>
+      </p:sp>
+      <p:sp>
+        <p:nvSpPr>
+          <p:cNvPr id="7" name="TextBox 6"/>
+          <p:cNvSpPr txBox="1"/>
+          <p:nvPr/>
+        </p:nvSpPr>
+        <p:spPr>
+          <a:xfrm>
+            <a:off x="731520" y="2834640"/>
+            <a:ext cx="4754880" cy="457200"/>
+          </a:xfrm>
+          <a:prstGeom prst="rect">
+            <a:avLst/>
+          </a:prstGeom>
+          <a:noFill/>
+        </p:spPr>
+        <p:txBody>
+          <a:bodyPr wrap="none">
+            <a:spAutoFit/>
+          </a:bodyPr>
+          <a:lstStyle/>
+          <a:p>
+            <a:pPr algn="ctr">
+              <a:defRPr sz="1500" i="1">
+                <a:solidFill>
+                  <a:srgbClr val="14B8A6"/>
+                </a:solidFill>
+              </a:defRPr>
+            </a:pPr>
+            <a:r>
+              <a:t>Connect Claude to tools</a:t>
+            </a:r>
+            <a:br/>
+            <a:r>
+              <a:t>you already use:</a:t>
+            </a:r>
+          </a:p>
+        </p:txBody>
+      </p:sp>
+      <p:sp>
+        <p:nvSpPr>
+          <p:cNvPr id="8" name="TextBox 7"/>
+          <p:cNvSpPr txBox="1"/>
+          <p:nvPr/>
+        </p:nvSpPr>
+        <p:spPr>
+          <a:xfrm>
+            <a:off x="731520" y="3383280"/>
+            <a:ext cx="4754880" cy="2286000"/>
           </a:xfrm>
           <a:prstGeom prst="rect">
             <a:avLst/>
@@ -50481,44 +50595,94 @@
           <a:lstStyle/>
           <a:p>
             <a:pPr algn="ctr">
-              <a:defRPr sz="1400">
+              <a:defRPr sz="1500">
                 <a:solidFill>
                   <a:srgbClr val="D1D5DB"/>
                 </a:solidFill>
               </a:defRPr>
             </a:pPr>
             <a:r>
-              <a:t>Fill out web forms</a:t>
+              <a:t>Slack  •  Notion  •  Jira</a:t>
             </a:r>
             <a:br/>
             <a:r>
-              <a:t>Draft emails in Gmail</a:t>
+              <a:t>Salesforce  •  Asana  •  Zapier</a:t>
             </a:r>
             <a:br/>
             <a:r>
-              <a:t>Navigate complex sites</a:t>
+              <a:t>Google Workspace  •  GitHub</a:t>
             </a:r>
             <a:br/>
-            <a:r>
-              <a:t>Automate repetitive tasks</a:t>
-            </a:r>
             <a:br/>
             <a:r>
-              <a:t>Claude sees what you see</a:t>
-            </a:r>
-          </a:p>
-        </p:txBody>
-      </p:sp>
-      <p:sp>
-        <p:nvSpPr>
-          <p:cNvPr id="16" name="TextBox 15"/>
-          <p:cNvSpPr txBox="1"/>
-          <p:nvPr/>
-        </p:nvSpPr>
-        <p:spPr>
-          <a:xfrm>
-            <a:off x="457200" y="5486400"/>
-            <a:ext cx="11247120" cy="457200"/>
+              <a:t>Enable in Settings → Integrations</a:t>
+            </a:r>
+            <a:br/>
+            <a:r>
+              <a:t>Claude pulls and pushes data</a:t>
+            </a:r>
+            <a:br/>
+            <a:r>
+              <a:t>directly — no switching apps</a:t>
+            </a:r>
+          </a:p>
+        </p:txBody>
+      </p:sp>
+      <p:sp>
+        <p:nvSpPr>
+          <p:cNvPr id="9" name="Rounded Rectangle 8"/>
+          <p:cNvSpPr/>
+          <p:nvPr/>
+        </p:nvSpPr>
+        <p:spPr>
+          <a:xfrm>
+            <a:off x="6217920" y="1737360"/>
+            <a:ext cx="5303520" cy="4114800"/>
+          </a:xfrm>
+          <a:prstGeom prst="roundRect">
+            <a:avLst/>
+          </a:prstGeom>
+          <a:solidFill>
+            <a:srgbClr val="141A2A"/>
+          </a:solidFill>
+          <a:ln w="19050">
+            <a:solidFill>
+              <a:srgbClr val="14B8A6"/>
+            </a:solidFill>
+          </a:ln>
+        </p:spPr>
+        <p:style>
+          <a:lnRef idx="1">
+            <a:schemeClr val="accent1"/>
+          </a:lnRef>
+          <a:fillRef idx="3">
+            <a:schemeClr val="accent1"/>
+          </a:fillRef>
+          <a:effectRef idx="2">
+            <a:schemeClr val="accent1"/>
+          </a:effectRef>
+          <a:fontRef idx="minor">
+            <a:schemeClr val="lt1"/>
+          </a:fontRef>
+        </p:style>
+        <p:txBody>
+          <a:bodyPr rtlCol="0" anchor="ctr"/>
+          <a:lstStyle/>
+          <a:p>
+            <a:pPr algn="ctr"/>
+          </a:p>
+        </p:txBody>
+      </p:sp>
+      <p:sp>
+        <p:nvSpPr>
+          <p:cNvPr id="10" name="TextBox 9"/>
+          <p:cNvSpPr txBox="1"/>
+          <p:nvPr/>
+        </p:nvSpPr>
+        <p:spPr>
+          <a:xfrm>
+            <a:off x="6492240" y="1920240"/>
+            <a:ext cx="4754880" cy="457200"/>
           </a:xfrm>
           <a:prstGeom prst="rect">
             <a:avLst/>
@@ -50532,6 +50696,72 @@
           <a:lstStyle/>
           <a:p>
             <a:pPr algn="ctr">
+              <a:defRPr sz="3000"/>
+            </a:pPr>
+            <a:r>
+              <a:t>🔧</a:t>
+            </a:r>
+          </a:p>
+        </p:txBody>
+      </p:sp>
+      <p:sp>
+        <p:nvSpPr>
+          <p:cNvPr id="11" name="TextBox 10"/>
+          <p:cNvSpPr txBox="1"/>
+          <p:nvPr/>
+        </p:nvSpPr>
+        <p:spPr>
+          <a:xfrm>
+            <a:off x="6492240" y="2377440"/>
+            <a:ext cx="4754880" cy="457200"/>
+          </a:xfrm>
+          <a:prstGeom prst="rect">
+            <a:avLst/>
+          </a:prstGeom>
+          <a:noFill/>
+        </p:spPr>
+        <p:txBody>
+          <a:bodyPr wrap="none">
+            <a:spAutoFit/>
+          </a:bodyPr>
+          <a:lstStyle/>
+          <a:p>
+            <a:pPr algn="ctr">
+              <a:defRPr sz="2200" b="1">
+                <a:solidFill>
+                  <a:srgbClr val="FFFFFF"/>
+                </a:solidFill>
+              </a:defRPr>
+            </a:pPr>
+            <a:r>
+              <a:t>Model Context Protocol (MCP)</a:t>
+            </a:r>
+          </a:p>
+        </p:txBody>
+      </p:sp>
+      <p:sp>
+        <p:nvSpPr>
+          <p:cNvPr id="12" name="TextBox 11"/>
+          <p:cNvSpPr txBox="1"/>
+          <p:nvPr/>
+        </p:nvSpPr>
+        <p:spPr>
+          <a:xfrm>
+            <a:off x="6492240" y="2834640"/>
+            <a:ext cx="4754880" cy="457200"/>
+          </a:xfrm>
+          <a:prstGeom prst="rect">
+            <a:avLst/>
+          </a:prstGeom>
+          <a:noFill/>
+        </p:spPr>
+        <p:txBody>
+          <a:bodyPr wrap="none">
+            <a:spAutoFit/>
+          </a:bodyPr>
+          <a:lstStyle/>
+          <a:p>
+            <a:pPr algn="ctr">
               <a:defRPr sz="1500" i="1">
                 <a:solidFill>
                   <a:srgbClr val="14B8A6"/>
@@ -50539,7 +50769,71 @@
               </a:defRPr>
             </a:pPr>
             <a:r>
-              <a:t>Free Chrome extension  •  Install from Chrome Web Store  •  Works with your existing Claude account</a:t>
+              <a:t>Your IT team can build</a:t>
+            </a:r>
+            <a:br/>
+            <a:r>
+              <a:t>custom connectors:</a:t>
+            </a:r>
+          </a:p>
+        </p:txBody>
+      </p:sp>
+      <p:sp>
+        <p:nvSpPr>
+          <p:cNvPr id="13" name="TextBox 12"/>
+          <p:cNvSpPr txBox="1"/>
+          <p:nvPr/>
+        </p:nvSpPr>
+        <p:spPr>
+          <a:xfrm>
+            <a:off x="6492240" y="3383280"/>
+            <a:ext cx="4754880" cy="2286000"/>
+          </a:xfrm>
+          <a:prstGeom prst="rect">
+            <a:avLst/>
+          </a:prstGeom>
+          <a:noFill/>
+        </p:spPr>
+        <p:txBody>
+          <a:bodyPr wrap="square">
+            <a:spAutoFit/>
+          </a:bodyPr>
+          <a:lstStyle/>
+          <a:p>
+            <a:pPr algn="ctr">
+              <a:defRPr sz="1500">
+                <a:solidFill>
+                  <a:srgbClr val="D1D5DB"/>
+                </a:solidFill>
+              </a:defRPr>
+            </a:pPr>
+            <a:r>
+              <a:t>Connect to internal databases</a:t>
+            </a:r>
+            <a:br/>
+            <a:r>
+              <a:t>Query proprietary APIs</a:t>
+            </a:r>
+            <a:br/>
+            <a:r>
+              <a:t>Access company knowledge bases</a:t>
+            </a:r>
+            <a:br/>
+            <a:r>
+              <a:t>Integrate with any system</a:t>
+            </a:r>
+            <a:br/>
+            <a:br/>
+            <a:r>
+              <a:t>Open standard by Anthropic</a:t>
+            </a:r>
+            <a:br/>
+            <a:r>
+              <a:t>Growing ecosystem of connectors</a:t>
+            </a:r>
+            <a:br/>
+            <a:r>
+              <a:t>Technical deep-dive in Day 3</a:t>
             </a:r>
           </a:p>
         </p:txBody>

--- a/slides/Day1_Claude_for_Business.pptx
+++ b/slides/Day1_Claude_for_Business.pptx
@@ -2857,6 +2857,45 @@
         </p:nvSpPr>
         <p:spPr/>
       </p:sp>
+      <p:sp>
+        <p:nvSpPr>
+          <p:cNvPr id="3" name="Notes Placeholder 2"/>
+          <p:cNvSpPr>
+            <a:spLocks noGrp="1"/>
+          </p:cNvSpPr>
+          <p:nvPr>
+            <p:ph type="body" idx="1"/>
+          </p:nvPr>
+        </p:nvSpPr>
+        <p:spPr/>
+        <p:txBody>
+          <a:bodyPr/>
+          <a:lstStyle/>
+          <a:p>
+            <a:r>
+              <a:t>[DURATION: 1 minute — then 45 minutes lab time]</a:t>
+            </a:r>
+          </a:p>
+          <a:p/>
+          <a:p>
+            <a:r>
+              <a:t>Alright, it's time for our first hands-on lab! This is a 45-minute exercise with four parts. You'll find the full instructions in your lab handout.</a:t>
+            </a:r>
+          </a:p>
+          <a:p/>
+          <a:p>
+            <a:r>
+              <a:t>Quick overview: Part 1 has you write a basic prompt and then improve it using the techniques we just covered. Part 2 is about role-based prompting — you'll give Claude a specific persona. Part 3 focuses on few-shot examples. And Part 4 is a mini-challenge where you'll tackle a real business scenario.</a:t>
+            </a:r>
+          </a:p>
+          <a:p/>
+          <a:p>
+            <a:r>
+              <a:t>Work at your own pace. I'll be walking around to help. If you finish early, try the bonus challenges at the end. Any questions before we start? Great — open Claude.ai and let's go.</a:t>
+            </a:r>
+          </a:p>
+        </p:txBody>
+      </p:sp>
     </p:spTree>
   </p:cSld>
   <p:clrMapOvr>
@@ -4040,6 +4079,58 @@
             <a:r>
               <a:rPr dirty="0"/>
               <a:t>Pro tip: spend five minutes in Settings before you do anything else with Claude. Most people never look at these controls and miss features that would save them hours.</a:t>
+            </a:r>
+          </a:p>
+        </p:txBody>
+      </p:sp>
+    </p:spTree>
+  </p:cSld>
+  <p:clrMapOvr>
+    <a:masterClrMapping/>
+  </p:clrMapOvr>
+</p:notes>
+</file>
+
+<file path=ppt/notesSlides/notesSlide29.xml><?xml version="1.0" encoding="utf-8"?>
+<p:notes xmlns:a="http://schemas.openxmlformats.org/drawingml/2006/main" xmlns:p="http://schemas.openxmlformats.org/presentationml/2006/main" xmlns:r="http://schemas.openxmlformats.org/officeDocument/2006/relationships">
+  <p:cSld>
+    <p:spTree>
+      <p:nvGrpSpPr>
+        <p:cNvPr id="1" name=""/>
+        <p:cNvGrpSpPr/>
+        <p:nvPr/>
+      </p:nvGrpSpPr>
+      <p:grpSpPr>
+        <a:xfrm>
+          <a:off x="0" y="0"/>
+          <a:ext cx="0" cy="0"/>
+          <a:chOff x="0" y="0"/>
+          <a:chExt cx="0" cy="0"/>
+        </a:xfrm>
+      </p:grpSpPr>
+      <p:sp>
+        <p:nvSpPr>
+          <p:cNvPr id="3" name="Notes Placeholder 2"/>
+          <p:cNvSpPr>
+            <a:spLocks noGrp="1"/>
+          </p:cNvSpPr>
+          <p:nvPr>
+            <p:ph type="body" idx="1"/>
+          </p:nvPr>
+        </p:nvSpPr>
+        <p:spPr/>
+        <p:txBody>
+          <a:bodyPr/>
+          <a:lstStyle/>
+          <a:p>
+            <a:r>
+              <a:t>[DURATION: 30 seconds]</a:t>
+            </a:r>
+          </a:p>
+          <a:p/>
+          <a:p>
+            <a:r>
+              <a:t>Alright everyone, we're diving into our first section — Claude Interface and Prompt Engineering. This is really the foundation for everything else we'll cover today. We'll start by getting comfortable with the Claude.ai interface, then move into the art and science of writing effective prompts. By the end of this section, you'll have practical techniques you can use immediately. Let's get started.</a:t>
             </a:r>
           </a:p>
         </p:txBody>
@@ -8363,6 +8454,63 @@
           <a:chExt cx="0" cy="0"/>
         </a:xfrm>
       </p:grpSpPr>
+      <p:sp>
+        <p:nvSpPr>
+          <p:cNvPr id="3" name="Notes Placeholder 2"/>
+          <p:cNvSpPr>
+            <a:spLocks noGrp="1"/>
+          </p:cNvSpPr>
+          <p:nvPr>
+            <p:ph type="body" idx="1"/>
+          </p:nvPr>
+        </p:nvSpPr>
+        <p:spPr/>
+        <p:txBody>
+          <a:bodyPr/>
+          <a:lstStyle/>
+          <a:p>
+            <a:r>
+              <a:t>[DURATION: 5 minutes]</a:t>
+            </a:r>
+          </a:p>
+          <a:p/>
+          <a:p>
+            <a:r>
+              <a:t>Now we're getting to what I consider the most important skill you'll learn today — prompt engineering. And I know that term sounds technical, but really it's just the art of communicating clearly with AI.</a:t>
+            </a:r>
+          </a:p>
+          <a:p/>
+          <a:p>
+            <a:r>
+              <a:t>Here's why this matters so much: the difference between a mediocre AI response and an exceptional one almost always comes down to how you asked the question. I've seen people dismiss Claude as "not that useful" simply because they were giving it vague, one-line prompts. Then when we restructure their prompt with a bit more context and specificity, they're blown away by the results.</a:t>
+            </a:r>
+          </a:p>
+          <a:p/>
+          <a:p>
+            <a:r>
+              <a:t>Think of it this way — if you hired a brilliant new employee and said "write me a report," you'd get something generic. But if you said "write a two-page executive summary of our Q4 sales performance, focusing on the three regions that exceeded targets, written for our board of directors who are non-technical," you'd get something much more useful. Same principle applies to Claude.</a:t>
+            </a:r>
+          </a:p>
+          <a:p/>
+          <a:p>
+            <a:r>
+              <a:t>Research from Anthropic shows that well-structured prompts can improve output quality by 40 to 60 percent compared to basic prompts. That's not a small difference — that's the difference between AI being a novelty and AI being a genuine productivity multiplier.</a:t>
+            </a:r>
+          </a:p>
+          <a:p/>
+          <a:p>
+            <a:r>
+              <a:t>Over the next several slides, we're going to cover the core techniques: giving Claude a role, providing context, being specific about format and length, using examples, and iterating on your prompts. These aren't abstract concepts — each one comes with concrete templates you can adapt for your own work.</a:t>
+            </a:r>
+          </a:p>
+          <a:p/>
+          <a:p>
+            <a:r>
+              <a:t>The best part? These skills transfer across every AI tool you'll ever use. Whether it's Claude, ChatGPT, Gemini, or whatever comes next — good prompting is good prompting. So let's dig into the specifics.</a:t>
+            </a:r>
+          </a:p>
+        </p:txBody>
+      </p:sp>
     </p:spTree>
   </p:cSld>
   <p:clrMapOvr>
@@ -9169,6 +9317,198 @@
 </p:notes>
 </file>
 
+<file path=ppt/notesSlides/notesSlide67.xml><?xml version="1.0" encoding="utf-8"?>
+<p:notes xmlns:a="http://schemas.openxmlformats.org/drawingml/2006/main" xmlns:p="http://schemas.openxmlformats.org/presentationml/2006/main" xmlns:r="http://schemas.openxmlformats.org/officeDocument/2006/relationships">
+  <p:cSld>
+    <p:spTree>
+      <p:nvGrpSpPr>
+        <p:cNvPr id="1" name=""/>
+        <p:cNvGrpSpPr/>
+        <p:nvPr/>
+      </p:nvGrpSpPr>
+      <p:grpSpPr>
+        <a:xfrm>
+          <a:off x="0" y="0"/>
+          <a:ext cx="0" cy="0"/>
+          <a:chOff x="0" y="0"/>
+          <a:chExt cx="0" cy="0"/>
+        </a:xfrm>
+      </p:grpSpPr>
+      <p:sp>
+        <p:nvSpPr>
+          <p:cNvPr id="3" name="Notes Placeholder 2"/>
+          <p:cNvSpPr>
+            <a:spLocks noGrp="1"/>
+          </p:cNvSpPr>
+          <p:nvPr>
+            <p:ph type="body" idx="1"/>
+          </p:nvPr>
+        </p:nvSpPr>
+        <p:spPr/>
+        <p:txBody>
+          <a:bodyPr/>
+          <a:lstStyle/>
+          <a:p>
+            <a:r>
+              <a:t>[DURATION: 5 minutes]</a:t>
+            </a:r>
+          </a:p>
+          <a:p/>
+          <a:p>
+            <a:r>
+              <a:t>Let's take a tour of the Claude.ai interface. When you first log in, you'll see a clean, conversational layout. On the left side, you have your conversation sidebar — this is where all your past chats live, organized by recency. You can search through them, pin important ones, and organize them into projects.</a:t>
+            </a:r>
+          </a:p>
+          <a:p/>
+          <a:p>
+            <a:r>
+              <a:t>In the center is your main chat area. This is where the magic happens. You type your prompt at the bottom, and Claude's responses appear above. Notice the model selector in the top area — we'll talk more about model choices in Section 2, but for now just know you can switch between different Claude models depending on your task.</a:t>
+            </a:r>
+          </a:p>
+          <a:p/>
+          <a:p>
+            <a:r>
+              <a:t>At the top right, you'll see your account settings and the ability to start a new conversation. One thing I want to emphasize — each conversation in Claude maintains its full context. That means Claude remembers everything you've discussed within that conversation, which is incredibly powerful for iterative work.</a:t>
+            </a:r>
+          </a:p>
+          <a:p/>
+          <a:p>
+            <a:r>
+              <a:t>You'll also notice the artifacts panel on the right side. When Claude generates code, documents, or other structured content, it appears in this separate panel where you can view, copy, and download it. Think of it as Claude's workspace — we'll explore this extensively in Section 4.</a:t>
+            </a:r>
+          </a:p>
+          <a:p/>
+          <a:p>
+            <a:r>
+              <a:t>A few practical tips: Use the slash command menu by typing "/" in the chat box to access quick actions. You can drag and drop files directly into the chat — PDFs, images, spreadsheets, code files. Claude can process files up to 30 megabytes, and it handles most common business formats.</a:t>
+            </a:r>
+          </a:p>
+          <a:p/>
+          <a:p>
+            <a:r>
+              <a:t>For those of you on the Teams or Enterprise plan, you'll also see shared projects and team spaces in your sidebar. This is how organizations build shared prompt libraries and collaborative workflows.</a:t>
+            </a:r>
+          </a:p>
+          <a:p/>
+          <a:p>
+            <a:r>
+              <a:t>Let's move on and talk about the single most important skill for getting value from Claude — prompt engineering.</a:t>
+            </a:r>
+          </a:p>
+        </p:txBody>
+      </p:sp>
+    </p:spTree>
+  </p:cSld>
+  <p:clrMapOvr>
+    <a:masterClrMapping/>
+  </p:clrMapOvr>
+</p:notes>
+</file>
+
+<file path=ppt/notesSlides/notesSlide68.xml><?xml version="1.0" encoding="utf-8"?>
+<p:notes xmlns:a="http://schemas.openxmlformats.org/drawingml/2006/main" xmlns:p="http://schemas.openxmlformats.org/presentationml/2006/main" xmlns:r="http://schemas.openxmlformats.org/officeDocument/2006/relationships">
+  <p:cSld>
+    <p:spTree>
+      <p:nvGrpSpPr>
+        <p:cNvPr id="1" name=""/>
+        <p:cNvGrpSpPr/>
+        <p:nvPr/>
+      </p:nvGrpSpPr>
+      <p:grpSpPr>
+        <a:xfrm>
+          <a:off x="0" y="0"/>
+          <a:ext cx="0" cy="0"/>
+          <a:chOff x="0" y="0"/>
+          <a:chExt cx="0" cy="0"/>
+        </a:xfrm>
+      </p:grpSpPr>
+      <p:sp>
+        <p:nvSpPr>
+          <p:cNvPr id="3" name="Notes Placeholder 2"/>
+          <p:cNvSpPr>
+            <a:spLocks noGrp="1"/>
+          </p:cNvSpPr>
+          <p:nvPr>
+            <p:ph type="body" idx="1"/>
+          </p:nvPr>
+        </p:nvSpPr>
+        <p:spPr/>
+        <p:txBody>
+          <a:bodyPr/>
+          <a:lstStyle/>
+          <a:p>
+            <a:r>
+              <a:t>[DURATION: 10 minutes]</a:t>
+            </a:r>
+          </a:p>
+          <a:p/>
+          <a:p>
+            <a:r>
+              <a:t>Good work on that lab, everyone! Let's take a 10-minute break. Stretch, grab coffee, check your phones. We'll reconvene and dive into Section 2 — Models, Settings, and Projects.</a:t>
+            </a:r>
+          </a:p>
+        </p:txBody>
+      </p:sp>
+    </p:spTree>
+  </p:cSld>
+  <p:clrMapOvr>
+    <a:masterClrMapping/>
+  </p:clrMapOvr>
+</p:notes>
+</file>
+
+<file path=ppt/notesSlides/notesSlide69.xml><?xml version="1.0" encoding="utf-8"?>
+<p:notes xmlns:a="http://schemas.openxmlformats.org/drawingml/2006/main" xmlns:p="http://schemas.openxmlformats.org/presentationml/2006/main" xmlns:r="http://schemas.openxmlformats.org/officeDocument/2006/relationships">
+  <p:cSld>
+    <p:spTree>
+      <p:nvGrpSpPr>
+        <p:cNvPr id="1" name=""/>
+        <p:cNvGrpSpPr/>
+        <p:nvPr/>
+      </p:nvGrpSpPr>
+      <p:grpSpPr>
+        <a:xfrm>
+          <a:off x="0" y="0"/>
+          <a:ext cx="0" cy="0"/>
+          <a:chOff x="0" y="0"/>
+          <a:chExt cx="0" cy="0"/>
+        </a:xfrm>
+      </p:grpSpPr>
+      <p:sp>
+        <p:nvSpPr>
+          <p:cNvPr id="3" name="Notes Placeholder 2"/>
+          <p:cNvSpPr>
+            <a:spLocks noGrp="1"/>
+          </p:cNvSpPr>
+          <p:nvPr>
+            <p:ph type="body" idx="1"/>
+          </p:nvPr>
+        </p:nvSpPr>
+        <p:spPr/>
+        <p:txBody>
+          <a:bodyPr/>
+          <a:lstStyle/>
+          <a:p>
+            <a:r>
+              <a:t>[DURATION: 30 seconds]</a:t>
+            </a:r>
+          </a:p>
+          <a:p/>
+          <a:p>
+            <a:r>
+              <a:t>Welcome back! In this next section, we're going to look under the hood a bit. We'll cover the different Claude models and when to use each one, how to configure your settings for maximum productivity, and how to use Projects to organize your work. This is where Claude goes from being a chat tool to being your personalized AI workspace.</a:t>
+            </a:r>
+          </a:p>
+        </p:txBody>
+      </p:sp>
+    </p:spTree>
+  </p:cSld>
+  <p:clrMapOvr>
+    <a:masterClrMapping/>
+  </p:clrMapOvr>
+</p:notes>
+</file>
+
 <file path=ppt/notesSlides/notesSlide7.xml><?xml version="1.0" encoding="utf-8"?>
 <p:notes xmlns:a="http://schemas.openxmlformats.org/drawingml/2006/main" xmlns:r="http://schemas.openxmlformats.org/officeDocument/2006/relationships" xmlns:p="http://schemas.openxmlformats.org/presentationml/2006/main">
   <p:cSld>
@@ -9302,6 +9642,742 @@
           </p:nvPr>
         </p:nvSpPr>
         <p:spPr/>
+      </p:sp>
+    </p:spTree>
+  </p:cSld>
+  <p:clrMapOvr>
+    <a:masterClrMapping/>
+  </p:clrMapOvr>
+</p:notes>
+</file>
+
+<file path=ppt/notesSlides/notesSlide70.xml><?xml version="1.0" encoding="utf-8"?>
+<p:notes xmlns:a="http://schemas.openxmlformats.org/drawingml/2006/main" xmlns:p="http://schemas.openxmlformats.org/presentationml/2006/main" xmlns:r="http://schemas.openxmlformats.org/officeDocument/2006/relationships">
+  <p:cSld>
+    <p:spTree>
+      <p:nvGrpSpPr>
+        <p:cNvPr id="1" name=""/>
+        <p:cNvGrpSpPr/>
+        <p:nvPr/>
+      </p:nvGrpSpPr>
+      <p:grpSpPr>
+        <a:xfrm>
+          <a:off x="0" y="0"/>
+          <a:ext cx="0" cy="0"/>
+          <a:chOff x="0" y="0"/>
+          <a:chExt cx="0" cy="0"/>
+        </a:xfrm>
+      </p:grpSpPr>
+      <p:sp>
+        <p:nvSpPr>
+          <p:cNvPr id="3" name="Notes Placeholder 2"/>
+          <p:cNvSpPr>
+            <a:spLocks noGrp="1"/>
+          </p:cNvSpPr>
+          <p:nvPr>
+            <p:ph type="body" idx="1"/>
+          </p:nvPr>
+        </p:nvSpPr>
+        <p:spPr/>
+        <p:txBody>
+          <a:bodyPr/>
+          <a:lstStyle/>
+          <a:p>
+            <a:r>
+              <a:t>[DURATION: 5 minutes]</a:t>
+            </a:r>
+          </a:p>
+          <a:p/>
+          <a:p>
+            <a:r>
+              <a:t>Let's walk through setting up Claude for the first time — or more likely, optimizing your existing setup, since most of you probably already have accounts.</a:t>
+            </a:r>
+          </a:p>
+          <a:p/>
+          <a:p>
+            <a:r>
+              <a:t>First, navigate to your Settings. You'll find this by clicking your profile icon in the bottom-left corner. The settings panel has several tabs, and we're going to hit the important ones.</a:t>
+            </a:r>
+          </a:p>
+          <a:p/>
+          <a:p>
+            <a:r>
+              <a:t>Start with your Profile. Add your name and a profile picture if you want — this helps when you're on a Teams plan and collaborating with colleagues. Claude will also use your name in responses, which makes the interaction feel more natural.</a:t>
+            </a:r>
+          </a:p>
+          <a:p/>
+          <a:p>
+            <a:r>
+              <a:t>Next, check your Plan tab. You want to confirm you're on the right tier for your needs. Free users get limited messages per day with Sonnet. Pro users at twenty dollars per month get priority access, more messages, and access to all models including Opus. Teams plans add collaboration features and admin controls.</a:t>
+            </a:r>
+          </a:p>
+          <a:p/>
+          <a:p>
+            <a:r>
+              <a:t>Now here's the really important one — the Preferences tab. This is where you tell Claude about yourself, your work, and how you want it to communicate. Think of it as Claude's onboarding document about you. We're going to spend the next slide going deep on this because it's a game-changer.</a:t>
+            </a:r>
+          </a:p>
+          <a:p/>
+          <a:p>
+            <a:r>
+              <a:t>Under the Privacy tab, review your data settings. On the Pro plan, you can opt out of your conversations being used for model training. For enterprise users, this is off by default — your data is never used for training.</a:t>
+            </a:r>
+          </a:p>
+          <a:p/>
+          <a:p>
+            <a:r>
+              <a:t>Finally, check your Feature toggles. Make sure artifacts, analysis tool, and web search are enabled — we'll use all of these today. If you're on a plan that supports it, enable Claude's memory feature too.</a:t>
+            </a:r>
+          </a:p>
+          <a:p/>
+          <a:p>
+            <a:r>
+              <a:t>Take a minute to verify your settings match what's on screen. Then let's talk about writing great preferences.</a:t>
+            </a:r>
+          </a:p>
+        </p:txBody>
+      </p:sp>
+    </p:spTree>
+  </p:cSld>
+  <p:clrMapOvr>
+    <a:masterClrMapping/>
+  </p:clrMapOvr>
+</p:notes>
+</file>
+
+<file path=ppt/notesSlides/notesSlide71.xml><?xml version="1.0" encoding="utf-8"?>
+<p:notes xmlns:a="http://schemas.openxmlformats.org/drawingml/2006/main" xmlns:p="http://schemas.openxmlformats.org/presentationml/2006/main" xmlns:r="http://schemas.openxmlformats.org/officeDocument/2006/relationships">
+  <p:cSld>
+    <p:spTree>
+      <p:nvGrpSpPr>
+        <p:cNvPr id="1" name=""/>
+        <p:cNvGrpSpPr/>
+        <p:nvPr/>
+      </p:nvGrpSpPr>
+      <p:grpSpPr>
+        <a:xfrm>
+          <a:off x="0" y="0"/>
+          <a:ext cx="0" cy="0"/>
+          <a:chOff x="0" y="0"/>
+          <a:chExt cx="0" cy="0"/>
+        </a:xfrm>
+      </p:grpSpPr>
+      <p:sp>
+        <p:nvSpPr>
+          <p:cNvPr id="3" name="Notes Placeholder 2"/>
+          <p:cNvSpPr>
+            <a:spLocks noGrp="1"/>
+          </p:cNvSpPr>
+          <p:nvPr>
+            <p:ph type="body" idx="1"/>
+          </p:nvPr>
+        </p:nvSpPr>
+        <p:spPr/>
+        <p:txBody>
+          <a:bodyPr/>
+          <a:lstStyle/>
+          <a:p>
+            <a:r>
+              <a:t>[DURATION: 5 minutes]</a:t>
+            </a:r>
+          </a:p>
+          <a:p/>
+          <a:p>
+            <a:r>
+              <a:t>Your personal preferences are honestly one of the most underutilized features in Claude. When done well, they eliminate the need to repeat context in every single conversation. Let me show you what good preferences look like.</a:t>
+            </a:r>
+          </a:p>
+          <a:p/>
+          <a:p>
+            <a:r>
+              <a:t>A strong preferences document has three parts. First, who you are — your role, industry, and expertise level. Something like "I'm a marketing director at a mid-size B2B SaaS company. I have 10 years of experience but I'm not technical — explain code concepts in plain English."</a:t>
+            </a:r>
+          </a:p>
+          <a:p/>
+          <a:p>
+            <a:r>
+              <a:t>Second, how you want Claude to communicate. Be specific here. "Use concise, scannable formats with bullet points. Avoid corporate jargon. When I ask for a draft, give me something I can use with minimal editing — not a template full of brackets." The more specific you are, the less time you spend editing Claude's output.</a:t>
+            </a:r>
+          </a:p>
+          <a:p/>
+          <a:p>
+            <a:r>
+              <a:t>Third, context about your work. "Our key products are X, Y, and Z. Our target audience is enterprise IT buyers. We use HubSpot for marketing automation and Salesforce for CRM." This kind of context means Claude can give you relevant, specific answers instead of generic ones.</a:t>
+            </a:r>
+          </a:p>
+          <a:p/>
+          <a:p>
+            <a:r>
+              <a:t>Here's a real example that made a huge difference for one of my clients. Before preferences, they'd ask Claude to "write a blog post about cloud security" and get a generic 800-word piece. After adding detailed preferences about their company, audience, tone, and content standards, the same simple prompt produced a draft that was 90 percent ready to publish.</a:t>
+            </a:r>
+          </a:p>
+          <a:p/>
+          <a:p>
+            <a:r>
+              <a:t>A few tips: Keep it under 500 words — Claude reads the whole thing every conversation, so don't write a novel. Update it quarterly as your role or priorities change. And don't include sensitive data like passwords or API keys.</a:t>
+            </a:r>
+          </a:p>
+          <a:p/>
+          <a:p>
+            <a:r>
+              <a:t>Let's move on to a brand-new feature that takes personalization even further — Claude's Memory.</a:t>
+            </a:r>
+          </a:p>
+        </p:txBody>
+      </p:sp>
+    </p:spTree>
+  </p:cSld>
+  <p:clrMapOvr>
+    <a:masterClrMapping/>
+  </p:clrMapOvr>
+</p:notes>
+</file>
+
+<file path=ppt/notesSlides/notesSlide72.xml><?xml version="1.0" encoding="utf-8"?>
+<p:notes xmlns:a="http://schemas.openxmlformats.org/drawingml/2006/main" xmlns:p="http://schemas.openxmlformats.org/presentationml/2006/main" xmlns:r="http://schemas.openxmlformats.org/officeDocument/2006/relationships">
+  <p:cSld>
+    <p:spTree>
+      <p:nvGrpSpPr>
+        <p:cNvPr id="1" name=""/>
+        <p:cNvGrpSpPr/>
+        <p:nvPr/>
+      </p:nvGrpSpPr>
+      <p:grpSpPr>
+        <a:xfrm>
+          <a:off x="0" y="0"/>
+          <a:ext cx="0" cy="0"/>
+          <a:chOff x="0" y="0"/>
+          <a:chExt cx="0" cy="0"/>
+        </a:xfrm>
+      </p:grpSpPr>
+      <p:sp>
+        <p:nvSpPr>
+          <p:cNvPr id="3" name="Notes Placeholder 2"/>
+          <p:cNvSpPr>
+            <a:spLocks noGrp="1"/>
+          </p:cNvSpPr>
+          <p:nvPr>
+            <p:ph type="body" idx="1"/>
+          </p:nvPr>
+        </p:nvSpPr>
+        <p:spPr/>
+        <p:txBody>
+          <a:bodyPr/>
+          <a:lstStyle/>
+          <a:p>
+            <a:r>
+              <a:t>[DURATION: 5 minutes]</a:t>
+            </a:r>
+          </a:p>
+          <a:p/>
+          <a:p>
+            <a:r>
+              <a:t>This is one of the most exciting recent additions to Claude — Memory. This feature, which rolled out to Pro and Teams users, allows Claude to remember information across conversations. This is a fundamental shift from how AI assistants have traditionally worked.</a:t>
+            </a:r>
+          </a:p>
+          <a:p/>
+          <a:p>
+            <a:r>
+              <a:t>Here's how it works. As you chat with Claude, it can save key facts, preferences, and context to its memory. You can also explicitly tell Claude to "remember that our fiscal year starts in April" or "remember I prefer Python over JavaScript." These memories persist across all your future conversations.</a:t>
+            </a:r>
+          </a:p>
+          <a:p/>
+          <a:p>
+            <a:r>
+              <a:t>There are three ways to interact with Memory. First, you can search your past chats — Claude indexes your conversation history so you can find that analysis you did three weeks ago. Second, you can generate memories — Claude can proactively suggest things worth remembering based on your conversations. Third, you can view and edit your memories directly in Settings under the Memory tab.</a:t>
+            </a:r>
+          </a:p>
+          <a:p/>
+          <a:p>
+            <a:r>
+              <a:t>This is particularly powerful for ongoing projects. Imagine you're working on a quarterly business review over several days. With Memory, Claude remembers the data sources you're using, the format your CEO prefers, and the key metrics you've already analyzed. You don't have to re-explain any of that in each new conversation.</a:t>
+            </a:r>
+          </a:p>
+          <a:p/>
+          <a:p>
+            <a:r>
+              <a:t>A few important things to know. Memory is user-specific — your memories are yours alone, even on a Teams plan. You have full control — you can view, edit, or delete any memory at any time. And if you're having a sensitive conversation you don't want remembered, you can use Incognito mode, which we'll cover next.</a:t>
+            </a:r>
+          </a:p>
+          <a:p/>
+          <a:p>
+            <a:r>
+              <a:t>For business users, think of Memory as Claude building an increasingly accurate mental model of you and your work. The more you use it, the better it gets. After a few weeks of regular use, many users report that Claude feels less like a tool and more like a colleague who actually knows your business.</a:t>
+            </a:r>
+          </a:p>
+          <a:p/>
+          <a:p>
+            <a:r>
+              <a:t>Let's look at the full set of capability and privacy controls available to you.</a:t>
+            </a:r>
+          </a:p>
+        </p:txBody>
+      </p:sp>
+    </p:spTree>
+  </p:cSld>
+  <p:clrMapOvr>
+    <a:masterClrMapping/>
+  </p:clrMapOvr>
+</p:notes>
+</file>
+
+<file path=ppt/notesSlides/notesSlide73.xml><?xml version="1.0" encoding="utf-8"?>
+<p:notes xmlns:a="http://schemas.openxmlformats.org/drawingml/2006/main" xmlns:p="http://schemas.openxmlformats.org/presentationml/2006/main" xmlns:r="http://schemas.openxmlformats.org/officeDocument/2006/relationships">
+  <p:cSld>
+    <p:spTree>
+      <p:nvGrpSpPr>
+        <p:cNvPr id="1" name=""/>
+        <p:cNvGrpSpPr/>
+        <p:nvPr/>
+      </p:nvGrpSpPr>
+      <p:grpSpPr>
+        <a:xfrm>
+          <a:off x="0" y="0"/>
+          <a:ext cx="0" cy="0"/>
+          <a:chOff x="0" y="0"/>
+          <a:chExt cx="0" cy="0"/>
+        </a:xfrm>
+      </p:grpSpPr>
+      <p:sp>
+        <p:nvSpPr>
+          <p:cNvPr id="3" name="Notes Placeholder 2"/>
+          <p:cNvSpPr>
+            <a:spLocks noGrp="1"/>
+          </p:cNvSpPr>
+          <p:nvPr>
+            <p:ph type="body" idx="1"/>
+          </p:nvPr>
+        </p:nvSpPr>
+        <p:spPr/>
+        <p:txBody>
+          <a:bodyPr/>
+          <a:lstStyle/>
+          <a:p>
+            <a:r>
+              <a:t>[DURATION: 5 minutes]</a:t>
+            </a:r>
+          </a:p>
+          <a:p/>
+          <a:p>
+            <a:r>
+              <a:t>Let's do a quick tour of all the capability toggles and privacy controls you have access to. This is important because Claude's feature set is modular — you control what's on and what's off.</a:t>
+            </a:r>
+          </a:p>
+          <a:p/>
+          <a:p>
+            <a:r>
+              <a:t>Under Feature Controls, you'll find toggles for Artifacts — that's the side panel where Claude renders documents, code, and visualizations. Make sure this is on. Analysis Tool lets Claude write and execute Python code to analyze data, create charts, and do calculations. Definitely keep this on — we'll use it heavily in Section 3. Web Search allows Claude to search the internet for current information. This is invaluable for research tasks, competitive analysis, and anything where you need up-to-date data.</a:t>
+            </a:r>
+          </a:p>
+          <a:p/>
+          <a:p>
+            <a:r>
+              <a:t>Memory, which we just discussed, can be toggled on or off globally. When it's on, Claude saves context across conversations. When it's off, every conversation starts fresh with no memory of previous chats.</a:t>
+            </a:r>
+          </a:p>
+          <a:p/>
+          <a:p>
+            <a:r>
+              <a:t>Now for privacy controls — this is where it gets really important for business users. Incognito Chats allow you to have conversations that are not saved to your history and not used for any purpose beyond that session. Think of it as private browsing for AI. Use this for sensitive HR discussions, confidential financial analysis, or anything you don't want persisted.</a:t>
+            </a:r>
+          </a:p>
+          <a:p/>
+          <a:p>
+            <a:r>
+              <a:t>Training Data Opt-Out is available on Pro plans and above. When enabled, your conversations are never used to train or improve Anthropic's models. For Enterprise and Teams plans, this is the default — your data is completely siloed.</a:t>
+            </a:r>
+          </a:p>
+          <a:p/>
+          <a:p>
+            <a:r>
+              <a:t>I want to emphasize something — Anthropic has been a leader in AI safety and privacy. Unlike some competitors, they've built these controls in from day one, not as an afterthought. For regulated industries — healthcare, finance, legal — these controls are what make Claude viable for professional use.</a:t>
+            </a:r>
+          </a:p>
+          <a:p/>
+          <a:p>
+            <a:r>
+              <a:t>Take a moment to review your settings and make sure everything is configured the way you want. In our next lab, you'll formalize all of these choices.</a:t>
+            </a:r>
+          </a:p>
+        </p:txBody>
+      </p:sp>
+    </p:spTree>
+  </p:cSld>
+  <p:clrMapOvr>
+    <a:masterClrMapping/>
+  </p:clrMapOvr>
+</p:notes>
+</file>
+
+<file path=ppt/notesSlides/notesSlide74.xml><?xml version="1.0" encoding="utf-8"?>
+<p:notes xmlns:a="http://schemas.openxmlformats.org/drawingml/2006/main" xmlns:p="http://schemas.openxmlformats.org/presentationml/2006/main" xmlns:r="http://schemas.openxmlformats.org/officeDocument/2006/relationships">
+  <p:cSld>
+    <p:spTree>
+      <p:nvGrpSpPr>
+        <p:cNvPr id="1" name=""/>
+        <p:cNvGrpSpPr/>
+        <p:nvPr/>
+      </p:nvGrpSpPr>
+      <p:grpSpPr>
+        <a:xfrm>
+          <a:off x="0" y="0"/>
+          <a:ext cx="0" cy="0"/>
+          <a:chOff x="0" y="0"/>
+          <a:chExt cx="0" cy="0"/>
+        </a:xfrm>
+      </p:grpSpPr>
+      <p:sp>
+        <p:nvSpPr>
+          <p:cNvPr id="3" name="Notes Placeholder 2"/>
+          <p:cNvSpPr>
+            <a:spLocks noGrp="1"/>
+          </p:cNvSpPr>
+          <p:nvPr>
+            <p:ph type="body" idx="1"/>
+          </p:nvPr>
+        </p:nvSpPr>
+        <p:spPr/>
+        <p:txBody>
+          <a:bodyPr/>
+          <a:lstStyle/>
+          <a:p>
+            <a:r>
+              <a:t>[DURATION: 1 minute — then 45 minutes lab time]</a:t>
+            </a:r>
+          </a:p>
+          <a:p/>
+          <a:p>
+            <a:r>
+              <a:t>Time for Lab 2! This is your chance to build out your personalized Claude workspace. You have 45 minutes and two main tasks.</a:t>
+            </a:r>
+          </a:p>
+          <a:p/>
+          <a:p>
+            <a:r>
+              <a:t>First, configure your settings — go through every tab and optimize for your workflow. Second, write your personal preferences document using the framework we discussed. Third, create a project for your team or department and add relevant context.</a:t>
+            </a:r>
+          </a:p>
+          <a:p/>
+          <a:p>
+            <a:r>
+              <a:t>The lab handout has step-by-step instructions and example preferences for different roles. I'll be circulating to help. Take your time with the preferences — this investment pays dividends in every future conversation.</a:t>
+            </a:r>
+          </a:p>
+        </p:txBody>
+      </p:sp>
+    </p:spTree>
+  </p:cSld>
+  <p:clrMapOvr>
+    <a:masterClrMapping/>
+  </p:clrMapOvr>
+</p:notes>
+</file>
+
+<file path=ppt/notesSlides/notesSlide75.xml><?xml version="1.0" encoding="utf-8"?>
+<p:notes xmlns:a="http://schemas.openxmlformats.org/drawingml/2006/main" xmlns:p="http://schemas.openxmlformats.org/presentationml/2006/main" xmlns:r="http://schemas.openxmlformats.org/officeDocument/2006/relationships">
+  <p:cSld>
+    <p:spTree>
+      <p:nvGrpSpPr>
+        <p:cNvPr id="1" name=""/>
+        <p:cNvGrpSpPr/>
+        <p:nvPr/>
+      </p:nvGrpSpPr>
+      <p:grpSpPr>
+        <a:xfrm>
+          <a:off x="0" y="0"/>
+          <a:ext cx="0" cy="0"/>
+          <a:chOff x="0" y="0"/>
+          <a:chExt cx="0" cy="0"/>
+        </a:xfrm>
+      </p:grpSpPr>
+      <p:sp>
+        <p:nvSpPr>
+          <p:cNvPr id="3" name="Notes Placeholder 2"/>
+          <p:cNvSpPr>
+            <a:spLocks noGrp="1"/>
+          </p:cNvSpPr>
+          <p:nvPr>
+            <p:ph type="body" idx="1"/>
+          </p:nvPr>
+        </p:nvSpPr>
+        <p:spPr/>
+        <p:txBody>
+          <a:bodyPr/>
+          <a:lstStyle/>
+          <a:p>
+            <a:r>
+              <a:t>[DURATION: 60 minutes]</a:t>
+            </a:r>
+          </a:p>
+          <a:p/>
+          <a:p>
+            <a:r>
+              <a:t>Great work this morning, everyone! It's time for lunch. We'll take a full hour — please be back by the posted time. This afternoon we're getting into the really fun stuff: data analysis with Claude and the full integration ecosystem. See you soon!</a:t>
+            </a:r>
+          </a:p>
+        </p:txBody>
+      </p:sp>
+    </p:spTree>
+  </p:cSld>
+  <p:clrMapOvr>
+    <a:masterClrMapping/>
+  </p:clrMapOvr>
+</p:notes>
+</file>
+
+<file path=ppt/notesSlides/notesSlide76.xml><?xml version="1.0" encoding="utf-8"?>
+<p:notes xmlns:a="http://schemas.openxmlformats.org/drawingml/2006/main" xmlns:p="http://schemas.openxmlformats.org/presentationml/2006/main" xmlns:r="http://schemas.openxmlformats.org/officeDocument/2006/relationships">
+  <p:cSld>
+    <p:spTree>
+      <p:nvGrpSpPr>
+        <p:cNvPr id="1" name=""/>
+        <p:cNvGrpSpPr/>
+        <p:nvPr/>
+      </p:nvGrpSpPr>
+      <p:grpSpPr>
+        <a:xfrm>
+          <a:off x="0" y="0"/>
+          <a:ext cx="0" cy="0"/>
+          <a:chOff x="0" y="0"/>
+          <a:chExt cx="0" cy="0"/>
+        </a:xfrm>
+      </p:grpSpPr>
+      <p:sp>
+        <p:nvSpPr>
+          <p:cNvPr id="3" name="Notes Placeholder 2"/>
+          <p:cNvSpPr>
+            <a:spLocks noGrp="1"/>
+          </p:cNvSpPr>
+          <p:nvPr>
+            <p:ph type="body" idx="1"/>
+          </p:nvPr>
+        </p:nvSpPr>
+        <p:spPr/>
+        <p:txBody>
+          <a:bodyPr/>
+          <a:lstStyle/>
+          <a:p>
+            <a:r>
+              <a:t>[DURATION: 30 seconds]</a:t>
+            </a:r>
+          </a:p>
+          <a:p/>
+          <a:p>
+            <a:r>
+              <a:t>Welcome back from lunch! I hope you're re-energized because this section is where Claude really starts to flex its analytical muscles. We're going to cover how to write analysis-focused prompts, work with data in Claude, and then get hands-on with the Claude in Excel add-in. If you work with spreadsheets — and I know most of you do — this section is going to change your workflow.</a:t>
+            </a:r>
+          </a:p>
+        </p:txBody>
+      </p:sp>
+    </p:spTree>
+  </p:cSld>
+  <p:clrMapOvr>
+    <a:masterClrMapping/>
+  </p:clrMapOvr>
+</p:notes>
+</file>
+
+<file path=ppt/notesSlides/notesSlide77.xml><?xml version="1.0" encoding="utf-8"?>
+<p:notes xmlns:a="http://schemas.openxmlformats.org/drawingml/2006/main" xmlns:p="http://schemas.openxmlformats.org/presentationml/2006/main" xmlns:r="http://schemas.openxmlformats.org/officeDocument/2006/relationships">
+  <p:cSld>
+    <p:spTree>
+      <p:nvGrpSpPr>
+        <p:cNvPr id="1" name=""/>
+        <p:cNvGrpSpPr/>
+        <p:nvPr/>
+      </p:nvGrpSpPr>
+      <p:grpSpPr>
+        <a:xfrm>
+          <a:off x="0" y="0"/>
+          <a:ext cx="0" cy="0"/>
+          <a:chOff x="0" y="0"/>
+          <a:chExt cx="0" cy="0"/>
+        </a:xfrm>
+      </p:grpSpPr>
+      <p:sp>
+        <p:nvSpPr>
+          <p:cNvPr id="3" name="Notes Placeholder 2"/>
+          <p:cNvSpPr>
+            <a:spLocks noGrp="1"/>
+          </p:cNvSpPr>
+          <p:nvPr>
+            <p:ph type="body" idx="1"/>
+          </p:nvPr>
+        </p:nvSpPr>
+        <p:spPr/>
+        <p:txBody>
+          <a:bodyPr/>
+          <a:lstStyle/>
+          <a:p>
+            <a:r>
+              <a:t>[DURATION: 5 minutes]</a:t>
+            </a:r>
+          </a:p>
+          <a:p/>
+          <a:p>
+            <a:r>
+              <a:t>Now let's talk about something that gets a lot of people excited — Claude in Excel. This is an official add-in that brings Claude's intelligence directly into your spreadsheets, and it's a game-changer for anyone who lives in Excel.</a:t>
+            </a:r>
+          </a:p>
+          <a:p/>
+          <a:p>
+            <a:r>
+              <a:t>The add-in works through custom functions — you type them right into cells just like SUM or VLOOKUP. The primary function is CLAUDE, which sends a prompt and returns a response directly in the cell. You can reference other cells in your prompt, which means Claude can analyze your actual data in context.</a:t>
+            </a:r>
+          </a:p>
+          <a:p/>
+          <a:p>
+            <a:r>
+              <a:t>Here's a practical example. Say you have a column of customer feedback comments. In the next column, you could write =CLAUDE("Classify this feedback as positive, negative, or neutral: " &amp; A2) and drag it down. In seconds, you've categorized hundreds of comments — a task that might take an intern a full day.</a:t>
+            </a:r>
+          </a:p>
+          <a:p/>
+          <a:p>
+            <a:r>
+              <a:t>But it goes way beyond classification. You can use it for data extraction — pulling dates, names, or dollar amounts from unstructured text. You can use it for translation — converting a column of product descriptions into Spanish. You can even use it for generating formulas — describe what you want in plain English and Claude writes the Excel formula.</a:t>
+            </a:r>
+          </a:p>
+          <a:p/>
+          <a:p>
+            <a:r>
+              <a:t>The add-in supports batch processing, so you can run Claude across thousands of rows. It uses your existing Claude API key, so pricing is based on token usage — typically fractions of a cent per cell. For most business use cases, you're looking at a few dollars to process an entire spreadsheet.</a:t>
+            </a:r>
+          </a:p>
+          <a:p/>
+          <a:p>
+            <a:r>
+              <a:t>Installation is straightforward — it's available in the Microsoft Office Add-ins store. Search for "Claude for Excel," install it, enter your API key, and you're ready to go. We'll walk through the setup in the lab if you haven't done it yet.</a:t>
+            </a:r>
+          </a:p>
+          <a:p/>
+          <a:p>
+            <a:r>
+              <a:t>One important note: the data you send through the add-in goes to Anthropic's API. Make sure your organization's data policies allow this before processing sensitive information. Enterprise customers can route through their own API endpoints for additional security.</a:t>
+            </a:r>
+          </a:p>
+          <a:p/>
+          <a:p>
+            <a:r>
+              <a:t>Let's look at some more advanced use cases before we hit the lab.</a:t>
+            </a:r>
+          </a:p>
+        </p:txBody>
+      </p:sp>
+    </p:spTree>
+  </p:cSld>
+  <p:clrMapOvr>
+    <a:masterClrMapping/>
+  </p:clrMapOvr>
+</p:notes>
+</file>
+
+<file path=ppt/notesSlides/notesSlide78.xml><?xml version="1.0" encoding="utf-8"?>
+<p:notes xmlns:a="http://schemas.openxmlformats.org/drawingml/2006/main" xmlns:p="http://schemas.openxmlformats.org/presentationml/2006/main" xmlns:r="http://schemas.openxmlformats.org/officeDocument/2006/relationships">
+  <p:cSld>
+    <p:spTree>
+      <p:nvGrpSpPr>
+        <p:cNvPr id="1" name=""/>
+        <p:cNvGrpSpPr/>
+        <p:nvPr/>
+      </p:nvGrpSpPr>
+      <p:grpSpPr>
+        <a:xfrm>
+          <a:off x="0" y="0"/>
+          <a:ext cx="0" cy="0"/>
+          <a:chOff x="0" y="0"/>
+          <a:chExt cx="0" cy="0"/>
+        </a:xfrm>
+      </p:grpSpPr>
+      <p:sp>
+        <p:nvSpPr>
+          <p:cNvPr id="3" name="Notes Placeholder 2"/>
+          <p:cNvSpPr>
+            <a:spLocks noGrp="1"/>
+          </p:cNvSpPr>
+          <p:nvPr>
+            <p:ph type="body" idx="1"/>
+          </p:nvPr>
+        </p:nvSpPr>
+        <p:spPr/>
+        <p:txBody>
+          <a:bodyPr/>
+          <a:lstStyle/>
+          <a:p>
+            <a:r>
+              <a:t>[DURATION: 1 minute — then 30 minutes lab time]</a:t>
+            </a:r>
+          </a:p>
+          <a:p/>
+          <a:p>
+            <a:r>
+              <a:t>Lab 3 time! This is a 30-minute data analysis challenge. You'll be working with a Q4 sales dataset — it's in your lab materials folder.</a:t>
+            </a:r>
+          </a:p>
+          <a:p/>
+          <a:p>
+            <a:r>
+              <a:t>Your mission: use Claude to analyze the data, identify trends, and create visualizations. The lab has specific questions to answer, but feel free to explore beyond those. Use the analysis tool in Claude.ai, and if you've set up the Excel add-in, try processing some of the data there too.</a:t>
+            </a:r>
+          </a:p>
+          <a:p/>
+          <a:p>
+            <a:r>
+              <a:t>This is the most open-ended lab so far — show me what you can do. I'll be around to help.</a:t>
+            </a:r>
+          </a:p>
+        </p:txBody>
+      </p:sp>
+    </p:spTree>
+  </p:cSld>
+  <p:clrMapOvr>
+    <a:masterClrMapping/>
+  </p:clrMapOvr>
+</p:notes>
+</file>
+
+<file path=ppt/notesSlides/notesSlide79.xml><?xml version="1.0" encoding="utf-8"?>
+<p:notes xmlns:a="http://schemas.openxmlformats.org/drawingml/2006/main" xmlns:p="http://schemas.openxmlformats.org/presentationml/2006/main" xmlns:r="http://schemas.openxmlformats.org/officeDocument/2006/relationships">
+  <p:cSld>
+    <p:spTree>
+      <p:nvGrpSpPr>
+        <p:cNvPr id="1" name=""/>
+        <p:cNvGrpSpPr/>
+        <p:nvPr/>
+      </p:nvGrpSpPr>
+      <p:grpSpPr>
+        <a:xfrm>
+          <a:off x="0" y="0"/>
+          <a:ext cx="0" cy="0"/>
+          <a:chOff x="0" y="0"/>
+          <a:chExt cx="0" cy="0"/>
+        </a:xfrm>
+      </p:grpSpPr>
+      <p:sp>
+        <p:nvSpPr>
+          <p:cNvPr id="3" name="Notes Placeholder 2"/>
+          <p:cNvSpPr>
+            <a:spLocks noGrp="1"/>
+          </p:cNvSpPr>
+          <p:nvPr>
+            <p:ph type="body" idx="1"/>
+          </p:nvPr>
+        </p:nvSpPr>
+        <p:spPr/>
+        <p:txBody>
+          <a:bodyPr/>
+          <a:lstStyle/>
+          <a:p>
+            <a:r>
+              <a:t>[DURATION: 10 minutes]</a:t>
+            </a:r>
+          </a:p>
+          <a:p/>
+          <a:p>
+            <a:r>
+              <a:t>Nice work on that analysis challenge — I saw some really impressive visualizations! Let's take a 10-minute break, and then we'll wrap up the day with Section 4: Artifacts, Files, and Integrations.</a:t>
+            </a:r>
+          </a:p>
+        </p:txBody>
       </p:sp>
     </p:spTree>
   </p:cSld>
@@ -9408,6 +10484,708 @@
           </p:nvPr>
         </p:nvSpPr>
         <p:spPr/>
+      </p:sp>
+    </p:spTree>
+  </p:cSld>
+  <p:clrMapOvr>
+    <a:masterClrMapping/>
+  </p:clrMapOvr>
+</p:notes>
+</file>
+
+<file path=ppt/notesSlides/notesSlide80.xml><?xml version="1.0" encoding="utf-8"?>
+<p:notes xmlns:a="http://schemas.openxmlformats.org/drawingml/2006/main" xmlns:p="http://schemas.openxmlformats.org/presentationml/2006/main" xmlns:r="http://schemas.openxmlformats.org/officeDocument/2006/relationships">
+  <p:cSld>
+    <p:spTree>
+      <p:nvGrpSpPr>
+        <p:cNvPr id="1" name=""/>
+        <p:cNvGrpSpPr/>
+        <p:nvPr/>
+      </p:nvGrpSpPr>
+      <p:grpSpPr>
+        <a:xfrm>
+          <a:off x="0" y="0"/>
+          <a:ext cx="0" cy="0"/>
+          <a:chOff x="0" y="0"/>
+          <a:chExt cx="0" cy="0"/>
+        </a:xfrm>
+      </p:grpSpPr>
+      <p:sp>
+        <p:nvSpPr>
+          <p:cNvPr id="3" name="Notes Placeholder 2"/>
+          <p:cNvSpPr>
+            <a:spLocks noGrp="1"/>
+          </p:cNvSpPr>
+          <p:nvPr>
+            <p:ph type="body" idx="1"/>
+          </p:nvPr>
+        </p:nvSpPr>
+        <p:spPr/>
+        <p:txBody>
+          <a:bodyPr/>
+          <a:lstStyle/>
+          <a:p>
+            <a:r>
+              <a:t>[DURATION: 30 seconds]</a:t>
+            </a:r>
+          </a:p>
+          <a:p/>
+          <a:p>
+            <a:r>
+              <a:t>Alright, final section of the day! We're going to cover Claude's artifact system for creating and managing documents, how to work with files effectively, and then explore the growing ecosystem of Claude integrations — including some brand-new features that just launched. This section shows you how Claude fits into your broader workflow, not just as a standalone tool.</a:t>
+            </a:r>
+          </a:p>
+        </p:txBody>
+      </p:sp>
+    </p:spTree>
+  </p:cSld>
+  <p:clrMapOvr>
+    <a:masterClrMapping/>
+  </p:clrMapOvr>
+</p:notes>
+</file>
+
+<file path=ppt/notesSlides/notesSlide81.xml><?xml version="1.0" encoding="utf-8"?>
+<p:notes xmlns:a="http://schemas.openxmlformats.org/drawingml/2006/main" xmlns:p="http://schemas.openxmlformats.org/presentationml/2006/main" xmlns:r="http://schemas.openxmlformats.org/officeDocument/2006/relationships">
+  <p:cSld>
+    <p:spTree>
+      <p:nvGrpSpPr>
+        <p:cNvPr id="1" name=""/>
+        <p:cNvGrpSpPr/>
+        <p:nvPr/>
+      </p:nvGrpSpPr>
+      <p:grpSpPr>
+        <a:xfrm>
+          <a:off x="0" y="0"/>
+          <a:ext cx="0" cy="0"/>
+          <a:chOff x="0" y="0"/>
+          <a:chExt cx="0" cy="0"/>
+        </a:xfrm>
+      </p:grpSpPr>
+      <p:sp>
+        <p:nvSpPr>
+          <p:cNvPr id="3" name="Notes Placeholder 2"/>
+          <p:cNvSpPr>
+            <a:spLocks noGrp="1"/>
+          </p:cNvSpPr>
+          <p:nvPr>
+            <p:ph type="body" idx="1"/>
+          </p:nvPr>
+        </p:nvSpPr>
+        <p:spPr/>
+        <p:txBody>
+          <a:bodyPr/>
+          <a:lstStyle/>
+          <a:p>
+            <a:r>
+              <a:t>[DURATION: 5 minutes]</a:t>
+            </a:r>
+          </a:p>
+          <a:p/>
+          <a:p>
+            <a:r>
+              <a:t>Let's start with Artifacts and file handling — this is one of Claude's most powerful and most underappreciated features.</a:t>
+            </a:r>
+          </a:p>
+          <a:p/>
+          <a:p>
+            <a:r>
+              <a:t>Artifacts are the documents, code, visualizations, and other structured content that Claude creates in the side panel during your conversations. What makes them special is that they're not just text responses — they're interactive, editable, and downloadable objects.</a:t>
+            </a:r>
+          </a:p>
+          <a:p/>
+          <a:p>
+            <a:r>
+              <a:t>When Claude generates a report, it appears as an artifact you can scroll through, edit inline, and download as a clean document. When it writes code, the artifact includes syntax highlighting and a copy button. When it creates a chart or diagram, you see a rendered visualization you can export.</a:t>
+            </a:r>
+          </a:p>
+          <a:p/>
+          <a:p>
+            <a:r>
+              <a:t>Here's where it gets really useful for business workflows. You can iterate on artifacts across multiple messages. Ask Claude to write a project proposal, then say "make the executive summary more concise" or "add a risk assessment section." Claude modifies the existing artifact rather than generating a whole new document. It's like collaborative editing with an AI partner.</a:t>
+            </a:r>
+          </a:p>
+          <a:p/>
+          <a:p>
+            <a:r>
+              <a:t>For file handling, Claude accepts a wide range of formats — PDF, Word, Excel, PowerPoint, images, CSV, code files, and more. You can upload multiple files in a single conversation, and Claude can cross-reference between them. Imagine uploading last quarter's financial report and this quarter's data and asking Claude to compare performance across the same metrics.</a:t>
+            </a:r>
+          </a:p>
+          <a:p/>
+          <a:p>
+            <a:r>
+              <a:t>A few power-user tips: When working with long documents, ask Claude to summarize first, then drill into specific sections. For spreadsheets, Claude can read the data and create visualizations using the analysis tool. For images, Claude has strong vision capabilities — it can read charts, interpret diagrams, and even extract text from photos of whiteboards.</a:t>
+            </a:r>
+          </a:p>
+          <a:p/>
+          <a:p>
+            <a:r>
+              <a:t>The combination of artifacts and file handling means Claude can serve as your document creation hub — from first draft through final polish. Let's now look at how Claude connects to your other tools.</a:t>
+            </a:r>
+          </a:p>
+        </p:txBody>
+      </p:sp>
+    </p:spTree>
+  </p:cSld>
+  <p:clrMapOvr>
+    <a:masterClrMapping/>
+  </p:clrMapOvr>
+</p:notes>
+</file>
+
+<file path=ppt/notesSlides/notesSlide82.xml><?xml version="1.0" encoding="utf-8"?>
+<p:notes xmlns:a="http://schemas.openxmlformats.org/drawingml/2006/main" xmlns:p="http://schemas.openxmlformats.org/presentationml/2006/main" xmlns:r="http://schemas.openxmlformats.org/officeDocument/2006/relationships">
+  <p:cSld>
+    <p:spTree>
+      <p:nvGrpSpPr>
+        <p:cNvPr id="1" name=""/>
+        <p:cNvGrpSpPr/>
+        <p:nvPr/>
+      </p:nvGrpSpPr>
+      <p:grpSpPr>
+        <a:xfrm>
+          <a:off x="0" y="0"/>
+          <a:ext cx="0" cy="0"/>
+          <a:chOff x="0" y="0"/>
+          <a:chExt cx="0" cy="0"/>
+        </a:xfrm>
+      </p:grpSpPr>
+      <p:sp>
+        <p:nvSpPr>
+          <p:cNvPr id="3" name="Notes Placeholder 2"/>
+          <p:cNvSpPr>
+            <a:spLocks noGrp="1"/>
+          </p:cNvSpPr>
+          <p:nvPr>
+            <p:ph type="body" idx="1"/>
+          </p:nvPr>
+        </p:nvSpPr>
+        <p:spPr/>
+        <p:txBody>
+          <a:bodyPr/>
+          <a:lstStyle/>
+          <a:p>
+            <a:r>
+              <a:t>[DURATION: 3 minutes]</a:t>
+            </a:r>
+          </a:p>
+          <a:p/>
+          <a:p>
+            <a:r>
+              <a:t>Now we're entering one of the fastest-evolving areas of Claude's ecosystem — integrations. Over the past year, Anthropic has been rapidly building out ways to connect Claude with the tools you already use every day.</a:t>
+            </a:r>
+          </a:p>
+          <a:p/>
+          <a:p>
+            <a:r>
+              <a:t>This matters because the real power of AI isn't in a standalone chat window — it's in having AI woven into your existing workflows. When Claude can read your Slack messages, access your Notion docs, check your Jira tickets, and pull from your Google Drive, it goes from being a helpful assistant to being a true work multiplier.</a:t>
+            </a:r>
+          </a:p>
+          <a:p/>
+          <a:p>
+            <a:r>
+              <a:t>We're going to cover three categories of integrations. First, the built-in integrations — Claude in Excel and Claude in PowerPoint, which are official add-ins built by Anthropic. Second, the Claude for Chrome browser extension, which brings Claude to every website you visit. And third, custom connectors through the integrations panel and MCP protocol, which let you connect Claude to virtually any tool.</a:t>
+            </a:r>
+          </a:p>
+          <a:p/>
+          <a:p>
+            <a:r>
+              <a:t>Each of these represents a different way of thinking about AI integration. The add-ins bring Claude into your existing tools. The browser extension brings Claude to the web. And custom connectors bring your tools to Claude. Together, they create a comprehensive AI layer across your entire work environment.</a:t>
+            </a:r>
+          </a:p>
+          <a:p/>
+          <a:p>
+            <a:r>
+              <a:t>Let me walk you through each one, starting with the newest addition.</a:t>
+            </a:r>
+          </a:p>
+        </p:txBody>
+      </p:sp>
+    </p:spTree>
+  </p:cSld>
+  <p:clrMapOvr>
+    <a:masterClrMapping/>
+  </p:clrMapOvr>
+</p:notes>
+</file>
+
+<file path=ppt/notesSlides/notesSlide83.xml><?xml version="1.0" encoding="utf-8"?>
+<p:notes xmlns:a="http://schemas.openxmlformats.org/drawingml/2006/main" xmlns:p="http://schemas.openxmlformats.org/presentationml/2006/main" xmlns:r="http://schemas.openxmlformats.org/officeDocument/2006/relationships">
+  <p:cSld>
+    <p:spTree>
+      <p:nvGrpSpPr>
+        <p:cNvPr id="1" name=""/>
+        <p:cNvGrpSpPr/>
+        <p:nvPr/>
+      </p:nvGrpSpPr>
+      <p:grpSpPr>
+        <a:xfrm>
+          <a:off x="0" y="0"/>
+          <a:ext cx="0" cy="0"/>
+          <a:chOff x="0" y="0"/>
+          <a:chExt cx="0" cy="0"/>
+        </a:xfrm>
+      </p:grpSpPr>
+      <p:sp>
+        <p:nvSpPr>
+          <p:cNvPr id="3" name="Notes Placeholder 2"/>
+          <p:cNvSpPr>
+            <a:spLocks noGrp="1"/>
+          </p:cNvSpPr>
+          <p:nvPr>
+            <p:ph type="body" idx="1"/>
+          </p:nvPr>
+        </p:nvSpPr>
+        <p:spPr/>
+        <p:txBody>
+          <a:bodyPr/>
+          <a:lstStyle/>
+          <a:p>
+            <a:r>
+              <a:t>[DURATION: 5 minutes]</a:t>
+            </a:r>
+          </a:p>
+          <a:p/>
+          <a:p>
+            <a:r>
+              <a:t>This is hot off the press — Claude in PowerPoint launched as a research preview on February 5th, just eleven days ago. It runs on Opus 4.6, Anthropic's most capable model, and it's genuinely impressive.</a:t>
+            </a:r>
+          </a:p>
+          <a:p/>
+          <a:p>
+            <a:r>
+              <a:t>Here's what it can do. You can ask Claude to build entire presentations from scratch — give it a topic, an audience, and a desired length, and it creates slides with appropriate layouts, content hierarchy, and even speaker notes. You can edit existing presentations — "make slide 7 more visual" or "add a competitive analysis slide after the market overview." And you can analyze presentations — upload a deck and ask Claude to critique the flow, check for consistency, or suggest improvements.</a:t>
+            </a:r>
+          </a:p>
+          <a:p/>
+          <a:p>
+            <a:r>
+              <a:t>The PowerPoint add-in works similarly to the Excel one — it lives in your ribbon and opens a side panel. But the interaction model is more conversational. You describe what you want in natural language, and Claude manipulates the slides directly. It understands PowerPoint's structure — masters, layouts, placeholders, animations — so the output looks professional, not like a robot threw text on blank slides.</a:t>
+            </a:r>
+          </a:p>
+          <a:p/>
+          <a:p>
+            <a:r>
+              <a:t>A few things that really stand out. First, Claude can maintain your organization's visual branding. If your template has specific fonts, colors, and layouts, Claude works within those constraints. Second, it can convert documents to presentations — give it a Word doc or PDF and say "turn this into a 10-slide executive briefing." Third, it can add and refine speaker notes, which is incredibly useful for presentation prep.</a:t>
+            </a:r>
+          </a:p>
+          <a:p/>
+          <a:p>
+            <a:r>
+              <a:t>Since this is a research preview, expect some rough edges. Complex animations and custom graphics are still limited. But for the core use case of building and editing business presentations, it's already remarkably capable. I've been using it for this very course, and it's saved me hours.</a:t>
+            </a:r>
+          </a:p>
+          <a:p/>
+          <a:p>
+            <a:r>
+              <a:t>If you want early access, check the Anthropic website — they're rolling it out to Pro and Teams users over the next few weeks.</a:t>
+            </a:r>
+          </a:p>
+        </p:txBody>
+      </p:sp>
+    </p:spTree>
+  </p:cSld>
+  <p:clrMapOvr>
+    <a:masterClrMapping/>
+  </p:clrMapOvr>
+</p:notes>
+</file>
+
+<file path=ppt/notesSlides/notesSlide84.xml><?xml version="1.0" encoding="utf-8"?>
+<p:notes xmlns:a="http://schemas.openxmlformats.org/drawingml/2006/main" xmlns:p="http://schemas.openxmlformats.org/presentationml/2006/main" xmlns:r="http://schemas.openxmlformats.org/officeDocument/2006/relationships">
+  <p:cSld>
+    <p:spTree>
+      <p:nvGrpSpPr>
+        <p:cNvPr id="1" name=""/>
+        <p:cNvGrpSpPr/>
+        <p:nvPr/>
+      </p:nvGrpSpPr>
+      <p:grpSpPr>
+        <a:xfrm>
+          <a:off x="0" y="0"/>
+          <a:ext cx="0" cy="0"/>
+          <a:chOff x="0" y="0"/>
+          <a:chExt cx="0" cy="0"/>
+        </a:xfrm>
+      </p:grpSpPr>
+      <p:sp>
+        <p:nvSpPr>
+          <p:cNvPr id="3" name="Notes Placeholder 2"/>
+          <p:cNvSpPr>
+            <a:spLocks noGrp="1"/>
+          </p:cNvSpPr>
+          <p:nvPr>
+            <p:ph type="body" idx="1"/>
+          </p:nvPr>
+        </p:nvSpPr>
+        <p:spPr/>
+        <p:txBody>
+          <a:bodyPr/>
+          <a:lstStyle/>
+          <a:p>
+            <a:r>
+              <a:t>[DURATION: 5 minutes]</a:t>
+            </a:r>
+          </a:p>
+          <a:p/>
+          <a:p>
+            <a:r>
+              <a:t>Claude for Chrome is a browser extension that puts Claude in a side panel on every webpage you visit. And this one is a real productivity booster.</a:t>
+            </a:r>
+          </a:p>
+          <a:p/>
+          <a:p>
+            <a:r>
+              <a:t>When you install the extension, you get a Claude icon in your browser toolbar. Click it, and a panel slides out on the right side of your screen. Here's what makes it special — Claude can see your current page. It has context about what you're looking at, which means you can have conversations about the content right there.</a:t>
+            </a:r>
+          </a:p>
+          <a:p/>
+          <a:p>
+            <a:r>
+              <a:t>Reading a long article? Ask Claude to summarize it. On a competitor's pricing page? Ask Claude to compare it to yours. Reviewing a pull request on GitHub? Ask Claude to explain the code changes. Looking at a complex dashboard? Ask Claude to interpret the data. The use cases are endless because the web is where we spend most of our work time.</a:t>
+            </a:r>
+          </a:p>
+          <a:p/>
+          <a:p>
+            <a:r>
+              <a:t>But it goes beyond just reading pages. Claude for Chrome can automate workflows. It can fill out forms, extract data from tables, and even navigate between pages to complete multi-step tasks. Think of it as a smart assistant that can both see your screen and take actions on your behalf.</a:t>
+            </a:r>
+          </a:p>
+          <a:p/>
+          <a:p>
+            <a:r>
+              <a:t>For business users, some killer use cases include: research synthesis — open five competitor websites and ask Claude to build a comparison matrix. Email drafting — open Gmail and have Claude draft responses based on the email thread. Data entry — have Claude read information from one system and help you enter it into another.</a:t>
+            </a:r>
+          </a:p>
+          <a:p/>
+          <a:p>
+            <a:r>
+              <a:t>The extension respects your privacy settings — it only reads pages when you explicitly invoke it, and it uses your existing Claude account and model preferences. For enterprise users, all data flows through your organization's existing Claude agreement.</a:t>
+            </a:r>
+          </a:p>
+          <a:p/>
+          <a:p>
+            <a:r>
+              <a:t>One tip: pin the extension to your toolbar for quick access. You'll find yourself using it dozens of times a day once you build the habit.</a:t>
+            </a:r>
+          </a:p>
+        </p:txBody>
+      </p:sp>
+    </p:spTree>
+  </p:cSld>
+  <p:clrMapOvr>
+    <a:masterClrMapping/>
+  </p:clrMapOvr>
+</p:notes>
+</file>
+
+<file path=ppt/notesSlides/notesSlide85.xml><?xml version="1.0" encoding="utf-8"?>
+<p:notes xmlns:a="http://schemas.openxmlformats.org/drawingml/2006/main" xmlns:p="http://schemas.openxmlformats.org/presentationml/2006/main" xmlns:r="http://schemas.openxmlformats.org/officeDocument/2006/relationships">
+  <p:cSld>
+    <p:spTree>
+      <p:nvGrpSpPr>
+        <p:cNvPr id="1" name=""/>
+        <p:cNvGrpSpPr/>
+        <p:nvPr/>
+      </p:nvGrpSpPr>
+      <p:grpSpPr>
+        <a:xfrm>
+          <a:off x="0" y="0"/>
+          <a:ext cx="0" cy="0"/>
+          <a:chOff x="0" y="0"/>
+          <a:chExt cx="0" cy="0"/>
+        </a:xfrm>
+      </p:grpSpPr>
+      <p:sp>
+        <p:nvSpPr>
+          <p:cNvPr id="3" name="Notes Placeholder 2"/>
+          <p:cNvSpPr>
+            <a:spLocks noGrp="1"/>
+          </p:cNvSpPr>
+          <p:nvPr>
+            <p:ph type="body" idx="1"/>
+          </p:nvPr>
+        </p:nvSpPr>
+        <p:spPr/>
+        <p:txBody>
+          <a:bodyPr/>
+          <a:lstStyle/>
+          <a:p>
+            <a:r>
+              <a:t>[DURATION: 5 minutes]</a:t>
+            </a:r>
+          </a:p>
+          <a:p/>
+          <a:p>
+            <a:r>
+              <a:t>Now let's talk about connecting Claude to your broader tool ecosystem. There are two main approaches here, and both are powerful.</a:t>
+            </a:r>
+          </a:p>
+          <a:p/>
+          <a:p>
+            <a:r>
+              <a:t>First, the built-in Integrations panel. In Claude's settings, you'll find a section called Integrations where you can connect popular business tools directly. As of today, supported integrations include Slack, Google Drive, Notion, Jira, Confluence, and several others. Once connected, Claude can pull information from these tools directly in your conversations.</a:t>
+            </a:r>
+          </a:p>
+          <a:p/>
+          <a:p>
+            <a:r>
+              <a:t>For example, connect Google Drive and you can say "summarize the Q4 planning doc in my Drive." Connect Jira and you can say "what are the open bugs assigned to my team?" Connect Slack and you can say "what did the marketing channel discuss yesterday?" Claude fetches the relevant information and incorporates it into its responses.</a:t>
+            </a:r>
+          </a:p>
+          <a:p/>
+          <a:p>
+            <a:r>
+              <a:t>Setting these up is straightforward — click the integration, authorize with your existing account credentials, and Claude handles the rest. Your IT admin may need to approve certain integrations on Teams and Enterprise plans.</a:t>
+            </a:r>
+          </a:p>
+          <a:p/>
+          <a:p>
+            <a:r>
+              <a:t>The second approach is MCP — the Model Context Protocol. This is Anthropic's open standard for connecting AI models to external tools and data sources. Think of MCP as a universal adapter — it provides a standardized way for Claude to talk to any system, whether it's your internal database, a custom API, or a specialized business application.</a:t>
+            </a:r>
+          </a:p>
+          <a:p/>
+          <a:p>
+            <a:r>
+              <a:t>For non-technical users, MCP means your IT team can build custom connectors that let Claude access company-specific tools. For example, a connector to your proprietary CRM, your internal knowledge base, or your custom reporting system. Once built, you use these connectors just like the built-in ones — natural language requests, and Claude does the rest.</a:t>
+            </a:r>
+          </a:p>
+          <a:p/>
+          <a:p>
+            <a:r>
+              <a:t>The key takeaway here is that Claude isn't a walled garden. It's designed to be the AI layer that sits on top of your entire tool stack. The more you connect, the more useful it becomes.</a:t>
+            </a:r>
+          </a:p>
+        </p:txBody>
+      </p:sp>
+    </p:spTree>
+  </p:cSld>
+  <p:clrMapOvr>
+    <a:masterClrMapping/>
+  </p:clrMapOvr>
+</p:notes>
+</file>
+
+<file path=ppt/notesSlides/notesSlide86.xml><?xml version="1.0" encoding="utf-8"?>
+<p:notes xmlns:a="http://schemas.openxmlformats.org/drawingml/2006/main" xmlns:p="http://schemas.openxmlformats.org/presentationml/2006/main" xmlns:r="http://schemas.openxmlformats.org/officeDocument/2006/relationships">
+  <p:cSld>
+    <p:spTree>
+      <p:nvGrpSpPr>
+        <p:cNvPr id="1" name=""/>
+        <p:cNvGrpSpPr/>
+        <p:nvPr/>
+      </p:nvGrpSpPr>
+      <p:grpSpPr>
+        <a:xfrm>
+          <a:off x="0" y="0"/>
+          <a:ext cx="0" cy="0"/>
+          <a:chOff x="0" y="0"/>
+          <a:chExt cx="0" cy="0"/>
+        </a:xfrm>
+      </p:grpSpPr>
+      <p:sp>
+        <p:nvSpPr>
+          <p:cNvPr id="3" name="Notes Placeholder 2"/>
+          <p:cNvSpPr>
+            <a:spLocks noGrp="1"/>
+          </p:cNvSpPr>
+          <p:nvPr>
+            <p:ph type="body" idx="1"/>
+          </p:nvPr>
+        </p:nvSpPr>
+        <p:spPr/>
+        <p:txBody>
+          <a:bodyPr/>
+          <a:lstStyle/>
+          <a:p>
+            <a:r>
+              <a:t>[DURATION: 3 minutes]</a:t>
+            </a:r>
+          </a:p>
+          <a:p/>
+          <a:p>
+            <a:r>
+              <a:t>Now that we've seen all the ways Claude can integrate into your workflow, let's look at how different roles can put this all together. Because the real magic happens when you combine multiple capabilities for your specific job function.</a:t>
+            </a:r>
+          </a:p>
+          <a:p/>
+          <a:p>
+            <a:r>
+              <a:t>For marketing professionals, imagine this workflow: You use Claude for Chrome to research competitor campaigns, feed that research into a Claude conversation where you brainstorm positioning, use artifacts to draft campaign copy, and then use the PowerPoint add-in to build the pitch deck for your stakeholders. That entire workflow — research, strategy, content creation, and presentation — used to take a week. With Claude integrated across your tools, it's an afternoon.</a:t>
+            </a:r>
+          </a:p>
+          <a:p/>
+          <a:p>
+            <a:r>
+              <a:t>For sales teams, consider this: Claude reads your CRM data through integrations, analyzes deal pipeline trends using the analysis tool, drafts personalized outreach emails based on prospect research from the Chrome extension, and creates proposal decks in PowerPoint. Your sales reps spend less time on admin and more time actually selling.</a:t>
+            </a:r>
+          </a:p>
+          <a:p/>
+          <a:p>
+            <a:r>
+              <a:t>For project managers, Claude connects to Jira for task tracking, reads Confluence for project documentation, monitors Slack for team updates, and synthesizes all of that into status reports and risk assessments that you can share with leadership.</a:t>
+            </a:r>
+          </a:p>
+          <a:p/>
+          <a:p>
+            <a:r>
+              <a:t>The pattern is the same regardless of your role: connect your data sources, leverage Claude's analytical and creative capabilities, and output directly into the tools where work gets done. Over the next few slides, we'll look at specific workflow examples you can adapt.</a:t>
+            </a:r>
+          </a:p>
+          <a:p/>
+          <a:p>
+            <a:r>
+              <a:t>Now let's put all of this into practice with our final lab.</a:t>
+            </a:r>
+          </a:p>
+        </p:txBody>
+      </p:sp>
+    </p:spTree>
+  </p:cSld>
+  <p:clrMapOvr>
+    <a:masterClrMapping/>
+  </p:clrMapOvr>
+</p:notes>
+</file>
+
+<file path=ppt/notesSlides/notesSlide87.xml><?xml version="1.0" encoding="utf-8"?>
+<p:notes xmlns:a="http://schemas.openxmlformats.org/drawingml/2006/main" xmlns:p="http://schemas.openxmlformats.org/presentationml/2006/main" xmlns:r="http://schemas.openxmlformats.org/officeDocument/2006/relationships">
+  <p:cSld>
+    <p:spTree>
+      <p:nvGrpSpPr>
+        <p:cNvPr id="1" name=""/>
+        <p:cNvGrpSpPr/>
+        <p:nvPr/>
+      </p:nvGrpSpPr>
+      <p:grpSpPr>
+        <a:xfrm>
+          <a:off x="0" y="0"/>
+          <a:ext cx="0" cy="0"/>
+          <a:chOff x="0" y="0"/>
+          <a:chExt cx="0" cy="0"/>
+        </a:xfrm>
+      </p:grpSpPr>
+      <p:sp>
+        <p:nvSpPr>
+          <p:cNvPr id="3" name="Notes Placeholder 2"/>
+          <p:cNvSpPr>
+            <a:spLocks noGrp="1"/>
+          </p:cNvSpPr>
+          <p:nvPr>
+            <p:ph type="body" idx="1"/>
+          </p:nvPr>
+        </p:nvSpPr>
+        <p:spPr/>
+        <p:txBody>
+          <a:bodyPr/>
+          <a:lstStyle/>
+          <a:p>
+            <a:r>
+              <a:t>[DURATION: 1 minute — then 30 minutes lab time]</a:t>
+            </a:r>
+          </a:p>
+          <a:p/>
+          <a:p>
+            <a:r>
+              <a:t>This is our capstone lab — the Executive Briefing Challenge. You have 30 minutes to create a complete executive briefing using everything we've covered today.</a:t>
+            </a:r>
+          </a:p>
+          <a:p/>
+          <a:p>
+            <a:r>
+              <a:t>You'll find the scenario in your lab handout — you're preparing a briefing for your company's leadership team on a strategic topic. Use prompt engineering best practices, leverage artifacts for document creation, and if time allows, build a short slide deck using the PowerPoint add-in.</a:t>
+            </a:r>
+          </a:p>
+          <a:p/>
+          <a:p>
+            <a:r>
+              <a:t>This is your chance to show off. Combine techniques, iterate on your outputs, and produce something you'd actually be proud to present. I'll share standout examples at the end.</a:t>
+            </a:r>
+          </a:p>
+        </p:txBody>
+      </p:sp>
+    </p:spTree>
+  </p:cSld>
+  <p:clrMapOvr>
+    <a:masterClrMapping/>
+  </p:clrMapOvr>
+</p:notes>
+</file>
+
+<file path=ppt/notesSlides/notesSlide88.xml><?xml version="1.0" encoding="utf-8"?>
+<p:notes xmlns:a="http://schemas.openxmlformats.org/drawingml/2006/main" xmlns:p="http://schemas.openxmlformats.org/presentationml/2006/main" xmlns:r="http://schemas.openxmlformats.org/officeDocument/2006/relationships">
+  <p:cSld>
+    <p:spTree>
+      <p:nvGrpSpPr>
+        <p:cNvPr id="1" name=""/>
+        <p:cNvGrpSpPr/>
+        <p:nvPr/>
+      </p:nvGrpSpPr>
+      <p:grpSpPr>
+        <a:xfrm>
+          <a:off x="0" y="0"/>
+          <a:ext cx="0" cy="0"/>
+          <a:chOff x="0" y="0"/>
+          <a:chExt cx="0" cy="0"/>
+        </a:xfrm>
+      </p:grpSpPr>
+      <p:sp>
+        <p:nvSpPr>
+          <p:cNvPr id="3" name="Notes Placeholder 2"/>
+          <p:cNvSpPr>
+            <a:spLocks noGrp="1"/>
+          </p:cNvSpPr>
+          <p:nvPr>
+            <p:ph type="body" idx="1"/>
+          </p:nvPr>
+        </p:nvSpPr>
+        <p:spPr/>
+        <p:txBody>
+          <a:bodyPr/>
+          <a:lstStyle/>
+          <a:p>
+            <a:r>
+              <a:t>[DURATION: 10 minutes]</a:t>
+            </a:r>
+          </a:p>
+          <a:p/>
+          <a:p>
+            <a:r>
+              <a:t>And that's a wrap on Day 1! Let's take a moment to reflect on what we covered today.</a:t>
+            </a:r>
+          </a:p>
+          <a:p/>
+          <a:p>
+            <a:r>
+              <a:t>In Section 1, you learned the fundamentals of the Claude interface and prompt engineering — how to communicate with AI effectively. In Section 2, you configured your personal workspace with settings, preferences, and projects. In Section 3, you tackled data analysis and saw how Claude can be a powerful analytical partner, especially with the Excel add-in. And in Section 4, you explored the integration ecosystem — PowerPoint, Chrome, custom connectors — and saw how Claude fits into your broader workflow.</a:t>
+            </a:r>
+          </a:p>
+          <a:p/>
+          <a:p>
+            <a:r>
+              <a:t>Here are my three key takeaways for you. First, prompting is a skill — and like any skill, it improves with practice. Use the frameworks we covered, but don't be afraid to experiment. Second, invest in your setup — those preferences, projects, and memory features compound over time. Ten minutes of configuration now saves hours down the road. Third, think in workflows, not just chats — the real power comes from connecting Claude to your existing tools and processes.</a:t>
+            </a:r>
+          </a:p>
+          <a:p/>
+          <a:p>
+            <a:r>
+              <a:t>For homework — yes, there's homework — I want you to identify one recurring task in your work that takes more than 30 minutes, and try using Claude to cut that time in half. Come to Day 2 ready to share what you tried and what you learned.</a:t>
+            </a:r>
+          </a:p>
+          <a:p/>
+          <a:p>
+            <a:r>
+              <a:t>Day 2 will build on everything from today. We'll go deeper into advanced techniques, explore Claude for teams and organizations, and tackle more complex real-world scenarios.</a:t>
+            </a:r>
+          </a:p>
+          <a:p/>
+          <a:p>
+            <a:r>
+              <a:t>Any questions before we wrap up? I'll stick around for a few minutes if anyone wants to chat one-on-one. Thank you all for your energy and participation today — see you tomorrow!</a:t>
+            </a:r>
+          </a:p>
+        </p:txBody>
       </p:sp>
     </p:spTree>
   </p:cSld>
@@ -44100,7 +45878,7 @@
 </file>
 
 <file path=ppt/slides/slide78.xml><?xml version="1.0" encoding="utf-8"?>
-<p:sld xmlns:a="http://schemas.openxmlformats.org/drawingml/2006/main" xmlns:r="http://schemas.openxmlformats.org/officeDocument/2006/relationships" xmlns:p="http://schemas.openxmlformats.org/presentationml/2006/main">
+<p:sld xmlns:a="http://schemas.openxmlformats.org/drawingml/2006/main" xmlns:p="http://schemas.openxmlformats.org/presentationml/2006/main" xmlns:r="http://schemas.openxmlformats.org/officeDocument/2006/relationships">
   <p:cSld>
     <p:bg>
       <p:bgPr>
@@ -44116,33 +45894,98 @@
         <p:cNvGrpSpPr/>
         <p:nvPr/>
       </p:nvGrpSpPr>
-      <p:grpSpPr>
-        <a:xfrm>
-          <a:off x="0" y="0"/>
-          <a:ext cx="0" cy="0"/>
-          <a:chOff x="0" y="0"/>
-          <a:chExt cx="0" cy="0"/>
-        </a:xfrm>
-      </p:grpSpPr>
-      <p:sp>
-        <p:nvSpPr>
-          <p:cNvPr id="2" name="Rectangle 1"/>
+      <p:grpSpPr/>
+      <p:sp>
+        <p:nvSpPr>
+          <p:cNvPr id="2" name="TextBox 1"/>
+          <p:cNvSpPr txBox="1"/>
+          <p:nvPr/>
+        </p:nvSpPr>
+        <p:spPr>
+          <a:xfrm>
+            <a:off x="457200" y="274320"/>
+            <a:ext cx="11247120" cy="822960"/>
+          </a:xfrm>
+          <a:prstGeom prst="rect">
+            <a:avLst/>
+          </a:prstGeom>
+          <a:noFill/>
+        </p:spPr>
+        <p:txBody>
+          <a:bodyPr wrap="none">
+            <a:spAutoFit/>
+          </a:bodyPr>
+          <a:lstStyle/>
+          <a:p>
+            <a:pPr>
+              <a:defRPr sz="4000" b="1">
+                <a:solidFill>
+                  <a:srgbClr val="FFFFFF"/>
+                </a:solidFill>
+              </a:defRPr>
+            </a:pPr>
+            <a:r>
+              <a:t>Beyond Built-In: Custom Connectors</a:t>
+            </a:r>
+          </a:p>
+        </p:txBody>
+      </p:sp>
+      <p:sp>
+        <p:nvSpPr>
+          <p:cNvPr id="3" name="TextBox 2"/>
+          <p:cNvSpPr txBox="1"/>
+          <p:nvPr/>
+        </p:nvSpPr>
+        <p:spPr>
+          <a:xfrm>
+            <a:off x="457200" y="1005840"/>
+            <a:ext cx="11247120" cy="457200"/>
+          </a:xfrm>
+          <a:prstGeom prst="rect">
+            <a:avLst/>
+          </a:prstGeom>
+          <a:noFill/>
+        </p:spPr>
+        <p:txBody>
+          <a:bodyPr wrap="none">
+            <a:spAutoFit/>
+          </a:bodyPr>
+          <a:lstStyle/>
+          <a:p>
+            <a:pPr>
+              <a:defRPr sz="2000" i="1">
+                <a:solidFill>
+                  <a:srgbClr val="9CA3AF"/>
+                </a:solidFill>
+              </a:defRPr>
+            </a:pPr>
+            <a:r>
+              <a:t>Claude isn't limited to what ships out of the box</a:t>
+            </a:r>
+          </a:p>
+        </p:txBody>
+      </p:sp>
+      <p:sp>
+        <p:nvSpPr>
+          <p:cNvPr id="4" name="Rounded Rectangle 3"/>
           <p:cNvSpPr/>
           <p:nvPr/>
         </p:nvSpPr>
         <p:spPr>
           <a:xfrm>
-            <a:off x="0" y="1828800"/>
-            <a:ext cx="137160" cy="3200400"/>
-          </a:xfrm>
-          <a:prstGeom prst="rect">
+            <a:off x="457200" y="1737360"/>
+            <a:ext cx="5303520" cy="4114800"/>
+          </a:xfrm>
+          <a:prstGeom prst="roundRect">
             <a:avLst/>
           </a:prstGeom>
           <a:solidFill>
-            <a:srgbClr val="00D4AA"/>
+            <a:srgbClr val="141A2A"/>
           </a:solidFill>
-          <a:ln>
-            <a:noFill/>
+          <a:ln w="19050">
+            <a:solidFill>
+              <a:srgbClr val="14B8A6"/>
+            </a:solidFill>
           </a:ln>
         </p:spPr>
         <p:style>
@@ -44164,20 +46007,124 @@
           <a:lstStyle/>
           <a:p>
             <a:pPr algn="ctr"/>
-            <a:endParaRPr/>
-          </a:p>
-        </p:txBody>
-      </p:sp>
-      <p:sp>
-        <p:nvSpPr>
-          <p:cNvPr id="3" name="TextBox 2"/>
-          <p:cNvSpPr txBox="1"/>
-          <p:nvPr/>
-        </p:nvSpPr>
-        <p:spPr>
-          <a:xfrm>
-            <a:off x="457200" y="2286000"/>
-            <a:ext cx="11277295" cy="1371600"/>
+          </a:p>
+        </p:txBody>
+      </p:sp>
+      <p:sp>
+        <p:nvSpPr>
+          <p:cNvPr id="5" name="TextBox 4"/>
+          <p:cNvSpPr txBox="1"/>
+          <p:nvPr/>
+        </p:nvSpPr>
+        <p:spPr>
+          <a:xfrm>
+            <a:off x="731520" y="1920240"/>
+            <a:ext cx="4754880" cy="457200"/>
+          </a:xfrm>
+          <a:prstGeom prst="rect">
+            <a:avLst/>
+          </a:prstGeom>
+          <a:noFill/>
+        </p:spPr>
+        <p:txBody>
+          <a:bodyPr wrap="none">
+            <a:spAutoFit/>
+          </a:bodyPr>
+          <a:lstStyle/>
+          <a:p>
+            <a:pPr algn="ctr">
+              <a:defRPr sz="3000"/>
+            </a:pPr>
+            <a:r>
+              <a:t>🔌</a:t>
+            </a:r>
+          </a:p>
+        </p:txBody>
+      </p:sp>
+      <p:sp>
+        <p:nvSpPr>
+          <p:cNvPr id="6" name="TextBox 5"/>
+          <p:cNvSpPr txBox="1"/>
+          <p:nvPr/>
+        </p:nvSpPr>
+        <p:spPr>
+          <a:xfrm>
+            <a:off x="731520" y="2377440"/>
+            <a:ext cx="4754880" cy="457200"/>
+          </a:xfrm>
+          <a:prstGeom prst="rect">
+            <a:avLst/>
+          </a:prstGeom>
+          <a:noFill/>
+        </p:spPr>
+        <p:txBody>
+          <a:bodyPr wrap="none">
+            <a:spAutoFit/>
+          </a:bodyPr>
+          <a:lstStyle/>
+          <a:p>
+            <a:pPr algn="ctr">
+              <a:defRPr sz="2200" b="1">
+                <a:solidFill>
+                  <a:srgbClr val="FFFFFF"/>
+                </a:solidFill>
+              </a:defRPr>
+            </a:pPr>
+            <a:r>
+              <a:t>Integrations Panel</a:t>
+            </a:r>
+          </a:p>
+        </p:txBody>
+      </p:sp>
+      <p:sp>
+        <p:nvSpPr>
+          <p:cNvPr id="7" name="TextBox 6"/>
+          <p:cNvSpPr txBox="1"/>
+          <p:nvPr/>
+        </p:nvSpPr>
+        <p:spPr>
+          <a:xfrm>
+            <a:off x="731520" y="2834640"/>
+            <a:ext cx="4754880" cy="457200"/>
+          </a:xfrm>
+          <a:prstGeom prst="rect">
+            <a:avLst/>
+          </a:prstGeom>
+          <a:noFill/>
+        </p:spPr>
+        <p:txBody>
+          <a:bodyPr wrap="none">
+            <a:spAutoFit/>
+          </a:bodyPr>
+          <a:lstStyle/>
+          <a:p>
+            <a:pPr algn="ctr">
+              <a:defRPr sz="1500" i="1">
+                <a:solidFill>
+                  <a:srgbClr val="14B8A6"/>
+                </a:solidFill>
+              </a:defRPr>
+            </a:pPr>
+            <a:r>
+              <a:t>Connect Claude to tools</a:t>
+            </a:r>
+            <a:br/>
+            <a:r>
+              <a:t>you already use:</a:t>
+            </a:r>
+          </a:p>
+        </p:txBody>
+      </p:sp>
+      <p:sp>
+        <p:nvSpPr>
+          <p:cNvPr id="8" name="TextBox 7"/>
+          <p:cNvSpPr txBox="1"/>
+          <p:nvPr/>
+        </p:nvSpPr>
+        <p:spPr>
+          <a:xfrm>
+            <a:off x="731520" y="3383280"/>
+            <a:ext cx="4754880" cy="2286000"/>
           </a:xfrm>
           <a:prstGeom prst="rect">
             <a:avLst/>
@@ -44190,29 +46137,200 @@
           </a:bodyPr>
           <a:lstStyle/>
           <a:p>
-            <a:pPr>
-              <a:defRPr sz="5600" b="1">
+            <a:pPr algn="ctr">
+              <a:defRPr sz="1500">
+                <a:solidFill>
+                  <a:srgbClr val="D1D5DB"/>
+                </a:solidFill>
+              </a:defRPr>
+            </a:pPr>
+            <a:r>
+              <a:t>Slack  •  Notion  •  Jira</a:t>
+            </a:r>
+            <a:br/>
+            <a:r>
+              <a:t>Salesforce  •  Asana  •  Zapier</a:t>
+            </a:r>
+            <a:br/>
+            <a:r>
+              <a:t>Google Workspace  •  GitHub</a:t>
+            </a:r>
+            <a:br/>
+            <a:br/>
+            <a:r>
+              <a:t>Enable in Settings → Integrations</a:t>
+            </a:r>
+            <a:br/>
+            <a:r>
+              <a:t>Claude pulls and pushes data</a:t>
+            </a:r>
+            <a:br/>
+            <a:r>
+              <a:t>directly — no switching apps</a:t>
+            </a:r>
+          </a:p>
+        </p:txBody>
+      </p:sp>
+      <p:sp>
+        <p:nvSpPr>
+          <p:cNvPr id="9" name="Rounded Rectangle 8"/>
+          <p:cNvSpPr/>
+          <p:nvPr/>
+        </p:nvSpPr>
+        <p:spPr>
+          <a:xfrm>
+            <a:off x="6217920" y="1737360"/>
+            <a:ext cx="5303520" cy="4114800"/>
+          </a:xfrm>
+          <a:prstGeom prst="roundRect">
+            <a:avLst/>
+          </a:prstGeom>
+          <a:solidFill>
+            <a:srgbClr val="141A2A"/>
+          </a:solidFill>
+          <a:ln w="19050">
+            <a:solidFill>
+              <a:srgbClr val="14B8A6"/>
+            </a:solidFill>
+          </a:ln>
+        </p:spPr>
+        <p:style>
+          <a:lnRef idx="1">
+            <a:schemeClr val="accent1"/>
+          </a:lnRef>
+          <a:fillRef idx="3">
+            <a:schemeClr val="accent1"/>
+          </a:fillRef>
+          <a:effectRef idx="2">
+            <a:schemeClr val="accent1"/>
+          </a:effectRef>
+          <a:fontRef idx="minor">
+            <a:schemeClr val="lt1"/>
+          </a:fontRef>
+        </p:style>
+        <p:txBody>
+          <a:bodyPr rtlCol="0" anchor="ctr"/>
+          <a:lstStyle/>
+          <a:p>
+            <a:pPr algn="ctr"/>
+          </a:p>
+        </p:txBody>
+      </p:sp>
+      <p:sp>
+        <p:nvSpPr>
+          <p:cNvPr id="10" name="TextBox 9"/>
+          <p:cNvSpPr txBox="1"/>
+          <p:nvPr/>
+        </p:nvSpPr>
+        <p:spPr>
+          <a:xfrm>
+            <a:off x="6492240" y="1920240"/>
+            <a:ext cx="4754880" cy="457200"/>
+          </a:xfrm>
+          <a:prstGeom prst="rect">
+            <a:avLst/>
+          </a:prstGeom>
+          <a:noFill/>
+        </p:spPr>
+        <p:txBody>
+          <a:bodyPr wrap="none">
+            <a:spAutoFit/>
+          </a:bodyPr>
+          <a:lstStyle/>
+          <a:p>
+            <a:pPr algn="ctr">
+              <a:defRPr sz="3000"/>
+            </a:pPr>
+            <a:r>
+              <a:t>🔧</a:t>
+            </a:r>
+          </a:p>
+        </p:txBody>
+      </p:sp>
+      <p:sp>
+        <p:nvSpPr>
+          <p:cNvPr id="11" name="TextBox 10"/>
+          <p:cNvSpPr txBox="1"/>
+          <p:nvPr/>
+        </p:nvSpPr>
+        <p:spPr>
+          <a:xfrm>
+            <a:off x="6492240" y="2377440"/>
+            <a:ext cx="4754880" cy="457200"/>
+          </a:xfrm>
+          <a:prstGeom prst="rect">
+            <a:avLst/>
+          </a:prstGeom>
+          <a:noFill/>
+        </p:spPr>
+        <p:txBody>
+          <a:bodyPr wrap="none">
+            <a:spAutoFit/>
+          </a:bodyPr>
+          <a:lstStyle/>
+          <a:p>
+            <a:pPr algn="ctr">
+              <a:defRPr sz="2200" b="1">
                 <a:solidFill>
                   <a:srgbClr val="FFFFFF"/>
                 </a:solidFill>
               </a:defRPr>
             </a:pPr>
             <a:r>
-              <a:t>Role-Specific Workflows</a:t>
-            </a:r>
-          </a:p>
-        </p:txBody>
-      </p:sp>
-      <p:sp>
-        <p:nvSpPr>
-          <p:cNvPr id="4" name="TextBox 3"/>
-          <p:cNvSpPr txBox="1"/>
-          <p:nvPr/>
-        </p:nvSpPr>
-        <p:spPr>
-          <a:xfrm>
-            <a:off x="457200" y="3840480"/>
-            <a:ext cx="11277295" cy="914400"/>
+              <a:t>Model Context Protocol (MCP)</a:t>
+            </a:r>
+          </a:p>
+        </p:txBody>
+      </p:sp>
+      <p:sp>
+        <p:nvSpPr>
+          <p:cNvPr id="12" name="TextBox 11"/>
+          <p:cNvSpPr txBox="1"/>
+          <p:nvPr/>
+        </p:nvSpPr>
+        <p:spPr>
+          <a:xfrm>
+            <a:off x="6492240" y="2834640"/>
+            <a:ext cx="4754880" cy="457200"/>
+          </a:xfrm>
+          <a:prstGeom prst="rect">
+            <a:avLst/>
+          </a:prstGeom>
+          <a:noFill/>
+        </p:spPr>
+        <p:txBody>
+          <a:bodyPr wrap="none">
+            <a:spAutoFit/>
+          </a:bodyPr>
+          <a:lstStyle/>
+          <a:p>
+            <a:pPr algn="ctr">
+              <a:defRPr sz="1500" i="1">
+                <a:solidFill>
+                  <a:srgbClr val="14B8A6"/>
+                </a:solidFill>
+              </a:defRPr>
+            </a:pPr>
+            <a:r>
+              <a:t>Your IT team can build</a:t>
+            </a:r>
+            <a:br/>
+            <a:r>
+              <a:t>custom connectors:</a:t>
+            </a:r>
+          </a:p>
+        </p:txBody>
+      </p:sp>
+      <p:sp>
+        <p:nvSpPr>
+          <p:cNvPr id="13" name="TextBox 12"/>
+          <p:cNvSpPr txBox="1"/>
+          <p:nvPr/>
+        </p:nvSpPr>
+        <p:spPr>
+          <a:xfrm>
+            <a:off x="6492240" y="3383280"/>
+            <a:ext cx="4754880" cy="2286000"/>
           </a:xfrm>
           <a:prstGeom prst="rect">
             <a:avLst/>
@@ -44225,15 +46343,40 @@
           </a:bodyPr>
           <a:lstStyle/>
           <a:p>
-            <a:pPr>
-              <a:defRPr sz="2400">
-                <a:solidFill>
-                  <a:srgbClr val="8B95A5"/>
-                </a:solidFill>
-              </a:defRPr>
-            </a:pPr>
-            <a:r>
-              <a:t>Claude in action for different jobs</a:t>
+            <a:pPr algn="ctr">
+              <a:defRPr sz="1500">
+                <a:solidFill>
+                  <a:srgbClr val="D1D5DB"/>
+                </a:solidFill>
+              </a:defRPr>
+            </a:pPr>
+            <a:r>
+              <a:t>Connect to internal databases</a:t>
+            </a:r>
+            <a:br/>
+            <a:r>
+              <a:t>Query proprietary APIs</a:t>
+            </a:r>
+            <a:br/>
+            <a:r>
+              <a:t>Access company knowledge bases</a:t>
+            </a:r>
+            <a:br/>
+            <a:r>
+              <a:t>Integrate with any system</a:t>
+            </a:r>
+            <a:br/>
+            <a:br/>
+            <a:r>
+              <a:t>Open standard by Anthropic</a:t>
+            </a:r>
+            <a:br/>
+            <a:r>
+              <a:t>Growing ecosystem of connectors</a:t>
+            </a:r>
+            <a:br/>
+            <a:r>
+              <a:t>Technical deep-dive in Day 3</a:t>
             </a:r>
           </a:p>
         </p:txBody>
@@ -44273,97 +46416,16 @@
       </p:grpSpPr>
       <p:sp>
         <p:nvSpPr>
-          <p:cNvPr id="2" name="TextBox 1"/>
-          <p:cNvSpPr txBox="1"/>
-          <p:nvPr/>
-        </p:nvSpPr>
-        <p:spPr>
-          <a:xfrm>
-            <a:off x="457200" y="365760"/>
-            <a:ext cx="11277295" cy="731520"/>
-          </a:xfrm>
-          <a:prstGeom prst="rect">
-            <a:avLst/>
-          </a:prstGeom>
-          <a:noFill/>
-        </p:spPr>
-        <p:txBody>
-          <a:bodyPr wrap="none">
-            <a:spAutoFit/>
-          </a:bodyPr>
-          <a:lstStyle/>
-          <a:p>
-            <a:pPr algn="ctr">
-              <a:defRPr sz="3600" b="1">
-                <a:solidFill>
-                  <a:srgbClr val="FFFFFF"/>
-                </a:solidFill>
-              </a:defRPr>
-            </a:pPr>
-            <a:r>
-              <a:t>Marketing Workflow</a:t>
-            </a:r>
-          </a:p>
-        </p:txBody>
-      </p:sp>
-      <p:sp>
-        <p:nvSpPr>
-          <p:cNvPr id="3" name="Rounded Rectangle 2"/>
+          <p:cNvPr id="2" name="Rectangle 1"/>
           <p:cNvSpPr/>
           <p:nvPr/>
         </p:nvSpPr>
         <p:spPr>
           <a:xfrm>
-            <a:off x="2941167" y="1371600"/>
-            <a:ext cx="822960" cy="822960"/>
-          </a:xfrm>
-          <a:prstGeom prst="roundRect">
-            <a:avLst/>
-          </a:prstGeom>
-          <a:solidFill>
-            <a:srgbClr val="141A26"/>
-          </a:solidFill>
-          <a:ln w="25400">
-            <a:solidFill>
-              <a:srgbClr val="00D4AA"/>
-            </a:solidFill>
-          </a:ln>
-        </p:spPr>
-        <p:style>
-          <a:lnRef idx="1">
-            <a:schemeClr val="accent1"/>
-          </a:lnRef>
-          <a:fillRef idx="3">
-            <a:schemeClr val="accent1"/>
-          </a:fillRef>
-          <a:effectRef idx="2">
-            <a:schemeClr val="accent1"/>
-          </a:effectRef>
-          <a:fontRef idx="minor">
-            <a:schemeClr val="lt1"/>
-          </a:fontRef>
-        </p:style>
-        <p:txBody>
-          <a:bodyPr rtlCol="0" anchor="ctr"/>
-          <a:lstStyle/>
-          <a:p>
-            <a:pPr algn="ctr"/>
-            <a:endParaRPr/>
-          </a:p>
-        </p:txBody>
-      </p:sp>
-      <p:sp>
-        <p:nvSpPr>
-          <p:cNvPr id="4" name="Oval 3"/>
-          <p:cNvSpPr/>
-          <p:nvPr/>
-        </p:nvSpPr>
-        <p:spPr>
-          <a:xfrm>
-            <a:off x="3604107" y="1211580"/>
-            <a:ext cx="320040" cy="320040"/>
-          </a:xfrm>
-          <a:prstGeom prst="ellipse">
+            <a:off x="0" y="1828800"/>
+            <a:ext cx="137160" cy="3200400"/>
+          </a:xfrm>
+          <a:prstGeom prst="rect">
             <a:avLst/>
           </a:prstGeom>
           <a:solidFill>
@@ -44398,935 +46460,14 @@
       </p:sp>
       <p:sp>
         <p:nvSpPr>
-          <p:cNvPr id="5" name="TextBox 4"/>
-          <p:cNvSpPr txBox="1"/>
-          <p:nvPr/>
-        </p:nvSpPr>
-        <p:spPr>
-          <a:xfrm>
-            <a:off x="3604107" y="1211580"/>
-            <a:ext cx="320040" cy="320040"/>
-          </a:xfrm>
-          <a:prstGeom prst="rect">
-            <a:avLst/>
-          </a:prstGeom>
-          <a:noFill/>
-        </p:spPr>
-        <p:txBody>
-          <a:bodyPr wrap="none" anchor="ctr">
-            <a:spAutoFit/>
-          </a:bodyPr>
-          <a:lstStyle/>
-          <a:p>
-            <a:pPr algn="ctr">
-              <a:defRPr sz="1400" b="1">
-                <a:solidFill>
-                  <a:srgbClr val="0B0F1A"/>
-                </a:solidFill>
-              </a:defRPr>
-            </a:pPr>
-            <a:r>
-              <a:t>1</a:t>
-            </a:r>
-          </a:p>
-        </p:txBody>
-      </p:sp>
-      <p:sp>
-        <p:nvSpPr>
-          <p:cNvPr id="6" name="TextBox 5"/>
-          <p:cNvSpPr txBox="1"/>
-          <p:nvPr/>
-        </p:nvSpPr>
-        <p:spPr>
-          <a:xfrm>
-            <a:off x="2941167" y="1371600"/>
-            <a:ext cx="822960" cy="822960"/>
-          </a:xfrm>
-          <a:prstGeom prst="rect">
-            <a:avLst/>
-          </a:prstGeom>
-          <a:noFill/>
-        </p:spPr>
-        <p:txBody>
-          <a:bodyPr wrap="none" anchor="ctr">
-            <a:spAutoFit/>
-          </a:bodyPr>
-          <a:lstStyle/>
-          <a:p>
-            <a:pPr algn="ctr">
-              <a:defRPr sz="2800" b="1">
-                <a:solidFill>
-                  <a:srgbClr val="00D4AA"/>
-                </a:solidFill>
-              </a:defRPr>
-            </a:pPr>
-            <a:r>
-              <a:t>1</a:t>
-            </a:r>
-          </a:p>
-        </p:txBody>
-      </p:sp>
-      <p:sp>
-        <p:nvSpPr>
-          <p:cNvPr id="7" name="Right Arrow 6"/>
-          <p:cNvSpPr/>
-          <p:nvPr/>
-        </p:nvSpPr>
-        <p:spPr>
-          <a:xfrm>
-            <a:off x="3855567" y="1645920"/>
-            <a:ext cx="365760" cy="274320"/>
-          </a:xfrm>
-          <a:prstGeom prst="rightArrow">
-            <a:avLst/>
-          </a:prstGeom>
-          <a:solidFill>
-            <a:srgbClr val="8B95A5"/>
-          </a:solidFill>
-          <a:ln>
-            <a:noFill/>
-          </a:ln>
-        </p:spPr>
-        <p:style>
-          <a:lnRef idx="1">
-            <a:schemeClr val="accent1"/>
-          </a:lnRef>
-          <a:fillRef idx="3">
-            <a:schemeClr val="accent1"/>
-          </a:fillRef>
-          <a:effectRef idx="2">
-            <a:schemeClr val="accent1"/>
-          </a:effectRef>
-          <a:fontRef idx="minor">
-            <a:schemeClr val="lt1"/>
-          </a:fontRef>
-        </p:style>
-        <p:txBody>
-          <a:bodyPr rtlCol="0" anchor="ctr"/>
-          <a:lstStyle/>
-          <a:p>
-            <a:pPr algn="ctr"/>
-            <a:endParaRPr/>
-          </a:p>
-        </p:txBody>
-      </p:sp>
-      <p:sp>
-        <p:nvSpPr>
-          <p:cNvPr id="8" name="Rounded Rectangle 7"/>
-          <p:cNvSpPr/>
-          <p:nvPr/>
-        </p:nvSpPr>
-        <p:spPr>
-          <a:xfrm>
-            <a:off x="4312767" y="1371600"/>
-            <a:ext cx="822960" cy="822960"/>
-          </a:xfrm>
-          <a:prstGeom prst="roundRect">
-            <a:avLst/>
-          </a:prstGeom>
-          <a:solidFill>
-            <a:srgbClr val="141A26"/>
-          </a:solidFill>
-          <a:ln w="25400">
-            <a:solidFill>
-              <a:srgbClr val="00D4AA"/>
-            </a:solidFill>
-          </a:ln>
-        </p:spPr>
-        <p:style>
-          <a:lnRef idx="1">
-            <a:schemeClr val="accent1"/>
-          </a:lnRef>
-          <a:fillRef idx="3">
-            <a:schemeClr val="accent1"/>
-          </a:fillRef>
-          <a:effectRef idx="2">
-            <a:schemeClr val="accent1"/>
-          </a:effectRef>
-          <a:fontRef idx="minor">
-            <a:schemeClr val="lt1"/>
-          </a:fontRef>
-        </p:style>
-        <p:txBody>
-          <a:bodyPr rtlCol="0" anchor="ctr"/>
-          <a:lstStyle/>
-          <a:p>
-            <a:pPr algn="ctr"/>
-            <a:endParaRPr/>
-          </a:p>
-        </p:txBody>
-      </p:sp>
-      <p:sp>
-        <p:nvSpPr>
-          <p:cNvPr id="9" name="Oval 8"/>
-          <p:cNvSpPr/>
-          <p:nvPr/>
-        </p:nvSpPr>
-        <p:spPr>
-          <a:xfrm>
-            <a:off x="4975707" y="1211580"/>
-            <a:ext cx="320040" cy="320040"/>
-          </a:xfrm>
-          <a:prstGeom prst="ellipse">
-            <a:avLst/>
-          </a:prstGeom>
-          <a:solidFill>
-            <a:srgbClr val="00D4AA"/>
-          </a:solidFill>
-          <a:ln>
-            <a:noFill/>
-          </a:ln>
-        </p:spPr>
-        <p:style>
-          <a:lnRef idx="1">
-            <a:schemeClr val="accent1"/>
-          </a:lnRef>
-          <a:fillRef idx="3">
-            <a:schemeClr val="accent1"/>
-          </a:fillRef>
-          <a:effectRef idx="2">
-            <a:schemeClr val="accent1"/>
-          </a:effectRef>
-          <a:fontRef idx="minor">
-            <a:schemeClr val="lt1"/>
-          </a:fontRef>
-        </p:style>
-        <p:txBody>
-          <a:bodyPr rtlCol="0" anchor="ctr"/>
-          <a:lstStyle/>
-          <a:p>
-            <a:pPr algn="ctr"/>
-            <a:endParaRPr/>
-          </a:p>
-        </p:txBody>
-      </p:sp>
-      <p:sp>
-        <p:nvSpPr>
-          <p:cNvPr id="10" name="TextBox 9"/>
-          <p:cNvSpPr txBox="1"/>
-          <p:nvPr/>
-        </p:nvSpPr>
-        <p:spPr>
-          <a:xfrm>
-            <a:off x="4975707" y="1211580"/>
-            <a:ext cx="320040" cy="320040"/>
-          </a:xfrm>
-          <a:prstGeom prst="rect">
-            <a:avLst/>
-          </a:prstGeom>
-          <a:noFill/>
-        </p:spPr>
-        <p:txBody>
-          <a:bodyPr wrap="none" anchor="ctr">
-            <a:spAutoFit/>
-          </a:bodyPr>
-          <a:lstStyle/>
-          <a:p>
-            <a:pPr algn="ctr">
-              <a:defRPr sz="1400" b="1">
-                <a:solidFill>
-                  <a:srgbClr val="0B0F1A"/>
-                </a:solidFill>
-              </a:defRPr>
-            </a:pPr>
-            <a:r>
-              <a:t>2</a:t>
-            </a:r>
-          </a:p>
-        </p:txBody>
-      </p:sp>
-      <p:sp>
-        <p:nvSpPr>
-          <p:cNvPr id="11" name="TextBox 10"/>
-          <p:cNvSpPr txBox="1"/>
-          <p:nvPr/>
-        </p:nvSpPr>
-        <p:spPr>
-          <a:xfrm>
-            <a:off x="4312767" y="1371600"/>
-            <a:ext cx="822960" cy="822960"/>
-          </a:xfrm>
-          <a:prstGeom prst="rect">
-            <a:avLst/>
-          </a:prstGeom>
-          <a:noFill/>
-        </p:spPr>
-        <p:txBody>
-          <a:bodyPr wrap="none" anchor="ctr">
-            <a:spAutoFit/>
-          </a:bodyPr>
-          <a:lstStyle/>
-          <a:p>
-            <a:pPr algn="ctr">
-              <a:defRPr sz="2800" b="1">
-                <a:solidFill>
-                  <a:srgbClr val="00D4AA"/>
-                </a:solidFill>
-              </a:defRPr>
-            </a:pPr>
-            <a:r>
-              <a:t>2</a:t>
-            </a:r>
-          </a:p>
-        </p:txBody>
-      </p:sp>
-      <p:sp>
-        <p:nvSpPr>
-          <p:cNvPr id="12" name="Right Arrow 11"/>
-          <p:cNvSpPr/>
-          <p:nvPr/>
-        </p:nvSpPr>
-        <p:spPr>
-          <a:xfrm>
-            <a:off x="5227167" y="1645920"/>
-            <a:ext cx="365760" cy="274320"/>
-          </a:xfrm>
-          <a:prstGeom prst="rightArrow">
-            <a:avLst/>
-          </a:prstGeom>
-          <a:solidFill>
-            <a:srgbClr val="8B95A5"/>
-          </a:solidFill>
-          <a:ln>
-            <a:noFill/>
-          </a:ln>
-        </p:spPr>
-        <p:style>
-          <a:lnRef idx="1">
-            <a:schemeClr val="accent1"/>
-          </a:lnRef>
-          <a:fillRef idx="3">
-            <a:schemeClr val="accent1"/>
-          </a:fillRef>
-          <a:effectRef idx="2">
-            <a:schemeClr val="accent1"/>
-          </a:effectRef>
-          <a:fontRef idx="minor">
-            <a:schemeClr val="lt1"/>
-          </a:fontRef>
-        </p:style>
-        <p:txBody>
-          <a:bodyPr rtlCol="0" anchor="ctr"/>
-          <a:lstStyle/>
-          <a:p>
-            <a:pPr algn="ctr"/>
-            <a:endParaRPr/>
-          </a:p>
-        </p:txBody>
-      </p:sp>
-      <p:sp>
-        <p:nvSpPr>
-          <p:cNvPr id="13" name="Rounded Rectangle 12"/>
-          <p:cNvSpPr/>
-          <p:nvPr/>
-        </p:nvSpPr>
-        <p:spPr>
-          <a:xfrm>
-            <a:off x="5684367" y="1371600"/>
-            <a:ext cx="822960" cy="822960"/>
-          </a:xfrm>
-          <a:prstGeom prst="roundRect">
-            <a:avLst/>
-          </a:prstGeom>
-          <a:solidFill>
-            <a:srgbClr val="141A26"/>
-          </a:solidFill>
-          <a:ln w="25400">
-            <a:solidFill>
-              <a:srgbClr val="00D4AA"/>
-            </a:solidFill>
-          </a:ln>
-        </p:spPr>
-        <p:style>
-          <a:lnRef idx="1">
-            <a:schemeClr val="accent1"/>
-          </a:lnRef>
-          <a:fillRef idx="3">
-            <a:schemeClr val="accent1"/>
-          </a:fillRef>
-          <a:effectRef idx="2">
-            <a:schemeClr val="accent1"/>
-          </a:effectRef>
-          <a:fontRef idx="minor">
-            <a:schemeClr val="lt1"/>
-          </a:fontRef>
-        </p:style>
-        <p:txBody>
-          <a:bodyPr rtlCol="0" anchor="ctr"/>
-          <a:lstStyle/>
-          <a:p>
-            <a:pPr algn="ctr"/>
-            <a:endParaRPr/>
-          </a:p>
-        </p:txBody>
-      </p:sp>
-      <p:sp>
-        <p:nvSpPr>
-          <p:cNvPr id="14" name="Oval 13"/>
-          <p:cNvSpPr/>
-          <p:nvPr/>
-        </p:nvSpPr>
-        <p:spPr>
-          <a:xfrm>
-            <a:off x="6347307" y="1211580"/>
-            <a:ext cx="320040" cy="320040"/>
-          </a:xfrm>
-          <a:prstGeom prst="ellipse">
-            <a:avLst/>
-          </a:prstGeom>
-          <a:solidFill>
-            <a:srgbClr val="00D4AA"/>
-          </a:solidFill>
-          <a:ln>
-            <a:noFill/>
-          </a:ln>
-        </p:spPr>
-        <p:style>
-          <a:lnRef idx="1">
-            <a:schemeClr val="accent1"/>
-          </a:lnRef>
-          <a:fillRef idx="3">
-            <a:schemeClr val="accent1"/>
-          </a:fillRef>
-          <a:effectRef idx="2">
-            <a:schemeClr val="accent1"/>
-          </a:effectRef>
-          <a:fontRef idx="minor">
-            <a:schemeClr val="lt1"/>
-          </a:fontRef>
-        </p:style>
-        <p:txBody>
-          <a:bodyPr rtlCol="0" anchor="ctr"/>
-          <a:lstStyle/>
-          <a:p>
-            <a:pPr algn="ctr"/>
-            <a:endParaRPr/>
-          </a:p>
-        </p:txBody>
-      </p:sp>
-      <p:sp>
-        <p:nvSpPr>
-          <p:cNvPr id="15" name="TextBox 14"/>
-          <p:cNvSpPr txBox="1"/>
-          <p:nvPr/>
-        </p:nvSpPr>
-        <p:spPr>
-          <a:xfrm>
-            <a:off x="6347307" y="1211580"/>
-            <a:ext cx="320040" cy="320040"/>
-          </a:xfrm>
-          <a:prstGeom prst="rect">
-            <a:avLst/>
-          </a:prstGeom>
-          <a:noFill/>
-        </p:spPr>
-        <p:txBody>
-          <a:bodyPr wrap="none" anchor="ctr">
-            <a:spAutoFit/>
-          </a:bodyPr>
-          <a:lstStyle/>
-          <a:p>
-            <a:pPr algn="ctr">
-              <a:defRPr sz="1400" b="1">
-                <a:solidFill>
-                  <a:srgbClr val="0B0F1A"/>
-                </a:solidFill>
-              </a:defRPr>
-            </a:pPr>
-            <a:r>
-              <a:t>3</a:t>
-            </a:r>
-          </a:p>
-        </p:txBody>
-      </p:sp>
-      <p:sp>
-        <p:nvSpPr>
-          <p:cNvPr id="16" name="TextBox 15"/>
-          <p:cNvSpPr txBox="1"/>
-          <p:nvPr/>
-        </p:nvSpPr>
-        <p:spPr>
-          <a:xfrm>
-            <a:off x="5684367" y="1371600"/>
-            <a:ext cx="822960" cy="822960"/>
-          </a:xfrm>
-          <a:prstGeom prst="rect">
-            <a:avLst/>
-          </a:prstGeom>
-          <a:noFill/>
-        </p:spPr>
-        <p:txBody>
-          <a:bodyPr wrap="none" anchor="ctr">
-            <a:spAutoFit/>
-          </a:bodyPr>
-          <a:lstStyle/>
-          <a:p>
-            <a:pPr algn="ctr">
-              <a:defRPr sz="2800" b="1">
-                <a:solidFill>
-                  <a:srgbClr val="00D4AA"/>
-                </a:solidFill>
-              </a:defRPr>
-            </a:pPr>
-            <a:r>
-              <a:t>3</a:t>
-            </a:r>
-          </a:p>
-        </p:txBody>
-      </p:sp>
-      <p:sp>
-        <p:nvSpPr>
-          <p:cNvPr id="17" name="Right Arrow 16"/>
-          <p:cNvSpPr/>
-          <p:nvPr/>
-        </p:nvSpPr>
-        <p:spPr>
-          <a:xfrm>
-            <a:off x="6598767" y="1645920"/>
-            <a:ext cx="365760" cy="274320"/>
-          </a:xfrm>
-          <a:prstGeom prst="rightArrow">
-            <a:avLst/>
-          </a:prstGeom>
-          <a:solidFill>
-            <a:srgbClr val="8B95A5"/>
-          </a:solidFill>
-          <a:ln>
-            <a:noFill/>
-          </a:ln>
-        </p:spPr>
-        <p:style>
-          <a:lnRef idx="1">
-            <a:schemeClr val="accent1"/>
-          </a:lnRef>
-          <a:fillRef idx="3">
-            <a:schemeClr val="accent1"/>
-          </a:fillRef>
-          <a:effectRef idx="2">
-            <a:schemeClr val="accent1"/>
-          </a:effectRef>
-          <a:fontRef idx="minor">
-            <a:schemeClr val="lt1"/>
-          </a:fontRef>
-        </p:style>
-        <p:txBody>
-          <a:bodyPr rtlCol="0" anchor="ctr"/>
-          <a:lstStyle/>
-          <a:p>
-            <a:pPr algn="ctr"/>
-            <a:endParaRPr/>
-          </a:p>
-        </p:txBody>
-      </p:sp>
-      <p:sp>
-        <p:nvSpPr>
-          <p:cNvPr id="18" name="Rounded Rectangle 17"/>
-          <p:cNvSpPr/>
-          <p:nvPr/>
-        </p:nvSpPr>
-        <p:spPr>
-          <a:xfrm>
-            <a:off x="7055967" y="1371600"/>
-            <a:ext cx="822960" cy="822960"/>
-          </a:xfrm>
-          <a:prstGeom prst="roundRect">
-            <a:avLst/>
-          </a:prstGeom>
-          <a:solidFill>
-            <a:srgbClr val="141A26"/>
-          </a:solidFill>
-          <a:ln w="25400">
-            <a:solidFill>
-              <a:srgbClr val="00D4AA"/>
-            </a:solidFill>
-          </a:ln>
-        </p:spPr>
-        <p:style>
-          <a:lnRef idx="1">
-            <a:schemeClr val="accent1"/>
-          </a:lnRef>
-          <a:fillRef idx="3">
-            <a:schemeClr val="accent1"/>
-          </a:fillRef>
-          <a:effectRef idx="2">
-            <a:schemeClr val="accent1"/>
-          </a:effectRef>
-          <a:fontRef idx="minor">
-            <a:schemeClr val="lt1"/>
-          </a:fontRef>
-        </p:style>
-        <p:txBody>
-          <a:bodyPr rtlCol="0" anchor="ctr"/>
-          <a:lstStyle/>
-          <a:p>
-            <a:pPr algn="ctr"/>
-            <a:endParaRPr/>
-          </a:p>
-        </p:txBody>
-      </p:sp>
-      <p:sp>
-        <p:nvSpPr>
-          <p:cNvPr id="19" name="Oval 18"/>
-          <p:cNvSpPr/>
-          <p:nvPr/>
-        </p:nvSpPr>
-        <p:spPr>
-          <a:xfrm>
-            <a:off x="7718907" y="1211580"/>
-            <a:ext cx="320040" cy="320040"/>
-          </a:xfrm>
-          <a:prstGeom prst="ellipse">
-            <a:avLst/>
-          </a:prstGeom>
-          <a:solidFill>
-            <a:srgbClr val="00D4AA"/>
-          </a:solidFill>
-          <a:ln>
-            <a:noFill/>
-          </a:ln>
-        </p:spPr>
-        <p:style>
-          <a:lnRef idx="1">
-            <a:schemeClr val="accent1"/>
-          </a:lnRef>
-          <a:fillRef idx="3">
-            <a:schemeClr val="accent1"/>
-          </a:fillRef>
-          <a:effectRef idx="2">
-            <a:schemeClr val="accent1"/>
-          </a:effectRef>
-          <a:fontRef idx="minor">
-            <a:schemeClr val="lt1"/>
-          </a:fontRef>
-        </p:style>
-        <p:txBody>
-          <a:bodyPr rtlCol="0" anchor="ctr"/>
-          <a:lstStyle/>
-          <a:p>
-            <a:pPr algn="ctr"/>
-            <a:endParaRPr/>
-          </a:p>
-        </p:txBody>
-      </p:sp>
-      <p:sp>
-        <p:nvSpPr>
-          <p:cNvPr id="20" name="TextBox 19"/>
-          <p:cNvSpPr txBox="1"/>
-          <p:nvPr/>
-        </p:nvSpPr>
-        <p:spPr>
-          <a:xfrm>
-            <a:off x="7718907" y="1211580"/>
-            <a:ext cx="320040" cy="320040"/>
-          </a:xfrm>
-          <a:prstGeom prst="rect">
-            <a:avLst/>
-          </a:prstGeom>
-          <a:noFill/>
-        </p:spPr>
-        <p:txBody>
-          <a:bodyPr wrap="none" anchor="ctr">
-            <a:spAutoFit/>
-          </a:bodyPr>
-          <a:lstStyle/>
-          <a:p>
-            <a:pPr algn="ctr">
-              <a:defRPr sz="1400" b="1">
-                <a:solidFill>
-                  <a:srgbClr val="0B0F1A"/>
-                </a:solidFill>
-              </a:defRPr>
-            </a:pPr>
-            <a:r>
-              <a:t>4</a:t>
-            </a:r>
-          </a:p>
-        </p:txBody>
-      </p:sp>
-      <p:sp>
-        <p:nvSpPr>
-          <p:cNvPr id="21" name="TextBox 20"/>
-          <p:cNvSpPr txBox="1"/>
-          <p:nvPr/>
-        </p:nvSpPr>
-        <p:spPr>
-          <a:xfrm>
-            <a:off x="7055967" y="1371600"/>
-            <a:ext cx="822960" cy="822960"/>
-          </a:xfrm>
-          <a:prstGeom prst="rect">
-            <a:avLst/>
-          </a:prstGeom>
-          <a:noFill/>
-        </p:spPr>
-        <p:txBody>
-          <a:bodyPr wrap="none" anchor="ctr">
-            <a:spAutoFit/>
-          </a:bodyPr>
-          <a:lstStyle/>
-          <a:p>
-            <a:pPr algn="ctr">
-              <a:defRPr sz="2800" b="1">
-                <a:solidFill>
-                  <a:srgbClr val="00D4AA"/>
-                </a:solidFill>
-              </a:defRPr>
-            </a:pPr>
-            <a:r>
-              <a:t>4</a:t>
-            </a:r>
-          </a:p>
-        </p:txBody>
-      </p:sp>
-      <p:sp>
-        <p:nvSpPr>
-          <p:cNvPr id="22" name="Right Arrow 21"/>
-          <p:cNvSpPr/>
-          <p:nvPr/>
-        </p:nvSpPr>
-        <p:spPr>
-          <a:xfrm>
-            <a:off x="7970367" y="1645920"/>
-            <a:ext cx="365760" cy="274320"/>
-          </a:xfrm>
-          <a:prstGeom prst="rightArrow">
-            <a:avLst/>
-          </a:prstGeom>
-          <a:solidFill>
-            <a:srgbClr val="8B95A5"/>
-          </a:solidFill>
-          <a:ln>
-            <a:noFill/>
-          </a:ln>
-        </p:spPr>
-        <p:style>
-          <a:lnRef idx="1">
-            <a:schemeClr val="accent1"/>
-          </a:lnRef>
-          <a:fillRef idx="3">
-            <a:schemeClr val="accent1"/>
-          </a:fillRef>
-          <a:effectRef idx="2">
-            <a:schemeClr val="accent1"/>
-          </a:effectRef>
-          <a:fontRef idx="minor">
-            <a:schemeClr val="lt1"/>
-          </a:fontRef>
-        </p:style>
-        <p:txBody>
-          <a:bodyPr rtlCol="0" anchor="ctr"/>
-          <a:lstStyle/>
-          <a:p>
-            <a:pPr algn="ctr"/>
-            <a:endParaRPr/>
-          </a:p>
-        </p:txBody>
-      </p:sp>
-      <p:sp>
-        <p:nvSpPr>
-          <p:cNvPr id="23" name="Rounded Rectangle 22"/>
-          <p:cNvSpPr/>
-          <p:nvPr/>
-        </p:nvSpPr>
-        <p:spPr>
-          <a:xfrm>
-            <a:off x="8427567" y="1371600"/>
-            <a:ext cx="822960" cy="822960"/>
-          </a:xfrm>
-          <a:prstGeom prst="roundRect">
-            <a:avLst/>
-          </a:prstGeom>
-          <a:solidFill>
-            <a:srgbClr val="141A26"/>
-          </a:solidFill>
-          <a:ln w="25400">
-            <a:solidFill>
-              <a:srgbClr val="00D4AA"/>
-            </a:solidFill>
-          </a:ln>
-        </p:spPr>
-        <p:style>
-          <a:lnRef idx="1">
-            <a:schemeClr val="accent1"/>
-          </a:lnRef>
-          <a:fillRef idx="3">
-            <a:schemeClr val="accent1"/>
-          </a:fillRef>
-          <a:effectRef idx="2">
-            <a:schemeClr val="accent1"/>
-          </a:effectRef>
-          <a:fontRef idx="minor">
-            <a:schemeClr val="lt1"/>
-          </a:fontRef>
-        </p:style>
-        <p:txBody>
-          <a:bodyPr rtlCol="0" anchor="ctr"/>
-          <a:lstStyle/>
-          <a:p>
-            <a:pPr algn="ctr"/>
-            <a:endParaRPr/>
-          </a:p>
-        </p:txBody>
-      </p:sp>
-      <p:sp>
-        <p:nvSpPr>
-          <p:cNvPr id="24" name="Oval 23"/>
-          <p:cNvSpPr/>
-          <p:nvPr/>
-        </p:nvSpPr>
-        <p:spPr>
-          <a:xfrm>
-            <a:off x="9090507" y="1211580"/>
-            <a:ext cx="320040" cy="320040"/>
-          </a:xfrm>
-          <a:prstGeom prst="ellipse">
-            <a:avLst/>
-          </a:prstGeom>
-          <a:solidFill>
-            <a:srgbClr val="00D4AA"/>
-          </a:solidFill>
-          <a:ln>
-            <a:noFill/>
-          </a:ln>
-        </p:spPr>
-        <p:style>
-          <a:lnRef idx="1">
-            <a:schemeClr val="accent1"/>
-          </a:lnRef>
-          <a:fillRef idx="3">
-            <a:schemeClr val="accent1"/>
-          </a:fillRef>
-          <a:effectRef idx="2">
-            <a:schemeClr val="accent1"/>
-          </a:effectRef>
-          <a:fontRef idx="minor">
-            <a:schemeClr val="lt1"/>
-          </a:fontRef>
-        </p:style>
-        <p:txBody>
-          <a:bodyPr rtlCol="0" anchor="ctr"/>
-          <a:lstStyle/>
-          <a:p>
-            <a:pPr algn="ctr"/>
-            <a:endParaRPr/>
-          </a:p>
-        </p:txBody>
-      </p:sp>
-      <p:sp>
-        <p:nvSpPr>
-          <p:cNvPr id="25" name="TextBox 24"/>
-          <p:cNvSpPr txBox="1"/>
-          <p:nvPr/>
-        </p:nvSpPr>
-        <p:spPr>
-          <a:xfrm>
-            <a:off x="9090507" y="1211580"/>
-            <a:ext cx="320040" cy="320040"/>
-          </a:xfrm>
-          <a:prstGeom prst="rect">
-            <a:avLst/>
-          </a:prstGeom>
-          <a:noFill/>
-        </p:spPr>
-        <p:txBody>
-          <a:bodyPr wrap="none" anchor="ctr">
-            <a:spAutoFit/>
-          </a:bodyPr>
-          <a:lstStyle/>
-          <a:p>
-            <a:pPr algn="ctr">
-              <a:defRPr sz="1400" b="1">
-                <a:solidFill>
-                  <a:srgbClr val="0B0F1A"/>
-                </a:solidFill>
-              </a:defRPr>
-            </a:pPr>
-            <a:r>
-              <a:t>5</a:t>
-            </a:r>
-          </a:p>
-        </p:txBody>
-      </p:sp>
-      <p:sp>
-        <p:nvSpPr>
-          <p:cNvPr id="26" name="TextBox 25"/>
-          <p:cNvSpPr txBox="1"/>
-          <p:nvPr/>
-        </p:nvSpPr>
-        <p:spPr>
-          <a:xfrm>
-            <a:off x="8427567" y="1371600"/>
-            <a:ext cx="822960" cy="822960"/>
-          </a:xfrm>
-          <a:prstGeom prst="rect">
-            <a:avLst/>
-          </a:prstGeom>
-          <a:noFill/>
-        </p:spPr>
-        <p:txBody>
-          <a:bodyPr wrap="none" anchor="ctr">
-            <a:spAutoFit/>
-          </a:bodyPr>
-          <a:lstStyle/>
-          <a:p>
-            <a:pPr algn="ctr">
-              <a:defRPr sz="2800" b="1">
-                <a:solidFill>
-                  <a:srgbClr val="00D4AA"/>
-                </a:solidFill>
-              </a:defRPr>
-            </a:pPr>
-            <a:r>
-              <a:t>5</a:t>
-            </a:r>
-          </a:p>
-        </p:txBody>
-      </p:sp>
-      <p:sp>
-        <p:nvSpPr>
-          <p:cNvPr id="27" name="TextBox 26"/>
-          <p:cNvSpPr txBox="1"/>
-          <p:nvPr/>
-        </p:nvSpPr>
-        <p:spPr>
-          <a:xfrm>
-            <a:off x="1371600" y="2743200"/>
-            <a:ext cx="457200" cy="457200"/>
-          </a:xfrm>
-          <a:prstGeom prst="rect">
-            <a:avLst/>
-          </a:prstGeom>
-          <a:noFill/>
-        </p:spPr>
-        <p:txBody>
-          <a:bodyPr wrap="none">
-            <a:spAutoFit/>
-          </a:bodyPr>
-          <a:lstStyle/>
-          <a:p>
-            <a:pPr>
-              <a:defRPr sz="2000" b="1">
-                <a:solidFill>
-                  <a:srgbClr val="00D4AA"/>
-                </a:solidFill>
-              </a:defRPr>
-            </a:pPr>
-            <a:r>
-              <a:t>1</a:t>
-            </a:r>
-          </a:p>
-        </p:txBody>
-      </p:sp>
-      <p:sp>
-        <p:nvSpPr>
-          <p:cNvPr id="28" name="TextBox 27"/>
-          <p:cNvSpPr txBox="1"/>
-          <p:nvPr/>
-        </p:nvSpPr>
-        <p:spPr>
-          <a:xfrm>
-            <a:off x="1828800" y="2743200"/>
-            <a:ext cx="8991295" cy="548640"/>
+          <p:cNvPr id="3" name="TextBox 2"/>
+          <p:cNvSpPr txBox="1"/>
+          <p:nvPr/>
+        </p:nvSpPr>
+        <p:spPr>
+          <a:xfrm>
+            <a:off x="457200" y="2286000"/>
+            <a:ext cx="11277295" cy="1371600"/>
           </a:xfrm>
           <a:prstGeom prst="rect">
             <a:avLst/>
@@ -45340,63 +46481,28 @@
           <a:lstStyle/>
           <a:p>
             <a:pPr>
-              <a:defRPr sz="1800">
+              <a:defRPr sz="5600" b="1">
                 <a:solidFill>
                   <a:srgbClr val="FFFFFF"/>
                 </a:solidFill>
               </a:defRPr>
             </a:pPr>
             <a:r>
-              <a:t>Upload competitor research PDFs</a:t>
-            </a:r>
-          </a:p>
-        </p:txBody>
-      </p:sp>
-      <p:sp>
-        <p:nvSpPr>
-          <p:cNvPr id="29" name="TextBox 28"/>
-          <p:cNvSpPr txBox="1"/>
-          <p:nvPr/>
-        </p:nvSpPr>
-        <p:spPr>
-          <a:xfrm>
-            <a:off x="1371600" y="3383280"/>
-            <a:ext cx="457200" cy="457200"/>
-          </a:xfrm>
-          <a:prstGeom prst="rect">
-            <a:avLst/>
-          </a:prstGeom>
-          <a:noFill/>
-        </p:spPr>
-        <p:txBody>
-          <a:bodyPr wrap="none">
-            <a:spAutoFit/>
-          </a:bodyPr>
-          <a:lstStyle/>
-          <a:p>
-            <a:pPr>
-              <a:defRPr sz="2000" b="1">
-                <a:solidFill>
-                  <a:srgbClr val="00D4AA"/>
-                </a:solidFill>
-              </a:defRPr>
-            </a:pPr>
-            <a:r>
-              <a:t>2</a:t>
-            </a:r>
-          </a:p>
-        </p:txBody>
-      </p:sp>
-      <p:sp>
-        <p:nvSpPr>
-          <p:cNvPr id="30" name="TextBox 29"/>
-          <p:cNvSpPr txBox="1"/>
-          <p:nvPr/>
-        </p:nvSpPr>
-        <p:spPr>
-          <a:xfrm>
-            <a:off x="1828800" y="3383280"/>
-            <a:ext cx="8991295" cy="548640"/>
+              <a:t>Role-Specific Workflows</a:t>
+            </a:r>
+          </a:p>
+        </p:txBody>
+      </p:sp>
+      <p:sp>
+        <p:nvSpPr>
+          <p:cNvPr id="4" name="TextBox 3"/>
+          <p:cNvSpPr txBox="1"/>
+          <p:nvPr/>
+        </p:nvSpPr>
+        <p:spPr>
+          <a:xfrm>
+            <a:off x="457200" y="3840480"/>
+            <a:ext cx="11277295" cy="914400"/>
           </a:xfrm>
           <a:prstGeom prst="rect">
             <a:avLst/>
@@ -45410,224 +46516,14 @@
           <a:lstStyle/>
           <a:p>
             <a:pPr>
-              <a:defRPr sz="1800">
-                <a:solidFill>
-                  <a:srgbClr val="FFFFFF"/>
-                </a:solidFill>
-              </a:defRPr>
-            </a:pPr>
-            <a:r>
-              <a:t>Ask: 'Summarize their positioning'</a:t>
-            </a:r>
-          </a:p>
-        </p:txBody>
-      </p:sp>
-      <p:sp>
-        <p:nvSpPr>
-          <p:cNvPr id="31" name="TextBox 30"/>
-          <p:cNvSpPr txBox="1"/>
-          <p:nvPr/>
-        </p:nvSpPr>
-        <p:spPr>
-          <a:xfrm>
-            <a:off x="1371600" y="4023360"/>
-            <a:ext cx="457200" cy="457200"/>
-          </a:xfrm>
-          <a:prstGeom prst="rect">
-            <a:avLst/>
-          </a:prstGeom>
-          <a:noFill/>
-        </p:spPr>
-        <p:txBody>
-          <a:bodyPr wrap="none">
-            <a:spAutoFit/>
-          </a:bodyPr>
-          <a:lstStyle/>
-          <a:p>
-            <a:pPr>
-              <a:defRPr sz="2000" b="1">
-                <a:solidFill>
-                  <a:srgbClr val="00D4AA"/>
-                </a:solidFill>
-              </a:defRPr>
-            </a:pPr>
-            <a:r>
-              <a:t>3</a:t>
-            </a:r>
-          </a:p>
-        </p:txBody>
-      </p:sp>
-      <p:sp>
-        <p:nvSpPr>
-          <p:cNvPr id="32" name="TextBox 31"/>
-          <p:cNvSpPr txBox="1"/>
-          <p:nvPr/>
-        </p:nvSpPr>
-        <p:spPr>
-          <a:xfrm>
-            <a:off x="1828800" y="4023360"/>
-            <a:ext cx="8991295" cy="548640"/>
-          </a:xfrm>
-          <a:prstGeom prst="rect">
-            <a:avLst/>
-          </a:prstGeom>
-          <a:noFill/>
-        </p:spPr>
-        <p:txBody>
-          <a:bodyPr wrap="square">
-            <a:spAutoFit/>
-          </a:bodyPr>
-          <a:lstStyle/>
-          <a:p>
-            <a:pPr>
-              <a:defRPr sz="1800">
-                <a:solidFill>
-                  <a:srgbClr val="FFFFFF"/>
-                </a:solidFill>
-              </a:defRPr>
-            </a:pPr>
-            <a:r>
-              <a:t>Request: 'Draft our differentiation message'</a:t>
-            </a:r>
-          </a:p>
-        </p:txBody>
-      </p:sp>
-      <p:sp>
-        <p:nvSpPr>
-          <p:cNvPr id="33" name="TextBox 32"/>
-          <p:cNvSpPr txBox="1"/>
-          <p:nvPr/>
-        </p:nvSpPr>
-        <p:spPr>
-          <a:xfrm>
-            <a:off x="1371600" y="4663440"/>
-            <a:ext cx="457200" cy="457200"/>
-          </a:xfrm>
-          <a:prstGeom prst="rect">
-            <a:avLst/>
-          </a:prstGeom>
-          <a:noFill/>
-        </p:spPr>
-        <p:txBody>
-          <a:bodyPr wrap="none">
-            <a:spAutoFit/>
-          </a:bodyPr>
-          <a:lstStyle/>
-          <a:p>
-            <a:pPr>
-              <a:defRPr sz="2000" b="1">
-                <a:solidFill>
-                  <a:srgbClr val="00D4AA"/>
-                </a:solidFill>
-              </a:defRPr>
-            </a:pPr>
-            <a:r>
-              <a:t>4</a:t>
-            </a:r>
-          </a:p>
-        </p:txBody>
-      </p:sp>
-      <p:sp>
-        <p:nvSpPr>
-          <p:cNvPr id="34" name="TextBox 33"/>
-          <p:cNvSpPr txBox="1"/>
-          <p:nvPr/>
-        </p:nvSpPr>
-        <p:spPr>
-          <a:xfrm>
-            <a:off x="1828800" y="4663440"/>
-            <a:ext cx="8991295" cy="548640"/>
-          </a:xfrm>
-          <a:prstGeom prst="rect">
-            <a:avLst/>
-          </a:prstGeom>
-          <a:noFill/>
-        </p:spPr>
-        <p:txBody>
-          <a:bodyPr wrap="square">
-            <a:spAutoFit/>
-          </a:bodyPr>
-          <a:lstStyle/>
-          <a:p>
-            <a:pPr>
-              <a:defRPr sz="1800">
-                <a:solidFill>
-                  <a:srgbClr val="FFFFFF"/>
-                </a:solidFill>
-              </a:defRPr>
-            </a:pPr>
-            <a:r>
-              <a:t>Refine: 'Make it more concise'</a:t>
-            </a:r>
-          </a:p>
-        </p:txBody>
-      </p:sp>
-      <p:sp>
-        <p:nvSpPr>
-          <p:cNvPr id="35" name="TextBox 34"/>
-          <p:cNvSpPr txBox="1"/>
-          <p:nvPr/>
-        </p:nvSpPr>
-        <p:spPr>
-          <a:xfrm>
-            <a:off x="1371600" y="5303520"/>
-            <a:ext cx="457200" cy="457200"/>
-          </a:xfrm>
-          <a:prstGeom prst="rect">
-            <a:avLst/>
-          </a:prstGeom>
-          <a:noFill/>
-        </p:spPr>
-        <p:txBody>
-          <a:bodyPr wrap="none">
-            <a:spAutoFit/>
-          </a:bodyPr>
-          <a:lstStyle/>
-          <a:p>
-            <a:pPr>
-              <a:defRPr sz="2000" b="1">
-                <a:solidFill>
-                  <a:srgbClr val="00D4AA"/>
-                </a:solidFill>
-              </a:defRPr>
-            </a:pPr>
-            <a:r>
-              <a:t>5</a:t>
-            </a:r>
-          </a:p>
-        </p:txBody>
-      </p:sp>
-      <p:sp>
-        <p:nvSpPr>
-          <p:cNvPr id="36" name="TextBox 35"/>
-          <p:cNvSpPr txBox="1"/>
-          <p:nvPr/>
-        </p:nvSpPr>
-        <p:spPr>
-          <a:xfrm>
-            <a:off x="1828800" y="5303520"/>
-            <a:ext cx="8991295" cy="548640"/>
-          </a:xfrm>
-          <a:prstGeom prst="rect">
-            <a:avLst/>
-          </a:prstGeom>
-          <a:noFill/>
-        </p:spPr>
-        <p:txBody>
-          <a:bodyPr wrap="square">
-            <a:spAutoFit/>
-          </a:bodyPr>
-          <a:lstStyle/>
-          <a:p>
-            <a:pPr>
-              <a:defRPr sz="1800">
-                <a:solidFill>
-                  <a:srgbClr val="FFFFFF"/>
-                </a:solidFill>
-              </a:defRPr>
-            </a:pPr>
-            <a:r>
-              <a:t>Create: 'Turn into email campaign'</a:t>
+              <a:defRPr sz="2400">
+                <a:solidFill>
+                  <a:srgbClr val="8B95A5"/>
+                </a:solidFill>
+              </a:defRPr>
+            </a:pPr>
+            <a:r>
+              <a:t>Claude in action for different jobs</a:t>
             </a:r>
           </a:p>
         </p:txBody>
@@ -45842,7 +46738,7 @@
               </a:defRPr>
             </a:pPr>
             <a:r>
-              <a:t>Sales Workflow</a:t>
+              <a:t>Marketing Workflow</a:t>
             </a:r>
           </a:p>
         </p:txBody>
@@ -46888,7 +47784,7 @@
               </a:defRPr>
             </a:pPr>
             <a:r>
-              <a:t>Upload prospect company info</a:t>
+              <a:t>Upload competitor research PDFs</a:t>
             </a:r>
           </a:p>
         </p:txBody>
@@ -46958,7 +47854,7 @@
               </a:defRPr>
             </a:pPr>
             <a:r>
-              <a:t>Ask: 'What are their pain points?'</a:t>
+              <a:t>Ask: 'Summarize their positioning'</a:t>
             </a:r>
           </a:p>
         </p:txBody>
@@ -47028,7 +47924,7 @@
               </a:defRPr>
             </a:pPr>
             <a:r>
-              <a:t>Request: 'Draft personalized pitch'</a:t>
+              <a:t>Request: 'Draft our differentiation message'</a:t>
             </a:r>
           </a:p>
         </p:txBody>
@@ -47098,7 +47994,7 @@
               </a:defRPr>
             </a:pPr>
             <a:r>
-              <a:t>Create: 'Email sequence for follow-up'</a:t>
+              <a:t>Refine: 'Make it more concise'</a:t>
             </a:r>
           </a:p>
         </p:txBody>
@@ -47168,7 +48064,7 @@
               </a:defRPr>
             </a:pPr>
             <a:r>
-              <a:t>Generate: 'Objection handling script'</a:t>
+              <a:t>Create: 'Turn into email campaign'</a:t>
             </a:r>
           </a:p>
         </p:txBody>
@@ -47208,23 +48104,60 @@
       </p:grpSpPr>
       <p:sp>
         <p:nvSpPr>
-          <p:cNvPr id="2" name="Rounded Rectangle 1"/>
+          <p:cNvPr id="2" name="TextBox 1"/>
+          <p:cNvSpPr txBox="1"/>
+          <p:nvPr/>
+        </p:nvSpPr>
+        <p:spPr>
+          <a:xfrm>
+            <a:off x="457200" y="365760"/>
+            <a:ext cx="11277295" cy="731520"/>
+          </a:xfrm>
+          <a:prstGeom prst="rect">
+            <a:avLst/>
+          </a:prstGeom>
+          <a:noFill/>
+        </p:spPr>
+        <p:txBody>
+          <a:bodyPr wrap="none">
+            <a:spAutoFit/>
+          </a:bodyPr>
+          <a:lstStyle/>
+          <a:p>
+            <a:pPr algn="ctr">
+              <a:defRPr sz="3600" b="1">
+                <a:solidFill>
+                  <a:srgbClr val="FFFFFF"/>
+                </a:solidFill>
+              </a:defRPr>
+            </a:pPr>
+            <a:r>
+              <a:t>Sales Workflow</a:t>
+            </a:r>
+          </a:p>
+        </p:txBody>
+      </p:sp>
+      <p:sp>
+        <p:nvSpPr>
+          <p:cNvPr id="3" name="Rounded Rectangle 2"/>
           <p:cNvSpPr/>
           <p:nvPr/>
         </p:nvSpPr>
         <p:spPr>
           <a:xfrm>
-            <a:off x="457200" y="365760"/>
-            <a:ext cx="1097280" cy="457200"/>
+            <a:off x="2941167" y="1371600"/>
+            <a:ext cx="822960" cy="822960"/>
           </a:xfrm>
           <a:prstGeom prst="roundRect">
             <a:avLst/>
           </a:prstGeom>
           <a:solidFill>
-            <a:srgbClr val="14B8A6"/>
+            <a:srgbClr val="141A26"/>
           </a:solidFill>
-          <a:ln>
-            <a:noFill/>
+          <a:ln w="25400">
+            <a:solidFill>
+              <a:srgbClr val="00D4AA"/>
+            </a:solidFill>
           </a:ln>
         </p:spPr>
         <p:style>
@@ -47245,110 +48178,30 @@
           <a:bodyPr rtlCol="0" anchor="ctr"/>
           <a:lstStyle/>
           <a:p>
-            <a:pPr algn="ctr">
-              <a:defRPr sz="1400" b="1">
-                <a:solidFill>
-                  <a:srgbClr val="FFFFFF"/>
-                </a:solidFill>
-              </a:defRPr>
-            </a:pPr>
-            <a:r>
-              <a:t>LAB 4</a:t>
-            </a:r>
-          </a:p>
-        </p:txBody>
-      </p:sp>
-      <p:sp>
-        <p:nvSpPr>
-          <p:cNvPr id="3" name="TextBox 2"/>
-          <p:cNvSpPr txBox="1"/>
-          <p:nvPr/>
-        </p:nvSpPr>
-        <p:spPr>
-          <a:xfrm>
-            <a:off x="457200" y="1005840"/>
-            <a:ext cx="11247120" cy="731520"/>
-          </a:xfrm>
-          <a:prstGeom prst="rect">
-            <a:avLst/>
-          </a:prstGeom>
-          <a:noFill/>
-        </p:spPr>
-        <p:txBody>
-          <a:bodyPr wrap="none">
-            <a:spAutoFit/>
-          </a:bodyPr>
-          <a:lstStyle/>
-          <a:p>
-            <a:pPr>
-              <a:defRPr sz="3600" b="1">
-                <a:solidFill>
-                  <a:srgbClr val="FFFFFF"/>
-                </a:solidFill>
-              </a:defRPr>
-            </a:pPr>
-            <a:r>
-              <a:t>Executive Briefing Challenge</a:t>
-            </a:r>
-          </a:p>
-        </p:txBody>
-      </p:sp>
-      <p:sp>
-        <p:nvSpPr>
-          <p:cNvPr id="4" name="TextBox 3"/>
-          <p:cNvSpPr txBox="1"/>
-          <p:nvPr/>
-        </p:nvSpPr>
-        <p:spPr>
-          <a:xfrm>
-            <a:off x="457200" y="1737360"/>
-            <a:ext cx="11247120" cy="457200"/>
-          </a:xfrm>
-          <a:prstGeom prst="rect">
-            <a:avLst/>
-          </a:prstGeom>
-          <a:noFill/>
-        </p:spPr>
-        <p:txBody>
-          <a:bodyPr wrap="none">
-            <a:spAutoFit/>
-          </a:bodyPr>
-          <a:lstStyle/>
-          <a:p>
-            <a:pPr>
-              <a:defRPr sz="1800" i="1">
-                <a:solidFill>
-                  <a:srgbClr val="9CA3AF"/>
-                </a:solidFill>
-              </a:defRPr>
-            </a:pPr>
-            <a:r>
-              <a:t>30 minutes  •  Tie it all together  •  Real deliverable you'll use Monday</a:t>
-            </a:r>
-          </a:p>
-        </p:txBody>
-      </p:sp>
-      <p:sp>
-        <p:nvSpPr>
-          <p:cNvPr id="5" name="Rounded Rectangle 4"/>
+            <a:pPr algn="ctr"/>
+            <a:endParaRPr/>
+          </a:p>
+        </p:txBody>
+      </p:sp>
+      <p:sp>
+        <p:nvSpPr>
+          <p:cNvPr id="4" name="Oval 3"/>
           <p:cNvSpPr/>
           <p:nvPr/>
         </p:nvSpPr>
         <p:spPr>
           <a:xfrm>
-            <a:off x="457200" y="2468880"/>
-            <a:ext cx="3566160" cy="3200400"/>
-          </a:xfrm>
-          <a:prstGeom prst="roundRect">
+            <a:off x="3604107" y="1211580"/>
+            <a:ext cx="320040" cy="320040"/>
+          </a:xfrm>
+          <a:prstGeom prst="ellipse">
             <a:avLst/>
           </a:prstGeom>
           <a:solidFill>
-            <a:srgbClr val="24354A"/>
+            <a:srgbClr val="00D4AA"/>
           </a:solidFill>
-          <a:ln w="19050">
-            <a:solidFill>
-              <a:srgbClr val="14B8A6"/>
-            </a:solidFill>
+          <a:ln>
+            <a:noFill/>
           </a:ln>
         </p:spPr>
         <p:style>
@@ -47376,173 +48229,93 @@
       </p:sp>
       <p:sp>
         <p:nvSpPr>
+          <p:cNvPr id="5" name="TextBox 4"/>
+          <p:cNvSpPr txBox="1"/>
+          <p:nvPr/>
+        </p:nvSpPr>
+        <p:spPr>
+          <a:xfrm>
+            <a:off x="3604107" y="1211580"/>
+            <a:ext cx="320040" cy="320040"/>
+          </a:xfrm>
+          <a:prstGeom prst="rect">
+            <a:avLst/>
+          </a:prstGeom>
+          <a:noFill/>
+        </p:spPr>
+        <p:txBody>
+          <a:bodyPr wrap="none" anchor="ctr">
+            <a:spAutoFit/>
+          </a:bodyPr>
+          <a:lstStyle/>
+          <a:p>
+            <a:pPr algn="ctr">
+              <a:defRPr sz="1400" b="1">
+                <a:solidFill>
+                  <a:srgbClr val="0B0F1A"/>
+                </a:solidFill>
+              </a:defRPr>
+            </a:pPr>
+            <a:r>
+              <a:t>1</a:t>
+            </a:r>
+          </a:p>
+        </p:txBody>
+      </p:sp>
+      <p:sp>
+        <p:nvSpPr>
           <p:cNvPr id="6" name="TextBox 5"/>
           <p:cNvSpPr txBox="1"/>
           <p:nvPr/>
         </p:nvSpPr>
         <p:spPr>
           <a:xfrm>
-            <a:off x="640080" y="2651760"/>
-            <a:ext cx="3200400" cy="548640"/>
-          </a:xfrm>
-          <a:prstGeom prst="rect">
-            <a:avLst/>
-          </a:prstGeom>
-          <a:noFill/>
-        </p:spPr>
-        <p:txBody>
-          <a:bodyPr wrap="none">
+            <a:off x="2941167" y="1371600"/>
+            <a:ext cx="822960" cy="822960"/>
+          </a:xfrm>
+          <a:prstGeom prst="rect">
+            <a:avLst/>
+          </a:prstGeom>
+          <a:noFill/>
+        </p:spPr>
+        <p:txBody>
+          <a:bodyPr wrap="none" anchor="ctr">
             <a:spAutoFit/>
           </a:bodyPr>
           <a:lstStyle/>
           <a:p>
             <a:pPr algn="ctr">
-              <a:defRPr sz="3000"/>
-            </a:pPr>
-            <a:r>
-              <a:t>🗂️</a:t>
-            </a:r>
-          </a:p>
-        </p:txBody>
-      </p:sp>
-      <p:sp>
-        <p:nvSpPr>
-          <p:cNvPr id="7" name="TextBox 6"/>
-          <p:cNvSpPr txBox="1"/>
-          <p:nvPr/>
-        </p:nvSpPr>
-        <p:spPr>
-          <a:xfrm>
-            <a:off x="640080" y="3200400"/>
-            <a:ext cx="3200400" cy="457200"/>
-          </a:xfrm>
-          <a:prstGeom prst="rect">
-            <a:avLst/>
-          </a:prstGeom>
-          <a:noFill/>
-        </p:spPr>
-        <p:txBody>
-          <a:bodyPr wrap="none">
-            <a:spAutoFit/>
-          </a:bodyPr>
-          <a:lstStyle/>
-          <a:p>
-            <a:pPr algn="ctr">
-              <a:defRPr sz="1800" b="1">
-                <a:solidFill>
-                  <a:srgbClr val="FFFFFF"/>
-                </a:solidFill>
-              </a:defRPr>
-            </a:pPr>
-            <a:r>
-              <a:t>Set Up</a:t>
-            </a:r>
-          </a:p>
-        </p:txBody>
-      </p:sp>
-      <p:sp>
-        <p:nvSpPr>
-          <p:cNvPr id="8" name="TextBox 7"/>
-          <p:cNvSpPr txBox="1"/>
-          <p:nvPr/>
-        </p:nvSpPr>
-        <p:spPr>
-          <a:xfrm>
-            <a:off x="640080" y="3749039"/>
-            <a:ext cx="3200400" cy="1645920"/>
-          </a:xfrm>
-          <a:prstGeom prst="rect">
-            <a:avLst/>
-          </a:prstGeom>
-          <a:noFill/>
-        </p:spPr>
-        <p:txBody>
-          <a:bodyPr wrap="square">
-            <a:spAutoFit/>
-          </a:bodyPr>
-          <a:lstStyle/>
-          <a:p>
-            <a:pPr algn="ctr">
-              <a:defRPr sz="1300">
-                <a:solidFill>
-                  <a:srgbClr val="D1D5DB"/>
-                </a:solidFill>
-              </a:defRPr>
-            </a:pPr>
-            <a:r>
-              <a:t>Create a Project called</a:t>
-            </a:r>
-            <a:br/>
-            <a:r>
-              <a:t>'Executive Briefing'.</a:t>
-            </a:r>
-            <a:br/>
-            <a:r>
-              <a:t>Add custom instructions.</a:t>
-            </a:r>
-            <a:br/>
-            <a:r>
-              <a:t>Upload all provided files.</a:t>
-            </a:r>
-          </a:p>
-        </p:txBody>
-      </p:sp>
-      <p:sp>
-        <p:nvSpPr>
-          <p:cNvPr id="9" name="TextBox 8"/>
-          <p:cNvSpPr txBox="1"/>
-          <p:nvPr/>
-        </p:nvSpPr>
-        <p:spPr>
-          <a:xfrm>
-            <a:off x="640080" y="5303520"/>
-            <a:ext cx="3200400" cy="365760"/>
-          </a:xfrm>
-          <a:prstGeom prst="rect">
-            <a:avLst/>
-          </a:prstGeom>
-          <a:noFill/>
-        </p:spPr>
-        <p:txBody>
-          <a:bodyPr wrap="none">
-            <a:spAutoFit/>
-          </a:bodyPr>
-          <a:lstStyle/>
-          <a:p>
-            <a:pPr algn="ctr">
-              <a:defRPr sz="1200" i="1">
-                <a:solidFill>
-                  <a:srgbClr val="14B8A6"/>
-                </a:solidFill>
-              </a:defRPr>
-            </a:pPr>
-            <a:r>
-              <a:t>5 min</a:t>
-            </a:r>
-          </a:p>
-        </p:txBody>
-      </p:sp>
-      <p:sp>
-        <p:nvSpPr>
-          <p:cNvPr id="10" name="Rounded Rectangle 9"/>
+              <a:defRPr sz="2800" b="1">
+                <a:solidFill>
+                  <a:srgbClr val="00D4AA"/>
+                </a:solidFill>
+              </a:defRPr>
+            </a:pPr>
+            <a:r>
+              <a:t>1</a:t>
+            </a:r>
+          </a:p>
+        </p:txBody>
+      </p:sp>
+      <p:sp>
+        <p:nvSpPr>
+          <p:cNvPr id="7" name="Right Arrow 6"/>
           <p:cNvSpPr/>
           <p:nvPr/>
         </p:nvSpPr>
         <p:spPr>
           <a:xfrm>
-            <a:off x="4206240" y="2468880"/>
-            <a:ext cx="3566160" cy="3200400"/>
-          </a:xfrm>
-          <a:prstGeom prst="roundRect">
+            <a:off x="3855567" y="1645920"/>
+            <a:ext cx="365760" cy="274320"/>
+          </a:xfrm>
+          <a:prstGeom prst="rightArrow">
             <a:avLst/>
           </a:prstGeom>
           <a:solidFill>
-            <a:srgbClr val="24354A"/>
+            <a:srgbClr val="8B95A5"/>
           </a:solidFill>
-          <a:ln w="19050">
-            <a:solidFill>
-              <a:srgbClr val="14B8A6"/>
-            </a:solidFill>
+          <a:ln>
+            <a:noFill/>
           </a:ln>
         </p:spPr>
         <p:style>
@@ -47570,172 +48343,24 @@
       </p:sp>
       <p:sp>
         <p:nvSpPr>
-          <p:cNvPr id="11" name="TextBox 10"/>
-          <p:cNvSpPr txBox="1"/>
-          <p:nvPr/>
-        </p:nvSpPr>
-        <p:spPr>
-          <a:xfrm>
-            <a:off x="4389120" y="2651760"/>
-            <a:ext cx="3200400" cy="548640"/>
-          </a:xfrm>
-          <a:prstGeom prst="rect">
-            <a:avLst/>
-          </a:prstGeom>
-          <a:noFill/>
-        </p:spPr>
-        <p:txBody>
-          <a:bodyPr wrap="none">
-            <a:spAutoFit/>
-          </a:bodyPr>
-          <a:lstStyle/>
-          <a:p>
-            <a:pPr algn="ctr">
-              <a:defRPr sz="3000"/>
-            </a:pPr>
-            <a:r>
-              <a:t>🔍</a:t>
-            </a:r>
-          </a:p>
-        </p:txBody>
-      </p:sp>
-      <p:sp>
-        <p:nvSpPr>
-          <p:cNvPr id="12" name="TextBox 11"/>
-          <p:cNvSpPr txBox="1"/>
-          <p:nvPr/>
-        </p:nvSpPr>
-        <p:spPr>
-          <a:xfrm>
-            <a:off x="4389120" y="3200400"/>
-            <a:ext cx="3200400" cy="457200"/>
-          </a:xfrm>
-          <a:prstGeom prst="rect">
-            <a:avLst/>
-          </a:prstGeom>
-          <a:noFill/>
-        </p:spPr>
-        <p:txBody>
-          <a:bodyPr wrap="none">
-            <a:spAutoFit/>
-          </a:bodyPr>
-          <a:lstStyle/>
-          <a:p>
-            <a:pPr algn="ctr">
-              <a:defRPr sz="1800" b="1">
-                <a:solidFill>
-                  <a:srgbClr val="FFFFFF"/>
-                </a:solidFill>
-              </a:defRPr>
-            </a:pPr>
-            <a:r>
-              <a:t>Analyze &amp; Build</a:t>
-            </a:r>
-          </a:p>
-        </p:txBody>
-      </p:sp>
-      <p:sp>
-        <p:nvSpPr>
-          <p:cNvPr id="13" name="TextBox 12"/>
-          <p:cNvSpPr txBox="1"/>
-          <p:nvPr/>
-        </p:nvSpPr>
-        <p:spPr>
-          <a:xfrm>
-            <a:off x="4389120" y="3749039"/>
-            <a:ext cx="3200400" cy="1645920"/>
-          </a:xfrm>
-          <a:prstGeom prst="rect">
-            <a:avLst/>
-          </a:prstGeom>
-          <a:noFill/>
-        </p:spPr>
-        <p:txBody>
-          <a:bodyPr wrap="square">
-            <a:spAutoFit/>
-          </a:bodyPr>
-          <a:lstStyle/>
-          <a:p>
-            <a:pPr algn="ctr">
-              <a:defRPr sz="1300">
-                <a:solidFill>
-                  <a:srgbClr val="D1D5DB"/>
-                </a:solidFill>
-              </a:defRPr>
-            </a:pPr>
-            <a:r>
-              <a:t>Use prompting skills to</a:t>
-            </a:r>
-            <a:br/>
-            <a:r>
-              <a:t>extract insights from</a:t>
-            </a:r>
-            <a:br/>
-            <a:r>
-              <a:t>multiple file types.</a:t>
-            </a:r>
-            <a:br/>
-            <a:r>
-              <a:t>Iterate until output is sharp.</a:t>
-            </a:r>
-          </a:p>
-        </p:txBody>
-      </p:sp>
-      <p:sp>
-        <p:nvSpPr>
-          <p:cNvPr id="14" name="TextBox 13"/>
-          <p:cNvSpPr txBox="1"/>
-          <p:nvPr/>
-        </p:nvSpPr>
-        <p:spPr>
-          <a:xfrm>
-            <a:off x="4389120" y="5303520"/>
-            <a:ext cx="3200400" cy="365760"/>
-          </a:xfrm>
-          <a:prstGeom prst="rect">
-            <a:avLst/>
-          </a:prstGeom>
-          <a:noFill/>
-        </p:spPr>
-        <p:txBody>
-          <a:bodyPr wrap="none">
-            <a:spAutoFit/>
-          </a:bodyPr>
-          <a:lstStyle/>
-          <a:p>
-            <a:pPr algn="ctr">
-              <a:defRPr sz="1200" i="1">
-                <a:solidFill>
-                  <a:srgbClr val="14B8A6"/>
-                </a:solidFill>
-              </a:defRPr>
-            </a:pPr>
-            <a:r>
-              <a:t>15 min</a:t>
-            </a:r>
-          </a:p>
-        </p:txBody>
-      </p:sp>
-      <p:sp>
-        <p:nvSpPr>
-          <p:cNvPr id="15" name="Rounded Rectangle 14"/>
+          <p:cNvPr id="8" name="Rounded Rectangle 7"/>
           <p:cNvSpPr/>
           <p:nvPr/>
         </p:nvSpPr>
         <p:spPr>
           <a:xfrm>
-            <a:off x="7955280" y="2468880"/>
-            <a:ext cx="3566160" cy="3200400"/>
+            <a:off x="4312767" y="1371600"/>
+            <a:ext cx="822960" cy="822960"/>
           </a:xfrm>
           <a:prstGeom prst="roundRect">
             <a:avLst/>
           </a:prstGeom>
           <a:solidFill>
-            <a:srgbClr val="24354A"/>
+            <a:srgbClr val="141A26"/>
           </a:solidFill>
-          <a:ln w="19050">
+          <a:ln w="25400">
             <a:solidFill>
-              <a:srgbClr val="14B8A6"/>
+              <a:srgbClr val="00D4AA"/>
             </a:solidFill>
           </a:ln>
         </p:spPr>
@@ -47764,14 +48389,740 @@
       </p:sp>
       <p:sp>
         <p:nvSpPr>
+          <p:cNvPr id="9" name="Oval 8"/>
+          <p:cNvSpPr/>
+          <p:nvPr/>
+        </p:nvSpPr>
+        <p:spPr>
+          <a:xfrm>
+            <a:off x="4975707" y="1211580"/>
+            <a:ext cx="320040" cy="320040"/>
+          </a:xfrm>
+          <a:prstGeom prst="ellipse">
+            <a:avLst/>
+          </a:prstGeom>
+          <a:solidFill>
+            <a:srgbClr val="00D4AA"/>
+          </a:solidFill>
+          <a:ln>
+            <a:noFill/>
+          </a:ln>
+        </p:spPr>
+        <p:style>
+          <a:lnRef idx="1">
+            <a:schemeClr val="accent1"/>
+          </a:lnRef>
+          <a:fillRef idx="3">
+            <a:schemeClr val="accent1"/>
+          </a:fillRef>
+          <a:effectRef idx="2">
+            <a:schemeClr val="accent1"/>
+          </a:effectRef>
+          <a:fontRef idx="minor">
+            <a:schemeClr val="lt1"/>
+          </a:fontRef>
+        </p:style>
+        <p:txBody>
+          <a:bodyPr rtlCol="0" anchor="ctr"/>
+          <a:lstStyle/>
+          <a:p>
+            <a:pPr algn="ctr"/>
+            <a:endParaRPr/>
+          </a:p>
+        </p:txBody>
+      </p:sp>
+      <p:sp>
+        <p:nvSpPr>
+          <p:cNvPr id="10" name="TextBox 9"/>
+          <p:cNvSpPr txBox="1"/>
+          <p:nvPr/>
+        </p:nvSpPr>
+        <p:spPr>
+          <a:xfrm>
+            <a:off x="4975707" y="1211580"/>
+            <a:ext cx="320040" cy="320040"/>
+          </a:xfrm>
+          <a:prstGeom prst="rect">
+            <a:avLst/>
+          </a:prstGeom>
+          <a:noFill/>
+        </p:spPr>
+        <p:txBody>
+          <a:bodyPr wrap="none" anchor="ctr">
+            <a:spAutoFit/>
+          </a:bodyPr>
+          <a:lstStyle/>
+          <a:p>
+            <a:pPr algn="ctr">
+              <a:defRPr sz="1400" b="1">
+                <a:solidFill>
+                  <a:srgbClr val="0B0F1A"/>
+                </a:solidFill>
+              </a:defRPr>
+            </a:pPr>
+            <a:r>
+              <a:t>2</a:t>
+            </a:r>
+          </a:p>
+        </p:txBody>
+      </p:sp>
+      <p:sp>
+        <p:nvSpPr>
+          <p:cNvPr id="11" name="TextBox 10"/>
+          <p:cNvSpPr txBox="1"/>
+          <p:nvPr/>
+        </p:nvSpPr>
+        <p:spPr>
+          <a:xfrm>
+            <a:off x="4312767" y="1371600"/>
+            <a:ext cx="822960" cy="822960"/>
+          </a:xfrm>
+          <a:prstGeom prst="rect">
+            <a:avLst/>
+          </a:prstGeom>
+          <a:noFill/>
+        </p:spPr>
+        <p:txBody>
+          <a:bodyPr wrap="none" anchor="ctr">
+            <a:spAutoFit/>
+          </a:bodyPr>
+          <a:lstStyle/>
+          <a:p>
+            <a:pPr algn="ctr">
+              <a:defRPr sz="2800" b="1">
+                <a:solidFill>
+                  <a:srgbClr val="00D4AA"/>
+                </a:solidFill>
+              </a:defRPr>
+            </a:pPr>
+            <a:r>
+              <a:t>2</a:t>
+            </a:r>
+          </a:p>
+        </p:txBody>
+      </p:sp>
+      <p:sp>
+        <p:nvSpPr>
+          <p:cNvPr id="12" name="Right Arrow 11"/>
+          <p:cNvSpPr/>
+          <p:nvPr/>
+        </p:nvSpPr>
+        <p:spPr>
+          <a:xfrm>
+            <a:off x="5227167" y="1645920"/>
+            <a:ext cx="365760" cy="274320"/>
+          </a:xfrm>
+          <a:prstGeom prst="rightArrow">
+            <a:avLst/>
+          </a:prstGeom>
+          <a:solidFill>
+            <a:srgbClr val="8B95A5"/>
+          </a:solidFill>
+          <a:ln>
+            <a:noFill/>
+          </a:ln>
+        </p:spPr>
+        <p:style>
+          <a:lnRef idx="1">
+            <a:schemeClr val="accent1"/>
+          </a:lnRef>
+          <a:fillRef idx="3">
+            <a:schemeClr val="accent1"/>
+          </a:fillRef>
+          <a:effectRef idx="2">
+            <a:schemeClr val="accent1"/>
+          </a:effectRef>
+          <a:fontRef idx="minor">
+            <a:schemeClr val="lt1"/>
+          </a:fontRef>
+        </p:style>
+        <p:txBody>
+          <a:bodyPr rtlCol="0" anchor="ctr"/>
+          <a:lstStyle/>
+          <a:p>
+            <a:pPr algn="ctr"/>
+            <a:endParaRPr/>
+          </a:p>
+        </p:txBody>
+      </p:sp>
+      <p:sp>
+        <p:nvSpPr>
+          <p:cNvPr id="13" name="Rounded Rectangle 12"/>
+          <p:cNvSpPr/>
+          <p:nvPr/>
+        </p:nvSpPr>
+        <p:spPr>
+          <a:xfrm>
+            <a:off x="5684367" y="1371600"/>
+            <a:ext cx="822960" cy="822960"/>
+          </a:xfrm>
+          <a:prstGeom prst="roundRect">
+            <a:avLst/>
+          </a:prstGeom>
+          <a:solidFill>
+            <a:srgbClr val="141A26"/>
+          </a:solidFill>
+          <a:ln w="25400">
+            <a:solidFill>
+              <a:srgbClr val="00D4AA"/>
+            </a:solidFill>
+          </a:ln>
+        </p:spPr>
+        <p:style>
+          <a:lnRef idx="1">
+            <a:schemeClr val="accent1"/>
+          </a:lnRef>
+          <a:fillRef idx="3">
+            <a:schemeClr val="accent1"/>
+          </a:fillRef>
+          <a:effectRef idx="2">
+            <a:schemeClr val="accent1"/>
+          </a:effectRef>
+          <a:fontRef idx="minor">
+            <a:schemeClr val="lt1"/>
+          </a:fontRef>
+        </p:style>
+        <p:txBody>
+          <a:bodyPr rtlCol="0" anchor="ctr"/>
+          <a:lstStyle/>
+          <a:p>
+            <a:pPr algn="ctr"/>
+            <a:endParaRPr/>
+          </a:p>
+        </p:txBody>
+      </p:sp>
+      <p:sp>
+        <p:nvSpPr>
+          <p:cNvPr id="14" name="Oval 13"/>
+          <p:cNvSpPr/>
+          <p:nvPr/>
+        </p:nvSpPr>
+        <p:spPr>
+          <a:xfrm>
+            <a:off x="6347307" y="1211580"/>
+            <a:ext cx="320040" cy="320040"/>
+          </a:xfrm>
+          <a:prstGeom prst="ellipse">
+            <a:avLst/>
+          </a:prstGeom>
+          <a:solidFill>
+            <a:srgbClr val="00D4AA"/>
+          </a:solidFill>
+          <a:ln>
+            <a:noFill/>
+          </a:ln>
+        </p:spPr>
+        <p:style>
+          <a:lnRef idx="1">
+            <a:schemeClr val="accent1"/>
+          </a:lnRef>
+          <a:fillRef idx="3">
+            <a:schemeClr val="accent1"/>
+          </a:fillRef>
+          <a:effectRef idx="2">
+            <a:schemeClr val="accent1"/>
+          </a:effectRef>
+          <a:fontRef idx="minor">
+            <a:schemeClr val="lt1"/>
+          </a:fontRef>
+        </p:style>
+        <p:txBody>
+          <a:bodyPr rtlCol="0" anchor="ctr"/>
+          <a:lstStyle/>
+          <a:p>
+            <a:pPr algn="ctr"/>
+            <a:endParaRPr/>
+          </a:p>
+        </p:txBody>
+      </p:sp>
+      <p:sp>
+        <p:nvSpPr>
+          <p:cNvPr id="15" name="TextBox 14"/>
+          <p:cNvSpPr txBox="1"/>
+          <p:nvPr/>
+        </p:nvSpPr>
+        <p:spPr>
+          <a:xfrm>
+            <a:off x="6347307" y="1211580"/>
+            <a:ext cx="320040" cy="320040"/>
+          </a:xfrm>
+          <a:prstGeom prst="rect">
+            <a:avLst/>
+          </a:prstGeom>
+          <a:noFill/>
+        </p:spPr>
+        <p:txBody>
+          <a:bodyPr wrap="none" anchor="ctr">
+            <a:spAutoFit/>
+          </a:bodyPr>
+          <a:lstStyle/>
+          <a:p>
+            <a:pPr algn="ctr">
+              <a:defRPr sz="1400" b="1">
+                <a:solidFill>
+                  <a:srgbClr val="0B0F1A"/>
+                </a:solidFill>
+              </a:defRPr>
+            </a:pPr>
+            <a:r>
+              <a:t>3</a:t>
+            </a:r>
+          </a:p>
+        </p:txBody>
+      </p:sp>
+      <p:sp>
+        <p:nvSpPr>
           <p:cNvPr id="16" name="TextBox 15"/>
           <p:cNvSpPr txBox="1"/>
           <p:nvPr/>
         </p:nvSpPr>
         <p:spPr>
           <a:xfrm>
-            <a:off x="8138160" y="2651760"/>
-            <a:ext cx="3200400" cy="548640"/>
+            <a:off x="5684367" y="1371600"/>
+            <a:ext cx="822960" cy="822960"/>
+          </a:xfrm>
+          <a:prstGeom prst="rect">
+            <a:avLst/>
+          </a:prstGeom>
+          <a:noFill/>
+        </p:spPr>
+        <p:txBody>
+          <a:bodyPr wrap="none" anchor="ctr">
+            <a:spAutoFit/>
+          </a:bodyPr>
+          <a:lstStyle/>
+          <a:p>
+            <a:pPr algn="ctr">
+              <a:defRPr sz="2800" b="1">
+                <a:solidFill>
+                  <a:srgbClr val="00D4AA"/>
+                </a:solidFill>
+              </a:defRPr>
+            </a:pPr>
+            <a:r>
+              <a:t>3</a:t>
+            </a:r>
+          </a:p>
+        </p:txBody>
+      </p:sp>
+      <p:sp>
+        <p:nvSpPr>
+          <p:cNvPr id="17" name="Right Arrow 16"/>
+          <p:cNvSpPr/>
+          <p:nvPr/>
+        </p:nvSpPr>
+        <p:spPr>
+          <a:xfrm>
+            <a:off x="6598767" y="1645920"/>
+            <a:ext cx="365760" cy="274320"/>
+          </a:xfrm>
+          <a:prstGeom prst="rightArrow">
+            <a:avLst/>
+          </a:prstGeom>
+          <a:solidFill>
+            <a:srgbClr val="8B95A5"/>
+          </a:solidFill>
+          <a:ln>
+            <a:noFill/>
+          </a:ln>
+        </p:spPr>
+        <p:style>
+          <a:lnRef idx="1">
+            <a:schemeClr val="accent1"/>
+          </a:lnRef>
+          <a:fillRef idx="3">
+            <a:schemeClr val="accent1"/>
+          </a:fillRef>
+          <a:effectRef idx="2">
+            <a:schemeClr val="accent1"/>
+          </a:effectRef>
+          <a:fontRef idx="minor">
+            <a:schemeClr val="lt1"/>
+          </a:fontRef>
+        </p:style>
+        <p:txBody>
+          <a:bodyPr rtlCol="0" anchor="ctr"/>
+          <a:lstStyle/>
+          <a:p>
+            <a:pPr algn="ctr"/>
+            <a:endParaRPr/>
+          </a:p>
+        </p:txBody>
+      </p:sp>
+      <p:sp>
+        <p:nvSpPr>
+          <p:cNvPr id="18" name="Rounded Rectangle 17"/>
+          <p:cNvSpPr/>
+          <p:nvPr/>
+        </p:nvSpPr>
+        <p:spPr>
+          <a:xfrm>
+            <a:off x="7055967" y="1371600"/>
+            <a:ext cx="822960" cy="822960"/>
+          </a:xfrm>
+          <a:prstGeom prst="roundRect">
+            <a:avLst/>
+          </a:prstGeom>
+          <a:solidFill>
+            <a:srgbClr val="141A26"/>
+          </a:solidFill>
+          <a:ln w="25400">
+            <a:solidFill>
+              <a:srgbClr val="00D4AA"/>
+            </a:solidFill>
+          </a:ln>
+        </p:spPr>
+        <p:style>
+          <a:lnRef idx="1">
+            <a:schemeClr val="accent1"/>
+          </a:lnRef>
+          <a:fillRef idx="3">
+            <a:schemeClr val="accent1"/>
+          </a:fillRef>
+          <a:effectRef idx="2">
+            <a:schemeClr val="accent1"/>
+          </a:effectRef>
+          <a:fontRef idx="minor">
+            <a:schemeClr val="lt1"/>
+          </a:fontRef>
+        </p:style>
+        <p:txBody>
+          <a:bodyPr rtlCol="0" anchor="ctr"/>
+          <a:lstStyle/>
+          <a:p>
+            <a:pPr algn="ctr"/>
+            <a:endParaRPr/>
+          </a:p>
+        </p:txBody>
+      </p:sp>
+      <p:sp>
+        <p:nvSpPr>
+          <p:cNvPr id="19" name="Oval 18"/>
+          <p:cNvSpPr/>
+          <p:nvPr/>
+        </p:nvSpPr>
+        <p:spPr>
+          <a:xfrm>
+            <a:off x="7718907" y="1211580"/>
+            <a:ext cx="320040" cy="320040"/>
+          </a:xfrm>
+          <a:prstGeom prst="ellipse">
+            <a:avLst/>
+          </a:prstGeom>
+          <a:solidFill>
+            <a:srgbClr val="00D4AA"/>
+          </a:solidFill>
+          <a:ln>
+            <a:noFill/>
+          </a:ln>
+        </p:spPr>
+        <p:style>
+          <a:lnRef idx="1">
+            <a:schemeClr val="accent1"/>
+          </a:lnRef>
+          <a:fillRef idx="3">
+            <a:schemeClr val="accent1"/>
+          </a:fillRef>
+          <a:effectRef idx="2">
+            <a:schemeClr val="accent1"/>
+          </a:effectRef>
+          <a:fontRef idx="minor">
+            <a:schemeClr val="lt1"/>
+          </a:fontRef>
+        </p:style>
+        <p:txBody>
+          <a:bodyPr rtlCol="0" anchor="ctr"/>
+          <a:lstStyle/>
+          <a:p>
+            <a:pPr algn="ctr"/>
+            <a:endParaRPr/>
+          </a:p>
+        </p:txBody>
+      </p:sp>
+      <p:sp>
+        <p:nvSpPr>
+          <p:cNvPr id="20" name="TextBox 19"/>
+          <p:cNvSpPr txBox="1"/>
+          <p:nvPr/>
+        </p:nvSpPr>
+        <p:spPr>
+          <a:xfrm>
+            <a:off x="7718907" y="1211580"/>
+            <a:ext cx="320040" cy="320040"/>
+          </a:xfrm>
+          <a:prstGeom prst="rect">
+            <a:avLst/>
+          </a:prstGeom>
+          <a:noFill/>
+        </p:spPr>
+        <p:txBody>
+          <a:bodyPr wrap="none" anchor="ctr">
+            <a:spAutoFit/>
+          </a:bodyPr>
+          <a:lstStyle/>
+          <a:p>
+            <a:pPr algn="ctr">
+              <a:defRPr sz="1400" b="1">
+                <a:solidFill>
+                  <a:srgbClr val="0B0F1A"/>
+                </a:solidFill>
+              </a:defRPr>
+            </a:pPr>
+            <a:r>
+              <a:t>4</a:t>
+            </a:r>
+          </a:p>
+        </p:txBody>
+      </p:sp>
+      <p:sp>
+        <p:nvSpPr>
+          <p:cNvPr id="21" name="TextBox 20"/>
+          <p:cNvSpPr txBox="1"/>
+          <p:nvPr/>
+        </p:nvSpPr>
+        <p:spPr>
+          <a:xfrm>
+            <a:off x="7055967" y="1371600"/>
+            <a:ext cx="822960" cy="822960"/>
+          </a:xfrm>
+          <a:prstGeom prst="rect">
+            <a:avLst/>
+          </a:prstGeom>
+          <a:noFill/>
+        </p:spPr>
+        <p:txBody>
+          <a:bodyPr wrap="none" anchor="ctr">
+            <a:spAutoFit/>
+          </a:bodyPr>
+          <a:lstStyle/>
+          <a:p>
+            <a:pPr algn="ctr">
+              <a:defRPr sz="2800" b="1">
+                <a:solidFill>
+                  <a:srgbClr val="00D4AA"/>
+                </a:solidFill>
+              </a:defRPr>
+            </a:pPr>
+            <a:r>
+              <a:t>4</a:t>
+            </a:r>
+          </a:p>
+        </p:txBody>
+      </p:sp>
+      <p:sp>
+        <p:nvSpPr>
+          <p:cNvPr id="22" name="Right Arrow 21"/>
+          <p:cNvSpPr/>
+          <p:nvPr/>
+        </p:nvSpPr>
+        <p:spPr>
+          <a:xfrm>
+            <a:off x="7970367" y="1645920"/>
+            <a:ext cx="365760" cy="274320"/>
+          </a:xfrm>
+          <a:prstGeom prst="rightArrow">
+            <a:avLst/>
+          </a:prstGeom>
+          <a:solidFill>
+            <a:srgbClr val="8B95A5"/>
+          </a:solidFill>
+          <a:ln>
+            <a:noFill/>
+          </a:ln>
+        </p:spPr>
+        <p:style>
+          <a:lnRef idx="1">
+            <a:schemeClr val="accent1"/>
+          </a:lnRef>
+          <a:fillRef idx="3">
+            <a:schemeClr val="accent1"/>
+          </a:fillRef>
+          <a:effectRef idx="2">
+            <a:schemeClr val="accent1"/>
+          </a:effectRef>
+          <a:fontRef idx="minor">
+            <a:schemeClr val="lt1"/>
+          </a:fontRef>
+        </p:style>
+        <p:txBody>
+          <a:bodyPr rtlCol="0" anchor="ctr"/>
+          <a:lstStyle/>
+          <a:p>
+            <a:pPr algn="ctr"/>
+            <a:endParaRPr/>
+          </a:p>
+        </p:txBody>
+      </p:sp>
+      <p:sp>
+        <p:nvSpPr>
+          <p:cNvPr id="23" name="Rounded Rectangle 22"/>
+          <p:cNvSpPr/>
+          <p:nvPr/>
+        </p:nvSpPr>
+        <p:spPr>
+          <a:xfrm>
+            <a:off x="8427567" y="1371600"/>
+            <a:ext cx="822960" cy="822960"/>
+          </a:xfrm>
+          <a:prstGeom prst="roundRect">
+            <a:avLst/>
+          </a:prstGeom>
+          <a:solidFill>
+            <a:srgbClr val="141A26"/>
+          </a:solidFill>
+          <a:ln w="25400">
+            <a:solidFill>
+              <a:srgbClr val="00D4AA"/>
+            </a:solidFill>
+          </a:ln>
+        </p:spPr>
+        <p:style>
+          <a:lnRef idx="1">
+            <a:schemeClr val="accent1"/>
+          </a:lnRef>
+          <a:fillRef idx="3">
+            <a:schemeClr val="accent1"/>
+          </a:fillRef>
+          <a:effectRef idx="2">
+            <a:schemeClr val="accent1"/>
+          </a:effectRef>
+          <a:fontRef idx="minor">
+            <a:schemeClr val="lt1"/>
+          </a:fontRef>
+        </p:style>
+        <p:txBody>
+          <a:bodyPr rtlCol="0" anchor="ctr"/>
+          <a:lstStyle/>
+          <a:p>
+            <a:pPr algn="ctr"/>
+            <a:endParaRPr/>
+          </a:p>
+        </p:txBody>
+      </p:sp>
+      <p:sp>
+        <p:nvSpPr>
+          <p:cNvPr id="24" name="Oval 23"/>
+          <p:cNvSpPr/>
+          <p:nvPr/>
+        </p:nvSpPr>
+        <p:spPr>
+          <a:xfrm>
+            <a:off x="9090507" y="1211580"/>
+            <a:ext cx="320040" cy="320040"/>
+          </a:xfrm>
+          <a:prstGeom prst="ellipse">
+            <a:avLst/>
+          </a:prstGeom>
+          <a:solidFill>
+            <a:srgbClr val="00D4AA"/>
+          </a:solidFill>
+          <a:ln>
+            <a:noFill/>
+          </a:ln>
+        </p:spPr>
+        <p:style>
+          <a:lnRef idx="1">
+            <a:schemeClr val="accent1"/>
+          </a:lnRef>
+          <a:fillRef idx="3">
+            <a:schemeClr val="accent1"/>
+          </a:fillRef>
+          <a:effectRef idx="2">
+            <a:schemeClr val="accent1"/>
+          </a:effectRef>
+          <a:fontRef idx="minor">
+            <a:schemeClr val="lt1"/>
+          </a:fontRef>
+        </p:style>
+        <p:txBody>
+          <a:bodyPr rtlCol="0" anchor="ctr"/>
+          <a:lstStyle/>
+          <a:p>
+            <a:pPr algn="ctr"/>
+            <a:endParaRPr/>
+          </a:p>
+        </p:txBody>
+      </p:sp>
+      <p:sp>
+        <p:nvSpPr>
+          <p:cNvPr id="25" name="TextBox 24"/>
+          <p:cNvSpPr txBox="1"/>
+          <p:nvPr/>
+        </p:nvSpPr>
+        <p:spPr>
+          <a:xfrm>
+            <a:off x="9090507" y="1211580"/>
+            <a:ext cx="320040" cy="320040"/>
+          </a:xfrm>
+          <a:prstGeom prst="rect">
+            <a:avLst/>
+          </a:prstGeom>
+          <a:noFill/>
+        </p:spPr>
+        <p:txBody>
+          <a:bodyPr wrap="none" anchor="ctr">
+            <a:spAutoFit/>
+          </a:bodyPr>
+          <a:lstStyle/>
+          <a:p>
+            <a:pPr algn="ctr">
+              <a:defRPr sz="1400" b="1">
+                <a:solidFill>
+                  <a:srgbClr val="0B0F1A"/>
+                </a:solidFill>
+              </a:defRPr>
+            </a:pPr>
+            <a:r>
+              <a:t>5</a:t>
+            </a:r>
+          </a:p>
+        </p:txBody>
+      </p:sp>
+      <p:sp>
+        <p:nvSpPr>
+          <p:cNvPr id="26" name="TextBox 25"/>
+          <p:cNvSpPr txBox="1"/>
+          <p:nvPr/>
+        </p:nvSpPr>
+        <p:spPr>
+          <a:xfrm>
+            <a:off x="8427567" y="1371600"/>
+            <a:ext cx="822960" cy="822960"/>
+          </a:xfrm>
+          <a:prstGeom prst="rect">
+            <a:avLst/>
+          </a:prstGeom>
+          <a:noFill/>
+        </p:spPr>
+        <p:txBody>
+          <a:bodyPr wrap="none" anchor="ctr">
+            <a:spAutoFit/>
+          </a:bodyPr>
+          <a:lstStyle/>
+          <a:p>
+            <a:pPr algn="ctr">
+              <a:defRPr sz="2800" b="1">
+                <a:solidFill>
+                  <a:srgbClr val="00D4AA"/>
+                </a:solidFill>
+              </a:defRPr>
+            </a:pPr>
+            <a:r>
+              <a:t>5</a:t>
+            </a:r>
+          </a:p>
+        </p:txBody>
+      </p:sp>
+      <p:sp>
+        <p:nvSpPr>
+          <p:cNvPr id="27" name="TextBox 26"/>
+          <p:cNvSpPr txBox="1"/>
+          <p:nvPr/>
+        </p:nvSpPr>
+        <p:spPr>
+          <a:xfrm>
+            <a:off x="1371600" y="2743200"/>
+            <a:ext cx="457200" cy="457200"/>
           </a:xfrm>
           <a:prstGeom prst="rect">
             <a:avLst/>
@@ -47784,25 +49135,64 @@
           </a:bodyPr>
           <a:lstStyle/>
           <a:p>
-            <a:pPr algn="ctr">
-              <a:defRPr sz="3000"/>
-            </a:pPr>
-            <a:r>
-              <a:t>✨</a:t>
-            </a:r>
-          </a:p>
-        </p:txBody>
-      </p:sp>
-      <p:sp>
-        <p:nvSpPr>
-          <p:cNvPr id="17" name="TextBox 16"/>
-          <p:cNvSpPr txBox="1"/>
-          <p:nvPr/>
-        </p:nvSpPr>
-        <p:spPr>
-          <a:xfrm>
-            <a:off x="8138160" y="3200400"/>
-            <a:ext cx="3200400" cy="457200"/>
+            <a:pPr>
+              <a:defRPr sz="2000" b="1">
+                <a:solidFill>
+                  <a:srgbClr val="00D4AA"/>
+                </a:solidFill>
+              </a:defRPr>
+            </a:pPr>
+            <a:r>
+              <a:t>1</a:t>
+            </a:r>
+          </a:p>
+        </p:txBody>
+      </p:sp>
+      <p:sp>
+        <p:nvSpPr>
+          <p:cNvPr id="28" name="TextBox 27"/>
+          <p:cNvSpPr txBox="1"/>
+          <p:nvPr/>
+        </p:nvSpPr>
+        <p:spPr>
+          <a:xfrm>
+            <a:off x="1828800" y="2743200"/>
+            <a:ext cx="8991295" cy="548640"/>
+          </a:xfrm>
+          <a:prstGeom prst="rect">
+            <a:avLst/>
+          </a:prstGeom>
+          <a:noFill/>
+        </p:spPr>
+        <p:txBody>
+          <a:bodyPr wrap="square">
+            <a:spAutoFit/>
+          </a:bodyPr>
+          <a:lstStyle/>
+          <a:p>
+            <a:pPr>
+              <a:defRPr sz="1800">
+                <a:solidFill>
+                  <a:srgbClr val="FFFFFF"/>
+                </a:solidFill>
+              </a:defRPr>
+            </a:pPr>
+            <a:r>
+              <a:t>Upload prospect company info</a:t>
+            </a:r>
+          </a:p>
+        </p:txBody>
+      </p:sp>
+      <p:sp>
+        <p:nvSpPr>
+          <p:cNvPr id="29" name="TextBox 28"/>
+          <p:cNvSpPr txBox="1"/>
+          <p:nvPr/>
+        </p:nvSpPr>
+        <p:spPr>
+          <a:xfrm>
+            <a:off x="1371600" y="3383280"/>
+            <a:ext cx="457200" cy="457200"/>
           </a:xfrm>
           <a:prstGeom prst="rect">
             <a:avLst/>
@@ -47815,29 +49205,29 @@
           </a:bodyPr>
           <a:lstStyle/>
           <a:p>
-            <a:pPr algn="ctr">
-              <a:defRPr sz="1800" b="1">
-                <a:solidFill>
-                  <a:srgbClr val="FFFFFF"/>
-                </a:solidFill>
-              </a:defRPr>
-            </a:pPr>
-            <a:r>
-              <a:t>Polish &amp; Present</a:t>
-            </a:r>
-          </a:p>
-        </p:txBody>
-      </p:sp>
-      <p:sp>
-        <p:nvSpPr>
-          <p:cNvPr id="18" name="TextBox 17"/>
-          <p:cNvSpPr txBox="1"/>
-          <p:nvPr/>
-        </p:nvSpPr>
-        <p:spPr>
-          <a:xfrm>
-            <a:off x="8138160" y="3749039"/>
-            <a:ext cx="3200400" cy="1645920"/>
+            <a:pPr>
+              <a:defRPr sz="2000" b="1">
+                <a:solidFill>
+                  <a:srgbClr val="00D4AA"/>
+                </a:solidFill>
+              </a:defRPr>
+            </a:pPr>
+            <a:r>
+              <a:t>2</a:t>
+            </a:r>
+          </a:p>
+        </p:txBody>
+      </p:sp>
+      <p:sp>
+        <p:nvSpPr>
+          <p:cNvPr id="30" name="TextBox 29"/>
+          <p:cNvSpPr txBox="1"/>
+          <p:nvPr/>
+        </p:nvSpPr>
+        <p:spPr>
+          <a:xfrm>
+            <a:off x="1828800" y="3383280"/>
+            <a:ext cx="8991295" cy="548640"/>
           </a:xfrm>
           <a:prstGeom prst="rect">
             <a:avLst/>
@@ -47850,41 +49240,29 @@
           </a:bodyPr>
           <a:lstStyle/>
           <a:p>
-            <a:pPr algn="ctr">
-              <a:defRPr sz="1300">
-                <a:solidFill>
-                  <a:srgbClr val="D1D5DB"/>
-                </a:solidFill>
-              </a:defRPr>
-            </a:pPr>
-            <a:r>
-              <a:t>Create a polished</a:t>
-            </a:r>
-            <a:br/>
-            <a:r>
-              <a:t>executive briefing artifact.</a:t>
-            </a:r>
-            <a:br/>
-            <a:r>
-              <a:t>Add charts, format for</a:t>
-            </a:r>
-            <a:br/>
-            <a:r>
-              <a:t>your VP. Share with class.</a:t>
-            </a:r>
-          </a:p>
-        </p:txBody>
-      </p:sp>
-      <p:sp>
-        <p:nvSpPr>
-          <p:cNvPr id="19" name="TextBox 18"/>
-          <p:cNvSpPr txBox="1"/>
-          <p:nvPr/>
-        </p:nvSpPr>
-        <p:spPr>
-          <a:xfrm>
-            <a:off x="8138160" y="5303520"/>
-            <a:ext cx="3200400" cy="365760"/>
+            <a:pPr>
+              <a:defRPr sz="1800">
+                <a:solidFill>
+                  <a:srgbClr val="FFFFFF"/>
+                </a:solidFill>
+              </a:defRPr>
+            </a:pPr>
+            <a:r>
+              <a:t>Ask: 'What are their pain points?'</a:t>
+            </a:r>
+          </a:p>
+        </p:txBody>
+      </p:sp>
+      <p:sp>
+        <p:nvSpPr>
+          <p:cNvPr id="31" name="TextBox 30"/>
+          <p:cNvSpPr txBox="1"/>
+          <p:nvPr/>
+        </p:nvSpPr>
+        <p:spPr>
+          <a:xfrm>
+            <a:off x="1371600" y="4023360"/>
+            <a:ext cx="457200" cy="457200"/>
           </a:xfrm>
           <a:prstGeom prst="rect">
             <a:avLst/>
@@ -47897,15 +49275,190 @@
           </a:bodyPr>
           <a:lstStyle/>
           <a:p>
-            <a:pPr algn="ctr">
-              <a:defRPr sz="1200" i="1">
-                <a:solidFill>
-                  <a:srgbClr val="14B8A6"/>
-                </a:solidFill>
-              </a:defRPr>
-            </a:pPr>
-            <a:r>
-              <a:t>10 min</a:t>
+            <a:pPr>
+              <a:defRPr sz="2000" b="1">
+                <a:solidFill>
+                  <a:srgbClr val="00D4AA"/>
+                </a:solidFill>
+              </a:defRPr>
+            </a:pPr>
+            <a:r>
+              <a:t>3</a:t>
+            </a:r>
+          </a:p>
+        </p:txBody>
+      </p:sp>
+      <p:sp>
+        <p:nvSpPr>
+          <p:cNvPr id="32" name="TextBox 31"/>
+          <p:cNvSpPr txBox="1"/>
+          <p:nvPr/>
+        </p:nvSpPr>
+        <p:spPr>
+          <a:xfrm>
+            <a:off x="1828800" y="4023360"/>
+            <a:ext cx="8991295" cy="548640"/>
+          </a:xfrm>
+          <a:prstGeom prst="rect">
+            <a:avLst/>
+          </a:prstGeom>
+          <a:noFill/>
+        </p:spPr>
+        <p:txBody>
+          <a:bodyPr wrap="square">
+            <a:spAutoFit/>
+          </a:bodyPr>
+          <a:lstStyle/>
+          <a:p>
+            <a:pPr>
+              <a:defRPr sz="1800">
+                <a:solidFill>
+                  <a:srgbClr val="FFFFFF"/>
+                </a:solidFill>
+              </a:defRPr>
+            </a:pPr>
+            <a:r>
+              <a:t>Request: 'Draft personalized pitch'</a:t>
+            </a:r>
+          </a:p>
+        </p:txBody>
+      </p:sp>
+      <p:sp>
+        <p:nvSpPr>
+          <p:cNvPr id="33" name="TextBox 32"/>
+          <p:cNvSpPr txBox="1"/>
+          <p:nvPr/>
+        </p:nvSpPr>
+        <p:spPr>
+          <a:xfrm>
+            <a:off x="1371600" y="4663440"/>
+            <a:ext cx="457200" cy="457200"/>
+          </a:xfrm>
+          <a:prstGeom prst="rect">
+            <a:avLst/>
+          </a:prstGeom>
+          <a:noFill/>
+        </p:spPr>
+        <p:txBody>
+          <a:bodyPr wrap="none">
+            <a:spAutoFit/>
+          </a:bodyPr>
+          <a:lstStyle/>
+          <a:p>
+            <a:pPr>
+              <a:defRPr sz="2000" b="1">
+                <a:solidFill>
+                  <a:srgbClr val="00D4AA"/>
+                </a:solidFill>
+              </a:defRPr>
+            </a:pPr>
+            <a:r>
+              <a:t>4</a:t>
+            </a:r>
+          </a:p>
+        </p:txBody>
+      </p:sp>
+      <p:sp>
+        <p:nvSpPr>
+          <p:cNvPr id="34" name="TextBox 33"/>
+          <p:cNvSpPr txBox="1"/>
+          <p:nvPr/>
+        </p:nvSpPr>
+        <p:spPr>
+          <a:xfrm>
+            <a:off x="1828800" y="4663440"/>
+            <a:ext cx="8991295" cy="548640"/>
+          </a:xfrm>
+          <a:prstGeom prst="rect">
+            <a:avLst/>
+          </a:prstGeom>
+          <a:noFill/>
+        </p:spPr>
+        <p:txBody>
+          <a:bodyPr wrap="square">
+            <a:spAutoFit/>
+          </a:bodyPr>
+          <a:lstStyle/>
+          <a:p>
+            <a:pPr>
+              <a:defRPr sz="1800">
+                <a:solidFill>
+                  <a:srgbClr val="FFFFFF"/>
+                </a:solidFill>
+              </a:defRPr>
+            </a:pPr>
+            <a:r>
+              <a:t>Create: 'Email sequence for follow-up'</a:t>
+            </a:r>
+          </a:p>
+        </p:txBody>
+      </p:sp>
+      <p:sp>
+        <p:nvSpPr>
+          <p:cNvPr id="35" name="TextBox 34"/>
+          <p:cNvSpPr txBox="1"/>
+          <p:nvPr/>
+        </p:nvSpPr>
+        <p:spPr>
+          <a:xfrm>
+            <a:off x="1371600" y="5303520"/>
+            <a:ext cx="457200" cy="457200"/>
+          </a:xfrm>
+          <a:prstGeom prst="rect">
+            <a:avLst/>
+          </a:prstGeom>
+          <a:noFill/>
+        </p:spPr>
+        <p:txBody>
+          <a:bodyPr wrap="none">
+            <a:spAutoFit/>
+          </a:bodyPr>
+          <a:lstStyle/>
+          <a:p>
+            <a:pPr>
+              <a:defRPr sz="2000" b="1">
+                <a:solidFill>
+                  <a:srgbClr val="00D4AA"/>
+                </a:solidFill>
+              </a:defRPr>
+            </a:pPr>
+            <a:r>
+              <a:t>5</a:t>
+            </a:r>
+          </a:p>
+        </p:txBody>
+      </p:sp>
+      <p:sp>
+        <p:nvSpPr>
+          <p:cNvPr id="36" name="TextBox 35"/>
+          <p:cNvSpPr txBox="1"/>
+          <p:nvPr/>
+        </p:nvSpPr>
+        <p:spPr>
+          <a:xfrm>
+            <a:off x="1828800" y="5303520"/>
+            <a:ext cx="8991295" cy="548640"/>
+          </a:xfrm>
+          <a:prstGeom prst="rect">
+            <a:avLst/>
+          </a:prstGeom>
+          <a:noFill/>
+        </p:spPr>
+        <p:txBody>
+          <a:bodyPr wrap="square">
+            <a:spAutoFit/>
+          </a:bodyPr>
+          <a:lstStyle/>
+          <a:p>
+            <a:pPr>
+              <a:defRPr sz="1800">
+                <a:solidFill>
+                  <a:srgbClr val="FFFFFF"/>
+                </a:solidFill>
+              </a:defRPr>
+            </a:pPr>
+            <a:r>
+              <a:t>Generate: 'Objection handling script'</a:t>
             </a:r>
           </a:p>
         </p:txBody>
@@ -47945,20 +49498,20 @@
       </p:grpSpPr>
       <p:sp>
         <p:nvSpPr>
-          <p:cNvPr id="2" name="Rectangle 1"/>
+          <p:cNvPr id="2" name="Rounded Rectangle 1"/>
           <p:cNvSpPr/>
           <p:nvPr/>
         </p:nvSpPr>
         <p:spPr>
           <a:xfrm>
-            <a:off x="0" y="1828800"/>
-            <a:ext cx="137160" cy="3200400"/>
-          </a:xfrm>
-          <a:prstGeom prst="rect">
+            <a:off x="457200" y="365760"/>
+            <a:ext cx="1097280" cy="457200"/>
+          </a:xfrm>
+          <a:prstGeom prst="roundRect">
             <a:avLst/>
           </a:prstGeom>
           <a:solidFill>
-            <a:srgbClr val="00D4AA"/>
+            <a:srgbClr val="14B8A6"/>
           </a:solidFill>
           <a:ln>
             <a:noFill/>
@@ -47982,6 +49535,130 @@
           <a:bodyPr rtlCol="0" anchor="ctr"/>
           <a:lstStyle/>
           <a:p>
+            <a:pPr algn="ctr">
+              <a:defRPr sz="1400" b="1">
+                <a:solidFill>
+                  <a:srgbClr val="FFFFFF"/>
+                </a:solidFill>
+              </a:defRPr>
+            </a:pPr>
+            <a:r>
+              <a:t>LAB 4</a:t>
+            </a:r>
+          </a:p>
+        </p:txBody>
+      </p:sp>
+      <p:sp>
+        <p:nvSpPr>
+          <p:cNvPr id="3" name="TextBox 2"/>
+          <p:cNvSpPr txBox="1"/>
+          <p:nvPr/>
+        </p:nvSpPr>
+        <p:spPr>
+          <a:xfrm>
+            <a:off x="457200" y="1005840"/>
+            <a:ext cx="11247120" cy="731520"/>
+          </a:xfrm>
+          <a:prstGeom prst="rect">
+            <a:avLst/>
+          </a:prstGeom>
+          <a:noFill/>
+        </p:spPr>
+        <p:txBody>
+          <a:bodyPr wrap="none">
+            <a:spAutoFit/>
+          </a:bodyPr>
+          <a:lstStyle/>
+          <a:p>
+            <a:pPr>
+              <a:defRPr sz="3600" b="1">
+                <a:solidFill>
+                  <a:srgbClr val="FFFFFF"/>
+                </a:solidFill>
+              </a:defRPr>
+            </a:pPr>
+            <a:r>
+              <a:t>Executive Briefing Challenge</a:t>
+            </a:r>
+          </a:p>
+        </p:txBody>
+      </p:sp>
+      <p:sp>
+        <p:nvSpPr>
+          <p:cNvPr id="4" name="TextBox 3"/>
+          <p:cNvSpPr txBox="1"/>
+          <p:nvPr/>
+        </p:nvSpPr>
+        <p:spPr>
+          <a:xfrm>
+            <a:off x="457200" y="1737360"/>
+            <a:ext cx="11247120" cy="457200"/>
+          </a:xfrm>
+          <a:prstGeom prst="rect">
+            <a:avLst/>
+          </a:prstGeom>
+          <a:noFill/>
+        </p:spPr>
+        <p:txBody>
+          <a:bodyPr wrap="none">
+            <a:spAutoFit/>
+          </a:bodyPr>
+          <a:lstStyle/>
+          <a:p>
+            <a:pPr>
+              <a:defRPr sz="1800" i="1">
+                <a:solidFill>
+                  <a:srgbClr val="9CA3AF"/>
+                </a:solidFill>
+              </a:defRPr>
+            </a:pPr>
+            <a:r>
+              <a:t>30 minutes  •  Tie it all together  •  Real deliverable you'll use Monday</a:t>
+            </a:r>
+          </a:p>
+        </p:txBody>
+      </p:sp>
+      <p:sp>
+        <p:nvSpPr>
+          <p:cNvPr id="5" name="Rounded Rectangle 4"/>
+          <p:cNvSpPr/>
+          <p:nvPr/>
+        </p:nvSpPr>
+        <p:spPr>
+          <a:xfrm>
+            <a:off x="457200" y="2468880"/>
+            <a:ext cx="3566160" cy="3200400"/>
+          </a:xfrm>
+          <a:prstGeom prst="roundRect">
+            <a:avLst/>
+          </a:prstGeom>
+          <a:solidFill>
+            <a:srgbClr val="24354A"/>
+          </a:solidFill>
+          <a:ln w="19050">
+            <a:solidFill>
+              <a:srgbClr val="14B8A6"/>
+            </a:solidFill>
+          </a:ln>
+        </p:spPr>
+        <p:style>
+          <a:lnRef idx="1">
+            <a:schemeClr val="accent1"/>
+          </a:lnRef>
+          <a:fillRef idx="3">
+            <a:schemeClr val="accent1"/>
+          </a:fillRef>
+          <a:effectRef idx="2">
+            <a:schemeClr val="accent1"/>
+          </a:effectRef>
+          <a:fontRef idx="minor">
+            <a:schemeClr val="lt1"/>
+          </a:fontRef>
+        </p:style>
+        <p:txBody>
+          <a:bodyPr rtlCol="0" anchor="ctr"/>
+          <a:lstStyle/>
+          <a:p>
             <a:pPr algn="ctr"/>
             <a:endParaRPr/>
           </a:p>
@@ -47989,14 +49666,80 @@
       </p:sp>
       <p:sp>
         <p:nvSpPr>
-          <p:cNvPr id="3" name="TextBox 2"/>
-          <p:cNvSpPr txBox="1"/>
-          <p:nvPr/>
-        </p:nvSpPr>
-        <p:spPr>
-          <a:xfrm>
-            <a:off x="457200" y="2286000"/>
-            <a:ext cx="11277295" cy="1371600"/>
+          <p:cNvPr id="6" name="TextBox 5"/>
+          <p:cNvSpPr txBox="1"/>
+          <p:nvPr/>
+        </p:nvSpPr>
+        <p:spPr>
+          <a:xfrm>
+            <a:off x="640080" y="2651760"/>
+            <a:ext cx="3200400" cy="548640"/>
+          </a:xfrm>
+          <a:prstGeom prst="rect">
+            <a:avLst/>
+          </a:prstGeom>
+          <a:noFill/>
+        </p:spPr>
+        <p:txBody>
+          <a:bodyPr wrap="none">
+            <a:spAutoFit/>
+          </a:bodyPr>
+          <a:lstStyle/>
+          <a:p>
+            <a:pPr algn="ctr">
+              <a:defRPr sz="3000"/>
+            </a:pPr>
+            <a:r>
+              <a:t>🗂️</a:t>
+            </a:r>
+          </a:p>
+        </p:txBody>
+      </p:sp>
+      <p:sp>
+        <p:nvSpPr>
+          <p:cNvPr id="7" name="TextBox 6"/>
+          <p:cNvSpPr txBox="1"/>
+          <p:nvPr/>
+        </p:nvSpPr>
+        <p:spPr>
+          <a:xfrm>
+            <a:off x="640080" y="3200400"/>
+            <a:ext cx="3200400" cy="457200"/>
+          </a:xfrm>
+          <a:prstGeom prst="rect">
+            <a:avLst/>
+          </a:prstGeom>
+          <a:noFill/>
+        </p:spPr>
+        <p:txBody>
+          <a:bodyPr wrap="none">
+            <a:spAutoFit/>
+          </a:bodyPr>
+          <a:lstStyle/>
+          <a:p>
+            <a:pPr algn="ctr">
+              <a:defRPr sz="1800" b="1">
+                <a:solidFill>
+                  <a:srgbClr val="FFFFFF"/>
+                </a:solidFill>
+              </a:defRPr>
+            </a:pPr>
+            <a:r>
+              <a:t>Set Up</a:t>
+            </a:r>
+          </a:p>
+        </p:txBody>
+      </p:sp>
+      <p:sp>
+        <p:nvSpPr>
+          <p:cNvPr id="8" name="TextBox 7"/>
+          <p:cNvSpPr txBox="1"/>
+          <p:nvPr/>
+        </p:nvSpPr>
+        <p:spPr>
+          <a:xfrm>
+            <a:off x="640080" y="3749039"/>
+            <a:ext cx="3200400" cy="1645920"/>
           </a:xfrm>
           <a:prstGeom prst="rect">
             <a:avLst/>
@@ -48009,15 +49752,450 @@
           </a:bodyPr>
           <a:lstStyle/>
           <a:p>
-            <a:pPr>
-              <a:defRPr sz="5600" b="1">
+            <a:pPr algn="ctr">
+              <a:defRPr sz="1300">
+                <a:solidFill>
+                  <a:srgbClr val="D1D5DB"/>
+                </a:solidFill>
+              </a:defRPr>
+            </a:pPr>
+            <a:r>
+              <a:t>Create a Project called</a:t>
+            </a:r>
+            <a:br/>
+            <a:r>
+              <a:t>'Executive Briefing'.</a:t>
+            </a:r>
+            <a:br/>
+            <a:r>
+              <a:t>Add custom instructions.</a:t>
+            </a:r>
+            <a:br/>
+            <a:r>
+              <a:t>Upload all provided files.</a:t>
+            </a:r>
+          </a:p>
+        </p:txBody>
+      </p:sp>
+      <p:sp>
+        <p:nvSpPr>
+          <p:cNvPr id="9" name="TextBox 8"/>
+          <p:cNvSpPr txBox="1"/>
+          <p:nvPr/>
+        </p:nvSpPr>
+        <p:spPr>
+          <a:xfrm>
+            <a:off x="640080" y="5303520"/>
+            <a:ext cx="3200400" cy="365760"/>
+          </a:xfrm>
+          <a:prstGeom prst="rect">
+            <a:avLst/>
+          </a:prstGeom>
+          <a:noFill/>
+        </p:spPr>
+        <p:txBody>
+          <a:bodyPr wrap="none">
+            <a:spAutoFit/>
+          </a:bodyPr>
+          <a:lstStyle/>
+          <a:p>
+            <a:pPr algn="ctr">
+              <a:defRPr sz="1200" i="1">
+                <a:solidFill>
+                  <a:srgbClr val="14B8A6"/>
+                </a:solidFill>
+              </a:defRPr>
+            </a:pPr>
+            <a:r>
+              <a:t>5 min</a:t>
+            </a:r>
+          </a:p>
+        </p:txBody>
+      </p:sp>
+      <p:sp>
+        <p:nvSpPr>
+          <p:cNvPr id="10" name="Rounded Rectangle 9"/>
+          <p:cNvSpPr/>
+          <p:nvPr/>
+        </p:nvSpPr>
+        <p:spPr>
+          <a:xfrm>
+            <a:off x="4206240" y="2468880"/>
+            <a:ext cx="3566160" cy="3200400"/>
+          </a:xfrm>
+          <a:prstGeom prst="roundRect">
+            <a:avLst/>
+          </a:prstGeom>
+          <a:solidFill>
+            <a:srgbClr val="24354A"/>
+          </a:solidFill>
+          <a:ln w="19050">
+            <a:solidFill>
+              <a:srgbClr val="14B8A6"/>
+            </a:solidFill>
+          </a:ln>
+        </p:spPr>
+        <p:style>
+          <a:lnRef idx="1">
+            <a:schemeClr val="accent1"/>
+          </a:lnRef>
+          <a:fillRef idx="3">
+            <a:schemeClr val="accent1"/>
+          </a:fillRef>
+          <a:effectRef idx="2">
+            <a:schemeClr val="accent1"/>
+          </a:effectRef>
+          <a:fontRef idx="minor">
+            <a:schemeClr val="lt1"/>
+          </a:fontRef>
+        </p:style>
+        <p:txBody>
+          <a:bodyPr rtlCol="0" anchor="ctr"/>
+          <a:lstStyle/>
+          <a:p>
+            <a:pPr algn="ctr"/>
+            <a:endParaRPr/>
+          </a:p>
+        </p:txBody>
+      </p:sp>
+      <p:sp>
+        <p:nvSpPr>
+          <p:cNvPr id="11" name="TextBox 10"/>
+          <p:cNvSpPr txBox="1"/>
+          <p:nvPr/>
+        </p:nvSpPr>
+        <p:spPr>
+          <a:xfrm>
+            <a:off x="4389120" y="2651760"/>
+            <a:ext cx="3200400" cy="548640"/>
+          </a:xfrm>
+          <a:prstGeom prst="rect">
+            <a:avLst/>
+          </a:prstGeom>
+          <a:noFill/>
+        </p:spPr>
+        <p:txBody>
+          <a:bodyPr wrap="none">
+            <a:spAutoFit/>
+          </a:bodyPr>
+          <a:lstStyle/>
+          <a:p>
+            <a:pPr algn="ctr">
+              <a:defRPr sz="3000"/>
+            </a:pPr>
+            <a:r>
+              <a:t>🔍</a:t>
+            </a:r>
+          </a:p>
+        </p:txBody>
+      </p:sp>
+      <p:sp>
+        <p:nvSpPr>
+          <p:cNvPr id="12" name="TextBox 11"/>
+          <p:cNvSpPr txBox="1"/>
+          <p:nvPr/>
+        </p:nvSpPr>
+        <p:spPr>
+          <a:xfrm>
+            <a:off x="4389120" y="3200400"/>
+            <a:ext cx="3200400" cy="457200"/>
+          </a:xfrm>
+          <a:prstGeom prst="rect">
+            <a:avLst/>
+          </a:prstGeom>
+          <a:noFill/>
+        </p:spPr>
+        <p:txBody>
+          <a:bodyPr wrap="none">
+            <a:spAutoFit/>
+          </a:bodyPr>
+          <a:lstStyle/>
+          <a:p>
+            <a:pPr algn="ctr">
+              <a:defRPr sz="1800" b="1">
                 <a:solidFill>
                   <a:srgbClr val="FFFFFF"/>
                 </a:solidFill>
               </a:defRPr>
             </a:pPr>
             <a:r>
-              <a:t>Wrap-up &amp; Q&amp;A</a:t>
+              <a:t>Analyze &amp; Build</a:t>
+            </a:r>
+          </a:p>
+        </p:txBody>
+      </p:sp>
+      <p:sp>
+        <p:nvSpPr>
+          <p:cNvPr id="13" name="TextBox 12"/>
+          <p:cNvSpPr txBox="1"/>
+          <p:nvPr/>
+        </p:nvSpPr>
+        <p:spPr>
+          <a:xfrm>
+            <a:off x="4389120" y="3749039"/>
+            <a:ext cx="3200400" cy="1645920"/>
+          </a:xfrm>
+          <a:prstGeom prst="rect">
+            <a:avLst/>
+          </a:prstGeom>
+          <a:noFill/>
+        </p:spPr>
+        <p:txBody>
+          <a:bodyPr wrap="square">
+            <a:spAutoFit/>
+          </a:bodyPr>
+          <a:lstStyle/>
+          <a:p>
+            <a:pPr algn="ctr">
+              <a:defRPr sz="1300">
+                <a:solidFill>
+                  <a:srgbClr val="D1D5DB"/>
+                </a:solidFill>
+              </a:defRPr>
+            </a:pPr>
+            <a:r>
+              <a:t>Use prompting skills to</a:t>
+            </a:r>
+            <a:br/>
+            <a:r>
+              <a:t>extract insights from</a:t>
+            </a:r>
+            <a:br/>
+            <a:r>
+              <a:t>multiple file types.</a:t>
+            </a:r>
+            <a:br/>
+            <a:r>
+              <a:t>Iterate until output is sharp.</a:t>
+            </a:r>
+          </a:p>
+        </p:txBody>
+      </p:sp>
+      <p:sp>
+        <p:nvSpPr>
+          <p:cNvPr id="14" name="TextBox 13"/>
+          <p:cNvSpPr txBox="1"/>
+          <p:nvPr/>
+        </p:nvSpPr>
+        <p:spPr>
+          <a:xfrm>
+            <a:off x="4389120" y="5303520"/>
+            <a:ext cx="3200400" cy="365760"/>
+          </a:xfrm>
+          <a:prstGeom prst="rect">
+            <a:avLst/>
+          </a:prstGeom>
+          <a:noFill/>
+        </p:spPr>
+        <p:txBody>
+          <a:bodyPr wrap="none">
+            <a:spAutoFit/>
+          </a:bodyPr>
+          <a:lstStyle/>
+          <a:p>
+            <a:pPr algn="ctr">
+              <a:defRPr sz="1200" i="1">
+                <a:solidFill>
+                  <a:srgbClr val="14B8A6"/>
+                </a:solidFill>
+              </a:defRPr>
+            </a:pPr>
+            <a:r>
+              <a:t>15 min</a:t>
+            </a:r>
+          </a:p>
+        </p:txBody>
+      </p:sp>
+      <p:sp>
+        <p:nvSpPr>
+          <p:cNvPr id="15" name="Rounded Rectangle 14"/>
+          <p:cNvSpPr/>
+          <p:nvPr/>
+        </p:nvSpPr>
+        <p:spPr>
+          <a:xfrm>
+            <a:off x="7955280" y="2468880"/>
+            <a:ext cx="3566160" cy="3200400"/>
+          </a:xfrm>
+          <a:prstGeom prst="roundRect">
+            <a:avLst/>
+          </a:prstGeom>
+          <a:solidFill>
+            <a:srgbClr val="24354A"/>
+          </a:solidFill>
+          <a:ln w="19050">
+            <a:solidFill>
+              <a:srgbClr val="14B8A6"/>
+            </a:solidFill>
+          </a:ln>
+        </p:spPr>
+        <p:style>
+          <a:lnRef idx="1">
+            <a:schemeClr val="accent1"/>
+          </a:lnRef>
+          <a:fillRef idx="3">
+            <a:schemeClr val="accent1"/>
+          </a:fillRef>
+          <a:effectRef idx="2">
+            <a:schemeClr val="accent1"/>
+          </a:effectRef>
+          <a:fontRef idx="minor">
+            <a:schemeClr val="lt1"/>
+          </a:fontRef>
+        </p:style>
+        <p:txBody>
+          <a:bodyPr rtlCol="0" anchor="ctr"/>
+          <a:lstStyle/>
+          <a:p>
+            <a:pPr algn="ctr"/>
+            <a:endParaRPr/>
+          </a:p>
+        </p:txBody>
+      </p:sp>
+      <p:sp>
+        <p:nvSpPr>
+          <p:cNvPr id="16" name="TextBox 15"/>
+          <p:cNvSpPr txBox="1"/>
+          <p:nvPr/>
+        </p:nvSpPr>
+        <p:spPr>
+          <a:xfrm>
+            <a:off x="8138160" y="2651760"/>
+            <a:ext cx="3200400" cy="548640"/>
+          </a:xfrm>
+          <a:prstGeom prst="rect">
+            <a:avLst/>
+          </a:prstGeom>
+          <a:noFill/>
+        </p:spPr>
+        <p:txBody>
+          <a:bodyPr wrap="none">
+            <a:spAutoFit/>
+          </a:bodyPr>
+          <a:lstStyle/>
+          <a:p>
+            <a:pPr algn="ctr">
+              <a:defRPr sz="3000"/>
+            </a:pPr>
+            <a:r>
+              <a:t>✨</a:t>
+            </a:r>
+          </a:p>
+        </p:txBody>
+      </p:sp>
+      <p:sp>
+        <p:nvSpPr>
+          <p:cNvPr id="17" name="TextBox 16"/>
+          <p:cNvSpPr txBox="1"/>
+          <p:nvPr/>
+        </p:nvSpPr>
+        <p:spPr>
+          <a:xfrm>
+            <a:off x="8138160" y="3200400"/>
+            <a:ext cx="3200400" cy="457200"/>
+          </a:xfrm>
+          <a:prstGeom prst="rect">
+            <a:avLst/>
+          </a:prstGeom>
+          <a:noFill/>
+        </p:spPr>
+        <p:txBody>
+          <a:bodyPr wrap="none">
+            <a:spAutoFit/>
+          </a:bodyPr>
+          <a:lstStyle/>
+          <a:p>
+            <a:pPr algn="ctr">
+              <a:defRPr sz="1800" b="1">
+                <a:solidFill>
+                  <a:srgbClr val="FFFFFF"/>
+                </a:solidFill>
+              </a:defRPr>
+            </a:pPr>
+            <a:r>
+              <a:t>Polish &amp; Present</a:t>
+            </a:r>
+          </a:p>
+        </p:txBody>
+      </p:sp>
+      <p:sp>
+        <p:nvSpPr>
+          <p:cNvPr id="18" name="TextBox 17"/>
+          <p:cNvSpPr txBox="1"/>
+          <p:nvPr/>
+        </p:nvSpPr>
+        <p:spPr>
+          <a:xfrm>
+            <a:off x="8138160" y="3749039"/>
+            <a:ext cx="3200400" cy="1645920"/>
+          </a:xfrm>
+          <a:prstGeom prst="rect">
+            <a:avLst/>
+          </a:prstGeom>
+          <a:noFill/>
+        </p:spPr>
+        <p:txBody>
+          <a:bodyPr wrap="square">
+            <a:spAutoFit/>
+          </a:bodyPr>
+          <a:lstStyle/>
+          <a:p>
+            <a:pPr algn="ctr">
+              <a:defRPr sz="1300">
+                <a:solidFill>
+                  <a:srgbClr val="D1D5DB"/>
+                </a:solidFill>
+              </a:defRPr>
+            </a:pPr>
+            <a:r>
+              <a:t>Create a polished</a:t>
+            </a:r>
+            <a:br/>
+            <a:r>
+              <a:t>executive briefing artifact.</a:t>
+            </a:r>
+            <a:br/>
+            <a:r>
+              <a:t>Add charts, format for</a:t>
+            </a:r>
+            <a:br/>
+            <a:r>
+              <a:t>your VP. Share with class.</a:t>
+            </a:r>
+          </a:p>
+        </p:txBody>
+      </p:sp>
+      <p:sp>
+        <p:nvSpPr>
+          <p:cNvPr id="19" name="TextBox 18"/>
+          <p:cNvSpPr txBox="1"/>
+          <p:nvPr/>
+        </p:nvSpPr>
+        <p:spPr>
+          <a:xfrm>
+            <a:off x="8138160" y="5303520"/>
+            <a:ext cx="3200400" cy="365760"/>
+          </a:xfrm>
+          <a:prstGeom prst="rect">
+            <a:avLst/>
+          </a:prstGeom>
+          <a:noFill/>
+        </p:spPr>
+        <p:txBody>
+          <a:bodyPr wrap="none">
+            <a:spAutoFit/>
+          </a:bodyPr>
+          <a:lstStyle/>
+          <a:p>
+            <a:pPr algn="ctr">
+              <a:defRPr sz="1200" i="1">
+                <a:solidFill>
+                  <a:srgbClr val="14B8A6"/>
+                </a:solidFill>
+              </a:defRPr>
+            </a:pPr>
+            <a:r>
+              <a:t>10 min</a:t>
             </a:r>
           </a:p>
         </p:txBody>
@@ -48057,49 +50235,14 @@
       </p:grpSpPr>
       <p:sp>
         <p:nvSpPr>
-          <p:cNvPr id="2" name="TextBox 1"/>
-          <p:cNvSpPr txBox="1"/>
-          <p:nvPr/>
-        </p:nvSpPr>
-        <p:spPr>
-          <a:xfrm>
-            <a:off x="457200" y="457200"/>
-            <a:ext cx="11277295" cy="731520"/>
-          </a:xfrm>
-          <a:prstGeom prst="rect">
-            <a:avLst/>
-          </a:prstGeom>
-          <a:noFill/>
-        </p:spPr>
-        <p:txBody>
-          <a:bodyPr wrap="none">
-            <a:spAutoFit/>
-          </a:bodyPr>
-          <a:lstStyle/>
-          <a:p>
-            <a:pPr algn="ctr">
-              <a:defRPr sz="3600" b="1">
-                <a:solidFill>
-                  <a:srgbClr val="FFFFFF"/>
-                </a:solidFill>
-              </a:defRPr>
-            </a:pPr>
-            <a:r>
-              <a:t>What We Covered Today</a:t>
-            </a:r>
-          </a:p>
-        </p:txBody>
-      </p:sp>
-      <p:sp>
-        <p:nvSpPr>
-          <p:cNvPr id="3" name="Rectangle 2"/>
+          <p:cNvPr id="2" name="Rectangle 1"/>
           <p:cNvSpPr/>
           <p:nvPr/>
         </p:nvSpPr>
         <p:spPr>
           <a:xfrm>
-            <a:off x="6077559" y="1371600"/>
-            <a:ext cx="36576" cy="4572000"/>
+            <a:off x="0" y="1828800"/>
+            <a:ext cx="137160" cy="3200400"/>
           </a:xfrm>
           <a:prstGeom prst="rect">
             <a:avLst/>
@@ -48136,49 +50279,14 @@
       </p:sp>
       <p:sp>
         <p:nvSpPr>
-          <p:cNvPr id="4" name="TextBox 3"/>
-          <p:cNvSpPr txBox="1"/>
-          <p:nvPr/>
-        </p:nvSpPr>
-        <p:spPr>
-          <a:xfrm>
-            <a:off x="457200" y="1463040"/>
-            <a:ext cx="5364327" cy="731520"/>
-          </a:xfrm>
-          <a:prstGeom prst="rect">
-            <a:avLst/>
-          </a:prstGeom>
-          <a:noFill/>
-        </p:spPr>
-        <p:txBody>
-          <a:bodyPr wrap="none">
-            <a:spAutoFit/>
-          </a:bodyPr>
-          <a:lstStyle/>
-          <a:p>
-            <a:pPr algn="ctr">
-              <a:defRPr sz="2800" b="1">
-                <a:solidFill>
-                  <a:srgbClr val="00D4AA"/>
-                </a:solidFill>
-              </a:defRPr>
-            </a:pPr>
-            <a:r>
-              <a:t>Morning</a:t>
-            </a:r>
-          </a:p>
-        </p:txBody>
-      </p:sp>
-      <p:sp>
-        <p:nvSpPr>
-          <p:cNvPr id="5" name="TextBox 4"/>
+          <p:cNvPr id="3" name="TextBox 2"/>
           <p:cNvSpPr txBox="1"/>
           <p:nvPr/>
         </p:nvSpPr>
         <p:spPr>
           <a:xfrm>
             <a:off x="457200" y="2286000"/>
-            <a:ext cx="5364327" cy="3657600"/>
+            <a:ext cx="11277295" cy="1371600"/>
           </a:xfrm>
           <a:prstGeom prst="rect">
             <a:avLst/>
@@ -48192,150 +50300,14 @@
           <a:lstStyle/>
           <a:p>
             <a:pPr>
-              <a:spcAft>
-                <a:spcPts val="1200"/>
-              </a:spcAft>
-              <a:defRPr sz="1800">
+              <a:defRPr sz="5600" b="1">
                 <a:solidFill>
                   <a:srgbClr val="FFFFFF"/>
                 </a:solidFill>
               </a:defRPr>
             </a:pPr>
             <a:r>
-              <a:t>  Claude model family</a:t>
-            </a:r>
-          </a:p>
-          <a:p>
-            <a:pPr>
-              <a:spcAft>
-                <a:spcPts val="1200"/>
-              </a:spcAft>
-              <a:defRPr sz="1800">
-                <a:solidFill>
-                  <a:srgbClr val="FFFFFF"/>
-                </a:solidFill>
-              </a:defRPr>
-            </a:pPr>
-            <a:r>
-              <a:t>  Claude.ai interface and Projects</a:t>
-            </a:r>
-          </a:p>
-          <a:p>
-            <a:pPr>
-              <a:spcAft>
-                <a:spcPts val="1200"/>
-              </a:spcAft>
-              <a:defRPr sz="1800">
-                <a:solidFill>
-                  <a:srgbClr val="FFFFFF"/>
-                </a:solidFill>
-              </a:defRPr>
-            </a:pPr>
-            <a:r>
-              <a:t>  Prompt engineering (GOLDEN framework)</a:t>
-            </a:r>
-          </a:p>
-        </p:txBody>
-      </p:sp>
-      <p:sp>
-        <p:nvSpPr>
-          <p:cNvPr id="6" name="TextBox 5"/>
-          <p:cNvSpPr txBox="1"/>
-          <p:nvPr/>
-        </p:nvSpPr>
-        <p:spPr>
-          <a:xfrm>
-            <a:off x="6370167" y="1463040"/>
-            <a:ext cx="5364327" cy="731520"/>
-          </a:xfrm>
-          <a:prstGeom prst="rect">
-            <a:avLst/>
-          </a:prstGeom>
-          <a:noFill/>
-        </p:spPr>
-        <p:txBody>
-          <a:bodyPr wrap="none">
-            <a:spAutoFit/>
-          </a:bodyPr>
-          <a:lstStyle/>
-          <a:p>
-            <a:pPr algn="ctr">
-              <a:defRPr sz="2800" b="1">
-                <a:solidFill>
-                  <a:srgbClr val="0078D4"/>
-                </a:solidFill>
-              </a:defRPr>
-            </a:pPr>
-            <a:r>
-              <a:t>Afternoon</a:t>
-            </a:r>
-          </a:p>
-        </p:txBody>
-      </p:sp>
-      <p:sp>
-        <p:nvSpPr>
-          <p:cNvPr id="7" name="TextBox 6"/>
-          <p:cNvSpPr txBox="1"/>
-          <p:nvPr/>
-        </p:nvSpPr>
-        <p:spPr>
-          <a:xfrm>
-            <a:off x="6370167" y="2286000"/>
-            <a:ext cx="5364327" cy="3657600"/>
-          </a:xfrm>
-          <a:prstGeom prst="rect">
-            <a:avLst/>
-          </a:prstGeom>
-          <a:noFill/>
-        </p:spPr>
-        <p:txBody>
-          <a:bodyPr wrap="square">
-            <a:spAutoFit/>
-          </a:bodyPr>
-          <a:lstStyle/>
-          <a:p>
-            <a:pPr>
-              <a:spcAft>
-                <a:spcPts val="1200"/>
-              </a:spcAft>
-              <a:defRPr sz="1800">
-                <a:solidFill>
-                  <a:srgbClr val="FFFFFF"/>
-                </a:solidFill>
-              </a:defRPr>
-            </a:pPr>
-            <a:r>
-              <a:t>  Claude in Excel</a:t>
-            </a:r>
-          </a:p>
-          <a:p>
-            <a:pPr>
-              <a:spcAft>
-                <a:spcPts val="1200"/>
-              </a:spcAft>
-              <a:defRPr sz="1800">
-                <a:solidFill>
-                  <a:srgbClr val="FFFFFF"/>
-                </a:solidFill>
-              </a:defRPr>
-            </a:pPr>
-            <a:r>
-              <a:t>  Artifacts</a:t>
-            </a:r>
-          </a:p>
-          <a:p>
-            <a:pPr>
-              <a:spcAft>
-                <a:spcPts val="1200"/>
-              </a:spcAft>
-              <a:defRPr sz="1800">
-                <a:solidFill>
-                  <a:srgbClr val="FFFFFF"/>
-                </a:solidFill>
-              </a:defRPr>
-            </a:pPr>
-            <a:r>
-              <a:t>  File handling</a:t>
+              <a:t>Wrap-up &amp; Q&amp;A</a:t>
             </a:r>
           </a:p>
         </p:txBody>
@@ -48375,14 +50347,49 @@
       </p:grpSpPr>
       <p:sp>
         <p:nvSpPr>
-          <p:cNvPr id="2" name="Rectangle 1"/>
+          <p:cNvPr id="2" name="TextBox 1"/>
+          <p:cNvSpPr txBox="1"/>
+          <p:nvPr/>
+        </p:nvSpPr>
+        <p:spPr>
+          <a:xfrm>
+            <a:off x="457200" y="457200"/>
+            <a:ext cx="11277295" cy="731520"/>
+          </a:xfrm>
+          <a:prstGeom prst="rect">
+            <a:avLst/>
+          </a:prstGeom>
+          <a:noFill/>
+        </p:spPr>
+        <p:txBody>
+          <a:bodyPr wrap="none">
+            <a:spAutoFit/>
+          </a:bodyPr>
+          <a:lstStyle/>
+          <a:p>
+            <a:pPr algn="ctr">
+              <a:defRPr sz="3600" b="1">
+                <a:solidFill>
+                  <a:srgbClr val="FFFFFF"/>
+                </a:solidFill>
+              </a:defRPr>
+            </a:pPr>
+            <a:r>
+              <a:t>What We Covered Today</a:t>
+            </a:r>
+          </a:p>
+        </p:txBody>
+      </p:sp>
+      <p:sp>
+        <p:nvSpPr>
+          <p:cNvPr id="3" name="Rectangle 2"/>
           <p:cNvSpPr/>
           <p:nvPr/>
         </p:nvSpPr>
         <p:spPr>
           <a:xfrm>
-            <a:off x="0" y="1188720"/>
-            <a:ext cx="91440" cy="5029200"/>
+            <a:off x="6077559" y="1371600"/>
+            <a:ext cx="36576" cy="4572000"/>
           </a:xfrm>
           <a:prstGeom prst="rect">
             <a:avLst/>
@@ -48419,14 +50426,14 @@
       </p:sp>
       <p:sp>
         <p:nvSpPr>
-          <p:cNvPr id="3" name="TextBox 2"/>
-          <p:cNvSpPr txBox="1"/>
-          <p:nvPr/>
-        </p:nvSpPr>
-        <p:spPr>
-          <a:xfrm>
-            <a:off x="457200" y="365760"/>
-            <a:ext cx="11277295" cy="822960"/>
+          <p:cNvPr id="4" name="TextBox 3"/>
+          <p:cNvSpPr txBox="1"/>
+          <p:nvPr/>
+        </p:nvSpPr>
+        <p:spPr>
+          <a:xfrm>
+            <a:off x="457200" y="1463040"/>
+            <a:ext cx="5364327" cy="731520"/>
           </a:xfrm>
           <a:prstGeom prst="rect">
             <a:avLst/>
@@ -48439,60 +50446,16 @@
           </a:bodyPr>
           <a:lstStyle/>
           <a:p>
-            <a:pPr>
-              <a:defRPr sz="4000" b="1">
-                <a:solidFill>
-                  <a:srgbClr val="FFFFFF"/>
-                </a:solidFill>
-              </a:defRPr>
-            </a:pPr>
-            <a:r>
-              <a:t>Key Takeaways</a:t>
-            </a:r>
-          </a:p>
-        </p:txBody>
-      </p:sp>
-      <p:sp>
-        <p:nvSpPr>
-          <p:cNvPr id="4" name="Oval 3"/>
-          <p:cNvSpPr/>
-          <p:nvPr/>
-        </p:nvSpPr>
-        <p:spPr>
-          <a:xfrm>
-            <a:off x="457200" y="1371600"/>
-            <a:ext cx="411480" cy="411480"/>
-          </a:xfrm>
-          <a:prstGeom prst="ellipse">
-            <a:avLst/>
-          </a:prstGeom>
-          <a:solidFill>
-            <a:srgbClr val="00D4AA"/>
-          </a:solidFill>
-          <a:ln>
-            <a:noFill/>
-          </a:ln>
-        </p:spPr>
-        <p:style>
-          <a:lnRef idx="1">
-            <a:schemeClr val="accent1"/>
-          </a:lnRef>
-          <a:fillRef idx="3">
-            <a:schemeClr val="accent1"/>
-          </a:fillRef>
-          <a:effectRef idx="2">
-            <a:schemeClr val="accent1"/>
-          </a:effectRef>
-          <a:fontRef idx="minor">
-            <a:schemeClr val="lt1"/>
-          </a:fontRef>
-        </p:style>
-        <p:txBody>
-          <a:bodyPr rtlCol="0" anchor="ctr"/>
-          <a:lstStyle/>
-          <a:p>
-            <a:pPr algn="ctr"/>
-            <a:endParaRPr/>
+            <a:pPr algn="ctr">
+              <a:defRPr sz="2800" b="1">
+                <a:solidFill>
+                  <a:srgbClr val="00D4AA"/>
+                </a:solidFill>
+              </a:defRPr>
+            </a:pPr>
+            <a:r>
+              <a:t>Morning</a:t>
+            </a:r>
           </a:p>
         </p:txBody>
       </p:sp>
@@ -48504,43 +50467,8 @@
         </p:nvSpPr>
         <p:spPr>
           <a:xfrm>
-            <a:off x="457200" y="1371600"/>
-            <a:ext cx="411480" cy="411480"/>
-          </a:xfrm>
-          <a:prstGeom prst="rect">
-            <a:avLst/>
-          </a:prstGeom>
-          <a:noFill/>
-        </p:spPr>
-        <p:txBody>
-          <a:bodyPr wrap="none" anchor="ctr">
-            <a:spAutoFit/>
-          </a:bodyPr>
-          <a:lstStyle/>
-          <a:p>
-            <a:pPr algn="ctr">
-              <a:defRPr sz="2000" b="1">
-                <a:solidFill>
-                  <a:srgbClr val="0B0F1A"/>
-                </a:solidFill>
-              </a:defRPr>
-            </a:pPr>
-            <a:r>
-              <a:t>v</a:t>
-            </a:r>
-          </a:p>
-        </p:txBody>
-      </p:sp>
-      <p:sp>
-        <p:nvSpPr>
-          <p:cNvPr id="6" name="TextBox 5"/>
-          <p:cNvSpPr txBox="1"/>
-          <p:nvPr/>
-        </p:nvSpPr>
-        <p:spPr>
-          <a:xfrm>
-            <a:off x="1005840" y="1417320"/>
-            <a:ext cx="10728655" cy="731520"/>
+            <a:off x="457200" y="2286000"/>
+            <a:ext cx="5364327" cy="3657600"/>
           </a:xfrm>
           <a:prstGeom prst="rect">
             <a:avLst/>
@@ -48554,107 +50482,96 @@
           <a:lstStyle/>
           <a:p>
             <a:pPr>
-              <a:defRPr sz="2200">
+              <a:spcAft>
+                <a:spcPts val="1200"/>
+              </a:spcAft>
+              <a:defRPr sz="1800">
                 <a:solidFill>
                   <a:srgbClr val="FFFFFF"/>
                 </a:solidFill>
               </a:defRPr>
             </a:pPr>
             <a:r>
-              <a:t>Be specific in prompts - GOLDEN framework helps</a:t>
-            </a:r>
-          </a:p>
-        </p:txBody>
-      </p:sp>
-      <p:sp>
-        <p:nvSpPr>
-          <p:cNvPr id="7" name="Oval 6"/>
-          <p:cNvSpPr/>
-          <p:nvPr/>
-        </p:nvSpPr>
-        <p:spPr>
-          <a:xfrm>
-            <a:off x="457200" y="2194560"/>
-            <a:ext cx="411480" cy="411480"/>
-          </a:xfrm>
-          <a:prstGeom prst="ellipse">
-            <a:avLst/>
-          </a:prstGeom>
-          <a:solidFill>
-            <a:srgbClr val="00D4AA"/>
-          </a:solidFill>
-          <a:ln>
-            <a:noFill/>
-          </a:ln>
-        </p:spPr>
-        <p:style>
-          <a:lnRef idx="1">
-            <a:schemeClr val="accent1"/>
-          </a:lnRef>
-          <a:fillRef idx="3">
-            <a:schemeClr val="accent1"/>
-          </a:fillRef>
-          <a:effectRef idx="2">
-            <a:schemeClr val="accent1"/>
-          </a:effectRef>
-          <a:fontRef idx="minor">
-            <a:schemeClr val="lt1"/>
-          </a:fontRef>
-        </p:style>
-        <p:txBody>
-          <a:bodyPr rtlCol="0" anchor="ctr"/>
-          <a:lstStyle/>
-          <a:p>
-            <a:pPr algn="ctr"/>
-            <a:endParaRPr/>
-          </a:p>
-        </p:txBody>
-      </p:sp>
-      <p:sp>
-        <p:nvSpPr>
-          <p:cNvPr id="8" name="TextBox 7"/>
-          <p:cNvSpPr txBox="1"/>
-          <p:nvPr/>
-        </p:nvSpPr>
-        <p:spPr>
-          <a:xfrm>
-            <a:off x="457200" y="2194560"/>
-            <a:ext cx="411480" cy="411480"/>
-          </a:xfrm>
-          <a:prstGeom prst="rect">
-            <a:avLst/>
-          </a:prstGeom>
-          <a:noFill/>
-        </p:spPr>
-        <p:txBody>
-          <a:bodyPr wrap="none" anchor="ctr">
+              <a:t>  Claude model family</a:t>
+            </a:r>
+          </a:p>
+          <a:p>
+            <a:pPr>
+              <a:spcAft>
+                <a:spcPts val="1200"/>
+              </a:spcAft>
+              <a:defRPr sz="1800">
+                <a:solidFill>
+                  <a:srgbClr val="FFFFFF"/>
+                </a:solidFill>
+              </a:defRPr>
+            </a:pPr>
+            <a:r>
+              <a:t>  Claude.ai interface and Projects</a:t>
+            </a:r>
+          </a:p>
+          <a:p>
+            <a:pPr>
+              <a:spcAft>
+                <a:spcPts val="1200"/>
+              </a:spcAft>
+              <a:defRPr sz="1800">
+                <a:solidFill>
+                  <a:srgbClr val="FFFFFF"/>
+                </a:solidFill>
+              </a:defRPr>
+            </a:pPr>
+            <a:r>
+              <a:t>  Prompt engineering (GOLDEN framework)</a:t>
+            </a:r>
+          </a:p>
+        </p:txBody>
+      </p:sp>
+      <p:sp>
+        <p:nvSpPr>
+          <p:cNvPr id="6" name="TextBox 5"/>
+          <p:cNvSpPr txBox="1"/>
+          <p:nvPr/>
+        </p:nvSpPr>
+        <p:spPr>
+          <a:xfrm>
+            <a:off x="6370167" y="1463040"/>
+            <a:ext cx="5364327" cy="731520"/>
+          </a:xfrm>
+          <a:prstGeom prst="rect">
+            <a:avLst/>
+          </a:prstGeom>
+          <a:noFill/>
+        </p:spPr>
+        <p:txBody>
+          <a:bodyPr wrap="none">
             <a:spAutoFit/>
           </a:bodyPr>
           <a:lstStyle/>
           <a:p>
             <a:pPr algn="ctr">
-              <a:defRPr sz="2000" b="1">
-                <a:solidFill>
-                  <a:srgbClr val="0B0F1A"/>
-                </a:solidFill>
-              </a:defRPr>
-            </a:pPr>
-            <a:r>
-              <a:t>v</a:t>
-            </a:r>
-          </a:p>
-        </p:txBody>
-      </p:sp>
-      <p:sp>
-        <p:nvSpPr>
-          <p:cNvPr id="9" name="TextBox 8"/>
-          <p:cNvSpPr txBox="1"/>
-          <p:nvPr/>
-        </p:nvSpPr>
-        <p:spPr>
-          <a:xfrm>
-            <a:off x="1005840" y="2240280"/>
-            <a:ext cx="10728655" cy="731520"/>
+              <a:defRPr sz="2800" b="1">
+                <a:solidFill>
+                  <a:srgbClr val="0078D4"/>
+                </a:solidFill>
+              </a:defRPr>
+            </a:pPr>
+            <a:r>
+              <a:t>Afternoon</a:t>
+            </a:r>
+          </a:p>
+        </p:txBody>
+      </p:sp>
+      <p:sp>
+        <p:nvSpPr>
+          <p:cNvPr id="7" name="TextBox 6"/>
+          <p:cNvSpPr txBox="1"/>
+          <p:nvPr/>
+        </p:nvSpPr>
+        <p:spPr>
+          <a:xfrm>
+            <a:off x="6370167" y="2286000"/>
+            <a:ext cx="5364327" cy="3657600"/>
           </a:xfrm>
           <a:prstGeom prst="rect">
             <a:avLst/>
@@ -48668,356 +50585,47 @@
           <a:lstStyle/>
           <a:p>
             <a:pPr>
-              <a:defRPr sz="2200">
+              <a:spcAft>
+                <a:spcPts val="1200"/>
+              </a:spcAft>
+              <a:defRPr sz="1800">
                 <a:solidFill>
                   <a:srgbClr val="FFFFFF"/>
                 </a:solidFill>
               </a:defRPr>
             </a:pPr>
             <a:r>
-              <a:t>Use Projects for recurring work</a:t>
-            </a:r>
-          </a:p>
-        </p:txBody>
-      </p:sp>
-      <p:sp>
-        <p:nvSpPr>
-          <p:cNvPr id="10" name="Oval 9"/>
-          <p:cNvSpPr/>
-          <p:nvPr/>
-        </p:nvSpPr>
-        <p:spPr>
-          <a:xfrm>
-            <a:off x="457200" y="3017520"/>
-            <a:ext cx="411480" cy="411480"/>
-          </a:xfrm>
-          <a:prstGeom prst="ellipse">
-            <a:avLst/>
-          </a:prstGeom>
-          <a:solidFill>
-            <a:srgbClr val="00D4AA"/>
-          </a:solidFill>
-          <a:ln>
-            <a:noFill/>
-          </a:ln>
-        </p:spPr>
-        <p:style>
-          <a:lnRef idx="1">
-            <a:schemeClr val="accent1"/>
-          </a:lnRef>
-          <a:fillRef idx="3">
-            <a:schemeClr val="accent1"/>
-          </a:fillRef>
-          <a:effectRef idx="2">
-            <a:schemeClr val="accent1"/>
-          </a:effectRef>
-          <a:fontRef idx="minor">
-            <a:schemeClr val="lt1"/>
-          </a:fontRef>
-        </p:style>
-        <p:txBody>
-          <a:bodyPr rtlCol="0" anchor="ctr"/>
-          <a:lstStyle/>
-          <a:p>
-            <a:pPr algn="ctr"/>
-            <a:endParaRPr/>
-          </a:p>
-        </p:txBody>
-      </p:sp>
-      <p:sp>
-        <p:nvSpPr>
-          <p:cNvPr id="11" name="TextBox 10"/>
-          <p:cNvSpPr txBox="1"/>
-          <p:nvPr/>
-        </p:nvSpPr>
-        <p:spPr>
-          <a:xfrm>
-            <a:off x="457200" y="3017520"/>
-            <a:ext cx="411480" cy="411480"/>
-          </a:xfrm>
-          <a:prstGeom prst="rect">
-            <a:avLst/>
-          </a:prstGeom>
-          <a:noFill/>
-        </p:spPr>
-        <p:txBody>
-          <a:bodyPr wrap="none" anchor="ctr">
-            <a:spAutoFit/>
-          </a:bodyPr>
-          <a:lstStyle/>
-          <a:p>
-            <a:pPr algn="ctr">
-              <a:defRPr sz="2000" b="1">
-                <a:solidFill>
-                  <a:srgbClr val="0B0F1A"/>
-                </a:solidFill>
-              </a:defRPr>
-            </a:pPr>
-            <a:r>
-              <a:t>v</a:t>
-            </a:r>
-          </a:p>
-        </p:txBody>
-      </p:sp>
-      <p:sp>
-        <p:nvSpPr>
-          <p:cNvPr id="12" name="TextBox 11"/>
-          <p:cNvSpPr txBox="1"/>
-          <p:nvPr/>
-        </p:nvSpPr>
-        <p:spPr>
-          <a:xfrm>
-            <a:off x="1005840" y="3063240"/>
-            <a:ext cx="10728655" cy="731520"/>
-          </a:xfrm>
-          <a:prstGeom prst="rect">
-            <a:avLst/>
-          </a:prstGeom>
-          <a:noFill/>
-        </p:spPr>
-        <p:txBody>
-          <a:bodyPr wrap="square">
-            <a:spAutoFit/>
-          </a:bodyPr>
-          <a:lstStyle/>
+              <a:t>  Claude in Excel</a:t>
+            </a:r>
+          </a:p>
           <a:p>
             <a:pPr>
-              <a:defRPr sz="2200">
+              <a:spcAft>
+                <a:spcPts val="1200"/>
+              </a:spcAft>
+              <a:defRPr sz="1800">
                 <a:solidFill>
                   <a:srgbClr val="FFFFFF"/>
                 </a:solidFill>
               </a:defRPr>
             </a:pPr>
             <a:r>
-              <a:t>Iterate, don't start over</a:t>
-            </a:r>
-          </a:p>
-        </p:txBody>
-      </p:sp>
-      <p:sp>
-        <p:nvSpPr>
-          <p:cNvPr id="13" name="Oval 12"/>
-          <p:cNvSpPr/>
-          <p:nvPr/>
-        </p:nvSpPr>
-        <p:spPr>
-          <a:xfrm>
-            <a:off x="457200" y="3840480"/>
-            <a:ext cx="411480" cy="411480"/>
-          </a:xfrm>
-          <a:prstGeom prst="ellipse">
-            <a:avLst/>
-          </a:prstGeom>
-          <a:solidFill>
-            <a:srgbClr val="00D4AA"/>
-          </a:solidFill>
-          <a:ln>
-            <a:noFill/>
-          </a:ln>
-        </p:spPr>
-        <p:style>
-          <a:lnRef idx="1">
-            <a:schemeClr val="accent1"/>
-          </a:lnRef>
-          <a:fillRef idx="3">
-            <a:schemeClr val="accent1"/>
-          </a:fillRef>
-          <a:effectRef idx="2">
-            <a:schemeClr val="accent1"/>
-          </a:effectRef>
-          <a:fontRef idx="minor">
-            <a:schemeClr val="lt1"/>
-          </a:fontRef>
-        </p:style>
-        <p:txBody>
-          <a:bodyPr rtlCol="0" anchor="ctr"/>
-          <a:lstStyle/>
-          <a:p>
-            <a:pPr algn="ctr"/>
-            <a:endParaRPr/>
-          </a:p>
-        </p:txBody>
-      </p:sp>
-      <p:sp>
-        <p:nvSpPr>
-          <p:cNvPr id="14" name="TextBox 13"/>
-          <p:cNvSpPr txBox="1"/>
-          <p:nvPr/>
-        </p:nvSpPr>
-        <p:spPr>
-          <a:xfrm>
-            <a:off x="457200" y="3840480"/>
-            <a:ext cx="411480" cy="411480"/>
-          </a:xfrm>
-          <a:prstGeom prst="rect">
-            <a:avLst/>
-          </a:prstGeom>
-          <a:noFill/>
-        </p:spPr>
-        <p:txBody>
-          <a:bodyPr wrap="none" anchor="ctr">
-            <a:spAutoFit/>
-          </a:bodyPr>
-          <a:lstStyle/>
-          <a:p>
-            <a:pPr algn="ctr">
-              <a:defRPr sz="2000" b="1">
-                <a:solidFill>
-                  <a:srgbClr val="0B0F1A"/>
-                </a:solidFill>
-              </a:defRPr>
-            </a:pPr>
-            <a:r>
-              <a:t>v</a:t>
-            </a:r>
-          </a:p>
-        </p:txBody>
-      </p:sp>
-      <p:sp>
-        <p:nvSpPr>
-          <p:cNvPr id="15" name="TextBox 14"/>
-          <p:cNvSpPr txBox="1"/>
-          <p:nvPr/>
-        </p:nvSpPr>
-        <p:spPr>
-          <a:xfrm>
-            <a:off x="1005840" y="3886200"/>
-            <a:ext cx="10728655" cy="731520"/>
-          </a:xfrm>
-          <a:prstGeom prst="rect">
-            <a:avLst/>
-          </a:prstGeom>
-          <a:noFill/>
-        </p:spPr>
-        <p:txBody>
-          <a:bodyPr wrap="square">
-            <a:spAutoFit/>
-          </a:bodyPr>
-          <a:lstStyle/>
+              <a:t>  Artifacts</a:t>
+            </a:r>
+          </a:p>
           <a:p>
             <a:pPr>
-              <a:defRPr sz="2200">
+              <a:spcAft>
+                <a:spcPts val="1200"/>
+              </a:spcAft>
+              <a:defRPr sz="1800">
                 <a:solidFill>
                   <a:srgbClr val="FFFFFF"/>
                 </a:solidFill>
               </a:defRPr>
             </a:pPr>
             <a:r>
-              <a:t>Claude in Excel = in-context help</a:t>
-            </a:r>
-          </a:p>
-        </p:txBody>
-      </p:sp>
-      <p:sp>
-        <p:nvSpPr>
-          <p:cNvPr id="16" name="Oval 15"/>
-          <p:cNvSpPr/>
-          <p:nvPr/>
-        </p:nvSpPr>
-        <p:spPr>
-          <a:xfrm>
-            <a:off x="457200" y="4663440"/>
-            <a:ext cx="411480" cy="411480"/>
-          </a:xfrm>
-          <a:prstGeom prst="ellipse">
-            <a:avLst/>
-          </a:prstGeom>
-          <a:solidFill>
-            <a:srgbClr val="00D4AA"/>
-          </a:solidFill>
-          <a:ln>
-            <a:noFill/>
-          </a:ln>
-        </p:spPr>
-        <p:style>
-          <a:lnRef idx="1">
-            <a:schemeClr val="accent1"/>
-          </a:lnRef>
-          <a:fillRef idx="3">
-            <a:schemeClr val="accent1"/>
-          </a:fillRef>
-          <a:effectRef idx="2">
-            <a:schemeClr val="accent1"/>
-          </a:effectRef>
-          <a:fontRef idx="minor">
-            <a:schemeClr val="lt1"/>
-          </a:fontRef>
-        </p:style>
-        <p:txBody>
-          <a:bodyPr rtlCol="0" anchor="ctr"/>
-          <a:lstStyle/>
-          <a:p>
-            <a:pPr algn="ctr"/>
-            <a:endParaRPr/>
-          </a:p>
-        </p:txBody>
-      </p:sp>
-      <p:sp>
-        <p:nvSpPr>
-          <p:cNvPr id="17" name="TextBox 16"/>
-          <p:cNvSpPr txBox="1"/>
-          <p:nvPr/>
-        </p:nvSpPr>
-        <p:spPr>
-          <a:xfrm>
-            <a:off x="457200" y="4663440"/>
-            <a:ext cx="411480" cy="411480"/>
-          </a:xfrm>
-          <a:prstGeom prst="rect">
-            <a:avLst/>
-          </a:prstGeom>
-          <a:noFill/>
-        </p:spPr>
-        <p:txBody>
-          <a:bodyPr wrap="none" anchor="ctr">
-            <a:spAutoFit/>
-          </a:bodyPr>
-          <a:lstStyle/>
-          <a:p>
-            <a:pPr algn="ctr">
-              <a:defRPr sz="2000" b="1">
-                <a:solidFill>
-                  <a:srgbClr val="0B0F1A"/>
-                </a:solidFill>
-              </a:defRPr>
-            </a:pPr>
-            <a:r>
-              <a:t>v</a:t>
-            </a:r>
-          </a:p>
-        </p:txBody>
-      </p:sp>
-      <p:sp>
-        <p:nvSpPr>
-          <p:cNvPr id="18" name="TextBox 17"/>
-          <p:cNvSpPr txBox="1"/>
-          <p:nvPr/>
-        </p:nvSpPr>
-        <p:spPr>
-          <a:xfrm>
-            <a:off x="1005840" y="4709160"/>
-            <a:ext cx="10728655" cy="731520"/>
-          </a:xfrm>
-          <a:prstGeom prst="rect">
-            <a:avLst/>
-          </a:prstGeom>
-          <a:noFill/>
-        </p:spPr>
-        <p:txBody>
-          <a:bodyPr wrap="square">
-            <a:spAutoFit/>
-          </a:bodyPr>
-          <a:lstStyle/>
-          <a:p>
-            <a:pPr>
-              <a:defRPr sz="2200">
-                <a:solidFill>
-                  <a:srgbClr val="FFFFFF"/>
-                </a:solidFill>
-              </a:defRPr>
-            </a:pPr>
-            <a:r>
-              <a:t>Verify AI outputs - Claude helps, you validate</a:t>
+              <a:t>  File handling</a:t>
             </a:r>
           </a:p>
         </p:txBody>
@@ -49057,49 +50665,14 @@
       </p:grpSpPr>
       <p:sp>
         <p:nvSpPr>
-          <p:cNvPr id="2" name="TextBox 1"/>
-          <p:cNvSpPr txBox="1"/>
-          <p:nvPr/>
-        </p:nvSpPr>
-        <p:spPr>
-          <a:xfrm>
-            <a:off x="457200" y="365760"/>
-            <a:ext cx="11277295" cy="822960"/>
-          </a:xfrm>
-          <a:prstGeom prst="rect">
-            <a:avLst/>
-          </a:prstGeom>
-          <a:noFill/>
-        </p:spPr>
-        <p:txBody>
-          <a:bodyPr wrap="none">
-            <a:spAutoFit/>
-          </a:bodyPr>
-          <a:lstStyle/>
-          <a:p>
-            <a:pPr>
-              <a:defRPr sz="4000" b="1">
-                <a:solidFill>
-                  <a:srgbClr val="FFFFFF"/>
-                </a:solidFill>
-              </a:defRPr>
-            </a:pPr>
-            <a:r>
-              <a:t>Resources</a:t>
-            </a:r>
-          </a:p>
-        </p:txBody>
-      </p:sp>
-      <p:sp>
-        <p:nvSpPr>
-          <p:cNvPr id="3" name="Rectangle 2"/>
+          <p:cNvPr id="2" name="Rectangle 1"/>
           <p:cNvSpPr/>
           <p:nvPr/>
         </p:nvSpPr>
         <p:spPr>
           <a:xfrm>
-            <a:off x="457200" y="1234440"/>
-            <a:ext cx="1828800" cy="36576"/>
+            <a:off x="0" y="1188720"/>
+            <a:ext cx="91440" cy="5029200"/>
           </a:xfrm>
           <a:prstGeom prst="rect">
             <a:avLst/>
@@ -49136,14 +50709,128 @@
       </p:sp>
       <p:sp>
         <p:nvSpPr>
-          <p:cNvPr id="4" name="TextBox 3"/>
-          <p:cNvSpPr txBox="1"/>
-          <p:nvPr/>
-        </p:nvSpPr>
-        <p:spPr>
-          <a:xfrm>
-            <a:off x="457200" y="1463040"/>
-            <a:ext cx="11277295" cy="4572000"/>
+          <p:cNvPr id="3" name="TextBox 2"/>
+          <p:cNvSpPr txBox="1"/>
+          <p:nvPr/>
+        </p:nvSpPr>
+        <p:spPr>
+          <a:xfrm>
+            <a:off x="457200" y="365760"/>
+            <a:ext cx="11277295" cy="822960"/>
+          </a:xfrm>
+          <a:prstGeom prst="rect">
+            <a:avLst/>
+          </a:prstGeom>
+          <a:noFill/>
+        </p:spPr>
+        <p:txBody>
+          <a:bodyPr wrap="none">
+            <a:spAutoFit/>
+          </a:bodyPr>
+          <a:lstStyle/>
+          <a:p>
+            <a:pPr>
+              <a:defRPr sz="4000" b="1">
+                <a:solidFill>
+                  <a:srgbClr val="FFFFFF"/>
+                </a:solidFill>
+              </a:defRPr>
+            </a:pPr>
+            <a:r>
+              <a:t>Key Takeaways</a:t>
+            </a:r>
+          </a:p>
+        </p:txBody>
+      </p:sp>
+      <p:sp>
+        <p:nvSpPr>
+          <p:cNvPr id="4" name="Oval 3"/>
+          <p:cNvSpPr/>
+          <p:nvPr/>
+        </p:nvSpPr>
+        <p:spPr>
+          <a:xfrm>
+            <a:off x="457200" y="1371600"/>
+            <a:ext cx="411480" cy="411480"/>
+          </a:xfrm>
+          <a:prstGeom prst="ellipse">
+            <a:avLst/>
+          </a:prstGeom>
+          <a:solidFill>
+            <a:srgbClr val="00D4AA"/>
+          </a:solidFill>
+          <a:ln>
+            <a:noFill/>
+          </a:ln>
+        </p:spPr>
+        <p:style>
+          <a:lnRef idx="1">
+            <a:schemeClr val="accent1"/>
+          </a:lnRef>
+          <a:fillRef idx="3">
+            <a:schemeClr val="accent1"/>
+          </a:fillRef>
+          <a:effectRef idx="2">
+            <a:schemeClr val="accent1"/>
+          </a:effectRef>
+          <a:fontRef idx="minor">
+            <a:schemeClr val="lt1"/>
+          </a:fontRef>
+        </p:style>
+        <p:txBody>
+          <a:bodyPr rtlCol="0" anchor="ctr"/>
+          <a:lstStyle/>
+          <a:p>
+            <a:pPr algn="ctr"/>
+            <a:endParaRPr/>
+          </a:p>
+        </p:txBody>
+      </p:sp>
+      <p:sp>
+        <p:nvSpPr>
+          <p:cNvPr id="5" name="TextBox 4"/>
+          <p:cNvSpPr txBox="1"/>
+          <p:nvPr/>
+        </p:nvSpPr>
+        <p:spPr>
+          <a:xfrm>
+            <a:off x="457200" y="1371600"/>
+            <a:ext cx="411480" cy="411480"/>
+          </a:xfrm>
+          <a:prstGeom prst="rect">
+            <a:avLst/>
+          </a:prstGeom>
+          <a:noFill/>
+        </p:spPr>
+        <p:txBody>
+          <a:bodyPr wrap="none" anchor="ctr">
+            <a:spAutoFit/>
+          </a:bodyPr>
+          <a:lstStyle/>
+          <a:p>
+            <a:pPr algn="ctr">
+              <a:defRPr sz="2000" b="1">
+                <a:solidFill>
+                  <a:srgbClr val="0B0F1A"/>
+                </a:solidFill>
+              </a:defRPr>
+            </a:pPr>
+            <a:r>
+              <a:t>v</a:t>
+            </a:r>
+          </a:p>
+        </p:txBody>
+      </p:sp>
+      <p:sp>
+        <p:nvSpPr>
+          <p:cNvPr id="6" name="TextBox 5"/>
+          <p:cNvSpPr txBox="1"/>
+          <p:nvPr/>
+        </p:nvSpPr>
+        <p:spPr>
+          <a:xfrm>
+            <a:off x="1005840" y="1417320"/>
+            <a:ext cx="10728655" cy="731520"/>
           </a:xfrm>
           <a:prstGeom prst="rect">
             <a:avLst/>
@@ -49157,12 +50844,6 @@
           <a:lstStyle/>
           <a:p>
             <a:pPr>
-              <a:spcBef>
-                <a:spcPts val="800"/>
-              </a:spcBef>
-              <a:spcAft>
-                <a:spcPts val="800"/>
-              </a:spcAft>
               <a:defRPr sz="2200">
                 <a:solidFill>
                   <a:srgbClr val="FFFFFF"/>
@@ -49170,17 +50851,113 @@
               </a:defRPr>
             </a:pPr>
             <a:r>
-              <a:t>  Official Docs: docs.claude.com</a:t>
-            </a:r>
-          </a:p>
+              <a:t>Be specific in prompts - GOLDEN framework helps</a:t>
+            </a:r>
+          </a:p>
+        </p:txBody>
+      </p:sp>
+      <p:sp>
+        <p:nvSpPr>
+          <p:cNvPr id="7" name="Oval 6"/>
+          <p:cNvSpPr/>
+          <p:nvPr/>
+        </p:nvSpPr>
+        <p:spPr>
+          <a:xfrm>
+            <a:off x="457200" y="2194560"/>
+            <a:ext cx="411480" cy="411480"/>
+          </a:xfrm>
+          <a:prstGeom prst="ellipse">
+            <a:avLst/>
+          </a:prstGeom>
+          <a:solidFill>
+            <a:srgbClr val="00D4AA"/>
+          </a:solidFill>
+          <a:ln>
+            <a:noFill/>
+          </a:ln>
+        </p:spPr>
+        <p:style>
+          <a:lnRef idx="1">
+            <a:schemeClr val="accent1"/>
+          </a:lnRef>
+          <a:fillRef idx="3">
+            <a:schemeClr val="accent1"/>
+          </a:fillRef>
+          <a:effectRef idx="2">
+            <a:schemeClr val="accent1"/>
+          </a:effectRef>
+          <a:fontRef idx="minor">
+            <a:schemeClr val="lt1"/>
+          </a:fontRef>
+        </p:style>
+        <p:txBody>
+          <a:bodyPr rtlCol="0" anchor="ctr"/>
+          <a:lstStyle/>
+          <a:p>
+            <a:pPr algn="ctr"/>
+            <a:endParaRPr/>
+          </a:p>
+        </p:txBody>
+      </p:sp>
+      <p:sp>
+        <p:nvSpPr>
+          <p:cNvPr id="8" name="TextBox 7"/>
+          <p:cNvSpPr txBox="1"/>
+          <p:nvPr/>
+        </p:nvSpPr>
+        <p:spPr>
+          <a:xfrm>
+            <a:off x="457200" y="2194560"/>
+            <a:ext cx="411480" cy="411480"/>
+          </a:xfrm>
+          <a:prstGeom prst="rect">
+            <a:avLst/>
+          </a:prstGeom>
+          <a:noFill/>
+        </p:spPr>
+        <p:txBody>
+          <a:bodyPr wrap="none" anchor="ctr">
+            <a:spAutoFit/>
+          </a:bodyPr>
+          <a:lstStyle/>
+          <a:p>
+            <a:pPr algn="ctr">
+              <a:defRPr sz="2000" b="1">
+                <a:solidFill>
+                  <a:srgbClr val="0B0F1A"/>
+                </a:solidFill>
+              </a:defRPr>
+            </a:pPr>
+            <a:r>
+              <a:t>v</a:t>
+            </a:r>
+          </a:p>
+        </p:txBody>
+      </p:sp>
+      <p:sp>
+        <p:nvSpPr>
+          <p:cNvPr id="9" name="TextBox 8"/>
+          <p:cNvSpPr txBox="1"/>
+          <p:nvPr/>
+        </p:nvSpPr>
+        <p:spPr>
+          <a:xfrm>
+            <a:off x="1005840" y="2240280"/>
+            <a:ext cx="10728655" cy="731520"/>
+          </a:xfrm>
+          <a:prstGeom prst="rect">
+            <a:avLst/>
+          </a:prstGeom>
+          <a:noFill/>
+        </p:spPr>
+        <p:txBody>
+          <a:bodyPr wrap="square">
+            <a:spAutoFit/>
+          </a:bodyPr>
+          <a:lstStyle/>
           <a:p>
             <a:pPr>
-              <a:spcBef>
-                <a:spcPts val="800"/>
-              </a:spcBef>
-              <a:spcAft>
-                <a:spcPts val="800"/>
-              </a:spcAft>
               <a:defRPr sz="2200">
                 <a:solidFill>
                   <a:srgbClr val="FFFFFF"/>
@@ -49188,17 +50965,113 @@
               </a:defRPr>
             </a:pPr>
             <a:r>
-              <a:t>  Support: support.claude.com</a:t>
-            </a:r>
-          </a:p>
+              <a:t>Use Projects for recurring work</a:t>
+            </a:r>
+          </a:p>
+        </p:txBody>
+      </p:sp>
+      <p:sp>
+        <p:nvSpPr>
+          <p:cNvPr id="10" name="Oval 9"/>
+          <p:cNvSpPr/>
+          <p:nvPr/>
+        </p:nvSpPr>
+        <p:spPr>
+          <a:xfrm>
+            <a:off x="457200" y="3017520"/>
+            <a:ext cx="411480" cy="411480"/>
+          </a:xfrm>
+          <a:prstGeom prst="ellipse">
+            <a:avLst/>
+          </a:prstGeom>
+          <a:solidFill>
+            <a:srgbClr val="00D4AA"/>
+          </a:solidFill>
+          <a:ln>
+            <a:noFill/>
+          </a:ln>
+        </p:spPr>
+        <p:style>
+          <a:lnRef idx="1">
+            <a:schemeClr val="accent1"/>
+          </a:lnRef>
+          <a:fillRef idx="3">
+            <a:schemeClr val="accent1"/>
+          </a:fillRef>
+          <a:effectRef idx="2">
+            <a:schemeClr val="accent1"/>
+          </a:effectRef>
+          <a:fontRef idx="minor">
+            <a:schemeClr val="lt1"/>
+          </a:fontRef>
+        </p:style>
+        <p:txBody>
+          <a:bodyPr rtlCol="0" anchor="ctr"/>
+          <a:lstStyle/>
+          <a:p>
+            <a:pPr algn="ctr"/>
+            <a:endParaRPr/>
+          </a:p>
+        </p:txBody>
+      </p:sp>
+      <p:sp>
+        <p:nvSpPr>
+          <p:cNvPr id="11" name="TextBox 10"/>
+          <p:cNvSpPr txBox="1"/>
+          <p:nvPr/>
+        </p:nvSpPr>
+        <p:spPr>
+          <a:xfrm>
+            <a:off x="457200" y="3017520"/>
+            <a:ext cx="411480" cy="411480"/>
+          </a:xfrm>
+          <a:prstGeom prst="rect">
+            <a:avLst/>
+          </a:prstGeom>
+          <a:noFill/>
+        </p:spPr>
+        <p:txBody>
+          <a:bodyPr wrap="none" anchor="ctr">
+            <a:spAutoFit/>
+          </a:bodyPr>
+          <a:lstStyle/>
+          <a:p>
+            <a:pPr algn="ctr">
+              <a:defRPr sz="2000" b="1">
+                <a:solidFill>
+                  <a:srgbClr val="0B0F1A"/>
+                </a:solidFill>
+              </a:defRPr>
+            </a:pPr>
+            <a:r>
+              <a:t>v</a:t>
+            </a:r>
+          </a:p>
+        </p:txBody>
+      </p:sp>
+      <p:sp>
+        <p:nvSpPr>
+          <p:cNvPr id="12" name="TextBox 11"/>
+          <p:cNvSpPr txBox="1"/>
+          <p:nvPr/>
+        </p:nvSpPr>
+        <p:spPr>
+          <a:xfrm>
+            <a:off x="1005840" y="3063240"/>
+            <a:ext cx="10728655" cy="731520"/>
+          </a:xfrm>
+          <a:prstGeom prst="rect">
+            <a:avLst/>
+          </a:prstGeom>
+          <a:noFill/>
+        </p:spPr>
+        <p:txBody>
+          <a:bodyPr wrap="square">
+            <a:spAutoFit/>
+          </a:bodyPr>
+          <a:lstStyle/>
           <a:p>
             <a:pPr>
-              <a:spcBef>
-                <a:spcPts val="800"/>
-              </a:spcBef>
-              <a:spcAft>
-                <a:spcPts val="800"/>
-              </a:spcAft>
               <a:defRPr sz="2200">
                 <a:solidFill>
                   <a:srgbClr val="FFFFFF"/>
@@ -49206,17 +51079,113 @@
               </a:defRPr>
             </a:pPr>
             <a:r>
-              <a:t>  Anthropic Blog: anthropic.com/news</a:t>
-            </a:r>
-          </a:p>
+              <a:t>Iterate, don't start over</a:t>
+            </a:r>
+          </a:p>
+        </p:txBody>
+      </p:sp>
+      <p:sp>
+        <p:nvSpPr>
+          <p:cNvPr id="13" name="Oval 12"/>
+          <p:cNvSpPr/>
+          <p:nvPr/>
+        </p:nvSpPr>
+        <p:spPr>
+          <a:xfrm>
+            <a:off x="457200" y="3840480"/>
+            <a:ext cx="411480" cy="411480"/>
+          </a:xfrm>
+          <a:prstGeom prst="ellipse">
+            <a:avLst/>
+          </a:prstGeom>
+          <a:solidFill>
+            <a:srgbClr val="00D4AA"/>
+          </a:solidFill>
+          <a:ln>
+            <a:noFill/>
+          </a:ln>
+        </p:spPr>
+        <p:style>
+          <a:lnRef idx="1">
+            <a:schemeClr val="accent1"/>
+          </a:lnRef>
+          <a:fillRef idx="3">
+            <a:schemeClr val="accent1"/>
+          </a:fillRef>
+          <a:effectRef idx="2">
+            <a:schemeClr val="accent1"/>
+          </a:effectRef>
+          <a:fontRef idx="minor">
+            <a:schemeClr val="lt1"/>
+          </a:fontRef>
+        </p:style>
+        <p:txBody>
+          <a:bodyPr rtlCol="0" anchor="ctr"/>
+          <a:lstStyle/>
+          <a:p>
+            <a:pPr algn="ctr"/>
+            <a:endParaRPr/>
+          </a:p>
+        </p:txBody>
+      </p:sp>
+      <p:sp>
+        <p:nvSpPr>
+          <p:cNvPr id="14" name="TextBox 13"/>
+          <p:cNvSpPr txBox="1"/>
+          <p:nvPr/>
+        </p:nvSpPr>
+        <p:spPr>
+          <a:xfrm>
+            <a:off x="457200" y="3840480"/>
+            <a:ext cx="411480" cy="411480"/>
+          </a:xfrm>
+          <a:prstGeom prst="rect">
+            <a:avLst/>
+          </a:prstGeom>
+          <a:noFill/>
+        </p:spPr>
+        <p:txBody>
+          <a:bodyPr wrap="none" anchor="ctr">
+            <a:spAutoFit/>
+          </a:bodyPr>
+          <a:lstStyle/>
+          <a:p>
+            <a:pPr algn="ctr">
+              <a:defRPr sz="2000" b="1">
+                <a:solidFill>
+                  <a:srgbClr val="0B0F1A"/>
+                </a:solidFill>
+              </a:defRPr>
+            </a:pPr>
+            <a:r>
+              <a:t>v</a:t>
+            </a:r>
+          </a:p>
+        </p:txBody>
+      </p:sp>
+      <p:sp>
+        <p:nvSpPr>
+          <p:cNvPr id="15" name="TextBox 14"/>
+          <p:cNvSpPr txBox="1"/>
+          <p:nvPr/>
+        </p:nvSpPr>
+        <p:spPr>
+          <a:xfrm>
+            <a:off x="1005840" y="3886200"/>
+            <a:ext cx="10728655" cy="731520"/>
+          </a:xfrm>
+          <a:prstGeom prst="rect">
+            <a:avLst/>
+          </a:prstGeom>
+          <a:noFill/>
+        </p:spPr>
+        <p:txBody>
+          <a:bodyPr wrap="square">
+            <a:spAutoFit/>
+          </a:bodyPr>
+          <a:lstStyle/>
           <a:p>
             <a:pPr>
-              <a:spcBef>
-                <a:spcPts val="800"/>
-              </a:spcBef>
-              <a:spcAft>
-                <a:spcPts val="800"/>
-              </a:spcAft>
               <a:defRPr sz="2200">
                 <a:solidFill>
                   <a:srgbClr val="FFFFFF"/>
@@ -49224,17 +51193,113 @@
               </a:defRPr>
             </a:pPr>
             <a:r>
-              <a:t>  Trust Center: anthropic.com/trust</a:t>
-            </a:r>
-          </a:p>
+              <a:t>Claude in Excel = in-context help</a:t>
+            </a:r>
+          </a:p>
+        </p:txBody>
+      </p:sp>
+      <p:sp>
+        <p:nvSpPr>
+          <p:cNvPr id="16" name="Oval 15"/>
+          <p:cNvSpPr/>
+          <p:nvPr/>
+        </p:nvSpPr>
+        <p:spPr>
+          <a:xfrm>
+            <a:off x="457200" y="4663440"/>
+            <a:ext cx="411480" cy="411480"/>
+          </a:xfrm>
+          <a:prstGeom prst="ellipse">
+            <a:avLst/>
+          </a:prstGeom>
+          <a:solidFill>
+            <a:srgbClr val="00D4AA"/>
+          </a:solidFill>
+          <a:ln>
+            <a:noFill/>
+          </a:ln>
+        </p:spPr>
+        <p:style>
+          <a:lnRef idx="1">
+            <a:schemeClr val="accent1"/>
+          </a:lnRef>
+          <a:fillRef idx="3">
+            <a:schemeClr val="accent1"/>
+          </a:fillRef>
+          <a:effectRef idx="2">
+            <a:schemeClr val="accent1"/>
+          </a:effectRef>
+          <a:fontRef idx="minor">
+            <a:schemeClr val="lt1"/>
+          </a:fontRef>
+        </p:style>
+        <p:txBody>
+          <a:bodyPr rtlCol="0" anchor="ctr"/>
+          <a:lstStyle/>
+          <a:p>
+            <a:pPr algn="ctr"/>
+            <a:endParaRPr/>
+          </a:p>
+        </p:txBody>
+      </p:sp>
+      <p:sp>
+        <p:nvSpPr>
+          <p:cNvPr id="17" name="TextBox 16"/>
+          <p:cNvSpPr txBox="1"/>
+          <p:nvPr/>
+        </p:nvSpPr>
+        <p:spPr>
+          <a:xfrm>
+            <a:off x="457200" y="4663440"/>
+            <a:ext cx="411480" cy="411480"/>
+          </a:xfrm>
+          <a:prstGeom prst="rect">
+            <a:avLst/>
+          </a:prstGeom>
+          <a:noFill/>
+        </p:spPr>
+        <p:txBody>
+          <a:bodyPr wrap="none" anchor="ctr">
+            <a:spAutoFit/>
+          </a:bodyPr>
+          <a:lstStyle/>
+          <a:p>
+            <a:pPr algn="ctr">
+              <a:defRPr sz="2000" b="1">
+                <a:solidFill>
+                  <a:srgbClr val="0B0F1A"/>
+                </a:solidFill>
+              </a:defRPr>
+            </a:pPr>
+            <a:r>
+              <a:t>v</a:t>
+            </a:r>
+          </a:p>
+        </p:txBody>
+      </p:sp>
+      <p:sp>
+        <p:nvSpPr>
+          <p:cNvPr id="18" name="TextBox 17"/>
+          <p:cNvSpPr txBox="1"/>
+          <p:nvPr/>
+        </p:nvSpPr>
+        <p:spPr>
+          <a:xfrm>
+            <a:off x="1005840" y="4709160"/>
+            <a:ext cx="10728655" cy="731520"/>
+          </a:xfrm>
+          <a:prstGeom prst="rect">
+            <a:avLst/>
+          </a:prstGeom>
+          <a:noFill/>
+        </p:spPr>
+        <p:txBody>
+          <a:bodyPr wrap="square">
+            <a:spAutoFit/>
+          </a:bodyPr>
+          <a:lstStyle/>
           <a:p>
             <a:pPr>
-              <a:spcBef>
-                <a:spcPts val="800"/>
-              </a:spcBef>
-              <a:spcAft>
-                <a:spcPts val="800"/>
-              </a:spcAft>
               <a:defRPr sz="2200">
                 <a:solidFill>
                   <a:srgbClr val="FFFFFF"/>
@@ -49242,7 +51307,7 @@
               </a:defRPr>
             </a:pPr>
             <a:r>
-              <a:t>  Handouts: Claude Code Quick Reference, Prompt Engineering Cheatsheet</a:t>
+              <a:t>Verify AI outputs - Claude helps, you validate</a:t>
             </a:r>
           </a:p>
         </p:txBody>
@@ -49310,7 +51375,7 @@
               </a:defRPr>
             </a:pPr>
             <a:r>
-              <a:t>Practice Assignment (Optional)</a:t>
+              <a:t>Resources</a:t>
             </a:r>
           </a:p>
         </p:txBody>
@@ -49395,7 +51460,7 @@
               </a:defRPr>
             </a:pPr>
             <a:r>
-              <a:t>  Try 3 tasks with Claude this week:</a:t>
+              <a:t>  Official Docs: docs.claude.com</a:t>
             </a:r>
           </a:p>
           <a:p>
@@ -49413,7 +51478,7 @@
               </a:defRPr>
             </a:pPr>
             <a:r>
-              <a:t>  1. Something you do monthly (turn into a Project)</a:t>
+              <a:t>  Support: support.claude.com</a:t>
             </a:r>
           </a:p>
           <a:p>
@@ -49431,7 +51496,7 @@
               </a:defRPr>
             </a:pPr>
             <a:r>
-              <a:t>  2. A complex prompt (use GOLDEN framework)</a:t>
+              <a:t>  Anthropic Blog: anthropic.com/news</a:t>
             </a:r>
           </a:p>
           <a:p>
@@ -49449,7 +51514,7 @@
               </a:defRPr>
             </a:pPr>
             <a:r>
-              <a:t>  3. Excel formula help or data analysis</a:t>
+              <a:t>  Trust Center: anthropic.com/trust</a:t>
             </a:r>
           </a:p>
           <a:p>
@@ -49467,7 +51532,7 @@
               </a:defRPr>
             </a:pPr>
             <a:r>
-              <a:t>  Track results: What worked? Time saved?</a:t>
+              <a:t>  Handouts: Claude Code Quick Reference, Prompt Engineering Cheatsheet</a:t>
             </a:r>
           </a:p>
         </p:txBody>
@@ -49535,7 +51600,7 @@
               </a:defRPr>
             </a:pPr>
             <a:r>
-              <a:t>Questions?</a:t>
+              <a:t>Practice Assignment (Optional)</a:t>
             </a:r>
           </a:p>
         </p:txBody>
@@ -49620,7 +51685,7 @@
               </a:defRPr>
             </a:pPr>
             <a:r>
-              <a:t>  Licensing and access</a:t>
+              <a:t>  Try 3 tasks with Claude this week:</a:t>
             </a:r>
           </a:p>
           <a:p>
@@ -49638,7 +51703,7 @@
               </a:defRPr>
             </a:pPr>
             <a:r>
-              <a:t>  Security and data privacy</a:t>
+              <a:t>  1. Something you do monthly (turn into a Project)</a:t>
             </a:r>
           </a:p>
           <a:p>
@@ -49656,7 +51721,7 @@
               </a:defRPr>
             </a:pPr>
             <a:r>
-              <a:t>  When to use which tool</a:t>
+              <a:t>  2. A complex prompt (use GOLDEN framework)</a:t>
             </a:r>
           </a:p>
           <a:p>
@@ -49674,7 +51739,7 @@
               </a:defRPr>
             </a:pPr>
             <a:r>
-              <a:t>  Advanced prompting techniques</a:t>
+              <a:t>  3. Excel formula help or data analysis</a:t>
             </a:r>
           </a:p>
           <a:p>
@@ -49692,7 +51757,7 @@
               </a:defRPr>
             </a:pPr>
             <a:r>
-              <a:t>  Real-world use cases</a:t>
+              <a:t>  Track results: What worked? Time saved?</a:t>
             </a:r>
           </a:p>
         </p:txBody>
@@ -49706,7 +51771,7 @@
 </file>
 
 <file path=ppt/slides/slide88.xml><?xml version="1.0" encoding="utf-8"?>
-<p:sld xmlns:a="http://schemas.openxmlformats.org/drawingml/2006/main" xmlns:p="http://schemas.openxmlformats.org/presentationml/2006/main" xmlns:r="http://schemas.openxmlformats.org/officeDocument/2006/relationships">
+<p:sld xmlns:a="http://schemas.openxmlformats.org/drawingml/2006/main" xmlns:r="http://schemas.openxmlformats.org/officeDocument/2006/relationships" xmlns:p="http://schemas.openxmlformats.org/presentationml/2006/main">
   <p:cSld>
     <p:bg>
       <p:bgPr>
@@ -49722,7 +51787,14 @@
         <p:cNvGrpSpPr/>
         <p:nvPr/>
       </p:nvGrpSpPr>
-      <p:grpSpPr/>
+      <p:grpSpPr>
+        <a:xfrm>
+          <a:off x="0" y="0"/>
+          <a:ext cx="0" cy="0"/>
+          <a:chOff x="0" y="0"/>
+          <a:chExt cx="0" cy="0"/>
+        </a:xfrm>
+      </p:grpSpPr>
       <p:sp>
         <p:nvSpPr>
           <p:cNvPr id="2" name="TextBox 1"/>
@@ -49731,8 +51803,8 @@
         </p:nvSpPr>
         <p:spPr>
           <a:xfrm>
-            <a:off x="457200" y="274320"/>
-            <a:ext cx="11247120" cy="822960"/>
+            <a:off x="457200" y="365760"/>
+            <a:ext cx="11277295" cy="822960"/>
           </a:xfrm>
           <a:prstGeom prst="rect">
             <a:avLst/>
@@ -49753,67 +51825,30 @@
               </a:defRPr>
             </a:pPr>
             <a:r>
-              <a:t>Claude's Memory</a:t>
-            </a:r>
-          </a:p>
-        </p:txBody>
-      </p:sp>
-      <p:sp>
-        <p:nvSpPr>
-          <p:cNvPr id="3" name="TextBox 2"/>
-          <p:cNvSpPr txBox="1"/>
-          <p:nvPr/>
-        </p:nvSpPr>
-        <p:spPr>
-          <a:xfrm>
-            <a:off x="457200" y="1005840"/>
-            <a:ext cx="11247120" cy="457200"/>
-          </a:xfrm>
-          <a:prstGeom prst="rect">
-            <a:avLst/>
-          </a:prstGeom>
-          <a:noFill/>
-        </p:spPr>
-        <p:txBody>
-          <a:bodyPr wrap="none">
-            <a:spAutoFit/>
-          </a:bodyPr>
-          <a:lstStyle/>
-          <a:p>
-            <a:pPr>
-              <a:defRPr sz="1800" i="1">
-                <a:solidFill>
-                  <a:srgbClr val="9CA3AF"/>
-                </a:solidFill>
-              </a:defRPr>
-            </a:pPr>
-            <a:r>
-              <a:t>Claude remembers context across conversations — so you don't have to repeat yourself</a:t>
-            </a:r>
-          </a:p>
-        </p:txBody>
-      </p:sp>
-      <p:sp>
-        <p:nvSpPr>
-          <p:cNvPr id="4" name="Rounded Rectangle 3"/>
+              <a:t>Questions?</a:t>
+            </a:r>
+          </a:p>
+        </p:txBody>
+      </p:sp>
+      <p:sp>
+        <p:nvSpPr>
+          <p:cNvPr id="3" name="Rectangle 2"/>
           <p:cNvSpPr/>
           <p:nvPr/>
         </p:nvSpPr>
         <p:spPr>
           <a:xfrm>
-            <a:off x="457200" y="1737360"/>
-            <a:ext cx="3474720" cy="3474720"/>
-          </a:xfrm>
-          <a:prstGeom prst="roundRect">
+            <a:off x="457200" y="1234440"/>
+            <a:ext cx="1828800" cy="36576"/>
+          </a:xfrm>
+          <a:prstGeom prst="rect">
             <a:avLst/>
           </a:prstGeom>
           <a:solidFill>
-            <a:srgbClr val="141A2A"/>
+            <a:srgbClr val="00D4AA"/>
           </a:solidFill>
-          <a:ln w="19050">
-            <a:solidFill>
-              <a:srgbClr val="14B8A6"/>
-            </a:solidFill>
+          <a:ln>
+            <a:noFill/>
           </a:ln>
         </p:spPr>
         <p:style>
@@ -49835,50 +51870,20 @@
           <a:lstStyle/>
           <a:p>
             <a:pPr algn="ctr"/>
-          </a:p>
-        </p:txBody>
-      </p:sp>
-      <p:sp>
-        <p:nvSpPr>
-          <p:cNvPr id="5" name="TextBox 4"/>
-          <p:cNvSpPr txBox="1"/>
-          <p:nvPr/>
-        </p:nvSpPr>
-        <p:spPr>
-          <a:xfrm>
-            <a:off x="640080" y="1920240"/>
-            <a:ext cx="3108960" cy="457200"/>
-          </a:xfrm>
-          <a:prstGeom prst="rect">
-            <a:avLst/>
-          </a:prstGeom>
-          <a:noFill/>
-        </p:spPr>
-        <p:txBody>
-          <a:bodyPr wrap="none">
-            <a:spAutoFit/>
-          </a:bodyPr>
-          <a:lstStyle/>
-          <a:p>
-            <a:pPr algn="ctr">
-              <a:defRPr sz="3000"/>
-            </a:pPr>
-            <a:r>
-              <a:t>🔍</a:t>
-            </a:r>
-          </a:p>
-        </p:txBody>
-      </p:sp>
-      <p:sp>
-        <p:nvSpPr>
-          <p:cNvPr id="6" name="TextBox 5"/>
-          <p:cNvSpPr txBox="1"/>
-          <p:nvPr/>
-        </p:nvSpPr>
-        <p:spPr>
-          <a:xfrm>
-            <a:off x="640080" y="2377440"/>
-            <a:ext cx="3108960" cy="640080"/>
+            <a:endParaRPr/>
+          </a:p>
+        </p:txBody>
+      </p:sp>
+      <p:sp>
+        <p:nvSpPr>
+          <p:cNvPr id="4" name="TextBox 3"/>
+          <p:cNvSpPr txBox="1"/>
+          <p:nvPr/>
+        </p:nvSpPr>
+        <p:spPr>
+          <a:xfrm>
+            <a:off x="457200" y="1463040"/>
+            <a:ext cx="11277295" cy="4572000"/>
           </a:xfrm>
           <a:prstGeom prst="rect">
             <a:avLst/>
@@ -49891,437 +51896,93 @@
           </a:bodyPr>
           <a:lstStyle/>
           <a:p>
-            <a:pPr algn="ctr">
-              <a:defRPr sz="1800" b="1">
+            <a:pPr>
+              <a:spcBef>
+                <a:spcPts val="800"/>
+              </a:spcBef>
+              <a:spcAft>
+                <a:spcPts val="800"/>
+              </a:spcAft>
+              <a:defRPr sz="2200">
                 <a:solidFill>
                   <a:srgbClr val="FFFFFF"/>
                 </a:solidFill>
               </a:defRPr>
             </a:pPr>
             <a:r>
-              <a:t>Search &amp; Reference</a:t>
-            </a:r>
-            <a:br/>
-            <a:r>
-              <a:t>Past Chats</a:t>
-            </a:r>
-          </a:p>
-        </p:txBody>
-      </p:sp>
-      <p:sp>
-        <p:nvSpPr>
-          <p:cNvPr id="7" name="TextBox 6"/>
-          <p:cNvSpPr txBox="1"/>
-          <p:nvPr/>
-        </p:nvSpPr>
-        <p:spPr>
-          <a:xfrm>
-            <a:off x="640080" y="3108960"/>
-            <a:ext cx="3108960" cy="1828800"/>
-          </a:xfrm>
-          <a:prstGeom prst="rect">
-            <a:avLst/>
-          </a:prstGeom>
-          <a:noFill/>
-        </p:spPr>
-        <p:txBody>
-          <a:bodyPr wrap="square">
-            <a:spAutoFit/>
-          </a:bodyPr>
-          <a:lstStyle/>
-          <a:p>
-            <a:pPr algn="ctr">
-              <a:defRPr sz="1400">
-                <a:solidFill>
-                  <a:srgbClr val="D1D5DB"/>
-                </a:solidFill>
-              </a:defRPr>
-            </a:pPr>
-            <a:r>
-              <a:t>Claude searches your</a:t>
-            </a:r>
-            <a:br/>
-            <a:r>
-              <a:t>previous conversations</a:t>
-            </a:r>
-            <a:br/>
-            <a:r>
-              <a:t>for relevant context.</a:t>
-            </a:r>
-            <a:br/>
-            <a:r>
-              <a:t>Finds details you forgot.</a:t>
-            </a:r>
-            <a:br/>
-            <a:r>
-              <a:t>Works across all chats.</a:t>
-            </a:r>
-          </a:p>
-        </p:txBody>
-      </p:sp>
-      <p:sp>
-        <p:nvSpPr>
-          <p:cNvPr id="8" name="Rounded Rectangle 7"/>
-          <p:cNvSpPr/>
-          <p:nvPr/>
-        </p:nvSpPr>
-        <p:spPr>
-          <a:xfrm>
-            <a:off x="4206240" y="1737360"/>
-            <a:ext cx="3474720" cy="3474720"/>
-          </a:xfrm>
-          <a:prstGeom prst="roundRect">
-            <a:avLst/>
-          </a:prstGeom>
-          <a:solidFill>
-            <a:srgbClr val="141A2A"/>
-          </a:solidFill>
-          <a:ln w="19050">
-            <a:solidFill>
-              <a:srgbClr val="14B8A6"/>
-            </a:solidFill>
-          </a:ln>
-        </p:spPr>
-        <p:style>
-          <a:lnRef idx="1">
-            <a:schemeClr val="accent1"/>
-          </a:lnRef>
-          <a:fillRef idx="3">
-            <a:schemeClr val="accent1"/>
-          </a:fillRef>
-          <a:effectRef idx="2">
-            <a:schemeClr val="accent1"/>
-          </a:effectRef>
-          <a:fontRef idx="minor">
-            <a:schemeClr val="lt1"/>
-          </a:fontRef>
-        </p:style>
-        <p:txBody>
-          <a:bodyPr rtlCol="0" anchor="ctr"/>
-          <a:lstStyle/>
-          <a:p>
-            <a:pPr algn="ctr"/>
-          </a:p>
-        </p:txBody>
-      </p:sp>
-      <p:sp>
-        <p:nvSpPr>
-          <p:cNvPr id="9" name="TextBox 8"/>
-          <p:cNvSpPr txBox="1"/>
-          <p:nvPr/>
-        </p:nvSpPr>
-        <p:spPr>
-          <a:xfrm>
-            <a:off x="4389120" y="1920240"/>
-            <a:ext cx="3108960" cy="457200"/>
-          </a:xfrm>
-          <a:prstGeom prst="rect">
-            <a:avLst/>
-          </a:prstGeom>
-          <a:noFill/>
-        </p:spPr>
-        <p:txBody>
-          <a:bodyPr wrap="none">
-            <a:spAutoFit/>
-          </a:bodyPr>
-          <a:lstStyle/>
-          <a:p>
-            <a:pPr algn="ctr">
-              <a:defRPr sz="3000"/>
-            </a:pPr>
-            <a:r>
-              <a:t>🧠</a:t>
-            </a:r>
-          </a:p>
-        </p:txBody>
-      </p:sp>
-      <p:sp>
-        <p:nvSpPr>
-          <p:cNvPr id="10" name="TextBox 9"/>
-          <p:cNvSpPr txBox="1"/>
-          <p:nvPr/>
-        </p:nvSpPr>
-        <p:spPr>
-          <a:xfrm>
-            <a:off x="4389120" y="2377440"/>
-            <a:ext cx="3108960" cy="640080"/>
-          </a:xfrm>
-          <a:prstGeom prst="rect">
-            <a:avLst/>
-          </a:prstGeom>
-          <a:noFill/>
-        </p:spPr>
-        <p:txBody>
-          <a:bodyPr wrap="square">
-            <a:spAutoFit/>
-          </a:bodyPr>
-          <a:lstStyle/>
-          <a:p>
-            <a:pPr algn="ctr">
-              <a:defRPr sz="1800" b="1">
+              <a:t>  Licensing and access</a:t>
+            </a:r>
+          </a:p>
+          <a:p>
+            <a:pPr>
+              <a:spcBef>
+                <a:spcPts val="800"/>
+              </a:spcBef>
+              <a:spcAft>
+                <a:spcPts val="800"/>
+              </a:spcAft>
+              <a:defRPr sz="2200">
                 <a:solidFill>
                   <a:srgbClr val="FFFFFF"/>
                 </a:solidFill>
               </a:defRPr>
             </a:pPr>
             <a:r>
-              <a:t>Generate Memory</a:t>
-            </a:r>
-            <a:br/>
-            <a:r>
-              <a:t>from History</a:t>
-            </a:r>
-          </a:p>
-        </p:txBody>
-      </p:sp>
-      <p:sp>
-        <p:nvSpPr>
-          <p:cNvPr id="11" name="TextBox 10"/>
-          <p:cNvSpPr txBox="1"/>
-          <p:nvPr/>
-        </p:nvSpPr>
-        <p:spPr>
-          <a:xfrm>
-            <a:off x="4389120" y="3108960"/>
-            <a:ext cx="3108960" cy="1828800"/>
-          </a:xfrm>
-          <a:prstGeom prst="rect">
-            <a:avLst/>
-          </a:prstGeom>
-          <a:noFill/>
-        </p:spPr>
-        <p:txBody>
-          <a:bodyPr wrap="square">
-            <a:spAutoFit/>
-          </a:bodyPr>
-          <a:lstStyle/>
-          <a:p>
-            <a:pPr algn="ctr">
-              <a:defRPr sz="1400">
-                <a:solidFill>
-                  <a:srgbClr val="D1D5DB"/>
-                </a:solidFill>
-              </a:defRPr>
-            </a:pPr>
-            <a:r>
-              <a:t>Claude builds memory</a:t>
-            </a:r>
-            <a:br/>
-            <a:r>
-              <a:t>from your chat patterns.</a:t>
-            </a:r>
-            <a:br/>
-            <a:r>
-              <a:t>Remembers preferences,</a:t>
-            </a:r>
-            <a:br/>
-            <a:r>
-              <a:t>projects, and context.</a:t>
-            </a:r>
-            <a:br/>
-            <a:r>
-              <a:t>Controls both chats</a:t>
-            </a:r>
-            <a:br/>
-            <a:r>
-              <a:t>and Projects.</a:t>
-            </a:r>
-          </a:p>
-        </p:txBody>
-      </p:sp>
-      <p:sp>
-        <p:nvSpPr>
-          <p:cNvPr id="12" name="Rounded Rectangle 11"/>
-          <p:cNvSpPr/>
-          <p:nvPr/>
-        </p:nvSpPr>
-        <p:spPr>
-          <a:xfrm>
-            <a:off x="7955279" y="1737360"/>
-            <a:ext cx="3474720" cy="3474720"/>
-          </a:xfrm>
-          <a:prstGeom prst="roundRect">
-            <a:avLst/>
-          </a:prstGeom>
-          <a:solidFill>
-            <a:srgbClr val="141A2A"/>
-          </a:solidFill>
-          <a:ln w="19050">
-            <a:solidFill>
-              <a:srgbClr val="14B8A6"/>
-            </a:solidFill>
-          </a:ln>
-        </p:spPr>
-        <p:style>
-          <a:lnRef idx="1">
-            <a:schemeClr val="accent1"/>
-          </a:lnRef>
-          <a:fillRef idx="3">
-            <a:schemeClr val="accent1"/>
-          </a:fillRef>
-          <a:effectRef idx="2">
-            <a:schemeClr val="accent1"/>
-          </a:effectRef>
-          <a:fontRef idx="minor">
-            <a:schemeClr val="lt1"/>
-          </a:fontRef>
-        </p:style>
-        <p:txBody>
-          <a:bodyPr rtlCol="0" anchor="ctr"/>
-          <a:lstStyle/>
-          <a:p>
-            <a:pPr algn="ctr"/>
-          </a:p>
-        </p:txBody>
-      </p:sp>
-      <p:sp>
-        <p:nvSpPr>
-          <p:cNvPr id="13" name="TextBox 12"/>
-          <p:cNvSpPr txBox="1"/>
-          <p:nvPr/>
-        </p:nvSpPr>
-        <p:spPr>
-          <a:xfrm>
-            <a:off x="8138159" y="1920240"/>
-            <a:ext cx="3108960" cy="457200"/>
-          </a:xfrm>
-          <a:prstGeom prst="rect">
-            <a:avLst/>
-          </a:prstGeom>
-          <a:noFill/>
-        </p:spPr>
-        <p:txBody>
-          <a:bodyPr wrap="none">
-            <a:spAutoFit/>
-          </a:bodyPr>
-          <a:lstStyle/>
-          <a:p>
-            <a:pPr algn="ctr">
-              <a:defRPr sz="3000"/>
-            </a:pPr>
-            <a:r>
-              <a:t>👁️</a:t>
-            </a:r>
-          </a:p>
-        </p:txBody>
-      </p:sp>
-      <p:sp>
-        <p:nvSpPr>
-          <p:cNvPr id="14" name="TextBox 13"/>
-          <p:cNvSpPr txBox="1"/>
-          <p:nvPr/>
-        </p:nvSpPr>
-        <p:spPr>
-          <a:xfrm>
-            <a:off x="8138159" y="2377440"/>
-            <a:ext cx="3108960" cy="640080"/>
-          </a:xfrm>
-          <a:prstGeom prst="rect">
-            <a:avLst/>
-          </a:prstGeom>
-          <a:noFill/>
-        </p:spPr>
-        <p:txBody>
-          <a:bodyPr wrap="square">
-            <a:spAutoFit/>
-          </a:bodyPr>
-          <a:lstStyle/>
-          <a:p>
-            <a:pPr algn="ctr">
-              <a:defRPr sz="1800" b="1">
+              <a:t>  Security and data privacy</a:t>
+            </a:r>
+          </a:p>
+          <a:p>
+            <a:pPr>
+              <a:spcBef>
+                <a:spcPts val="800"/>
+              </a:spcBef>
+              <a:spcAft>
+                <a:spcPts val="800"/>
+              </a:spcAft>
+              <a:defRPr sz="2200">
                 <a:solidFill>
                   <a:srgbClr val="FFFFFF"/>
                 </a:solidFill>
               </a:defRPr>
             </a:pPr>
             <a:r>
-              <a:t>View Your Memory</a:t>
-            </a:r>
-          </a:p>
-        </p:txBody>
-      </p:sp>
-      <p:sp>
-        <p:nvSpPr>
-          <p:cNvPr id="15" name="TextBox 14"/>
-          <p:cNvSpPr txBox="1"/>
-          <p:nvPr/>
-        </p:nvSpPr>
-        <p:spPr>
-          <a:xfrm>
-            <a:off x="8138159" y="3108960"/>
-            <a:ext cx="3108960" cy="1828800"/>
-          </a:xfrm>
-          <a:prstGeom prst="rect">
-            <a:avLst/>
-          </a:prstGeom>
-          <a:noFill/>
-        </p:spPr>
-        <p:txBody>
-          <a:bodyPr wrap="square">
-            <a:spAutoFit/>
-          </a:bodyPr>
-          <a:lstStyle/>
-          <a:p>
-            <a:pPr algn="ctr">
-              <a:defRPr sz="1400">
-                <a:solidFill>
-                  <a:srgbClr val="D1D5DB"/>
-                </a:solidFill>
-              </a:defRPr>
-            </a:pPr>
-            <a:r>
-              <a:t>See exactly what Claude</a:t>
-            </a:r>
-            <a:br/>
-            <a:r>
-              <a:t>remembers about you.</a:t>
-            </a:r>
-            <a:br/>
-            <a:r>
-              <a:t>Edit or delete entries.</a:t>
-            </a:r>
-            <a:br/>
-            <a:r>
-              <a:t>Full transparency —</a:t>
-            </a:r>
-            <a:br/>
-            <a:r>
-              <a:t>no hidden knowledge.</a:t>
-            </a:r>
-          </a:p>
-        </p:txBody>
-      </p:sp>
-      <p:sp>
-        <p:nvSpPr>
-          <p:cNvPr id="16" name="TextBox 15"/>
-          <p:cNvSpPr txBox="1"/>
-          <p:nvPr/>
-        </p:nvSpPr>
-        <p:spPr>
-          <a:xfrm>
-            <a:off x="457200" y="5486400"/>
-            <a:ext cx="11247120" cy="457200"/>
-          </a:xfrm>
-          <a:prstGeom prst="rect">
-            <a:avLst/>
-          </a:prstGeom>
-          <a:noFill/>
-        </p:spPr>
-        <p:txBody>
-          <a:bodyPr wrap="none">
-            <a:spAutoFit/>
-          </a:bodyPr>
-          <a:lstStyle/>
-          <a:p>
-            <a:pPr algn="ctr">
-              <a:defRPr sz="1500" i="1">
-                <a:solidFill>
-                  <a:srgbClr val="14B8A6"/>
-                </a:solidFill>
-              </a:defRPr>
-            </a:pPr>
-            <a:r>
-              <a:t>Settings → Memory → Enable both toggles for the best experience</a:t>
+              <a:t>  When to use which tool</a:t>
+            </a:r>
+          </a:p>
+          <a:p>
+            <a:pPr>
+              <a:spcBef>
+                <a:spcPts val="800"/>
+              </a:spcBef>
+              <a:spcAft>
+                <a:spcPts val="800"/>
+              </a:spcAft>
+              <a:defRPr sz="2200">
+                <a:solidFill>
+                  <a:srgbClr val="FFFFFF"/>
+                </a:solidFill>
+              </a:defRPr>
+            </a:pPr>
+            <a:r>
+              <a:t>  Advanced prompting techniques</a:t>
+            </a:r>
+          </a:p>
+          <a:p>
+            <a:pPr>
+              <a:spcBef>
+                <a:spcPts val="800"/>
+              </a:spcBef>
+              <a:spcAft>
+                <a:spcPts val="800"/>
+              </a:spcAft>
+              <a:defRPr sz="2200">
+                <a:solidFill>
+                  <a:srgbClr val="FFFFFF"/>
+                </a:solidFill>
+              </a:defRPr>
+            </a:pPr>
+            <a:r>
+              <a:t>  Real-world use cases</a:t>
             </a:r>
           </a:p>
         </p:txBody>
@@ -50382,7 +52043,7 @@
               </a:defRPr>
             </a:pPr>
             <a:r>
-              <a:t>Beyond Built-In: Custom Connectors</a:t>
+              <a:t>Claude's Memory</a:t>
             </a:r>
           </a:p>
         </p:txBody>
@@ -50410,14 +52071,14 @@
           <a:lstStyle/>
           <a:p>
             <a:pPr>
-              <a:defRPr sz="2000" i="1">
+              <a:defRPr sz="1800" i="1">
                 <a:solidFill>
                   <a:srgbClr val="9CA3AF"/>
                 </a:solidFill>
               </a:defRPr>
             </a:pPr>
             <a:r>
-              <a:t>Claude isn't limited to what ships out of the box</a:t>
+              <a:t>Claude remembers context across conversations — so you don't have to repeat yourself</a:t>
             </a:r>
           </a:p>
         </p:txBody>
@@ -50431,7 +52092,7 @@
         <p:spPr>
           <a:xfrm>
             <a:off x="457200" y="1737360"/>
-            <a:ext cx="5303520" cy="4114800"/>
+            <a:ext cx="3474720" cy="3474720"/>
           </a:xfrm>
           <a:prstGeom prst="roundRect">
             <a:avLst/>
@@ -50475,8 +52136,8 @@
         </p:nvSpPr>
         <p:spPr>
           <a:xfrm>
-            <a:off x="731520" y="1920240"/>
-            <a:ext cx="4754880" cy="457200"/>
+            <a:off x="640080" y="1920240"/>
+            <a:ext cx="3108960" cy="457200"/>
           </a:xfrm>
           <a:prstGeom prst="rect">
             <a:avLst/>
@@ -50493,7 +52154,7 @@
               <a:defRPr sz="3000"/>
             </a:pPr>
             <a:r>
-              <a:t>🔌</a:t>
+              <a:t>🔍</a:t>
             </a:r>
           </a:p>
         </p:txBody>
@@ -50506,82 +52167,8 @@
         </p:nvSpPr>
         <p:spPr>
           <a:xfrm>
-            <a:off x="731520" y="2377440"/>
-            <a:ext cx="4754880" cy="457200"/>
-          </a:xfrm>
-          <a:prstGeom prst="rect">
-            <a:avLst/>
-          </a:prstGeom>
-          <a:noFill/>
-        </p:spPr>
-        <p:txBody>
-          <a:bodyPr wrap="none">
-            <a:spAutoFit/>
-          </a:bodyPr>
-          <a:lstStyle/>
-          <a:p>
-            <a:pPr algn="ctr">
-              <a:defRPr sz="2200" b="1">
-                <a:solidFill>
-                  <a:srgbClr val="FFFFFF"/>
-                </a:solidFill>
-              </a:defRPr>
-            </a:pPr>
-            <a:r>
-              <a:t>Integrations Panel</a:t>
-            </a:r>
-          </a:p>
-        </p:txBody>
-      </p:sp>
-      <p:sp>
-        <p:nvSpPr>
-          <p:cNvPr id="7" name="TextBox 6"/>
-          <p:cNvSpPr txBox="1"/>
-          <p:nvPr/>
-        </p:nvSpPr>
-        <p:spPr>
-          <a:xfrm>
-            <a:off x="731520" y="2834640"/>
-            <a:ext cx="4754880" cy="457200"/>
-          </a:xfrm>
-          <a:prstGeom prst="rect">
-            <a:avLst/>
-          </a:prstGeom>
-          <a:noFill/>
-        </p:spPr>
-        <p:txBody>
-          <a:bodyPr wrap="none">
-            <a:spAutoFit/>
-          </a:bodyPr>
-          <a:lstStyle/>
-          <a:p>
-            <a:pPr algn="ctr">
-              <a:defRPr sz="1500" i="1">
-                <a:solidFill>
-                  <a:srgbClr val="14B8A6"/>
-                </a:solidFill>
-              </a:defRPr>
-            </a:pPr>
-            <a:r>
-              <a:t>Connect Claude to tools</a:t>
-            </a:r>
-            <a:br/>
-            <a:r>
-              <a:t>you already use:</a:t>
-            </a:r>
-          </a:p>
-        </p:txBody>
-      </p:sp>
-      <p:sp>
-        <p:nvSpPr>
-          <p:cNvPr id="8" name="TextBox 7"/>
-          <p:cNvSpPr txBox="1"/>
-          <p:nvPr/>
-        </p:nvSpPr>
-        <p:spPr>
-          <a:xfrm>
-            <a:off x="731520" y="3383280"/>
-            <a:ext cx="4754880" cy="2286000"/>
+            <a:off x="640080" y="2377440"/>
+            <a:ext cx="3108960" cy="640080"/>
           </a:xfrm>
           <a:prstGeom prst="rect">
             <a:avLst/>
@@ -50595,49 +52182,83 @@
           <a:lstStyle/>
           <a:p>
             <a:pPr algn="ctr">
-              <a:defRPr sz="1500">
+              <a:defRPr sz="1800" b="1">
+                <a:solidFill>
+                  <a:srgbClr val="FFFFFF"/>
+                </a:solidFill>
+              </a:defRPr>
+            </a:pPr>
+            <a:r>
+              <a:t>Search &amp; Reference</a:t>
+            </a:r>
+            <a:br/>
+            <a:r>
+              <a:t>Past Chats</a:t>
+            </a:r>
+          </a:p>
+        </p:txBody>
+      </p:sp>
+      <p:sp>
+        <p:nvSpPr>
+          <p:cNvPr id="7" name="TextBox 6"/>
+          <p:cNvSpPr txBox="1"/>
+          <p:nvPr/>
+        </p:nvSpPr>
+        <p:spPr>
+          <a:xfrm>
+            <a:off x="640080" y="3108960"/>
+            <a:ext cx="3108960" cy="1828800"/>
+          </a:xfrm>
+          <a:prstGeom prst="rect">
+            <a:avLst/>
+          </a:prstGeom>
+          <a:noFill/>
+        </p:spPr>
+        <p:txBody>
+          <a:bodyPr wrap="square">
+            <a:spAutoFit/>
+          </a:bodyPr>
+          <a:lstStyle/>
+          <a:p>
+            <a:pPr algn="ctr">
+              <a:defRPr sz="1400">
                 <a:solidFill>
                   <a:srgbClr val="D1D5DB"/>
                 </a:solidFill>
               </a:defRPr>
             </a:pPr>
             <a:r>
-              <a:t>Slack  •  Notion  •  Jira</a:t>
+              <a:t>Claude searches your</a:t>
             </a:r>
             <a:br/>
             <a:r>
-              <a:t>Salesforce  •  Asana  •  Zapier</a:t>
+              <a:t>previous conversations</a:t>
             </a:r>
             <a:br/>
             <a:r>
-              <a:t>Google Workspace  •  GitHub</a:t>
+              <a:t>for relevant context.</a:t>
             </a:r>
             <a:br/>
+            <a:r>
+              <a:t>Finds details you forgot.</a:t>
+            </a:r>
             <a:br/>
             <a:r>
-              <a:t>Enable in Settings → Integrations</a:t>
-            </a:r>
-            <a:br/>
-            <a:r>
-              <a:t>Claude pulls and pushes data</a:t>
-            </a:r>
-            <a:br/>
-            <a:r>
-              <a:t>directly — no switching apps</a:t>
-            </a:r>
-          </a:p>
-        </p:txBody>
-      </p:sp>
-      <p:sp>
-        <p:nvSpPr>
-          <p:cNvPr id="9" name="Rounded Rectangle 8"/>
+              <a:t>Works across all chats.</a:t>
+            </a:r>
+          </a:p>
+        </p:txBody>
+      </p:sp>
+      <p:sp>
+        <p:nvSpPr>
+          <p:cNvPr id="8" name="Rounded Rectangle 7"/>
           <p:cNvSpPr/>
           <p:nvPr/>
         </p:nvSpPr>
         <p:spPr>
           <a:xfrm>
-            <a:off x="6217920" y="1737360"/>
-            <a:ext cx="5303520" cy="4114800"/>
+            <a:off x="4206240" y="1737360"/>
+            <a:ext cx="3474720" cy="3474720"/>
           </a:xfrm>
           <a:prstGeom prst="roundRect">
             <a:avLst/>
@@ -50675,14 +52296,14 @@
       </p:sp>
       <p:sp>
         <p:nvSpPr>
-          <p:cNvPr id="10" name="TextBox 9"/>
-          <p:cNvSpPr txBox="1"/>
-          <p:nvPr/>
-        </p:nvSpPr>
-        <p:spPr>
-          <a:xfrm>
-            <a:off x="6492240" y="1920240"/>
-            <a:ext cx="4754880" cy="457200"/>
+          <p:cNvPr id="9" name="TextBox 8"/>
+          <p:cNvSpPr txBox="1"/>
+          <p:nvPr/>
+        </p:nvSpPr>
+        <p:spPr>
+          <a:xfrm>
+            <a:off x="4389120" y="1920240"/>
+            <a:ext cx="3108960" cy="457200"/>
           </a:xfrm>
           <a:prstGeom prst="rect">
             <a:avLst/>
@@ -50699,7 +52320,46 @@
               <a:defRPr sz="3000"/>
             </a:pPr>
             <a:r>
-              <a:t>🔧</a:t>
+              <a:t>🧠</a:t>
+            </a:r>
+          </a:p>
+        </p:txBody>
+      </p:sp>
+      <p:sp>
+        <p:nvSpPr>
+          <p:cNvPr id="10" name="TextBox 9"/>
+          <p:cNvSpPr txBox="1"/>
+          <p:nvPr/>
+        </p:nvSpPr>
+        <p:spPr>
+          <a:xfrm>
+            <a:off x="4389120" y="2377440"/>
+            <a:ext cx="3108960" cy="640080"/>
+          </a:xfrm>
+          <a:prstGeom prst="rect">
+            <a:avLst/>
+          </a:prstGeom>
+          <a:noFill/>
+        </p:spPr>
+        <p:txBody>
+          <a:bodyPr wrap="square">
+            <a:spAutoFit/>
+          </a:bodyPr>
+          <a:lstStyle/>
+          <a:p>
+            <a:pPr algn="ctr">
+              <a:defRPr sz="1800" b="1">
+                <a:solidFill>
+                  <a:srgbClr val="FFFFFF"/>
+                </a:solidFill>
+              </a:defRPr>
+            </a:pPr>
+            <a:r>
+              <a:t>Generate Memory</a:t>
+            </a:r>
+            <a:br/>
+            <a:r>
+              <a:t>from History</a:t>
             </a:r>
           </a:p>
         </p:txBody>
@@ -50712,8 +52372,108 @@
         </p:nvSpPr>
         <p:spPr>
           <a:xfrm>
-            <a:off x="6492240" y="2377440"/>
-            <a:ext cx="4754880" cy="457200"/>
+            <a:off x="4389120" y="3108960"/>
+            <a:ext cx="3108960" cy="1828800"/>
+          </a:xfrm>
+          <a:prstGeom prst="rect">
+            <a:avLst/>
+          </a:prstGeom>
+          <a:noFill/>
+        </p:spPr>
+        <p:txBody>
+          <a:bodyPr wrap="square">
+            <a:spAutoFit/>
+          </a:bodyPr>
+          <a:lstStyle/>
+          <a:p>
+            <a:pPr algn="ctr">
+              <a:defRPr sz="1400">
+                <a:solidFill>
+                  <a:srgbClr val="D1D5DB"/>
+                </a:solidFill>
+              </a:defRPr>
+            </a:pPr>
+            <a:r>
+              <a:t>Claude builds memory</a:t>
+            </a:r>
+            <a:br/>
+            <a:r>
+              <a:t>from your chat patterns.</a:t>
+            </a:r>
+            <a:br/>
+            <a:r>
+              <a:t>Remembers preferences,</a:t>
+            </a:r>
+            <a:br/>
+            <a:r>
+              <a:t>projects, and context.</a:t>
+            </a:r>
+            <a:br/>
+            <a:r>
+              <a:t>Controls both chats</a:t>
+            </a:r>
+            <a:br/>
+            <a:r>
+              <a:t>and Projects.</a:t>
+            </a:r>
+          </a:p>
+        </p:txBody>
+      </p:sp>
+      <p:sp>
+        <p:nvSpPr>
+          <p:cNvPr id="12" name="Rounded Rectangle 11"/>
+          <p:cNvSpPr/>
+          <p:nvPr/>
+        </p:nvSpPr>
+        <p:spPr>
+          <a:xfrm>
+            <a:off x="7955279" y="1737360"/>
+            <a:ext cx="3474720" cy="3474720"/>
+          </a:xfrm>
+          <a:prstGeom prst="roundRect">
+            <a:avLst/>
+          </a:prstGeom>
+          <a:solidFill>
+            <a:srgbClr val="141A2A"/>
+          </a:solidFill>
+          <a:ln w="19050">
+            <a:solidFill>
+              <a:srgbClr val="14B8A6"/>
+            </a:solidFill>
+          </a:ln>
+        </p:spPr>
+        <p:style>
+          <a:lnRef idx="1">
+            <a:schemeClr val="accent1"/>
+          </a:lnRef>
+          <a:fillRef idx="3">
+            <a:schemeClr val="accent1"/>
+          </a:fillRef>
+          <a:effectRef idx="2">
+            <a:schemeClr val="accent1"/>
+          </a:effectRef>
+          <a:fontRef idx="minor">
+            <a:schemeClr val="lt1"/>
+          </a:fontRef>
+        </p:style>
+        <p:txBody>
+          <a:bodyPr rtlCol="0" anchor="ctr"/>
+          <a:lstStyle/>
+          <a:p>
+            <a:pPr algn="ctr"/>
+          </a:p>
+        </p:txBody>
+      </p:sp>
+      <p:sp>
+        <p:nvSpPr>
+          <p:cNvPr id="13" name="TextBox 12"/>
+          <p:cNvSpPr txBox="1"/>
+          <p:nvPr/>
+        </p:nvSpPr>
+        <p:spPr>
+          <a:xfrm>
+            <a:off x="8138159" y="1920240"/>
+            <a:ext cx="3108960" cy="457200"/>
           </a:xfrm>
           <a:prstGeom prst="rect">
             <a:avLst/>
@@ -50727,28 +52487,110 @@
           <a:lstStyle/>
           <a:p>
             <a:pPr algn="ctr">
-              <a:defRPr sz="2200" b="1">
+              <a:defRPr sz="3000"/>
+            </a:pPr>
+            <a:r>
+              <a:t>👁️</a:t>
+            </a:r>
+          </a:p>
+        </p:txBody>
+      </p:sp>
+      <p:sp>
+        <p:nvSpPr>
+          <p:cNvPr id="14" name="TextBox 13"/>
+          <p:cNvSpPr txBox="1"/>
+          <p:nvPr/>
+        </p:nvSpPr>
+        <p:spPr>
+          <a:xfrm>
+            <a:off x="8138159" y="2377440"/>
+            <a:ext cx="3108960" cy="640080"/>
+          </a:xfrm>
+          <a:prstGeom prst="rect">
+            <a:avLst/>
+          </a:prstGeom>
+          <a:noFill/>
+        </p:spPr>
+        <p:txBody>
+          <a:bodyPr wrap="square">
+            <a:spAutoFit/>
+          </a:bodyPr>
+          <a:lstStyle/>
+          <a:p>
+            <a:pPr algn="ctr">
+              <a:defRPr sz="1800" b="1">
                 <a:solidFill>
                   <a:srgbClr val="FFFFFF"/>
                 </a:solidFill>
               </a:defRPr>
             </a:pPr>
             <a:r>
-              <a:t>Model Context Protocol (MCP)</a:t>
-            </a:r>
-          </a:p>
-        </p:txBody>
-      </p:sp>
-      <p:sp>
-        <p:nvSpPr>
-          <p:cNvPr id="12" name="TextBox 11"/>
-          <p:cNvSpPr txBox="1"/>
-          <p:nvPr/>
-        </p:nvSpPr>
-        <p:spPr>
-          <a:xfrm>
-            <a:off x="6492240" y="2834640"/>
-            <a:ext cx="4754880" cy="457200"/>
+              <a:t>View Your Memory</a:t>
+            </a:r>
+          </a:p>
+        </p:txBody>
+      </p:sp>
+      <p:sp>
+        <p:nvSpPr>
+          <p:cNvPr id="15" name="TextBox 14"/>
+          <p:cNvSpPr txBox="1"/>
+          <p:nvPr/>
+        </p:nvSpPr>
+        <p:spPr>
+          <a:xfrm>
+            <a:off x="8138159" y="3108960"/>
+            <a:ext cx="3108960" cy="1828800"/>
+          </a:xfrm>
+          <a:prstGeom prst="rect">
+            <a:avLst/>
+          </a:prstGeom>
+          <a:noFill/>
+        </p:spPr>
+        <p:txBody>
+          <a:bodyPr wrap="square">
+            <a:spAutoFit/>
+          </a:bodyPr>
+          <a:lstStyle/>
+          <a:p>
+            <a:pPr algn="ctr">
+              <a:defRPr sz="1400">
+                <a:solidFill>
+                  <a:srgbClr val="D1D5DB"/>
+                </a:solidFill>
+              </a:defRPr>
+            </a:pPr>
+            <a:r>
+              <a:t>See exactly what Claude</a:t>
+            </a:r>
+            <a:br/>
+            <a:r>
+              <a:t>remembers about you.</a:t>
+            </a:r>
+            <a:br/>
+            <a:r>
+              <a:t>Edit or delete entries.</a:t>
+            </a:r>
+            <a:br/>
+            <a:r>
+              <a:t>Full transparency —</a:t>
+            </a:r>
+            <a:br/>
+            <a:r>
+              <a:t>no hidden knowledge.</a:t>
+            </a:r>
+          </a:p>
+        </p:txBody>
+      </p:sp>
+      <p:sp>
+        <p:nvSpPr>
+          <p:cNvPr id="16" name="TextBox 15"/>
+          <p:cNvSpPr txBox="1"/>
+          <p:nvPr/>
+        </p:nvSpPr>
+        <p:spPr>
+          <a:xfrm>
+            <a:off x="457200" y="5486400"/>
+            <a:ext cx="11247120" cy="457200"/>
           </a:xfrm>
           <a:prstGeom prst="rect">
             <a:avLst/>
@@ -50769,71 +52611,7 @@
               </a:defRPr>
             </a:pPr>
             <a:r>
-              <a:t>Your IT team can build</a:t>
-            </a:r>
-            <a:br/>
-            <a:r>
-              <a:t>custom connectors:</a:t>
-            </a:r>
-          </a:p>
-        </p:txBody>
-      </p:sp>
-      <p:sp>
-        <p:nvSpPr>
-          <p:cNvPr id="13" name="TextBox 12"/>
-          <p:cNvSpPr txBox="1"/>
-          <p:nvPr/>
-        </p:nvSpPr>
-        <p:spPr>
-          <a:xfrm>
-            <a:off x="6492240" y="3383280"/>
-            <a:ext cx="4754880" cy="2286000"/>
-          </a:xfrm>
-          <a:prstGeom prst="rect">
-            <a:avLst/>
-          </a:prstGeom>
-          <a:noFill/>
-        </p:spPr>
-        <p:txBody>
-          <a:bodyPr wrap="square">
-            <a:spAutoFit/>
-          </a:bodyPr>
-          <a:lstStyle/>
-          <a:p>
-            <a:pPr algn="ctr">
-              <a:defRPr sz="1500">
-                <a:solidFill>
-                  <a:srgbClr val="D1D5DB"/>
-                </a:solidFill>
-              </a:defRPr>
-            </a:pPr>
-            <a:r>
-              <a:t>Connect to internal databases</a:t>
-            </a:r>
-            <a:br/>
-            <a:r>
-              <a:t>Query proprietary APIs</a:t>
-            </a:r>
-            <a:br/>
-            <a:r>
-              <a:t>Access company knowledge bases</a:t>
-            </a:r>
-            <a:br/>
-            <a:r>
-              <a:t>Integrate with any system</a:t>
-            </a:r>
-            <a:br/>
-            <a:br/>
-            <a:r>
-              <a:t>Open standard by Anthropic</a:t>
-            </a:r>
-            <a:br/>
-            <a:r>
-              <a:t>Growing ecosystem of connectors</a:t>
-            </a:r>
-            <a:br/>
-            <a:r>
-              <a:t>Technical deep-dive in Day 3</a:t>
+              <a:t>Settings → Memory → Enable both toggles for the best experience</a:t>
             </a:r>
           </a:p>
         </p:txBody>

--- a/slides/Day1_Claude_for_Business.pptx
+++ b/slides/Day1_Claude_for_Business.pptx
@@ -96,7 +96,6 @@
     <p:sldId id="331" r:id="rId84"/>
     <p:sldId id="332" r:id="rId85"/>
     <p:sldId id="333" r:id="rId86"/>
-    <p:sldId id="334" r:id="rId87"/>
   </p:sldIdLst>
   <p:sldSz cx="12192000" cy="6858000"/>
   <p:notesSz cx="6858000" cy="9144000"/>

--- a/slides/Day1_Claude_for_Business.pptx
+++ b/slides/Day1_Claude_for_Business.pptx
@@ -96,6 +96,7 @@
     <p:sldId id="331" r:id="rId84"/>
     <p:sldId id="332" r:id="rId85"/>
     <p:sldId id="333" r:id="rId86"/>
+    <p:sldId id="355" r:id="rId99"/>
   </p:sldIdLst>
   <p:sldSz cx="12192000" cy="6858000"/>
   <p:notesSz cx="6858000" cy="9144000"/>
@@ -27802,6 +27803,635 @@
 </p:sld>
 </file>
 
+<file path=ppt/slides/slide35.xml><?xml version="1.0" encoding="utf-8"?>
+<p:sld xmlns:a="http://schemas.openxmlformats.org/drawingml/2006/main" xmlns:p="http://schemas.openxmlformats.org/presentationml/2006/main" xmlns:r="http://schemas.openxmlformats.org/officeDocument/2006/relationships">
+  <p:cSld>
+    <p:bg>
+      <p:bgPr>
+        <a:solidFill>
+          <a:srgbClr val="0B0F1A"/>
+        </a:solidFill>
+        <a:effectLst/>
+      </p:bgPr>
+    </p:bg>
+    <p:spTree>
+      <p:nvGrpSpPr>
+        <p:cNvPr id="1" name=""/>
+        <p:cNvGrpSpPr/>
+        <p:nvPr/>
+      </p:nvGrpSpPr>
+      <p:grpSpPr/>
+      <p:sp>
+        <p:nvSpPr>
+          <p:cNvPr id="2" name="TextBox 1"/>
+          <p:cNvSpPr txBox="1"/>
+          <p:nvPr/>
+        </p:nvSpPr>
+        <p:spPr>
+          <a:xfrm>
+            <a:off x="457200" y="274320"/>
+            <a:ext cx="11247120" cy="822960"/>
+          </a:xfrm>
+          <a:prstGeom prst="rect">
+            <a:avLst/>
+          </a:prstGeom>
+          <a:noFill/>
+        </p:spPr>
+        <p:txBody>
+          <a:bodyPr wrap="none">
+            <a:spAutoFit/>
+          </a:bodyPr>
+          <a:lstStyle/>
+          <a:p>
+            <a:pPr>
+              <a:defRPr sz="4000" b="1">
+                <a:solidFill>
+                  <a:srgbClr val="FFFFFF"/>
+                </a:solidFill>
+              </a:defRPr>
+            </a:pPr>
+            <a:r>
+              <a:t>Claude's Memory</a:t>
+            </a:r>
+          </a:p>
+        </p:txBody>
+      </p:sp>
+      <p:sp>
+        <p:nvSpPr>
+          <p:cNvPr id="3" name="TextBox 2"/>
+          <p:cNvSpPr txBox="1"/>
+          <p:nvPr/>
+        </p:nvSpPr>
+        <p:spPr>
+          <a:xfrm>
+            <a:off x="457200" y="1005840"/>
+            <a:ext cx="11247120" cy="457200"/>
+          </a:xfrm>
+          <a:prstGeom prst="rect">
+            <a:avLst/>
+          </a:prstGeom>
+          <a:noFill/>
+        </p:spPr>
+        <p:txBody>
+          <a:bodyPr wrap="none">
+            <a:spAutoFit/>
+          </a:bodyPr>
+          <a:lstStyle/>
+          <a:p>
+            <a:pPr>
+              <a:defRPr sz="1800" i="1">
+                <a:solidFill>
+                  <a:srgbClr val="9CA3AF"/>
+                </a:solidFill>
+              </a:defRPr>
+            </a:pPr>
+            <a:r>
+              <a:t>Claude remembers context across conversations — so you don't have to repeat yourself</a:t>
+            </a:r>
+          </a:p>
+        </p:txBody>
+      </p:sp>
+      <p:sp>
+        <p:nvSpPr>
+          <p:cNvPr id="4" name="Rounded Rectangle 3"/>
+          <p:cNvSpPr/>
+          <p:nvPr/>
+        </p:nvSpPr>
+        <p:spPr>
+          <a:xfrm>
+            <a:off x="457200" y="1737360"/>
+            <a:ext cx="3474720" cy="3474720"/>
+          </a:xfrm>
+          <a:prstGeom prst="roundRect">
+            <a:avLst/>
+          </a:prstGeom>
+          <a:solidFill>
+            <a:srgbClr val="141A2A"/>
+          </a:solidFill>
+          <a:ln w="19050">
+            <a:solidFill>
+              <a:srgbClr val="14B8A6"/>
+            </a:solidFill>
+          </a:ln>
+        </p:spPr>
+        <p:style>
+          <a:lnRef idx="1">
+            <a:schemeClr val="accent1"/>
+          </a:lnRef>
+          <a:fillRef idx="3">
+            <a:schemeClr val="accent1"/>
+          </a:fillRef>
+          <a:effectRef idx="2">
+            <a:schemeClr val="accent1"/>
+          </a:effectRef>
+          <a:fontRef idx="minor">
+            <a:schemeClr val="lt1"/>
+          </a:fontRef>
+        </p:style>
+        <p:txBody>
+          <a:bodyPr rtlCol="0" anchor="ctr"/>
+          <a:lstStyle/>
+          <a:p>
+            <a:pPr algn="ctr"/>
+          </a:p>
+        </p:txBody>
+      </p:sp>
+      <p:sp>
+        <p:nvSpPr>
+          <p:cNvPr id="5" name="TextBox 4"/>
+          <p:cNvSpPr txBox="1"/>
+          <p:nvPr/>
+        </p:nvSpPr>
+        <p:spPr>
+          <a:xfrm>
+            <a:off x="640080" y="1920240"/>
+            <a:ext cx="3108960" cy="457200"/>
+          </a:xfrm>
+          <a:prstGeom prst="rect">
+            <a:avLst/>
+          </a:prstGeom>
+          <a:noFill/>
+        </p:spPr>
+        <p:txBody>
+          <a:bodyPr wrap="none">
+            <a:spAutoFit/>
+          </a:bodyPr>
+          <a:lstStyle/>
+          <a:p>
+            <a:pPr algn="ctr">
+              <a:defRPr sz="3000"/>
+            </a:pPr>
+            <a:r>
+              <a:t>🔍</a:t>
+            </a:r>
+          </a:p>
+        </p:txBody>
+      </p:sp>
+      <p:sp>
+        <p:nvSpPr>
+          <p:cNvPr id="6" name="TextBox 5"/>
+          <p:cNvSpPr txBox="1"/>
+          <p:nvPr/>
+        </p:nvSpPr>
+        <p:spPr>
+          <a:xfrm>
+            <a:off x="640080" y="2377440"/>
+            <a:ext cx="3108960" cy="640080"/>
+          </a:xfrm>
+          <a:prstGeom prst="rect">
+            <a:avLst/>
+          </a:prstGeom>
+          <a:noFill/>
+        </p:spPr>
+        <p:txBody>
+          <a:bodyPr wrap="square">
+            <a:spAutoFit/>
+          </a:bodyPr>
+          <a:lstStyle/>
+          <a:p>
+            <a:pPr algn="ctr">
+              <a:defRPr sz="1800" b="1">
+                <a:solidFill>
+                  <a:srgbClr val="FFFFFF"/>
+                </a:solidFill>
+              </a:defRPr>
+            </a:pPr>
+            <a:r>
+              <a:t>Search &amp; Reference</a:t>
+            </a:r>
+            <a:br/>
+            <a:r>
+              <a:t>Past Chats</a:t>
+            </a:r>
+          </a:p>
+        </p:txBody>
+      </p:sp>
+      <p:sp>
+        <p:nvSpPr>
+          <p:cNvPr id="7" name="TextBox 6"/>
+          <p:cNvSpPr txBox="1"/>
+          <p:nvPr/>
+        </p:nvSpPr>
+        <p:spPr>
+          <a:xfrm>
+            <a:off x="640080" y="3108960"/>
+            <a:ext cx="3108960" cy="1828800"/>
+          </a:xfrm>
+          <a:prstGeom prst="rect">
+            <a:avLst/>
+          </a:prstGeom>
+          <a:noFill/>
+        </p:spPr>
+        <p:txBody>
+          <a:bodyPr wrap="square">
+            <a:spAutoFit/>
+          </a:bodyPr>
+          <a:lstStyle/>
+          <a:p>
+            <a:pPr algn="ctr">
+              <a:defRPr sz="1400">
+                <a:solidFill>
+                  <a:srgbClr val="D1D5DB"/>
+                </a:solidFill>
+              </a:defRPr>
+            </a:pPr>
+            <a:r>
+              <a:t>Claude searches your</a:t>
+            </a:r>
+            <a:br/>
+            <a:r>
+              <a:t>previous conversations</a:t>
+            </a:r>
+            <a:br/>
+            <a:r>
+              <a:t>for relevant context.</a:t>
+            </a:r>
+            <a:br/>
+            <a:r>
+              <a:t>Finds details you forgot.</a:t>
+            </a:r>
+            <a:br/>
+            <a:r>
+              <a:t>Works across all chats.</a:t>
+            </a:r>
+          </a:p>
+        </p:txBody>
+      </p:sp>
+      <p:sp>
+        <p:nvSpPr>
+          <p:cNvPr id="8" name="Rounded Rectangle 7"/>
+          <p:cNvSpPr/>
+          <p:nvPr/>
+        </p:nvSpPr>
+        <p:spPr>
+          <a:xfrm>
+            <a:off x="4206240" y="1737360"/>
+            <a:ext cx="3474720" cy="3474720"/>
+          </a:xfrm>
+          <a:prstGeom prst="roundRect">
+            <a:avLst/>
+          </a:prstGeom>
+          <a:solidFill>
+            <a:srgbClr val="141A2A"/>
+          </a:solidFill>
+          <a:ln w="19050">
+            <a:solidFill>
+              <a:srgbClr val="14B8A6"/>
+            </a:solidFill>
+          </a:ln>
+        </p:spPr>
+        <p:style>
+          <a:lnRef idx="1">
+            <a:schemeClr val="accent1"/>
+          </a:lnRef>
+          <a:fillRef idx="3">
+            <a:schemeClr val="accent1"/>
+          </a:fillRef>
+          <a:effectRef idx="2">
+            <a:schemeClr val="accent1"/>
+          </a:effectRef>
+          <a:fontRef idx="minor">
+            <a:schemeClr val="lt1"/>
+          </a:fontRef>
+        </p:style>
+        <p:txBody>
+          <a:bodyPr rtlCol="0" anchor="ctr"/>
+          <a:lstStyle/>
+          <a:p>
+            <a:pPr algn="ctr"/>
+          </a:p>
+        </p:txBody>
+      </p:sp>
+      <p:sp>
+        <p:nvSpPr>
+          <p:cNvPr id="9" name="TextBox 8"/>
+          <p:cNvSpPr txBox="1"/>
+          <p:nvPr/>
+        </p:nvSpPr>
+        <p:spPr>
+          <a:xfrm>
+            <a:off x="4389120" y="1920240"/>
+            <a:ext cx="3108960" cy="457200"/>
+          </a:xfrm>
+          <a:prstGeom prst="rect">
+            <a:avLst/>
+          </a:prstGeom>
+          <a:noFill/>
+        </p:spPr>
+        <p:txBody>
+          <a:bodyPr wrap="none">
+            <a:spAutoFit/>
+          </a:bodyPr>
+          <a:lstStyle/>
+          <a:p>
+            <a:pPr algn="ctr">
+              <a:defRPr sz="3000"/>
+            </a:pPr>
+            <a:r>
+              <a:t>🧠</a:t>
+            </a:r>
+          </a:p>
+        </p:txBody>
+      </p:sp>
+      <p:sp>
+        <p:nvSpPr>
+          <p:cNvPr id="10" name="TextBox 9"/>
+          <p:cNvSpPr txBox="1"/>
+          <p:nvPr/>
+        </p:nvSpPr>
+        <p:spPr>
+          <a:xfrm>
+            <a:off x="4389120" y="2377440"/>
+            <a:ext cx="3108960" cy="640080"/>
+          </a:xfrm>
+          <a:prstGeom prst="rect">
+            <a:avLst/>
+          </a:prstGeom>
+          <a:noFill/>
+        </p:spPr>
+        <p:txBody>
+          <a:bodyPr wrap="square">
+            <a:spAutoFit/>
+          </a:bodyPr>
+          <a:lstStyle/>
+          <a:p>
+            <a:pPr algn="ctr">
+              <a:defRPr sz="1800" b="1">
+                <a:solidFill>
+                  <a:srgbClr val="FFFFFF"/>
+                </a:solidFill>
+              </a:defRPr>
+            </a:pPr>
+            <a:r>
+              <a:t>Generate Memory</a:t>
+            </a:r>
+            <a:br/>
+            <a:r>
+              <a:t>from History</a:t>
+            </a:r>
+          </a:p>
+        </p:txBody>
+      </p:sp>
+      <p:sp>
+        <p:nvSpPr>
+          <p:cNvPr id="11" name="TextBox 10"/>
+          <p:cNvSpPr txBox="1"/>
+          <p:nvPr/>
+        </p:nvSpPr>
+        <p:spPr>
+          <a:xfrm>
+            <a:off x="4389120" y="3108960"/>
+            <a:ext cx="3108960" cy="1828800"/>
+          </a:xfrm>
+          <a:prstGeom prst="rect">
+            <a:avLst/>
+          </a:prstGeom>
+          <a:noFill/>
+        </p:spPr>
+        <p:txBody>
+          <a:bodyPr wrap="square">
+            <a:spAutoFit/>
+          </a:bodyPr>
+          <a:lstStyle/>
+          <a:p>
+            <a:pPr algn="ctr">
+              <a:defRPr sz="1400">
+                <a:solidFill>
+                  <a:srgbClr val="D1D5DB"/>
+                </a:solidFill>
+              </a:defRPr>
+            </a:pPr>
+            <a:r>
+              <a:t>Claude builds memory</a:t>
+            </a:r>
+            <a:br/>
+            <a:r>
+              <a:t>from your chat patterns.</a:t>
+            </a:r>
+            <a:br/>
+            <a:r>
+              <a:t>Remembers preferences,</a:t>
+            </a:r>
+            <a:br/>
+            <a:r>
+              <a:t>projects, and context.</a:t>
+            </a:r>
+            <a:br/>
+            <a:r>
+              <a:t>Controls both chats</a:t>
+            </a:r>
+            <a:br/>
+            <a:r>
+              <a:t>and Projects.</a:t>
+            </a:r>
+          </a:p>
+        </p:txBody>
+      </p:sp>
+      <p:sp>
+        <p:nvSpPr>
+          <p:cNvPr id="12" name="Rounded Rectangle 11"/>
+          <p:cNvSpPr/>
+          <p:nvPr/>
+        </p:nvSpPr>
+        <p:spPr>
+          <a:xfrm>
+            <a:off x="7955279" y="1737360"/>
+            <a:ext cx="3474720" cy="3474720"/>
+          </a:xfrm>
+          <a:prstGeom prst="roundRect">
+            <a:avLst/>
+          </a:prstGeom>
+          <a:solidFill>
+            <a:srgbClr val="141A2A"/>
+          </a:solidFill>
+          <a:ln w="19050">
+            <a:solidFill>
+              <a:srgbClr val="14B8A6"/>
+            </a:solidFill>
+          </a:ln>
+        </p:spPr>
+        <p:style>
+          <a:lnRef idx="1">
+            <a:schemeClr val="accent1"/>
+          </a:lnRef>
+          <a:fillRef idx="3">
+            <a:schemeClr val="accent1"/>
+          </a:fillRef>
+          <a:effectRef idx="2">
+            <a:schemeClr val="accent1"/>
+          </a:effectRef>
+          <a:fontRef idx="minor">
+            <a:schemeClr val="lt1"/>
+          </a:fontRef>
+        </p:style>
+        <p:txBody>
+          <a:bodyPr rtlCol="0" anchor="ctr"/>
+          <a:lstStyle/>
+          <a:p>
+            <a:pPr algn="ctr"/>
+          </a:p>
+        </p:txBody>
+      </p:sp>
+      <p:sp>
+        <p:nvSpPr>
+          <p:cNvPr id="13" name="TextBox 12"/>
+          <p:cNvSpPr txBox="1"/>
+          <p:nvPr/>
+        </p:nvSpPr>
+        <p:spPr>
+          <a:xfrm>
+            <a:off x="8138159" y="1920240"/>
+            <a:ext cx="3108960" cy="457200"/>
+          </a:xfrm>
+          <a:prstGeom prst="rect">
+            <a:avLst/>
+          </a:prstGeom>
+          <a:noFill/>
+        </p:spPr>
+        <p:txBody>
+          <a:bodyPr wrap="none">
+            <a:spAutoFit/>
+          </a:bodyPr>
+          <a:lstStyle/>
+          <a:p>
+            <a:pPr algn="ctr">
+              <a:defRPr sz="3000"/>
+            </a:pPr>
+            <a:r>
+              <a:t>👁️</a:t>
+            </a:r>
+          </a:p>
+        </p:txBody>
+      </p:sp>
+      <p:sp>
+        <p:nvSpPr>
+          <p:cNvPr id="14" name="TextBox 13"/>
+          <p:cNvSpPr txBox="1"/>
+          <p:nvPr/>
+        </p:nvSpPr>
+        <p:spPr>
+          <a:xfrm>
+            <a:off x="8138159" y="2377440"/>
+            <a:ext cx="3108960" cy="640080"/>
+          </a:xfrm>
+          <a:prstGeom prst="rect">
+            <a:avLst/>
+          </a:prstGeom>
+          <a:noFill/>
+        </p:spPr>
+        <p:txBody>
+          <a:bodyPr wrap="square">
+            <a:spAutoFit/>
+          </a:bodyPr>
+          <a:lstStyle/>
+          <a:p>
+            <a:pPr algn="ctr">
+              <a:defRPr sz="1800" b="1">
+                <a:solidFill>
+                  <a:srgbClr val="FFFFFF"/>
+                </a:solidFill>
+              </a:defRPr>
+            </a:pPr>
+            <a:r>
+              <a:t>View Your Memory</a:t>
+            </a:r>
+          </a:p>
+        </p:txBody>
+      </p:sp>
+      <p:sp>
+        <p:nvSpPr>
+          <p:cNvPr id="15" name="TextBox 14"/>
+          <p:cNvSpPr txBox="1"/>
+          <p:nvPr/>
+        </p:nvSpPr>
+        <p:spPr>
+          <a:xfrm>
+            <a:off x="8138159" y="3108960"/>
+            <a:ext cx="3108960" cy="1828800"/>
+          </a:xfrm>
+          <a:prstGeom prst="rect">
+            <a:avLst/>
+          </a:prstGeom>
+          <a:noFill/>
+        </p:spPr>
+        <p:txBody>
+          <a:bodyPr wrap="square">
+            <a:spAutoFit/>
+          </a:bodyPr>
+          <a:lstStyle/>
+          <a:p>
+            <a:pPr algn="ctr">
+              <a:defRPr sz="1400">
+                <a:solidFill>
+                  <a:srgbClr val="D1D5DB"/>
+                </a:solidFill>
+              </a:defRPr>
+            </a:pPr>
+            <a:r>
+              <a:t>See exactly what Claude</a:t>
+            </a:r>
+            <a:br/>
+            <a:r>
+              <a:t>remembers about you.</a:t>
+            </a:r>
+            <a:br/>
+            <a:r>
+              <a:t>Edit or delete entries.</a:t>
+            </a:r>
+            <a:br/>
+            <a:r>
+              <a:t>Full transparency —</a:t>
+            </a:r>
+            <a:br/>
+            <a:r>
+              <a:t>no hidden knowledge.</a:t>
+            </a:r>
+          </a:p>
+        </p:txBody>
+      </p:sp>
+      <p:sp>
+        <p:nvSpPr>
+          <p:cNvPr id="16" name="TextBox 15"/>
+          <p:cNvSpPr txBox="1"/>
+          <p:nvPr/>
+        </p:nvSpPr>
+        <p:spPr>
+          <a:xfrm>
+            <a:off x="457200" y="5486400"/>
+            <a:ext cx="11247120" cy="457200"/>
+          </a:xfrm>
+          <a:prstGeom prst="rect">
+            <a:avLst/>
+          </a:prstGeom>
+          <a:noFill/>
+        </p:spPr>
+        <p:txBody>
+          <a:bodyPr wrap="none">
+            <a:spAutoFit/>
+          </a:bodyPr>
+          <a:lstStyle/>
+          <a:p>
+            <a:pPr algn="ctr">
+              <a:defRPr sz="1500" i="1">
+                <a:solidFill>
+                  <a:srgbClr val="14B8A6"/>
+                </a:solidFill>
+              </a:defRPr>
+            </a:pPr>
+            <a:r>
+              <a:t>Settings → Memory → Enable both toggles for the best experience</a:t>
+            </a:r>
+          </a:p>
+        </p:txBody>
+      </p:sp>
+    </p:spTree>
+  </p:cSld>
+  <p:clrMapOvr>
+    <a:masterClrMapping/>
+  </p:clrMapOvr>
+</p:sld>
+</file>
+
 <file path=ppt/slides/slide36.xml><?xml version="1.0" encoding="utf-8"?>
 <p:sld xmlns:a="http://schemas.openxmlformats.org/drawingml/2006/main" xmlns:p="http://schemas.openxmlformats.org/presentationml/2006/main" xmlns:r="http://schemas.openxmlformats.org/officeDocument/2006/relationships">
   <p:cSld>
@@ -52020,8 +52650,8 @@
         </p:nvSpPr>
         <p:spPr>
           <a:xfrm>
-            <a:off x="457200" y="274320"/>
-            <a:ext cx="11247120" cy="822960"/>
+            <a:off x="457200" y="2286000"/>
+            <a:ext cx="11247120" cy="1371600"/>
           </a:xfrm>
           <a:prstGeom prst="rect">
             <a:avLst/>
@@ -52034,15 +52664,15 @@
           </a:bodyPr>
           <a:lstStyle/>
           <a:p>
-            <a:pPr>
-              <a:defRPr sz="4000" b="1">
+            <a:pPr algn="ctr">
+              <a:defRPr sz="5600" b="1">
                 <a:solidFill>
                   <a:srgbClr val="FFFFFF"/>
                 </a:solidFill>
               </a:defRPr>
             </a:pPr>
             <a:r>
-              <a:t>Claude's Memory</a:t>
+              <a:t>Thank You</a:t>
             </a:r>
           </a:p>
         </p:txBody>
@@ -52055,7 +52685,7 @@
         </p:nvSpPr>
         <p:spPr>
           <a:xfrm>
-            <a:off x="457200" y="1005840"/>
+            <a:off x="457200" y="3657600"/>
             <a:ext cx="11247120" cy="457200"/>
           </a:xfrm>
           <a:prstGeom prst="rect">
@@ -52069,548 +52699,15 @@
           </a:bodyPr>
           <a:lstStyle/>
           <a:p>
-            <a:pPr>
-              <a:defRPr sz="1800" i="1">
-                <a:solidFill>
-                  <a:srgbClr val="9CA3AF"/>
-                </a:solidFill>
-              </a:defRPr>
-            </a:pPr>
-            <a:r>
-              <a:t>Claude remembers context across conversations — so you don't have to repeat yourself</a:t>
-            </a:r>
-          </a:p>
-        </p:txBody>
-      </p:sp>
-      <p:sp>
-        <p:nvSpPr>
-          <p:cNvPr id="4" name="Rounded Rectangle 3"/>
-          <p:cNvSpPr/>
-          <p:nvPr/>
-        </p:nvSpPr>
-        <p:spPr>
-          <a:xfrm>
-            <a:off x="457200" y="1737360"/>
-            <a:ext cx="3474720" cy="3474720"/>
-          </a:xfrm>
-          <a:prstGeom prst="roundRect">
-            <a:avLst/>
-          </a:prstGeom>
-          <a:solidFill>
-            <a:srgbClr val="141A2A"/>
-          </a:solidFill>
-          <a:ln w="19050">
-            <a:solidFill>
-              <a:srgbClr val="14B8A6"/>
-            </a:solidFill>
-          </a:ln>
-        </p:spPr>
-        <p:style>
-          <a:lnRef idx="1">
-            <a:schemeClr val="accent1"/>
-          </a:lnRef>
-          <a:fillRef idx="3">
-            <a:schemeClr val="accent1"/>
-          </a:fillRef>
-          <a:effectRef idx="2">
-            <a:schemeClr val="accent1"/>
-          </a:effectRef>
-          <a:fontRef idx="minor">
-            <a:schemeClr val="lt1"/>
-          </a:fontRef>
-        </p:style>
-        <p:txBody>
-          <a:bodyPr rtlCol="0" anchor="ctr"/>
-          <a:lstStyle/>
-          <a:p>
-            <a:pPr algn="ctr"/>
-          </a:p>
-        </p:txBody>
-      </p:sp>
-      <p:sp>
-        <p:nvSpPr>
-          <p:cNvPr id="5" name="TextBox 4"/>
-          <p:cNvSpPr txBox="1"/>
-          <p:nvPr/>
-        </p:nvSpPr>
-        <p:spPr>
-          <a:xfrm>
-            <a:off x="640080" y="1920240"/>
-            <a:ext cx="3108960" cy="457200"/>
-          </a:xfrm>
-          <a:prstGeom prst="rect">
-            <a:avLst/>
-          </a:prstGeom>
-          <a:noFill/>
-        </p:spPr>
-        <p:txBody>
-          <a:bodyPr wrap="none">
-            <a:spAutoFit/>
-          </a:bodyPr>
-          <a:lstStyle/>
-          <a:p>
             <a:pPr algn="ctr">
-              <a:defRPr sz="3000"/>
-            </a:pPr>
-            <a:r>
-              <a:t>🔍</a:t>
-            </a:r>
-          </a:p>
-        </p:txBody>
-      </p:sp>
-      <p:sp>
-        <p:nvSpPr>
-          <p:cNvPr id="6" name="TextBox 5"/>
-          <p:cNvSpPr txBox="1"/>
-          <p:nvPr/>
-        </p:nvSpPr>
-        <p:spPr>
-          <a:xfrm>
-            <a:off x="640080" y="2377440"/>
-            <a:ext cx="3108960" cy="640080"/>
-          </a:xfrm>
-          <a:prstGeom prst="rect">
-            <a:avLst/>
-          </a:prstGeom>
-          <a:noFill/>
-        </p:spPr>
-        <p:txBody>
-          <a:bodyPr wrap="square">
-            <a:spAutoFit/>
-          </a:bodyPr>
-          <a:lstStyle/>
-          <a:p>
-            <a:pPr algn="ctr">
-              <a:defRPr sz="1800" b="1">
-                <a:solidFill>
-                  <a:srgbClr val="FFFFFF"/>
-                </a:solidFill>
-              </a:defRPr>
-            </a:pPr>
-            <a:r>
-              <a:t>Search &amp; Reference</a:t>
-            </a:r>
-            <a:br/>
-            <a:r>
-              <a:t>Past Chats</a:t>
-            </a:r>
-          </a:p>
-        </p:txBody>
-      </p:sp>
-      <p:sp>
-        <p:nvSpPr>
-          <p:cNvPr id="7" name="TextBox 6"/>
-          <p:cNvSpPr txBox="1"/>
-          <p:nvPr/>
-        </p:nvSpPr>
-        <p:spPr>
-          <a:xfrm>
-            <a:off x="640080" y="3108960"/>
-            <a:ext cx="3108960" cy="1828800"/>
-          </a:xfrm>
-          <a:prstGeom prst="rect">
-            <a:avLst/>
-          </a:prstGeom>
-          <a:noFill/>
-        </p:spPr>
-        <p:txBody>
-          <a:bodyPr wrap="square">
-            <a:spAutoFit/>
-          </a:bodyPr>
-          <a:lstStyle/>
-          <a:p>
-            <a:pPr algn="ctr">
-              <a:defRPr sz="1400">
-                <a:solidFill>
-                  <a:srgbClr val="D1D5DB"/>
-                </a:solidFill>
-              </a:defRPr>
-            </a:pPr>
-            <a:r>
-              <a:t>Claude searches your</a:t>
-            </a:r>
-            <a:br/>
-            <a:r>
-              <a:t>previous conversations</a:t>
-            </a:r>
-            <a:br/>
-            <a:r>
-              <a:t>for relevant context.</a:t>
-            </a:r>
-            <a:br/>
-            <a:r>
-              <a:t>Finds details you forgot.</a:t>
-            </a:r>
-            <a:br/>
-            <a:r>
-              <a:t>Works across all chats.</a:t>
-            </a:r>
-          </a:p>
-        </p:txBody>
-      </p:sp>
-      <p:sp>
-        <p:nvSpPr>
-          <p:cNvPr id="8" name="Rounded Rectangle 7"/>
-          <p:cNvSpPr/>
-          <p:nvPr/>
-        </p:nvSpPr>
-        <p:spPr>
-          <a:xfrm>
-            <a:off x="4206240" y="1737360"/>
-            <a:ext cx="3474720" cy="3474720"/>
-          </a:xfrm>
-          <a:prstGeom prst="roundRect">
-            <a:avLst/>
-          </a:prstGeom>
-          <a:solidFill>
-            <a:srgbClr val="141A2A"/>
-          </a:solidFill>
-          <a:ln w="19050">
-            <a:solidFill>
-              <a:srgbClr val="14B8A6"/>
-            </a:solidFill>
-          </a:ln>
-        </p:spPr>
-        <p:style>
-          <a:lnRef idx="1">
-            <a:schemeClr val="accent1"/>
-          </a:lnRef>
-          <a:fillRef idx="3">
-            <a:schemeClr val="accent1"/>
-          </a:fillRef>
-          <a:effectRef idx="2">
-            <a:schemeClr val="accent1"/>
-          </a:effectRef>
-          <a:fontRef idx="minor">
-            <a:schemeClr val="lt1"/>
-          </a:fontRef>
-        </p:style>
-        <p:txBody>
-          <a:bodyPr rtlCol="0" anchor="ctr"/>
-          <a:lstStyle/>
-          <a:p>
-            <a:pPr algn="ctr"/>
-          </a:p>
-        </p:txBody>
-      </p:sp>
-      <p:sp>
-        <p:nvSpPr>
-          <p:cNvPr id="9" name="TextBox 8"/>
-          <p:cNvSpPr txBox="1"/>
-          <p:nvPr/>
-        </p:nvSpPr>
-        <p:spPr>
-          <a:xfrm>
-            <a:off x="4389120" y="1920240"/>
-            <a:ext cx="3108960" cy="457200"/>
-          </a:xfrm>
-          <a:prstGeom prst="rect">
-            <a:avLst/>
-          </a:prstGeom>
-          <a:noFill/>
-        </p:spPr>
-        <p:txBody>
-          <a:bodyPr wrap="none">
-            <a:spAutoFit/>
-          </a:bodyPr>
-          <a:lstStyle/>
-          <a:p>
-            <a:pPr algn="ctr">
-              <a:defRPr sz="3000"/>
-            </a:pPr>
-            <a:r>
-              <a:t>🧠</a:t>
-            </a:r>
-          </a:p>
-        </p:txBody>
-      </p:sp>
-      <p:sp>
-        <p:nvSpPr>
-          <p:cNvPr id="10" name="TextBox 9"/>
-          <p:cNvSpPr txBox="1"/>
-          <p:nvPr/>
-        </p:nvSpPr>
-        <p:spPr>
-          <a:xfrm>
-            <a:off x="4389120" y="2377440"/>
-            <a:ext cx="3108960" cy="640080"/>
-          </a:xfrm>
-          <a:prstGeom prst="rect">
-            <a:avLst/>
-          </a:prstGeom>
-          <a:noFill/>
-        </p:spPr>
-        <p:txBody>
-          <a:bodyPr wrap="square">
-            <a:spAutoFit/>
-          </a:bodyPr>
-          <a:lstStyle/>
-          <a:p>
-            <a:pPr algn="ctr">
-              <a:defRPr sz="1800" b="1">
-                <a:solidFill>
-                  <a:srgbClr val="FFFFFF"/>
-                </a:solidFill>
-              </a:defRPr>
-            </a:pPr>
-            <a:r>
-              <a:t>Generate Memory</a:t>
-            </a:r>
-            <a:br/>
-            <a:r>
-              <a:t>from History</a:t>
-            </a:r>
-          </a:p>
-        </p:txBody>
-      </p:sp>
-      <p:sp>
-        <p:nvSpPr>
-          <p:cNvPr id="11" name="TextBox 10"/>
-          <p:cNvSpPr txBox="1"/>
-          <p:nvPr/>
-        </p:nvSpPr>
-        <p:spPr>
-          <a:xfrm>
-            <a:off x="4389120" y="3108960"/>
-            <a:ext cx="3108960" cy="1828800"/>
-          </a:xfrm>
-          <a:prstGeom prst="rect">
-            <a:avLst/>
-          </a:prstGeom>
-          <a:noFill/>
-        </p:spPr>
-        <p:txBody>
-          <a:bodyPr wrap="square">
-            <a:spAutoFit/>
-          </a:bodyPr>
-          <a:lstStyle/>
-          <a:p>
-            <a:pPr algn="ctr">
-              <a:defRPr sz="1400">
-                <a:solidFill>
-                  <a:srgbClr val="D1D5DB"/>
-                </a:solidFill>
-              </a:defRPr>
-            </a:pPr>
-            <a:r>
-              <a:t>Claude builds memory</a:t>
-            </a:r>
-            <a:br/>
-            <a:r>
-              <a:t>from your chat patterns.</a:t>
-            </a:r>
-            <a:br/>
-            <a:r>
-              <a:t>Remembers preferences,</a:t>
-            </a:r>
-            <a:br/>
-            <a:r>
-              <a:t>projects, and context.</a:t>
-            </a:r>
-            <a:br/>
-            <a:r>
-              <a:t>Controls both chats</a:t>
-            </a:r>
-            <a:br/>
-            <a:r>
-              <a:t>and Projects.</a:t>
-            </a:r>
-          </a:p>
-        </p:txBody>
-      </p:sp>
-      <p:sp>
-        <p:nvSpPr>
-          <p:cNvPr id="12" name="Rounded Rectangle 11"/>
-          <p:cNvSpPr/>
-          <p:nvPr/>
-        </p:nvSpPr>
-        <p:spPr>
-          <a:xfrm>
-            <a:off x="7955279" y="1737360"/>
-            <a:ext cx="3474720" cy="3474720"/>
-          </a:xfrm>
-          <a:prstGeom prst="roundRect">
-            <a:avLst/>
-          </a:prstGeom>
-          <a:solidFill>
-            <a:srgbClr val="141A2A"/>
-          </a:solidFill>
-          <a:ln w="19050">
-            <a:solidFill>
-              <a:srgbClr val="14B8A6"/>
-            </a:solidFill>
-          </a:ln>
-        </p:spPr>
-        <p:style>
-          <a:lnRef idx="1">
-            <a:schemeClr val="accent1"/>
-          </a:lnRef>
-          <a:fillRef idx="3">
-            <a:schemeClr val="accent1"/>
-          </a:fillRef>
-          <a:effectRef idx="2">
-            <a:schemeClr val="accent1"/>
-          </a:effectRef>
-          <a:fontRef idx="minor">
-            <a:schemeClr val="lt1"/>
-          </a:fontRef>
-        </p:style>
-        <p:txBody>
-          <a:bodyPr rtlCol="0" anchor="ctr"/>
-          <a:lstStyle/>
-          <a:p>
-            <a:pPr algn="ctr"/>
-          </a:p>
-        </p:txBody>
-      </p:sp>
-      <p:sp>
-        <p:nvSpPr>
-          <p:cNvPr id="13" name="TextBox 12"/>
-          <p:cNvSpPr txBox="1"/>
-          <p:nvPr/>
-        </p:nvSpPr>
-        <p:spPr>
-          <a:xfrm>
-            <a:off x="8138159" y="1920240"/>
-            <a:ext cx="3108960" cy="457200"/>
-          </a:xfrm>
-          <a:prstGeom prst="rect">
-            <a:avLst/>
-          </a:prstGeom>
-          <a:noFill/>
-        </p:spPr>
-        <p:txBody>
-          <a:bodyPr wrap="none">
-            <a:spAutoFit/>
-          </a:bodyPr>
-          <a:lstStyle/>
-          <a:p>
-            <a:pPr algn="ctr">
-              <a:defRPr sz="3000"/>
-            </a:pPr>
-            <a:r>
-              <a:t>👁️</a:t>
-            </a:r>
-          </a:p>
-        </p:txBody>
-      </p:sp>
-      <p:sp>
-        <p:nvSpPr>
-          <p:cNvPr id="14" name="TextBox 13"/>
-          <p:cNvSpPr txBox="1"/>
-          <p:nvPr/>
-        </p:nvSpPr>
-        <p:spPr>
-          <a:xfrm>
-            <a:off x="8138159" y="2377440"/>
-            <a:ext cx="3108960" cy="640080"/>
-          </a:xfrm>
-          <a:prstGeom prst="rect">
-            <a:avLst/>
-          </a:prstGeom>
-          <a:noFill/>
-        </p:spPr>
-        <p:txBody>
-          <a:bodyPr wrap="square">
-            <a:spAutoFit/>
-          </a:bodyPr>
-          <a:lstStyle/>
-          <a:p>
-            <a:pPr algn="ctr">
-              <a:defRPr sz="1800" b="1">
-                <a:solidFill>
-                  <a:srgbClr val="FFFFFF"/>
-                </a:solidFill>
-              </a:defRPr>
-            </a:pPr>
-            <a:r>
-              <a:t>View Your Memory</a:t>
-            </a:r>
-          </a:p>
-        </p:txBody>
-      </p:sp>
-      <p:sp>
-        <p:nvSpPr>
-          <p:cNvPr id="15" name="TextBox 14"/>
-          <p:cNvSpPr txBox="1"/>
-          <p:nvPr/>
-        </p:nvSpPr>
-        <p:spPr>
-          <a:xfrm>
-            <a:off x="8138159" y="3108960"/>
-            <a:ext cx="3108960" cy="1828800"/>
-          </a:xfrm>
-          <a:prstGeom prst="rect">
-            <a:avLst/>
-          </a:prstGeom>
-          <a:noFill/>
-        </p:spPr>
-        <p:txBody>
-          <a:bodyPr wrap="square">
-            <a:spAutoFit/>
-          </a:bodyPr>
-          <a:lstStyle/>
-          <a:p>
-            <a:pPr algn="ctr">
-              <a:defRPr sz="1400">
-                <a:solidFill>
-                  <a:srgbClr val="D1D5DB"/>
-                </a:solidFill>
-              </a:defRPr>
-            </a:pPr>
-            <a:r>
-              <a:t>See exactly what Claude</a:t>
-            </a:r>
-            <a:br/>
-            <a:r>
-              <a:t>remembers about you.</a:t>
-            </a:r>
-            <a:br/>
-            <a:r>
-              <a:t>Edit or delete entries.</a:t>
-            </a:r>
-            <a:br/>
-            <a:r>
-              <a:t>Full transparency —</a:t>
-            </a:r>
-            <a:br/>
-            <a:r>
-              <a:t>no hidden knowledge.</a:t>
-            </a:r>
-          </a:p>
-        </p:txBody>
-      </p:sp>
-      <p:sp>
-        <p:nvSpPr>
-          <p:cNvPr id="16" name="TextBox 15"/>
-          <p:cNvSpPr txBox="1"/>
-          <p:nvPr/>
-        </p:nvSpPr>
-        <p:spPr>
-          <a:xfrm>
-            <a:off x="457200" y="5486400"/>
-            <a:ext cx="11247120" cy="457200"/>
-          </a:xfrm>
-          <a:prstGeom prst="rect">
-            <a:avLst/>
-          </a:prstGeom>
-          <a:noFill/>
-        </p:spPr>
-        <p:txBody>
-          <a:bodyPr wrap="none">
-            <a:spAutoFit/>
-          </a:bodyPr>
-          <a:lstStyle/>
-          <a:p>
-            <a:pPr algn="ctr">
-              <a:defRPr sz="1500" i="1">
+              <a:defRPr sz="2000">
                 <a:solidFill>
                   <a:srgbClr val="14B8A6"/>
                 </a:solidFill>
               </a:defRPr>
             </a:pPr>
             <a:r>
-              <a:t>Settings → Memory → Enable both toggles for the best experience</a:t>
+              <a:t>scott@aiacopilot.com  •  aiacopilot.com</a:t>
             </a:r>
           </a:p>
         </p:txBody>

--- a/slides/Day1_Claude_for_Business.pptx
+++ b/slides/Day1_Claude_for_Business.pptx
@@ -28529,7 +28529,7 @@
         <p:spPr>
           <a:xfrm>
             <a:off x="457200" y="1737360"/>
-            <a:ext cx="5303520" cy="3931920"/>
+            <a:ext cx="5303520" cy="4114800"/>
           </a:xfrm>
           <a:prstGeom prst="roundRect">
             <a:avLst/>
@@ -28609,7 +28609,7 @@
         <p:spPr>
           <a:xfrm>
             <a:off x="731520" y="2468880"/>
-            <a:ext cx="4754880" cy="2926080"/>
+            <a:ext cx="4754880" cy="3108960"/>
           </a:xfrm>
           <a:prstGeom prst="rect">
             <a:avLst/>
@@ -28624,9 +28624,9 @@
           <a:p>
             <a:pPr>
               <a:spcAft>
-                <a:spcPts val="800"/>
+                <a:spcPts val="600"/>
               </a:spcAft>
-              <a:defRPr sz="1600">
+              <a:defRPr sz="1500">
                 <a:solidFill>
                   <a:srgbClr val="D1D5DB"/>
                 </a:solidFill>
@@ -28639,39 +28639,39 @@
           <a:p>
             <a:pPr>
               <a:spcAft>
-                <a:spcPts val="800"/>
+                <a:spcPts val="600"/>
               </a:spcAft>
-              <a:defRPr sz="1600">
+              <a:defRPr sz="1500">
                 <a:solidFill>
                   <a:srgbClr val="D1D5DB"/>
                 </a:solidFill>
               </a:defRPr>
             </a:pPr>
             <a:r>
-              <a:t>✅  Code execution &amp; file creation — docs, spreadsheets, PPTs, PDFs</a:t>
+              <a:t>✅  AI-powered artifacts — interactive apps &amp; prototypes</a:t>
             </a:r>
           </a:p>
           <a:p>
             <a:pPr>
               <a:spcAft>
-                <a:spcPts val="800"/>
+                <a:spcPts val="600"/>
               </a:spcAft>
-              <a:defRPr sz="1600">
+              <a:defRPr sz="1500">
                 <a:solidFill>
                   <a:srgbClr val="D1D5DB"/>
                 </a:solidFill>
               </a:defRPr>
             </a:pPr>
             <a:r>
-              <a:t>✅  Web search — Claude finds current information automatically</a:t>
+              <a:t>✅  Code execution &amp; file creation</a:t>
             </a:r>
           </a:p>
           <a:p>
             <a:pPr>
               <a:spcAft>
-                <a:spcPts val="800"/>
+                <a:spcPts val="600"/>
               </a:spcAft>
-              <a:defRPr sz="1600">
+              <a:defRPr sz="1500">
                 <a:solidFill>
                   <a:srgbClr val="D1D5DB"/>
                 </a:solidFill>
@@ -28679,6 +28679,21 @@
             </a:pPr>
             <a:r>
               <a:t>✅  Memory — search past chats + learn from history</a:t>
+            </a:r>
+          </a:p>
+          <a:p>
+            <a:pPr>
+              <a:spcAft>
+                <a:spcPts val="600"/>
+              </a:spcAft>
+              <a:defRPr sz="1500">
+                <a:solidFill>
+                  <a:srgbClr val="D1D5DB"/>
+                </a:solidFill>
+              </a:defRPr>
+            </a:pPr>
+            <a:r>
+              <a:t>✅  Skills — repeatable instructions for any chat</a:t>
             </a:r>
           </a:p>
         </p:txBody>
@@ -28692,7 +28707,7 @@
         <p:spPr>
           <a:xfrm>
             <a:off x="6217920" y="1737360"/>
-            <a:ext cx="5303520" cy="3931920"/>
+            <a:ext cx="5303520" cy="4114800"/>
           </a:xfrm>
           <a:prstGeom prst="roundRect">
             <a:avLst/>
@@ -28758,7 +28773,7 @@
               </a:defRPr>
             </a:pPr>
             <a:r>
-              <a:t>Privacy Controls</a:t>
+              <a:t>Privacy Settings</a:t>
             </a:r>
           </a:p>
         </p:txBody>
@@ -28772,7 +28787,7 @@
         <p:spPr>
           <a:xfrm>
             <a:off x="6492240" y="2468880"/>
-            <a:ext cx="4754880" cy="2926080"/>
+            <a:ext cx="4754880" cy="3108960"/>
           </a:xfrm>
           <a:prstGeom prst="rect">
             <a:avLst/>
@@ -28787,61 +28802,91 @@
           <a:p>
             <a:pPr>
               <a:spcAft>
-                <a:spcPts val="800"/>
+                <a:spcPts val="600"/>
               </a:spcAft>
-              <a:defRPr sz="1600">
+              <a:defRPr sz="1500">
                 <a:solidFill>
                   <a:srgbClr val="D1D5DB"/>
                 </a:solidFill>
               </a:defRPr>
             </a:pPr>
             <a:r>
-              <a:t>🔒  Training opt-out — paid plans OFF by default</a:t>
+              <a:t>🔒  "Help improve Claude" — training toggle (OFF on paid)</a:t>
             </a:r>
           </a:p>
           <a:p>
             <a:pPr>
               <a:spcAft>
-                <a:spcPts val="800"/>
+                <a:spcPts val="600"/>
               </a:spcAft>
-              <a:defRPr sz="1600">
+              <a:defRPr sz="1500">
                 <a:solidFill>
                   <a:srgbClr val="D1D5DB"/>
                 </a:solidFill>
               </a:defRPr>
             </a:pPr>
             <a:r>
-              <a:t>🕶️  Incognito chats — not saved, not used for training, not added to memory</a:t>
+              <a:t>📦  Export data — download all your conversations</a:t>
             </a:r>
           </a:p>
           <a:p>
             <a:pPr>
               <a:spcAft>
-                <a:spcPts val="800"/>
+                <a:spcPts val="600"/>
               </a:spcAft>
-              <a:defRPr sz="1600">
+              <a:defRPr sz="1500">
                 <a:solidFill>
                   <a:srgbClr val="D1D5DB"/>
                 </a:solidFill>
               </a:defRPr>
             </a:pPr>
             <a:r>
-              <a:t>⚠️  30-day retention for abuse detection</a:t>
+              <a:t>🔗  Shared chats — control who sees what</a:t>
             </a:r>
           </a:p>
           <a:p>
             <a:pPr>
               <a:spcAft>
-                <a:spcPts val="800"/>
+                <a:spcPts val="600"/>
               </a:spcAft>
-              <a:defRPr sz="1600">
+              <a:defRPr sz="1500">
                 <a:solidFill>
                   <a:srgbClr val="D1D5DB"/>
                 </a:solidFill>
               </a:defRPr>
             </a:pPr>
             <a:r>
-              <a:t>🏢  Team/Enterprise — zero data retention, full isolation</a:t>
+              <a:t>🧠  Memory preferences — view, edit, delete memories</a:t>
+            </a:r>
+          </a:p>
+          <a:p>
+            <a:pPr>
+              <a:spcAft>
+                <a:spcPts val="600"/>
+              </a:spcAft>
+              <a:defRPr sz="1500">
+                <a:solidFill>
+                  <a:srgbClr val="D1D5DB"/>
+                </a:solidFill>
+              </a:defRPr>
+            </a:pPr>
+            <a:r>
+              <a:t>📍  Location metadata — coarse city/region (optional)</a:t>
+            </a:r>
+          </a:p>
+          <a:p>
+            <a:pPr>
+              <a:spcAft>
+                <a:spcPts val="600"/>
+              </a:spcAft>
+              <a:defRPr sz="1500">
+                <a:solidFill>
+                  <a:srgbClr val="D1D5DB"/>
+                </a:solidFill>
+              </a:defRPr>
+            </a:pPr>
+            <a:r>
+              <a:t>🕶️  Incognito chats — not saved, not trained on</a:t>
             </a:r>
           </a:p>
         </p:txBody>

--- a/slides/Day1_Claude_for_Business.pptx
+++ b/slides/Day1_Claude_for_Business.pptx
@@ -44,7 +44,6 @@
     <p:sldId id="337" r:id="rId35"/>
     <p:sldId id="351" r:id="rId95"/>
     <p:sldId id="352" r:id="rId96"/>
-    <p:sldId id="266" r:id="rId36"/>
     <p:sldId id="267" r:id="rId37"/>
     <p:sldId id="272" r:id="rId39"/>
     <p:sldId id="273" r:id="rId40"/>

--- a/slides/Day1_Claude_for_Business.pptx
+++ b/slides/Day1_Claude_for_Business.pptx
@@ -11092,6 +11092,57 @@
           <a:chExt cx="0" cy="0"/>
         </a:xfrm>
       </p:grpSpPr>
+      <p:sp>
+        <p:nvSpPr>
+          <p:cNvPr id="3" name="Notes Placeholder 2"/>
+          <p:cNvSpPr>
+            <a:spLocks noGrp="1"/>
+          </p:cNvSpPr>
+          <p:nvPr>
+            <p:ph type="body" idx="1"/>
+          </p:nvPr>
+        </p:nvSpPr>
+        <p:spPr/>
+        <p:txBody>
+          <a:bodyPr/>
+          <a:lstStyle/>
+          <a:p>
+            <a:r>
+              <a:t>[Duration: 1 minute]</a:t>
+            </a:r>
+          </a:p>
+          <a:p>
+            <a:r>
+              <a:t/>
+            </a:r>
+          </a:p>
+          <a:p>
+            <a:r>
+              <a:t>Thank you all for a great day. You have been an engaged and thoughtful group, and I am confident you will see real productivity gains starting this week.</a:t>
+            </a:r>
+          </a:p>
+          <a:p>
+            <a:r>
+              <a:t/>
+            </a:r>
+          </a:p>
+          <a:p>
+            <a:r>
+              <a:t>Remember: the key to success with AI is consistency. Use Claude a little every day, iterate your prompts, and build it into your routine. The skills you practiced today become second nature within two to three weeks.</a:t>
+            </a:r>
+          </a:p>
+          <a:p>
+            <a:r>
+              <a:t/>
+            </a:r>
+          </a:p>
+          <a:p>
+            <a:r>
+              <a:t>My contact information is on the screen. Do not hesitate to reach out with questions or success stories. Have a great rest of your day.</a:t>
+            </a:r>
+          </a:p>
+        </p:txBody>
+      </p:sp>
     </p:spTree>
   </p:cSld>
   <p:clrMapOvr>

--- a/slides/Day1_Claude_for_Business.pptx
+++ b/slides/Day1_Claude_for_Business.pptx
@@ -6949,6 +6949,10 @@
           </p:nvPr>
         </p:nvSpPr>
         <p:spPr/>
+        <p:txBody>
+          <a:bodyPr/>
+          <a:p/>
+        </p:txBody>
       </p:sp>
       <p:sp>
         <p:nvSpPr>
@@ -6969,9 +6973,7 @@
               <a:t>TIME: 7 min</a:t>
             </a:r>
           </a:p>
-          <a:p>
-            <a:endParaRPr/>
-          </a:p>
+          <a:p/>
           <a:p>
             <a:r>
               <a:t>KEY POINTS:</a:t>
@@ -7012,9 +7014,7 @@
               <a:t>   * Artifacts panel: Appears when Claude generates code, documents, diagrams - you can edit inline</a:t>
             </a:r>
           </a:p>
-          <a:p>
-            <a:endParaRPr/>
-          </a:p>
+          <a:p/>
           <a:p>
             <a:r>
               <a:t>ASK THE CLASS:</a:t>
@@ -7030,9 +7030,7 @@
               <a:t>   [PAUSE for 30-60 seconds]</a:t>
             </a:r>
           </a:p>
-          <a:p>
-            <a:endParaRPr/>
-          </a:p>
+          <a:p/>
           <a:p>
             <a:r>
               <a:t>REAL-WORLD EXAMPLE:</a:t>
@@ -7043,9 +7041,7 @@
               <a:t>   Voice mode example: Instead of typing 'Analyze this sales data, find top 3 trends compared to last quarter, flag any products declining over 15%, create a chart' (takes 30+ seconds to type) - just speak it in 5 seconds. Huge time saver for complex prompts.</a:t>
             </a:r>
           </a:p>
-          <a:p>
-            <a:endParaRPr/>
-          </a:p>
+          <a:p/>
           <a:p>
             <a:r>
               <a:t>DEMO:</a:t>
@@ -7056,9 +7052,7 @@
               <a:t>   LIVE DEMO: Comprehensive UI walkthrough. Open claude.ai, systematically show every UI element students will use: (1) Left sidebar - New chat, Search, Code mode dropdown, Starred/Recents; (2) Chat window - Prompt area, Attachment button (+), Style buttons (Write/Learn/Code/Life stuff/Claude's choice); (3) Top right - Model selector, Voice mode button (microphone icon - emphasize this!); (4) Response area - Artifacts panel. Spend 2 minutes on Voice mode showing the mic button.</a:t>
             </a:r>
           </a:p>
-          <a:p>
-            <a:endParaRPr/>
-          </a:p>
+          <a:p/>
           <a:p>
             <a:r>
               <a:t>TRANSITION:</a:t>
@@ -7067,6 +7061,17 @@
           <a:p>
             <a:r>
               <a:t>   Voice mode is so powerful it deserves its own demo - let's dive deeper</a:t>
+            </a:r>
+          </a:p>
+          <a:p/>
+          <a:p>
+            <a:r>
+              <a:t>[ADDITIONAL CALLOUT: Research Mode]</a:t>
+            </a:r>
+          </a:p>
+          <a:p>
+            <a:r>
+              <a:t>See that Research option in the plus menu? This is Claude's deep research mode. Instead of a quick answer, Claude does multi-step investigation — searches multiple sources, synthesizes findings, takes a few minutes but gives you a thorough briefing. Think of it as assigning a research analyst a question. Great for competitive analysis, market research, or any question where you need depth over speed. We won't lab this today, but try it on your own — ask Claude to research a competitor or an industry trend.</a:t>
             </a:r>
           </a:p>
         </p:txBody>
@@ -7986,6 +7991,10 @@
           </p:nvPr>
         </p:nvSpPr>
         <p:spPr/>
+        <p:txBody>
+          <a:bodyPr/>
+          <a:p/>
+        </p:txBody>
       </p:sp>
       <p:sp>
         <p:nvSpPr>
@@ -8006,9 +8015,7 @@
               <a:t>TIME: 3 min</a:t>
             </a:r>
           </a:p>
-          <a:p>
-            <a:endParaRPr/>
-          </a:p>
+          <a:p/>
           <a:p>
             <a:r>
               <a:t>OPEN WITH:</a:t>
@@ -8019,9 +8026,7 @@
               <a:t>   Instead of uploading files, Claude can read directly from your tools</a:t>
             </a:r>
           </a:p>
-          <a:p>
-            <a:endParaRPr/>
-          </a:p>
+          <a:p/>
           <a:p>
             <a:r>
               <a:t>KEY POINTS:</a:t>
@@ -8047,9 +8052,7 @@
               <a:t>   * Stays in sync with live data</a:t>
             </a:r>
           </a:p>
-          <a:p>
-            <a:endParaRPr/>
-          </a:p>
+          <a:p/>
           <a:p>
             <a:r>
               <a:t>REAL-WORLD EXAMPLE:</a:t>
@@ -8060,9 +8063,7 @@
               <a:t>   Ask 'Review my Google Doc proposal' - Claude opens it, reads it, suggests edits. No download/upload.</a:t>
             </a:r>
           </a:p>
-          <a:p>
-            <a:endParaRPr/>
-          </a:p>
+          <a:p/>
           <a:p>
             <a:r>
               <a:t>TRANSITION:</a:t>
@@ -8071,6 +8072,17 @@
           <a:p>
             <a:r>
               <a:t>   Let's look at each integration</a:t>
+            </a:r>
+          </a:p>
+          <a:p/>
+          <a:p>
+            <a:r>
+              <a:t>[ADDITIONAL CALLOUT: Canva Integration]</a:t>
+            </a:r>
+          </a:p>
+          <a:p>
+            <a:r>
+              <a:t>One integration worth knowing about — Canva. In the plus menu, you'll see 'Add from Canva.' This lets you pull your Canva designs directly into Claude. Why does that matter? You can ask Claude to analyze a marketing flyer, suggest copy improvements, or adapt a design's text for a different audience — all without downloading and uploading files. If your team uses Canva for marketing materials, this is a time-saver.</a:t>
             </a:r>
           </a:p>
         </p:txBody>
@@ -9701,6 +9713,17 @@
           <a:p>
             <a:r>
               <a:t>Let's move on to a brand-new feature that takes personalization even further — Claude's Memory.</a:t>
+            </a:r>
+          </a:p>
+          <a:p/>
+          <a:p>
+            <a:r>
+              <a:t>[ADDITIONAL CALLOUT: Use Style]</a:t>
+            </a:r>
+          </a:p>
+          <a:p>
+            <a:r>
+              <a:t>Quick tip — in the plus menu at the bottom of any chat, you'll see 'Use style.' This lets you apply a preset writing style to that specific conversation. Anthropic includes defaults like Formal, Concise, and Explanatory, but you can also create your own custom styles. Think of it this way: Personal Preferences are your global defaults. Use Style is your per-conversation override. Writing a board report? Switch to Formal. Quick Slack message? Switch to Concise. Preferences set the baseline, styles let you flex.</a:t>
             </a:r>
           </a:p>
         </p:txBody>

--- a/slides/Day1_Claude_for_Business.pptx
+++ b/slides/Day1_Claude_for_Business.pptx
@@ -53,6 +53,7 @@
     <p:sldId id="343" r:id="rId44"/>
     <p:sldId id="298" r:id="rId45"/>
     <p:sldId id="348" r:id="rId46"/>
+    <p:sldId id="356" r:id="rId100"/>
     <p:sldId id="277" r:id="rId47"/>
     <p:sldId id="315" r:id="rId48"/>
     <p:sldId id="279" r:id="rId49"/>
@@ -4480,6 +4481,31 @@
 </p:notes>
 </file>
 
+<file path=ppt/notesSlides/notesSlide31.xml><?xml version="1.0" encoding="utf-8"?>
+<p:notes xmlns:a="http://schemas.openxmlformats.org/drawingml/2006/main" xmlns:p="http://schemas.openxmlformats.org/presentationml/2006/main" xmlns:r="http://schemas.openxmlformats.org/officeDocument/2006/relationships">
+  <p:cSld>
+    <p:spTree>
+      <p:nvGrpSpPr>
+        <p:cNvPr id="1" name=""/>
+        <p:cNvGrpSpPr/>
+        <p:nvPr/>
+      </p:nvGrpSpPr>
+      <p:grpSpPr>
+        <a:xfrm>
+          <a:off x="0" y="0"/>
+          <a:ext cx="0" cy="0"/>
+          <a:chOff x="0" y="0"/>
+          <a:chExt cx="0" cy="0"/>
+        </a:xfrm>
+      </p:grpSpPr>
+    </p:spTree>
+  </p:cSld>
+  <p:clrMapOvr>
+    <a:masterClrMapping/>
+  </p:clrMapOvr>
+</p:notes>
+</file>
+
 <file path=ppt/notesSlides/notesSlide32.xml><?xml version="1.0" encoding="utf-8"?>
 <p:notes xmlns:a="http://schemas.openxmlformats.org/drawingml/2006/main" xmlns:r="http://schemas.openxmlformats.org/officeDocument/2006/relationships" xmlns:p="http://schemas.openxmlformats.org/presentationml/2006/main">
   <p:cSld>
@@ -51332,6 +51358,1082 @@
             </a:pPr>
             <a:r>
               <a:t>scott@aiacopilot.com  •  aiacopilot.com</a:t>
+            </a:r>
+          </a:p>
+        </p:txBody>
+      </p:sp>
+    </p:spTree>
+  </p:cSld>
+  <p:clrMapOvr>
+    <a:masterClrMapping/>
+  </p:clrMapOvr>
+</p:sld>
+</file>
+
+<file path=ppt/slides/slide89.xml><?xml version="1.0" encoding="utf-8"?>
+<p:sld xmlns:a="http://schemas.openxmlformats.org/drawingml/2006/main" xmlns:p="http://schemas.openxmlformats.org/presentationml/2006/main" xmlns:r="http://schemas.openxmlformats.org/officeDocument/2006/relationships">
+  <p:cSld>
+    <p:bg>
+      <p:bgPr>
+        <a:solidFill>
+          <a:srgbClr val="0B0F1A"/>
+        </a:solidFill>
+        <a:effectLst/>
+      </p:bgPr>
+    </p:bg>
+    <p:spTree>
+      <p:nvGrpSpPr>
+        <p:cNvPr id="1" name=""/>
+        <p:cNvGrpSpPr/>
+        <p:nvPr/>
+      </p:nvGrpSpPr>
+      <p:grpSpPr/>
+      <p:sp>
+        <p:nvSpPr>
+          <p:cNvPr id="2" name="TextBox 1"/>
+          <p:cNvSpPr txBox="1"/>
+          <p:nvPr/>
+        </p:nvSpPr>
+        <p:spPr>
+          <a:xfrm>
+            <a:off x="457200" y="274320"/>
+            <a:ext cx="11247120" cy="822960"/>
+          </a:xfrm>
+          <a:prstGeom prst="rect">
+            <a:avLst/>
+          </a:prstGeom>
+          <a:noFill/>
+        </p:spPr>
+        <p:txBody>
+          <a:bodyPr wrap="none">
+            <a:spAutoFit/>
+          </a:bodyPr>
+          <a:lstStyle/>
+          <a:p>
+            <a:pPr>
+              <a:defRPr sz="4000" b="1">
+                <a:solidFill>
+                  <a:srgbClr val="FFFFFF"/>
+                </a:solidFill>
+              </a:defRPr>
+            </a:pPr>
+            <a:r>
+              <a:t>Data Analysis Is Storytelling</a:t>
+            </a:r>
+          </a:p>
+        </p:txBody>
+      </p:sp>
+      <p:sp>
+        <p:nvSpPr>
+          <p:cNvPr id="3" name="TextBox 2"/>
+          <p:cNvSpPr txBox="1"/>
+          <p:nvPr/>
+        </p:nvSpPr>
+        <p:spPr>
+          <a:xfrm>
+            <a:off x="457200" y="1005840"/>
+            <a:ext cx="11247120" cy="457200"/>
+          </a:xfrm>
+          <a:prstGeom prst="rect">
+            <a:avLst/>
+          </a:prstGeom>
+          <a:noFill/>
+        </p:spPr>
+        <p:txBody>
+          <a:bodyPr wrap="none">
+            <a:spAutoFit/>
+          </a:bodyPr>
+          <a:lstStyle/>
+          <a:p>
+            <a:pPr>
+              <a:defRPr sz="1800" i="1">
+                <a:solidFill>
+                  <a:srgbClr val="9CA3AF"/>
+                </a:solidFill>
+              </a:defRPr>
+            </a:pPr>
+            <a:r>
+              <a:t>Know what to ask for — most people stop at level one</a:t>
+            </a:r>
+          </a:p>
+        </p:txBody>
+      </p:sp>
+      <p:sp>
+        <p:nvSpPr>
+          <p:cNvPr id="4" name="Rounded Rectangle 3"/>
+          <p:cNvSpPr/>
+          <p:nvPr/>
+        </p:nvSpPr>
+        <p:spPr>
+          <a:xfrm>
+            <a:off x="274320" y="1737360"/>
+            <a:ext cx="2103120" cy="3931920"/>
+          </a:xfrm>
+          <a:prstGeom prst="roundRect">
+            <a:avLst/>
+          </a:prstGeom>
+          <a:solidFill>
+            <a:srgbClr val="141A2A"/>
+          </a:solidFill>
+          <a:ln w="19050">
+            <a:solidFill>
+              <a:srgbClr val="14B8A6"/>
+            </a:solidFill>
+          </a:ln>
+        </p:spPr>
+        <p:style>
+          <a:lnRef idx="1">
+            <a:schemeClr val="accent1"/>
+          </a:lnRef>
+          <a:fillRef idx="3">
+            <a:schemeClr val="accent1"/>
+          </a:fillRef>
+          <a:effectRef idx="2">
+            <a:schemeClr val="accent1"/>
+          </a:effectRef>
+          <a:fontRef idx="minor">
+            <a:schemeClr val="lt1"/>
+          </a:fontRef>
+        </p:style>
+        <p:txBody>
+          <a:bodyPr rtlCol="0" anchor="ctr"/>
+          <a:lstStyle/>
+          <a:p>
+            <a:pPr algn="ctr"/>
+          </a:p>
+        </p:txBody>
+      </p:sp>
+      <p:sp>
+        <p:nvSpPr>
+          <p:cNvPr id="5" name="TextBox 4"/>
+          <p:cNvSpPr txBox="1"/>
+          <p:nvPr/>
+        </p:nvSpPr>
+        <p:spPr>
+          <a:xfrm>
+            <a:off x="365760" y="1920240"/>
+            <a:ext cx="1920240" cy="457200"/>
+          </a:xfrm>
+          <a:prstGeom prst="rect">
+            <a:avLst/>
+          </a:prstGeom>
+          <a:noFill/>
+        </p:spPr>
+        <p:txBody>
+          <a:bodyPr wrap="none">
+            <a:spAutoFit/>
+          </a:bodyPr>
+          <a:lstStyle/>
+          <a:p>
+            <a:pPr algn="ctr">
+              <a:defRPr sz="2800"/>
+            </a:pPr>
+            <a:r>
+              <a:t>📊</a:t>
+            </a:r>
+          </a:p>
+        </p:txBody>
+      </p:sp>
+      <p:sp>
+        <p:nvSpPr>
+          <p:cNvPr id="6" name="TextBox 5"/>
+          <p:cNvSpPr txBox="1"/>
+          <p:nvPr/>
+        </p:nvSpPr>
+        <p:spPr>
+          <a:xfrm>
+            <a:off x="365760" y="2377440"/>
+            <a:ext cx="1920240" cy="365760"/>
+          </a:xfrm>
+          <a:prstGeom prst="rect">
+            <a:avLst/>
+          </a:prstGeom>
+          <a:noFill/>
+        </p:spPr>
+        <p:txBody>
+          <a:bodyPr wrap="none">
+            <a:spAutoFit/>
+          </a:bodyPr>
+          <a:lstStyle/>
+          <a:p>
+            <a:pPr algn="ctr">
+              <a:defRPr sz="1800" b="1">
+                <a:solidFill>
+                  <a:srgbClr val="FFFFFF"/>
+                </a:solidFill>
+              </a:defRPr>
+            </a:pPr>
+            <a:r>
+              <a:t>Descriptive</a:t>
+            </a:r>
+          </a:p>
+        </p:txBody>
+      </p:sp>
+      <p:sp>
+        <p:nvSpPr>
+          <p:cNvPr id="7" name="TextBox 6"/>
+          <p:cNvSpPr txBox="1"/>
+          <p:nvPr/>
+        </p:nvSpPr>
+        <p:spPr>
+          <a:xfrm>
+            <a:off x="365760" y="2743200"/>
+            <a:ext cx="1920240" cy="365760"/>
+          </a:xfrm>
+          <a:prstGeom prst="rect">
+            <a:avLst/>
+          </a:prstGeom>
+          <a:noFill/>
+        </p:spPr>
+        <p:txBody>
+          <a:bodyPr wrap="none">
+            <a:spAutoFit/>
+          </a:bodyPr>
+          <a:lstStyle/>
+          <a:p>
+            <a:pPr algn="ctr">
+              <a:defRPr sz="1200" i="1">
+                <a:solidFill>
+                  <a:srgbClr val="14B8A6"/>
+                </a:solidFill>
+              </a:defRPr>
+            </a:pPr>
+            <a:r>
+              <a:t>Summarize past data</a:t>
+            </a:r>
+          </a:p>
+        </p:txBody>
+      </p:sp>
+      <p:sp>
+        <p:nvSpPr>
+          <p:cNvPr id="8" name="TextBox 7"/>
+          <p:cNvSpPr txBox="1"/>
+          <p:nvPr/>
+        </p:nvSpPr>
+        <p:spPr>
+          <a:xfrm>
+            <a:off x="365760" y="3200400"/>
+            <a:ext cx="1920240" cy="2194560"/>
+          </a:xfrm>
+          <a:prstGeom prst="rect">
+            <a:avLst/>
+          </a:prstGeom>
+          <a:noFill/>
+        </p:spPr>
+        <p:txBody>
+          <a:bodyPr wrap="square">
+            <a:spAutoFit/>
+          </a:bodyPr>
+          <a:lstStyle/>
+          <a:p>
+            <a:pPr algn="ctr">
+              <a:defRPr sz="1200">
+                <a:solidFill>
+                  <a:srgbClr val="D1D5DB"/>
+                </a:solidFill>
+              </a:defRPr>
+            </a:pPr>
+            <a:r>
+              <a:t>"What happened?"</a:t>
+            </a:r>
+            <a:br/>
+            <a:r>
+              <a:t>Q4 revenue was $2.1M</a:t>
+            </a:r>
+            <a:br/>
+            <a:r>
+              <a:t>across 4 regions</a:t>
+            </a:r>
+          </a:p>
+        </p:txBody>
+      </p:sp>
+      <p:sp>
+        <p:nvSpPr>
+          <p:cNvPr id="9" name="Rounded Rectangle 8"/>
+          <p:cNvSpPr/>
+          <p:nvPr/>
+        </p:nvSpPr>
+        <p:spPr>
+          <a:xfrm>
+            <a:off x="2560320" y="1737360"/>
+            <a:ext cx="2103120" cy="3931920"/>
+          </a:xfrm>
+          <a:prstGeom prst="roundRect">
+            <a:avLst/>
+          </a:prstGeom>
+          <a:solidFill>
+            <a:srgbClr val="141A2A"/>
+          </a:solidFill>
+          <a:ln w="19050">
+            <a:solidFill>
+              <a:srgbClr val="14B8A6"/>
+            </a:solidFill>
+          </a:ln>
+        </p:spPr>
+        <p:style>
+          <a:lnRef idx="1">
+            <a:schemeClr val="accent1"/>
+          </a:lnRef>
+          <a:fillRef idx="3">
+            <a:schemeClr val="accent1"/>
+          </a:fillRef>
+          <a:effectRef idx="2">
+            <a:schemeClr val="accent1"/>
+          </a:effectRef>
+          <a:fontRef idx="minor">
+            <a:schemeClr val="lt1"/>
+          </a:fontRef>
+        </p:style>
+        <p:txBody>
+          <a:bodyPr rtlCol="0" anchor="ctr"/>
+          <a:lstStyle/>
+          <a:p>
+            <a:pPr algn="ctr"/>
+          </a:p>
+        </p:txBody>
+      </p:sp>
+      <p:sp>
+        <p:nvSpPr>
+          <p:cNvPr id="10" name="TextBox 9"/>
+          <p:cNvSpPr txBox="1"/>
+          <p:nvPr/>
+        </p:nvSpPr>
+        <p:spPr>
+          <a:xfrm>
+            <a:off x="2651760" y="1920240"/>
+            <a:ext cx="1920240" cy="457200"/>
+          </a:xfrm>
+          <a:prstGeom prst="rect">
+            <a:avLst/>
+          </a:prstGeom>
+          <a:noFill/>
+        </p:spPr>
+        <p:txBody>
+          <a:bodyPr wrap="none">
+            <a:spAutoFit/>
+          </a:bodyPr>
+          <a:lstStyle/>
+          <a:p>
+            <a:pPr algn="ctr">
+              <a:defRPr sz="2800"/>
+            </a:pPr>
+            <a:r>
+              <a:t>🔍</a:t>
+            </a:r>
+          </a:p>
+        </p:txBody>
+      </p:sp>
+      <p:sp>
+        <p:nvSpPr>
+          <p:cNvPr id="11" name="TextBox 10"/>
+          <p:cNvSpPr txBox="1"/>
+          <p:nvPr/>
+        </p:nvSpPr>
+        <p:spPr>
+          <a:xfrm>
+            <a:off x="2651760" y="2377440"/>
+            <a:ext cx="1920240" cy="365760"/>
+          </a:xfrm>
+          <a:prstGeom prst="rect">
+            <a:avLst/>
+          </a:prstGeom>
+          <a:noFill/>
+        </p:spPr>
+        <p:txBody>
+          <a:bodyPr wrap="none">
+            <a:spAutoFit/>
+          </a:bodyPr>
+          <a:lstStyle/>
+          <a:p>
+            <a:pPr algn="ctr">
+              <a:defRPr sz="1800" b="1">
+                <a:solidFill>
+                  <a:srgbClr val="FFFFFF"/>
+                </a:solidFill>
+              </a:defRPr>
+            </a:pPr>
+            <a:r>
+              <a:t>Diagnostic</a:t>
+            </a:r>
+          </a:p>
+        </p:txBody>
+      </p:sp>
+      <p:sp>
+        <p:nvSpPr>
+          <p:cNvPr id="12" name="TextBox 11"/>
+          <p:cNvSpPr txBox="1"/>
+          <p:nvPr/>
+        </p:nvSpPr>
+        <p:spPr>
+          <a:xfrm>
+            <a:off x="2651760" y="2743200"/>
+            <a:ext cx="1920240" cy="365760"/>
+          </a:xfrm>
+          <a:prstGeom prst="rect">
+            <a:avLst/>
+          </a:prstGeom>
+          <a:noFill/>
+        </p:spPr>
+        <p:txBody>
+          <a:bodyPr wrap="none">
+            <a:spAutoFit/>
+          </a:bodyPr>
+          <a:lstStyle/>
+          <a:p>
+            <a:pPr algn="ctr">
+              <a:defRPr sz="1200" i="1">
+                <a:solidFill>
+                  <a:srgbClr val="14B8A6"/>
+                </a:solidFill>
+              </a:defRPr>
+            </a:pPr>
+            <a:r>
+              <a:t>Explain past data</a:t>
+            </a:r>
+          </a:p>
+        </p:txBody>
+      </p:sp>
+      <p:sp>
+        <p:nvSpPr>
+          <p:cNvPr id="13" name="TextBox 12"/>
+          <p:cNvSpPr txBox="1"/>
+          <p:nvPr/>
+        </p:nvSpPr>
+        <p:spPr>
+          <a:xfrm>
+            <a:off x="2651760" y="3200400"/>
+            <a:ext cx="1920240" cy="2194560"/>
+          </a:xfrm>
+          <a:prstGeom prst="rect">
+            <a:avLst/>
+          </a:prstGeom>
+          <a:noFill/>
+        </p:spPr>
+        <p:txBody>
+          <a:bodyPr wrap="square">
+            <a:spAutoFit/>
+          </a:bodyPr>
+          <a:lstStyle/>
+          <a:p>
+            <a:pPr algn="ctr">
+              <a:defRPr sz="1200">
+                <a:solidFill>
+                  <a:srgbClr val="D1D5DB"/>
+                </a:solidFill>
+              </a:defRPr>
+            </a:pPr>
+            <a:r>
+              <a:t>"Why did it happen?"</a:t>
+            </a:r>
+            <a:br/>
+            <a:r>
+              <a:t>Northeast dropped 15%</a:t>
+            </a:r>
+            <a:br/>
+            <a:r>
+              <a:t>due to rep turnover</a:t>
+            </a:r>
+          </a:p>
+        </p:txBody>
+      </p:sp>
+      <p:sp>
+        <p:nvSpPr>
+          <p:cNvPr id="14" name="Rounded Rectangle 13"/>
+          <p:cNvSpPr/>
+          <p:nvPr/>
+        </p:nvSpPr>
+        <p:spPr>
+          <a:xfrm>
+            <a:off x="4846320" y="1737360"/>
+            <a:ext cx="2103120" cy="3931920"/>
+          </a:xfrm>
+          <a:prstGeom prst="roundRect">
+            <a:avLst/>
+          </a:prstGeom>
+          <a:solidFill>
+            <a:srgbClr val="141A2A"/>
+          </a:solidFill>
+          <a:ln w="19050">
+            <a:solidFill>
+              <a:srgbClr val="14B8A6"/>
+            </a:solidFill>
+          </a:ln>
+        </p:spPr>
+        <p:style>
+          <a:lnRef idx="1">
+            <a:schemeClr val="accent1"/>
+          </a:lnRef>
+          <a:fillRef idx="3">
+            <a:schemeClr val="accent1"/>
+          </a:fillRef>
+          <a:effectRef idx="2">
+            <a:schemeClr val="accent1"/>
+          </a:effectRef>
+          <a:fontRef idx="minor">
+            <a:schemeClr val="lt1"/>
+          </a:fontRef>
+        </p:style>
+        <p:txBody>
+          <a:bodyPr rtlCol="0" anchor="ctr"/>
+          <a:lstStyle/>
+          <a:p>
+            <a:pPr algn="ctr"/>
+          </a:p>
+        </p:txBody>
+      </p:sp>
+      <p:sp>
+        <p:nvSpPr>
+          <p:cNvPr id="15" name="TextBox 14"/>
+          <p:cNvSpPr txBox="1"/>
+          <p:nvPr/>
+        </p:nvSpPr>
+        <p:spPr>
+          <a:xfrm>
+            <a:off x="4937759" y="1920240"/>
+            <a:ext cx="1920240" cy="457200"/>
+          </a:xfrm>
+          <a:prstGeom prst="rect">
+            <a:avLst/>
+          </a:prstGeom>
+          <a:noFill/>
+        </p:spPr>
+        <p:txBody>
+          <a:bodyPr wrap="none">
+            <a:spAutoFit/>
+          </a:bodyPr>
+          <a:lstStyle/>
+          <a:p>
+            <a:pPr algn="ctr">
+              <a:defRPr sz="2800"/>
+            </a:pPr>
+            <a:r>
+              <a:t>📈</a:t>
+            </a:r>
+          </a:p>
+        </p:txBody>
+      </p:sp>
+      <p:sp>
+        <p:nvSpPr>
+          <p:cNvPr id="16" name="TextBox 15"/>
+          <p:cNvSpPr txBox="1"/>
+          <p:nvPr/>
+        </p:nvSpPr>
+        <p:spPr>
+          <a:xfrm>
+            <a:off x="4937759" y="2377440"/>
+            <a:ext cx="1920240" cy="365760"/>
+          </a:xfrm>
+          <a:prstGeom prst="rect">
+            <a:avLst/>
+          </a:prstGeom>
+          <a:noFill/>
+        </p:spPr>
+        <p:txBody>
+          <a:bodyPr wrap="none">
+            <a:spAutoFit/>
+          </a:bodyPr>
+          <a:lstStyle/>
+          <a:p>
+            <a:pPr algn="ctr">
+              <a:defRPr sz="1800" b="1">
+                <a:solidFill>
+                  <a:srgbClr val="FFFFFF"/>
+                </a:solidFill>
+              </a:defRPr>
+            </a:pPr>
+            <a:r>
+              <a:t>Predictive</a:t>
+            </a:r>
+          </a:p>
+        </p:txBody>
+      </p:sp>
+      <p:sp>
+        <p:nvSpPr>
+          <p:cNvPr id="17" name="TextBox 16"/>
+          <p:cNvSpPr txBox="1"/>
+          <p:nvPr/>
+        </p:nvSpPr>
+        <p:spPr>
+          <a:xfrm>
+            <a:off x="4937759" y="2743200"/>
+            <a:ext cx="1920240" cy="365760"/>
+          </a:xfrm>
+          <a:prstGeom prst="rect">
+            <a:avLst/>
+          </a:prstGeom>
+          <a:noFill/>
+        </p:spPr>
+        <p:txBody>
+          <a:bodyPr wrap="none">
+            <a:spAutoFit/>
+          </a:bodyPr>
+          <a:lstStyle/>
+          <a:p>
+            <a:pPr algn="ctr">
+              <a:defRPr sz="1200" i="1">
+                <a:solidFill>
+                  <a:srgbClr val="14B8A6"/>
+                </a:solidFill>
+              </a:defRPr>
+            </a:pPr>
+            <a:r>
+              <a:t>Forecast future data</a:t>
+            </a:r>
+          </a:p>
+        </p:txBody>
+      </p:sp>
+      <p:sp>
+        <p:nvSpPr>
+          <p:cNvPr id="18" name="TextBox 17"/>
+          <p:cNvSpPr txBox="1"/>
+          <p:nvPr/>
+        </p:nvSpPr>
+        <p:spPr>
+          <a:xfrm>
+            <a:off x="4937759" y="3200400"/>
+            <a:ext cx="1920240" cy="2194560"/>
+          </a:xfrm>
+          <a:prstGeom prst="rect">
+            <a:avLst/>
+          </a:prstGeom>
+          <a:noFill/>
+        </p:spPr>
+        <p:txBody>
+          <a:bodyPr wrap="square">
+            <a:spAutoFit/>
+          </a:bodyPr>
+          <a:lstStyle/>
+          <a:p>
+            <a:pPr algn="ctr">
+              <a:defRPr sz="1200">
+                <a:solidFill>
+                  <a:srgbClr val="D1D5DB"/>
+                </a:solidFill>
+              </a:defRPr>
+            </a:pPr>
+            <a:r>
+              <a:t>"What will happen?"</a:t>
+            </a:r>
+            <a:br/>
+            <a:r>
+              <a:t>Q1 forecast: $2.4M</a:t>
+            </a:r>
+            <a:br/>
+            <a:r>
+              <a:t>based on pipeline</a:t>
+            </a:r>
+          </a:p>
+        </p:txBody>
+      </p:sp>
+      <p:sp>
+        <p:nvSpPr>
+          <p:cNvPr id="19" name="Rounded Rectangle 18"/>
+          <p:cNvSpPr/>
+          <p:nvPr/>
+        </p:nvSpPr>
+        <p:spPr>
+          <a:xfrm>
+            <a:off x="7132320" y="1737360"/>
+            <a:ext cx="2103120" cy="3931920"/>
+          </a:xfrm>
+          <a:prstGeom prst="roundRect">
+            <a:avLst/>
+          </a:prstGeom>
+          <a:solidFill>
+            <a:srgbClr val="141A2A"/>
+          </a:solidFill>
+          <a:ln w="19050">
+            <a:solidFill>
+              <a:srgbClr val="14B8A6"/>
+            </a:solidFill>
+          </a:ln>
+        </p:spPr>
+        <p:style>
+          <a:lnRef idx="1">
+            <a:schemeClr val="accent1"/>
+          </a:lnRef>
+          <a:fillRef idx="3">
+            <a:schemeClr val="accent1"/>
+          </a:fillRef>
+          <a:effectRef idx="2">
+            <a:schemeClr val="accent1"/>
+          </a:effectRef>
+          <a:fontRef idx="minor">
+            <a:schemeClr val="lt1"/>
+          </a:fontRef>
+        </p:style>
+        <p:txBody>
+          <a:bodyPr rtlCol="0" anchor="ctr"/>
+          <a:lstStyle/>
+          <a:p>
+            <a:pPr algn="ctr"/>
+          </a:p>
+        </p:txBody>
+      </p:sp>
+      <p:sp>
+        <p:nvSpPr>
+          <p:cNvPr id="20" name="TextBox 19"/>
+          <p:cNvSpPr txBox="1"/>
+          <p:nvPr/>
+        </p:nvSpPr>
+        <p:spPr>
+          <a:xfrm>
+            <a:off x="7223759" y="1920240"/>
+            <a:ext cx="1920240" cy="457200"/>
+          </a:xfrm>
+          <a:prstGeom prst="rect">
+            <a:avLst/>
+          </a:prstGeom>
+          <a:noFill/>
+        </p:spPr>
+        <p:txBody>
+          <a:bodyPr wrap="none">
+            <a:spAutoFit/>
+          </a:bodyPr>
+          <a:lstStyle/>
+          <a:p>
+            <a:pPr algn="ctr">
+              <a:defRPr sz="2800"/>
+            </a:pPr>
+            <a:r>
+              <a:t>💡</a:t>
+            </a:r>
+          </a:p>
+        </p:txBody>
+      </p:sp>
+      <p:sp>
+        <p:nvSpPr>
+          <p:cNvPr id="21" name="TextBox 20"/>
+          <p:cNvSpPr txBox="1"/>
+          <p:nvPr/>
+        </p:nvSpPr>
+        <p:spPr>
+          <a:xfrm>
+            <a:off x="7223759" y="2377440"/>
+            <a:ext cx="1920240" cy="365760"/>
+          </a:xfrm>
+          <a:prstGeom prst="rect">
+            <a:avLst/>
+          </a:prstGeom>
+          <a:noFill/>
+        </p:spPr>
+        <p:txBody>
+          <a:bodyPr wrap="none">
+            <a:spAutoFit/>
+          </a:bodyPr>
+          <a:lstStyle/>
+          <a:p>
+            <a:pPr algn="ctr">
+              <a:defRPr sz="1800" b="1">
+                <a:solidFill>
+                  <a:srgbClr val="FFFFFF"/>
+                </a:solidFill>
+              </a:defRPr>
+            </a:pPr>
+            <a:r>
+              <a:t>Prescriptive</a:t>
+            </a:r>
+          </a:p>
+        </p:txBody>
+      </p:sp>
+      <p:sp>
+        <p:nvSpPr>
+          <p:cNvPr id="22" name="TextBox 21"/>
+          <p:cNvSpPr txBox="1"/>
+          <p:nvPr/>
+        </p:nvSpPr>
+        <p:spPr>
+          <a:xfrm>
+            <a:off x="7223759" y="2743200"/>
+            <a:ext cx="1920240" cy="365760"/>
+          </a:xfrm>
+          <a:prstGeom prst="rect">
+            <a:avLst/>
+          </a:prstGeom>
+          <a:noFill/>
+        </p:spPr>
+        <p:txBody>
+          <a:bodyPr wrap="none">
+            <a:spAutoFit/>
+          </a:bodyPr>
+          <a:lstStyle/>
+          <a:p>
+            <a:pPr algn="ctr">
+              <a:defRPr sz="1200" i="1">
+                <a:solidFill>
+                  <a:srgbClr val="14B8A6"/>
+                </a:solidFill>
+              </a:defRPr>
+            </a:pPr>
+            <a:r>
+              <a:t>Optimize future data</a:t>
+            </a:r>
+          </a:p>
+        </p:txBody>
+      </p:sp>
+      <p:sp>
+        <p:nvSpPr>
+          <p:cNvPr id="23" name="TextBox 22"/>
+          <p:cNvSpPr txBox="1"/>
+          <p:nvPr/>
+        </p:nvSpPr>
+        <p:spPr>
+          <a:xfrm>
+            <a:off x="7223759" y="3200400"/>
+            <a:ext cx="1920240" cy="2194560"/>
+          </a:xfrm>
+          <a:prstGeom prst="rect">
+            <a:avLst/>
+          </a:prstGeom>
+          <a:noFill/>
+        </p:spPr>
+        <p:txBody>
+          <a:bodyPr wrap="square">
+            <a:spAutoFit/>
+          </a:bodyPr>
+          <a:lstStyle/>
+          <a:p>
+            <a:pPr algn="ctr">
+              <a:defRPr sz="1200">
+                <a:solidFill>
+                  <a:srgbClr val="D1D5DB"/>
+                </a:solidFill>
+              </a:defRPr>
+            </a:pPr>
+            <a:r>
+              <a:t>"What should we do?"</a:t>
+            </a:r>
+            <a:br/>
+            <a:r>
+              <a:t>Reallocate territory,</a:t>
+            </a:r>
+            <a:br/>
+            <a:r>
+              <a:t>hire 2 reps in NE</a:t>
+            </a:r>
+          </a:p>
+        </p:txBody>
+      </p:sp>
+      <p:sp>
+        <p:nvSpPr>
+          <p:cNvPr id="24" name="Rounded Rectangle 23"/>
+          <p:cNvSpPr/>
+          <p:nvPr/>
+        </p:nvSpPr>
+        <p:spPr>
+          <a:xfrm>
+            <a:off x="9418320" y="1737360"/>
+            <a:ext cx="2103120" cy="3931920"/>
+          </a:xfrm>
+          <a:prstGeom prst="roundRect">
+            <a:avLst/>
+          </a:prstGeom>
+          <a:solidFill>
+            <a:srgbClr val="141A2A"/>
+          </a:solidFill>
+          <a:ln w="19050">
+            <a:solidFill>
+              <a:srgbClr val="14B8A6"/>
+            </a:solidFill>
+          </a:ln>
+        </p:spPr>
+        <p:style>
+          <a:lnRef idx="1">
+            <a:schemeClr val="accent1"/>
+          </a:lnRef>
+          <a:fillRef idx="3">
+            <a:schemeClr val="accent1"/>
+          </a:fillRef>
+          <a:effectRef idx="2">
+            <a:schemeClr val="accent1"/>
+          </a:effectRef>
+          <a:fontRef idx="minor">
+            <a:schemeClr val="lt1"/>
+          </a:fontRef>
+        </p:style>
+        <p:txBody>
+          <a:bodyPr rtlCol="0" anchor="ctr"/>
+          <a:lstStyle/>
+          <a:p>
+            <a:pPr algn="ctr"/>
+          </a:p>
+        </p:txBody>
+      </p:sp>
+      <p:sp>
+        <p:nvSpPr>
+          <p:cNvPr id="25" name="TextBox 24"/>
+          <p:cNvSpPr txBox="1"/>
+          <p:nvPr/>
+        </p:nvSpPr>
+        <p:spPr>
+          <a:xfrm>
+            <a:off x="9509760" y="1920240"/>
+            <a:ext cx="1920240" cy="457200"/>
+          </a:xfrm>
+          <a:prstGeom prst="rect">
+            <a:avLst/>
+          </a:prstGeom>
+          <a:noFill/>
+        </p:spPr>
+        <p:txBody>
+          <a:bodyPr wrap="none">
+            <a:spAutoFit/>
+          </a:bodyPr>
+          <a:lstStyle/>
+          <a:p>
+            <a:pPr algn="ctr">
+              <a:defRPr sz="2800"/>
+            </a:pPr>
+            <a:r>
+              <a:t>🤖</a:t>
+            </a:r>
+          </a:p>
+        </p:txBody>
+      </p:sp>
+      <p:sp>
+        <p:nvSpPr>
+          <p:cNvPr id="26" name="TextBox 25"/>
+          <p:cNvSpPr txBox="1"/>
+          <p:nvPr/>
+        </p:nvSpPr>
+        <p:spPr>
+          <a:xfrm>
+            <a:off x="9509760" y="2377440"/>
+            <a:ext cx="1920240" cy="365760"/>
+          </a:xfrm>
+          <a:prstGeom prst="rect">
+            <a:avLst/>
+          </a:prstGeom>
+          <a:noFill/>
+        </p:spPr>
+        <p:txBody>
+          <a:bodyPr wrap="none">
+            <a:spAutoFit/>
+          </a:bodyPr>
+          <a:lstStyle/>
+          <a:p>
+            <a:pPr algn="ctr">
+              <a:defRPr sz="1800" b="1">
+                <a:solidFill>
+                  <a:srgbClr val="FFFFFF"/>
+                </a:solidFill>
+              </a:defRPr>
+            </a:pPr>
+            <a:r>
+              <a:t>AI</a:t>
+            </a:r>
+          </a:p>
+        </p:txBody>
+      </p:sp>
+      <p:sp>
+        <p:nvSpPr>
+          <p:cNvPr id="27" name="TextBox 26"/>
+          <p:cNvSpPr txBox="1"/>
+          <p:nvPr/>
+        </p:nvSpPr>
+        <p:spPr>
+          <a:xfrm>
+            <a:off x="9509760" y="2743200"/>
+            <a:ext cx="1920240" cy="365760"/>
+          </a:xfrm>
+          <a:prstGeom prst="rect">
+            <a:avLst/>
+          </a:prstGeom>
+          <a:noFill/>
+        </p:spPr>
+        <p:txBody>
+          <a:bodyPr wrap="none">
+            <a:spAutoFit/>
+          </a:bodyPr>
+          <a:lstStyle/>
+          <a:p>
+            <a:pPr algn="ctr">
+              <a:defRPr sz="1200" i="1">
+                <a:solidFill>
+                  <a:srgbClr val="14B8A6"/>
+                </a:solidFill>
+              </a:defRPr>
+            </a:pPr>
+            <a:r>
+              <a:t>Learn from data</a:t>
+            </a:r>
+          </a:p>
+        </p:txBody>
+      </p:sp>
+      <p:sp>
+        <p:nvSpPr>
+          <p:cNvPr id="28" name="TextBox 27"/>
+          <p:cNvSpPr txBox="1"/>
+          <p:nvPr/>
+        </p:nvSpPr>
+        <p:spPr>
+          <a:xfrm>
+            <a:off x="9509760" y="3200400"/>
+            <a:ext cx="1920240" cy="2194560"/>
+          </a:xfrm>
+          <a:prstGeom prst="rect">
+            <a:avLst/>
+          </a:prstGeom>
+          <a:noFill/>
+        </p:spPr>
+        <p:txBody>
+          <a:bodyPr wrap="square">
+            <a:spAutoFit/>
+          </a:bodyPr>
+          <a:lstStyle/>
+          <a:p>
+            <a:pPr algn="ctr">
+              <a:defRPr sz="1200">
+                <a:solidFill>
+                  <a:srgbClr val="D1D5DB"/>
+                </a:solidFill>
+              </a:defRPr>
+            </a:pPr>
+            <a:r>
+              <a:t>"What patterns exist?"</a:t>
+            </a:r>
+            <a:br/>
+            <a:r>
+              <a:t>3-year trend shows</a:t>
+            </a:r>
+            <a:br/>
+            <a:r>
+              <a:t>Q4 always dips 8-12%</a:t>
+            </a:r>
+          </a:p>
+        </p:txBody>
+      </p:sp>
+      <p:sp>
+        <p:nvSpPr>
+          <p:cNvPr id="29" name="TextBox 28"/>
+          <p:cNvSpPr txBox="1"/>
+          <p:nvPr/>
+        </p:nvSpPr>
+        <p:spPr>
+          <a:xfrm>
+            <a:off x="457200" y="5760720"/>
+            <a:ext cx="11247120" cy="365760"/>
+          </a:xfrm>
+          <a:prstGeom prst="rect">
+            <a:avLst/>
+          </a:prstGeom>
+          <a:noFill/>
+        </p:spPr>
+        <p:txBody>
+          <a:bodyPr wrap="none">
+            <a:spAutoFit/>
+          </a:bodyPr>
+          <a:lstStyle/>
+          <a:p>
+            <a:pPr algn="ctr">
+              <a:defRPr sz="1500" i="1">
+                <a:solidFill>
+                  <a:srgbClr val="14B8A6"/>
+                </a:solidFill>
+              </a:defRPr>
+            </a:pPr>
+            <a:r>
+              <a:t>Claude handles all five levels. The quality of your analysis depends on which level you ask for.</a:t>
             </a:r>
           </a:p>
         </p:txBody>

--- a/slides/Day1_Claude_for_Business.pptx
+++ b/slides/Day1_Claude_for_Business.pptx
@@ -90,6 +90,9 @@
     <p:sldId id="358" r:id="rId102"/>
     <p:sldId id="359" r:id="rId103"/>
     <p:sldId id="360" r:id="rId104"/>
+    <p:sldId id="362" r:id="rId106"/>
+    <p:sldId id="363" r:id="rId107"/>
+    <p:sldId id="364" r:id="rId108"/>
     <p:sldId id="361" r:id="rId105"/>
     <p:sldId id="325" r:id="rId77"/>
     <p:sldId id="326" r:id="rId78"/>
@@ -11436,6 +11439,81 @@
 </p:notes>
 </file>
 
+<file path=ppt/notesSlides/notesSlide95.xml><?xml version="1.0" encoding="utf-8"?>
+<p:notes xmlns:a="http://schemas.openxmlformats.org/drawingml/2006/main" xmlns:p="http://schemas.openxmlformats.org/presentationml/2006/main" xmlns:r="http://schemas.openxmlformats.org/officeDocument/2006/relationships">
+  <p:cSld>
+    <p:spTree>
+      <p:nvGrpSpPr>
+        <p:cNvPr id="1" name=""/>
+        <p:cNvGrpSpPr/>
+        <p:nvPr/>
+      </p:nvGrpSpPr>
+      <p:grpSpPr>
+        <a:xfrm>
+          <a:off x="0" y="0"/>
+          <a:ext cx="0" cy="0"/>
+          <a:chOff x="0" y="0"/>
+          <a:chExt cx="0" cy="0"/>
+        </a:xfrm>
+      </p:grpSpPr>
+    </p:spTree>
+  </p:cSld>
+  <p:clrMapOvr>
+    <a:masterClrMapping/>
+  </p:clrMapOvr>
+</p:notes>
+</file>
+
+<file path=ppt/notesSlides/notesSlide96.xml><?xml version="1.0" encoding="utf-8"?>
+<p:notes xmlns:a="http://schemas.openxmlformats.org/drawingml/2006/main" xmlns:p="http://schemas.openxmlformats.org/presentationml/2006/main" xmlns:r="http://schemas.openxmlformats.org/officeDocument/2006/relationships">
+  <p:cSld>
+    <p:spTree>
+      <p:nvGrpSpPr>
+        <p:cNvPr id="1" name=""/>
+        <p:cNvGrpSpPr/>
+        <p:nvPr/>
+      </p:nvGrpSpPr>
+      <p:grpSpPr>
+        <a:xfrm>
+          <a:off x="0" y="0"/>
+          <a:ext cx="0" cy="0"/>
+          <a:chOff x="0" y="0"/>
+          <a:chExt cx="0" cy="0"/>
+        </a:xfrm>
+      </p:grpSpPr>
+    </p:spTree>
+  </p:cSld>
+  <p:clrMapOvr>
+    <a:masterClrMapping/>
+  </p:clrMapOvr>
+</p:notes>
+</file>
+
+<file path=ppt/notesSlides/notesSlide97.xml><?xml version="1.0" encoding="utf-8"?>
+<p:notes xmlns:a="http://schemas.openxmlformats.org/drawingml/2006/main" xmlns:p="http://schemas.openxmlformats.org/presentationml/2006/main" xmlns:r="http://schemas.openxmlformats.org/officeDocument/2006/relationships">
+  <p:cSld>
+    <p:spTree>
+      <p:nvGrpSpPr>
+        <p:cNvPr id="1" name=""/>
+        <p:cNvGrpSpPr/>
+        <p:nvPr/>
+      </p:nvGrpSpPr>
+      <p:grpSpPr>
+        <a:xfrm>
+          <a:off x="0" y="0"/>
+          <a:ext cx="0" cy="0"/>
+          <a:chOff x="0" y="0"/>
+          <a:chExt cx="0" cy="0"/>
+        </a:xfrm>
+      </p:grpSpPr>
+    </p:spTree>
+  </p:cSld>
+  <p:clrMapOvr>
+    <a:masterClrMapping/>
+  </p:clrMapOvr>
+</p:notes>
+</file>
+
 <file path=ppt/slideLayouts/slideLayout1.xml><?xml version="1.0" encoding="utf-8"?>
 <p:sldLayout xmlns:a="http://schemas.openxmlformats.org/drawingml/2006/main" xmlns:r="http://schemas.openxmlformats.org/officeDocument/2006/relationships" xmlns:p="http://schemas.openxmlformats.org/presentationml/2006/main" type="title" preserve="1">
   <p:cSld name="Title Slide">
@@ -56337,6 +56415,2018 @@
             </a:pPr>
             <a:r>
               <a:t>scott@aiacopilot.com  •  aiacopilot.com</a:t>
+            </a:r>
+          </a:p>
+        </p:txBody>
+      </p:sp>
+    </p:spTree>
+  </p:cSld>
+  <p:clrMapOvr>
+    <a:masterClrMapping/>
+  </p:clrMapOvr>
+</p:sld>
+</file>
+
+<file path=ppt/slides/slide95.xml><?xml version="1.0" encoding="utf-8"?>
+<p:sld xmlns:a="http://schemas.openxmlformats.org/drawingml/2006/main" xmlns:p="http://schemas.openxmlformats.org/presentationml/2006/main" xmlns:r="http://schemas.openxmlformats.org/officeDocument/2006/relationships">
+  <p:cSld>
+    <p:bg>
+      <p:bgPr>
+        <a:solidFill>
+          <a:srgbClr val="0B0F1A"/>
+        </a:solidFill>
+        <a:effectLst/>
+      </p:bgPr>
+    </p:bg>
+    <p:spTree>
+      <p:nvGrpSpPr>
+        <p:cNvPr id="1" name=""/>
+        <p:cNvGrpSpPr/>
+        <p:nvPr/>
+      </p:nvGrpSpPr>
+      <p:grpSpPr/>
+      <p:sp>
+        <p:nvSpPr>
+          <p:cNvPr id="2" name="TextBox 1"/>
+          <p:cNvSpPr txBox="1"/>
+          <p:nvPr/>
+        </p:nvSpPr>
+        <p:spPr>
+          <a:xfrm>
+            <a:off x="457200" y="274320"/>
+            <a:ext cx="11247120" cy="822960"/>
+          </a:xfrm>
+          <a:prstGeom prst="rect">
+            <a:avLst/>
+          </a:prstGeom>
+          <a:noFill/>
+        </p:spPr>
+        <p:txBody>
+          <a:bodyPr wrap="none">
+            <a:spAutoFit/>
+          </a:bodyPr>
+          <a:lstStyle/>
+          <a:p>
+            <a:pPr>
+              <a:defRPr sz="4000" b="1">
+                <a:solidFill>
+                  <a:srgbClr val="FFFFFF"/>
+                </a:solidFill>
+              </a:defRPr>
+            </a:pPr>
+            <a:r>
+              <a:t>Claude Cowork: AI That Produces Actual Files</a:t>
+            </a:r>
+          </a:p>
+        </p:txBody>
+      </p:sp>
+      <p:sp>
+        <p:nvSpPr>
+          <p:cNvPr id="3" name="TextBox 2"/>
+          <p:cNvSpPr txBox="1"/>
+          <p:nvPr/>
+        </p:nvSpPr>
+        <p:spPr>
+          <a:xfrm>
+            <a:off x="457200" y="1005840"/>
+            <a:ext cx="11247120" cy="457200"/>
+          </a:xfrm>
+          <a:prstGeom prst="rect">
+            <a:avLst/>
+          </a:prstGeom>
+          <a:noFill/>
+        </p:spPr>
+        <p:txBody>
+          <a:bodyPr wrap="none">
+            <a:spAutoFit/>
+          </a:bodyPr>
+          <a:lstStyle/>
+          <a:p>
+            <a:pPr>
+              <a:defRPr sz="1800" i="1">
+                <a:solidFill>
+                  <a:srgbClr val="9CA3AF"/>
+                </a:solidFill>
+              </a:defRPr>
+            </a:pPr>
+            <a:r>
+              <a:t>Claude Code for non-developers — works with files on your computer</a:t>
+            </a:r>
+          </a:p>
+        </p:txBody>
+      </p:sp>
+      <p:sp>
+        <p:nvSpPr>
+          <p:cNvPr id="4" name="Rounded Rectangle 3"/>
+          <p:cNvSpPr/>
+          <p:nvPr/>
+        </p:nvSpPr>
+        <p:spPr>
+          <a:xfrm>
+            <a:off x="274320" y="1737360"/>
+            <a:ext cx="2743200" cy="3657600"/>
+          </a:xfrm>
+          <a:prstGeom prst="roundRect">
+            <a:avLst/>
+          </a:prstGeom>
+          <a:solidFill>
+            <a:srgbClr val="141A2A"/>
+          </a:solidFill>
+          <a:ln w="19050">
+            <a:solidFill>
+              <a:srgbClr val="14B8A6"/>
+            </a:solidFill>
+          </a:ln>
+        </p:spPr>
+        <p:style>
+          <a:lnRef idx="1">
+            <a:schemeClr val="accent1"/>
+          </a:lnRef>
+          <a:fillRef idx="3">
+            <a:schemeClr val="accent1"/>
+          </a:fillRef>
+          <a:effectRef idx="2">
+            <a:schemeClr val="accent1"/>
+          </a:effectRef>
+          <a:fontRef idx="minor">
+            <a:schemeClr val="lt1"/>
+          </a:fontRef>
+        </p:style>
+        <p:txBody>
+          <a:bodyPr rtlCol="0" anchor="ctr"/>
+          <a:lstStyle/>
+          <a:p>
+            <a:pPr algn="ctr"/>
+          </a:p>
+        </p:txBody>
+      </p:sp>
+      <p:sp>
+        <p:nvSpPr>
+          <p:cNvPr id="5" name="TextBox 4"/>
+          <p:cNvSpPr txBox="1"/>
+          <p:nvPr/>
+        </p:nvSpPr>
+        <p:spPr>
+          <a:xfrm>
+            <a:off x="457200" y="1874519"/>
+            <a:ext cx="2377440" cy="365760"/>
+          </a:xfrm>
+          <a:prstGeom prst="rect">
+            <a:avLst/>
+          </a:prstGeom>
+          <a:noFill/>
+        </p:spPr>
+        <p:txBody>
+          <a:bodyPr wrap="none">
+            <a:spAutoFit/>
+          </a:bodyPr>
+          <a:lstStyle/>
+          <a:p>
+            <a:pPr algn="ctr">
+              <a:defRPr sz="2600"/>
+            </a:pPr>
+            <a:r>
+              <a:t>📁</a:t>
+            </a:r>
+          </a:p>
+        </p:txBody>
+      </p:sp>
+      <p:sp>
+        <p:nvSpPr>
+          <p:cNvPr id="6" name="TextBox 5"/>
+          <p:cNvSpPr txBox="1"/>
+          <p:nvPr/>
+        </p:nvSpPr>
+        <p:spPr>
+          <a:xfrm>
+            <a:off x="457200" y="2240280"/>
+            <a:ext cx="2377440" cy="365760"/>
+          </a:xfrm>
+          <a:prstGeom prst="rect">
+            <a:avLst/>
+          </a:prstGeom>
+          <a:noFill/>
+        </p:spPr>
+        <p:txBody>
+          <a:bodyPr wrap="none">
+            <a:spAutoFit/>
+          </a:bodyPr>
+          <a:lstStyle/>
+          <a:p>
+            <a:pPr algn="ctr">
+              <a:defRPr sz="1600" b="1">
+                <a:solidFill>
+                  <a:srgbClr val="FFFFFF"/>
+                </a:solidFill>
+              </a:defRPr>
+            </a:pPr>
+            <a:r>
+              <a:t>File Operations</a:t>
+            </a:r>
+          </a:p>
+        </p:txBody>
+      </p:sp>
+      <p:sp>
+        <p:nvSpPr>
+          <p:cNvPr id="7" name="TextBox 6"/>
+          <p:cNvSpPr txBox="1"/>
+          <p:nvPr/>
+        </p:nvSpPr>
+        <p:spPr>
+          <a:xfrm>
+            <a:off x="457200" y="2651760"/>
+            <a:ext cx="2377440" cy="2560320"/>
+          </a:xfrm>
+          <a:prstGeom prst="rect">
+            <a:avLst/>
+          </a:prstGeom>
+          <a:noFill/>
+        </p:spPr>
+        <p:txBody>
+          <a:bodyPr wrap="square">
+            <a:spAutoFit/>
+          </a:bodyPr>
+          <a:lstStyle/>
+          <a:p>
+            <a:pPr algn="ctr">
+              <a:defRPr sz="1200">
+                <a:solidFill>
+                  <a:srgbClr val="D1D5DB"/>
+                </a:solidFill>
+              </a:defRPr>
+            </a:pPr>
+            <a:r>
+              <a:t>Organize 300+ files in minutes</a:t>
+            </a:r>
+            <a:br/>
+            <a:r>
+              <a:t>by reading actual contents —</a:t>
+            </a:r>
+            <a:br/>
+            <a:r>
+              <a:t>not just filenames.</a:t>
+            </a:r>
+            <a:br/>
+            <a:br/>
+            <a:r>
+              <a:t>Receipt photos → sorted</a:t>
+            </a:r>
+            <a:br/>
+            <a:r>
+              <a:t>by vendor, date, category</a:t>
+            </a:r>
+          </a:p>
+        </p:txBody>
+      </p:sp>
+      <p:sp>
+        <p:nvSpPr>
+          <p:cNvPr id="8" name="Rounded Rectangle 7"/>
+          <p:cNvSpPr/>
+          <p:nvPr/>
+        </p:nvSpPr>
+        <p:spPr>
+          <a:xfrm>
+            <a:off x="3200400" y="1737360"/>
+            <a:ext cx="2743200" cy="3657600"/>
+          </a:xfrm>
+          <a:prstGeom prst="roundRect">
+            <a:avLst/>
+          </a:prstGeom>
+          <a:solidFill>
+            <a:srgbClr val="141A2A"/>
+          </a:solidFill>
+          <a:ln w="19050">
+            <a:solidFill>
+              <a:srgbClr val="14B8A6"/>
+            </a:solidFill>
+          </a:ln>
+        </p:spPr>
+        <p:style>
+          <a:lnRef idx="1">
+            <a:schemeClr val="accent1"/>
+          </a:lnRef>
+          <a:fillRef idx="3">
+            <a:schemeClr val="accent1"/>
+          </a:fillRef>
+          <a:effectRef idx="2">
+            <a:schemeClr val="accent1"/>
+          </a:effectRef>
+          <a:fontRef idx="minor">
+            <a:schemeClr val="lt1"/>
+          </a:fontRef>
+        </p:style>
+        <p:txBody>
+          <a:bodyPr rtlCol="0" anchor="ctr"/>
+          <a:lstStyle/>
+          <a:p>
+            <a:pPr algn="ctr"/>
+          </a:p>
+        </p:txBody>
+      </p:sp>
+      <p:sp>
+        <p:nvSpPr>
+          <p:cNvPr id="9" name="TextBox 8"/>
+          <p:cNvSpPr txBox="1"/>
+          <p:nvPr/>
+        </p:nvSpPr>
+        <p:spPr>
+          <a:xfrm>
+            <a:off x="3383280" y="1874519"/>
+            <a:ext cx="2377440" cy="365760"/>
+          </a:xfrm>
+          <a:prstGeom prst="rect">
+            <a:avLst/>
+          </a:prstGeom>
+          <a:noFill/>
+        </p:spPr>
+        <p:txBody>
+          <a:bodyPr wrap="none">
+            <a:spAutoFit/>
+          </a:bodyPr>
+          <a:lstStyle/>
+          <a:p>
+            <a:pPr algn="ctr">
+              <a:defRPr sz="2600"/>
+            </a:pPr>
+            <a:r>
+              <a:t>📊</a:t>
+            </a:r>
+          </a:p>
+        </p:txBody>
+      </p:sp>
+      <p:sp>
+        <p:nvSpPr>
+          <p:cNvPr id="10" name="TextBox 9"/>
+          <p:cNvSpPr txBox="1"/>
+          <p:nvPr/>
+        </p:nvSpPr>
+        <p:spPr>
+          <a:xfrm>
+            <a:off x="3383280" y="2240280"/>
+            <a:ext cx="2377440" cy="365760"/>
+          </a:xfrm>
+          <a:prstGeom prst="rect">
+            <a:avLst/>
+          </a:prstGeom>
+          <a:noFill/>
+        </p:spPr>
+        <p:txBody>
+          <a:bodyPr wrap="none">
+            <a:spAutoFit/>
+          </a:bodyPr>
+          <a:lstStyle/>
+          <a:p>
+            <a:pPr algn="ctr">
+              <a:defRPr sz="1600" b="1">
+                <a:solidFill>
+                  <a:srgbClr val="FFFFFF"/>
+                </a:solidFill>
+              </a:defRPr>
+            </a:pPr>
+            <a:r>
+              <a:t>Real Documents</a:t>
+            </a:r>
+          </a:p>
+        </p:txBody>
+      </p:sp>
+      <p:sp>
+        <p:nvSpPr>
+          <p:cNvPr id="11" name="TextBox 10"/>
+          <p:cNvSpPr txBox="1"/>
+          <p:nvPr/>
+        </p:nvSpPr>
+        <p:spPr>
+          <a:xfrm>
+            <a:off x="3383280" y="2651760"/>
+            <a:ext cx="2377440" cy="2560320"/>
+          </a:xfrm>
+          <a:prstGeom prst="rect">
+            <a:avLst/>
+          </a:prstGeom>
+          <a:noFill/>
+        </p:spPr>
+        <p:txBody>
+          <a:bodyPr wrap="square">
+            <a:spAutoFit/>
+          </a:bodyPr>
+          <a:lstStyle/>
+          <a:p>
+            <a:pPr algn="ctr">
+              <a:defRPr sz="1200">
+                <a:solidFill>
+                  <a:srgbClr val="D1D5DB"/>
+                </a:solidFill>
+              </a:defRPr>
+            </a:pPr>
+            <a:r>
+              <a:t>Creates actual files:</a:t>
+            </a:r>
+            <a:br/>
+            <a:r>
+              <a:t>Excel with working formulas</a:t>
+            </a:r>
+            <a:br/>
+            <a:r>
+              <a:t>PowerPoint with real slides</a:t>
+            </a:r>
+            <a:br/>
+            <a:r>
+              <a:t>Word with proper formatting</a:t>
+            </a:r>
+            <a:br/>
+            <a:br/>
+            <a:r>
+              <a:t>Not text you copy-paste</a:t>
+            </a:r>
+          </a:p>
+        </p:txBody>
+      </p:sp>
+      <p:sp>
+        <p:nvSpPr>
+          <p:cNvPr id="12" name="Rounded Rectangle 11"/>
+          <p:cNvSpPr/>
+          <p:nvPr/>
+        </p:nvSpPr>
+        <p:spPr>
+          <a:xfrm>
+            <a:off x="6126480" y="1737360"/>
+            <a:ext cx="2743200" cy="3657600"/>
+          </a:xfrm>
+          <a:prstGeom prst="roundRect">
+            <a:avLst/>
+          </a:prstGeom>
+          <a:solidFill>
+            <a:srgbClr val="141A2A"/>
+          </a:solidFill>
+          <a:ln w="19050">
+            <a:solidFill>
+              <a:srgbClr val="14B8A6"/>
+            </a:solidFill>
+          </a:ln>
+        </p:spPr>
+        <p:style>
+          <a:lnRef idx="1">
+            <a:schemeClr val="accent1"/>
+          </a:lnRef>
+          <a:fillRef idx="3">
+            <a:schemeClr val="accent1"/>
+          </a:fillRef>
+          <a:effectRef idx="2">
+            <a:schemeClr val="accent1"/>
+          </a:effectRef>
+          <a:fontRef idx="minor">
+            <a:schemeClr val="lt1"/>
+          </a:fontRef>
+        </p:style>
+        <p:txBody>
+          <a:bodyPr rtlCol="0" anchor="ctr"/>
+          <a:lstStyle/>
+          <a:p>
+            <a:pPr algn="ctr"/>
+          </a:p>
+        </p:txBody>
+      </p:sp>
+      <p:sp>
+        <p:nvSpPr>
+          <p:cNvPr id="13" name="TextBox 12"/>
+          <p:cNvSpPr txBox="1"/>
+          <p:nvPr/>
+        </p:nvSpPr>
+        <p:spPr>
+          <a:xfrm>
+            <a:off x="6309360" y="1874519"/>
+            <a:ext cx="2377440" cy="365760"/>
+          </a:xfrm>
+          <a:prstGeom prst="rect">
+            <a:avLst/>
+          </a:prstGeom>
+          <a:noFill/>
+        </p:spPr>
+        <p:txBody>
+          <a:bodyPr wrap="none">
+            <a:spAutoFit/>
+          </a:bodyPr>
+          <a:lstStyle/>
+          <a:p>
+            <a:pPr algn="ctr">
+              <a:defRPr sz="2600"/>
+            </a:pPr>
+            <a:r>
+              <a:t>🔍</a:t>
+            </a:r>
+          </a:p>
+        </p:txBody>
+      </p:sp>
+      <p:sp>
+        <p:nvSpPr>
+          <p:cNvPr id="14" name="TextBox 13"/>
+          <p:cNvSpPr txBox="1"/>
+          <p:nvPr/>
+        </p:nvSpPr>
+        <p:spPr>
+          <a:xfrm>
+            <a:off x="6309360" y="2240280"/>
+            <a:ext cx="2377440" cy="365760"/>
+          </a:xfrm>
+          <a:prstGeom prst="rect">
+            <a:avLst/>
+          </a:prstGeom>
+          <a:noFill/>
+        </p:spPr>
+        <p:txBody>
+          <a:bodyPr wrap="none">
+            <a:spAutoFit/>
+          </a:bodyPr>
+          <a:lstStyle/>
+          <a:p>
+            <a:pPr algn="ctr">
+              <a:defRPr sz="1600" b="1">
+                <a:solidFill>
+                  <a:srgbClr val="FFFFFF"/>
+                </a:solidFill>
+              </a:defRPr>
+            </a:pPr>
+            <a:r>
+              <a:t>Research Synthesis</a:t>
+            </a:r>
+          </a:p>
+        </p:txBody>
+      </p:sp>
+      <p:sp>
+        <p:nvSpPr>
+          <p:cNvPr id="15" name="TextBox 14"/>
+          <p:cNvSpPr txBox="1"/>
+          <p:nvPr/>
+        </p:nvSpPr>
+        <p:spPr>
+          <a:xfrm>
+            <a:off x="6309360" y="2651760"/>
+            <a:ext cx="2377440" cy="2560320"/>
+          </a:xfrm>
+          <a:prstGeom prst="rect">
+            <a:avLst/>
+          </a:prstGeom>
+          <a:noFill/>
+        </p:spPr>
+        <p:txBody>
+          <a:bodyPr wrap="square">
+            <a:spAutoFit/>
+          </a:bodyPr>
+          <a:lstStyle/>
+          <a:p>
+            <a:pPr algn="ctr">
+              <a:defRPr sz="1200">
+                <a:solidFill>
+                  <a:srgbClr val="D1D5DB"/>
+                </a:solidFill>
+              </a:defRPr>
+            </a:pPr>
+            <a:r>
+              <a:t>Read 20 documents at once.</a:t>
+            </a:r>
+            <a:br/>
+            <a:r>
+              <a:t>Find patterns across sources.</a:t>
+            </a:r>
+            <a:br/>
+            <a:r>
+              <a:t>Cite specific files.</a:t>
+            </a:r>
+            <a:br/>
+            <a:r>
+              <a:t>Flag contradictions.</a:t>
+            </a:r>
+            <a:br/>
+            <a:br/>
+            <a:r>
+              <a:t>Hours of work → minutes</a:t>
+            </a:r>
+          </a:p>
+        </p:txBody>
+      </p:sp>
+      <p:sp>
+        <p:nvSpPr>
+          <p:cNvPr id="16" name="Rounded Rectangle 15"/>
+          <p:cNvSpPr/>
+          <p:nvPr/>
+        </p:nvSpPr>
+        <p:spPr>
+          <a:xfrm>
+            <a:off x="9052560" y="1737360"/>
+            <a:ext cx="2743200" cy="3657600"/>
+          </a:xfrm>
+          <a:prstGeom prst="roundRect">
+            <a:avLst/>
+          </a:prstGeom>
+          <a:solidFill>
+            <a:srgbClr val="141A2A"/>
+          </a:solidFill>
+          <a:ln w="19050">
+            <a:solidFill>
+              <a:srgbClr val="14B8A6"/>
+            </a:solidFill>
+          </a:ln>
+        </p:spPr>
+        <p:style>
+          <a:lnRef idx="1">
+            <a:schemeClr val="accent1"/>
+          </a:lnRef>
+          <a:fillRef idx="3">
+            <a:schemeClr val="accent1"/>
+          </a:fillRef>
+          <a:effectRef idx="2">
+            <a:schemeClr val="accent1"/>
+          </a:effectRef>
+          <a:fontRef idx="minor">
+            <a:schemeClr val="lt1"/>
+          </a:fontRef>
+        </p:style>
+        <p:txBody>
+          <a:bodyPr rtlCol="0" anchor="ctr"/>
+          <a:lstStyle/>
+          <a:p>
+            <a:pPr algn="ctr"/>
+          </a:p>
+        </p:txBody>
+      </p:sp>
+      <p:sp>
+        <p:nvSpPr>
+          <p:cNvPr id="17" name="TextBox 16"/>
+          <p:cNvSpPr txBox="1"/>
+          <p:nvPr/>
+        </p:nvSpPr>
+        <p:spPr>
+          <a:xfrm>
+            <a:off x="9235440" y="1874519"/>
+            <a:ext cx="2377440" cy="365760"/>
+          </a:xfrm>
+          <a:prstGeom prst="rect">
+            <a:avLst/>
+          </a:prstGeom>
+          <a:noFill/>
+        </p:spPr>
+        <p:txBody>
+          <a:bodyPr wrap="none">
+            <a:spAutoFit/>
+          </a:bodyPr>
+          <a:lstStyle/>
+          <a:p>
+            <a:pPr algn="ctr">
+              <a:defRPr sz="2600"/>
+            </a:pPr>
+            <a:r>
+              <a:t>🤖</a:t>
+            </a:r>
+          </a:p>
+        </p:txBody>
+      </p:sp>
+      <p:sp>
+        <p:nvSpPr>
+          <p:cNvPr id="18" name="TextBox 17"/>
+          <p:cNvSpPr txBox="1"/>
+          <p:nvPr/>
+        </p:nvSpPr>
+        <p:spPr>
+          <a:xfrm>
+            <a:off x="9235440" y="2240280"/>
+            <a:ext cx="2377440" cy="365760"/>
+          </a:xfrm>
+          <a:prstGeom prst="rect">
+            <a:avLst/>
+          </a:prstGeom>
+          <a:noFill/>
+        </p:spPr>
+        <p:txBody>
+          <a:bodyPr wrap="none">
+            <a:spAutoFit/>
+          </a:bodyPr>
+          <a:lstStyle/>
+          <a:p>
+            <a:pPr algn="ctr">
+              <a:defRPr sz="1600" b="1">
+                <a:solidFill>
+                  <a:srgbClr val="FFFFFF"/>
+                </a:solidFill>
+              </a:defRPr>
+            </a:pPr>
+            <a:r>
+              <a:t>AI Employee</a:t>
+            </a:r>
+          </a:p>
+        </p:txBody>
+      </p:sp>
+      <p:sp>
+        <p:nvSpPr>
+          <p:cNvPr id="19" name="TextBox 18"/>
+          <p:cNvSpPr txBox="1"/>
+          <p:nvPr/>
+        </p:nvSpPr>
+        <p:spPr>
+          <a:xfrm>
+            <a:off x="9235440" y="2651760"/>
+            <a:ext cx="2377440" cy="2560320"/>
+          </a:xfrm>
+          <a:prstGeom prst="rect">
+            <a:avLst/>
+          </a:prstGeom>
+          <a:noFill/>
+        </p:spPr>
+        <p:txBody>
+          <a:bodyPr wrap="square">
+            <a:spAutoFit/>
+          </a:bodyPr>
+          <a:lstStyle/>
+          <a:p>
+            <a:pPr algn="ctr">
+              <a:defRPr sz="1200">
+                <a:solidFill>
+                  <a:srgbClr val="D1D5DB"/>
+                </a:solidFill>
+              </a:defRPr>
+            </a:pPr>
+            <a:r>
+              <a:t>Delegate outcomes,</a:t>
+            </a:r>
+            <a:br/>
+            <a:r>
+              <a:t>not tasks. Step away.</a:t>
+            </a:r>
+            <a:br/>
+            <a:r>
+              <a:t>Come back to finished work.</a:t>
+            </a:r>
+            <a:br/>
+            <a:br/>
+            <a:r>
+              <a:t>Batch multiple tasks</a:t>
+            </a:r>
+            <a:br/>
+            <a:r>
+              <a:t>in a single session</a:t>
+            </a:r>
+          </a:p>
+        </p:txBody>
+      </p:sp>
+      <p:sp>
+        <p:nvSpPr>
+          <p:cNvPr id="20" name="TextBox 19"/>
+          <p:cNvSpPr txBox="1"/>
+          <p:nvPr/>
+        </p:nvSpPr>
+        <p:spPr>
+          <a:xfrm>
+            <a:off x="457200" y="5669280"/>
+            <a:ext cx="11247120" cy="457200"/>
+          </a:xfrm>
+          <a:prstGeom prst="rect">
+            <a:avLst/>
+          </a:prstGeom>
+          <a:noFill/>
+        </p:spPr>
+        <p:txBody>
+          <a:bodyPr wrap="none">
+            <a:spAutoFit/>
+          </a:bodyPr>
+          <a:lstStyle/>
+          <a:p>
+            <a:pPr algn="ctr">
+              <a:defRPr sz="1400" i="1">
+                <a:solidFill>
+                  <a:srgbClr val="14B8A6"/>
+                </a:solidFill>
+              </a:defRPr>
+            </a:pPr>
+            <a:r>
+              <a:t>macOS Desktop app • Claude Pro ($20/mo) • Research Preview • Grant access to one folder at a time</a:t>
+            </a:r>
+          </a:p>
+        </p:txBody>
+      </p:sp>
+    </p:spTree>
+  </p:cSld>
+  <p:clrMapOvr>
+    <a:masterClrMapping/>
+  </p:clrMapOvr>
+</p:sld>
+</file>
+
+<file path=ppt/slides/slide96.xml><?xml version="1.0" encoding="utf-8"?>
+<p:sld xmlns:a="http://schemas.openxmlformats.org/drawingml/2006/main" xmlns:p="http://schemas.openxmlformats.org/presentationml/2006/main" xmlns:r="http://schemas.openxmlformats.org/officeDocument/2006/relationships">
+  <p:cSld>
+    <p:bg>
+      <p:bgPr>
+        <a:solidFill>
+          <a:srgbClr val="0B0F1A"/>
+        </a:solidFill>
+        <a:effectLst/>
+      </p:bgPr>
+    </p:bg>
+    <p:spTree>
+      <p:nvGrpSpPr>
+        <p:cNvPr id="1" name=""/>
+        <p:cNvGrpSpPr/>
+        <p:nvPr/>
+      </p:nvGrpSpPr>
+      <p:grpSpPr/>
+      <p:sp>
+        <p:nvSpPr>
+          <p:cNvPr id="2" name="TextBox 1"/>
+          <p:cNvSpPr txBox="1"/>
+          <p:nvPr/>
+        </p:nvSpPr>
+        <p:spPr>
+          <a:xfrm>
+            <a:off x="457200" y="274320"/>
+            <a:ext cx="11247120" cy="822960"/>
+          </a:xfrm>
+          <a:prstGeom prst="rect">
+            <a:avLst/>
+          </a:prstGeom>
+          <a:noFill/>
+        </p:spPr>
+        <p:txBody>
+          <a:bodyPr wrap="none">
+            <a:spAutoFit/>
+          </a:bodyPr>
+          <a:lstStyle/>
+          <a:p>
+            <a:pPr>
+              <a:defRPr sz="4000" b="1">
+                <a:solidFill>
+                  <a:srgbClr val="FFFFFF"/>
+                </a:solidFill>
+              </a:defRPr>
+            </a:pPr>
+            <a:r>
+              <a:t>The "Done" Framework</a:t>
+            </a:r>
+          </a:p>
+        </p:txBody>
+      </p:sp>
+      <p:sp>
+        <p:nvSpPr>
+          <p:cNvPr id="3" name="TextBox 2"/>
+          <p:cNvSpPr txBox="1"/>
+          <p:nvPr/>
+        </p:nvSpPr>
+        <p:spPr>
+          <a:xfrm>
+            <a:off x="457200" y="1005840"/>
+            <a:ext cx="11247120" cy="457200"/>
+          </a:xfrm>
+          <a:prstGeom prst="rect">
+            <a:avLst/>
+          </a:prstGeom>
+          <a:noFill/>
+        </p:spPr>
+        <p:txBody>
+          <a:bodyPr wrap="none">
+            <a:spAutoFit/>
+          </a:bodyPr>
+          <a:lstStyle/>
+          <a:p>
+            <a:pPr>
+              <a:defRPr sz="1800" i="1">
+                <a:solidFill>
+                  <a:srgbClr val="9CA3AF"/>
+                </a:solidFill>
+              </a:defRPr>
+            </a:pPr>
+            <a:r>
+              <a:t>Before you delegate anything to AI, answer three questions</a:t>
+            </a:r>
+          </a:p>
+        </p:txBody>
+      </p:sp>
+      <p:sp>
+        <p:nvSpPr>
+          <p:cNvPr id="4" name="Oval 3"/>
+          <p:cNvSpPr/>
+          <p:nvPr/>
+        </p:nvSpPr>
+        <p:spPr>
+          <a:xfrm>
+            <a:off x="457200" y="1645920"/>
+            <a:ext cx="548640" cy="548640"/>
+          </a:xfrm>
+          <a:prstGeom prst="ellipse">
+            <a:avLst/>
+          </a:prstGeom>
+          <a:solidFill>
+            <a:srgbClr val="14B8A6"/>
+          </a:solidFill>
+          <a:ln>
+            <a:noFill/>
+          </a:ln>
+        </p:spPr>
+        <p:style>
+          <a:lnRef idx="1">
+            <a:schemeClr val="accent1"/>
+          </a:lnRef>
+          <a:fillRef idx="3">
+            <a:schemeClr val="accent1"/>
+          </a:fillRef>
+          <a:effectRef idx="2">
+            <a:schemeClr val="accent1"/>
+          </a:effectRef>
+          <a:fontRef idx="minor">
+            <a:schemeClr val="lt1"/>
+          </a:fontRef>
+        </p:style>
+        <p:txBody>
+          <a:bodyPr rtlCol="0" anchor="ctr"/>
+          <a:lstStyle/>
+          <a:p>
+            <a:pPr algn="ctr">
+              <a:defRPr sz="2200" b="1">
+                <a:solidFill>
+                  <a:srgbClr val="FFFFFF"/>
+                </a:solidFill>
+              </a:defRPr>
+            </a:pPr>
+            <a:r>
+              <a:t>1</a:t>
+            </a:r>
+          </a:p>
+        </p:txBody>
+      </p:sp>
+      <p:sp>
+        <p:nvSpPr>
+          <p:cNvPr id="5" name="TextBox 4"/>
+          <p:cNvSpPr txBox="1"/>
+          <p:nvPr/>
+        </p:nvSpPr>
+        <p:spPr>
+          <a:xfrm>
+            <a:off x="1188720" y="1554480"/>
+            <a:ext cx="3657600" cy="365760"/>
+          </a:xfrm>
+          <a:prstGeom prst="rect">
+            <a:avLst/>
+          </a:prstGeom>
+          <a:noFill/>
+        </p:spPr>
+        <p:txBody>
+          <a:bodyPr wrap="none">
+            <a:spAutoFit/>
+          </a:bodyPr>
+          <a:lstStyle/>
+          <a:p>
+            <a:pPr>
+              <a:defRPr sz="1800" b="1">
+                <a:solidFill>
+                  <a:srgbClr val="FFFFFF"/>
+                </a:solidFill>
+              </a:defRPr>
+            </a:pPr>
+            <a:r>
+              <a:t>What does "done" look like?</a:t>
+            </a:r>
+          </a:p>
+        </p:txBody>
+      </p:sp>
+      <p:sp>
+        <p:nvSpPr>
+          <p:cNvPr id="6" name="TextBox 5"/>
+          <p:cNvSpPr txBox="1"/>
+          <p:nvPr/>
+        </p:nvSpPr>
+        <p:spPr>
+          <a:xfrm>
+            <a:off x="1188720" y="1965960"/>
+            <a:ext cx="4572000" cy="365760"/>
+          </a:xfrm>
+          <a:prstGeom prst="rect">
+            <a:avLst/>
+          </a:prstGeom>
+          <a:noFill/>
+        </p:spPr>
+        <p:txBody>
+          <a:bodyPr wrap="none">
+            <a:spAutoFit/>
+          </a:bodyPr>
+          <a:lstStyle/>
+          <a:p>
+            <a:pPr>
+              <a:defRPr sz="1300">
+                <a:solidFill>
+                  <a:srgbClr val="9CA3AF"/>
+                </a:solidFill>
+              </a:defRPr>
+            </a:pPr>
+            <a:r>
+              <a:t>❌  "Create an expense report"</a:t>
+            </a:r>
+          </a:p>
+        </p:txBody>
+      </p:sp>
+      <p:sp>
+        <p:nvSpPr>
+          <p:cNvPr id="7" name="TextBox 6"/>
+          <p:cNvSpPr txBox="1"/>
+          <p:nvPr/>
+        </p:nvSpPr>
+        <p:spPr>
+          <a:xfrm>
+            <a:off x="6217920" y="1554480"/>
+            <a:ext cx="5486400" cy="1188720"/>
+          </a:xfrm>
+          <a:prstGeom prst="rect">
+            <a:avLst/>
+          </a:prstGeom>
+          <a:noFill/>
+        </p:spPr>
+        <p:txBody>
+          <a:bodyPr wrap="square">
+            <a:spAutoFit/>
+          </a:bodyPr>
+          <a:lstStyle/>
+          <a:p>
+            <a:pPr>
+              <a:defRPr sz="1300">
+                <a:solidFill>
+                  <a:srgbClr val="D1D5DB"/>
+                </a:solidFill>
+              </a:defRPr>
+            </a:pPr>
+            <a:r>
+              <a:t>✅  "Excel with columns for date, vendor,</a:t>
+            </a:r>
+            <a:br/>
+            <a:r>
+              <a:t>     amount, category — sorted by date,</a:t>
+            </a:r>
+            <a:br/>
+            <a:r>
+              <a:t>     sum total at bottom"</a:t>
+            </a:r>
+          </a:p>
+        </p:txBody>
+      </p:sp>
+      <p:sp>
+        <p:nvSpPr>
+          <p:cNvPr id="8" name="Oval 7"/>
+          <p:cNvSpPr/>
+          <p:nvPr/>
+        </p:nvSpPr>
+        <p:spPr>
+          <a:xfrm>
+            <a:off x="457200" y="3108960"/>
+            <a:ext cx="548640" cy="548640"/>
+          </a:xfrm>
+          <a:prstGeom prst="ellipse">
+            <a:avLst/>
+          </a:prstGeom>
+          <a:solidFill>
+            <a:srgbClr val="14B8A6"/>
+          </a:solidFill>
+          <a:ln>
+            <a:noFill/>
+          </a:ln>
+        </p:spPr>
+        <p:style>
+          <a:lnRef idx="1">
+            <a:schemeClr val="accent1"/>
+          </a:lnRef>
+          <a:fillRef idx="3">
+            <a:schemeClr val="accent1"/>
+          </a:fillRef>
+          <a:effectRef idx="2">
+            <a:schemeClr val="accent1"/>
+          </a:effectRef>
+          <a:fontRef idx="minor">
+            <a:schemeClr val="lt1"/>
+          </a:fontRef>
+        </p:style>
+        <p:txBody>
+          <a:bodyPr rtlCol="0" anchor="ctr"/>
+          <a:lstStyle/>
+          <a:p>
+            <a:pPr algn="ctr">
+              <a:defRPr sz="2200" b="1">
+                <a:solidFill>
+                  <a:srgbClr val="FFFFFF"/>
+                </a:solidFill>
+              </a:defRPr>
+            </a:pPr>
+            <a:r>
+              <a:t>2</a:t>
+            </a:r>
+          </a:p>
+        </p:txBody>
+      </p:sp>
+      <p:sp>
+        <p:nvSpPr>
+          <p:cNvPr id="9" name="TextBox 8"/>
+          <p:cNvSpPr txBox="1"/>
+          <p:nvPr/>
+        </p:nvSpPr>
+        <p:spPr>
+          <a:xfrm>
+            <a:off x="1188720" y="3017520"/>
+            <a:ext cx="3657600" cy="365760"/>
+          </a:xfrm>
+          <a:prstGeom prst="rect">
+            <a:avLst/>
+          </a:prstGeom>
+          <a:noFill/>
+        </p:spPr>
+        <p:txBody>
+          <a:bodyPr wrap="none">
+            <a:spAutoFit/>
+          </a:bodyPr>
+          <a:lstStyle/>
+          <a:p>
+            <a:pPr>
+              <a:defRPr sz="1800" b="1">
+                <a:solidFill>
+                  <a:srgbClr val="FFFFFF"/>
+                </a:solidFill>
+              </a:defRPr>
+            </a:pPr>
+            <a:r>
+              <a:t>What context does Claude need?</a:t>
+            </a:r>
+          </a:p>
+        </p:txBody>
+      </p:sp>
+      <p:sp>
+        <p:nvSpPr>
+          <p:cNvPr id="10" name="TextBox 9"/>
+          <p:cNvSpPr txBox="1"/>
+          <p:nvPr/>
+        </p:nvSpPr>
+        <p:spPr>
+          <a:xfrm>
+            <a:off x="1188720" y="3429000"/>
+            <a:ext cx="4572000" cy="365760"/>
+          </a:xfrm>
+          <a:prstGeom prst="rect">
+            <a:avLst/>
+          </a:prstGeom>
+          <a:noFill/>
+        </p:spPr>
+        <p:txBody>
+          <a:bodyPr wrap="none">
+            <a:spAutoFit/>
+          </a:bodyPr>
+          <a:lstStyle/>
+          <a:p>
+            <a:pPr>
+              <a:defRPr sz="1300">
+                <a:solidFill>
+                  <a:srgbClr val="9CA3AF"/>
+                </a:solidFill>
+              </a:defRPr>
+            </a:pPr>
+            <a:r>
+              <a:t>❌  (Assumes Claude knows your preferences)</a:t>
+            </a:r>
+          </a:p>
+        </p:txBody>
+      </p:sp>
+      <p:sp>
+        <p:nvSpPr>
+          <p:cNvPr id="11" name="TextBox 10"/>
+          <p:cNvSpPr txBox="1"/>
+          <p:nvPr/>
+        </p:nvSpPr>
+        <p:spPr>
+          <a:xfrm>
+            <a:off x="6217920" y="3017520"/>
+            <a:ext cx="5486400" cy="1188720"/>
+          </a:xfrm>
+          <a:prstGeom prst="rect">
+            <a:avLst/>
+          </a:prstGeom>
+          <a:noFill/>
+        </p:spPr>
+        <p:txBody>
+          <a:bodyPr wrap="square">
+            <a:spAutoFit/>
+          </a:bodyPr>
+          <a:lstStyle/>
+          <a:p>
+            <a:pPr>
+              <a:defRPr sz="1300">
+                <a:solidFill>
+                  <a:srgbClr val="D1D5DB"/>
+                </a:solidFill>
+              </a:defRPr>
+            </a:pPr>
+            <a:r>
+              <a:t>✅  "Use our company template.</a:t>
+            </a:r>
+            <a:br/>
+            <a:r>
+              <a:t>     Categories: Travel, Meals, Software,</a:t>
+            </a:r>
+            <a:br/>
+            <a:r>
+              <a:t>     Office. Flag anything over $500."</a:t>
+            </a:r>
+          </a:p>
+        </p:txBody>
+      </p:sp>
+      <p:sp>
+        <p:nvSpPr>
+          <p:cNvPr id="12" name="Oval 11"/>
+          <p:cNvSpPr/>
+          <p:nvPr/>
+        </p:nvSpPr>
+        <p:spPr>
+          <a:xfrm>
+            <a:off x="457200" y="4572000"/>
+            <a:ext cx="548640" cy="548640"/>
+          </a:xfrm>
+          <a:prstGeom prst="ellipse">
+            <a:avLst/>
+          </a:prstGeom>
+          <a:solidFill>
+            <a:srgbClr val="14B8A6"/>
+          </a:solidFill>
+          <a:ln>
+            <a:noFill/>
+          </a:ln>
+        </p:spPr>
+        <p:style>
+          <a:lnRef idx="1">
+            <a:schemeClr val="accent1"/>
+          </a:lnRef>
+          <a:fillRef idx="3">
+            <a:schemeClr val="accent1"/>
+          </a:fillRef>
+          <a:effectRef idx="2">
+            <a:schemeClr val="accent1"/>
+          </a:effectRef>
+          <a:fontRef idx="minor">
+            <a:schemeClr val="lt1"/>
+          </a:fontRef>
+        </p:style>
+        <p:txBody>
+          <a:bodyPr rtlCol="0" anchor="ctr"/>
+          <a:lstStyle/>
+          <a:p>
+            <a:pPr algn="ctr">
+              <a:defRPr sz="2200" b="1">
+                <a:solidFill>
+                  <a:srgbClr val="FFFFFF"/>
+                </a:solidFill>
+              </a:defRPr>
+            </a:pPr>
+            <a:r>
+              <a:t>3</a:t>
+            </a:r>
+          </a:p>
+        </p:txBody>
+      </p:sp>
+      <p:sp>
+        <p:nvSpPr>
+          <p:cNvPr id="13" name="TextBox 12"/>
+          <p:cNvSpPr txBox="1"/>
+          <p:nvPr/>
+        </p:nvSpPr>
+        <p:spPr>
+          <a:xfrm>
+            <a:off x="1188720" y="4480560"/>
+            <a:ext cx="3657600" cy="365760"/>
+          </a:xfrm>
+          <a:prstGeom prst="rect">
+            <a:avLst/>
+          </a:prstGeom>
+          <a:noFill/>
+        </p:spPr>
+        <p:txBody>
+          <a:bodyPr wrap="none">
+            <a:spAutoFit/>
+          </a:bodyPr>
+          <a:lstStyle/>
+          <a:p>
+            <a:pPr>
+              <a:defRPr sz="1800" b="1">
+                <a:solidFill>
+                  <a:srgbClr val="FFFFFF"/>
+                </a:solidFill>
+              </a:defRPr>
+            </a:pPr>
+            <a:r>
+              <a:t>What constraints matter?</a:t>
+            </a:r>
+          </a:p>
+        </p:txBody>
+      </p:sp>
+      <p:sp>
+        <p:nvSpPr>
+          <p:cNvPr id="14" name="TextBox 13"/>
+          <p:cNvSpPr txBox="1"/>
+          <p:nvPr/>
+        </p:nvSpPr>
+        <p:spPr>
+          <a:xfrm>
+            <a:off x="1188720" y="4892040"/>
+            <a:ext cx="4572000" cy="365760"/>
+          </a:xfrm>
+          <a:prstGeom prst="rect">
+            <a:avLst/>
+          </a:prstGeom>
+          <a:noFill/>
+        </p:spPr>
+        <p:txBody>
+          <a:bodyPr wrap="none">
+            <a:spAutoFit/>
+          </a:bodyPr>
+          <a:lstStyle/>
+          <a:p>
+            <a:pPr>
+              <a:defRPr sz="1300">
+                <a:solidFill>
+                  <a:srgbClr val="9CA3AF"/>
+                </a:solidFill>
+              </a:defRPr>
+            </a:pPr>
+            <a:r>
+              <a:t>❌  (No boundaries stated)</a:t>
+            </a:r>
+          </a:p>
+        </p:txBody>
+      </p:sp>
+      <p:sp>
+        <p:nvSpPr>
+          <p:cNvPr id="15" name="TextBox 14"/>
+          <p:cNvSpPr txBox="1"/>
+          <p:nvPr/>
+        </p:nvSpPr>
+        <p:spPr>
+          <a:xfrm>
+            <a:off x="6217920" y="4480560"/>
+            <a:ext cx="5486400" cy="1188720"/>
+          </a:xfrm>
+          <a:prstGeom prst="rect">
+            <a:avLst/>
+          </a:prstGeom>
+          <a:noFill/>
+        </p:spPr>
+        <p:txBody>
+          <a:bodyPr wrap="square">
+            <a:spAutoFit/>
+          </a:bodyPr>
+          <a:lstStyle/>
+          <a:p>
+            <a:pPr>
+              <a:defRPr sz="1300">
+                <a:solidFill>
+                  <a:srgbClr val="D1D5DB"/>
+                </a:solidFill>
+              </a:defRPr>
+            </a:pPr>
+            <a:r>
+              <a:t>✅  "Don't delete any files, just move them.</a:t>
+            </a:r>
+            <a:br/>
+            <a:r>
+              <a:t>     Keep original filenames with date prefix.</a:t>
+            </a:r>
+            <a:br/>
+            <a:r>
+              <a:t>     Only process files from the last 90 days."</a:t>
+            </a:r>
+          </a:p>
+        </p:txBody>
+      </p:sp>
+      <p:sp>
+        <p:nvSpPr>
+          <p:cNvPr id="16" name="TextBox 15"/>
+          <p:cNvSpPr txBox="1"/>
+          <p:nvPr/>
+        </p:nvSpPr>
+        <p:spPr>
+          <a:xfrm>
+            <a:off x="457200" y="5852160"/>
+            <a:ext cx="11247120" cy="365760"/>
+          </a:xfrm>
+          <a:prstGeom prst="rect">
+            <a:avLst/>
+          </a:prstGeom>
+          <a:noFill/>
+        </p:spPr>
+        <p:txBody>
+          <a:bodyPr wrap="none">
+            <a:spAutoFit/>
+          </a:bodyPr>
+          <a:lstStyle/>
+          <a:p>
+            <a:pPr algn="ctr">
+              <a:defRPr sz="1500" i="1">
+                <a:solidFill>
+                  <a:srgbClr val="14B8A6"/>
+                </a:solidFill>
+              </a:defRPr>
+            </a:pPr>
+            <a:r>
+              <a:t>Golden rule: Always say "don't delete anything" unless you specifically want deletions</a:t>
+            </a:r>
+          </a:p>
+        </p:txBody>
+      </p:sp>
+    </p:spTree>
+  </p:cSld>
+  <p:clrMapOvr>
+    <a:masterClrMapping/>
+  </p:clrMapOvr>
+</p:sld>
+</file>
+
+<file path=ppt/slides/slide97.xml><?xml version="1.0" encoding="utf-8"?>
+<p:sld xmlns:a="http://schemas.openxmlformats.org/drawingml/2006/main" xmlns:p="http://schemas.openxmlformats.org/presentationml/2006/main" xmlns:r="http://schemas.openxmlformats.org/officeDocument/2006/relationships">
+  <p:cSld>
+    <p:bg>
+      <p:bgPr>
+        <a:solidFill>
+          <a:srgbClr val="0B0F1A"/>
+        </a:solidFill>
+        <a:effectLst/>
+      </p:bgPr>
+    </p:bg>
+    <p:spTree>
+      <p:nvGrpSpPr>
+        <p:cNvPr id="1" name=""/>
+        <p:cNvGrpSpPr/>
+        <p:nvPr/>
+      </p:nvGrpSpPr>
+      <p:grpSpPr/>
+      <p:sp>
+        <p:nvSpPr>
+          <p:cNvPr id="2" name="TextBox 1"/>
+          <p:cNvSpPr txBox="1"/>
+          <p:nvPr/>
+        </p:nvSpPr>
+        <p:spPr>
+          <a:xfrm>
+            <a:off x="457200" y="274320"/>
+            <a:ext cx="11247120" cy="822960"/>
+          </a:xfrm>
+          <a:prstGeom prst="rect">
+            <a:avLst/>
+          </a:prstGeom>
+          <a:noFill/>
+        </p:spPr>
+        <p:txBody>
+          <a:bodyPr wrap="none">
+            <a:spAutoFit/>
+          </a:bodyPr>
+          <a:lstStyle/>
+          <a:p>
+            <a:pPr>
+              <a:defRPr sz="4000" b="1">
+                <a:solidFill>
+                  <a:srgbClr val="FFFFFF"/>
+                </a:solidFill>
+              </a:defRPr>
+            </a:pPr>
+            <a:r>
+              <a:t>The AI Employee Mindset</a:t>
+            </a:r>
+          </a:p>
+        </p:txBody>
+      </p:sp>
+      <p:sp>
+        <p:nvSpPr>
+          <p:cNvPr id="3" name="TextBox 2"/>
+          <p:cNvSpPr txBox="1"/>
+          <p:nvPr/>
+        </p:nvSpPr>
+        <p:spPr>
+          <a:xfrm>
+            <a:off x="457200" y="1005840"/>
+            <a:ext cx="11247120" cy="457200"/>
+          </a:xfrm>
+          <a:prstGeom prst="rect">
+            <a:avLst/>
+          </a:prstGeom>
+          <a:noFill/>
+        </p:spPr>
+        <p:txBody>
+          <a:bodyPr wrap="none">
+            <a:spAutoFit/>
+          </a:bodyPr>
+          <a:lstStyle/>
+          <a:p>
+            <a:pPr>
+              <a:defRPr sz="1800" i="1">
+                <a:solidFill>
+                  <a:srgbClr val="9CA3AF"/>
+                </a:solidFill>
+              </a:defRPr>
+            </a:pPr>
+            <a:r>
+              <a:t>Stop chatting. Start delegating.</a:t>
+            </a:r>
+          </a:p>
+        </p:txBody>
+      </p:sp>
+      <p:sp>
+        <p:nvSpPr>
+          <p:cNvPr id="4" name="Rounded Rectangle 3"/>
+          <p:cNvSpPr/>
+          <p:nvPr/>
+        </p:nvSpPr>
+        <p:spPr>
+          <a:xfrm>
+            <a:off x="457200" y="1645920"/>
+            <a:ext cx="5303520" cy="4114800"/>
+          </a:xfrm>
+          <a:prstGeom prst="roundRect">
+            <a:avLst/>
+          </a:prstGeom>
+          <a:solidFill>
+            <a:srgbClr val="141A2A"/>
+          </a:solidFill>
+          <a:ln w="19050">
+            <a:solidFill>
+              <a:srgbClr val="EF4444"/>
+            </a:solidFill>
+          </a:ln>
+        </p:spPr>
+        <p:style>
+          <a:lnRef idx="1">
+            <a:schemeClr val="accent1"/>
+          </a:lnRef>
+          <a:fillRef idx="3">
+            <a:schemeClr val="accent1"/>
+          </a:fillRef>
+          <a:effectRef idx="2">
+            <a:schemeClr val="accent1"/>
+          </a:effectRef>
+          <a:fontRef idx="minor">
+            <a:schemeClr val="lt1"/>
+          </a:fontRef>
+        </p:style>
+        <p:txBody>
+          <a:bodyPr rtlCol="0" anchor="ctr"/>
+          <a:lstStyle/>
+          <a:p>
+            <a:pPr algn="ctr"/>
+          </a:p>
+        </p:txBody>
+      </p:sp>
+      <p:sp>
+        <p:nvSpPr>
+          <p:cNvPr id="5" name="TextBox 4"/>
+          <p:cNvSpPr txBox="1"/>
+          <p:nvPr/>
+        </p:nvSpPr>
+        <p:spPr>
+          <a:xfrm>
+            <a:off x="731520" y="1828800"/>
+            <a:ext cx="4754880" cy="457200"/>
+          </a:xfrm>
+          <a:prstGeom prst="rect">
+            <a:avLst/>
+          </a:prstGeom>
+          <a:noFill/>
+        </p:spPr>
+        <p:txBody>
+          <a:bodyPr wrap="none">
+            <a:spAutoFit/>
+          </a:bodyPr>
+          <a:lstStyle/>
+          <a:p>
+            <a:pPr>
+              <a:defRPr sz="2000" b="1">
+                <a:solidFill>
+                  <a:srgbClr val="EF4444"/>
+                </a:solidFill>
+              </a:defRPr>
+            </a:pPr>
+            <a:r>
+              <a:t>❌ Chatbot Thinking</a:t>
+            </a:r>
+          </a:p>
+        </p:txBody>
+      </p:sp>
+      <p:sp>
+        <p:nvSpPr>
+          <p:cNvPr id="6" name="TextBox 5"/>
+          <p:cNvSpPr txBox="1"/>
+          <p:nvPr/>
+        </p:nvSpPr>
+        <p:spPr>
+          <a:xfrm>
+            <a:off x="731520" y="2468880"/>
+            <a:ext cx="4754880" cy="457200"/>
+          </a:xfrm>
+          <a:prstGeom prst="rect">
+            <a:avLst/>
+          </a:prstGeom>
+          <a:noFill/>
+        </p:spPr>
+        <p:txBody>
+          <a:bodyPr wrap="none">
+            <a:spAutoFit/>
+          </a:bodyPr>
+          <a:lstStyle/>
+          <a:p>
+            <a:pPr>
+              <a:defRPr sz="1500">
+                <a:solidFill>
+                  <a:srgbClr val="9CA3AF"/>
+                </a:solidFill>
+              </a:defRPr>
+            </a:pPr>
+            <a:r>
+              <a:t>Give task → Wait → Get result</a:t>
+            </a:r>
+          </a:p>
+        </p:txBody>
+      </p:sp>
+      <p:sp>
+        <p:nvSpPr>
+          <p:cNvPr id="7" name="TextBox 6"/>
+          <p:cNvSpPr txBox="1"/>
+          <p:nvPr/>
+        </p:nvSpPr>
+        <p:spPr>
+          <a:xfrm>
+            <a:off x="731520" y="2926080"/>
+            <a:ext cx="4754880" cy="457200"/>
+          </a:xfrm>
+          <a:prstGeom prst="rect">
+            <a:avLst/>
+          </a:prstGeom>
+          <a:noFill/>
+        </p:spPr>
+        <p:txBody>
+          <a:bodyPr wrap="none">
+            <a:spAutoFit/>
+          </a:bodyPr>
+          <a:lstStyle/>
+          <a:p>
+            <a:pPr>
+              <a:defRPr sz="1500">
+                <a:solidFill>
+                  <a:srgbClr val="9CA3AF"/>
+                </a:solidFill>
+              </a:defRPr>
+            </a:pPr>
+            <a:r>
+              <a:t>Give next task → Wait → Get result</a:t>
+            </a:r>
+          </a:p>
+        </p:txBody>
+      </p:sp>
+      <p:sp>
+        <p:nvSpPr>
+          <p:cNvPr id="8" name="TextBox 7"/>
+          <p:cNvSpPr txBox="1"/>
+          <p:nvPr/>
+        </p:nvSpPr>
+        <p:spPr>
+          <a:xfrm>
+            <a:off x="731520" y="3383280"/>
+            <a:ext cx="4754880" cy="457200"/>
+          </a:xfrm>
+          <a:prstGeom prst="rect">
+            <a:avLst/>
+          </a:prstGeom>
+          <a:noFill/>
+        </p:spPr>
+        <p:txBody>
+          <a:bodyPr wrap="none">
+            <a:spAutoFit/>
+          </a:bodyPr>
+          <a:lstStyle/>
+          <a:p>
+            <a:pPr>
+              <a:defRPr sz="1500">
+                <a:solidFill>
+                  <a:srgbClr val="9CA3AF"/>
+                </a:solidFill>
+              </a:defRPr>
+            </a:pPr>
+            <a:r>
+              <a:t>Give next task → Wait → Get result</a:t>
+            </a:r>
+          </a:p>
+        </p:txBody>
+      </p:sp>
+      <p:sp>
+        <p:nvSpPr>
+          <p:cNvPr id="9" name="TextBox 8"/>
+          <p:cNvSpPr txBox="1"/>
+          <p:nvPr/>
+        </p:nvSpPr>
+        <p:spPr>
+          <a:xfrm>
+            <a:off x="731520" y="3840480"/>
+            <a:ext cx="4754880" cy="457200"/>
+          </a:xfrm>
+          <a:prstGeom prst="rect">
+            <a:avLst/>
+          </a:prstGeom>
+          <a:noFill/>
+        </p:spPr>
+        <p:txBody>
+          <a:bodyPr wrap="none">
+            <a:spAutoFit/>
+          </a:bodyPr>
+          <a:lstStyle/>
+          <a:p>
+            <a:pPr>
+              <a:defRPr sz="1500">
+                <a:solidFill>
+                  <a:srgbClr val="9CA3AF"/>
+                </a:solidFill>
+              </a:defRPr>
+            </a:pPr>
+          </a:p>
+        </p:txBody>
+      </p:sp>
+      <p:sp>
+        <p:nvSpPr>
+          <p:cNvPr id="10" name="TextBox 9"/>
+          <p:cNvSpPr txBox="1"/>
+          <p:nvPr/>
+        </p:nvSpPr>
+        <p:spPr>
+          <a:xfrm>
+            <a:off x="731520" y="4297680"/>
+            <a:ext cx="4754880" cy="457200"/>
+          </a:xfrm>
+          <a:prstGeom prst="rect">
+            <a:avLst/>
+          </a:prstGeom>
+          <a:noFill/>
+        </p:spPr>
+        <p:txBody>
+          <a:bodyPr wrap="none">
+            <a:spAutoFit/>
+          </a:bodyPr>
+          <a:lstStyle/>
+          <a:p>
+            <a:pPr>
+              <a:defRPr sz="1500">
+                <a:solidFill>
+                  <a:srgbClr val="EF4444"/>
+                </a:solidFill>
+              </a:defRPr>
+            </a:pPr>
+            <a:r>
+              <a:t>3 sessions. 3 waits. Fragmented context.</a:t>
+            </a:r>
+          </a:p>
+        </p:txBody>
+      </p:sp>
+      <p:sp>
+        <p:nvSpPr>
+          <p:cNvPr id="11" name="Rounded Rectangle 10"/>
+          <p:cNvSpPr/>
+          <p:nvPr/>
+        </p:nvSpPr>
+        <p:spPr>
+          <a:xfrm>
+            <a:off x="6217920" y="1645920"/>
+            <a:ext cx="5303520" cy="4114800"/>
+          </a:xfrm>
+          <a:prstGeom prst="roundRect">
+            <a:avLst/>
+          </a:prstGeom>
+          <a:solidFill>
+            <a:srgbClr val="141A2A"/>
+          </a:solidFill>
+          <a:ln w="19050">
+            <a:solidFill>
+              <a:srgbClr val="14B8A6"/>
+            </a:solidFill>
+          </a:ln>
+        </p:spPr>
+        <p:style>
+          <a:lnRef idx="1">
+            <a:schemeClr val="accent1"/>
+          </a:lnRef>
+          <a:fillRef idx="3">
+            <a:schemeClr val="accent1"/>
+          </a:fillRef>
+          <a:effectRef idx="2">
+            <a:schemeClr val="accent1"/>
+          </a:effectRef>
+          <a:fontRef idx="minor">
+            <a:schemeClr val="lt1"/>
+          </a:fontRef>
+        </p:style>
+        <p:txBody>
+          <a:bodyPr rtlCol="0" anchor="ctr"/>
+          <a:lstStyle/>
+          <a:p>
+            <a:pPr algn="ctr"/>
+          </a:p>
+        </p:txBody>
+      </p:sp>
+      <p:sp>
+        <p:nvSpPr>
+          <p:cNvPr id="12" name="TextBox 11"/>
+          <p:cNvSpPr txBox="1"/>
+          <p:nvPr/>
+        </p:nvSpPr>
+        <p:spPr>
+          <a:xfrm>
+            <a:off x="6492240" y="1828800"/>
+            <a:ext cx="4754880" cy="457200"/>
+          </a:xfrm>
+          <a:prstGeom prst="rect">
+            <a:avLst/>
+          </a:prstGeom>
+          <a:noFill/>
+        </p:spPr>
+        <p:txBody>
+          <a:bodyPr wrap="none">
+            <a:spAutoFit/>
+          </a:bodyPr>
+          <a:lstStyle/>
+          <a:p>
+            <a:pPr>
+              <a:defRPr sz="2000" b="1">
+                <a:solidFill>
+                  <a:srgbClr val="14B8A6"/>
+                </a:solidFill>
+              </a:defRPr>
+            </a:pPr>
+            <a:r>
+              <a:t>✅ AI Employee Thinking</a:t>
+            </a:r>
+          </a:p>
+        </p:txBody>
+      </p:sp>
+      <p:sp>
+        <p:nvSpPr>
+          <p:cNvPr id="13" name="TextBox 12"/>
+          <p:cNvSpPr txBox="1"/>
+          <p:nvPr/>
+        </p:nvSpPr>
+        <p:spPr>
+          <a:xfrm>
+            <a:off x="6492240" y="2468880"/>
+            <a:ext cx="4754880" cy="457200"/>
+          </a:xfrm>
+          <a:prstGeom prst="rect">
+            <a:avLst/>
+          </a:prstGeom>
+          <a:noFill/>
+        </p:spPr>
+        <p:txBody>
+          <a:bodyPr wrap="none">
+            <a:spAutoFit/>
+          </a:bodyPr>
+          <a:lstStyle/>
+          <a:p>
+            <a:pPr>
+              <a:defRPr sz="1500">
+                <a:solidFill>
+                  <a:srgbClr val="D1D5DB"/>
+                </a:solidFill>
+              </a:defRPr>
+            </a:pPr>
+            <a:r>
+              <a:t>Brain dump ALL tasks in one prompt</a:t>
+            </a:r>
+          </a:p>
+        </p:txBody>
+      </p:sp>
+      <p:sp>
+        <p:nvSpPr>
+          <p:cNvPr id="14" name="TextBox 13"/>
+          <p:cNvSpPr txBox="1"/>
+          <p:nvPr/>
+        </p:nvSpPr>
+        <p:spPr>
+          <a:xfrm>
+            <a:off x="6492240" y="2926080"/>
+            <a:ext cx="4754880" cy="457200"/>
+          </a:xfrm>
+          <a:prstGeom prst="rect">
+            <a:avLst/>
+          </a:prstGeom>
+          <a:noFill/>
+        </p:spPr>
+        <p:txBody>
+          <a:bodyPr wrap="none">
+            <a:spAutoFit/>
+          </a:bodyPr>
+          <a:lstStyle/>
+          <a:p>
+            <a:pPr>
+              <a:defRPr sz="1500">
+                <a:solidFill>
+                  <a:srgbClr val="D1D5DB"/>
+                </a:solidFill>
+              </a:defRPr>
+            </a:pPr>
+            <a:r>
+              <a:t>Hand off → Go do your real work</a:t>
+            </a:r>
+          </a:p>
+        </p:txBody>
+      </p:sp>
+      <p:sp>
+        <p:nvSpPr>
+          <p:cNvPr id="15" name="TextBox 14"/>
+          <p:cNvSpPr txBox="1"/>
+          <p:nvPr/>
+        </p:nvSpPr>
+        <p:spPr>
+          <a:xfrm>
+            <a:off x="6492240" y="3383280"/>
+            <a:ext cx="4754880" cy="457200"/>
+          </a:xfrm>
+          <a:prstGeom prst="rect">
+            <a:avLst/>
+          </a:prstGeom>
+          <a:noFill/>
+        </p:spPr>
+        <p:txBody>
+          <a:bodyPr wrap="none">
+            <a:spAutoFit/>
+          </a:bodyPr>
+          <a:lstStyle/>
+          <a:p>
+            <a:pPr>
+              <a:defRPr sz="1500">
+                <a:solidFill>
+                  <a:srgbClr val="D1D5DB"/>
+                </a:solidFill>
+              </a:defRPr>
+            </a:pPr>
+            <a:r>
+              <a:t>Come back to finished results</a:t>
+            </a:r>
+          </a:p>
+        </p:txBody>
+      </p:sp>
+      <p:sp>
+        <p:nvSpPr>
+          <p:cNvPr id="16" name="TextBox 15"/>
+          <p:cNvSpPr txBox="1"/>
+          <p:nvPr/>
+        </p:nvSpPr>
+        <p:spPr>
+          <a:xfrm>
+            <a:off x="6492240" y="3840480"/>
+            <a:ext cx="4754880" cy="457200"/>
+          </a:xfrm>
+          <a:prstGeom prst="rect">
+            <a:avLst/>
+          </a:prstGeom>
+          <a:noFill/>
+        </p:spPr>
+        <p:txBody>
+          <a:bodyPr wrap="none">
+            <a:spAutoFit/>
+          </a:bodyPr>
+          <a:lstStyle/>
+          <a:p>
+            <a:pPr>
+              <a:defRPr sz="1500">
+                <a:solidFill>
+                  <a:srgbClr val="D1D5DB"/>
+                </a:solidFill>
+              </a:defRPr>
+            </a:pPr>
+            <a:r>
+              <a:t>Review → Give feedback → Iterate</a:t>
+            </a:r>
+          </a:p>
+        </p:txBody>
+      </p:sp>
+      <p:sp>
+        <p:nvSpPr>
+          <p:cNvPr id="17" name="TextBox 16"/>
+          <p:cNvSpPr txBox="1"/>
+          <p:nvPr/>
+        </p:nvSpPr>
+        <p:spPr>
+          <a:xfrm>
+            <a:off x="6492240" y="4297680"/>
+            <a:ext cx="4754880" cy="457200"/>
+          </a:xfrm>
+          <a:prstGeom prst="rect">
+            <a:avLst/>
+          </a:prstGeom>
+          <a:noFill/>
+        </p:spPr>
+        <p:txBody>
+          <a:bodyPr wrap="none">
+            <a:spAutoFit/>
+          </a:bodyPr>
+          <a:lstStyle/>
+          <a:p>
+            <a:pPr>
+              <a:defRPr sz="1500">
+                <a:solidFill>
+                  <a:srgbClr val="14B8A6"/>
+                </a:solidFill>
+              </a:defRPr>
+            </a:pPr>
+            <a:r>
+              <a:t>1 session. Batched. Full context.</a:t>
             </a:r>
           </a:p>
         </p:txBody>
